--- a/Angular & type script/Angular.pptx
+++ b/Angular & type script/Angular.pptx
@@ -321,7 +321,7 @@
           <a:p>
             <a:fld id="{BFD97FD3-0E3C-4940-AC08-248FE3BAAF7F}" type="datetimeFigureOut">
               <a:rPr lang="en-US" smtClean="0"/>
-              <a:t>2/11/2026</a:t>
+              <a:t>3/4/2026</a:t>
             </a:fld>
             <a:endParaRPr lang="en-US"/>
           </a:p>
@@ -619,7 +619,7 @@
           <a:p>
             <a:fld id="{BFD97FD3-0E3C-4940-AC08-248FE3BAAF7F}" type="datetimeFigureOut">
               <a:rPr lang="en-US" smtClean="0"/>
-              <a:t>2/11/2026</a:t>
+              <a:t>3/4/2026</a:t>
             </a:fld>
             <a:endParaRPr lang="en-US"/>
           </a:p>
@@ -811,7 +811,7 @@
           <a:p>
             <a:fld id="{BFD97FD3-0E3C-4940-AC08-248FE3BAAF7F}" type="datetimeFigureOut">
               <a:rPr lang="en-US" smtClean="0"/>
-              <a:t>2/11/2026</a:t>
+              <a:t>3/4/2026</a:t>
             </a:fld>
             <a:endParaRPr lang="en-US"/>
           </a:p>
@@ -1072,7 +1072,7 @@
           <a:p>
             <a:fld id="{BFD97FD3-0E3C-4940-AC08-248FE3BAAF7F}" type="datetimeFigureOut">
               <a:rPr lang="en-US" smtClean="0"/>
-              <a:t>2/11/2026</a:t>
+              <a:t>3/4/2026</a:t>
             </a:fld>
             <a:endParaRPr lang="en-US"/>
           </a:p>
@@ -1496,7 +1496,7 @@
           <a:p>
             <a:fld id="{BFD97FD3-0E3C-4940-AC08-248FE3BAAF7F}" type="datetimeFigureOut">
               <a:rPr lang="en-US" smtClean="0"/>
-              <a:t>2/11/2026</a:t>
+              <a:t>3/4/2026</a:t>
             </a:fld>
             <a:endParaRPr lang="en-US"/>
           </a:p>
@@ -2033,7 +2033,7 @@
           <a:p>
             <a:fld id="{BFD97FD3-0E3C-4940-AC08-248FE3BAAF7F}" type="datetimeFigureOut">
               <a:rPr lang="en-US" smtClean="0"/>
-              <a:t>2/11/2026</a:t>
+              <a:t>3/4/2026</a:t>
             </a:fld>
             <a:endParaRPr lang="en-US"/>
           </a:p>
@@ -2897,7 +2897,7 @@
           <a:p>
             <a:fld id="{BFD97FD3-0E3C-4940-AC08-248FE3BAAF7F}" type="datetimeFigureOut">
               <a:rPr lang="en-US" smtClean="0"/>
-              <a:t>2/11/2026</a:t>
+              <a:t>3/4/2026</a:t>
             </a:fld>
             <a:endParaRPr lang="en-US"/>
           </a:p>
@@ -3067,7 +3067,7 @@
           <a:p>
             <a:fld id="{BFD97FD3-0E3C-4940-AC08-248FE3BAAF7F}" type="datetimeFigureOut">
               <a:rPr lang="en-US" smtClean="0"/>
-              <a:t>2/11/2026</a:t>
+              <a:t>3/4/2026</a:t>
             </a:fld>
             <a:endParaRPr lang="en-US"/>
           </a:p>
@@ -3251,7 +3251,7 @@
           <a:p>
             <a:fld id="{BFD97FD3-0E3C-4940-AC08-248FE3BAAF7F}" type="datetimeFigureOut">
               <a:rPr lang="en-US" smtClean="0"/>
-              <a:t>2/11/2026</a:t>
+              <a:t>3/4/2026</a:t>
             </a:fld>
             <a:endParaRPr lang="en-US"/>
           </a:p>
@@ -3421,7 +3421,7 @@
           <a:p>
             <a:fld id="{BFD97FD3-0E3C-4940-AC08-248FE3BAAF7F}" type="datetimeFigureOut">
               <a:rPr lang="en-US" smtClean="0"/>
-              <a:t>2/11/2026</a:t>
+              <a:t>3/4/2026</a:t>
             </a:fld>
             <a:endParaRPr lang="en-US"/>
           </a:p>
@@ -3665,7 +3665,7 @@
           <a:p>
             <a:fld id="{BFD97FD3-0E3C-4940-AC08-248FE3BAAF7F}" type="datetimeFigureOut">
               <a:rPr lang="en-US" smtClean="0"/>
-              <a:t>2/11/2026</a:t>
+              <a:t>3/4/2026</a:t>
             </a:fld>
             <a:endParaRPr lang="en-US"/>
           </a:p>
@@ -3901,7 +3901,7 @@
           <a:p>
             <a:fld id="{BFD97FD3-0E3C-4940-AC08-248FE3BAAF7F}" type="datetimeFigureOut">
               <a:rPr lang="en-US" smtClean="0"/>
-              <a:t>2/11/2026</a:t>
+              <a:t>3/4/2026</a:t>
             </a:fld>
             <a:endParaRPr lang="en-US"/>
           </a:p>
@@ -4367,7 +4367,7 @@
           <a:p>
             <a:fld id="{BFD97FD3-0E3C-4940-AC08-248FE3BAAF7F}" type="datetimeFigureOut">
               <a:rPr lang="en-US" smtClean="0"/>
-              <a:t>2/11/2026</a:t>
+              <a:t>3/4/2026</a:t>
             </a:fld>
             <a:endParaRPr lang="en-US"/>
           </a:p>
@@ -4485,7 +4485,7 @@
           <a:p>
             <a:fld id="{BFD97FD3-0E3C-4940-AC08-248FE3BAAF7F}" type="datetimeFigureOut">
               <a:rPr lang="en-US" smtClean="0"/>
-              <a:t>2/11/2026</a:t>
+              <a:t>3/4/2026</a:t>
             </a:fld>
             <a:endParaRPr lang="en-US"/>
           </a:p>
@@ -4580,7 +4580,7 @@
           <a:p>
             <a:fld id="{BFD97FD3-0E3C-4940-AC08-248FE3BAAF7F}" type="datetimeFigureOut">
               <a:rPr lang="en-US" smtClean="0"/>
-              <a:t>2/11/2026</a:t>
+              <a:t>3/4/2026</a:t>
             </a:fld>
             <a:endParaRPr lang="en-US"/>
           </a:p>
@@ -4835,7 +4835,7 @@
           <a:p>
             <a:fld id="{BFD97FD3-0E3C-4940-AC08-248FE3BAAF7F}" type="datetimeFigureOut">
               <a:rPr lang="en-US" smtClean="0"/>
-              <a:t>2/11/2026</a:t>
+              <a:t>3/4/2026</a:t>
             </a:fld>
             <a:endParaRPr lang="en-US"/>
           </a:p>
@@ -5135,7 +5135,7 @@
           <a:p>
             <a:fld id="{BFD97FD3-0E3C-4940-AC08-248FE3BAAF7F}" type="datetimeFigureOut">
               <a:rPr lang="en-US" smtClean="0"/>
-              <a:t>2/11/2026</a:t>
+              <a:t>3/4/2026</a:t>
             </a:fld>
             <a:endParaRPr lang="en-US"/>
           </a:p>
@@ -5369,7 +5369,7 @@
           <a:p>
             <a:fld id="{BFD97FD3-0E3C-4940-AC08-248FE3BAAF7F}" type="datetimeFigureOut">
               <a:rPr lang="en-US" smtClean="0"/>
-              <a:t>2/11/2026</a:t>
+              <a:t>3/4/2026</a:t>
             </a:fld>
             <a:endParaRPr lang="en-US"/>
           </a:p>
@@ -6694,7 +6694,11 @@
           <a:lstStyle/>
           <a:p>
             <a:r>
-              <a:rPr lang="en-US" dirty="0"/>
+              <a:rPr lang="en-US" b="1" dirty="0">
+                <a:solidFill>
+                  <a:srgbClr val="FF0000"/>
+                </a:solidFill>
+              </a:rPr>
               <a:t>Observable</a:t>
             </a:r>
           </a:p>
@@ -6853,8 +6857,8 @@
         </p:nvSpPr>
         <p:spPr>
           <a:xfrm>
-            <a:off x="324464" y="599769"/>
-            <a:ext cx="11641393" cy="5997676"/>
+            <a:off x="108156" y="599769"/>
+            <a:ext cx="11759380" cy="6105832"/>
           </a:xfrm>
         </p:spPr>
         <p:txBody>
@@ -6891,24 +6895,22 @@
             <a:endParaRPr lang="en-US" dirty="0"/>
           </a:p>
           <a:p>
-            <a:endParaRPr lang="en-US" dirty="0"/>
-          </a:p>
-          <a:p>
             <a:pPr marL="36900" indent="0">
               <a:buNone/>
             </a:pPr>
-            <a:endParaRPr lang="en-US" dirty="0"/>
-          </a:p>
-          <a:p>
-            <a:endParaRPr lang="en-US" dirty="0"/>
-          </a:p>
-          <a:p>
-            <a:endParaRPr lang="en-US" dirty="0"/>
-          </a:p>
-          <a:p>
+            <a:endParaRPr lang="en-US"/>
+          </a:p>
+          <a:p>
+            <a:endParaRPr lang="en-US"/>
+          </a:p>
+          <a:p>
+            <a:r>
+              <a:rPr lang="en-US"/>
+              <a:t>The </a:t>
+            </a:r>
             <a:r>
               <a:rPr lang="en-US" dirty="0"/>
-              <a:t>The object passed inside the </a:t>
+              <a:t>object passed inside the </a:t>
             </a:r>
             <a:r>
               <a:rPr lang="en-US" b="1" dirty="0">
@@ -6920,10 +6922,14 @@
             </a:r>
             <a:r>
               <a:rPr lang="en-US" dirty="0"/>
-              <a:t> method is the </a:t>
-            </a:r>
-            <a:r>
-              <a:rPr lang="en-US" b="1" dirty="0">
+              <a:t> method is </a:t>
+            </a:r>
+            <a:r>
+              <a:rPr lang="en-US"/>
+              <a:t>the </a:t>
+            </a:r>
+            <a:r>
+              <a:rPr lang="en-US" b="1">
                 <a:solidFill>
                   <a:srgbClr val="FFFF00"/>
                 </a:solidFill>
@@ -6955,8 +6961,38 @@
         </p:blipFill>
         <p:spPr>
           <a:xfrm>
-            <a:off x="324464" y="1253367"/>
-            <a:ext cx="5275062" cy="2433820"/>
+            <a:off x="324464" y="995180"/>
+            <a:ext cx="4176416" cy="1926924"/>
+          </a:xfrm>
+          <a:prstGeom prst="rect">
+            <a:avLst/>
+          </a:prstGeom>
+        </p:spPr>
+      </p:pic>
+      <p:pic>
+        <p:nvPicPr>
+          <p:cNvPr id="5" name="Picture 4">
+            <a:extLst>
+              <a:ext uri="{FF2B5EF4-FFF2-40B4-BE49-F238E27FC236}">
+                <a16:creationId xmlns:a16="http://schemas.microsoft.com/office/drawing/2014/main" id="{4F8F0157-5E2D-F2CD-B55F-8D421DA4F5E5}"/>
+              </a:ext>
+            </a:extLst>
+          </p:cNvPr>
+          <p:cNvPicPr>
+            <a:picLocks noChangeAspect="1"/>
+          </p:cNvPicPr>
+          <p:nvPr/>
+        </p:nvPicPr>
+        <p:blipFill>
+          <a:blip r:embed="rId3"/>
+          <a:stretch>
+            <a:fillRect/>
+          </a:stretch>
+        </p:blipFill>
+        <p:spPr>
+          <a:xfrm>
+            <a:off x="324463" y="3830210"/>
+            <a:ext cx="4346927" cy="2486879"/>
           </a:xfrm>
           <a:prstGeom prst="rect">
             <a:avLst/>
@@ -7093,7 +7129,23 @@
             </a:r>
             <a:r>
               <a:rPr lang="en-US" dirty="0"/>
-              <a:t> is Subscriber.</a:t>
+              <a:t> </a:t>
+            </a:r>
+            <a:r>
+              <a:rPr lang="en-US"/>
+              <a:t>is the </a:t>
+            </a:r>
+            <a:r>
+              <a:rPr lang="en-US" b="1">
+                <a:solidFill>
+                  <a:srgbClr val="00B050"/>
+                </a:solidFill>
+              </a:rPr>
+              <a:t>Subscriber</a:t>
+            </a:r>
+            <a:r>
+              <a:rPr lang="en-US" dirty="0"/>
+              <a:t>.</a:t>
             </a:r>
           </a:p>
           <a:p>

--- a/Angular & type script/Angular.pptx
+++ b/Angular & type script/Angular.pptx
@@ -8,28 +8,37 @@
     <p:sldId id="256" r:id="rId2"/>
     <p:sldId id="266" r:id="rId3"/>
     <p:sldId id="265" r:id="rId4"/>
-    <p:sldId id="259" r:id="rId5"/>
-    <p:sldId id="257" r:id="rId6"/>
-    <p:sldId id="258" r:id="rId7"/>
-    <p:sldId id="260" r:id="rId8"/>
-    <p:sldId id="261" r:id="rId9"/>
-    <p:sldId id="262" r:id="rId10"/>
-    <p:sldId id="263" r:id="rId11"/>
-    <p:sldId id="267" r:id="rId12"/>
-    <p:sldId id="264" r:id="rId13"/>
-    <p:sldId id="270" r:id="rId14"/>
-    <p:sldId id="271" r:id="rId15"/>
-    <p:sldId id="272" r:id="rId16"/>
-    <p:sldId id="273" r:id="rId17"/>
-    <p:sldId id="274" r:id="rId18"/>
-    <p:sldId id="276" r:id="rId19"/>
-    <p:sldId id="275" r:id="rId20"/>
-    <p:sldId id="277" r:id="rId21"/>
-    <p:sldId id="269" r:id="rId22"/>
-    <p:sldId id="278" r:id="rId23"/>
-    <p:sldId id="279" r:id="rId24"/>
-    <p:sldId id="280" r:id="rId25"/>
-    <p:sldId id="268" r:id="rId26"/>
+    <p:sldId id="282" r:id="rId5"/>
+    <p:sldId id="259" r:id="rId6"/>
+    <p:sldId id="283" r:id="rId7"/>
+    <p:sldId id="288" r:id="rId8"/>
+    <p:sldId id="284" r:id="rId9"/>
+    <p:sldId id="285" r:id="rId10"/>
+    <p:sldId id="287" r:id="rId11"/>
+    <p:sldId id="286" r:id="rId12"/>
+    <p:sldId id="257" r:id="rId13"/>
+    <p:sldId id="258" r:id="rId14"/>
+    <p:sldId id="260" r:id="rId15"/>
+    <p:sldId id="261" r:id="rId16"/>
+    <p:sldId id="262" r:id="rId17"/>
+    <p:sldId id="263" r:id="rId18"/>
+    <p:sldId id="267" r:id="rId19"/>
+    <p:sldId id="264" r:id="rId20"/>
+    <p:sldId id="270" r:id="rId21"/>
+    <p:sldId id="271" r:id="rId22"/>
+    <p:sldId id="272" r:id="rId23"/>
+    <p:sldId id="273" r:id="rId24"/>
+    <p:sldId id="274" r:id="rId25"/>
+    <p:sldId id="276" r:id="rId26"/>
+    <p:sldId id="275" r:id="rId27"/>
+    <p:sldId id="277" r:id="rId28"/>
+    <p:sldId id="289" r:id="rId29"/>
+    <p:sldId id="290" r:id="rId30"/>
+    <p:sldId id="278" r:id="rId31"/>
+    <p:sldId id="279" r:id="rId32"/>
+    <p:sldId id="269" r:id="rId33"/>
+    <p:sldId id="280" r:id="rId34"/>
+    <p:sldId id="268" r:id="rId35"/>
   </p:sldIdLst>
   <p:sldSz cx="12192000" cy="6858000"/>
   <p:notesSz cx="6858000" cy="9144000"/>
@@ -321,7 +330,7 @@
           <a:p>
             <a:fld id="{BFD97FD3-0E3C-4940-AC08-248FE3BAAF7F}" type="datetimeFigureOut">
               <a:rPr lang="en-US" smtClean="0"/>
-              <a:t>3/4/2026</a:t>
+              <a:t>2/28/2026</a:t>
             </a:fld>
             <a:endParaRPr lang="en-US"/>
           </a:p>
@@ -533,7 +542,6 @@
               <a:rPr lang="en-US"/>
               <a:t>Click icon to add picture</a:t>
             </a:r>
-            <a:endParaRPr lang="en-US" dirty="0"/>
           </a:p>
         </p:txBody>
       </p:sp>
@@ -619,7 +627,7 @@
           <a:p>
             <a:fld id="{BFD97FD3-0E3C-4940-AC08-248FE3BAAF7F}" type="datetimeFigureOut">
               <a:rPr lang="en-US" smtClean="0"/>
-              <a:t>3/4/2026</a:t>
+              <a:t>2/28/2026</a:t>
             </a:fld>
             <a:endParaRPr lang="en-US"/>
           </a:p>
@@ -811,7 +819,7 @@
           <a:p>
             <a:fld id="{BFD97FD3-0E3C-4940-AC08-248FE3BAAF7F}" type="datetimeFigureOut">
               <a:rPr lang="en-US" smtClean="0"/>
-              <a:t>3/4/2026</a:t>
+              <a:t>2/28/2026</a:t>
             </a:fld>
             <a:endParaRPr lang="en-US"/>
           </a:p>
@@ -1072,7 +1080,7 @@
           <a:p>
             <a:fld id="{BFD97FD3-0E3C-4940-AC08-248FE3BAAF7F}" type="datetimeFigureOut">
               <a:rPr lang="en-US" smtClean="0"/>
-              <a:t>3/4/2026</a:t>
+              <a:t>2/28/2026</a:t>
             </a:fld>
             <a:endParaRPr lang="en-US"/>
           </a:p>
@@ -1225,7 +1233,7 @@
           <a:p>
             <a:pPr lvl="0"/>
             <a:r>
-              <a:rPr lang="en-US" sz="8000" dirty="0">
+              <a:rPr lang="en-US" sz="8000">
                 <a:solidFill>
                   <a:schemeClr val="tx1"/>
                 </a:solidFill>
@@ -1341,7 +1349,7 @@
           <a:p>
             <a:pPr lvl="0" algn="r"/>
             <a:r>
-              <a:rPr lang="en-US" sz="8000" dirty="0">
+              <a:rPr lang="en-US" sz="8000">
                 <a:solidFill>
                   <a:schemeClr val="tx1"/>
                 </a:solidFill>
@@ -1496,7 +1504,7 @@
           <a:p>
             <a:fld id="{BFD97FD3-0E3C-4940-AC08-248FE3BAAF7F}" type="datetimeFigureOut">
               <a:rPr lang="en-US" smtClean="0"/>
-              <a:t>3/4/2026</a:t>
+              <a:t>2/28/2026</a:t>
             </a:fld>
             <a:endParaRPr lang="en-US"/>
           </a:p>
@@ -2033,7 +2041,7 @@
           <a:p>
             <a:fld id="{BFD97FD3-0E3C-4940-AC08-248FE3BAAF7F}" type="datetimeFigureOut">
               <a:rPr lang="en-US" smtClean="0"/>
-              <a:t>3/4/2026</a:t>
+              <a:t>2/28/2026</a:t>
             </a:fld>
             <a:endParaRPr lang="en-US"/>
           </a:p>
@@ -2375,7 +2383,6 @@
               <a:rPr lang="en-US"/>
               <a:t>Click icon to add picture</a:t>
             </a:r>
-            <a:endParaRPr lang="en-US" dirty="0"/>
           </a:p>
         </p:txBody>
       </p:sp>
@@ -2592,7 +2599,6 @@
               <a:rPr lang="en-US"/>
               <a:t>Click icon to add picture</a:t>
             </a:r>
-            <a:endParaRPr lang="en-US" dirty="0"/>
           </a:p>
         </p:txBody>
       </p:sp>
@@ -2809,7 +2815,6 @@
               <a:rPr lang="en-US"/>
               <a:t>Click icon to add picture</a:t>
             </a:r>
-            <a:endParaRPr lang="en-US" dirty="0"/>
           </a:p>
         </p:txBody>
       </p:sp>
@@ -2897,7 +2902,7 @@
           <a:p>
             <a:fld id="{BFD97FD3-0E3C-4940-AC08-248FE3BAAF7F}" type="datetimeFigureOut">
               <a:rPr lang="en-US" smtClean="0"/>
-              <a:t>3/4/2026</a:t>
+              <a:t>2/28/2026</a:t>
             </a:fld>
             <a:endParaRPr lang="en-US"/>
           </a:p>
@@ -3067,7 +3072,7 @@
           <a:p>
             <a:fld id="{BFD97FD3-0E3C-4940-AC08-248FE3BAAF7F}" type="datetimeFigureOut">
               <a:rPr lang="en-US" smtClean="0"/>
-              <a:t>3/4/2026</a:t>
+              <a:t>2/28/2026</a:t>
             </a:fld>
             <a:endParaRPr lang="en-US"/>
           </a:p>
@@ -3251,7 +3256,7 @@
           <a:p>
             <a:fld id="{BFD97FD3-0E3C-4940-AC08-248FE3BAAF7F}" type="datetimeFigureOut">
               <a:rPr lang="en-US" smtClean="0"/>
-              <a:t>3/4/2026</a:t>
+              <a:t>2/28/2026</a:t>
             </a:fld>
             <a:endParaRPr lang="en-US"/>
           </a:p>
@@ -3421,7 +3426,7 @@
           <a:p>
             <a:fld id="{BFD97FD3-0E3C-4940-AC08-248FE3BAAF7F}" type="datetimeFigureOut">
               <a:rPr lang="en-US" smtClean="0"/>
-              <a:t>3/4/2026</a:t>
+              <a:t>2/28/2026</a:t>
             </a:fld>
             <a:endParaRPr lang="en-US"/>
           </a:p>
@@ -3665,7 +3670,7 @@
           <a:p>
             <a:fld id="{BFD97FD3-0E3C-4940-AC08-248FE3BAAF7F}" type="datetimeFigureOut">
               <a:rPr lang="en-US" smtClean="0"/>
-              <a:t>3/4/2026</a:t>
+              <a:t>2/28/2026</a:t>
             </a:fld>
             <a:endParaRPr lang="en-US"/>
           </a:p>
@@ -3901,7 +3906,7 @@
           <a:p>
             <a:fld id="{BFD97FD3-0E3C-4940-AC08-248FE3BAAF7F}" type="datetimeFigureOut">
               <a:rPr lang="en-US" smtClean="0"/>
-              <a:t>3/4/2026</a:t>
+              <a:t>2/28/2026</a:t>
             </a:fld>
             <a:endParaRPr lang="en-US"/>
           </a:p>
@@ -4367,7 +4372,7 @@
           <a:p>
             <a:fld id="{BFD97FD3-0E3C-4940-AC08-248FE3BAAF7F}" type="datetimeFigureOut">
               <a:rPr lang="en-US" smtClean="0"/>
-              <a:t>3/4/2026</a:t>
+              <a:t>2/28/2026</a:t>
             </a:fld>
             <a:endParaRPr lang="en-US"/>
           </a:p>
@@ -4485,7 +4490,7 @@
           <a:p>
             <a:fld id="{BFD97FD3-0E3C-4940-AC08-248FE3BAAF7F}" type="datetimeFigureOut">
               <a:rPr lang="en-US" smtClean="0"/>
-              <a:t>3/4/2026</a:t>
+              <a:t>2/28/2026</a:t>
             </a:fld>
             <a:endParaRPr lang="en-US"/>
           </a:p>
@@ -4580,7 +4585,7 @@
           <a:p>
             <a:fld id="{BFD97FD3-0E3C-4940-AC08-248FE3BAAF7F}" type="datetimeFigureOut">
               <a:rPr lang="en-US" smtClean="0"/>
-              <a:t>3/4/2026</a:t>
+              <a:t>2/28/2026</a:t>
             </a:fld>
             <a:endParaRPr lang="en-US"/>
           </a:p>
@@ -4835,7 +4840,7 @@
           <a:p>
             <a:fld id="{BFD97FD3-0E3C-4940-AC08-248FE3BAAF7F}" type="datetimeFigureOut">
               <a:rPr lang="en-US" smtClean="0"/>
-              <a:t>3/4/2026</a:t>
+              <a:t>2/28/2026</a:t>
             </a:fld>
             <a:endParaRPr lang="en-US"/>
           </a:p>
@@ -5047,7 +5052,6 @@
               <a:rPr lang="en-US"/>
               <a:t>Click icon to add picture</a:t>
             </a:r>
-            <a:endParaRPr lang="en-US" dirty="0"/>
           </a:p>
         </p:txBody>
       </p:sp>
@@ -5135,7 +5139,7 @@
           <a:p>
             <a:fld id="{BFD97FD3-0E3C-4940-AC08-248FE3BAAF7F}" type="datetimeFigureOut">
               <a:rPr lang="en-US" smtClean="0"/>
-              <a:t>3/4/2026</a:t>
+              <a:t>2/28/2026</a:t>
             </a:fld>
             <a:endParaRPr lang="en-US"/>
           </a:p>
@@ -5369,7 +5373,7 @@
           <a:p>
             <a:fld id="{BFD97FD3-0E3C-4940-AC08-248FE3BAAF7F}" type="datetimeFigureOut">
               <a:rPr lang="en-US" smtClean="0"/>
-              <a:t>3/4/2026</a:t>
+              <a:t>2/28/2026</a:t>
             </a:fld>
             <a:endParaRPr lang="en-US"/>
           </a:p>
@@ -6065,7 +6069,7 @@
           <a:lstStyle/>
           <a:p>
             <a:r>
-              <a:rPr lang="en-US" dirty="0"/>
+              <a:rPr lang="en-US"/>
               <a:t>Angular &amp; TypeScript</a:t>
             </a:r>
           </a:p>
@@ -6093,7 +6097,7 @@
           <a:lstStyle/>
           <a:p>
             <a:r>
-              <a:rPr lang="en-US" dirty="0"/>
+              <a:rPr lang="en-US"/>
               <a:t>By. ahmedmohamedmvp@gmail.com</a:t>
             </a:r>
           </a:p>
@@ -6134,7 +6138,7 @@
           <p:cNvPr id="2" name="Title 1">
             <a:extLst>
               <a:ext uri="{FF2B5EF4-FFF2-40B4-BE49-F238E27FC236}">
-                <a16:creationId xmlns:a16="http://schemas.microsoft.com/office/drawing/2014/main" id="{8C5A01A3-1E11-9C77-884C-98E8ACBF7E94}"/>
+                <a16:creationId xmlns:a16="http://schemas.microsoft.com/office/drawing/2014/main" id="{BBDEACA9-ED7F-FFC3-6BB8-E431F02A40ED}"/>
               </a:ext>
             </a:extLst>
           </p:cNvPr>
@@ -6148,211 +6152,73 @@
         <p:spPr>
           <a:xfrm>
             <a:off x="913795" y="0"/>
-            <a:ext cx="10353762" cy="542611"/>
-          </a:xfrm>
-        </p:spPr>
-        <p:txBody>
-          <a:bodyPr>
-            <a:normAutofit fontScale="90000"/>
-          </a:bodyPr>
-          <a:lstStyle/>
-          <a:p>
-            <a:r>
-              <a:rPr lang="en-US" b="1" dirty="0" err="1">
-                <a:solidFill>
-                  <a:srgbClr val="FF0000"/>
-                </a:solidFill>
-              </a:rPr>
-              <a:t>routerLinkActiveOptions</a:t>
-            </a:r>
-            <a:endParaRPr lang="en-US" dirty="0"/>
-          </a:p>
-        </p:txBody>
-      </p:sp>
-      <p:pic>
-        <p:nvPicPr>
-          <p:cNvPr id="4" name="Picture 3">
+            <a:ext cx="10353762" cy="970450"/>
+          </a:xfrm>
+        </p:spPr>
+        <p:txBody>
+          <a:bodyPr/>
+          <a:lstStyle/>
+          <a:p>
+            <a:r>
+              <a:rPr lang="en-US"/>
+              <a:t>Shared folder</a:t>
+            </a:r>
+          </a:p>
+        </p:txBody>
+      </p:sp>
+      <p:sp>
+        <p:nvSpPr>
+          <p:cNvPr id="3" name="Content Placeholder 2">
             <a:extLst>
               <a:ext uri="{FF2B5EF4-FFF2-40B4-BE49-F238E27FC236}">
-                <a16:creationId xmlns:a16="http://schemas.microsoft.com/office/drawing/2014/main" id="{6E69ABF2-B39B-7000-B910-D04E38E1454D}"/>
+                <a16:creationId xmlns:a16="http://schemas.microsoft.com/office/drawing/2014/main" id="{E91D2451-8AF8-5BA1-6AE2-2C98C8AAF6B9}"/>
               </a:ext>
             </a:extLst>
           </p:cNvPr>
-          <p:cNvPicPr>
-            <a:picLocks noChangeAspect="1"/>
-          </p:cNvPicPr>
-          <p:nvPr/>
-        </p:nvPicPr>
-        <p:blipFill>
-          <a:blip r:embed="rId2"/>
-          <a:stretch>
-            <a:fillRect/>
-          </a:stretch>
-        </p:blipFill>
-        <p:spPr>
-          <a:xfrm>
-            <a:off x="110533" y="542610"/>
-            <a:ext cx="5150788" cy="2341267"/>
-          </a:xfrm>
-          <a:prstGeom prst="rect">
-            <a:avLst/>
-          </a:prstGeom>
-        </p:spPr>
-      </p:pic>
-      <p:pic>
-        <p:nvPicPr>
-          <p:cNvPr id="7" name="Picture 6">
-            <a:extLst>
-              <a:ext uri="{FF2B5EF4-FFF2-40B4-BE49-F238E27FC236}">
-                <a16:creationId xmlns:a16="http://schemas.microsoft.com/office/drawing/2014/main" id="{D3388C7C-297C-31FB-B9C6-A792CA4B8859}"/>
-              </a:ext>
-            </a:extLst>
-          </p:cNvPr>
-          <p:cNvPicPr>
-            <a:picLocks noChangeAspect="1"/>
-          </p:cNvPicPr>
-          <p:nvPr/>
-        </p:nvPicPr>
-        <p:blipFill>
-          <a:blip r:embed="rId3"/>
-          <a:stretch>
-            <a:fillRect/>
-          </a:stretch>
-        </p:blipFill>
-        <p:spPr>
-          <a:xfrm>
-            <a:off x="110533" y="3074797"/>
-            <a:ext cx="3972921" cy="3086402"/>
-          </a:xfrm>
-          <a:prstGeom prst="rect">
-            <a:avLst/>
-          </a:prstGeom>
-        </p:spPr>
-      </p:pic>
-      <p:pic>
-        <p:nvPicPr>
-          <p:cNvPr id="9" name="Picture 8">
-            <a:extLst>
-              <a:ext uri="{FF2B5EF4-FFF2-40B4-BE49-F238E27FC236}">
-                <a16:creationId xmlns:a16="http://schemas.microsoft.com/office/drawing/2014/main" id="{8982232A-3E3C-20CB-6FF6-1F07B891859A}"/>
-              </a:ext>
-            </a:extLst>
-          </p:cNvPr>
-          <p:cNvPicPr>
-            <a:picLocks noChangeAspect="1"/>
-          </p:cNvPicPr>
-          <p:nvPr/>
-        </p:nvPicPr>
-        <p:blipFill>
-          <a:blip r:embed="rId4"/>
-          <a:stretch>
-            <a:fillRect/>
-          </a:stretch>
-        </p:blipFill>
-        <p:spPr>
-          <a:xfrm>
-            <a:off x="4083454" y="3743010"/>
-            <a:ext cx="1590675" cy="1962150"/>
-          </a:xfrm>
-          <a:prstGeom prst="rect">
-            <a:avLst/>
-          </a:prstGeom>
-        </p:spPr>
-      </p:pic>
-      <p:pic>
-        <p:nvPicPr>
-          <p:cNvPr id="11" name="Picture 10">
-            <a:extLst>
-              <a:ext uri="{FF2B5EF4-FFF2-40B4-BE49-F238E27FC236}">
-                <a16:creationId xmlns:a16="http://schemas.microsoft.com/office/drawing/2014/main" id="{B4F43EB5-4E9C-5036-DB47-7C79AB4A5C3A}"/>
-              </a:ext>
-            </a:extLst>
-          </p:cNvPr>
-          <p:cNvPicPr>
-            <a:picLocks noChangeAspect="1"/>
-          </p:cNvPicPr>
-          <p:nvPr/>
-        </p:nvPicPr>
-        <p:blipFill>
-          <a:blip r:embed="rId5"/>
-          <a:stretch>
-            <a:fillRect/>
-          </a:stretch>
-        </p:blipFill>
-        <p:spPr>
-          <a:xfrm>
-            <a:off x="6294035" y="866060"/>
-            <a:ext cx="3523205" cy="2413534"/>
-          </a:xfrm>
-          <a:prstGeom prst="rect">
-            <a:avLst/>
-          </a:prstGeom>
-        </p:spPr>
-      </p:pic>
-      <p:pic>
-        <p:nvPicPr>
-          <p:cNvPr id="15" name="Picture 14">
-            <a:extLst>
-              <a:ext uri="{FF2B5EF4-FFF2-40B4-BE49-F238E27FC236}">
-                <a16:creationId xmlns:a16="http://schemas.microsoft.com/office/drawing/2014/main" id="{66440FA3-1361-A746-4C2B-61CCD53B7477}"/>
-              </a:ext>
-            </a:extLst>
-          </p:cNvPr>
-          <p:cNvPicPr>
-            <a:picLocks noChangeAspect="1"/>
-          </p:cNvPicPr>
-          <p:nvPr/>
-        </p:nvPicPr>
-        <p:blipFill>
-          <a:blip r:embed="rId6"/>
-          <a:stretch>
-            <a:fillRect/>
-          </a:stretch>
-        </p:blipFill>
-        <p:spPr>
-          <a:xfrm>
-            <a:off x="9817240" y="1177477"/>
-            <a:ext cx="1876425" cy="1790700"/>
-          </a:xfrm>
-          <a:prstGeom prst="rect">
-            <a:avLst/>
-          </a:prstGeom>
-        </p:spPr>
-      </p:pic>
-      <p:pic>
-        <p:nvPicPr>
-          <p:cNvPr id="17" name="Picture 16">
-            <a:extLst>
-              <a:ext uri="{FF2B5EF4-FFF2-40B4-BE49-F238E27FC236}">
-                <a16:creationId xmlns:a16="http://schemas.microsoft.com/office/drawing/2014/main" id="{4652D9DB-C436-C549-F06C-BB59EA4B27C9}"/>
-              </a:ext>
-            </a:extLst>
-          </p:cNvPr>
-          <p:cNvPicPr>
-            <a:picLocks noChangeAspect="1"/>
-          </p:cNvPicPr>
-          <p:nvPr/>
-        </p:nvPicPr>
-        <p:blipFill>
-          <a:blip r:embed="rId7"/>
-          <a:stretch>
-            <a:fillRect/>
-          </a:stretch>
-        </p:blipFill>
-        <p:spPr>
-          <a:xfrm>
-            <a:off x="6517873" y="3743010"/>
-            <a:ext cx="4771809" cy="1790700"/>
-          </a:xfrm>
-          <a:prstGeom prst="rect">
-            <a:avLst/>
-          </a:prstGeom>
-        </p:spPr>
-      </p:pic>
+          <p:cNvSpPr>
+            <a:spLocks noGrp="1"/>
+          </p:cNvSpPr>
+          <p:nvPr>
+            <p:ph idx="1"/>
+          </p:nvPr>
+        </p:nvSpPr>
+        <p:spPr>
+          <a:xfrm>
+            <a:off x="913795" y="970451"/>
+            <a:ext cx="10353762" cy="4820750"/>
+          </a:xfrm>
+        </p:spPr>
+        <p:txBody>
+          <a:bodyPr/>
+          <a:lstStyle/>
+          <a:p>
+            <a:r>
+              <a:rPr lang="en-US"/>
+              <a:t>app folder</a:t>
+            </a:r>
+          </a:p>
+          <a:p>
+            <a:pPr lvl="1"/>
+            <a:r>
+              <a:rPr lang="en-US"/>
+              <a:t>Shared : contains things that are connected with UI like directives, pipes, reusable components</a:t>
+            </a:r>
+          </a:p>
+          <a:p>
+            <a:endParaRPr lang="en-US"/>
+          </a:p>
+          <a:p>
+            <a:endParaRPr lang="en-US"/>
+          </a:p>
+          <a:p>
+            <a:endParaRPr lang="en-US"/>
+          </a:p>
+        </p:txBody>
+      </p:sp>
     </p:spTree>
     <p:extLst>
       <p:ext uri="{BB962C8B-B14F-4D97-AF65-F5344CB8AC3E}">
-        <p14:creationId xmlns:p14="http://schemas.microsoft.com/office/powerpoint/2010/main" val="3014933232"/>
+        <p14:creationId xmlns:p14="http://schemas.microsoft.com/office/powerpoint/2010/main" val="1415400972"/>
       </p:ext>
     </p:extLst>
   </p:cSld>
@@ -6384,7 +6250,7 @@
           <p:cNvPr id="2" name="Title 1">
             <a:extLst>
               <a:ext uri="{FF2B5EF4-FFF2-40B4-BE49-F238E27FC236}">
-                <a16:creationId xmlns:a16="http://schemas.microsoft.com/office/drawing/2014/main" id="{C38291A9-D68F-593A-1138-70C5711B2DE2}"/>
+                <a16:creationId xmlns:a16="http://schemas.microsoft.com/office/drawing/2014/main" id="{69775598-8B9C-17B3-4A42-1E65F59739BD}"/>
               </a:ext>
             </a:extLst>
           </p:cNvPr>
@@ -6397,8 +6263,8 @@
         </p:nvSpPr>
         <p:spPr>
           <a:xfrm>
-            <a:off x="913795" y="0"/>
-            <a:ext cx="10353762" cy="970450"/>
+            <a:off x="919119" y="0"/>
+            <a:ext cx="10353762" cy="807218"/>
           </a:xfrm>
         </p:spPr>
         <p:txBody>
@@ -6406,8 +6272,8 @@
           <a:lstStyle/>
           <a:p>
             <a:r>
-              <a:rPr lang="en-US" dirty="0"/>
-              <a:t>Router outlet</a:t>
+              <a:rPr lang="en-US" b="1"/>
+              <a:t>Pages Folder</a:t>
             </a:r>
           </a:p>
         </p:txBody>
@@ -6417,7 +6283,7 @@
           <p:cNvPr id="3" name="Content Placeholder 2">
             <a:extLst>
               <a:ext uri="{FF2B5EF4-FFF2-40B4-BE49-F238E27FC236}">
-                <a16:creationId xmlns:a16="http://schemas.microsoft.com/office/drawing/2014/main" id="{30C2FC2D-1F50-F2D6-CA80-6F4001707B64}"/>
+                <a16:creationId xmlns:a16="http://schemas.microsoft.com/office/drawing/2014/main" id="{4A4491EA-F511-601B-31E3-FF557B4C29F1}"/>
               </a:ext>
             </a:extLst>
           </p:cNvPr>
@@ -6430,8 +6296,8 @@
         </p:nvSpPr>
         <p:spPr>
           <a:xfrm>
-            <a:off x="120580" y="970451"/>
-            <a:ext cx="11635991" cy="5681558"/>
+            <a:off x="341644" y="807219"/>
+            <a:ext cx="11435024" cy="5854838"/>
           </a:xfrm>
         </p:spPr>
         <p:txBody>
@@ -6439,76 +6305,65 @@
           <a:lstStyle/>
           <a:p>
             <a:r>
-              <a:rPr lang="en-US" dirty="0"/>
-              <a:t>In this example we have sidebar(dashboard) component // existed at layouts/dashboard </a:t>
-            </a:r>
-          </a:p>
-        </p:txBody>
-      </p:sp>
-      <p:pic>
-        <p:nvPicPr>
-          <p:cNvPr id="5" name="Picture 4">
-            <a:extLst>
-              <a:ext uri="{FF2B5EF4-FFF2-40B4-BE49-F238E27FC236}">
-                <a16:creationId xmlns:a16="http://schemas.microsoft.com/office/drawing/2014/main" id="{09135703-096A-213A-39E5-64F8AD98444D}"/>
-              </a:ext>
-            </a:extLst>
-          </p:cNvPr>
-          <p:cNvPicPr>
-            <a:picLocks noChangeAspect="1"/>
-          </p:cNvPicPr>
-          <p:nvPr/>
-        </p:nvPicPr>
-        <p:blipFill>
-          <a:blip r:embed="rId2"/>
-          <a:stretch>
-            <a:fillRect/>
-          </a:stretch>
-        </p:blipFill>
-        <p:spPr>
-          <a:xfrm>
-            <a:off x="355251" y="1382872"/>
-            <a:ext cx="3568700" cy="573541"/>
-          </a:xfrm>
-          <a:prstGeom prst="rect">
-            <a:avLst/>
-          </a:prstGeom>
-        </p:spPr>
-      </p:pic>
-      <p:pic>
-        <p:nvPicPr>
-          <p:cNvPr id="7" name="Picture 6">
-            <a:extLst>
-              <a:ext uri="{FF2B5EF4-FFF2-40B4-BE49-F238E27FC236}">
-                <a16:creationId xmlns:a16="http://schemas.microsoft.com/office/drawing/2014/main" id="{F3632FE0-BBF0-41EE-5F36-135295B69C9A}"/>
-              </a:ext>
-            </a:extLst>
-          </p:cNvPr>
-          <p:cNvPicPr>
-            <a:picLocks noChangeAspect="1"/>
-          </p:cNvPicPr>
-          <p:nvPr/>
-        </p:nvPicPr>
-        <p:blipFill>
-          <a:blip r:embed="rId3"/>
-          <a:stretch>
-            <a:fillRect/>
-          </a:stretch>
-        </p:blipFill>
-        <p:spPr>
-          <a:xfrm>
-            <a:off x="355251" y="1956417"/>
-            <a:ext cx="10755201" cy="3048202"/>
-          </a:xfrm>
-          <a:prstGeom prst="rect">
-            <a:avLst/>
-          </a:prstGeom>
-        </p:spPr>
-      </p:pic>
+              <a:rPr lang="en-US"/>
+              <a:t>Inside app</a:t>
+            </a:r>
+          </a:p>
+          <a:p>
+            <a:pPr lvl="1"/>
+            <a:r>
+              <a:rPr lang="en-US"/>
+              <a:t>Pages: contains the components which is not reusable and could be accessed via route</a:t>
+            </a:r>
+          </a:p>
+          <a:p>
+            <a:pPr lvl="2"/>
+            <a:r>
+              <a:rPr lang="en-US" sz="1800"/>
+              <a:t>employee</a:t>
+            </a:r>
+          </a:p>
+          <a:p>
+            <a:pPr lvl="3"/>
+            <a:r>
+              <a:rPr lang="en-US" sz="1800"/>
+              <a:t>employee-list</a:t>
+            </a:r>
+          </a:p>
+          <a:p>
+            <a:pPr lvl="3"/>
+            <a:r>
+              <a:rPr lang="en-US" sz="1800"/>
+              <a:t>new-employee</a:t>
+            </a:r>
+          </a:p>
+          <a:p>
+            <a:pPr lvl="2"/>
+            <a:r>
+              <a:rPr lang="en-US"/>
+              <a:t>Department folder</a:t>
+            </a:r>
+          </a:p>
+          <a:p>
+            <a:pPr lvl="3"/>
+            <a:r>
+              <a:rPr lang="en-US" sz="1800"/>
+              <a:t>Department-list</a:t>
+            </a:r>
+          </a:p>
+          <a:p>
+            <a:pPr lvl="3"/>
+            <a:r>
+              <a:rPr lang="en-US" sz="1800"/>
+              <a:t>New-department</a:t>
+            </a:r>
+          </a:p>
+        </p:txBody>
+      </p:sp>
     </p:spTree>
     <p:extLst>
       <p:ext uri="{BB962C8B-B14F-4D97-AF65-F5344CB8AC3E}">
-        <p14:creationId xmlns:p14="http://schemas.microsoft.com/office/powerpoint/2010/main" val="608228892"/>
+        <p14:creationId xmlns:p14="http://schemas.microsoft.com/office/powerpoint/2010/main" val="3202478861"/>
       </p:ext>
     </p:extLst>
   </p:cSld>
@@ -6540,7 +6395,7 @@
           <p:cNvPr id="2" name="Title 1">
             <a:extLst>
               <a:ext uri="{FF2B5EF4-FFF2-40B4-BE49-F238E27FC236}">
-                <a16:creationId xmlns:a16="http://schemas.microsoft.com/office/drawing/2014/main" id="{9AB8FB81-CAF0-BEDE-05F1-96E505B87CE7}"/>
+                <a16:creationId xmlns:a16="http://schemas.microsoft.com/office/drawing/2014/main" id="{BB159EA1-B5EF-4182-712D-DE9FA736D5DC}"/>
               </a:ext>
             </a:extLst>
           </p:cNvPr>
@@ -6553,7 +6408,7 @@
         </p:nvSpPr>
         <p:spPr>
           <a:xfrm>
-            <a:off x="913795" y="0"/>
+            <a:off x="763070" y="2337917"/>
             <a:ext cx="10353762" cy="970450"/>
           </a:xfrm>
         </p:spPr>
@@ -6564,81 +6419,20 @@
           <a:lstStyle/>
           <a:p>
             <a:r>
-              <a:rPr lang="en-US" sz="4400" b="1" dirty="0">
+              <a:rPr lang="en-US" sz="4800" b="1">
                 <a:solidFill>
                   <a:srgbClr val="FF0000"/>
                 </a:solidFill>
               </a:rPr>
-              <a:t>Binding</a:t>
-            </a:r>
-            <a:endParaRPr lang="en-US" sz="4400" dirty="0"/>
-          </a:p>
-        </p:txBody>
-      </p:sp>
-      <p:sp>
-        <p:nvSpPr>
-          <p:cNvPr id="3" name="Content Placeholder 2">
-            <a:extLst>
-              <a:ext uri="{FF2B5EF4-FFF2-40B4-BE49-F238E27FC236}">
-                <a16:creationId xmlns:a16="http://schemas.microsoft.com/office/drawing/2014/main" id="{8D14B1D5-538A-EA13-52C2-4F04C8BE9298}"/>
-              </a:ext>
-            </a:extLst>
-          </p:cNvPr>
-          <p:cNvSpPr>
-            <a:spLocks noGrp="1"/>
-          </p:cNvSpPr>
-          <p:nvPr>
-            <p:ph idx="1"/>
-          </p:nvPr>
-        </p:nvSpPr>
-        <p:spPr>
-          <a:xfrm>
-            <a:off x="698090" y="999946"/>
-            <a:ext cx="10776155" cy="5204207"/>
-          </a:xfrm>
-        </p:spPr>
-        <p:txBody>
-          <a:bodyPr/>
-          <a:lstStyle/>
-          <a:p>
-            <a:r>
-              <a:rPr lang="en-US" b="1" dirty="0"/>
-              <a:t>Interpolation</a:t>
-            </a:r>
-          </a:p>
-          <a:p>
-            <a:r>
-              <a:rPr lang="en-US" b="1" dirty="0"/>
-              <a:t>attribute (property) binding</a:t>
-            </a:r>
-          </a:p>
-          <a:p>
-            <a:r>
-              <a:rPr lang="en-US" b="1" dirty="0"/>
-              <a:t>class binding</a:t>
-            </a:r>
-          </a:p>
-          <a:p>
-            <a:r>
-              <a:rPr lang="en-US" b="1" dirty="0"/>
-              <a:t>style binding</a:t>
-            </a:r>
-          </a:p>
-          <a:p>
-            <a:r>
-              <a:rPr lang="en-US" b="1" dirty="0"/>
-              <a:t>Event Binding</a:t>
-            </a:r>
-          </a:p>
-          <a:p>
-            <a:endParaRPr lang="en-US" dirty="0"/>
+              <a:t>Routing</a:t>
+            </a:r>
           </a:p>
         </p:txBody>
       </p:sp>
     </p:spTree>
     <p:extLst>
       <p:ext uri="{BB962C8B-B14F-4D97-AF65-F5344CB8AC3E}">
-        <p14:creationId xmlns:p14="http://schemas.microsoft.com/office/powerpoint/2010/main" val="3085219961"/>
+        <p14:creationId xmlns:p14="http://schemas.microsoft.com/office/powerpoint/2010/main" val="2452297741"/>
       </p:ext>
     </p:extLst>
   </p:cSld>
@@ -6670,7 +6464,7 @@
           <p:cNvPr id="2" name="Title 1">
             <a:extLst>
               <a:ext uri="{FF2B5EF4-FFF2-40B4-BE49-F238E27FC236}">
-                <a16:creationId xmlns:a16="http://schemas.microsoft.com/office/drawing/2014/main" id="{52523F1A-83BC-D35C-BA4C-54902FC8580C}"/>
+                <a16:creationId xmlns:a16="http://schemas.microsoft.com/office/drawing/2014/main" id="{B0E13025-464A-F3C0-EA1F-E214128D54FD}"/>
               </a:ext>
             </a:extLst>
           </p:cNvPr>
@@ -6684,7 +6478,7 @@
         <p:spPr>
           <a:xfrm>
             <a:off x="913795" y="0"/>
-            <a:ext cx="10353762" cy="550606"/>
+            <a:ext cx="10353762" cy="512900"/>
           </a:xfrm>
         </p:spPr>
         <p:txBody>
@@ -6694,86 +6488,135 @@
           <a:lstStyle/>
           <a:p>
             <a:r>
-              <a:rPr lang="en-US" b="1" dirty="0">
+              <a:rPr lang="en-US" b="1">
                 <a:solidFill>
                   <a:srgbClr val="FF0000"/>
                 </a:solidFill>
               </a:rPr>
-              <a:t>Observable</a:t>
-            </a:r>
-          </a:p>
-        </p:txBody>
-      </p:sp>
-      <p:sp>
-        <p:nvSpPr>
-          <p:cNvPr id="3" name="Content Placeholder 2">
+              <a:t>Routes [</a:t>
+            </a:r>
+            <a:r>
+              <a:rPr lang="en-US" b="1" err="1">
+                <a:solidFill>
+                  <a:srgbClr val="FF0000"/>
+                </a:solidFill>
+              </a:rPr>
+              <a:t>app.route.ts</a:t>
+            </a:r>
+            <a:r>
+              <a:rPr lang="en-US" b="1">
+                <a:solidFill>
+                  <a:srgbClr val="FF0000"/>
+                </a:solidFill>
+              </a:rPr>
+              <a:t>] , Lazy loading</a:t>
+            </a:r>
+          </a:p>
+        </p:txBody>
+      </p:sp>
+      <p:pic>
+        <p:nvPicPr>
+          <p:cNvPr id="5" name="Content Placeholder 4">
             <a:extLst>
               <a:ext uri="{FF2B5EF4-FFF2-40B4-BE49-F238E27FC236}">
-                <a16:creationId xmlns:a16="http://schemas.microsoft.com/office/drawing/2014/main" id="{58733B1E-E103-C154-025F-8F7D67B2F01E}"/>
+                <a16:creationId xmlns:a16="http://schemas.microsoft.com/office/drawing/2014/main" id="{623E028D-620A-F0B4-90F4-4DBD6B8BB806}"/>
               </a:ext>
             </a:extLst>
           </p:cNvPr>
-          <p:cNvSpPr>
-            <a:spLocks noGrp="1"/>
-          </p:cNvSpPr>
+          <p:cNvPicPr>
+            <a:picLocks noGrp="1" noChangeAspect="1"/>
+          </p:cNvPicPr>
           <p:nvPr>
             <p:ph idx="1"/>
           </p:nvPr>
-        </p:nvSpPr>
-        <p:spPr>
-          <a:xfrm>
-            <a:off x="363794" y="550607"/>
-            <a:ext cx="11415251" cy="5978012"/>
-          </a:xfrm>
-        </p:spPr>
-        <p:txBody>
-          <a:bodyPr/>
-          <a:lstStyle/>
-          <a:p>
-            <a:r>
-              <a:rPr lang="en-US" dirty="0"/>
-              <a:t>it is used to handle (manage) asynchronous operations</a:t>
-            </a:r>
-          </a:p>
-          <a:p>
-            <a:r>
-              <a:rPr lang="en-US" dirty="0"/>
-              <a:t>Emits multiple values over time (better for data streaming) (data producer)</a:t>
-            </a:r>
-          </a:p>
-          <a:p>
-            <a:r>
-              <a:rPr lang="en-US" dirty="0"/>
-              <a:t>Lazy (executed when subscribed).</a:t>
-            </a:r>
-          </a:p>
-          <a:p>
-            <a:r>
-              <a:rPr lang="en-US" dirty="0"/>
-              <a:t>Can be canceled (by unsubscribing).</a:t>
-            </a:r>
-          </a:p>
-          <a:p>
-            <a:r>
-              <a:rPr lang="en-US" dirty="0"/>
-              <a:t>Included in ReactiveX Library</a:t>
-            </a:r>
-          </a:p>
-          <a:p>
-            <a:r>
-              <a:rPr lang="en-US" dirty="0">
-                <a:effectLst/>
-              </a:rPr>
-              <a:t>A stream of data or events (like news) that can be sent over time.</a:t>
-            </a:r>
-            <a:endParaRPr lang="en-US" dirty="0"/>
-          </a:p>
-        </p:txBody>
-      </p:sp>
+        </p:nvPicPr>
+        <p:blipFill>
+          <a:blip r:embed="rId2"/>
+          <a:stretch>
+            <a:fillRect/>
+          </a:stretch>
+        </p:blipFill>
+        <p:spPr>
+          <a:xfrm>
+            <a:off x="95474" y="779822"/>
+            <a:ext cx="6603007" cy="1209752"/>
+          </a:xfrm>
+          <a:prstGeom prst="rect">
+            <a:avLst/>
+          </a:prstGeom>
+          <a:effectLst>
+            <a:outerShdw blurRad="25400" dir="17880000">
+              <a:srgbClr val="000000">
+                <a:alpha val="46000"/>
+              </a:srgbClr>
+            </a:outerShdw>
+          </a:effectLst>
+        </p:spPr>
+      </p:pic>
+      <p:pic>
+        <p:nvPicPr>
+          <p:cNvPr id="7" name="Picture 6">
+            <a:extLst>
+              <a:ext uri="{FF2B5EF4-FFF2-40B4-BE49-F238E27FC236}">
+                <a16:creationId xmlns:a16="http://schemas.microsoft.com/office/drawing/2014/main" id="{0D0A3FA7-0F9C-4110-F411-E227B971C5BE}"/>
+              </a:ext>
+            </a:extLst>
+          </p:cNvPr>
+          <p:cNvPicPr>
+            <a:picLocks noChangeAspect="1"/>
+          </p:cNvPicPr>
+          <p:nvPr/>
+        </p:nvPicPr>
+        <p:blipFill>
+          <a:blip r:embed="rId3"/>
+          <a:stretch>
+            <a:fillRect/>
+          </a:stretch>
+        </p:blipFill>
+        <p:spPr>
+          <a:xfrm>
+            <a:off x="6774426" y="593264"/>
+            <a:ext cx="5322100" cy="2337764"/>
+          </a:xfrm>
+          <a:prstGeom prst="rect">
+            <a:avLst/>
+          </a:prstGeom>
+        </p:spPr>
+      </p:pic>
+      <p:pic>
+        <p:nvPicPr>
+          <p:cNvPr id="9" name="Picture 8">
+            <a:extLst>
+              <a:ext uri="{FF2B5EF4-FFF2-40B4-BE49-F238E27FC236}">
+                <a16:creationId xmlns:a16="http://schemas.microsoft.com/office/drawing/2014/main" id="{4A7A6604-B775-CCD0-6B68-94AB167F5BD1}"/>
+              </a:ext>
+            </a:extLst>
+          </p:cNvPr>
+          <p:cNvPicPr>
+            <a:picLocks noChangeAspect="1"/>
+          </p:cNvPicPr>
+          <p:nvPr/>
+        </p:nvPicPr>
+        <p:blipFill>
+          <a:blip r:embed="rId4"/>
+          <a:stretch>
+            <a:fillRect/>
+          </a:stretch>
+        </p:blipFill>
+        <p:spPr>
+          <a:xfrm>
+            <a:off x="95475" y="3002811"/>
+            <a:ext cx="9940471" cy="3855189"/>
+          </a:xfrm>
+          <a:prstGeom prst="rect">
+            <a:avLst/>
+          </a:prstGeom>
+        </p:spPr>
+      </p:pic>
     </p:spTree>
     <p:extLst>
       <p:ext uri="{BB962C8B-B14F-4D97-AF65-F5344CB8AC3E}">
-        <p14:creationId xmlns:p14="http://schemas.microsoft.com/office/powerpoint/2010/main" val="1335119381"/>
+        <p14:creationId xmlns:p14="http://schemas.microsoft.com/office/powerpoint/2010/main" val="338788286"/>
       </p:ext>
     </p:extLst>
   </p:cSld>
@@ -6805,7 +6648,7 @@
           <p:cNvPr id="2" name="Title 1">
             <a:extLst>
               <a:ext uri="{FF2B5EF4-FFF2-40B4-BE49-F238E27FC236}">
-                <a16:creationId xmlns:a16="http://schemas.microsoft.com/office/drawing/2014/main" id="{7199BF36-BBE9-F3EC-68D8-A0C569DEBD00}"/>
+                <a16:creationId xmlns:a16="http://schemas.microsoft.com/office/drawing/2014/main" id="{AF961FF9-5732-8B38-AE0F-02650F615C45}"/>
               </a:ext>
             </a:extLst>
           </p:cNvPr>
@@ -6818,8 +6661,8 @@
         </p:nvSpPr>
         <p:spPr>
           <a:xfrm>
-            <a:off x="913795" y="0"/>
-            <a:ext cx="10353762" cy="599768"/>
+            <a:off x="913795" y="83048"/>
+            <a:ext cx="10353762" cy="630386"/>
           </a:xfrm>
         </p:spPr>
         <p:txBody>
@@ -6829,129 +6672,27 @@
           <a:lstStyle/>
           <a:p>
             <a:r>
-              <a:rPr lang="en-US" b="1" dirty="0">
-                <a:solidFill>
-                  <a:srgbClr val="FF0000"/>
-                </a:solidFill>
-              </a:rPr>
-              <a:t>Observer</a:t>
-            </a:r>
-          </a:p>
-        </p:txBody>
-      </p:sp>
-      <p:sp>
-        <p:nvSpPr>
-          <p:cNvPr id="3" name="Content Placeholder 2">
+              <a:rPr lang="en-US" b="1"/>
+              <a:t>Navigate Via HTML</a:t>
+            </a:r>
+          </a:p>
+        </p:txBody>
+      </p:sp>
+      <p:pic>
+        <p:nvPicPr>
+          <p:cNvPr id="5" name="Content Placeholder 4">
             <a:extLst>
               <a:ext uri="{FF2B5EF4-FFF2-40B4-BE49-F238E27FC236}">
-                <a16:creationId xmlns:a16="http://schemas.microsoft.com/office/drawing/2014/main" id="{F096FE41-5DF8-3B8A-99CF-C4F98A20037C}"/>
-              </a:ext>
-            </a:extLst>
-          </p:cNvPr>
-          <p:cNvSpPr>
-            <a:spLocks noGrp="1"/>
-          </p:cNvSpPr>
-          <p:nvPr>
-            <p:ph idx="1"/>
-          </p:nvPr>
-        </p:nvSpPr>
-        <p:spPr>
-          <a:xfrm>
-            <a:off x="108156" y="599769"/>
-            <a:ext cx="11759380" cy="6105832"/>
-          </a:xfrm>
-        </p:spPr>
-        <p:txBody>
-          <a:bodyPr/>
-          <a:lstStyle/>
-          <a:p>
-            <a:r>
-              <a:rPr lang="en-US" dirty="0">
-                <a:effectLst/>
-              </a:rPr>
-              <a:t>It is an object (or a set of callbacks) that defines </a:t>
-            </a:r>
-            <a:r>
-              <a:rPr lang="en-US" i="1" dirty="0">
-                <a:effectLst/>
-              </a:rPr>
-              <a:t>how</a:t>
-            </a:r>
-            <a:r>
-              <a:rPr lang="en-US" dirty="0">
-                <a:effectLst/>
-              </a:rPr>
-              <a:t> to handle the data coming from the Observable</a:t>
-            </a:r>
-            <a:endParaRPr lang="en-US" dirty="0"/>
-          </a:p>
-          <a:p>
-            <a:endParaRPr lang="en-US" dirty="0"/>
-          </a:p>
-          <a:p>
-            <a:endParaRPr lang="en-US" dirty="0"/>
-          </a:p>
-          <a:p>
-            <a:endParaRPr lang="en-US" dirty="0"/>
-          </a:p>
-          <a:p>
-            <a:pPr marL="36900" indent="0">
-              <a:buNone/>
-            </a:pPr>
-            <a:endParaRPr lang="en-US"/>
-          </a:p>
-          <a:p>
-            <a:endParaRPr lang="en-US"/>
-          </a:p>
-          <a:p>
-            <a:r>
-              <a:rPr lang="en-US"/>
-              <a:t>The </a:t>
-            </a:r>
-            <a:r>
-              <a:rPr lang="en-US" dirty="0"/>
-              <a:t>object passed inside the </a:t>
-            </a:r>
-            <a:r>
-              <a:rPr lang="en-US" b="1" dirty="0">
-                <a:solidFill>
-                  <a:srgbClr val="FFFF00"/>
-                </a:solidFill>
-              </a:rPr>
-              <a:t>.subscribe()</a:t>
-            </a:r>
-            <a:r>
-              <a:rPr lang="en-US" dirty="0"/>
-              <a:t> method is </a:t>
-            </a:r>
-            <a:r>
-              <a:rPr lang="en-US"/>
-              <a:t>the </a:t>
-            </a:r>
-            <a:r>
-              <a:rPr lang="en-US" b="1">
-                <a:solidFill>
-                  <a:srgbClr val="FFFF00"/>
-                </a:solidFill>
-              </a:rPr>
-              <a:t>Observer</a:t>
-            </a:r>
-          </a:p>
-        </p:txBody>
-      </p:sp>
-      <p:pic>
-        <p:nvPicPr>
-          <p:cNvPr id="6" name="Picture 5">
-            <a:extLst>
-              <a:ext uri="{FF2B5EF4-FFF2-40B4-BE49-F238E27FC236}">
-                <a16:creationId xmlns:a16="http://schemas.microsoft.com/office/drawing/2014/main" id="{2AE29D33-4B89-224D-D545-09A825300FF6}"/>
+                <a16:creationId xmlns:a16="http://schemas.microsoft.com/office/drawing/2014/main" id="{57539ED8-C96E-6231-2F1A-ED9CACC5B9EE}"/>
               </a:ext>
             </a:extLst>
           </p:cNvPr>
           <p:cNvPicPr>
-            <a:picLocks noChangeAspect="1"/>
+            <a:picLocks noGrp="1" noChangeAspect="1"/>
           </p:cNvPicPr>
-          <p:nvPr/>
+          <p:nvPr>
+            <p:ph idx="1"/>
+          </p:nvPr>
         </p:nvPicPr>
         <p:blipFill>
           <a:blip r:embed="rId2"/>
@@ -6961,20 +6702,27 @@
         </p:blipFill>
         <p:spPr>
           <a:xfrm>
-            <a:off x="324464" y="995180"/>
-            <a:ext cx="4176416" cy="1926924"/>
+            <a:off x="290796" y="1437008"/>
+            <a:ext cx="9552979" cy="630386"/>
           </a:xfrm>
           <a:prstGeom prst="rect">
             <a:avLst/>
           </a:prstGeom>
+          <a:effectLst>
+            <a:outerShdw blurRad="25400" dir="17880000">
+              <a:srgbClr val="000000">
+                <a:alpha val="46000"/>
+              </a:srgbClr>
+            </a:outerShdw>
+          </a:effectLst>
         </p:spPr>
       </p:pic>
       <p:pic>
         <p:nvPicPr>
-          <p:cNvPr id="5" name="Picture 4">
+          <p:cNvPr id="9" name="Picture 8">
             <a:extLst>
               <a:ext uri="{FF2B5EF4-FFF2-40B4-BE49-F238E27FC236}">
-                <a16:creationId xmlns:a16="http://schemas.microsoft.com/office/drawing/2014/main" id="{4F8F0157-5E2D-F2CD-B55F-8D421DA4F5E5}"/>
+                <a16:creationId xmlns:a16="http://schemas.microsoft.com/office/drawing/2014/main" id="{9F1A0193-51DD-5F37-A766-20A701398356}"/>
               </a:ext>
             </a:extLst>
           </p:cNvPr>
@@ -6991,8 +6739,38 @@
         </p:blipFill>
         <p:spPr>
           <a:xfrm>
-            <a:off x="324463" y="3830210"/>
-            <a:ext cx="4346927" cy="2486879"/>
+            <a:off x="290797" y="2213176"/>
+            <a:ext cx="9552982" cy="630386"/>
+          </a:xfrm>
+          <a:prstGeom prst="rect">
+            <a:avLst/>
+          </a:prstGeom>
+        </p:spPr>
+      </p:pic>
+      <p:pic>
+        <p:nvPicPr>
+          <p:cNvPr id="11" name="Picture 10">
+            <a:extLst>
+              <a:ext uri="{FF2B5EF4-FFF2-40B4-BE49-F238E27FC236}">
+                <a16:creationId xmlns:a16="http://schemas.microsoft.com/office/drawing/2014/main" id="{CFF85CF3-A54B-3CAA-A07C-2B77E01A640B}"/>
+              </a:ext>
+            </a:extLst>
+          </p:cNvPr>
+          <p:cNvPicPr>
+            <a:picLocks noChangeAspect="1"/>
+          </p:cNvPicPr>
+          <p:nvPr/>
+        </p:nvPicPr>
+        <p:blipFill>
+          <a:blip r:embed="rId4"/>
+          <a:stretch>
+            <a:fillRect/>
+          </a:stretch>
+        </p:blipFill>
+        <p:spPr>
+          <a:xfrm>
+            <a:off x="290796" y="713435"/>
+            <a:ext cx="4090285" cy="648324"/>
           </a:xfrm>
           <a:prstGeom prst="rect">
             <a:avLst/>
@@ -7002,7 +6780,7 @@
     </p:spTree>
     <p:extLst>
       <p:ext uri="{BB962C8B-B14F-4D97-AF65-F5344CB8AC3E}">
-        <p14:creationId xmlns:p14="http://schemas.microsoft.com/office/powerpoint/2010/main" val="2360813891"/>
+        <p14:creationId xmlns:p14="http://schemas.microsoft.com/office/powerpoint/2010/main" val="3146740146"/>
       </p:ext>
     </p:extLst>
   </p:cSld>
@@ -7034,7 +6812,7 @@
           <p:cNvPr id="2" name="Title 1">
             <a:extLst>
               <a:ext uri="{FF2B5EF4-FFF2-40B4-BE49-F238E27FC236}">
-                <a16:creationId xmlns:a16="http://schemas.microsoft.com/office/drawing/2014/main" id="{EB00F302-55BD-6F9E-F1D9-C6B30B72D81B}"/>
+                <a16:creationId xmlns:a16="http://schemas.microsoft.com/office/drawing/2014/main" id="{4A6DDFF4-8539-CDAC-581A-0E7EA59EE27A}"/>
               </a:ext>
             </a:extLst>
           </p:cNvPr>
@@ -7047,119 +6825,94 @@
         </p:nvSpPr>
         <p:spPr>
           <a:xfrm>
-            <a:off x="913795" y="0"/>
-            <a:ext cx="10353762" cy="619432"/>
-          </a:xfrm>
-        </p:spPr>
-        <p:txBody>
-          <a:bodyPr>
-            <a:normAutofit fontScale="90000"/>
-          </a:bodyPr>
-          <a:lstStyle/>
-          <a:p>
-            <a:r>
-              <a:rPr lang="en-US" sz="4400" b="1" dirty="0">
-                <a:solidFill>
-                  <a:srgbClr val="FF0000"/>
-                </a:solidFill>
-              </a:rPr>
-              <a:t>Subscriber</a:t>
-            </a:r>
-          </a:p>
-        </p:txBody>
-      </p:sp>
-      <p:sp>
-        <p:nvSpPr>
-          <p:cNvPr id="3" name="Content Placeholder 2">
+            <a:off x="913795" y="96350"/>
+            <a:ext cx="10353762" cy="970450"/>
+          </a:xfrm>
+        </p:spPr>
+        <p:txBody>
+          <a:bodyPr/>
+          <a:lstStyle/>
+          <a:p>
+            <a:r>
+              <a:rPr lang="en-US"/>
+              <a:t>Navigate Via TS</a:t>
+            </a:r>
+          </a:p>
+        </p:txBody>
+      </p:sp>
+      <p:pic>
+        <p:nvPicPr>
+          <p:cNvPr id="5" name="Content Placeholder 4">
             <a:extLst>
               <a:ext uri="{FF2B5EF4-FFF2-40B4-BE49-F238E27FC236}">
-                <a16:creationId xmlns:a16="http://schemas.microsoft.com/office/drawing/2014/main" id="{A678A388-1F3E-2877-3CB0-63D95487DD76}"/>
+                <a16:creationId xmlns:a16="http://schemas.microsoft.com/office/drawing/2014/main" id="{079201EF-0C16-9208-FEFB-608B13E75C8C}"/>
               </a:ext>
             </a:extLst>
           </p:cNvPr>
-          <p:cNvSpPr>
-            <a:spLocks noGrp="1"/>
-          </p:cNvSpPr>
+          <p:cNvPicPr>
+            <a:picLocks noGrp="1" noChangeAspect="1"/>
+          </p:cNvPicPr>
           <p:nvPr>
             <p:ph idx="1"/>
           </p:nvPr>
-        </p:nvSpPr>
-        <p:spPr>
-          <a:xfrm>
-            <a:off x="196645" y="707923"/>
-            <a:ext cx="11818374" cy="5899354"/>
-          </a:xfrm>
-        </p:spPr>
-        <p:txBody>
-          <a:bodyPr/>
-          <a:lstStyle/>
-          <a:p>
-            <a:r>
-              <a:rPr lang="en-US" dirty="0">
-                <a:effectLst/>
-              </a:rPr>
-              <a:t>acts as the middleman: It takes value from the Observable and hands it to the Observer's next() method</a:t>
-            </a:r>
-            <a:endParaRPr lang="en-US" dirty="0"/>
-          </a:p>
-          <a:p>
-            <a:r>
-              <a:rPr lang="en-US" dirty="0"/>
-              <a:t>The </a:t>
-            </a:r>
-            <a:r>
-              <a:rPr lang="en-US" b="1" dirty="0">
-                <a:solidFill>
-                  <a:srgbClr val="FFFF00"/>
-                </a:solidFill>
-              </a:rPr>
-              <a:t>subscriber</a:t>
-            </a:r>
-            <a:r>
-              <a:rPr lang="en-US" dirty="0"/>
-              <a:t> parameter inside the new </a:t>
-            </a:r>
-            <a:r>
-              <a:rPr lang="en-US" b="1" dirty="0">
-                <a:solidFill>
-                  <a:srgbClr val="FFFF00"/>
-                </a:solidFill>
-              </a:rPr>
-              <a:t>Observable constructor</a:t>
-            </a:r>
-            <a:r>
-              <a:rPr lang="en-US" dirty="0"/>
-              <a:t> </a:t>
-            </a:r>
-            <a:r>
-              <a:rPr lang="en-US"/>
-              <a:t>is the </a:t>
-            </a:r>
-            <a:r>
-              <a:rPr lang="en-US" b="1">
-                <a:solidFill>
-                  <a:srgbClr val="00B050"/>
-                </a:solidFill>
-              </a:rPr>
-              <a:t>Subscriber</a:t>
-            </a:r>
-            <a:r>
-              <a:rPr lang="en-US" dirty="0"/>
-              <a:t>.</a:t>
-            </a:r>
-          </a:p>
-          <a:p>
-            <a:endParaRPr lang="en-US" dirty="0"/>
-          </a:p>
-          <a:p>
-            <a:endParaRPr lang="en-US" dirty="0"/>
-          </a:p>
-        </p:txBody>
-      </p:sp>
+        </p:nvPicPr>
+        <p:blipFill>
+          <a:blip r:embed="rId2"/>
+          <a:stretch>
+            <a:fillRect/>
+          </a:stretch>
+        </p:blipFill>
+        <p:spPr>
+          <a:xfrm>
+            <a:off x="913795" y="1066800"/>
+            <a:ext cx="6024406" cy="640224"/>
+          </a:xfrm>
+          <a:prstGeom prst="rect">
+            <a:avLst/>
+          </a:prstGeom>
+          <a:effectLst>
+            <a:outerShdw blurRad="25400" dir="17880000">
+              <a:srgbClr val="000000">
+                <a:alpha val="46000"/>
+              </a:srgbClr>
+            </a:outerShdw>
+          </a:effectLst>
+        </p:spPr>
+      </p:pic>
+      <p:pic>
+        <p:nvPicPr>
+          <p:cNvPr id="7" name="Picture 6">
+            <a:extLst>
+              <a:ext uri="{FF2B5EF4-FFF2-40B4-BE49-F238E27FC236}">
+                <a16:creationId xmlns:a16="http://schemas.microsoft.com/office/drawing/2014/main" id="{1CE1A31C-79F1-19F1-8861-F95ED2039B5D}"/>
+              </a:ext>
+            </a:extLst>
+          </p:cNvPr>
+          <p:cNvPicPr>
+            <a:picLocks noChangeAspect="1"/>
+          </p:cNvPicPr>
+          <p:nvPr/>
+        </p:nvPicPr>
+        <p:blipFill>
+          <a:blip r:embed="rId3"/>
+          <a:stretch>
+            <a:fillRect/>
+          </a:stretch>
+        </p:blipFill>
+        <p:spPr>
+          <a:xfrm>
+            <a:off x="913795" y="1865672"/>
+            <a:ext cx="6024406" cy="640224"/>
+          </a:xfrm>
+          <a:prstGeom prst="rect">
+            <a:avLst/>
+          </a:prstGeom>
+        </p:spPr>
+      </p:pic>
     </p:spTree>
     <p:extLst>
       <p:ext uri="{BB962C8B-B14F-4D97-AF65-F5344CB8AC3E}">
-        <p14:creationId xmlns:p14="http://schemas.microsoft.com/office/powerpoint/2010/main" val="198467932"/>
+        <p14:creationId xmlns:p14="http://schemas.microsoft.com/office/powerpoint/2010/main" val="4170399191"/>
       </p:ext>
     </p:extLst>
   </p:cSld>
@@ -7191,7 +6944,7 @@
           <p:cNvPr id="2" name="Title 1">
             <a:extLst>
               <a:ext uri="{FF2B5EF4-FFF2-40B4-BE49-F238E27FC236}">
-                <a16:creationId xmlns:a16="http://schemas.microsoft.com/office/drawing/2014/main" id="{94CFDAFF-652F-D97C-B156-17FBE471CADE}"/>
+                <a16:creationId xmlns:a16="http://schemas.microsoft.com/office/drawing/2014/main" id="{6F074E3F-1632-D5DC-2837-58BED44C5F34}"/>
               </a:ext>
             </a:extLst>
           </p:cNvPr>
@@ -7205,7 +6958,7 @@
         <p:spPr>
           <a:xfrm>
             <a:off x="913795" y="0"/>
-            <a:ext cx="10353762" cy="589935"/>
+            <a:ext cx="10353762" cy="472273"/>
           </a:xfrm>
         </p:spPr>
         <p:txBody>
@@ -7215,8 +6968,20 @@
           <a:lstStyle/>
           <a:p>
             <a:r>
-              <a:rPr lang="en-US" b="1" dirty="0"/>
-              <a:t>Observable example</a:t>
+              <a:rPr lang="en-US" b="1" err="1">
+                <a:solidFill>
+                  <a:srgbClr val="FF0000"/>
+                </a:solidFill>
+              </a:rPr>
+              <a:t>RouterLinkActive</a:t>
+            </a:r>
+            <a:r>
+              <a:rPr lang="en-US" b="1">
+                <a:solidFill>
+                  <a:srgbClr val="FF0000"/>
+                </a:solidFill>
+              </a:rPr>
+              <a:t>, </a:t>
             </a:r>
           </a:p>
         </p:txBody>
@@ -7226,7 +6991,7 @@
           <p:cNvPr id="5" name="Content Placeholder 4">
             <a:extLst>
               <a:ext uri="{FF2B5EF4-FFF2-40B4-BE49-F238E27FC236}">
-                <a16:creationId xmlns:a16="http://schemas.microsoft.com/office/drawing/2014/main" id="{F72204C2-0829-E37C-9C3D-E7463B466F6C}"/>
+                <a16:creationId xmlns:a16="http://schemas.microsoft.com/office/drawing/2014/main" id="{7541D93D-A3A5-9C73-82B4-5E3B80BFD918}"/>
               </a:ext>
             </a:extLst>
           </p:cNvPr>
@@ -7245,8 +7010,8 @@
         </p:blipFill>
         <p:spPr>
           <a:xfrm>
-            <a:off x="258889" y="721816"/>
-            <a:ext cx="5728817" cy="2193464"/>
+            <a:off x="119959" y="637632"/>
+            <a:ext cx="3665353" cy="580650"/>
           </a:xfrm>
           <a:prstGeom prst="rect">
             <a:avLst/>
@@ -7262,10 +7027,10 @@
       </p:pic>
       <p:pic>
         <p:nvPicPr>
-          <p:cNvPr id="7" name="Picture 6">
+          <p:cNvPr id="15" name="Picture 14">
             <a:extLst>
               <a:ext uri="{FF2B5EF4-FFF2-40B4-BE49-F238E27FC236}">
-                <a16:creationId xmlns:a16="http://schemas.microsoft.com/office/drawing/2014/main" id="{108C0BDF-7358-793F-BD0C-A5CFDE7B1E18}"/>
+                <a16:creationId xmlns:a16="http://schemas.microsoft.com/office/drawing/2014/main" id="{8AD4D536-5A2F-6CAB-63C3-79706F63B59A}"/>
               </a:ext>
             </a:extLst>
           </p:cNvPr>
@@ -7282,8 +7047,68 @@
         </p:blipFill>
         <p:spPr>
           <a:xfrm>
-            <a:off x="260565" y="3298371"/>
-            <a:ext cx="5727141" cy="2427664"/>
+            <a:off x="119959" y="1314438"/>
+            <a:ext cx="3778176" cy="472272"/>
+          </a:xfrm>
+          <a:prstGeom prst="rect">
+            <a:avLst/>
+          </a:prstGeom>
+        </p:spPr>
+      </p:pic>
+      <p:pic>
+        <p:nvPicPr>
+          <p:cNvPr id="17" name="Picture 16">
+            <a:extLst>
+              <a:ext uri="{FF2B5EF4-FFF2-40B4-BE49-F238E27FC236}">
+                <a16:creationId xmlns:a16="http://schemas.microsoft.com/office/drawing/2014/main" id="{AD07B321-3FD8-A0A1-21D3-F6C13CE6DF5B}"/>
+              </a:ext>
+            </a:extLst>
+          </p:cNvPr>
+          <p:cNvPicPr>
+            <a:picLocks noChangeAspect="1"/>
+          </p:cNvPicPr>
+          <p:nvPr/>
+        </p:nvPicPr>
+        <p:blipFill>
+          <a:blip r:embed="rId4"/>
+          <a:stretch>
+            <a:fillRect/>
+          </a:stretch>
+        </p:blipFill>
+        <p:spPr>
+          <a:xfrm>
+            <a:off x="119959" y="1882866"/>
+            <a:ext cx="3778176" cy="608470"/>
+          </a:xfrm>
+          <a:prstGeom prst="rect">
+            <a:avLst/>
+          </a:prstGeom>
+        </p:spPr>
+      </p:pic>
+      <p:pic>
+        <p:nvPicPr>
+          <p:cNvPr id="19" name="Picture 18">
+            <a:extLst>
+              <a:ext uri="{FF2B5EF4-FFF2-40B4-BE49-F238E27FC236}">
+                <a16:creationId xmlns:a16="http://schemas.microsoft.com/office/drawing/2014/main" id="{421C60A0-82B2-91E0-AAF1-AEA269431177}"/>
+              </a:ext>
+            </a:extLst>
+          </p:cNvPr>
+          <p:cNvPicPr>
+            <a:picLocks noChangeAspect="1"/>
+          </p:cNvPicPr>
+          <p:nvPr/>
+        </p:nvPicPr>
+        <p:blipFill>
+          <a:blip r:embed="rId5"/>
+          <a:stretch>
+            <a:fillRect/>
+          </a:stretch>
+        </p:blipFill>
+        <p:spPr>
+          <a:xfrm>
+            <a:off x="119959" y="2638587"/>
+            <a:ext cx="5375868" cy="1000364"/>
           </a:xfrm>
           <a:prstGeom prst="rect">
             <a:avLst/>
@@ -7293,7 +7118,7 @@
     </p:spTree>
     <p:extLst>
       <p:ext uri="{BB962C8B-B14F-4D97-AF65-F5344CB8AC3E}">
-        <p14:creationId xmlns:p14="http://schemas.microsoft.com/office/powerpoint/2010/main" val="794002608"/>
+        <p14:creationId xmlns:p14="http://schemas.microsoft.com/office/powerpoint/2010/main" val="4113524909"/>
       </p:ext>
     </p:extLst>
   </p:cSld>
@@ -7325,7 +7150,7 @@
           <p:cNvPr id="2" name="Title 1">
             <a:extLst>
               <a:ext uri="{FF2B5EF4-FFF2-40B4-BE49-F238E27FC236}">
-                <a16:creationId xmlns:a16="http://schemas.microsoft.com/office/drawing/2014/main" id="{025734B3-3F11-7C03-2D92-0B3DB8D4E2B5}"/>
+                <a16:creationId xmlns:a16="http://schemas.microsoft.com/office/drawing/2014/main" id="{8C5A01A3-1E11-9C77-884C-98E8ACBF7E94}"/>
               </a:ext>
             </a:extLst>
           </p:cNvPr>
@@ -7339,7 +7164,7 @@
         <p:spPr>
           <a:xfrm>
             <a:off x="913795" y="0"/>
-            <a:ext cx="10353762" cy="580103"/>
+            <a:ext cx="10353762" cy="542611"/>
           </a:xfrm>
         </p:spPr>
         <p:txBody>
@@ -7349,126 +7174,23 @@
           <a:lstStyle/>
           <a:p>
             <a:r>
-              <a:rPr lang="en-US" b="1" dirty="0">
+              <a:rPr lang="en-US" b="1" err="1">
                 <a:solidFill>
                   <a:srgbClr val="FF0000"/>
                 </a:solidFill>
               </a:rPr>
-              <a:t>Creating new component</a:t>
-            </a:r>
-          </a:p>
-        </p:txBody>
-      </p:sp>
-      <p:sp>
-        <p:nvSpPr>
-          <p:cNvPr id="3" name="Content Placeholder 2">
+              <a:t>routerLinkActiveOptions</a:t>
+            </a:r>
+            <a:endParaRPr lang="en-US"/>
+          </a:p>
+        </p:txBody>
+      </p:sp>
+      <p:pic>
+        <p:nvPicPr>
+          <p:cNvPr id="4" name="Picture 3">
             <a:extLst>
               <a:ext uri="{FF2B5EF4-FFF2-40B4-BE49-F238E27FC236}">
-                <a16:creationId xmlns:a16="http://schemas.microsoft.com/office/drawing/2014/main" id="{963D2559-9DB4-4235-E157-38E45495D097}"/>
-              </a:ext>
-            </a:extLst>
-          </p:cNvPr>
-          <p:cNvSpPr>
-            <a:spLocks noGrp="1"/>
-          </p:cNvSpPr>
-          <p:nvPr>
-            <p:ph idx="1"/>
-          </p:nvPr>
-        </p:nvSpPr>
-        <p:spPr>
-          <a:xfrm>
-            <a:off x="432618" y="580103"/>
-            <a:ext cx="11375923" cy="6145162"/>
-          </a:xfrm>
-        </p:spPr>
-        <p:txBody>
-          <a:bodyPr/>
-          <a:lstStyle/>
-          <a:p>
-            <a:r>
-              <a:rPr lang="en-US" dirty="0"/>
-              <a:t>ng g c </a:t>
-            </a:r>
-            <a:r>
-              <a:rPr lang="en-US" dirty="0" err="1"/>
-              <a:t>componentName</a:t>
-            </a:r>
-            <a:r>
-              <a:rPr lang="en-US" dirty="0"/>
-              <a:t> --skip-tests</a:t>
-            </a:r>
-          </a:p>
-          <a:p>
-            <a:r>
-              <a:rPr lang="en-US" b="1" dirty="0">
-                <a:solidFill>
-                  <a:srgbClr val="FF0000"/>
-                </a:solidFill>
-              </a:rPr>
-              <a:t>ng</a:t>
-            </a:r>
-            <a:r>
-              <a:rPr lang="en-US" dirty="0"/>
-              <a:t> g c project-details </a:t>
-            </a:r>
-            <a:r>
-              <a:rPr lang="en-US" b="1" dirty="0">
-                <a:solidFill>
-                  <a:srgbClr val="0070C0"/>
-                </a:solidFill>
-              </a:rPr>
-              <a:t>--skip-tests</a:t>
-            </a:r>
-          </a:p>
-          <a:p>
-            <a:pPr lvl="1"/>
-            <a:r>
-              <a:rPr lang="en-US" dirty="0"/>
-              <a:t>project-details folder will be created and includes</a:t>
-            </a:r>
-          </a:p>
-          <a:p>
-            <a:pPr lvl="2"/>
-            <a:r>
-              <a:rPr lang="en-US" sz="1800" dirty="0" err="1"/>
-              <a:t>ProjectDetails.component.ts</a:t>
-            </a:r>
-            <a:endParaRPr lang="en-US" sz="1800" dirty="0"/>
-          </a:p>
-          <a:p>
-            <a:pPr lvl="2"/>
-            <a:r>
-              <a:rPr lang="en-US" sz="1800" dirty="0"/>
-              <a:t>ProjectDetails.Component.html</a:t>
-            </a:r>
-          </a:p>
-          <a:p>
-            <a:pPr lvl="2"/>
-            <a:r>
-              <a:rPr lang="en-US" sz="1800" dirty="0"/>
-              <a:t>ProjectDetails.Component.css</a:t>
-            </a:r>
-          </a:p>
-          <a:p>
-            <a:endParaRPr lang="en-US" dirty="0"/>
-          </a:p>
-          <a:p>
-            <a:endParaRPr lang="en-US" dirty="0"/>
-          </a:p>
-          <a:p>
-            <a:endParaRPr lang="en-US" dirty="0"/>
-          </a:p>
-          <a:p>
-            <a:endParaRPr lang="en-US" dirty="0"/>
-          </a:p>
-        </p:txBody>
-      </p:sp>
-      <p:pic>
-        <p:nvPicPr>
-          <p:cNvPr id="5" name="Picture 4">
-            <a:extLst>
-              <a:ext uri="{FF2B5EF4-FFF2-40B4-BE49-F238E27FC236}">
-                <a16:creationId xmlns:a16="http://schemas.microsoft.com/office/drawing/2014/main" id="{54637D5B-8B8B-98DD-59F9-9474B5F23C4A}"/>
+                <a16:creationId xmlns:a16="http://schemas.microsoft.com/office/drawing/2014/main" id="{6E69ABF2-B39B-7000-B910-D04E38E1454D}"/>
               </a:ext>
             </a:extLst>
           </p:cNvPr>
@@ -7485,8 +7207,158 @@
         </p:blipFill>
         <p:spPr>
           <a:xfrm>
-            <a:off x="194372" y="3143800"/>
-            <a:ext cx="11729041" cy="1810037"/>
+            <a:off x="110533" y="542610"/>
+            <a:ext cx="5150788" cy="2341267"/>
+          </a:xfrm>
+          <a:prstGeom prst="rect">
+            <a:avLst/>
+          </a:prstGeom>
+        </p:spPr>
+      </p:pic>
+      <p:pic>
+        <p:nvPicPr>
+          <p:cNvPr id="7" name="Picture 6">
+            <a:extLst>
+              <a:ext uri="{FF2B5EF4-FFF2-40B4-BE49-F238E27FC236}">
+                <a16:creationId xmlns:a16="http://schemas.microsoft.com/office/drawing/2014/main" id="{D3388C7C-297C-31FB-B9C6-A792CA4B8859}"/>
+              </a:ext>
+            </a:extLst>
+          </p:cNvPr>
+          <p:cNvPicPr>
+            <a:picLocks noChangeAspect="1"/>
+          </p:cNvPicPr>
+          <p:nvPr/>
+        </p:nvPicPr>
+        <p:blipFill>
+          <a:blip r:embed="rId3"/>
+          <a:stretch>
+            <a:fillRect/>
+          </a:stretch>
+        </p:blipFill>
+        <p:spPr>
+          <a:xfrm>
+            <a:off x="110533" y="3074797"/>
+            <a:ext cx="3972921" cy="3086402"/>
+          </a:xfrm>
+          <a:prstGeom prst="rect">
+            <a:avLst/>
+          </a:prstGeom>
+        </p:spPr>
+      </p:pic>
+      <p:pic>
+        <p:nvPicPr>
+          <p:cNvPr id="9" name="Picture 8">
+            <a:extLst>
+              <a:ext uri="{FF2B5EF4-FFF2-40B4-BE49-F238E27FC236}">
+                <a16:creationId xmlns:a16="http://schemas.microsoft.com/office/drawing/2014/main" id="{8982232A-3E3C-20CB-6FF6-1F07B891859A}"/>
+              </a:ext>
+            </a:extLst>
+          </p:cNvPr>
+          <p:cNvPicPr>
+            <a:picLocks noChangeAspect="1"/>
+          </p:cNvPicPr>
+          <p:nvPr/>
+        </p:nvPicPr>
+        <p:blipFill>
+          <a:blip r:embed="rId4"/>
+          <a:stretch>
+            <a:fillRect/>
+          </a:stretch>
+        </p:blipFill>
+        <p:spPr>
+          <a:xfrm>
+            <a:off x="4083454" y="3743010"/>
+            <a:ext cx="1590675" cy="1962150"/>
+          </a:xfrm>
+          <a:prstGeom prst="rect">
+            <a:avLst/>
+          </a:prstGeom>
+        </p:spPr>
+      </p:pic>
+      <p:pic>
+        <p:nvPicPr>
+          <p:cNvPr id="11" name="Picture 10">
+            <a:extLst>
+              <a:ext uri="{FF2B5EF4-FFF2-40B4-BE49-F238E27FC236}">
+                <a16:creationId xmlns:a16="http://schemas.microsoft.com/office/drawing/2014/main" id="{B4F43EB5-4E9C-5036-DB47-7C79AB4A5C3A}"/>
+              </a:ext>
+            </a:extLst>
+          </p:cNvPr>
+          <p:cNvPicPr>
+            <a:picLocks noChangeAspect="1"/>
+          </p:cNvPicPr>
+          <p:nvPr/>
+        </p:nvPicPr>
+        <p:blipFill>
+          <a:blip r:embed="rId5"/>
+          <a:stretch>
+            <a:fillRect/>
+          </a:stretch>
+        </p:blipFill>
+        <p:spPr>
+          <a:xfrm>
+            <a:off x="6294035" y="866060"/>
+            <a:ext cx="3523205" cy="2413534"/>
+          </a:xfrm>
+          <a:prstGeom prst="rect">
+            <a:avLst/>
+          </a:prstGeom>
+        </p:spPr>
+      </p:pic>
+      <p:pic>
+        <p:nvPicPr>
+          <p:cNvPr id="15" name="Picture 14">
+            <a:extLst>
+              <a:ext uri="{FF2B5EF4-FFF2-40B4-BE49-F238E27FC236}">
+                <a16:creationId xmlns:a16="http://schemas.microsoft.com/office/drawing/2014/main" id="{66440FA3-1361-A746-4C2B-61CCD53B7477}"/>
+              </a:ext>
+            </a:extLst>
+          </p:cNvPr>
+          <p:cNvPicPr>
+            <a:picLocks noChangeAspect="1"/>
+          </p:cNvPicPr>
+          <p:nvPr/>
+        </p:nvPicPr>
+        <p:blipFill>
+          <a:blip r:embed="rId6"/>
+          <a:stretch>
+            <a:fillRect/>
+          </a:stretch>
+        </p:blipFill>
+        <p:spPr>
+          <a:xfrm>
+            <a:off x="9817240" y="1177477"/>
+            <a:ext cx="1876425" cy="1790700"/>
+          </a:xfrm>
+          <a:prstGeom prst="rect">
+            <a:avLst/>
+          </a:prstGeom>
+        </p:spPr>
+      </p:pic>
+      <p:pic>
+        <p:nvPicPr>
+          <p:cNvPr id="17" name="Picture 16">
+            <a:extLst>
+              <a:ext uri="{FF2B5EF4-FFF2-40B4-BE49-F238E27FC236}">
+                <a16:creationId xmlns:a16="http://schemas.microsoft.com/office/drawing/2014/main" id="{4652D9DB-C436-C549-F06C-BB59EA4B27C9}"/>
+              </a:ext>
+            </a:extLst>
+          </p:cNvPr>
+          <p:cNvPicPr>
+            <a:picLocks noChangeAspect="1"/>
+          </p:cNvPicPr>
+          <p:nvPr/>
+        </p:nvPicPr>
+        <p:blipFill>
+          <a:blip r:embed="rId7"/>
+          <a:stretch>
+            <a:fillRect/>
+          </a:stretch>
+        </p:blipFill>
+        <p:spPr>
+          <a:xfrm>
+            <a:off x="6517873" y="3743010"/>
+            <a:ext cx="4771809" cy="1790700"/>
           </a:xfrm>
           <a:prstGeom prst="rect">
             <a:avLst/>
@@ -7496,7 +7368,7 @@
     </p:spTree>
     <p:extLst>
       <p:ext uri="{BB962C8B-B14F-4D97-AF65-F5344CB8AC3E}">
-        <p14:creationId xmlns:p14="http://schemas.microsoft.com/office/powerpoint/2010/main" val="2534247288"/>
+        <p14:creationId xmlns:p14="http://schemas.microsoft.com/office/powerpoint/2010/main" val="3014933232"/>
       </p:ext>
     </p:extLst>
   </p:cSld>
@@ -7528,7 +7400,7 @@
           <p:cNvPr id="2" name="Title 1">
             <a:extLst>
               <a:ext uri="{FF2B5EF4-FFF2-40B4-BE49-F238E27FC236}">
-                <a16:creationId xmlns:a16="http://schemas.microsoft.com/office/drawing/2014/main" id="{EFC4C49B-2F1D-97B3-0A85-352A55AC2ECB}"/>
+                <a16:creationId xmlns:a16="http://schemas.microsoft.com/office/drawing/2014/main" id="{C38291A9-D68F-593A-1138-70C5711B2DE2}"/>
               </a:ext>
             </a:extLst>
           </p:cNvPr>
@@ -7542,7 +7414,7 @@
         <p:spPr>
           <a:xfrm>
             <a:off x="913795" y="0"/>
-            <a:ext cx="10353762" cy="747252"/>
+            <a:ext cx="10353762" cy="970450"/>
           </a:xfrm>
         </p:spPr>
         <p:txBody>
@@ -7550,8 +7422,8 @@
           <a:lstStyle/>
           <a:p>
             <a:r>
-              <a:rPr lang="en-US" b="1" dirty="0"/>
-              <a:t>Creating side bar</a:t>
+              <a:rPr lang="en-US"/>
+              <a:t>Router outlet</a:t>
             </a:r>
           </a:p>
         </p:txBody>
@@ -7561,7 +7433,7 @@
           <p:cNvPr id="3" name="Content Placeholder 2">
             <a:extLst>
               <a:ext uri="{FF2B5EF4-FFF2-40B4-BE49-F238E27FC236}">
-                <a16:creationId xmlns:a16="http://schemas.microsoft.com/office/drawing/2014/main" id="{6616EB86-5D99-4E2C-2247-FA4A7724D22A}"/>
+                <a16:creationId xmlns:a16="http://schemas.microsoft.com/office/drawing/2014/main" id="{30C2FC2D-1F50-F2D6-CA80-6F4001707B64}"/>
               </a:ext>
             </a:extLst>
           </p:cNvPr>
@@ -7574,8 +7446,8 @@
         </p:nvSpPr>
         <p:spPr>
           <a:xfrm>
-            <a:off x="285134" y="747253"/>
-            <a:ext cx="11464413" cy="5702708"/>
+            <a:off x="120580" y="970451"/>
+            <a:ext cx="11635991" cy="5681558"/>
           </a:xfrm>
         </p:spPr>
         <p:txBody>
@@ -7583,24 +7455,76 @@
           <a:lstStyle/>
           <a:p>
             <a:r>
-              <a:rPr lang="en-US" dirty="0"/>
-              <a:t>ng g c </a:t>
-            </a:r>
-            <a:r>
-              <a:rPr lang="en-US" dirty="0" err="1"/>
-              <a:t>SideBar</a:t>
-            </a:r>
-            <a:r>
-              <a:rPr lang="en-US" dirty="0"/>
-              <a:t> --skip-tests</a:t>
-            </a:r>
-          </a:p>
-        </p:txBody>
-      </p:sp>
+              <a:rPr lang="en-US"/>
+              <a:t>In this example we have sidebar(dashboard) component // existed at layouts/dashboard </a:t>
+            </a:r>
+          </a:p>
+        </p:txBody>
+      </p:sp>
+      <p:pic>
+        <p:nvPicPr>
+          <p:cNvPr id="5" name="Picture 4">
+            <a:extLst>
+              <a:ext uri="{FF2B5EF4-FFF2-40B4-BE49-F238E27FC236}">
+                <a16:creationId xmlns:a16="http://schemas.microsoft.com/office/drawing/2014/main" id="{09135703-096A-213A-39E5-64F8AD98444D}"/>
+              </a:ext>
+            </a:extLst>
+          </p:cNvPr>
+          <p:cNvPicPr>
+            <a:picLocks noChangeAspect="1"/>
+          </p:cNvPicPr>
+          <p:nvPr/>
+        </p:nvPicPr>
+        <p:blipFill>
+          <a:blip r:embed="rId2"/>
+          <a:stretch>
+            <a:fillRect/>
+          </a:stretch>
+        </p:blipFill>
+        <p:spPr>
+          <a:xfrm>
+            <a:off x="355251" y="1382872"/>
+            <a:ext cx="3568700" cy="573541"/>
+          </a:xfrm>
+          <a:prstGeom prst="rect">
+            <a:avLst/>
+          </a:prstGeom>
+        </p:spPr>
+      </p:pic>
+      <p:pic>
+        <p:nvPicPr>
+          <p:cNvPr id="7" name="Picture 6">
+            <a:extLst>
+              <a:ext uri="{FF2B5EF4-FFF2-40B4-BE49-F238E27FC236}">
+                <a16:creationId xmlns:a16="http://schemas.microsoft.com/office/drawing/2014/main" id="{F3632FE0-BBF0-41EE-5F36-135295B69C9A}"/>
+              </a:ext>
+            </a:extLst>
+          </p:cNvPr>
+          <p:cNvPicPr>
+            <a:picLocks noChangeAspect="1"/>
+          </p:cNvPicPr>
+          <p:nvPr/>
+        </p:nvPicPr>
+        <p:blipFill>
+          <a:blip r:embed="rId3"/>
+          <a:stretch>
+            <a:fillRect/>
+          </a:stretch>
+        </p:blipFill>
+        <p:spPr>
+          <a:xfrm>
+            <a:off x="355251" y="1956417"/>
+            <a:ext cx="10755201" cy="3048202"/>
+          </a:xfrm>
+          <a:prstGeom prst="rect">
+            <a:avLst/>
+          </a:prstGeom>
+        </p:spPr>
+      </p:pic>
     </p:spTree>
     <p:extLst>
       <p:ext uri="{BB962C8B-B14F-4D97-AF65-F5344CB8AC3E}">
-        <p14:creationId xmlns:p14="http://schemas.microsoft.com/office/powerpoint/2010/main" val="898701421"/>
+        <p14:creationId xmlns:p14="http://schemas.microsoft.com/office/powerpoint/2010/main" val="608228892"/>
       </p:ext>
     </p:extLst>
   </p:cSld>
@@ -7632,7 +7556,7 @@
           <p:cNvPr id="2" name="Title 1">
             <a:extLst>
               <a:ext uri="{FF2B5EF4-FFF2-40B4-BE49-F238E27FC236}">
-                <a16:creationId xmlns:a16="http://schemas.microsoft.com/office/drawing/2014/main" id="{8778D13E-4D03-33C1-BF51-610117BB7EB3}"/>
+                <a16:creationId xmlns:a16="http://schemas.microsoft.com/office/drawing/2014/main" id="{9AB8FB81-CAF0-BEDE-05F1-96E505B87CE7}"/>
               </a:ext>
             </a:extLst>
           </p:cNvPr>
@@ -7646,21 +7570,24 @@
         <p:spPr>
           <a:xfrm>
             <a:off x="913795" y="0"/>
-            <a:ext cx="10353762" cy="737419"/>
-          </a:xfrm>
-        </p:spPr>
-        <p:txBody>
-          <a:bodyPr/>
-          <a:lstStyle/>
-          <a:p>
-            <a:r>
-              <a:rPr lang="en-US" b="1" dirty="0">
+            <a:ext cx="10353762" cy="970450"/>
+          </a:xfrm>
+        </p:spPr>
+        <p:txBody>
+          <a:bodyPr>
+            <a:normAutofit/>
+          </a:bodyPr>
+          <a:lstStyle/>
+          <a:p>
+            <a:r>
+              <a:rPr lang="en-US" sz="4400" b="1">
                 <a:solidFill>
-                  <a:srgbClr val="0070C0"/>
+                  <a:srgbClr val="FF0000"/>
                 </a:solidFill>
               </a:rPr>
-              <a:t>Adding bootstrap &amp; Bootstrap icon</a:t>
-            </a:r>
+              <a:t>Binding</a:t>
+            </a:r>
+            <a:endParaRPr lang="en-US" sz="4400"/>
           </a:p>
         </p:txBody>
       </p:sp>
@@ -7669,7 +7596,7 @@
           <p:cNvPr id="3" name="Content Placeholder 2">
             <a:extLst>
               <a:ext uri="{FF2B5EF4-FFF2-40B4-BE49-F238E27FC236}">
-                <a16:creationId xmlns:a16="http://schemas.microsoft.com/office/drawing/2014/main" id="{5C9C21FE-7EFF-39B9-60D6-6206D8DBF34A}"/>
+                <a16:creationId xmlns:a16="http://schemas.microsoft.com/office/drawing/2014/main" id="{8D14B1D5-538A-EA13-52C2-4F04C8BE9298}"/>
               </a:ext>
             </a:extLst>
           </p:cNvPr>
@@ -7682,270 +7609,52 @@
         </p:nvSpPr>
         <p:spPr>
           <a:xfrm>
-            <a:off x="334296" y="737419"/>
-            <a:ext cx="11472517" cy="5456904"/>
-          </a:xfrm>
-        </p:spPr>
-        <p:txBody>
-          <a:bodyPr>
-            <a:normAutofit/>
-          </a:bodyPr>
-          <a:lstStyle/>
-          <a:p>
-            <a:r>
-              <a:rPr lang="en-US" sz="1800" b="1" dirty="0">
-                <a:solidFill>
-                  <a:srgbClr val="FFFF00"/>
-                </a:solidFill>
-              </a:rPr>
-              <a:t>ng</a:t>
-            </a:r>
-            <a:r>
-              <a:rPr lang="en-US" sz="1800" dirty="0"/>
-              <a:t> </a:t>
-            </a:r>
-            <a:r>
-              <a:rPr lang="en-US" sz="1800" b="1" dirty="0">
-                <a:solidFill>
-                  <a:srgbClr val="00B0F0"/>
-                </a:solidFill>
-              </a:rPr>
-              <a:t>add</a:t>
-            </a:r>
-            <a:r>
-              <a:rPr lang="en-US" sz="1800" dirty="0"/>
-              <a:t> </a:t>
-            </a:r>
-            <a:r>
-              <a:rPr lang="en-US" sz="1800" b="1" dirty="0">
-                <a:solidFill>
-                  <a:srgbClr val="00B050"/>
-                </a:solidFill>
-              </a:rPr>
-              <a:t>@ng-bootstrap/ng-bootstrap</a:t>
-            </a:r>
-            <a:r>
-              <a:rPr lang="en-US" sz="1800" dirty="0"/>
-              <a:t>  //</a:t>
-            </a:r>
-            <a:r>
-              <a:rPr lang="en-US" sz="1800" b="1" dirty="0"/>
-              <a:t>recommended, to use the component that need the JS code</a:t>
-            </a:r>
-          </a:p>
-          <a:p>
-            <a:r>
-              <a:rPr lang="en-US" sz="1800" b="1" dirty="0" err="1">
-                <a:solidFill>
-                  <a:srgbClr val="FFFF00"/>
-                </a:solidFill>
-              </a:rPr>
-              <a:t>npm</a:t>
-            </a:r>
-            <a:r>
-              <a:rPr lang="en-US" sz="1800" b="1" dirty="0"/>
-              <a:t> </a:t>
-            </a:r>
-            <a:r>
-              <a:rPr lang="en-US" sz="1800" b="1" dirty="0" err="1"/>
-              <a:t>i</a:t>
-            </a:r>
-            <a:r>
-              <a:rPr lang="en-US" sz="1800" b="1" dirty="0"/>
-              <a:t> @ng-bootstrap/ng-bootstrap  // like the above</a:t>
-            </a:r>
-          </a:p>
-          <a:p>
-            <a:r>
-              <a:rPr lang="en-US" sz="1800" b="1" dirty="0"/>
-              <a:t>at </a:t>
-            </a:r>
-            <a:r>
-              <a:rPr lang="en-US" sz="1800" b="1" dirty="0" err="1"/>
-              <a:t>angular.json</a:t>
-            </a:r>
-            <a:r>
-              <a:rPr lang="en-US" sz="1800" b="1" dirty="0"/>
-              <a:t> / at architect object / build object / options object</a:t>
-            </a:r>
-          </a:p>
-          <a:p>
-            <a:pPr lvl="1"/>
-            <a:r>
-              <a:rPr lang="en-US" b="1" dirty="0">
-                <a:solidFill>
-                  <a:srgbClr val="00B0F0"/>
-                </a:solidFill>
-              </a:rPr>
-              <a:t>at styles array</a:t>
-            </a:r>
-            <a:r>
-              <a:rPr lang="en-US" b="1" dirty="0"/>
-              <a:t>    -- "</a:t>
-            </a:r>
-            <a:r>
-              <a:rPr lang="en-US" b="1" dirty="0" err="1"/>
-              <a:t>node_modules</a:t>
-            </a:r>
-            <a:r>
-              <a:rPr lang="en-US" b="1" dirty="0"/>
-              <a:t>/bootstrap/</a:t>
-            </a:r>
-            <a:r>
-              <a:rPr lang="en-US" b="1" dirty="0" err="1"/>
-              <a:t>dist</a:t>
-            </a:r>
-            <a:r>
-              <a:rPr lang="en-US" b="1" dirty="0"/>
-              <a:t>/</a:t>
-            </a:r>
-            <a:r>
-              <a:rPr lang="en-US" b="1" dirty="0" err="1"/>
-              <a:t>css</a:t>
-            </a:r>
-            <a:r>
-              <a:rPr lang="en-US" b="1" dirty="0"/>
-              <a:t>/bootstrap.min.css",        // bootstrap CSS file</a:t>
-            </a:r>
-          </a:p>
-          <a:p>
-            <a:pPr lvl="1"/>
-            <a:r>
-              <a:rPr lang="en-US" b="1" dirty="0">
-                <a:solidFill>
-                  <a:srgbClr val="00B0F0"/>
-                </a:solidFill>
-              </a:rPr>
-              <a:t>at scripts array</a:t>
-            </a:r>
-            <a:r>
-              <a:rPr lang="en-US" b="1" dirty="0"/>
-              <a:t>  -- "</a:t>
-            </a:r>
-            <a:r>
-              <a:rPr lang="en-US" b="1" dirty="0" err="1"/>
-              <a:t>node_modules</a:t>
-            </a:r>
-            <a:r>
-              <a:rPr lang="en-US" b="1" dirty="0"/>
-              <a:t>/bootstrap/</a:t>
-            </a:r>
-            <a:r>
-              <a:rPr lang="en-US" b="1" dirty="0" err="1"/>
-              <a:t>dist</a:t>
-            </a:r>
-            <a:r>
-              <a:rPr lang="en-US" b="1" dirty="0"/>
-              <a:t>/</a:t>
-            </a:r>
-            <a:r>
-              <a:rPr lang="en-US" b="1" dirty="0" err="1"/>
-              <a:t>js</a:t>
-            </a:r>
-            <a:r>
-              <a:rPr lang="en-US" b="1" dirty="0"/>
-              <a:t>/bootstrap.bundle.min.js"  // bootstrap JS file</a:t>
-            </a:r>
-          </a:p>
-          <a:p>
-            <a:r>
-              <a:rPr lang="en-US" sz="1800" b="1" dirty="0"/>
-              <a:t>For angular 17 , ng-bootstrap 16</a:t>
-            </a:r>
-            <a:r>
-              <a:rPr lang="en-US" sz="1800" dirty="0"/>
-              <a:t> → Stable</a:t>
-            </a:r>
-          </a:p>
-          <a:p>
-            <a:pPr lvl="1"/>
-            <a:r>
-              <a:rPr lang="en-US" b="1" dirty="0" err="1">
-                <a:solidFill>
-                  <a:srgbClr val="FFFF00"/>
-                </a:solidFill>
-              </a:rPr>
-              <a:t>npm</a:t>
-            </a:r>
-            <a:r>
-              <a:rPr lang="en-US" b="1" dirty="0"/>
-              <a:t> </a:t>
-            </a:r>
-            <a:r>
-              <a:rPr lang="en-US" b="1" dirty="0" err="1"/>
-              <a:t>i</a:t>
-            </a:r>
-            <a:r>
-              <a:rPr lang="en-US" b="1" dirty="0"/>
-              <a:t> @ng-bootstrap/ng-bootstrap</a:t>
-            </a:r>
-          </a:p>
-          <a:p>
-            <a:r>
-              <a:rPr lang="en-US" sz="1800" b="1" dirty="0" err="1">
-                <a:solidFill>
-                  <a:srgbClr val="FFFF00"/>
-                </a:solidFill>
-              </a:rPr>
-              <a:t>npm</a:t>
-            </a:r>
-            <a:r>
-              <a:rPr lang="en-US" sz="1800" b="1" dirty="0"/>
-              <a:t> </a:t>
-            </a:r>
-            <a:r>
-              <a:rPr lang="en-US" sz="1800" b="1" dirty="0" err="1"/>
-              <a:t>i</a:t>
-            </a:r>
-            <a:r>
-              <a:rPr lang="en-US" sz="1800" b="1" dirty="0"/>
-              <a:t> </a:t>
-            </a:r>
-            <a:r>
-              <a:rPr lang="en-US" sz="1800" b="1" dirty="0">
-                <a:solidFill>
-                  <a:srgbClr val="00B050"/>
-                </a:solidFill>
-              </a:rPr>
-              <a:t>bootstrap-icons</a:t>
-            </a:r>
-          </a:p>
-          <a:p>
-            <a:pPr lvl="1"/>
-            <a:r>
-              <a:rPr lang="en-US" b="1" dirty="0">
-                <a:solidFill>
-                  <a:srgbClr val="00B0F0"/>
-                </a:solidFill>
-              </a:rPr>
-              <a:t>at style array</a:t>
-            </a:r>
-            <a:r>
-              <a:rPr lang="en-US" b="1" dirty="0"/>
-              <a:t> "</a:t>
-            </a:r>
-            <a:r>
-              <a:rPr lang="en-US" b="1" dirty="0" err="1"/>
-              <a:t>node_modules</a:t>
-            </a:r>
-            <a:r>
-              <a:rPr lang="en-US" b="1" dirty="0"/>
-              <a:t>/bootstrap-icons/font/bootstrap-icons.min.css"</a:t>
-            </a:r>
-          </a:p>
-          <a:p>
-            <a:pPr lvl="1"/>
-            <a:endParaRPr lang="en-US" sz="1600" b="1" dirty="0"/>
-          </a:p>
-          <a:p>
-            <a:endParaRPr lang="en-US" sz="1800" b="1" dirty="0"/>
+            <a:off x="698090" y="999946"/>
+            <a:ext cx="10776155" cy="5204207"/>
+          </a:xfrm>
+        </p:spPr>
+        <p:txBody>
+          <a:bodyPr/>
+          <a:lstStyle/>
+          <a:p>
+            <a:r>
+              <a:rPr lang="en-US" b="1"/>
+              <a:t>Interpolation</a:t>
+            </a:r>
+          </a:p>
+          <a:p>
+            <a:r>
+              <a:rPr lang="en-US" b="1"/>
+              <a:t>attribute (property) binding</a:t>
+            </a:r>
+          </a:p>
+          <a:p>
+            <a:r>
+              <a:rPr lang="en-US" b="1"/>
+              <a:t>class binding</a:t>
+            </a:r>
+          </a:p>
+          <a:p>
+            <a:r>
+              <a:rPr lang="en-US" b="1"/>
+              <a:t>style binding</a:t>
+            </a:r>
+          </a:p>
+          <a:p>
+            <a:r>
+              <a:rPr lang="en-US" b="1"/>
+              <a:t>Event Binding</a:t>
+            </a:r>
+          </a:p>
+          <a:p>
+            <a:endParaRPr lang="en-US"/>
           </a:p>
         </p:txBody>
       </p:sp>
     </p:spTree>
     <p:extLst>
       <p:ext uri="{BB962C8B-B14F-4D97-AF65-F5344CB8AC3E}">
-        <p14:creationId xmlns:p14="http://schemas.microsoft.com/office/powerpoint/2010/main" val="2094939905"/>
+        <p14:creationId xmlns:p14="http://schemas.microsoft.com/office/powerpoint/2010/main" val="3085219961"/>
       </p:ext>
     </p:extLst>
   </p:cSld>
@@ -7994,7 +7703,7 @@
           <a:lstStyle/>
           <a:p>
             <a:r>
-              <a:rPr lang="en-US" dirty="0"/>
+              <a:rPr lang="en-US"/>
               <a:t>Installation</a:t>
             </a:r>
           </a:p>
@@ -8021,7 +7730,7 @@
           <a:bodyPr/>
           <a:lstStyle/>
           <a:p>
-            <a:endParaRPr lang="en-US" dirty="0"/>
+            <a:endParaRPr lang="en-US"/>
           </a:p>
         </p:txBody>
       </p:sp>
@@ -8060,7 +7769,7 @@
           <p:cNvPr id="2" name="Title 1">
             <a:extLst>
               <a:ext uri="{FF2B5EF4-FFF2-40B4-BE49-F238E27FC236}">
-                <a16:creationId xmlns:a16="http://schemas.microsoft.com/office/drawing/2014/main" id="{7DA78EBE-03FD-D8DE-35CF-1926B0CA385E}"/>
+                <a16:creationId xmlns:a16="http://schemas.microsoft.com/office/drawing/2014/main" id="{52523F1A-83BC-D35C-BA4C-54902FC8580C}"/>
               </a:ext>
             </a:extLst>
           </p:cNvPr>
@@ -8074,7 +7783,7 @@
         <p:spPr>
           <a:xfrm>
             <a:off x="913795" y="0"/>
-            <a:ext cx="10353762" cy="688258"/>
+            <a:ext cx="10353762" cy="550606"/>
           </a:xfrm>
         </p:spPr>
         <p:txBody>
@@ -8084,8 +7793,8 @@
           <a:lstStyle/>
           <a:p>
             <a:r>
-              <a:rPr lang="en-US" b="1" dirty="0"/>
-              <a:t>Addin CSS file globally</a:t>
+              <a:rPr lang="en-US"/>
+              <a:t>Observable</a:t>
             </a:r>
           </a:p>
         </p:txBody>
@@ -8095,7 +7804,7 @@
           <p:cNvPr id="3" name="Content Placeholder 2">
             <a:extLst>
               <a:ext uri="{FF2B5EF4-FFF2-40B4-BE49-F238E27FC236}">
-                <a16:creationId xmlns:a16="http://schemas.microsoft.com/office/drawing/2014/main" id="{0BA55FB4-19F2-A5D7-3E15-C94C5CEB2E1C}"/>
+                <a16:creationId xmlns:a16="http://schemas.microsoft.com/office/drawing/2014/main" id="{58733B1E-E103-C154-025F-8F7D67B2F01E}"/>
               </a:ext>
             </a:extLst>
           </p:cNvPr>
@@ -8108,8 +7817,8 @@
         </p:nvSpPr>
         <p:spPr>
           <a:xfrm>
-            <a:off x="160774" y="688258"/>
-            <a:ext cx="11887200" cy="5938683"/>
+            <a:off x="363794" y="550607"/>
+            <a:ext cx="11415251" cy="5978012"/>
           </a:xfrm>
         </p:spPr>
         <p:txBody>
@@ -8117,143 +7826,49 @@
           <a:lstStyle/>
           <a:p>
             <a:r>
-              <a:rPr lang="en-US" dirty="0"/>
-              <a:t>at </a:t>
-            </a:r>
-            <a:r>
-              <a:rPr lang="en-US" dirty="0" err="1"/>
-              <a:t>src</a:t>
-            </a:r>
-            <a:r>
-              <a:rPr lang="en-US" dirty="0"/>
-              <a:t> folder / </a:t>
-            </a:r>
-            <a:r>
-              <a:rPr lang="en-US" dirty="0" err="1"/>
-              <a:t>css</a:t>
-            </a:r>
-            <a:r>
-              <a:rPr lang="en-US" dirty="0"/>
-              <a:t> folder / css-extensions.css</a:t>
-            </a:r>
-          </a:p>
-          <a:p>
-            <a:r>
-              <a:rPr lang="en-US" b="1" dirty="0"/>
-              <a:t>at </a:t>
-            </a:r>
-            <a:r>
-              <a:rPr lang="en-US" b="1" dirty="0" err="1"/>
-              <a:t>angular.json</a:t>
-            </a:r>
-            <a:r>
-              <a:rPr lang="en-US" b="1" dirty="0"/>
-              <a:t> / at architect object / build object / options object</a:t>
-            </a:r>
-            <a:endParaRPr lang="en-US" dirty="0"/>
-          </a:p>
-          <a:p>
-            <a:pPr lvl="1"/>
-            <a:r>
-              <a:rPr lang="en-US" b="1" dirty="0">
-                <a:solidFill>
-                  <a:srgbClr val="00B0F0"/>
-                </a:solidFill>
-              </a:rPr>
-              <a:t>at styles array</a:t>
-            </a:r>
-            <a:r>
-              <a:rPr lang="en-US" b="1" dirty="0"/>
-              <a:t>    --- </a:t>
-            </a:r>
-            <a:r>
-              <a:rPr lang="en-US" dirty="0">
+              <a:rPr lang="en-US"/>
+              <a:t>it is used to handle (manage) asynchronous operations</a:t>
+            </a:r>
+          </a:p>
+          <a:p>
+            <a:r>
+              <a:rPr lang="en-US"/>
+              <a:t>Emits multiple values over time (better for data streaming) (data producer)</a:t>
+            </a:r>
+          </a:p>
+          <a:p>
+            <a:r>
+              <a:rPr lang="en-US"/>
+              <a:t>Lazy (executed when subscribed).</a:t>
+            </a:r>
+          </a:p>
+          <a:p>
+            <a:r>
+              <a:rPr lang="en-US"/>
+              <a:t>Can be canceled (by unsubscribing).</a:t>
+            </a:r>
+          </a:p>
+          <a:p>
+            <a:r>
+              <a:rPr lang="en-US"/>
+              <a:t>Included in ReactiveX Library</a:t>
+            </a:r>
+          </a:p>
+          <a:p>
+            <a:r>
+              <a:rPr lang="en-US">
                 <a:effectLst/>
               </a:rPr>
-              <a:t>"</a:t>
-            </a:r>
-            <a:r>
-              <a:rPr lang="en-US" dirty="0" err="1">
-                <a:effectLst/>
-              </a:rPr>
-              <a:t>src</a:t>
-            </a:r>
-            <a:r>
-              <a:rPr lang="en-US" dirty="0">
-                <a:effectLst/>
-              </a:rPr>
-              <a:t>/</a:t>
-            </a:r>
-            <a:r>
-              <a:rPr lang="en-US" dirty="0" err="1">
-                <a:effectLst/>
-              </a:rPr>
-              <a:t>css</a:t>
-            </a:r>
-            <a:r>
-              <a:rPr lang="en-US" dirty="0">
-                <a:effectLst/>
-              </a:rPr>
-              <a:t>/css-extension.css"</a:t>
-            </a:r>
-          </a:p>
-          <a:p>
-            <a:r>
-              <a:rPr lang="en-US" dirty="0"/>
-              <a:t>Adding styles via </a:t>
-            </a:r>
-            <a:r>
-              <a:rPr lang="en-US" b="1" dirty="0" err="1">
-                <a:effectLst/>
-              </a:rPr>
-              <a:t>angular.json</a:t>
-            </a:r>
-            <a:r>
-              <a:rPr lang="en-US" dirty="0">
-                <a:effectLst/>
-              </a:rPr>
-              <a:t> is generally faster and more reliable for your application's initial load and overall stability compared to using an external CDN link in index.html</a:t>
-            </a:r>
-          </a:p>
-          <a:p>
-            <a:r>
-              <a:rPr lang="en-US" b="1" dirty="0">
-                <a:effectLst/>
-              </a:rPr>
-              <a:t>Why angular.json is usually faster</a:t>
-            </a:r>
-          </a:p>
-          <a:p>
-            <a:pPr lvl="1"/>
-            <a:r>
-              <a:rPr lang="en-US" b="1" dirty="0">
-                <a:effectLst/>
-              </a:rPr>
-              <a:t>Reduced HTTP Requests</a:t>
-            </a:r>
-            <a:r>
-              <a:rPr lang="en-US" dirty="0">
-                <a:effectLst/>
-              </a:rPr>
-              <a:t>: When you add files to angular.json, the Angular CLI bundles them into a single (or few) minified CSS files. The browser makes one request for your styles instead of multiple separate requests to different servers.</a:t>
-            </a:r>
-          </a:p>
-          <a:p>
-            <a:endParaRPr lang="en-US" b="1" dirty="0">
-              <a:effectLst/>
-            </a:endParaRPr>
-          </a:p>
-          <a:p>
-            <a:endParaRPr lang="en-US" b="1" dirty="0">
-              <a:effectLst/>
-            </a:endParaRPr>
+              <a:t>A stream of data or events (like news) that can be sent over time.</a:t>
+            </a:r>
+            <a:endParaRPr lang="en-US"/>
           </a:p>
         </p:txBody>
       </p:sp>
     </p:spTree>
     <p:extLst>
       <p:ext uri="{BB962C8B-B14F-4D97-AF65-F5344CB8AC3E}">
-        <p14:creationId xmlns:p14="http://schemas.microsoft.com/office/powerpoint/2010/main" val="2733366995"/>
+        <p14:creationId xmlns:p14="http://schemas.microsoft.com/office/powerpoint/2010/main" val="1335119381"/>
       </p:ext>
     </p:extLst>
   </p:cSld>
@@ -8285,7 +7900,7 @@
           <p:cNvPr id="2" name="Title 1">
             <a:extLst>
               <a:ext uri="{FF2B5EF4-FFF2-40B4-BE49-F238E27FC236}">
-                <a16:creationId xmlns:a16="http://schemas.microsoft.com/office/drawing/2014/main" id="{FC437ED4-E69D-F586-0742-5D562697F98A}"/>
+                <a16:creationId xmlns:a16="http://schemas.microsoft.com/office/drawing/2014/main" id="{7199BF36-BBE9-F3EC-68D8-A0C569DEBD00}"/>
               </a:ext>
             </a:extLst>
           </p:cNvPr>
@@ -8298,31 +7913,159 @@
         </p:nvSpPr>
         <p:spPr>
           <a:xfrm>
-            <a:off x="919119" y="2231922"/>
-            <a:ext cx="10353762" cy="1837659"/>
+            <a:off x="913795" y="0"/>
+            <a:ext cx="10353762" cy="599768"/>
           </a:xfrm>
         </p:spPr>
         <p:txBody>
           <a:bodyPr>
-            <a:normAutofit/>
+            <a:normAutofit fontScale="90000"/>
           </a:bodyPr>
           <a:lstStyle/>
           <a:p>
             <a:r>
-              <a:rPr lang="en-US" sz="6000" b="1" dirty="0">
+              <a:rPr lang="en-US" b="1">
                 <a:solidFill>
                   <a:srgbClr val="FF0000"/>
                 </a:solidFill>
               </a:rPr>
-              <a:t>Type Script</a:t>
-            </a:r>
-          </a:p>
-        </p:txBody>
-      </p:sp>
+              <a:t>Observer</a:t>
+            </a:r>
+          </a:p>
+        </p:txBody>
+      </p:sp>
+      <p:sp>
+        <p:nvSpPr>
+          <p:cNvPr id="3" name="Content Placeholder 2">
+            <a:extLst>
+              <a:ext uri="{FF2B5EF4-FFF2-40B4-BE49-F238E27FC236}">
+                <a16:creationId xmlns:a16="http://schemas.microsoft.com/office/drawing/2014/main" id="{F096FE41-5DF8-3B8A-99CF-C4F98A20037C}"/>
+              </a:ext>
+            </a:extLst>
+          </p:cNvPr>
+          <p:cNvSpPr>
+            <a:spLocks noGrp="1"/>
+          </p:cNvSpPr>
+          <p:nvPr>
+            <p:ph idx="1"/>
+          </p:nvPr>
+        </p:nvSpPr>
+        <p:spPr>
+          <a:xfrm>
+            <a:off x="324464" y="599769"/>
+            <a:ext cx="11641393" cy="5997676"/>
+          </a:xfrm>
+        </p:spPr>
+        <p:txBody>
+          <a:bodyPr/>
+          <a:lstStyle/>
+          <a:p>
+            <a:r>
+              <a:rPr lang="en-US">
+                <a:effectLst/>
+              </a:rPr>
+              <a:t>It is an object (or a set of callbacks) that defines </a:t>
+            </a:r>
+            <a:r>
+              <a:rPr lang="en-US" i="1">
+                <a:effectLst/>
+              </a:rPr>
+              <a:t>how</a:t>
+            </a:r>
+            <a:r>
+              <a:rPr lang="en-US">
+                <a:effectLst/>
+              </a:rPr>
+              <a:t> to handle the data coming from the Observable</a:t>
+            </a:r>
+            <a:endParaRPr lang="en-US"/>
+          </a:p>
+          <a:p>
+            <a:endParaRPr lang="en-US"/>
+          </a:p>
+          <a:p>
+            <a:endParaRPr lang="en-US"/>
+          </a:p>
+          <a:p>
+            <a:endParaRPr lang="en-US"/>
+          </a:p>
+          <a:p>
+            <a:endParaRPr lang="en-US"/>
+          </a:p>
+          <a:p>
+            <a:pPr marL="36900" indent="0">
+              <a:buNone/>
+            </a:pPr>
+            <a:endParaRPr lang="en-US"/>
+          </a:p>
+          <a:p>
+            <a:endParaRPr lang="en-US"/>
+          </a:p>
+          <a:p>
+            <a:endParaRPr lang="en-US"/>
+          </a:p>
+          <a:p>
+            <a:r>
+              <a:rPr lang="en-US"/>
+              <a:t>The object passed inside the </a:t>
+            </a:r>
+            <a:r>
+              <a:rPr lang="en-US" b="1">
+                <a:solidFill>
+                  <a:srgbClr val="FFFF00"/>
+                </a:solidFill>
+              </a:rPr>
+              <a:t>.subscribe()</a:t>
+            </a:r>
+            <a:r>
+              <a:rPr lang="en-US"/>
+              <a:t> method is the </a:t>
+            </a:r>
+            <a:r>
+              <a:rPr lang="en-US" b="1">
+                <a:solidFill>
+                  <a:srgbClr val="FFFF00"/>
+                </a:solidFill>
+              </a:rPr>
+              <a:t>Observer</a:t>
+            </a:r>
+          </a:p>
+        </p:txBody>
+      </p:sp>
+      <p:pic>
+        <p:nvPicPr>
+          <p:cNvPr id="6" name="Picture 5">
+            <a:extLst>
+              <a:ext uri="{FF2B5EF4-FFF2-40B4-BE49-F238E27FC236}">
+                <a16:creationId xmlns:a16="http://schemas.microsoft.com/office/drawing/2014/main" id="{2AE29D33-4B89-224D-D545-09A825300FF6}"/>
+              </a:ext>
+            </a:extLst>
+          </p:cNvPr>
+          <p:cNvPicPr>
+            <a:picLocks noChangeAspect="1"/>
+          </p:cNvPicPr>
+          <p:nvPr/>
+        </p:nvPicPr>
+        <p:blipFill>
+          <a:blip r:embed="rId2"/>
+          <a:stretch>
+            <a:fillRect/>
+          </a:stretch>
+        </p:blipFill>
+        <p:spPr>
+          <a:xfrm>
+            <a:off x="324464" y="1253367"/>
+            <a:ext cx="5275062" cy="2433820"/>
+          </a:xfrm>
+          <a:prstGeom prst="rect">
+            <a:avLst/>
+          </a:prstGeom>
+        </p:spPr>
+      </p:pic>
     </p:spTree>
     <p:extLst>
       <p:ext uri="{BB962C8B-B14F-4D97-AF65-F5344CB8AC3E}">
-        <p14:creationId xmlns:p14="http://schemas.microsoft.com/office/powerpoint/2010/main" val="385122793"/>
+        <p14:creationId xmlns:p14="http://schemas.microsoft.com/office/powerpoint/2010/main" val="2360813891"/>
       </p:ext>
     </p:extLst>
   </p:cSld>
@@ -8354,7 +8097,7 @@
           <p:cNvPr id="2" name="Title 1">
             <a:extLst>
               <a:ext uri="{FF2B5EF4-FFF2-40B4-BE49-F238E27FC236}">
-                <a16:creationId xmlns:a16="http://schemas.microsoft.com/office/drawing/2014/main" id="{02620882-3A74-F22D-A1A0-0891F4397F2A}"/>
+                <a16:creationId xmlns:a16="http://schemas.microsoft.com/office/drawing/2014/main" id="{EB00F302-55BD-6F9E-F1D9-C6B30B72D81B}"/>
               </a:ext>
             </a:extLst>
           </p:cNvPr>
@@ -8368,7 +8111,7 @@
         <p:spPr>
           <a:xfrm>
             <a:off x="913795" y="0"/>
-            <a:ext cx="10353762" cy="653143"/>
+            <a:ext cx="10353762" cy="619432"/>
           </a:xfrm>
         </p:spPr>
         <p:txBody>
@@ -8378,8 +8121,12 @@
           <a:lstStyle/>
           <a:p>
             <a:r>
-              <a:rPr lang="en-US" dirty="0"/>
-              <a:t>Create main layout </a:t>
+              <a:rPr lang="en-US" sz="4400" b="1">
+                <a:solidFill>
+                  <a:srgbClr val="FF0000"/>
+                </a:solidFill>
+              </a:rPr>
+              <a:t>Subscriber</a:t>
             </a:r>
           </a:p>
         </p:txBody>
@@ -8389,7 +8136,7 @@
           <p:cNvPr id="3" name="Content Placeholder 2">
             <a:extLst>
               <a:ext uri="{FF2B5EF4-FFF2-40B4-BE49-F238E27FC236}">
-                <a16:creationId xmlns:a16="http://schemas.microsoft.com/office/drawing/2014/main" id="{BF57AF94-85B5-5DEF-7C1D-6E5E758EEBC3}"/>
+                <a16:creationId xmlns:a16="http://schemas.microsoft.com/office/drawing/2014/main" id="{A678A388-1F3E-2877-3CB0-63D95487DD76}"/>
               </a:ext>
             </a:extLst>
           </p:cNvPr>
@@ -8402,8 +8149,8 @@
         </p:nvSpPr>
         <p:spPr>
           <a:xfrm>
-            <a:off x="130628" y="653143"/>
-            <a:ext cx="11585749" cy="6018962"/>
+            <a:off x="196645" y="707923"/>
+            <a:ext cx="11818374" cy="5899354"/>
           </a:xfrm>
         </p:spPr>
         <p:txBody>
@@ -8411,120 +8158,55 @@
           <a:lstStyle/>
           <a:p>
             <a:r>
-              <a:rPr lang="en-US" dirty="0"/>
-              <a:t>This layout has layout </a:t>
-            </a:r>
-            <a:r>
-              <a:rPr lang="en-US" sz="2400" b="1" dirty="0">
+              <a:rPr lang="en-US">
+                <a:effectLst/>
+              </a:rPr>
+              <a:t>acts as the middleman: It takes value from the Observable and hands it to the Observer's next() method</a:t>
+            </a:r>
+            <a:endParaRPr lang="en-US"/>
+          </a:p>
+          <a:p>
+            <a:r>
+              <a:rPr lang="en-US"/>
+              <a:t>The </a:t>
+            </a:r>
+            <a:r>
+              <a:rPr lang="en-US" b="1">
                 <a:solidFill>
                   <a:srgbClr val="FFFF00"/>
                 </a:solidFill>
               </a:rPr>
-              <a:t>header and sidebar </a:t>
-            </a:r>
-            <a:r>
-              <a:rPr lang="en-US" dirty="0"/>
-              <a:t>(</a:t>
-            </a:r>
-            <a:r>
-              <a:rPr lang="en-US" dirty="0" err="1"/>
-              <a:t>offcanvas</a:t>
-            </a:r>
-            <a:r>
-              <a:rPr lang="en-US" dirty="0"/>
-              <a:t> sidebar)</a:t>
-            </a:r>
-          </a:p>
-          <a:p>
-            <a:r>
-              <a:rPr lang="en-US" dirty="0"/>
-              <a:t>Create </a:t>
-            </a:r>
-            <a:r>
-              <a:rPr lang="en-US" b="1" dirty="0">
+              <a:t>subscriber</a:t>
+            </a:r>
+            <a:r>
+              <a:rPr lang="en-US"/>
+              <a:t> parameter inside the new </a:t>
+            </a:r>
+            <a:r>
+              <a:rPr lang="en-US" b="1">
                 <a:solidFill>
-                  <a:srgbClr val="FF0000"/>
+                  <a:srgbClr val="FFFF00"/>
                 </a:solidFill>
               </a:rPr>
-              <a:t>main-layout</a:t>
-            </a:r>
-            <a:r>
-              <a:rPr lang="en-US" dirty="0"/>
-              <a:t> components at app/Layouts folder</a:t>
-            </a:r>
-          </a:p>
-          <a:p>
-            <a:endParaRPr lang="en-US" dirty="0"/>
-          </a:p>
-          <a:p>
-            <a:endParaRPr lang="en-US" dirty="0"/>
-          </a:p>
-        </p:txBody>
-      </p:sp>
-      <p:pic>
-        <p:nvPicPr>
-          <p:cNvPr id="5" name="Picture 4">
-            <a:extLst>
-              <a:ext uri="{FF2B5EF4-FFF2-40B4-BE49-F238E27FC236}">
-                <a16:creationId xmlns:a16="http://schemas.microsoft.com/office/drawing/2014/main" id="{08FA0F56-935A-ABBE-E9A7-72E5F50A7678}"/>
-              </a:ext>
-            </a:extLst>
-          </p:cNvPr>
-          <p:cNvPicPr>
-            <a:picLocks noChangeAspect="1"/>
-          </p:cNvPicPr>
-          <p:nvPr/>
-        </p:nvPicPr>
-        <p:blipFill>
-          <a:blip r:embed="rId2"/>
-          <a:stretch>
-            <a:fillRect/>
-          </a:stretch>
-        </p:blipFill>
-        <p:spPr>
-          <a:xfrm>
-            <a:off x="130628" y="1578743"/>
-            <a:ext cx="4305300" cy="2124075"/>
-          </a:xfrm>
-          <a:prstGeom prst="rect">
-            <a:avLst/>
-          </a:prstGeom>
-        </p:spPr>
-      </p:pic>
-      <p:pic>
-        <p:nvPicPr>
-          <p:cNvPr id="7" name="Picture 6">
-            <a:extLst>
-              <a:ext uri="{FF2B5EF4-FFF2-40B4-BE49-F238E27FC236}">
-                <a16:creationId xmlns:a16="http://schemas.microsoft.com/office/drawing/2014/main" id="{6E9936B2-A3C4-42E4-7F25-02C4852D76E8}"/>
-              </a:ext>
-            </a:extLst>
-          </p:cNvPr>
-          <p:cNvPicPr>
-            <a:picLocks noChangeAspect="1"/>
-          </p:cNvPicPr>
-          <p:nvPr/>
-        </p:nvPicPr>
-        <p:blipFill>
-          <a:blip r:embed="rId3"/>
-          <a:stretch>
-            <a:fillRect/>
-          </a:stretch>
-        </p:blipFill>
-        <p:spPr>
-          <a:xfrm>
-            <a:off x="67724" y="3818111"/>
-            <a:ext cx="11993648" cy="2386746"/>
-          </a:xfrm>
-          <a:prstGeom prst="rect">
-            <a:avLst/>
-          </a:prstGeom>
-        </p:spPr>
-      </p:pic>
+              <a:t>Observable constructor</a:t>
+            </a:r>
+            <a:r>
+              <a:rPr lang="en-US"/>
+              <a:t> is Subscriber.</a:t>
+            </a:r>
+          </a:p>
+          <a:p>
+            <a:endParaRPr lang="en-US"/>
+          </a:p>
+          <a:p>
+            <a:endParaRPr lang="en-US"/>
+          </a:p>
+        </p:txBody>
+      </p:sp>
     </p:spTree>
     <p:extLst>
       <p:ext uri="{BB962C8B-B14F-4D97-AF65-F5344CB8AC3E}">
-        <p14:creationId xmlns:p14="http://schemas.microsoft.com/office/powerpoint/2010/main" val="1153374815"/>
+        <p14:creationId xmlns:p14="http://schemas.microsoft.com/office/powerpoint/2010/main" val="198467932"/>
       </p:ext>
     </p:extLst>
   </p:cSld>
@@ -8556,7 +8238,7 @@
           <p:cNvPr id="2" name="Title 1">
             <a:extLst>
               <a:ext uri="{FF2B5EF4-FFF2-40B4-BE49-F238E27FC236}">
-                <a16:creationId xmlns:a16="http://schemas.microsoft.com/office/drawing/2014/main" id="{E28C1D31-DB66-B772-1221-31330DBD652E}"/>
+                <a16:creationId xmlns:a16="http://schemas.microsoft.com/office/drawing/2014/main" id="{94CFDAFF-652F-D97C-B156-17FBE471CADE}"/>
               </a:ext>
             </a:extLst>
           </p:cNvPr>
@@ -8569,78 +8251,68 @@
         </p:nvSpPr>
         <p:spPr>
           <a:xfrm>
-            <a:off x="913795" y="42681"/>
-            <a:ext cx="10353762" cy="620510"/>
+            <a:off x="913795" y="0"/>
+            <a:ext cx="10353762" cy="589935"/>
           </a:xfrm>
         </p:spPr>
         <p:txBody>
           <a:bodyPr>
-            <a:normAutofit/>
+            <a:normAutofit fontScale="90000"/>
           </a:bodyPr>
           <a:lstStyle/>
           <a:p>
             <a:r>
-              <a:rPr lang="en-US" sz="3200" b="1" dirty="0"/>
-              <a:t>Create main layout  (cont.)</a:t>
-            </a:r>
-          </a:p>
-        </p:txBody>
-      </p:sp>
-      <p:sp>
-        <p:nvSpPr>
-          <p:cNvPr id="3" name="Content Placeholder 2">
+              <a:rPr lang="en-US" b="1"/>
+              <a:t>Observable example</a:t>
+            </a:r>
+          </a:p>
+        </p:txBody>
+      </p:sp>
+      <p:pic>
+        <p:nvPicPr>
+          <p:cNvPr id="5" name="Content Placeholder 4">
             <a:extLst>
               <a:ext uri="{FF2B5EF4-FFF2-40B4-BE49-F238E27FC236}">
-                <a16:creationId xmlns:a16="http://schemas.microsoft.com/office/drawing/2014/main" id="{AFA2F1B2-E592-5489-A07A-D30131FE95DA}"/>
+                <a16:creationId xmlns:a16="http://schemas.microsoft.com/office/drawing/2014/main" id="{F72204C2-0829-E37C-9C3D-E7463B466F6C}"/>
               </a:ext>
             </a:extLst>
           </p:cNvPr>
-          <p:cNvSpPr>
-            <a:spLocks noGrp="1"/>
-          </p:cNvSpPr>
+          <p:cNvPicPr>
+            <a:picLocks noGrp="1" noChangeAspect="1"/>
+          </p:cNvPicPr>
           <p:nvPr>
             <p:ph idx="1"/>
           </p:nvPr>
-        </p:nvSpPr>
-        <p:spPr/>
-        <p:txBody>
-          <a:bodyPr/>
-          <a:lstStyle/>
-          <a:p>
-            <a:endParaRPr lang="en-US" dirty="0"/>
-          </a:p>
-          <a:p>
-            <a:endParaRPr lang="en-US" dirty="0"/>
-          </a:p>
-          <a:p>
-            <a:endParaRPr lang="en-US" dirty="0"/>
-          </a:p>
-          <a:p>
-            <a:endParaRPr lang="en-US" dirty="0"/>
-          </a:p>
-          <a:p>
-            <a:endParaRPr lang="en-US" dirty="0"/>
-          </a:p>
-          <a:p>
-            <a:endParaRPr lang="en-US" dirty="0"/>
-          </a:p>
-          <a:p>
-            <a:endParaRPr lang="en-US" dirty="0"/>
-          </a:p>
-          <a:p>
-            <a:endParaRPr lang="en-US" dirty="0"/>
-          </a:p>
-          <a:p>
-            <a:endParaRPr lang="en-US" dirty="0"/>
-          </a:p>
-        </p:txBody>
-      </p:sp>
+        </p:nvPicPr>
+        <p:blipFill>
+          <a:blip r:embed="rId2"/>
+          <a:stretch>
+            <a:fillRect/>
+          </a:stretch>
+        </p:blipFill>
+        <p:spPr>
+          <a:xfrm>
+            <a:off x="258889" y="721816"/>
+            <a:ext cx="5728817" cy="2193464"/>
+          </a:xfrm>
+          <a:prstGeom prst="rect">
+            <a:avLst/>
+          </a:prstGeom>
+          <a:effectLst>
+            <a:outerShdw blurRad="25400" dir="17880000">
+              <a:srgbClr val="000000">
+                <a:alpha val="46000"/>
+              </a:srgbClr>
+            </a:outerShdw>
+          </a:effectLst>
+        </p:spPr>
+      </p:pic>
       <p:pic>
         <p:nvPicPr>
-          <p:cNvPr id="5" name="Picture 4">
+          <p:cNvPr id="7" name="Picture 6">
             <a:extLst>
               <a:ext uri="{FF2B5EF4-FFF2-40B4-BE49-F238E27FC236}">
-                <a16:creationId xmlns:a16="http://schemas.microsoft.com/office/drawing/2014/main" id="{21CF604B-F529-23DE-6DDA-1442997D1CE6}"/>
+                <a16:creationId xmlns:a16="http://schemas.microsoft.com/office/drawing/2014/main" id="{108C0BDF-7358-793F-BD0C-A5CFDE7B1E18}"/>
               </a:ext>
             </a:extLst>
           </p:cNvPr>
@@ -8650,15 +8322,15 @@
           <p:nvPr/>
         </p:nvPicPr>
         <p:blipFill>
-          <a:blip r:embed="rId2"/>
+          <a:blip r:embed="rId3"/>
           <a:stretch>
             <a:fillRect/>
           </a:stretch>
         </p:blipFill>
         <p:spPr>
           <a:xfrm>
-            <a:off x="401934" y="803868"/>
-            <a:ext cx="11154129" cy="3808325"/>
+            <a:off x="260565" y="3298371"/>
+            <a:ext cx="5727141" cy="2427664"/>
           </a:xfrm>
           <a:prstGeom prst="rect">
             <a:avLst/>
@@ -8668,7 +8340,7 @@
     </p:spTree>
     <p:extLst>
       <p:ext uri="{BB962C8B-B14F-4D97-AF65-F5344CB8AC3E}">
-        <p14:creationId xmlns:p14="http://schemas.microsoft.com/office/powerpoint/2010/main" val="584833622"/>
+        <p14:creationId xmlns:p14="http://schemas.microsoft.com/office/powerpoint/2010/main" val="794002608"/>
       </p:ext>
     </p:extLst>
   </p:cSld>
@@ -8700,7 +8372,7 @@
           <p:cNvPr id="2" name="Title 1">
             <a:extLst>
               <a:ext uri="{FF2B5EF4-FFF2-40B4-BE49-F238E27FC236}">
-                <a16:creationId xmlns:a16="http://schemas.microsoft.com/office/drawing/2014/main" id="{D22BD241-91BC-982E-E8D8-DA059E13C029}"/>
+                <a16:creationId xmlns:a16="http://schemas.microsoft.com/office/drawing/2014/main" id="{025734B3-3F11-7C03-2D92-0B3DB8D4E2B5}"/>
               </a:ext>
             </a:extLst>
           </p:cNvPr>
@@ -8714,18 +8386,22 @@
         <p:spPr>
           <a:xfrm>
             <a:off x="913795" y="0"/>
-            <a:ext cx="10353762" cy="544310"/>
+            <a:ext cx="10353762" cy="580103"/>
           </a:xfrm>
         </p:spPr>
         <p:txBody>
           <a:bodyPr>
-            <a:noAutofit/>
+            <a:normAutofit fontScale="90000"/>
           </a:bodyPr>
           <a:lstStyle/>
           <a:p>
             <a:r>
-              <a:rPr lang="en-US" sz="3200" dirty="0"/>
-              <a:t>Layout [cont.]</a:t>
+              <a:rPr lang="en-US" b="1">
+                <a:solidFill>
+                  <a:srgbClr val="FF0000"/>
+                </a:solidFill>
+              </a:rPr>
+              <a:t>Creating new component</a:t>
             </a:r>
           </a:p>
         </p:txBody>
@@ -8735,7 +8411,7 @@
           <p:cNvPr id="3" name="Content Placeholder 2">
             <a:extLst>
               <a:ext uri="{FF2B5EF4-FFF2-40B4-BE49-F238E27FC236}">
-                <a16:creationId xmlns:a16="http://schemas.microsoft.com/office/drawing/2014/main" id="{F60292FF-FB71-EABA-22C8-49723B52D012}"/>
+                <a16:creationId xmlns:a16="http://schemas.microsoft.com/office/drawing/2014/main" id="{963D2559-9DB4-4235-E157-38E45495D097}"/>
               </a:ext>
             </a:extLst>
           </p:cNvPr>
@@ -8748,8 +8424,8 @@
         </p:nvSpPr>
         <p:spPr>
           <a:xfrm>
-            <a:off x="913795" y="544310"/>
-            <a:ext cx="10353762" cy="5246891"/>
+            <a:off x="432618" y="580103"/>
+            <a:ext cx="11375923" cy="6145162"/>
           </a:xfrm>
         </p:spPr>
         <p:txBody>
@@ -8757,18 +8433,80 @@
           <a:lstStyle/>
           <a:p>
             <a:r>
-              <a:rPr lang="en-US" dirty="0"/>
-              <a:t>Create sidebar component at components folder</a:t>
-            </a:r>
-          </a:p>
-          <a:p>
-            <a:endParaRPr lang="en-US" dirty="0"/>
-          </a:p>
-          <a:p>
-            <a:endParaRPr lang="en-US" dirty="0"/>
-          </a:p>
-          <a:p>
-            <a:endParaRPr lang="en-US" dirty="0"/>
+              <a:rPr lang="en-US"/>
+              <a:t>ng g c </a:t>
+            </a:r>
+            <a:r>
+              <a:rPr lang="en-US" err="1"/>
+              <a:t>componentName</a:t>
+            </a:r>
+            <a:r>
+              <a:rPr lang="en-US"/>
+              <a:t> --skip-tests</a:t>
+            </a:r>
+          </a:p>
+          <a:p>
+            <a:r>
+              <a:rPr lang="en-US" b="1">
+                <a:solidFill>
+                  <a:srgbClr val="FF0000"/>
+                </a:solidFill>
+              </a:rPr>
+              <a:t>ng</a:t>
+            </a:r>
+            <a:r>
+              <a:rPr lang="en-US"/>
+              <a:t> g c project-details </a:t>
+            </a:r>
+            <a:r>
+              <a:rPr lang="en-US" b="1">
+                <a:solidFill>
+                  <a:srgbClr val="0070C0"/>
+                </a:solidFill>
+              </a:rPr>
+              <a:t>--skip-tests</a:t>
+            </a:r>
+          </a:p>
+          <a:p>
+            <a:pPr lvl="1"/>
+            <a:r>
+              <a:rPr lang="en-US"/>
+              <a:t>project-details folder will be created and includes</a:t>
+            </a:r>
+          </a:p>
+          <a:p>
+            <a:pPr lvl="2"/>
+            <a:r>
+              <a:rPr lang="en-US" sz="1800" err="1"/>
+              <a:t>ProjectDetails.component.ts</a:t>
+            </a:r>
+            <a:endParaRPr lang="en-US" sz="1800"/>
+          </a:p>
+          <a:p>
+            <a:pPr lvl="2"/>
+            <a:r>
+              <a:rPr lang="en-US" sz="1800"/>
+              <a:t>ProjectDetails.Component.html</a:t>
+            </a:r>
+          </a:p>
+          <a:p>
+            <a:pPr lvl="2"/>
+            <a:r>
+              <a:rPr lang="en-US" sz="1800"/>
+              <a:t>ProjectDetails.Component.css</a:t>
+            </a:r>
+          </a:p>
+          <a:p>
+            <a:endParaRPr lang="en-US"/>
+          </a:p>
+          <a:p>
+            <a:endParaRPr lang="en-US"/>
+          </a:p>
+          <a:p>
+            <a:endParaRPr lang="en-US"/>
+          </a:p>
+          <a:p>
+            <a:endParaRPr lang="en-US"/>
           </a:p>
         </p:txBody>
       </p:sp>
@@ -8777,7 +8515,7 @@
           <p:cNvPr id="5" name="Picture 4">
             <a:extLst>
               <a:ext uri="{FF2B5EF4-FFF2-40B4-BE49-F238E27FC236}">
-                <a16:creationId xmlns:a16="http://schemas.microsoft.com/office/drawing/2014/main" id="{5FEC7977-8DB6-5D26-4E6F-029EB9313555}"/>
+                <a16:creationId xmlns:a16="http://schemas.microsoft.com/office/drawing/2014/main" id="{54637D5B-8B8B-98DD-59F9-9474B5F23C4A}"/>
               </a:ext>
             </a:extLst>
           </p:cNvPr>
@@ -8794,68 +8532,8 @@
         </p:blipFill>
         <p:spPr>
           <a:xfrm>
-            <a:off x="0" y="968827"/>
-            <a:ext cx="7332109" cy="3844334"/>
-          </a:xfrm>
-          <a:prstGeom prst="rect">
-            <a:avLst/>
-          </a:prstGeom>
-        </p:spPr>
-      </p:pic>
-      <p:pic>
-        <p:nvPicPr>
-          <p:cNvPr id="7" name="Picture 6">
-            <a:extLst>
-              <a:ext uri="{FF2B5EF4-FFF2-40B4-BE49-F238E27FC236}">
-                <a16:creationId xmlns:a16="http://schemas.microsoft.com/office/drawing/2014/main" id="{97B2557A-5613-A7A6-6167-C88E6497C3C4}"/>
-              </a:ext>
-            </a:extLst>
-          </p:cNvPr>
-          <p:cNvPicPr>
-            <a:picLocks noChangeAspect="1"/>
-          </p:cNvPicPr>
-          <p:nvPr/>
-        </p:nvPicPr>
-        <p:blipFill>
-          <a:blip r:embed="rId3"/>
-          <a:stretch>
-            <a:fillRect/>
-          </a:stretch>
-        </p:blipFill>
-        <p:spPr>
-          <a:xfrm>
-            <a:off x="7332109" y="798004"/>
-            <a:ext cx="4774377" cy="3752248"/>
-          </a:xfrm>
-          <a:prstGeom prst="rect">
-            <a:avLst/>
-          </a:prstGeom>
-        </p:spPr>
-      </p:pic>
-      <p:pic>
-        <p:nvPicPr>
-          <p:cNvPr id="9" name="Picture 8">
-            <a:extLst>
-              <a:ext uri="{FF2B5EF4-FFF2-40B4-BE49-F238E27FC236}">
-                <a16:creationId xmlns:a16="http://schemas.microsoft.com/office/drawing/2014/main" id="{F5B8091C-F973-69E1-483C-A812643E422E}"/>
-              </a:ext>
-            </a:extLst>
-          </p:cNvPr>
-          <p:cNvPicPr>
-            <a:picLocks noChangeAspect="1"/>
-          </p:cNvPicPr>
-          <p:nvPr/>
-        </p:nvPicPr>
-        <p:blipFill>
-          <a:blip r:embed="rId4"/>
-          <a:stretch>
-            <a:fillRect/>
-          </a:stretch>
-        </p:blipFill>
-        <p:spPr>
-          <a:xfrm>
-            <a:off x="1750245" y="4813093"/>
-            <a:ext cx="4158186" cy="1956215"/>
+            <a:off x="194372" y="3143800"/>
+            <a:ext cx="11729041" cy="1810037"/>
           </a:xfrm>
           <a:prstGeom prst="rect">
             <a:avLst/>
@@ -8865,7 +8543,7 @@
     </p:spTree>
     <p:extLst>
       <p:ext uri="{BB962C8B-B14F-4D97-AF65-F5344CB8AC3E}">
-        <p14:creationId xmlns:p14="http://schemas.microsoft.com/office/powerpoint/2010/main" val="3498281297"/>
+        <p14:creationId xmlns:p14="http://schemas.microsoft.com/office/powerpoint/2010/main" val="2534247288"/>
       </p:ext>
     </p:extLst>
   </p:cSld>
@@ -8897,7 +8575,7 @@
           <p:cNvPr id="2" name="Title 1">
             <a:extLst>
               <a:ext uri="{FF2B5EF4-FFF2-40B4-BE49-F238E27FC236}">
-                <a16:creationId xmlns:a16="http://schemas.microsoft.com/office/drawing/2014/main" id="{3F7DC102-74D5-6A5A-C16F-A6633D668E11}"/>
+                <a16:creationId xmlns:a16="http://schemas.microsoft.com/office/drawing/2014/main" id="{EFC4C49B-2F1D-97B3-0A85-352A55AC2ECB}"/>
               </a:ext>
             </a:extLst>
           </p:cNvPr>
@@ -8911,7 +8589,456 @@
         <p:spPr>
           <a:xfrm>
             <a:off x="913795" y="0"/>
-            <a:ext cx="10353762" cy="668594"/>
+            <a:ext cx="10353762" cy="747252"/>
+          </a:xfrm>
+        </p:spPr>
+        <p:txBody>
+          <a:bodyPr/>
+          <a:lstStyle/>
+          <a:p>
+            <a:r>
+              <a:rPr lang="en-US" b="1"/>
+              <a:t>Creating side bar</a:t>
+            </a:r>
+          </a:p>
+        </p:txBody>
+      </p:sp>
+      <p:sp>
+        <p:nvSpPr>
+          <p:cNvPr id="3" name="Content Placeholder 2">
+            <a:extLst>
+              <a:ext uri="{FF2B5EF4-FFF2-40B4-BE49-F238E27FC236}">
+                <a16:creationId xmlns:a16="http://schemas.microsoft.com/office/drawing/2014/main" id="{6616EB86-5D99-4E2C-2247-FA4A7724D22A}"/>
+              </a:ext>
+            </a:extLst>
+          </p:cNvPr>
+          <p:cNvSpPr>
+            <a:spLocks noGrp="1"/>
+          </p:cNvSpPr>
+          <p:nvPr>
+            <p:ph idx="1"/>
+          </p:nvPr>
+        </p:nvSpPr>
+        <p:spPr>
+          <a:xfrm>
+            <a:off x="285134" y="747253"/>
+            <a:ext cx="11464413" cy="5702708"/>
+          </a:xfrm>
+        </p:spPr>
+        <p:txBody>
+          <a:bodyPr/>
+          <a:lstStyle/>
+          <a:p>
+            <a:r>
+              <a:rPr lang="en-US"/>
+              <a:t>ng g c </a:t>
+            </a:r>
+            <a:r>
+              <a:rPr lang="en-US" err="1"/>
+              <a:t>SideBar</a:t>
+            </a:r>
+            <a:r>
+              <a:rPr lang="en-US"/>
+              <a:t> --skip-tests</a:t>
+            </a:r>
+          </a:p>
+        </p:txBody>
+      </p:sp>
+    </p:spTree>
+    <p:extLst>
+      <p:ext uri="{BB962C8B-B14F-4D97-AF65-F5344CB8AC3E}">
+        <p14:creationId xmlns:p14="http://schemas.microsoft.com/office/powerpoint/2010/main" val="898701421"/>
+      </p:ext>
+    </p:extLst>
+  </p:cSld>
+  <p:clrMapOvr>
+    <a:masterClrMapping/>
+  </p:clrMapOvr>
+</p:sld>
+</file>
+
+<file path=ppt/slides/slide26.xml><?xml version="1.0" encoding="utf-8"?>
+<p:sld xmlns:a="http://schemas.openxmlformats.org/drawingml/2006/main" xmlns:r="http://schemas.openxmlformats.org/officeDocument/2006/relationships" xmlns:p="http://schemas.openxmlformats.org/presentationml/2006/main">
+  <p:cSld>
+    <p:spTree>
+      <p:nvGrpSpPr>
+        <p:cNvPr id="1" name=""/>
+        <p:cNvGrpSpPr/>
+        <p:nvPr/>
+      </p:nvGrpSpPr>
+      <p:grpSpPr>
+        <a:xfrm>
+          <a:off x="0" y="0"/>
+          <a:ext cx="0" cy="0"/>
+          <a:chOff x="0" y="0"/>
+          <a:chExt cx="0" cy="0"/>
+        </a:xfrm>
+      </p:grpSpPr>
+      <p:sp>
+        <p:nvSpPr>
+          <p:cNvPr id="2" name="Title 1">
+            <a:extLst>
+              <a:ext uri="{FF2B5EF4-FFF2-40B4-BE49-F238E27FC236}">
+                <a16:creationId xmlns:a16="http://schemas.microsoft.com/office/drawing/2014/main" id="{8778D13E-4D03-33C1-BF51-610117BB7EB3}"/>
+              </a:ext>
+            </a:extLst>
+          </p:cNvPr>
+          <p:cNvSpPr>
+            <a:spLocks noGrp="1"/>
+          </p:cNvSpPr>
+          <p:nvPr>
+            <p:ph type="title"/>
+          </p:nvPr>
+        </p:nvSpPr>
+        <p:spPr>
+          <a:xfrm>
+            <a:off x="913795" y="0"/>
+            <a:ext cx="10353762" cy="737419"/>
+          </a:xfrm>
+        </p:spPr>
+        <p:txBody>
+          <a:bodyPr/>
+          <a:lstStyle/>
+          <a:p>
+            <a:r>
+              <a:rPr lang="en-US" b="1">
+                <a:solidFill>
+                  <a:srgbClr val="0070C0"/>
+                </a:solidFill>
+              </a:rPr>
+              <a:t>Adding bootstrap &amp; Bootstrap icon</a:t>
+            </a:r>
+          </a:p>
+        </p:txBody>
+      </p:sp>
+      <p:sp>
+        <p:nvSpPr>
+          <p:cNvPr id="3" name="Content Placeholder 2">
+            <a:extLst>
+              <a:ext uri="{FF2B5EF4-FFF2-40B4-BE49-F238E27FC236}">
+                <a16:creationId xmlns:a16="http://schemas.microsoft.com/office/drawing/2014/main" id="{5C9C21FE-7EFF-39B9-60D6-6206D8DBF34A}"/>
+              </a:ext>
+            </a:extLst>
+          </p:cNvPr>
+          <p:cNvSpPr>
+            <a:spLocks noGrp="1"/>
+          </p:cNvSpPr>
+          <p:nvPr>
+            <p:ph idx="1"/>
+          </p:nvPr>
+        </p:nvSpPr>
+        <p:spPr>
+          <a:xfrm>
+            <a:off x="334296" y="737419"/>
+            <a:ext cx="11472517" cy="5456904"/>
+          </a:xfrm>
+        </p:spPr>
+        <p:txBody>
+          <a:bodyPr>
+            <a:normAutofit/>
+          </a:bodyPr>
+          <a:lstStyle/>
+          <a:p>
+            <a:r>
+              <a:rPr lang="en-US" sz="1800" b="1">
+                <a:solidFill>
+                  <a:srgbClr val="FFFF00"/>
+                </a:solidFill>
+              </a:rPr>
+              <a:t>ng</a:t>
+            </a:r>
+            <a:r>
+              <a:rPr lang="en-US" sz="1800"/>
+              <a:t> </a:t>
+            </a:r>
+            <a:r>
+              <a:rPr lang="en-US" sz="1800" b="1">
+                <a:solidFill>
+                  <a:srgbClr val="00B0F0"/>
+                </a:solidFill>
+              </a:rPr>
+              <a:t>add</a:t>
+            </a:r>
+            <a:r>
+              <a:rPr lang="en-US" sz="1800"/>
+              <a:t> </a:t>
+            </a:r>
+            <a:r>
+              <a:rPr lang="en-US" sz="1800" b="1">
+                <a:solidFill>
+                  <a:srgbClr val="00B050"/>
+                </a:solidFill>
+              </a:rPr>
+              <a:t>@ng-bootstrap/ng-bootstrap</a:t>
+            </a:r>
+            <a:r>
+              <a:rPr lang="en-US" sz="1800"/>
+              <a:t>  //</a:t>
+            </a:r>
+            <a:r>
+              <a:rPr lang="en-US" sz="1800" b="1"/>
+              <a:t>recommended, to use the component that need the JS code</a:t>
+            </a:r>
+          </a:p>
+          <a:p>
+            <a:r>
+              <a:rPr lang="en-US" sz="1800" b="1" err="1">
+                <a:solidFill>
+                  <a:srgbClr val="FFFF00"/>
+                </a:solidFill>
+              </a:rPr>
+              <a:t>npm</a:t>
+            </a:r>
+            <a:r>
+              <a:rPr lang="en-US" sz="1800" b="1"/>
+              <a:t> </a:t>
+            </a:r>
+            <a:r>
+              <a:rPr lang="en-US" sz="1800" b="1" err="1"/>
+              <a:t>i</a:t>
+            </a:r>
+            <a:r>
+              <a:rPr lang="en-US" sz="1800" b="1"/>
+              <a:t> @ng-bootstrap/ng-bootstrap  // like the above</a:t>
+            </a:r>
+          </a:p>
+          <a:p>
+            <a:r>
+              <a:rPr lang="en-US" sz="1800" b="1"/>
+              <a:t>at </a:t>
+            </a:r>
+            <a:r>
+              <a:rPr lang="en-US" sz="1800" b="1" err="1"/>
+              <a:t>angular.json</a:t>
+            </a:r>
+            <a:r>
+              <a:rPr lang="en-US" sz="1800" b="1"/>
+              <a:t> / at architect object / build object / options object</a:t>
+            </a:r>
+          </a:p>
+          <a:p>
+            <a:pPr lvl="1"/>
+            <a:r>
+              <a:rPr lang="en-US" b="1">
+                <a:solidFill>
+                  <a:srgbClr val="00B0F0"/>
+                </a:solidFill>
+              </a:rPr>
+              <a:t>at styles array</a:t>
+            </a:r>
+            <a:r>
+              <a:rPr lang="en-US" b="1"/>
+              <a:t>    -- "</a:t>
+            </a:r>
+            <a:r>
+              <a:rPr lang="en-US" b="1" err="1"/>
+              <a:t>node_modules</a:t>
+            </a:r>
+            <a:r>
+              <a:rPr lang="en-US" b="1"/>
+              <a:t>/bootstrap/</a:t>
+            </a:r>
+            <a:r>
+              <a:rPr lang="en-US" b="1" err="1"/>
+              <a:t>dist</a:t>
+            </a:r>
+            <a:r>
+              <a:rPr lang="en-US" b="1"/>
+              <a:t>/</a:t>
+            </a:r>
+            <a:r>
+              <a:rPr lang="en-US" b="1" err="1"/>
+              <a:t>css</a:t>
+            </a:r>
+            <a:r>
+              <a:rPr lang="en-US" b="1"/>
+              <a:t>/bootstrap.min.css",        // bootstrap CSS file</a:t>
+            </a:r>
+          </a:p>
+          <a:p>
+            <a:pPr lvl="1"/>
+            <a:r>
+              <a:rPr lang="en-US" b="1">
+                <a:solidFill>
+                  <a:srgbClr val="00B0F0"/>
+                </a:solidFill>
+              </a:rPr>
+              <a:t>at scripts array</a:t>
+            </a:r>
+            <a:r>
+              <a:rPr lang="en-US" b="1"/>
+              <a:t>  -- "</a:t>
+            </a:r>
+            <a:r>
+              <a:rPr lang="en-US" b="1" err="1"/>
+              <a:t>node_modules</a:t>
+            </a:r>
+            <a:r>
+              <a:rPr lang="en-US" b="1"/>
+              <a:t>/bootstrap/</a:t>
+            </a:r>
+            <a:r>
+              <a:rPr lang="en-US" b="1" err="1"/>
+              <a:t>dist</a:t>
+            </a:r>
+            <a:r>
+              <a:rPr lang="en-US" b="1"/>
+              <a:t>/</a:t>
+            </a:r>
+            <a:r>
+              <a:rPr lang="en-US" b="1" err="1"/>
+              <a:t>js</a:t>
+            </a:r>
+            <a:r>
+              <a:rPr lang="en-US" b="1"/>
+              <a:t>/bootstrap.bundle.min.js"  // bootstrap JS file</a:t>
+            </a:r>
+          </a:p>
+          <a:p>
+            <a:r>
+              <a:rPr lang="en-US" sz="1800" b="1"/>
+              <a:t>For angular 17 , ng-bootstrap 16</a:t>
+            </a:r>
+            <a:r>
+              <a:rPr lang="en-US" sz="1800"/>
+              <a:t> → Stable</a:t>
+            </a:r>
+          </a:p>
+          <a:p>
+            <a:pPr lvl="1"/>
+            <a:r>
+              <a:rPr lang="en-US" b="1" err="1">
+                <a:solidFill>
+                  <a:srgbClr val="FFFF00"/>
+                </a:solidFill>
+              </a:rPr>
+              <a:t>npm</a:t>
+            </a:r>
+            <a:r>
+              <a:rPr lang="en-US" b="1"/>
+              <a:t> </a:t>
+            </a:r>
+            <a:r>
+              <a:rPr lang="en-US" b="1" err="1"/>
+              <a:t>i</a:t>
+            </a:r>
+            <a:r>
+              <a:rPr lang="en-US" b="1"/>
+              <a:t> @ng-bootstrap/ng-bootstrap</a:t>
+            </a:r>
+          </a:p>
+          <a:p>
+            <a:r>
+              <a:rPr lang="en-US" sz="1800" b="1" err="1">
+                <a:solidFill>
+                  <a:srgbClr val="FFFF00"/>
+                </a:solidFill>
+              </a:rPr>
+              <a:t>npm</a:t>
+            </a:r>
+            <a:r>
+              <a:rPr lang="en-US" sz="1800" b="1"/>
+              <a:t> </a:t>
+            </a:r>
+            <a:r>
+              <a:rPr lang="en-US" sz="1800" b="1" err="1"/>
+              <a:t>i</a:t>
+            </a:r>
+            <a:r>
+              <a:rPr lang="en-US" sz="1800" b="1"/>
+              <a:t> </a:t>
+            </a:r>
+            <a:r>
+              <a:rPr lang="en-US" sz="1800" b="1">
+                <a:solidFill>
+                  <a:srgbClr val="00B050"/>
+                </a:solidFill>
+              </a:rPr>
+              <a:t>bootstrap-icons</a:t>
+            </a:r>
+          </a:p>
+          <a:p>
+            <a:pPr lvl="1"/>
+            <a:r>
+              <a:rPr lang="en-US" b="1">
+                <a:solidFill>
+                  <a:srgbClr val="00B0F0"/>
+                </a:solidFill>
+              </a:rPr>
+              <a:t>at style array</a:t>
+            </a:r>
+            <a:r>
+              <a:rPr lang="en-US" b="1"/>
+              <a:t> "</a:t>
+            </a:r>
+            <a:r>
+              <a:rPr lang="en-US" b="1" err="1"/>
+              <a:t>node_modules</a:t>
+            </a:r>
+            <a:r>
+              <a:rPr lang="en-US" b="1"/>
+              <a:t>/bootstrap-icons/font/bootstrap-icons.min.css"</a:t>
+            </a:r>
+          </a:p>
+          <a:p>
+            <a:pPr lvl="1"/>
+            <a:endParaRPr lang="en-US" sz="1600" b="1"/>
+          </a:p>
+          <a:p>
+            <a:endParaRPr lang="en-US" sz="1800" b="1"/>
+          </a:p>
+        </p:txBody>
+      </p:sp>
+    </p:spTree>
+    <p:extLst>
+      <p:ext uri="{BB962C8B-B14F-4D97-AF65-F5344CB8AC3E}">
+        <p14:creationId xmlns:p14="http://schemas.microsoft.com/office/powerpoint/2010/main" val="2094939905"/>
+      </p:ext>
+    </p:extLst>
+  </p:cSld>
+  <p:clrMapOvr>
+    <a:masterClrMapping/>
+  </p:clrMapOvr>
+</p:sld>
+</file>
+
+<file path=ppt/slides/slide27.xml><?xml version="1.0" encoding="utf-8"?>
+<p:sld xmlns:a="http://schemas.openxmlformats.org/drawingml/2006/main" xmlns:r="http://schemas.openxmlformats.org/officeDocument/2006/relationships" xmlns:p="http://schemas.openxmlformats.org/presentationml/2006/main">
+  <p:cSld>
+    <p:spTree>
+      <p:nvGrpSpPr>
+        <p:cNvPr id="1" name=""/>
+        <p:cNvGrpSpPr/>
+        <p:nvPr/>
+      </p:nvGrpSpPr>
+      <p:grpSpPr>
+        <a:xfrm>
+          <a:off x="0" y="0"/>
+          <a:ext cx="0" cy="0"/>
+          <a:chOff x="0" y="0"/>
+          <a:chExt cx="0" cy="0"/>
+        </a:xfrm>
+      </p:grpSpPr>
+      <p:sp>
+        <p:nvSpPr>
+          <p:cNvPr id="2" name="Title 1">
+            <a:extLst>
+              <a:ext uri="{FF2B5EF4-FFF2-40B4-BE49-F238E27FC236}">
+                <a16:creationId xmlns:a16="http://schemas.microsoft.com/office/drawing/2014/main" id="{7DA78EBE-03FD-D8DE-35CF-1926B0CA385E}"/>
+              </a:ext>
+            </a:extLst>
+          </p:cNvPr>
+          <p:cNvSpPr>
+            <a:spLocks noGrp="1"/>
+          </p:cNvSpPr>
+          <p:nvPr>
+            <p:ph type="title"/>
+          </p:nvPr>
+        </p:nvSpPr>
+        <p:spPr>
+          <a:xfrm>
+            <a:off x="913795" y="0"/>
+            <a:ext cx="10353762" cy="688258"/>
           </a:xfrm>
         </p:spPr>
         <p:txBody>
@@ -8921,18 +9048,18 @@
           <a:lstStyle/>
           <a:p>
             <a:r>
-              <a:rPr lang="en-US" b="1" dirty="0"/>
-              <a:t>Enum</a:t>
-            </a:r>
-          </a:p>
-        </p:txBody>
-      </p:sp>
-      <p:sp>
-        <p:nvSpPr>
-          <p:cNvPr id="9" name="Content Placeholder 8">
+              <a:rPr lang="en-US" b="1"/>
+              <a:t>Addin CSS file globally</a:t>
+            </a:r>
+          </a:p>
+        </p:txBody>
+      </p:sp>
+      <p:sp>
+        <p:nvSpPr>
+          <p:cNvPr id="3" name="Content Placeholder 2">
             <a:extLst>
               <a:ext uri="{FF2B5EF4-FFF2-40B4-BE49-F238E27FC236}">
-                <a16:creationId xmlns:a16="http://schemas.microsoft.com/office/drawing/2014/main" id="{4C153522-2A32-E7A7-CA2E-3619FCE51951}"/>
+                <a16:creationId xmlns:a16="http://schemas.microsoft.com/office/drawing/2014/main" id="{0BA55FB4-19F2-A5D7-3E15-C94C5CEB2E1C}"/>
               </a:ext>
             </a:extLst>
           </p:cNvPr>
@@ -8945,138 +9072,374 @@
         </p:nvSpPr>
         <p:spPr>
           <a:xfrm>
-            <a:off x="287093" y="3437700"/>
-            <a:ext cx="11314972" cy="1153969"/>
-          </a:xfrm>
-        </p:spPr>
-        <p:txBody>
-          <a:bodyPr>
-            <a:normAutofit lnSpcReduction="10000"/>
-          </a:bodyPr>
-          <a:lstStyle/>
-          <a:p>
-            <a:r>
-              <a:rPr lang="en-US" dirty="0"/>
-              <a:t>note : Enums in TypeScript are technically objects where :</a:t>
-            </a:r>
+            <a:off x="160774" y="688258"/>
+            <a:ext cx="11887200" cy="5938683"/>
+          </a:xfrm>
+        </p:spPr>
+        <p:txBody>
+          <a:bodyPr/>
+          <a:lstStyle/>
+          <a:p>
+            <a:r>
+              <a:rPr lang="en-US"/>
+              <a:t>at </a:t>
+            </a:r>
+            <a:r>
+              <a:rPr lang="en-US" err="1"/>
+              <a:t>src</a:t>
+            </a:r>
+            <a:r>
+              <a:rPr lang="en-US"/>
+              <a:t> folder / </a:t>
+            </a:r>
+            <a:r>
+              <a:rPr lang="en-US" err="1"/>
+              <a:t>css</a:t>
+            </a:r>
+            <a:r>
+              <a:rPr lang="en-US"/>
+              <a:t> folder / css-extensions.css</a:t>
+            </a:r>
+          </a:p>
+          <a:p>
+            <a:r>
+              <a:rPr lang="en-US" b="1"/>
+              <a:t>at </a:t>
+            </a:r>
+            <a:r>
+              <a:rPr lang="en-US" b="1" err="1"/>
+              <a:t>angular.json</a:t>
+            </a:r>
+            <a:r>
+              <a:rPr lang="en-US" b="1"/>
+              <a:t> / at architect object / build object / options object</a:t>
+            </a:r>
+            <a:endParaRPr lang="en-US"/>
           </a:p>
           <a:p>
             <a:pPr lvl="1"/>
             <a:r>
-              <a:rPr lang="en-US" dirty="0"/>
-              <a:t>Keys are strings.</a:t>
+              <a:rPr lang="en-US" b="1">
+                <a:solidFill>
+                  <a:srgbClr val="00B0F0"/>
+                </a:solidFill>
+              </a:rPr>
+              <a:t>at styles array</a:t>
+            </a:r>
+            <a:r>
+              <a:rPr lang="en-US" b="1"/>
+              <a:t>    --- </a:t>
+            </a:r>
+            <a:r>
+              <a:rPr lang="en-US">
+                <a:effectLst/>
+              </a:rPr>
+              <a:t>"</a:t>
+            </a:r>
+            <a:r>
+              <a:rPr lang="en-US" err="1">
+                <a:effectLst/>
+              </a:rPr>
+              <a:t>src</a:t>
+            </a:r>
+            <a:r>
+              <a:rPr lang="en-US">
+                <a:effectLst/>
+              </a:rPr>
+              <a:t>/</a:t>
+            </a:r>
+            <a:r>
+              <a:rPr lang="en-US" err="1">
+                <a:effectLst/>
+              </a:rPr>
+              <a:t>css</a:t>
+            </a:r>
+            <a:r>
+              <a:rPr lang="en-US">
+                <a:effectLst/>
+              </a:rPr>
+              <a:t>/css-extension.css"</a:t>
+            </a:r>
+          </a:p>
+          <a:p>
+            <a:r>
+              <a:rPr lang="en-US"/>
+              <a:t>Adding styles via </a:t>
+            </a:r>
+            <a:r>
+              <a:rPr lang="en-US" b="1" err="1">
+                <a:effectLst/>
+              </a:rPr>
+              <a:t>angular.json</a:t>
+            </a:r>
+            <a:r>
+              <a:rPr lang="en-US">
+                <a:effectLst/>
+              </a:rPr>
+              <a:t> is generally faster and more reliable for your application's initial load and overall stability compared to using an external CDN link in index.html</a:t>
+            </a:r>
+          </a:p>
+          <a:p>
+            <a:r>
+              <a:rPr lang="en-US" b="1">
+                <a:effectLst/>
+              </a:rPr>
+              <a:t>Why angular.json is usually faster</a:t>
             </a:r>
           </a:p>
           <a:p>
             <a:pPr lvl="1"/>
             <a:r>
-              <a:rPr lang="en-US" dirty="0"/>
-              <a:t>Values are numbers (if it's a numeric Enum) or strings (if it's a string Enum).</a:t>
-            </a:r>
-          </a:p>
-        </p:txBody>
-      </p:sp>
-      <p:pic>
-        <p:nvPicPr>
-          <p:cNvPr id="10" name="Content Placeholder 4">
+              <a:rPr lang="en-US" b="1">
+                <a:effectLst/>
+              </a:rPr>
+              <a:t>Reduced HTTP Requests</a:t>
+            </a:r>
+            <a:r>
+              <a:rPr lang="en-US">
+                <a:effectLst/>
+              </a:rPr>
+              <a:t>: When you add files to angular.json, the Angular CLI bundles them into a single (or few) minified CSS files. The browser makes one request for your styles instead of multiple separate requests to different servers.</a:t>
+            </a:r>
+          </a:p>
+          <a:p>
+            <a:endParaRPr lang="en-US" b="1">
+              <a:effectLst/>
+            </a:endParaRPr>
+          </a:p>
+          <a:p>
+            <a:endParaRPr lang="en-US" b="1">
+              <a:effectLst/>
+            </a:endParaRPr>
+          </a:p>
+        </p:txBody>
+      </p:sp>
+    </p:spTree>
+    <p:extLst>
+      <p:ext uri="{BB962C8B-B14F-4D97-AF65-F5344CB8AC3E}">
+        <p14:creationId xmlns:p14="http://schemas.microsoft.com/office/powerpoint/2010/main" val="2733366995"/>
+      </p:ext>
+    </p:extLst>
+  </p:cSld>
+  <p:clrMapOvr>
+    <a:masterClrMapping/>
+  </p:clrMapOvr>
+</p:sld>
+</file>
+
+<file path=ppt/slides/slide28.xml><?xml version="1.0" encoding="utf-8"?>
+<p:sld xmlns:a="http://schemas.openxmlformats.org/drawingml/2006/main" xmlns:r="http://schemas.openxmlformats.org/officeDocument/2006/relationships" xmlns:p="http://schemas.openxmlformats.org/presentationml/2006/main">
+  <p:cSld>
+    <p:spTree>
+      <p:nvGrpSpPr>
+        <p:cNvPr id="1" name=""/>
+        <p:cNvGrpSpPr/>
+        <p:nvPr/>
+      </p:nvGrpSpPr>
+      <p:grpSpPr>
+        <a:xfrm>
+          <a:off x="0" y="0"/>
+          <a:ext cx="0" cy="0"/>
+          <a:chOff x="0" y="0"/>
+          <a:chExt cx="0" cy="0"/>
+        </a:xfrm>
+      </p:grpSpPr>
+      <p:sp>
+        <p:nvSpPr>
+          <p:cNvPr id="2" name="Title 1">
             <a:extLst>
               <a:ext uri="{FF2B5EF4-FFF2-40B4-BE49-F238E27FC236}">
-                <a16:creationId xmlns:a16="http://schemas.microsoft.com/office/drawing/2014/main" id="{468FE5B5-EF94-C9D7-A34B-FF927FCCAD9C}"/>
+                <a16:creationId xmlns:a16="http://schemas.microsoft.com/office/drawing/2014/main" id="{A0205F32-0908-AE4A-42DB-A37AFD33EB8E}"/>
               </a:ext>
             </a:extLst>
           </p:cNvPr>
-          <p:cNvPicPr>
-            <a:picLocks noChangeAspect="1"/>
-          </p:cNvPicPr>
-          <p:nvPr/>
-        </p:nvPicPr>
-        <p:blipFill>
-          <a:blip r:embed="rId2"/>
-          <a:stretch>
-            <a:fillRect/>
-          </a:stretch>
-        </p:blipFill>
-        <p:spPr>
-          <a:xfrm>
-            <a:off x="287093" y="334297"/>
-            <a:ext cx="3141593" cy="1565000"/>
-          </a:xfrm>
-          <a:prstGeom prst="rect">
-            <a:avLst/>
-          </a:prstGeom>
-          <a:effectLst>
-            <a:outerShdw blurRad="25400" dir="17880000">
-              <a:srgbClr val="000000">
-                <a:alpha val="46000"/>
-              </a:srgbClr>
-            </a:outerShdw>
-          </a:effectLst>
-        </p:spPr>
-      </p:pic>
-      <p:pic>
-        <p:nvPicPr>
-          <p:cNvPr id="11" name="Picture 10">
+          <p:cNvSpPr>
+            <a:spLocks noGrp="1"/>
+          </p:cNvSpPr>
+          <p:nvPr>
+            <p:ph type="title"/>
+          </p:nvPr>
+        </p:nvSpPr>
+        <p:spPr>
+          <a:xfrm>
+            <a:off x="919119" y="2120202"/>
+            <a:ext cx="10353762" cy="1778558"/>
+          </a:xfrm>
+        </p:spPr>
+        <p:txBody>
+          <a:bodyPr>
+            <a:normAutofit/>
+          </a:bodyPr>
+          <a:lstStyle/>
+          <a:p>
+            <a:r>
+              <a:rPr lang="en-US" sz="4800" b="1">
+                <a:solidFill>
+                  <a:srgbClr val="FF0000"/>
+                </a:solidFill>
+              </a:rPr>
+              <a:t>Angular Material </a:t>
+            </a:r>
+          </a:p>
+        </p:txBody>
+      </p:sp>
+    </p:spTree>
+    <p:extLst>
+      <p:ext uri="{BB962C8B-B14F-4D97-AF65-F5344CB8AC3E}">
+        <p14:creationId xmlns:p14="http://schemas.microsoft.com/office/powerpoint/2010/main" val="3626811731"/>
+      </p:ext>
+    </p:extLst>
+  </p:cSld>
+  <p:clrMapOvr>
+    <a:masterClrMapping/>
+  </p:clrMapOvr>
+</p:sld>
+</file>
+
+<file path=ppt/slides/slide29.xml><?xml version="1.0" encoding="utf-8"?>
+<p:sld xmlns:a="http://schemas.openxmlformats.org/drawingml/2006/main" xmlns:r="http://schemas.openxmlformats.org/officeDocument/2006/relationships" xmlns:p="http://schemas.openxmlformats.org/presentationml/2006/main">
+  <p:cSld>
+    <p:spTree>
+      <p:nvGrpSpPr>
+        <p:cNvPr id="1" name=""/>
+        <p:cNvGrpSpPr/>
+        <p:nvPr/>
+      </p:nvGrpSpPr>
+      <p:grpSpPr>
+        <a:xfrm>
+          <a:off x="0" y="0"/>
+          <a:ext cx="0" cy="0"/>
+          <a:chOff x="0" y="0"/>
+          <a:chExt cx="0" cy="0"/>
+        </a:xfrm>
+      </p:grpSpPr>
+      <p:sp>
+        <p:nvSpPr>
+          <p:cNvPr id="2" name="Title 1">
             <a:extLst>
               <a:ext uri="{FF2B5EF4-FFF2-40B4-BE49-F238E27FC236}">
-                <a16:creationId xmlns:a16="http://schemas.microsoft.com/office/drawing/2014/main" id="{353EC381-3C7D-477D-7149-FEB84B36FF97}"/>
+                <a16:creationId xmlns:a16="http://schemas.microsoft.com/office/drawing/2014/main" id="{EE40E7BC-D472-1FBC-B850-0F6CE4166AE4}"/>
               </a:ext>
             </a:extLst>
           </p:cNvPr>
-          <p:cNvPicPr>
-            <a:picLocks noChangeAspect="1"/>
-          </p:cNvPicPr>
-          <p:nvPr/>
-        </p:nvPicPr>
-        <p:blipFill>
-          <a:blip r:embed="rId3"/>
-          <a:stretch>
-            <a:fillRect/>
-          </a:stretch>
-        </p:blipFill>
-        <p:spPr>
-          <a:xfrm>
-            <a:off x="287093" y="2126682"/>
-            <a:ext cx="11019572" cy="1267447"/>
-          </a:xfrm>
-          <a:prstGeom prst="rect">
-            <a:avLst/>
-          </a:prstGeom>
-        </p:spPr>
-      </p:pic>
-      <p:pic>
-        <p:nvPicPr>
-          <p:cNvPr id="15" name="Picture 14">
+          <p:cNvSpPr>
+            <a:spLocks noGrp="1"/>
+          </p:cNvSpPr>
+          <p:nvPr>
+            <p:ph type="title"/>
+          </p:nvPr>
+        </p:nvSpPr>
+        <p:spPr>
+          <a:xfrm>
+            <a:off x="913795" y="609600"/>
+            <a:ext cx="10353762" cy="827314"/>
+          </a:xfrm>
+        </p:spPr>
+        <p:txBody>
+          <a:bodyPr/>
+          <a:lstStyle/>
+          <a:p>
+            <a:r>
+              <a:rPr lang="en-US"/>
+              <a:t>Installation</a:t>
+            </a:r>
+          </a:p>
+        </p:txBody>
+      </p:sp>
+      <p:sp>
+        <p:nvSpPr>
+          <p:cNvPr id="3" name="Content Placeholder 2">
             <a:extLst>
               <a:ext uri="{FF2B5EF4-FFF2-40B4-BE49-F238E27FC236}">
-                <a16:creationId xmlns:a16="http://schemas.microsoft.com/office/drawing/2014/main" id="{4633A0A3-A288-DD0A-5D7F-1B49AE151352}"/>
+                <a16:creationId xmlns:a16="http://schemas.microsoft.com/office/drawing/2014/main" id="{514126CE-284C-2EF0-0815-366F73A647D1}"/>
               </a:ext>
             </a:extLst>
           </p:cNvPr>
-          <p:cNvPicPr>
-            <a:picLocks noChangeAspect="1"/>
-          </p:cNvPicPr>
-          <p:nvPr/>
-        </p:nvPicPr>
-        <p:blipFill>
-          <a:blip r:embed="rId4"/>
-          <a:stretch>
-            <a:fillRect/>
-          </a:stretch>
-        </p:blipFill>
-        <p:spPr>
-          <a:xfrm>
-            <a:off x="287094" y="4700192"/>
-            <a:ext cx="10430068" cy="2002942"/>
-          </a:xfrm>
-          <a:prstGeom prst="rect">
-            <a:avLst/>
-          </a:prstGeom>
-        </p:spPr>
-      </p:pic>
+          <p:cNvSpPr>
+            <a:spLocks noGrp="1"/>
+          </p:cNvSpPr>
+          <p:nvPr>
+            <p:ph idx="1"/>
+          </p:nvPr>
+        </p:nvSpPr>
+        <p:spPr>
+          <a:xfrm>
+            <a:off x="913795" y="1732449"/>
+            <a:ext cx="10353762" cy="4859270"/>
+          </a:xfrm>
+        </p:spPr>
+        <p:txBody>
+          <a:bodyPr>
+            <a:normAutofit/>
+          </a:bodyPr>
+          <a:lstStyle/>
+          <a:p>
+            <a:r>
+              <a:rPr lang="en-US" b="1">
+                <a:solidFill>
+                  <a:srgbClr val="FF0000"/>
+                </a:solidFill>
+              </a:rPr>
+              <a:t>ng add @angular/material</a:t>
+            </a:r>
+          </a:p>
+          <a:p>
+            <a:r>
+              <a:rPr lang="en-US">
+                <a:latin typeface="+mj-lt"/>
+                <a:ea typeface="+mj-ea"/>
+              </a:rPr>
+              <a:t>Choose a prebuilt theme name, or "custom" for a custom theme: Azure/Blue</a:t>
+            </a:r>
+          </a:p>
+          <a:p>
+            <a:r>
+              <a:rPr lang="en-US">
+                <a:latin typeface="+mj-lt"/>
+                <a:ea typeface="+mj-ea"/>
+              </a:rPr>
+              <a:t>At angular.json </a:t>
+            </a:r>
+          </a:p>
+          <a:p>
+            <a:pPr lvl="1"/>
+            <a:r>
+              <a:rPr lang="en-US">
+                <a:latin typeface="+mj-lt"/>
+                <a:ea typeface="+mj-ea"/>
+              </a:rPr>
+              <a:t>At style : </a:t>
+            </a:r>
+            <a:r>
+              <a:rPr lang="en-US">
+                <a:effectLst/>
+              </a:rPr>
+              <a:t>"@angular/material/prebuilt-themes/azure-blue.css"</a:t>
+            </a:r>
+            <a:endParaRPr lang="en-US">
+              <a:latin typeface="+mj-lt"/>
+              <a:ea typeface="+mj-ea"/>
+            </a:endParaRPr>
+          </a:p>
+          <a:p>
+            <a:r>
+              <a:rPr lang="en-US">
+                <a:latin typeface="+mj-lt"/>
+                <a:ea typeface="+mj-ea"/>
+              </a:rPr>
+              <a:t> </a:t>
+            </a:r>
+            <a:endParaRPr lang="en-US" sz="3600">
+              <a:latin typeface="+mj-lt"/>
+              <a:ea typeface="+mj-ea"/>
+            </a:endParaRPr>
+          </a:p>
+        </p:txBody>
+      </p:sp>
     </p:spTree>
     <p:extLst>
       <p:ext uri="{BB962C8B-B14F-4D97-AF65-F5344CB8AC3E}">
-        <p14:creationId xmlns:p14="http://schemas.microsoft.com/office/powerpoint/2010/main" val="3592595754"/>
+        <p14:creationId xmlns:p14="http://schemas.microsoft.com/office/powerpoint/2010/main" val="2834084368"/>
       </p:ext>
     </p:extLst>
   </p:cSld>
@@ -9132,7 +9495,7 @@
           <a:lstStyle/>
           <a:p>
             <a:r>
-              <a:rPr lang="en-US" b="1" dirty="0"/>
+              <a:rPr lang="en-US" b="1"/>
               <a:t>Creating Project	</a:t>
             </a:r>
           </a:p>
@@ -9165,18 +9528,18 @@
           <a:lstStyle/>
           <a:p>
             <a:r>
-              <a:rPr lang="en-US" dirty="0"/>
+              <a:rPr lang="en-US"/>
               <a:t>ng new projectName // it will cerate new folder with name projectName</a:t>
             </a:r>
           </a:p>
           <a:p>
             <a:pPr lvl="1"/>
             <a:r>
-              <a:rPr lang="en-US" b="1" dirty="0"/>
+              <a:rPr lang="en-US" b="1"/>
               <a:t>which </a:t>
             </a:r>
             <a:r>
-              <a:rPr lang="en-US" b="1" dirty="0">
+              <a:rPr lang="en-US" b="1">
                 <a:solidFill>
                   <a:srgbClr val="FFFF00"/>
                 </a:solidFill>
@@ -9184,19 +9547,19 @@
               <a:t>stylesheet</a:t>
             </a:r>
             <a:r>
-              <a:rPr lang="en-US" b="1" dirty="0"/>
+              <a:rPr lang="en-US" b="1"/>
               <a:t> format would you like to use ---- choose css</a:t>
             </a:r>
           </a:p>
           <a:p>
             <a:pPr lvl="1"/>
             <a:r>
-              <a:rPr lang="en-US" b="1" dirty="0"/>
+              <a:rPr lang="en-US" b="1"/>
               <a:t>do you want to enable server-side rendering     ---- choose NO</a:t>
             </a:r>
           </a:p>
           <a:p>
-            <a:endParaRPr lang="en-US" dirty="0"/>
+            <a:endParaRPr lang="en-US"/>
           </a:p>
         </p:txBody>
       </p:sp>
@@ -9204,6 +9567,829 @@
     <p:extLst>
       <p:ext uri="{BB962C8B-B14F-4D97-AF65-F5344CB8AC3E}">
         <p14:creationId xmlns:p14="http://schemas.microsoft.com/office/powerpoint/2010/main" val="3898322843"/>
+      </p:ext>
+    </p:extLst>
+  </p:cSld>
+  <p:clrMapOvr>
+    <a:masterClrMapping/>
+  </p:clrMapOvr>
+</p:sld>
+</file>
+
+<file path=ppt/slides/slide30.xml><?xml version="1.0" encoding="utf-8"?>
+<p:sld xmlns:a="http://schemas.openxmlformats.org/drawingml/2006/main" xmlns:r="http://schemas.openxmlformats.org/officeDocument/2006/relationships" xmlns:p="http://schemas.openxmlformats.org/presentationml/2006/main">
+  <p:cSld>
+    <p:spTree>
+      <p:nvGrpSpPr>
+        <p:cNvPr id="1" name=""/>
+        <p:cNvGrpSpPr/>
+        <p:nvPr/>
+      </p:nvGrpSpPr>
+      <p:grpSpPr>
+        <a:xfrm>
+          <a:off x="0" y="0"/>
+          <a:ext cx="0" cy="0"/>
+          <a:chOff x="0" y="0"/>
+          <a:chExt cx="0" cy="0"/>
+        </a:xfrm>
+      </p:grpSpPr>
+      <p:sp>
+        <p:nvSpPr>
+          <p:cNvPr id="2" name="Title 1">
+            <a:extLst>
+              <a:ext uri="{FF2B5EF4-FFF2-40B4-BE49-F238E27FC236}">
+                <a16:creationId xmlns:a16="http://schemas.microsoft.com/office/drawing/2014/main" id="{02620882-3A74-F22D-A1A0-0891F4397F2A}"/>
+              </a:ext>
+            </a:extLst>
+          </p:cNvPr>
+          <p:cNvSpPr>
+            <a:spLocks noGrp="1"/>
+          </p:cNvSpPr>
+          <p:nvPr>
+            <p:ph type="title"/>
+          </p:nvPr>
+        </p:nvSpPr>
+        <p:spPr>
+          <a:xfrm>
+            <a:off x="913795" y="0"/>
+            <a:ext cx="10353762" cy="653143"/>
+          </a:xfrm>
+        </p:spPr>
+        <p:txBody>
+          <a:bodyPr>
+            <a:normAutofit fontScale="90000"/>
+          </a:bodyPr>
+          <a:lstStyle/>
+          <a:p>
+            <a:r>
+              <a:rPr lang="en-US"/>
+              <a:t>Create main layout </a:t>
+            </a:r>
+          </a:p>
+        </p:txBody>
+      </p:sp>
+      <p:sp>
+        <p:nvSpPr>
+          <p:cNvPr id="3" name="Content Placeholder 2">
+            <a:extLst>
+              <a:ext uri="{FF2B5EF4-FFF2-40B4-BE49-F238E27FC236}">
+                <a16:creationId xmlns:a16="http://schemas.microsoft.com/office/drawing/2014/main" id="{BF57AF94-85B5-5DEF-7C1D-6E5E758EEBC3}"/>
+              </a:ext>
+            </a:extLst>
+          </p:cNvPr>
+          <p:cNvSpPr>
+            <a:spLocks noGrp="1"/>
+          </p:cNvSpPr>
+          <p:nvPr>
+            <p:ph idx="1"/>
+          </p:nvPr>
+        </p:nvSpPr>
+        <p:spPr>
+          <a:xfrm>
+            <a:off x="130628" y="653143"/>
+            <a:ext cx="11585749" cy="6018962"/>
+          </a:xfrm>
+        </p:spPr>
+        <p:txBody>
+          <a:bodyPr/>
+          <a:lstStyle/>
+          <a:p>
+            <a:r>
+              <a:rPr lang="en-US"/>
+              <a:t>This layout has layout </a:t>
+            </a:r>
+            <a:r>
+              <a:rPr lang="en-US" sz="2400" b="1">
+                <a:solidFill>
+                  <a:srgbClr val="FFFF00"/>
+                </a:solidFill>
+              </a:rPr>
+              <a:t>header and sidebar </a:t>
+            </a:r>
+            <a:r>
+              <a:rPr lang="en-US"/>
+              <a:t>(</a:t>
+            </a:r>
+            <a:r>
+              <a:rPr lang="en-US" err="1"/>
+              <a:t>offcanvas</a:t>
+            </a:r>
+            <a:r>
+              <a:rPr lang="en-US"/>
+              <a:t> sidebar)</a:t>
+            </a:r>
+          </a:p>
+          <a:p>
+            <a:r>
+              <a:rPr lang="en-US"/>
+              <a:t>Create </a:t>
+            </a:r>
+            <a:r>
+              <a:rPr lang="en-US" b="1">
+                <a:solidFill>
+                  <a:srgbClr val="FF0000"/>
+                </a:solidFill>
+              </a:rPr>
+              <a:t>main-layout</a:t>
+            </a:r>
+            <a:r>
+              <a:rPr lang="en-US"/>
+              <a:t> components at app/Layouts folder</a:t>
+            </a:r>
+          </a:p>
+          <a:p>
+            <a:endParaRPr lang="en-US"/>
+          </a:p>
+          <a:p>
+            <a:endParaRPr lang="en-US"/>
+          </a:p>
+        </p:txBody>
+      </p:sp>
+      <p:pic>
+        <p:nvPicPr>
+          <p:cNvPr id="5" name="Picture 4">
+            <a:extLst>
+              <a:ext uri="{FF2B5EF4-FFF2-40B4-BE49-F238E27FC236}">
+                <a16:creationId xmlns:a16="http://schemas.microsoft.com/office/drawing/2014/main" id="{08FA0F56-935A-ABBE-E9A7-72E5F50A7678}"/>
+              </a:ext>
+            </a:extLst>
+          </p:cNvPr>
+          <p:cNvPicPr>
+            <a:picLocks noChangeAspect="1"/>
+          </p:cNvPicPr>
+          <p:nvPr/>
+        </p:nvPicPr>
+        <p:blipFill>
+          <a:blip r:embed="rId2"/>
+          <a:stretch>
+            <a:fillRect/>
+          </a:stretch>
+        </p:blipFill>
+        <p:spPr>
+          <a:xfrm>
+            <a:off x="130628" y="1578743"/>
+            <a:ext cx="4305300" cy="2124075"/>
+          </a:xfrm>
+          <a:prstGeom prst="rect">
+            <a:avLst/>
+          </a:prstGeom>
+        </p:spPr>
+      </p:pic>
+      <p:pic>
+        <p:nvPicPr>
+          <p:cNvPr id="7" name="Picture 6">
+            <a:extLst>
+              <a:ext uri="{FF2B5EF4-FFF2-40B4-BE49-F238E27FC236}">
+                <a16:creationId xmlns:a16="http://schemas.microsoft.com/office/drawing/2014/main" id="{6E9936B2-A3C4-42E4-7F25-02C4852D76E8}"/>
+              </a:ext>
+            </a:extLst>
+          </p:cNvPr>
+          <p:cNvPicPr>
+            <a:picLocks noChangeAspect="1"/>
+          </p:cNvPicPr>
+          <p:nvPr/>
+        </p:nvPicPr>
+        <p:blipFill>
+          <a:blip r:embed="rId3"/>
+          <a:stretch>
+            <a:fillRect/>
+          </a:stretch>
+        </p:blipFill>
+        <p:spPr>
+          <a:xfrm>
+            <a:off x="67724" y="3818111"/>
+            <a:ext cx="11993648" cy="2386746"/>
+          </a:xfrm>
+          <a:prstGeom prst="rect">
+            <a:avLst/>
+          </a:prstGeom>
+        </p:spPr>
+      </p:pic>
+    </p:spTree>
+    <p:extLst>
+      <p:ext uri="{BB962C8B-B14F-4D97-AF65-F5344CB8AC3E}">
+        <p14:creationId xmlns:p14="http://schemas.microsoft.com/office/powerpoint/2010/main" val="1153374815"/>
+      </p:ext>
+    </p:extLst>
+  </p:cSld>
+  <p:clrMapOvr>
+    <a:masterClrMapping/>
+  </p:clrMapOvr>
+</p:sld>
+</file>
+
+<file path=ppt/slides/slide31.xml><?xml version="1.0" encoding="utf-8"?>
+<p:sld xmlns:a="http://schemas.openxmlformats.org/drawingml/2006/main" xmlns:r="http://schemas.openxmlformats.org/officeDocument/2006/relationships" xmlns:p="http://schemas.openxmlformats.org/presentationml/2006/main">
+  <p:cSld>
+    <p:spTree>
+      <p:nvGrpSpPr>
+        <p:cNvPr id="1" name=""/>
+        <p:cNvGrpSpPr/>
+        <p:nvPr/>
+      </p:nvGrpSpPr>
+      <p:grpSpPr>
+        <a:xfrm>
+          <a:off x="0" y="0"/>
+          <a:ext cx="0" cy="0"/>
+          <a:chOff x="0" y="0"/>
+          <a:chExt cx="0" cy="0"/>
+        </a:xfrm>
+      </p:grpSpPr>
+      <p:sp>
+        <p:nvSpPr>
+          <p:cNvPr id="2" name="Title 1">
+            <a:extLst>
+              <a:ext uri="{FF2B5EF4-FFF2-40B4-BE49-F238E27FC236}">
+                <a16:creationId xmlns:a16="http://schemas.microsoft.com/office/drawing/2014/main" id="{E28C1D31-DB66-B772-1221-31330DBD652E}"/>
+              </a:ext>
+            </a:extLst>
+          </p:cNvPr>
+          <p:cNvSpPr>
+            <a:spLocks noGrp="1"/>
+          </p:cNvSpPr>
+          <p:nvPr>
+            <p:ph type="title"/>
+          </p:nvPr>
+        </p:nvSpPr>
+        <p:spPr>
+          <a:xfrm>
+            <a:off x="913795" y="42681"/>
+            <a:ext cx="10353762" cy="620510"/>
+          </a:xfrm>
+        </p:spPr>
+        <p:txBody>
+          <a:bodyPr>
+            <a:normAutofit/>
+          </a:bodyPr>
+          <a:lstStyle/>
+          <a:p>
+            <a:r>
+              <a:rPr lang="en-US" sz="3200" b="1"/>
+              <a:t>Create main layout  (cont.)</a:t>
+            </a:r>
+          </a:p>
+        </p:txBody>
+      </p:sp>
+      <p:sp>
+        <p:nvSpPr>
+          <p:cNvPr id="3" name="Content Placeholder 2">
+            <a:extLst>
+              <a:ext uri="{FF2B5EF4-FFF2-40B4-BE49-F238E27FC236}">
+                <a16:creationId xmlns:a16="http://schemas.microsoft.com/office/drawing/2014/main" id="{AFA2F1B2-E592-5489-A07A-D30131FE95DA}"/>
+              </a:ext>
+            </a:extLst>
+          </p:cNvPr>
+          <p:cNvSpPr>
+            <a:spLocks noGrp="1"/>
+          </p:cNvSpPr>
+          <p:nvPr>
+            <p:ph idx="1"/>
+          </p:nvPr>
+        </p:nvSpPr>
+        <p:spPr/>
+        <p:txBody>
+          <a:bodyPr/>
+          <a:lstStyle/>
+          <a:p>
+            <a:endParaRPr lang="en-US"/>
+          </a:p>
+          <a:p>
+            <a:endParaRPr lang="en-US"/>
+          </a:p>
+          <a:p>
+            <a:endParaRPr lang="en-US"/>
+          </a:p>
+          <a:p>
+            <a:endParaRPr lang="en-US"/>
+          </a:p>
+          <a:p>
+            <a:endParaRPr lang="en-US"/>
+          </a:p>
+          <a:p>
+            <a:endParaRPr lang="en-US"/>
+          </a:p>
+          <a:p>
+            <a:endParaRPr lang="en-US"/>
+          </a:p>
+          <a:p>
+            <a:endParaRPr lang="en-US"/>
+          </a:p>
+          <a:p>
+            <a:endParaRPr lang="en-US"/>
+          </a:p>
+        </p:txBody>
+      </p:sp>
+      <p:pic>
+        <p:nvPicPr>
+          <p:cNvPr id="5" name="Picture 4">
+            <a:extLst>
+              <a:ext uri="{FF2B5EF4-FFF2-40B4-BE49-F238E27FC236}">
+                <a16:creationId xmlns:a16="http://schemas.microsoft.com/office/drawing/2014/main" id="{21CF604B-F529-23DE-6DDA-1442997D1CE6}"/>
+              </a:ext>
+            </a:extLst>
+          </p:cNvPr>
+          <p:cNvPicPr>
+            <a:picLocks noChangeAspect="1"/>
+          </p:cNvPicPr>
+          <p:nvPr/>
+        </p:nvPicPr>
+        <p:blipFill>
+          <a:blip r:embed="rId2"/>
+          <a:stretch>
+            <a:fillRect/>
+          </a:stretch>
+        </p:blipFill>
+        <p:spPr>
+          <a:xfrm>
+            <a:off x="401934" y="803868"/>
+            <a:ext cx="11154129" cy="3808325"/>
+          </a:xfrm>
+          <a:prstGeom prst="rect">
+            <a:avLst/>
+          </a:prstGeom>
+        </p:spPr>
+      </p:pic>
+    </p:spTree>
+    <p:extLst>
+      <p:ext uri="{BB962C8B-B14F-4D97-AF65-F5344CB8AC3E}">
+        <p14:creationId xmlns:p14="http://schemas.microsoft.com/office/powerpoint/2010/main" val="584833622"/>
+      </p:ext>
+    </p:extLst>
+  </p:cSld>
+  <p:clrMapOvr>
+    <a:masterClrMapping/>
+  </p:clrMapOvr>
+</p:sld>
+</file>
+
+<file path=ppt/slides/slide32.xml><?xml version="1.0" encoding="utf-8"?>
+<p:sld xmlns:a="http://schemas.openxmlformats.org/drawingml/2006/main" xmlns:r="http://schemas.openxmlformats.org/officeDocument/2006/relationships" xmlns:p="http://schemas.openxmlformats.org/presentationml/2006/main">
+  <p:cSld>
+    <p:spTree>
+      <p:nvGrpSpPr>
+        <p:cNvPr id="1" name=""/>
+        <p:cNvGrpSpPr/>
+        <p:nvPr/>
+      </p:nvGrpSpPr>
+      <p:grpSpPr>
+        <a:xfrm>
+          <a:off x="0" y="0"/>
+          <a:ext cx="0" cy="0"/>
+          <a:chOff x="0" y="0"/>
+          <a:chExt cx="0" cy="0"/>
+        </a:xfrm>
+      </p:grpSpPr>
+      <p:sp>
+        <p:nvSpPr>
+          <p:cNvPr id="2" name="Title 1">
+            <a:extLst>
+              <a:ext uri="{FF2B5EF4-FFF2-40B4-BE49-F238E27FC236}">
+                <a16:creationId xmlns:a16="http://schemas.microsoft.com/office/drawing/2014/main" id="{FC437ED4-E69D-F586-0742-5D562697F98A}"/>
+              </a:ext>
+            </a:extLst>
+          </p:cNvPr>
+          <p:cNvSpPr>
+            <a:spLocks noGrp="1"/>
+          </p:cNvSpPr>
+          <p:nvPr>
+            <p:ph type="title"/>
+          </p:nvPr>
+        </p:nvSpPr>
+        <p:spPr>
+          <a:xfrm>
+            <a:off x="919119" y="2231922"/>
+            <a:ext cx="10353762" cy="1837659"/>
+          </a:xfrm>
+        </p:spPr>
+        <p:txBody>
+          <a:bodyPr>
+            <a:normAutofit/>
+          </a:bodyPr>
+          <a:lstStyle/>
+          <a:p>
+            <a:r>
+              <a:rPr lang="en-US" sz="6000" b="1">
+                <a:solidFill>
+                  <a:srgbClr val="FF0000"/>
+                </a:solidFill>
+              </a:rPr>
+              <a:t>Type Script</a:t>
+            </a:r>
+          </a:p>
+        </p:txBody>
+      </p:sp>
+    </p:spTree>
+    <p:extLst>
+      <p:ext uri="{BB962C8B-B14F-4D97-AF65-F5344CB8AC3E}">
+        <p14:creationId xmlns:p14="http://schemas.microsoft.com/office/powerpoint/2010/main" val="385122793"/>
+      </p:ext>
+    </p:extLst>
+  </p:cSld>
+  <p:clrMapOvr>
+    <a:masterClrMapping/>
+  </p:clrMapOvr>
+</p:sld>
+</file>
+
+<file path=ppt/slides/slide33.xml><?xml version="1.0" encoding="utf-8"?>
+<p:sld xmlns:a="http://schemas.openxmlformats.org/drawingml/2006/main" xmlns:r="http://schemas.openxmlformats.org/officeDocument/2006/relationships" xmlns:p="http://schemas.openxmlformats.org/presentationml/2006/main">
+  <p:cSld>
+    <p:spTree>
+      <p:nvGrpSpPr>
+        <p:cNvPr id="1" name=""/>
+        <p:cNvGrpSpPr/>
+        <p:nvPr/>
+      </p:nvGrpSpPr>
+      <p:grpSpPr>
+        <a:xfrm>
+          <a:off x="0" y="0"/>
+          <a:ext cx="0" cy="0"/>
+          <a:chOff x="0" y="0"/>
+          <a:chExt cx="0" cy="0"/>
+        </a:xfrm>
+      </p:grpSpPr>
+      <p:sp>
+        <p:nvSpPr>
+          <p:cNvPr id="2" name="Title 1">
+            <a:extLst>
+              <a:ext uri="{FF2B5EF4-FFF2-40B4-BE49-F238E27FC236}">
+                <a16:creationId xmlns:a16="http://schemas.microsoft.com/office/drawing/2014/main" id="{D22BD241-91BC-982E-E8D8-DA059E13C029}"/>
+              </a:ext>
+            </a:extLst>
+          </p:cNvPr>
+          <p:cNvSpPr>
+            <a:spLocks noGrp="1"/>
+          </p:cNvSpPr>
+          <p:nvPr>
+            <p:ph type="title"/>
+          </p:nvPr>
+        </p:nvSpPr>
+        <p:spPr>
+          <a:xfrm>
+            <a:off x="913795" y="0"/>
+            <a:ext cx="10353762" cy="544310"/>
+          </a:xfrm>
+        </p:spPr>
+        <p:txBody>
+          <a:bodyPr>
+            <a:noAutofit/>
+          </a:bodyPr>
+          <a:lstStyle/>
+          <a:p>
+            <a:r>
+              <a:rPr lang="en-US" sz="3200"/>
+              <a:t>Layout [cont.]</a:t>
+            </a:r>
+          </a:p>
+        </p:txBody>
+      </p:sp>
+      <p:sp>
+        <p:nvSpPr>
+          <p:cNvPr id="3" name="Content Placeholder 2">
+            <a:extLst>
+              <a:ext uri="{FF2B5EF4-FFF2-40B4-BE49-F238E27FC236}">
+                <a16:creationId xmlns:a16="http://schemas.microsoft.com/office/drawing/2014/main" id="{F60292FF-FB71-EABA-22C8-49723B52D012}"/>
+              </a:ext>
+            </a:extLst>
+          </p:cNvPr>
+          <p:cNvSpPr>
+            <a:spLocks noGrp="1"/>
+          </p:cNvSpPr>
+          <p:nvPr>
+            <p:ph idx="1"/>
+          </p:nvPr>
+        </p:nvSpPr>
+        <p:spPr>
+          <a:xfrm>
+            <a:off x="913795" y="544310"/>
+            <a:ext cx="10353762" cy="5246891"/>
+          </a:xfrm>
+        </p:spPr>
+        <p:txBody>
+          <a:bodyPr/>
+          <a:lstStyle/>
+          <a:p>
+            <a:r>
+              <a:rPr lang="en-US"/>
+              <a:t>Create sidebar component at components folder</a:t>
+            </a:r>
+          </a:p>
+          <a:p>
+            <a:endParaRPr lang="en-US"/>
+          </a:p>
+          <a:p>
+            <a:endParaRPr lang="en-US"/>
+          </a:p>
+          <a:p>
+            <a:endParaRPr lang="en-US"/>
+          </a:p>
+        </p:txBody>
+      </p:sp>
+      <p:pic>
+        <p:nvPicPr>
+          <p:cNvPr id="5" name="Picture 4">
+            <a:extLst>
+              <a:ext uri="{FF2B5EF4-FFF2-40B4-BE49-F238E27FC236}">
+                <a16:creationId xmlns:a16="http://schemas.microsoft.com/office/drawing/2014/main" id="{5FEC7977-8DB6-5D26-4E6F-029EB9313555}"/>
+              </a:ext>
+            </a:extLst>
+          </p:cNvPr>
+          <p:cNvPicPr>
+            <a:picLocks noChangeAspect="1"/>
+          </p:cNvPicPr>
+          <p:nvPr/>
+        </p:nvPicPr>
+        <p:blipFill>
+          <a:blip r:embed="rId2"/>
+          <a:stretch>
+            <a:fillRect/>
+          </a:stretch>
+        </p:blipFill>
+        <p:spPr>
+          <a:xfrm>
+            <a:off x="0" y="968827"/>
+            <a:ext cx="7332109" cy="3844334"/>
+          </a:xfrm>
+          <a:prstGeom prst="rect">
+            <a:avLst/>
+          </a:prstGeom>
+        </p:spPr>
+      </p:pic>
+      <p:pic>
+        <p:nvPicPr>
+          <p:cNvPr id="7" name="Picture 6">
+            <a:extLst>
+              <a:ext uri="{FF2B5EF4-FFF2-40B4-BE49-F238E27FC236}">
+                <a16:creationId xmlns:a16="http://schemas.microsoft.com/office/drawing/2014/main" id="{97B2557A-5613-A7A6-6167-C88E6497C3C4}"/>
+              </a:ext>
+            </a:extLst>
+          </p:cNvPr>
+          <p:cNvPicPr>
+            <a:picLocks noChangeAspect="1"/>
+          </p:cNvPicPr>
+          <p:nvPr/>
+        </p:nvPicPr>
+        <p:blipFill>
+          <a:blip r:embed="rId3"/>
+          <a:stretch>
+            <a:fillRect/>
+          </a:stretch>
+        </p:blipFill>
+        <p:spPr>
+          <a:xfrm>
+            <a:off x="7332109" y="798004"/>
+            <a:ext cx="4774377" cy="3752248"/>
+          </a:xfrm>
+          <a:prstGeom prst="rect">
+            <a:avLst/>
+          </a:prstGeom>
+        </p:spPr>
+      </p:pic>
+      <p:pic>
+        <p:nvPicPr>
+          <p:cNvPr id="9" name="Picture 8">
+            <a:extLst>
+              <a:ext uri="{FF2B5EF4-FFF2-40B4-BE49-F238E27FC236}">
+                <a16:creationId xmlns:a16="http://schemas.microsoft.com/office/drawing/2014/main" id="{F5B8091C-F973-69E1-483C-A812643E422E}"/>
+              </a:ext>
+            </a:extLst>
+          </p:cNvPr>
+          <p:cNvPicPr>
+            <a:picLocks noChangeAspect="1"/>
+          </p:cNvPicPr>
+          <p:nvPr/>
+        </p:nvPicPr>
+        <p:blipFill>
+          <a:blip r:embed="rId4"/>
+          <a:stretch>
+            <a:fillRect/>
+          </a:stretch>
+        </p:blipFill>
+        <p:spPr>
+          <a:xfrm>
+            <a:off x="1750245" y="4813093"/>
+            <a:ext cx="4158186" cy="1956215"/>
+          </a:xfrm>
+          <a:prstGeom prst="rect">
+            <a:avLst/>
+          </a:prstGeom>
+        </p:spPr>
+      </p:pic>
+    </p:spTree>
+    <p:extLst>
+      <p:ext uri="{BB962C8B-B14F-4D97-AF65-F5344CB8AC3E}">
+        <p14:creationId xmlns:p14="http://schemas.microsoft.com/office/powerpoint/2010/main" val="3498281297"/>
+      </p:ext>
+    </p:extLst>
+  </p:cSld>
+  <p:clrMapOvr>
+    <a:masterClrMapping/>
+  </p:clrMapOvr>
+</p:sld>
+</file>
+
+<file path=ppt/slides/slide34.xml><?xml version="1.0" encoding="utf-8"?>
+<p:sld xmlns:a="http://schemas.openxmlformats.org/drawingml/2006/main" xmlns:r="http://schemas.openxmlformats.org/officeDocument/2006/relationships" xmlns:p="http://schemas.openxmlformats.org/presentationml/2006/main">
+  <p:cSld>
+    <p:spTree>
+      <p:nvGrpSpPr>
+        <p:cNvPr id="1" name=""/>
+        <p:cNvGrpSpPr/>
+        <p:nvPr/>
+      </p:nvGrpSpPr>
+      <p:grpSpPr>
+        <a:xfrm>
+          <a:off x="0" y="0"/>
+          <a:ext cx="0" cy="0"/>
+          <a:chOff x="0" y="0"/>
+          <a:chExt cx="0" cy="0"/>
+        </a:xfrm>
+      </p:grpSpPr>
+      <p:sp>
+        <p:nvSpPr>
+          <p:cNvPr id="2" name="Title 1">
+            <a:extLst>
+              <a:ext uri="{FF2B5EF4-FFF2-40B4-BE49-F238E27FC236}">
+                <a16:creationId xmlns:a16="http://schemas.microsoft.com/office/drawing/2014/main" id="{3F7DC102-74D5-6A5A-C16F-A6633D668E11}"/>
+              </a:ext>
+            </a:extLst>
+          </p:cNvPr>
+          <p:cNvSpPr>
+            <a:spLocks noGrp="1"/>
+          </p:cNvSpPr>
+          <p:nvPr>
+            <p:ph type="title"/>
+          </p:nvPr>
+        </p:nvSpPr>
+        <p:spPr>
+          <a:xfrm>
+            <a:off x="913795" y="0"/>
+            <a:ext cx="10353762" cy="668594"/>
+          </a:xfrm>
+        </p:spPr>
+        <p:txBody>
+          <a:bodyPr>
+            <a:normAutofit fontScale="90000"/>
+          </a:bodyPr>
+          <a:lstStyle/>
+          <a:p>
+            <a:r>
+              <a:rPr lang="en-US" b="1"/>
+              <a:t>Enum</a:t>
+            </a:r>
+          </a:p>
+        </p:txBody>
+      </p:sp>
+      <p:sp>
+        <p:nvSpPr>
+          <p:cNvPr id="9" name="Content Placeholder 8">
+            <a:extLst>
+              <a:ext uri="{FF2B5EF4-FFF2-40B4-BE49-F238E27FC236}">
+                <a16:creationId xmlns:a16="http://schemas.microsoft.com/office/drawing/2014/main" id="{4C153522-2A32-E7A7-CA2E-3619FCE51951}"/>
+              </a:ext>
+            </a:extLst>
+          </p:cNvPr>
+          <p:cNvSpPr>
+            <a:spLocks noGrp="1"/>
+          </p:cNvSpPr>
+          <p:nvPr>
+            <p:ph idx="1"/>
+          </p:nvPr>
+        </p:nvSpPr>
+        <p:spPr>
+          <a:xfrm>
+            <a:off x="287093" y="3437700"/>
+            <a:ext cx="11314972" cy="1153969"/>
+          </a:xfrm>
+        </p:spPr>
+        <p:txBody>
+          <a:bodyPr>
+            <a:normAutofit lnSpcReduction="10000"/>
+          </a:bodyPr>
+          <a:lstStyle/>
+          <a:p>
+            <a:r>
+              <a:rPr lang="en-US"/>
+              <a:t>note : Enums in TypeScript are technically objects where :</a:t>
+            </a:r>
+          </a:p>
+          <a:p>
+            <a:pPr lvl="1"/>
+            <a:r>
+              <a:rPr lang="en-US"/>
+              <a:t>Keys are strings.</a:t>
+            </a:r>
+          </a:p>
+          <a:p>
+            <a:pPr lvl="1"/>
+            <a:r>
+              <a:rPr lang="en-US"/>
+              <a:t>Values are numbers (if it's a numeric Enum) or strings (if it's a string Enum).</a:t>
+            </a:r>
+          </a:p>
+        </p:txBody>
+      </p:sp>
+      <p:pic>
+        <p:nvPicPr>
+          <p:cNvPr id="10" name="Content Placeholder 4">
+            <a:extLst>
+              <a:ext uri="{FF2B5EF4-FFF2-40B4-BE49-F238E27FC236}">
+                <a16:creationId xmlns:a16="http://schemas.microsoft.com/office/drawing/2014/main" id="{468FE5B5-EF94-C9D7-A34B-FF927FCCAD9C}"/>
+              </a:ext>
+            </a:extLst>
+          </p:cNvPr>
+          <p:cNvPicPr>
+            <a:picLocks noChangeAspect="1"/>
+          </p:cNvPicPr>
+          <p:nvPr/>
+        </p:nvPicPr>
+        <p:blipFill>
+          <a:blip r:embed="rId2"/>
+          <a:stretch>
+            <a:fillRect/>
+          </a:stretch>
+        </p:blipFill>
+        <p:spPr>
+          <a:xfrm>
+            <a:off x="287093" y="334297"/>
+            <a:ext cx="3141593" cy="1565000"/>
+          </a:xfrm>
+          <a:prstGeom prst="rect">
+            <a:avLst/>
+          </a:prstGeom>
+          <a:effectLst>
+            <a:outerShdw blurRad="25400" dir="17880000">
+              <a:srgbClr val="000000">
+                <a:alpha val="46000"/>
+              </a:srgbClr>
+            </a:outerShdw>
+          </a:effectLst>
+        </p:spPr>
+      </p:pic>
+      <p:pic>
+        <p:nvPicPr>
+          <p:cNvPr id="11" name="Picture 10">
+            <a:extLst>
+              <a:ext uri="{FF2B5EF4-FFF2-40B4-BE49-F238E27FC236}">
+                <a16:creationId xmlns:a16="http://schemas.microsoft.com/office/drawing/2014/main" id="{353EC381-3C7D-477D-7149-FEB84B36FF97}"/>
+              </a:ext>
+            </a:extLst>
+          </p:cNvPr>
+          <p:cNvPicPr>
+            <a:picLocks noChangeAspect="1"/>
+          </p:cNvPicPr>
+          <p:nvPr/>
+        </p:nvPicPr>
+        <p:blipFill>
+          <a:blip r:embed="rId3"/>
+          <a:stretch>
+            <a:fillRect/>
+          </a:stretch>
+        </p:blipFill>
+        <p:spPr>
+          <a:xfrm>
+            <a:off x="287093" y="2126682"/>
+            <a:ext cx="11019572" cy="1267447"/>
+          </a:xfrm>
+          <a:prstGeom prst="rect">
+            <a:avLst/>
+          </a:prstGeom>
+        </p:spPr>
+      </p:pic>
+      <p:pic>
+        <p:nvPicPr>
+          <p:cNvPr id="15" name="Picture 14">
+            <a:extLst>
+              <a:ext uri="{FF2B5EF4-FFF2-40B4-BE49-F238E27FC236}">
+                <a16:creationId xmlns:a16="http://schemas.microsoft.com/office/drawing/2014/main" id="{4633A0A3-A288-DD0A-5D7F-1B49AE151352}"/>
+              </a:ext>
+            </a:extLst>
+          </p:cNvPr>
+          <p:cNvPicPr>
+            <a:picLocks noChangeAspect="1"/>
+          </p:cNvPicPr>
+          <p:nvPr/>
+        </p:nvPicPr>
+        <p:blipFill>
+          <a:blip r:embed="rId4"/>
+          <a:stretch>
+            <a:fillRect/>
+          </a:stretch>
+        </p:blipFill>
+        <p:spPr>
+          <a:xfrm>
+            <a:off x="287094" y="4700192"/>
+            <a:ext cx="10430068" cy="2002942"/>
+          </a:xfrm>
+          <a:prstGeom prst="rect">
+            <a:avLst/>
+          </a:prstGeom>
+        </p:spPr>
+      </p:pic>
+    </p:spTree>
+    <p:extLst>
+      <p:ext uri="{BB962C8B-B14F-4D97-AF65-F5344CB8AC3E}">
+        <p14:creationId xmlns:p14="http://schemas.microsoft.com/office/powerpoint/2010/main" val="3592595754"/>
       </p:ext>
     </p:extLst>
   </p:cSld>
@@ -9235,7 +10421,7 @@
           <p:cNvPr id="2" name="Title 1">
             <a:extLst>
               <a:ext uri="{FF2B5EF4-FFF2-40B4-BE49-F238E27FC236}">
-                <a16:creationId xmlns:a16="http://schemas.microsoft.com/office/drawing/2014/main" id="{E5CF7D4E-E9DF-520F-77A7-2C83703722F6}"/>
+                <a16:creationId xmlns:a16="http://schemas.microsoft.com/office/drawing/2014/main" id="{A958A399-696D-AA40-A828-B9F6B419C0E8}"/>
               </a:ext>
             </a:extLst>
           </p:cNvPr>
@@ -9249,7 +10435,7 @@
         <p:spPr>
           <a:xfrm>
             <a:off x="913795" y="0"/>
-            <a:ext cx="10353762" cy="633046"/>
+            <a:ext cx="10353762" cy="663191"/>
           </a:xfrm>
         </p:spPr>
         <p:txBody>
@@ -9259,7 +10445,7 @@
           <a:lstStyle/>
           <a:p>
             <a:r>
-              <a:rPr lang="en-US" dirty="0"/>
+              <a:rPr lang="en-US" b="1"/>
               <a:t>Project Structure</a:t>
             </a:r>
           </a:p>
@@ -9270,7 +10456,7 @@
           <p:cNvPr id="3" name="Content Placeholder 2">
             <a:extLst>
               <a:ext uri="{FF2B5EF4-FFF2-40B4-BE49-F238E27FC236}">
-                <a16:creationId xmlns:a16="http://schemas.microsoft.com/office/drawing/2014/main" id="{C20756C4-12AC-68A7-C575-F9674002C55E}"/>
+                <a16:creationId xmlns:a16="http://schemas.microsoft.com/office/drawing/2014/main" id="{24E18DD8-DCD6-A95B-D1B4-49DD639A9700}"/>
               </a:ext>
             </a:extLst>
           </p:cNvPr>
@@ -9283,8 +10469,8 @@
         </p:nvSpPr>
         <p:spPr>
           <a:xfrm>
-            <a:off x="391886" y="633047"/>
-            <a:ext cx="11957538" cy="5958672"/>
+            <a:off x="180870" y="663191"/>
+            <a:ext cx="11847007" cy="6089301"/>
           </a:xfrm>
         </p:spPr>
         <p:txBody>
@@ -9292,160 +10478,40 @@
           <a:lstStyle/>
           <a:p>
             <a:r>
-              <a:rPr lang="en-US" sz="2800" dirty="0" err="1">
-                <a:solidFill>
-                  <a:srgbClr val="FF0000"/>
-                </a:solidFill>
-              </a:rPr>
-              <a:t>src</a:t>
-            </a:r>
-            <a:endParaRPr lang="en-US" dirty="0">
-              <a:solidFill>
-                <a:srgbClr val="FF0000"/>
-              </a:solidFill>
-            </a:endParaRPr>
+              <a:rPr lang="en-US"/>
+              <a:t>App folder</a:t>
+            </a:r>
           </a:p>
           <a:p>
             <a:pPr lvl="1"/>
             <a:r>
-              <a:rPr lang="en-US" sz="2000" b="1" dirty="0">
-                <a:solidFill>
-                  <a:srgbClr val="FF0000"/>
-                </a:solidFill>
-              </a:rPr>
-              <a:t>app folder</a:t>
-            </a:r>
-          </a:p>
-          <a:p>
-            <a:pPr lvl="2"/>
-            <a:r>
-              <a:rPr lang="en-US" sz="1800" b="1" dirty="0">
-                <a:solidFill>
-                  <a:srgbClr val="FF0000"/>
-                </a:solidFill>
-              </a:rPr>
-              <a:t>Components folder</a:t>
-            </a:r>
-          </a:p>
-          <a:p>
-            <a:pPr lvl="2"/>
-            <a:r>
-              <a:rPr lang="en-US" sz="1800" b="1" dirty="0">
-                <a:solidFill>
-                  <a:srgbClr val="FF0000"/>
-                </a:solidFill>
-              </a:rPr>
-              <a:t>DTOs folder</a:t>
-            </a:r>
-          </a:p>
-          <a:p>
-            <a:pPr lvl="2"/>
-            <a:r>
-              <a:rPr lang="en-US" sz="1800" b="1" dirty="0" err="1">
-                <a:solidFill>
-                  <a:srgbClr val="FFFF00"/>
-                </a:solidFill>
-              </a:rPr>
-              <a:t>app.route.ts</a:t>
-            </a:r>
-            <a:endParaRPr lang="en-US" sz="1800" b="1" dirty="0">
-              <a:solidFill>
-                <a:srgbClr val="FFFF00"/>
-              </a:solidFill>
-            </a:endParaRPr>
+              <a:rPr lang="en-US"/>
+              <a:t>Core</a:t>
+            </a:r>
           </a:p>
           <a:p>
             <a:pPr lvl="1"/>
             <a:r>
-              <a:rPr lang="en-US" b="1" dirty="0">
-                <a:solidFill>
-                  <a:srgbClr val="FFFF00"/>
-                </a:solidFill>
-              </a:rPr>
-              <a:t>assets folder</a:t>
+              <a:rPr lang="en-US"/>
+              <a:t>Features</a:t>
             </a:r>
           </a:p>
           <a:p>
             <a:pPr lvl="1"/>
-            <a:r>
-              <a:rPr lang="en-US" b="1" dirty="0">
-                <a:solidFill>
-                  <a:srgbClr val="00B050"/>
-                </a:solidFill>
-              </a:rPr>
-              <a:t>css folder</a:t>
-            </a:r>
-          </a:p>
-          <a:p>
-            <a:pPr lvl="1"/>
-            <a:r>
-              <a:rPr lang="en-US" b="1" dirty="0"/>
-              <a:t>index.html</a:t>
-            </a:r>
-          </a:p>
-          <a:p>
-            <a:pPr lvl="1"/>
-            <a:r>
-              <a:rPr lang="en-US" b="1" dirty="0" err="1">
-                <a:solidFill>
-                  <a:schemeClr val="accent5">
-                    <a:lumMod val="40000"/>
-                    <a:lumOff val="60000"/>
-                  </a:schemeClr>
-                </a:solidFill>
-              </a:rPr>
-              <a:t>main.ts</a:t>
-            </a:r>
-            <a:endParaRPr lang="en-US" b="1" dirty="0">
-              <a:solidFill>
-                <a:schemeClr val="accent5">
-                  <a:lumMod val="40000"/>
-                  <a:lumOff val="60000"/>
-                </a:schemeClr>
-              </a:solidFill>
-            </a:endParaRPr>
-          </a:p>
-          <a:p>
-            <a:pPr lvl="1"/>
-            <a:r>
-              <a:rPr lang="en-US" b="1" dirty="0">
-                <a:solidFill>
-                  <a:srgbClr val="FFC000"/>
-                </a:solidFill>
-              </a:rPr>
-              <a:t>style.css</a:t>
-            </a:r>
-          </a:p>
-          <a:p>
-            <a:endParaRPr lang="en-US" dirty="0"/>
-          </a:p>
-          <a:p>
-            <a:endParaRPr lang="en-US" dirty="0"/>
-          </a:p>
-          <a:p>
-            <a:endParaRPr lang="en-US" dirty="0"/>
-          </a:p>
-          <a:p>
-            <a:endParaRPr lang="en-US" dirty="0"/>
-          </a:p>
-          <a:p>
-            <a:endParaRPr lang="en-US" dirty="0"/>
-          </a:p>
-          <a:p>
-            <a:endParaRPr lang="en-US" dirty="0"/>
-          </a:p>
-          <a:p>
-            <a:endParaRPr lang="en-US" dirty="0"/>
-          </a:p>
-          <a:p>
-            <a:endParaRPr lang="en-US" dirty="0"/>
+            <a:endParaRPr lang="en-US"/>
+          </a:p>
+          <a:p>
+            <a:endParaRPr lang="en-US"/>
+          </a:p>
+          <a:p>
+            <a:endParaRPr lang="en-US"/>
           </a:p>
         </p:txBody>
       </p:sp>
     </p:spTree>
     <p:extLst>
       <p:ext uri="{BB962C8B-B14F-4D97-AF65-F5344CB8AC3E}">
-        <p14:creationId xmlns:p14="http://schemas.microsoft.com/office/powerpoint/2010/main" val="4018109868"/>
+        <p14:creationId xmlns:p14="http://schemas.microsoft.com/office/powerpoint/2010/main" val="1727267539"/>
       </p:ext>
     </p:extLst>
   </p:cSld>
@@ -9477,7 +10543,7 @@
           <p:cNvPr id="2" name="Title 1">
             <a:extLst>
               <a:ext uri="{FF2B5EF4-FFF2-40B4-BE49-F238E27FC236}">
-                <a16:creationId xmlns:a16="http://schemas.microsoft.com/office/drawing/2014/main" id="{BB159EA1-B5EF-4182-712D-DE9FA736D5DC}"/>
+                <a16:creationId xmlns:a16="http://schemas.microsoft.com/office/drawing/2014/main" id="{E5CF7D4E-E9DF-520F-77A7-2C83703722F6}"/>
               </a:ext>
             </a:extLst>
           </p:cNvPr>
@@ -9490,31 +10556,193 @@
         </p:nvSpPr>
         <p:spPr>
           <a:xfrm>
-            <a:off x="763070" y="2337917"/>
-            <a:ext cx="10353762" cy="970450"/>
+            <a:off x="913795" y="0"/>
+            <a:ext cx="10353762" cy="633046"/>
           </a:xfrm>
         </p:spPr>
         <p:txBody>
           <a:bodyPr>
-            <a:normAutofit/>
+            <a:normAutofit fontScale="90000"/>
           </a:bodyPr>
           <a:lstStyle/>
           <a:p>
             <a:r>
-              <a:rPr lang="en-US" sz="4800" b="1" dirty="0">
+              <a:rPr lang="en-US"/>
+              <a:t>Project Structure</a:t>
+            </a:r>
+          </a:p>
+        </p:txBody>
+      </p:sp>
+      <p:sp>
+        <p:nvSpPr>
+          <p:cNvPr id="3" name="Content Placeholder 2">
+            <a:extLst>
+              <a:ext uri="{FF2B5EF4-FFF2-40B4-BE49-F238E27FC236}">
+                <a16:creationId xmlns:a16="http://schemas.microsoft.com/office/drawing/2014/main" id="{C20756C4-12AC-68A7-C575-F9674002C55E}"/>
+              </a:ext>
+            </a:extLst>
+          </p:cNvPr>
+          <p:cNvSpPr>
+            <a:spLocks noGrp="1"/>
+          </p:cNvSpPr>
+          <p:nvPr>
+            <p:ph idx="1"/>
+          </p:nvPr>
+        </p:nvSpPr>
+        <p:spPr>
+          <a:xfrm>
+            <a:off x="281354" y="633047"/>
+            <a:ext cx="11826910" cy="5958672"/>
+          </a:xfrm>
+        </p:spPr>
+        <p:txBody>
+          <a:bodyPr/>
+          <a:lstStyle/>
+          <a:p>
+            <a:r>
+              <a:rPr lang="en-US" sz="2800" err="1">
                 <a:solidFill>
                   <a:srgbClr val="FF0000"/>
                 </a:solidFill>
               </a:rPr>
-              <a:t>Routing</a:t>
-            </a:r>
+              <a:t>src</a:t>
+            </a:r>
+            <a:endParaRPr lang="en-US">
+              <a:solidFill>
+                <a:srgbClr val="FF0000"/>
+              </a:solidFill>
+            </a:endParaRPr>
+          </a:p>
+          <a:p>
+            <a:pPr lvl="1"/>
+            <a:r>
+              <a:rPr lang="en-US" sz="2000" b="1">
+                <a:solidFill>
+                  <a:srgbClr val="FF0000"/>
+                </a:solidFill>
+              </a:rPr>
+              <a:t>app folder</a:t>
+            </a:r>
+          </a:p>
+          <a:p>
+            <a:pPr lvl="2"/>
+            <a:r>
+              <a:rPr lang="en-US" sz="1800" b="1">
+                <a:solidFill>
+                  <a:srgbClr val="FF0000"/>
+                </a:solidFill>
+              </a:rPr>
+              <a:t>Components folder</a:t>
+            </a:r>
+          </a:p>
+          <a:p>
+            <a:pPr lvl="2"/>
+            <a:r>
+              <a:rPr lang="en-US" sz="1800" b="1">
+                <a:solidFill>
+                  <a:srgbClr val="FF0000"/>
+                </a:solidFill>
+              </a:rPr>
+              <a:t>DTOs folder</a:t>
+            </a:r>
+          </a:p>
+          <a:p>
+            <a:pPr lvl="2"/>
+            <a:r>
+              <a:rPr lang="en-US" sz="1800" b="1" err="1">
+                <a:solidFill>
+                  <a:srgbClr val="FFFF00"/>
+                </a:solidFill>
+              </a:rPr>
+              <a:t>app.route.ts</a:t>
+            </a:r>
+            <a:endParaRPr lang="en-US" sz="1800" b="1">
+              <a:solidFill>
+                <a:srgbClr val="FFFF00"/>
+              </a:solidFill>
+            </a:endParaRPr>
+          </a:p>
+          <a:p>
+            <a:pPr lvl="1"/>
+            <a:r>
+              <a:rPr lang="en-US" b="1">
+                <a:solidFill>
+                  <a:srgbClr val="FFFF00"/>
+                </a:solidFill>
+              </a:rPr>
+              <a:t>assets folder</a:t>
+            </a:r>
+          </a:p>
+          <a:p>
+            <a:pPr lvl="1"/>
+            <a:r>
+              <a:rPr lang="en-US" b="1">
+                <a:solidFill>
+                  <a:srgbClr val="00B050"/>
+                </a:solidFill>
+              </a:rPr>
+              <a:t>css folder</a:t>
+            </a:r>
+          </a:p>
+          <a:p>
+            <a:pPr lvl="1"/>
+            <a:r>
+              <a:rPr lang="en-US" b="1"/>
+              <a:t>index.html</a:t>
+            </a:r>
+          </a:p>
+          <a:p>
+            <a:pPr lvl="1"/>
+            <a:r>
+              <a:rPr lang="en-US" b="1" err="1">
+                <a:solidFill>
+                  <a:schemeClr val="accent5">
+                    <a:lumMod val="40000"/>
+                    <a:lumOff val="60000"/>
+                  </a:schemeClr>
+                </a:solidFill>
+              </a:rPr>
+              <a:t>main.ts</a:t>
+            </a:r>
+            <a:endParaRPr lang="en-US" b="1">
+              <a:solidFill>
+                <a:schemeClr val="accent5">
+                  <a:lumMod val="40000"/>
+                  <a:lumOff val="60000"/>
+                </a:schemeClr>
+              </a:solidFill>
+            </a:endParaRPr>
+          </a:p>
+          <a:p>
+            <a:pPr lvl="1"/>
+            <a:r>
+              <a:rPr lang="en-US" b="1">
+                <a:solidFill>
+                  <a:srgbClr val="FFC000"/>
+                </a:solidFill>
+              </a:rPr>
+              <a:t>style.css</a:t>
+            </a:r>
+          </a:p>
+          <a:p>
+            <a:endParaRPr lang="en-US"/>
+          </a:p>
+          <a:p>
+            <a:endParaRPr lang="en-US"/>
+          </a:p>
+          <a:p>
+            <a:pPr lvl="1"/>
+            <a:endParaRPr lang="en-US"/>
+          </a:p>
+          <a:p>
+            <a:endParaRPr lang="en-US"/>
           </a:p>
         </p:txBody>
       </p:sp>
     </p:spTree>
     <p:extLst>
       <p:ext uri="{BB962C8B-B14F-4D97-AF65-F5344CB8AC3E}">
-        <p14:creationId xmlns:p14="http://schemas.microsoft.com/office/powerpoint/2010/main" val="2452297741"/>
+        <p14:creationId xmlns:p14="http://schemas.microsoft.com/office/powerpoint/2010/main" val="4018109868"/>
       </p:ext>
     </p:extLst>
   </p:cSld>
@@ -9546,7 +10774,7 @@
           <p:cNvPr id="2" name="Title 1">
             <a:extLst>
               <a:ext uri="{FF2B5EF4-FFF2-40B4-BE49-F238E27FC236}">
-                <a16:creationId xmlns:a16="http://schemas.microsoft.com/office/drawing/2014/main" id="{B0E13025-464A-F3C0-EA1F-E214128D54FD}"/>
+                <a16:creationId xmlns:a16="http://schemas.microsoft.com/office/drawing/2014/main" id="{DF58555F-1F4C-F99E-0C84-E0E0F7B2F116}"/>
               </a:ext>
             </a:extLst>
           </p:cNvPr>
@@ -9559,88 +10787,60 @@
         </p:nvSpPr>
         <p:spPr>
           <a:xfrm>
-            <a:off x="913795" y="0"/>
-            <a:ext cx="10353762" cy="512900"/>
-          </a:xfrm>
-        </p:spPr>
-        <p:txBody>
-          <a:bodyPr>
-            <a:normAutofit fontScale="90000"/>
-          </a:bodyPr>
-          <a:lstStyle/>
-          <a:p>
-            <a:r>
-              <a:rPr lang="en-US" b="1" dirty="0">
-                <a:solidFill>
-                  <a:srgbClr val="FF0000"/>
-                </a:solidFill>
-              </a:rPr>
-              <a:t>Routes [</a:t>
-            </a:r>
-            <a:r>
-              <a:rPr lang="en-US" b="1" dirty="0" err="1">
-                <a:solidFill>
-                  <a:srgbClr val="FF0000"/>
-                </a:solidFill>
-              </a:rPr>
-              <a:t>app.route.ts</a:t>
-            </a:r>
-            <a:r>
-              <a:rPr lang="en-US" b="1" dirty="0">
-                <a:solidFill>
-                  <a:srgbClr val="FF0000"/>
-                </a:solidFill>
-              </a:rPr>
-              <a:t>] , Lazy loading</a:t>
-            </a:r>
-          </a:p>
-        </p:txBody>
-      </p:sp>
-      <p:pic>
-        <p:nvPicPr>
-          <p:cNvPr id="5" name="Content Placeholder 4">
+            <a:off x="706734" y="107183"/>
+            <a:ext cx="10778532" cy="746927"/>
+          </a:xfrm>
+        </p:spPr>
+        <p:txBody>
+          <a:bodyPr/>
+          <a:lstStyle/>
+          <a:p>
+            <a:endParaRPr lang="en-US"/>
+          </a:p>
+        </p:txBody>
+      </p:sp>
+      <p:sp>
+        <p:nvSpPr>
+          <p:cNvPr id="3" name="Content Placeholder 2">
             <a:extLst>
               <a:ext uri="{FF2B5EF4-FFF2-40B4-BE49-F238E27FC236}">
-                <a16:creationId xmlns:a16="http://schemas.microsoft.com/office/drawing/2014/main" id="{623E028D-620A-F0B4-90F4-4DBD6B8BB806}"/>
+                <a16:creationId xmlns:a16="http://schemas.microsoft.com/office/drawing/2014/main" id="{F7FD0838-12BA-A35E-B1C3-40FEC10CE7EA}"/>
               </a:ext>
             </a:extLst>
           </p:cNvPr>
-          <p:cNvPicPr>
-            <a:picLocks noGrp="1" noChangeAspect="1"/>
-          </p:cNvPicPr>
+          <p:cNvSpPr>
+            <a:spLocks noGrp="1"/>
+          </p:cNvSpPr>
           <p:nvPr>
             <p:ph idx="1"/>
           </p:nvPr>
-        </p:nvPicPr>
-        <p:blipFill>
-          <a:blip r:embed="rId2"/>
-          <a:stretch>
-            <a:fillRect/>
-          </a:stretch>
-        </p:blipFill>
-        <p:spPr>
-          <a:xfrm>
-            <a:off x="95474" y="779822"/>
-            <a:ext cx="6603007" cy="1209752"/>
-          </a:xfrm>
-          <a:prstGeom prst="rect">
-            <a:avLst/>
-          </a:prstGeom>
-          <a:effectLst>
-            <a:outerShdw blurRad="25400" dir="17880000">
-              <a:srgbClr val="000000">
-                <a:alpha val="46000"/>
-              </a:srgbClr>
-            </a:outerShdw>
-          </a:effectLst>
-        </p:spPr>
-      </p:pic>
+        </p:nvSpPr>
+        <p:spPr>
+          <a:xfrm>
+            <a:off x="502418" y="1077633"/>
+            <a:ext cx="10982848" cy="5554279"/>
+          </a:xfrm>
+        </p:spPr>
+        <p:txBody>
+          <a:bodyPr/>
+          <a:lstStyle/>
+          <a:p>
+            <a:r>
+              <a:rPr lang="en-US"/>
+              <a:t>A</a:t>
+            </a:r>
+          </a:p>
+          <a:p>
+            <a:endParaRPr lang="en-US"/>
+          </a:p>
+        </p:txBody>
+      </p:sp>
       <p:pic>
         <p:nvPicPr>
-          <p:cNvPr id="7" name="Picture 6">
+          <p:cNvPr id="5" name="Picture 4">
             <a:extLst>
               <a:ext uri="{FF2B5EF4-FFF2-40B4-BE49-F238E27FC236}">
-                <a16:creationId xmlns:a16="http://schemas.microsoft.com/office/drawing/2014/main" id="{0D0A3FA7-0F9C-4110-F411-E227B971C5BE}"/>
+                <a16:creationId xmlns:a16="http://schemas.microsoft.com/office/drawing/2014/main" id="{A5D9BF44-3A44-C230-3B43-FC2CFB9604F5}"/>
               </a:ext>
             </a:extLst>
           </p:cNvPr>
@@ -9650,45 +10850,15 @@
           <p:nvPr/>
         </p:nvPicPr>
         <p:blipFill>
-          <a:blip r:embed="rId3"/>
+          <a:blip r:embed="rId2"/>
           <a:stretch>
             <a:fillRect/>
           </a:stretch>
         </p:blipFill>
         <p:spPr>
           <a:xfrm>
-            <a:off x="6774426" y="593264"/>
-            <a:ext cx="5322100" cy="2337764"/>
-          </a:xfrm>
-          <a:prstGeom prst="rect">
-            <a:avLst/>
-          </a:prstGeom>
-        </p:spPr>
-      </p:pic>
-      <p:pic>
-        <p:nvPicPr>
-          <p:cNvPr id="9" name="Picture 8">
-            <a:extLst>
-              <a:ext uri="{FF2B5EF4-FFF2-40B4-BE49-F238E27FC236}">
-                <a16:creationId xmlns:a16="http://schemas.microsoft.com/office/drawing/2014/main" id="{4A7A6604-B775-CCD0-6B68-94AB167F5BD1}"/>
-              </a:ext>
-            </a:extLst>
-          </p:cNvPr>
-          <p:cNvPicPr>
-            <a:picLocks noChangeAspect="1"/>
-          </p:cNvPicPr>
-          <p:nvPr/>
-        </p:nvPicPr>
-        <p:blipFill>
-          <a:blip r:embed="rId4"/>
-          <a:stretch>
-            <a:fillRect/>
-          </a:stretch>
-        </p:blipFill>
-        <p:spPr>
-          <a:xfrm>
-            <a:off x="95475" y="3002811"/>
-            <a:ext cx="9940471" cy="3855189"/>
+            <a:off x="502418" y="1905261"/>
+            <a:ext cx="6810984" cy="4264426"/>
           </a:xfrm>
           <a:prstGeom prst="rect">
             <a:avLst/>
@@ -9698,7 +10868,7 @@
     </p:spTree>
     <p:extLst>
       <p:ext uri="{BB962C8B-B14F-4D97-AF65-F5344CB8AC3E}">
-        <p14:creationId xmlns:p14="http://schemas.microsoft.com/office/powerpoint/2010/main" val="338788286"/>
+        <p14:creationId xmlns:p14="http://schemas.microsoft.com/office/powerpoint/2010/main" val="1529701483"/>
       </p:ext>
     </p:extLst>
   </p:cSld>
@@ -9730,7 +10900,7 @@
           <p:cNvPr id="2" name="Title 1">
             <a:extLst>
               <a:ext uri="{FF2B5EF4-FFF2-40B4-BE49-F238E27FC236}">
-                <a16:creationId xmlns:a16="http://schemas.microsoft.com/office/drawing/2014/main" id="{AF961FF9-5732-8B38-AE0F-02650F615C45}"/>
+                <a16:creationId xmlns:a16="http://schemas.microsoft.com/office/drawing/2014/main" id="{C01DDBFC-0859-C305-91EF-073D0AD74EDC}"/>
               </a:ext>
             </a:extLst>
           </p:cNvPr>
@@ -9743,8 +10913,8 @@
         </p:nvSpPr>
         <p:spPr>
           <a:xfrm>
-            <a:off x="913795" y="83048"/>
-            <a:ext cx="10353762" cy="630386"/>
+            <a:off x="913795" y="0"/>
+            <a:ext cx="10353762" cy="432079"/>
           </a:xfrm>
         </p:spPr>
         <p:txBody>
@@ -9754,115 +10924,196 @@
           <a:lstStyle/>
           <a:p>
             <a:r>
-              <a:rPr lang="en-US" b="1" dirty="0"/>
-              <a:t>Navigate Via HTML</a:t>
-            </a:r>
-          </a:p>
-        </p:txBody>
-      </p:sp>
-      <p:pic>
-        <p:nvPicPr>
-          <p:cNvPr id="5" name="Content Placeholder 4">
+              <a:rPr lang="en-US" b="1"/>
+              <a:t>Architecture</a:t>
+            </a:r>
+          </a:p>
+        </p:txBody>
+      </p:sp>
+      <p:sp>
+        <p:nvSpPr>
+          <p:cNvPr id="3" name="Content Placeholder 2">
             <a:extLst>
               <a:ext uri="{FF2B5EF4-FFF2-40B4-BE49-F238E27FC236}">
-                <a16:creationId xmlns:a16="http://schemas.microsoft.com/office/drawing/2014/main" id="{57539ED8-C96E-6231-2F1A-ED9CACC5B9EE}"/>
+                <a16:creationId xmlns:a16="http://schemas.microsoft.com/office/drawing/2014/main" id="{70019249-8C27-E0D3-3645-3AD29CACBC26}"/>
               </a:ext>
             </a:extLst>
           </p:cNvPr>
-          <p:cNvPicPr>
-            <a:picLocks noGrp="1" noChangeAspect="1"/>
-          </p:cNvPicPr>
+          <p:cNvSpPr>
+            <a:spLocks noGrp="1"/>
+          </p:cNvSpPr>
           <p:nvPr>
             <p:ph idx="1"/>
           </p:nvPr>
-        </p:nvPicPr>
-        <p:blipFill>
-          <a:blip r:embed="rId2"/>
-          <a:stretch>
-            <a:fillRect/>
-          </a:stretch>
-        </p:blipFill>
-        <p:spPr>
-          <a:xfrm>
-            <a:off x="290796" y="1437008"/>
-            <a:ext cx="9552979" cy="630386"/>
-          </a:xfrm>
-          <a:prstGeom prst="rect">
-            <a:avLst/>
-          </a:prstGeom>
-          <a:effectLst>
-            <a:outerShdw blurRad="25400" dir="17880000">
-              <a:srgbClr val="000000">
-                <a:alpha val="46000"/>
-              </a:srgbClr>
-            </a:outerShdw>
-          </a:effectLst>
-        </p:spPr>
-      </p:pic>
-      <p:pic>
-        <p:nvPicPr>
-          <p:cNvPr id="9" name="Picture 8">
-            <a:extLst>
-              <a:ext uri="{FF2B5EF4-FFF2-40B4-BE49-F238E27FC236}">
-                <a16:creationId xmlns:a16="http://schemas.microsoft.com/office/drawing/2014/main" id="{9F1A0193-51DD-5F37-A766-20A701398356}"/>
-              </a:ext>
-            </a:extLst>
-          </p:cNvPr>
-          <p:cNvPicPr>
-            <a:picLocks noChangeAspect="1"/>
-          </p:cNvPicPr>
-          <p:nvPr/>
-        </p:nvPicPr>
-        <p:blipFill>
-          <a:blip r:embed="rId3"/>
-          <a:stretch>
-            <a:fillRect/>
-          </a:stretch>
-        </p:blipFill>
-        <p:spPr>
-          <a:xfrm>
-            <a:off x="290797" y="2213176"/>
-            <a:ext cx="9552982" cy="630386"/>
-          </a:xfrm>
-          <a:prstGeom prst="rect">
-            <a:avLst/>
-          </a:prstGeom>
-        </p:spPr>
-      </p:pic>
-      <p:pic>
-        <p:nvPicPr>
-          <p:cNvPr id="11" name="Picture 10">
-            <a:extLst>
-              <a:ext uri="{FF2B5EF4-FFF2-40B4-BE49-F238E27FC236}">
-                <a16:creationId xmlns:a16="http://schemas.microsoft.com/office/drawing/2014/main" id="{CFF85CF3-A54B-3CAA-A07C-2B77E01A640B}"/>
-              </a:ext>
-            </a:extLst>
-          </p:cNvPr>
-          <p:cNvPicPr>
-            <a:picLocks noChangeAspect="1"/>
-          </p:cNvPicPr>
-          <p:nvPr/>
-        </p:nvPicPr>
-        <p:blipFill>
-          <a:blip r:embed="rId4"/>
-          <a:stretch>
-            <a:fillRect/>
-          </a:stretch>
-        </p:blipFill>
-        <p:spPr>
-          <a:xfrm>
-            <a:off x="290796" y="713435"/>
-            <a:ext cx="4090285" cy="648324"/>
-          </a:xfrm>
-          <a:prstGeom prst="rect">
-            <a:avLst/>
-          </a:prstGeom>
-        </p:spPr>
-      </p:pic>
+        </p:nvSpPr>
+        <p:spPr>
+          <a:xfrm>
+            <a:off x="0" y="432080"/>
+            <a:ext cx="11857055" cy="6425920"/>
+          </a:xfrm>
+        </p:spPr>
+        <p:txBody>
+          <a:bodyPr>
+            <a:noAutofit/>
+          </a:bodyPr>
+          <a:lstStyle/>
+          <a:p>
+            <a:r>
+              <a:rPr lang="en-US" sz="1500" b="1"/>
+              <a:t>Inside app</a:t>
+            </a:r>
+          </a:p>
+          <a:p>
+            <a:pPr lvl="1"/>
+            <a:r>
+              <a:rPr lang="en-US" sz="1600" b="1">
+                <a:solidFill>
+                  <a:srgbClr val="FF0000"/>
+                </a:solidFill>
+              </a:rPr>
+              <a:t>core</a:t>
+            </a:r>
+            <a:r>
+              <a:rPr lang="en-US" sz="1500" b="1"/>
+              <a:t> : contains the things that is are not connected with UI</a:t>
+            </a:r>
+          </a:p>
+          <a:p>
+            <a:pPr lvl="2"/>
+            <a:r>
+              <a:rPr lang="en-US" sz="1500" b="1"/>
+              <a:t>Interceptors</a:t>
+            </a:r>
+          </a:p>
+          <a:p>
+            <a:pPr lvl="2"/>
+            <a:r>
+              <a:rPr lang="en-US" sz="1500" b="1"/>
+              <a:t>gaurds</a:t>
+            </a:r>
+          </a:p>
+          <a:p>
+            <a:pPr lvl="2"/>
+            <a:r>
+              <a:rPr lang="en-US" sz="1500" b="1"/>
+              <a:t>services</a:t>
+            </a:r>
+          </a:p>
+          <a:p>
+            <a:pPr lvl="2"/>
+            <a:r>
+              <a:rPr lang="en-US" sz="1500" b="1"/>
+              <a:t>constants</a:t>
+            </a:r>
+          </a:p>
+          <a:p>
+            <a:pPr lvl="3"/>
+            <a:r>
+              <a:rPr lang="en-US" sz="1500" b="1"/>
+              <a:t>Global.Constant.ts</a:t>
+            </a:r>
+          </a:p>
+          <a:p>
+            <a:pPr lvl="2"/>
+            <a:r>
+              <a:rPr lang="en-US" sz="1500" b="1"/>
+              <a:t>models</a:t>
+            </a:r>
+          </a:p>
+          <a:p>
+            <a:pPr lvl="3"/>
+            <a:r>
+              <a:rPr lang="en-US" sz="1500" b="1"/>
+              <a:t>classes</a:t>
+            </a:r>
+          </a:p>
+          <a:p>
+            <a:pPr lvl="3"/>
+            <a:r>
+              <a:rPr lang="en-US" sz="1500" b="1"/>
+              <a:t>Interfaces : ColorOptionDTOs</a:t>
+            </a:r>
+          </a:p>
+          <a:p>
+            <a:pPr lvl="2"/>
+            <a:r>
+              <a:rPr lang="en-US" sz="1500" b="1"/>
+              <a:t>enums</a:t>
+            </a:r>
+          </a:p>
+          <a:p>
+            <a:pPr lvl="2"/>
+            <a:r>
+              <a:rPr lang="en-US" sz="1500" b="1"/>
+              <a:t>Helpers</a:t>
+            </a:r>
+          </a:p>
+          <a:p>
+            <a:pPr lvl="3"/>
+            <a:r>
+              <a:rPr lang="en-US" sz="1500" b="1"/>
+              <a:t>common.helper.ts</a:t>
+            </a:r>
+          </a:p>
+          <a:p>
+            <a:pPr lvl="2"/>
+            <a:r>
+              <a:rPr lang="en-US" sz="1500" b="1"/>
+              <a:t>resolvers</a:t>
+            </a:r>
+          </a:p>
+          <a:p>
+            <a:pPr lvl="1"/>
+            <a:r>
+              <a:rPr lang="en-US" sz="1600" b="1">
+                <a:solidFill>
+                  <a:srgbClr val="FF0000"/>
+                </a:solidFill>
+              </a:rPr>
+              <a:t>Pages</a:t>
+            </a:r>
+            <a:endParaRPr lang="en-US" sz="1500" b="1">
+              <a:solidFill>
+                <a:srgbClr val="FF0000"/>
+              </a:solidFill>
+            </a:endParaRPr>
+          </a:p>
+          <a:p>
+            <a:pPr lvl="2"/>
+            <a:r>
+              <a:rPr lang="en-US" sz="1500" b="1"/>
+              <a:t>contains the components which is not reusable and could be accessed via route</a:t>
+            </a:r>
+          </a:p>
+          <a:p>
+            <a:pPr lvl="1"/>
+            <a:r>
+              <a:rPr lang="en-US" sz="1600" b="1">
+                <a:solidFill>
+                  <a:srgbClr val="FF0000"/>
+                </a:solidFill>
+              </a:rPr>
+              <a:t>shared</a:t>
+            </a:r>
+            <a:endParaRPr lang="en-US" sz="1500" b="1">
+              <a:solidFill>
+                <a:srgbClr val="FF0000"/>
+              </a:solidFill>
+            </a:endParaRPr>
+          </a:p>
+          <a:p>
+            <a:pPr lvl="2"/>
+            <a:r>
+              <a:rPr lang="en-US" sz="1500" b="1"/>
+              <a:t>contains things that are connected with UI like directives, pipes, reusable components</a:t>
+            </a:r>
+          </a:p>
+        </p:txBody>
+      </p:sp>
     </p:spTree>
     <p:extLst>
       <p:ext uri="{BB962C8B-B14F-4D97-AF65-F5344CB8AC3E}">
-        <p14:creationId xmlns:p14="http://schemas.microsoft.com/office/powerpoint/2010/main" val="3146740146"/>
+        <p14:creationId xmlns:p14="http://schemas.microsoft.com/office/powerpoint/2010/main" val="1099757840"/>
       </p:ext>
     </p:extLst>
   </p:cSld>
@@ -9894,7 +11145,7 @@
           <p:cNvPr id="2" name="Title 1">
             <a:extLst>
               <a:ext uri="{FF2B5EF4-FFF2-40B4-BE49-F238E27FC236}">
-                <a16:creationId xmlns:a16="http://schemas.microsoft.com/office/drawing/2014/main" id="{4A6DDFF4-8539-CDAC-581A-0E7EA59EE27A}"/>
+                <a16:creationId xmlns:a16="http://schemas.microsoft.com/office/drawing/2014/main" id="{D36BD5F5-1EB6-2753-8B20-F6CE7ED52ADA}"/>
               </a:ext>
             </a:extLst>
           </p:cNvPr>
@@ -9907,66 +11158,117 @@
         </p:nvSpPr>
         <p:spPr>
           <a:xfrm>
-            <a:off x="913795" y="96350"/>
-            <a:ext cx="10353762" cy="970450"/>
-          </a:xfrm>
-        </p:spPr>
-        <p:txBody>
-          <a:bodyPr/>
-          <a:lstStyle/>
-          <a:p>
-            <a:r>
-              <a:rPr lang="en-US" dirty="0"/>
-              <a:t>Navigate Via TS</a:t>
-            </a:r>
-          </a:p>
-        </p:txBody>
-      </p:sp>
-      <p:pic>
-        <p:nvPicPr>
-          <p:cNvPr id="5" name="Content Placeholder 4">
+            <a:off x="984133" y="0"/>
+            <a:ext cx="10353762" cy="622998"/>
+          </a:xfrm>
+        </p:spPr>
+        <p:txBody>
+          <a:bodyPr>
+            <a:normAutofit fontScale="90000"/>
+          </a:bodyPr>
+          <a:lstStyle/>
+          <a:p>
+            <a:r>
+              <a:rPr lang="en-US" b="1"/>
+              <a:t>Environment Creation</a:t>
+            </a:r>
+          </a:p>
+        </p:txBody>
+      </p:sp>
+      <p:sp>
+        <p:nvSpPr>
+          <p:cNvPr id="3" name="Content Placeholder 2">
             <a:extLst>
               <a:ext uri="{FF2B5EF4-FFF2-40B4-BE49-F238E27FC236}">
-                <a16:creationId xmlns:a16="http://schemas.microsoft.com/office/drawing/2014/main" id="{079201EF-0C16-9208-FEFB-608B13E75C8C}"/>
+                <a16:creationId xmlns:a16="http://schemas.microsoft.com/office/drawing/2014/main" id="{59BBF66A-A19F-2476-A12C-29D7291316E9}"/>
               </a:ext>
             </a:extLst>
           </p:cNvPr>
-          <p:cNvPicPr>
-            <a:picLocks noGrp="1" noChangeAspect="1"/>
-          </p:cNvPicPr>
+          <p:cNvSpPr>
+            <a:spLocks noGrp="1"/>
+          </p:cNvSpPr>
           <p:nvPr>
             <p:ph idx="1"/>
           </p:nvPr>
-        </p:nvPicPr>
-        <p:blipFill>
-          <a:blip r:embed="rId2"/>
-          <a:stretch>
-            <a:fillRect/>
-          </a:stretch>
-        </p:blipFill>
-        <p:spPr>
-          <a:xfrm>
-            <a:off x="913795" y="1066800"/>
-            <a:ext cx="6024406" cy="640224"/>
-          </a:xfrm>
-          <a:prstGeom prst="rect">
-            <a:avLst/>
-          </a:prstGeom>
-          <a:effectLst>
-            <a:outerShdw blurRad="25400" dir="17880000">
-              <a:srgbClr val="000000">
-                <a:alpha val="46000"/>
-              </a:srgbClr>
-            </a:outerShdw>
-          </a:effectLst>
-        </p:spPr>
-      </p:pic>
+        </p:nvSpPr>
+        <p:spPr>
+          <a:xfrm>
+            <a:off x="341644" y="622999"/>
+            <a:ext cx="10925913" cy="6039058"/>
+          </a:xfrm>
+        </p:spPr>
+        <p:txBody>
+          <a:bodyPr/>
+          <a:lstStyle/>
+          <a:p>
+            <a:r>
+              <a:rPr lang="en-US"/>
+              <a:t>Inside </a:t>
+            </a:r>
+            <a:r>
+              <a:rPr lang="en-US" err="1"/>
+              <a:t>src</a:t>
+            </a:r>
+            <a:r>
+              <a:rPr lang="en-US"/>
+              <a:t> folder</a:t>
+            </a:r>
+          </a:p>
+          <a:p>
+            <a:r>
+              <a:rPr lang="en-US"/>
+              <a:t>ng g environments</a:t>
+            </a:r>
+          </a:p>
+          <a:p>
+            <a:pPr lvl="1"/>
+            <a:r>
+              <a:rPr lang="en-US" sz="2000"/>
+              <a:t>It creates two folder: </a:t>
+            </a:r>
+          </a:p>
+          <a:p>
+            <a:pPr lvl="2"/>
+            <a:r>
+              <a:rPr lang="en-US" sz="2000"/>
+              <a:t>environment.ts 				// when you build this file will be considered</a:t>
+            </a:r>
+          </a:p>
+          <a:p>
+            <a:pPr lvl="2"/>
+            <a:r>
+              <a:rPr lang="en-US" sz="2000"/>
+              <a:t>environment.development.ts // when you run this file will be considered</a:t>
+            </a:r>
+            <a:endParaRPr lang="en-US"/>
+          </a:p>
+          <a:p>
+            <a:pPr lvl="1"/>
+            <a:r>
+              <a:rPr lang="en-US"/>
+              <a:t>Update Angular.json</a:t>
+            </a:r>
+          </a:p>
+          <a:p>
+            <a:pPr lvl="1"/>
+            <a:endParaRPr lang="en-US"/>
+          </a:p>
+          <a:p>
+            <a:pPr lvl="1"/>
+            <a:endParaRPr lang="en-US"/>
+          </a:p>
+          <a:p>
+            <a:pPr lvl="1"/>
+            <a:endParaRPr lang="en-US"/>
+          </a:p>
+        </p:txBody>
+      </p:sp>
       <p:pic>
         <p:nvPicPr>
-          <p:cNvPr id="7" name="Picture 6">
+          <p:cNvPr id="5" name="Picture 4">
             <a:extLst>
               <a:ext uri="{FF2B5EF4-FFF2-40B4-BE49-F238E27FC236}">
-                <a16:creationId xmlns:a16="http://schemas.microsoft.com/office/drawing/2014/main" id="{1CE1A31C-79F1-19F1-8861-F95ED2039B5D}"/>
+                <a16:creationId xmlns:a16="http://schemas.microsoft.com/office/drawing/2014/main" id="{D03EF84D-472C-0006-10E2-A858018E63EF}"/>
               </a:ext>
             </a:extLst>
           </p:cNvPr>
@@ -9976,15 +11278,15 @@
           <p:nvPr/>
         </p:nvPicPr>
         <p:blipFill>
-          <a:blip r:embed="rId3"/>
+          <a:blip r:embed="rId2"/>
           <a:stretch>
             <a:fillRect/>
           </a:stretch>
         </p:blipFill>
         <p:spPr>
           <a:xfrm>
-            <a:off x="913795" y="1865672"/>
-            <a:ext cx="6024406" cy="640224"/>
+            <a:off x="579717" y="3439735"/>
+            <a:ext cx="5830714" cy="1262894"/>
           </a:xfrm>
           <a:prstGeom prst="rect">
             <a:avLst/>
@@ -9994,7 +11296,7 @@
     </p:spTree>
     <p:extLst>
       <p:ext uri="{BB962C8B-B14F-4D97-AF65-F5344CB8AC3E}">
-        <p14:creationId xmlns:p14="http://schemas.microsoft.com/office/powerpoint/2010/main" val="4170399191"/>
+        <p14:creationId xmlns:p14="http://schemas.microsoft.com/office/powerpoint/2010/main" val="3401954168"/>
       </p:ext>
     </p:extLst>
   </p:cSld>
@@ -10026,7 +11328,7 @@
           <p:cNvPr id="2" name="Title 1">
             <a:extLst>
               <a:ext uri="{FF2B5EF4-FFF2-40B4-BE49-F238E27FC236}">
-                <a16:creationId xmlns:a16="http://schemas.microsoft.com/office/drawing/2014/main" id="{6F074E3F-1632-D5DC-2837-58BED44C5F34}"/>
+                <a16:creationId xmlns:a16="http://schemas.microsoft.com/office/drawing/2014/main" id="{47643282-4201-A672-3DDD-2529F44FD350}"/>
               </a:ext>
             </a:extLst>
           </p:cNvPr>
@@ -10039,8 +11341,8 @@
         </p:nvSpPr>
         <p:spPr>
           <a:xfrm>
-            <a:off x="913795" y="0"/>
-            <a:ext cx="10353762" cy="472273"/>
+            <a:off x="712828" y="16747"/>
+            <a:ext cx="10353762" cy="666541"/>
           </a:xfrm>
         </p:spPr>
         <p:txBody>
@@ -10050,157 +11352,142 @@
           <a:lstStyle/>
           <a:p>
             <a:r>
-              <a:rPr lang="en-US" b="1" dirty="0" err="1">
-                <a:solidFill>
-                  <a:srgbClr val="FF0000"/>
-                </a:solidFill>
-              </a:rPr>
-              <a:t>RouterLinkActive</a:t>
-            </a:r>
-            <a:r>
-              <a:rPr lang="en-US" b="1" dirty="0">
-                <a:solidFill>
-                  <a:srgbClr val="FF0000"/>
-                </a:solidFill>
-              </a:rPr>
-              <a:t>, </a:t>
-            </a:r>
-          </a:p>
-        </p:txBody>
-      </p:sp>
-      <p:pic>
-        <p:nvPicPr>
-          <p:cNvPr id="5" name="Content Placeholder 4">
+              <a:rPr lang="en-US" b="1"/>
+              <a:t>Core Folder</a:t>
+            </a:r>
+          </a:p>
+        </p:txBody>
+      </p:sp>
+      <p:sp>
+        <p:nvSpPr>
+          <p:cNvPr id="3" name="Content Placeholder 2">
             <a:extLst>
               <a:ext uri="{FF2B5EF4-FFF2-40B4-BE49-F238E27FC236}">
-                <a16:creationId xmlns:a16="http://schemas.microsoft.com/office/drawing/2014/main" id="{7541D93D-A3A5-9C73-82B4-5E3B80BFD918}"/>
+                <a16:creationId xmlns:a16="http://schemas.microsoft.com/office/drawing/2014/main" id="{CC1D83F7-332B-ACD9-139D-B3C2E1D4E07E}"/>
               </a:ext>
             </a:extLst>
           </p:cNvPr>
-          <p:cNvPicPr>
-            <a:picLocks noGrp="1" noChangeAspect="1"/>
-          </p:cNvPicPr>
+          <p:cNvSpPr>
+            <a:spLocks noGrp="1"/>
+          </p:cNvSpPr>
           <p:nvPr>
             <p:ph idx="1"/>
           </p:nvPr>
-        </p:nvPicPr>
-        <p:blipFill>
-          <a:blip r:embed="rId2"/>
-          <a:stretch>
-            <a:fillRect/>
-          </a:stretch>
-        </p:blipFill>
-        <p:spPr>
-          <a:xfrm>
-            <a:off x="119959" y="637632"/>
-            <a:ext cx="3665353" cy="580650"/>
-          </a:xfrm>
-          <a:prstGeom prst="rect">
-            <a:avLst/>
-          </a:prstGeom>
-          <a:effectLst>
-            <a:outerShdw blurRad="25400" dir="17880000">
-              <a:srgbClr val="000000">
-                <a:alpha val="46000"/>
-              </a:srgbClr>
-            </a:outerShdw>
-          </a:effectLst>
-        </p:spPr>
-      </p:pic>
-      <p:pic>
-        <p:nvPicPr>
-          <p:cNvPr id="15" name="Picture 14">
-            <a:extLst>
-              <a:ext uri="{FF2B5EF4-FFF2-40B4-BE49-F238E27FC236}">
-                <a16:creationId xmlns:a16="http://schemas.microsoft.com/office/drawing/2014/main" id="{8AD4D536-5A2F-6CAB-63C3-79706F63B59A}"/>
-              </a:ext>
-            </a:extLst>
-          </p:cNvPr>
-          <p:cNvPicPr>
-            <a:picLocks noChangeAspect="1"/>
-          </p:cNvPicPr>
-          <p:nvPr/>
-        </p:nvPicPr>
-        <p:blipFill>
-          <a:blip r:embed="rId3"/>
-          <a:stretch>
-            <a:fillRect/>
-          </a:stretch>
-        </p:blipFill>
-        <p:spPr>
-          <a:xfrm>
-            <a:off x="119959" y="1314438"/>
-            <a:ext cx="3778176" cy="472272"/>
-          </a:xfrm>
-          <a:prstGeom prst="rect">
-            <a:avLst/>
-          </a:prstGeom>
-        </p:spPr>
-      </p:pic>
-      <p:pic>
-        <p:nvPicPr>
-          <p:cNvPr id="17" name="Picture 16">
-            <a:extLst>
-              <a:ext uri="{FF2B5EF4-FFF2-40B4-BE49-F238E27FC236}">
-                <a16:creationId xmlns:a16="http://schemas.microsoft.com/office/drawing/2014/main" id="{AD07B321-3FD8-A0A1-21D3-F6C13CE6DF5B}"/>
-              </a:ext>
-            </a:extLst>
-          </p:cNvPr>
-          <p:cNvPicPr>
-            <a:picLocks noChangeAspect="1"/>
-          </p:cNvPicPr>
-          <p:nvPr/>
-        </p:nvPicPr>
-        <p:blipFill>
-          <a:blip r:embed="rId4"/>
-          <a:stretch>
-            <a:fillRect/>
-          </a:stretch>
-        </p:blipFill>
-        <p:spPr>
-          <a:xfrm>
-            <a:off x="119959" y="1882866"/>
-            <a:ext cx="3778176" cy="608470"/>
-          </a:xfrm>
-          <a:prstGeom prst="rect">
-            <a:avLst/>
-          </a:prstGeom>
-        </p:spPr>
-      </p:pic>
-      <p:pic>
-        <p:nvPicPr>
-          <p:cNvPr id="19" name="Picture 18">
-            <a:extLst>
-              <a:ext uri="{FF2B5EF4-FFF2-40B4-BE49-F238E27FC236}">
-                <a16:creationId xmlns:a16="http://schemas.microsoft.com/office/drawing/2014/main" id="{421C60A0-82B2-91E0-AAF1-AEA269431177}"/>
-              </a:ext>
-            </a:extLst>
-          </p:cNvPr>
-          <p:cNvPicPr>
-            <a:picLocks noChangeAspect="1"/>
-          </p:cNvPicPr>
-          <p:nvPr/>
-        </p:nvPicPr>
-        <p:blipFill>
-          <a:blip r:embed="rId5"/>
-          <a:stretch>
-            <a:fillRect/>
-          </a:stretch>
-        </p:blipFill>
-        <p:spPr>
-          <a:xfrm>
-            <a:off x="119959" y="2638587"/>
-            <a:ext cx="5375868" cy="1000364"/>
-          </a:xfrm>
-          <a:prstGeom prst="rect">
-            <a:avLst/>
-          </a:prstGeom>
-        </p:spPr>
-      </p:pic>
+        </p:nvSpPr>
+        <p:spPr>
+          <a:xfrm>
+            <a:off x="200966" y="683289"/>
+            <a:ext cx="11756571" cy="6059156"/>
+          </a:xfrm>
+        </p:spPr>
+        <p:txBody>
+          <a:bodyPr>
+            <a:normAutofit/>
+          </a:bodyPr>
+          <a:lstStyle/>
+          <a:p>
+            <a:r>
+              <a:rPr lang="en-US"/>
+              <a:t>Inside app</a:t>
+            </a:r>
+          </a:p>
+          <a:p>
+            <a:pPr lvl="1"/>
+            <a:r>
+              <a:rPr lang="en-US"/>
+              <a:t>core : contains the things that is are not connected with UI</a:t>
+            </a:r>
+          </a:p>
+          <a:p>
+            <a:pPr lvl="2"/>
+            <a:r>
+              <a:rPr lang="en-US"/>
+              <a:t>Interceptors</a:t>
+            </a:r>
+          </a:p>
+          <a:p>
+            <a:pPr lvl="2"/>
+            <a:r>
+              <a:rPr lang="en-US"/>
+              <a:t>gaurds</a:t>
+            </a:r>
+          </a:p>
+          <a:p>
+            <a:pPr lvl="2"/>
+            <a:r>
+              <a:rPr lang="en-US" sz="1800"/>
+              <a:t>services</a:t>
+            </a:r>
+          </a:p>
+          <a:p>
+            <a:pPr lvl="2"/>
+            <a:r>
+              <a:rPr lang="en-US" sz="1800"/>
+              <a:t>constants</a:t>
+            </a:r>
+          </a:p>
+          <a:p>
+            <a:pPr lvl="3"/>
+            <a:r>
+              <a:rPr lang="en-US" sz="1600"/>
+              <a:t>Global.Constant.ts</a:t>
+            </a:r>
+          </a:p>
+          <a:p>
+            <a:pPr lvl="2"/>
+            <a:r>
+              <a:rPr lang="en-US" sz="1800"/>
+              <a:t>models</a:t>
+            </a:r>
+          </a:p>
+          <a:p>
+            <a:pPr lvl="3"/>
+            <a:r>
+              <a:rPr lang="en-US" sz="1800"/>
+              <a:t>classes</a:t>
+            </a:r>
+          </a:p>
+          <a:p>
+            <a:pPr lvl="3"/>
+            <a:r>
+              <a:rPr lang="en-US" sz="1800"/>
+              <a:t>interfaces</a:t>
+            </a:r>
+          </a:p>
+          <a:p>
+            <a:pPr lvl="2"/>
+            <a:r>
+              <a:rPr lang="en-US" sz="1800"/>
+              <a:t>enums</a:t>
+            </a:r>
+          </a:p>
+          <a:p>
+            <a:pPr lvl="2"/>
+            <a:r>
+              <a:rPr lang="en-US" sz="1800"/>
+              <a:t>Helpers</a:t>
+            </a:r>
+          </a:p>
+          <a:p>
+            <a:pPr lvl="3"/>
+            <a:r>
+              <a:rPr lang="en-US" sz="1600"/>
+              <a:t>common.helper.ts</a:t>
+            </a:r>
+          </a:p>
+          <a:p>
+            <a:pPr lvl="2"/>
+            <a:r>
+              <a:rPr lang="en-US" sz="1800"/>
+              <a:t>resolvers</a:t>
+            </a:r>
+          </a:p>
+        </p:txBody>
+      </p:sp>
     </p:spTree>
     <p:extLst>
       <p:ext uri="{BB962C8B-B14F-4D97-AF65-F5344CB8AC3E}">
-        <p14:creationId xmlns:p14="http://schemas.microsoft.com/office/powerpoint/2010/main" val="4113524909"/>
+        <p14:creationId xmlns:p14="http://schemas.microsoft.com/office/powerpoint/2010/main" val="3331318635"/>
       </p:ext>
     </p:extLst>
   </p:cSld>

--- a/Angular & type script/Angular.pptx
+++ b/Angular & type script/Angular.pptx
@@ -28,17 +28,42 @@
     <p:sldId id="271" r:id="rId22"/>
     <p:sldId id="272" r:id="rId23"/>
     <p:sldId id="273" r:id="rId24"/>
-    <p:sldId id="274" r:id="rId25"/>
-    <p:sldId id="276" r:id="rId26"/>
-    <p:sldId id="275" r:id="rId27"/>
-    <p:sldId id="277" r:id="rId28"/>
-    <p:sldId id="289" r:id="rId29"/>
-    <p:sldId id="290" r:id="rId30"/>
-    <p:sldId id="278" r:id="rId31"/>
-    <p:sldId id="279" r:id="rId32"/>
-    <p:sldId id="269" r:id="rId33"/>
-    <p:sldId id="280" r:id="rId34"/>
-    <p:sldId id="268" r:id="rId35"/>
+    <p:sldId id="294" r:id="rId25"/>
+    <p:sldId id="292" r:id="rId26"/>
+    <p:sldId id="295" r:id="rId27"/>
+    <p:sldId id="293" r:id="rId28"/>
+    <p:sldId id="296" r:id="rId29"/>
+    <p:sldId id="298" r:id="rId30"/>
+    <p:sldId id="297" r:id="rId31"/>
+    <p:sldId id="274" r:id="rId32"/>
+    <p:sldId id="276" r:id="rId33"/>
+    <p:sldId id="275" r:id="rId34"/>
+    <p:sldId id="277" r:id="rId35"/>
+    <p:sldId id="278" r:id="rId36"/>
+    <p:sldId id="279" r:id="rId37"/>
+    <p:sldId id="299" r:id="rId38"/>
+    <p:sldId id="300" r:id="rId39"/>
+    <p:sldId id="301" r:id="rId40"/>
+    <p:sldId id="304" r:id="rId41"/>
+    <p:sldId id="305" r:id="rId42"/>
+    <p:sldId id="306" r:id="rId43"/>
+    <p:sldId id="303" r:id="rId44"/>
+    <p:sldId id="302" r:id="rId45"/>
+    <p:sldId id="308" r:id="rId46"/>
+    <p:sldId id="307" r:id="rId47"/>
+    <p:sldId id="315" r:id="rId48"/>
+    <p:sldId id="310" r:id="rId49"/>
+    <p:sldId id="311" r:id="rId50"/>
+    <p:sldId id="314" r:id="rId51"/>
+    <p:sldId id="313" r:id="rId52"/>
+    <p:sldId id="316" r:id="rId53"/>
+    <p:sldId id="289" r:id="rId54"/>
+    <p:sldId id="290" r:id="rId55"/>
+    <p:sldId id="312" r:id="rId56"/>
+    <p:sldId id="269" r:id="rId57"/>
+    <p:sldId id="309" r:id="rId58"/>
+    <p:sldId id="280" r:id="rId59"/>
+    <p:sldId id="268" r:id="rId60"/>
   </p:sldIdLst>
   <p:sldSz cx="12192000" cy="6858000"/>
   <p:notesSz cx="6858000" cy="9144000"/>
@@ -330,7 +355,7 @@
           <a:p>
             <a:fld id="{BFD97FD3-0E3C-4940-AC08-248FE3BAAF7F}" type="datetimeFigureOut">
               <a:rPr lang="en-US" smtClean="0"/>
-              <a:t>2/28/2026</a:t>
+              <a:t>3/15/2026</a:t>
             </a:fld>
             <a:endParaRPr lang="en-US"/>
           </a:p>
@@ -627,7 +652,7 @@
           <a:p>
             <a:fld id="{BFD97FD3-0E3C-4940-AC08-248FE3BAAF7F}" type="datetimeFigureOut">
               <a:rPr lang="en-US" smtClean="0"/>
-              <a:t>2/28/2026</a:t>
+              <a:t>3/15/2026</a:t>
             </a:fld>
             <a:endParaRPr lang="en-US"/>
           </a:p>
@@ -819,7 +844,7 @@
           <a:p>
             <a:fld id="{BFD97FD3-0E3C-4940-AC08-248FE3BAAF7F}" type="datetimeFigureOut">
               <a:rPr lang="en-US" smtClean="0"/>
-              <a:t>2/28/2026</a:t>
+              <a:t>3/15/2026</a:t>
             </a:fld>
             <a:endParaRPr lang="en-US"/>
           </a:p>
@@ -1080,7 +1105,7 @@
           <a:p>
             <a:fld id="{BFD97FD3-0E3C-4940-AC08-248FE3BAAF7F}" type="datetimeFigureOut">
               <a:rPr lang="en-US" smtClean="0"/>
-              <a:t>2/28/2026</a:t>
+              <a:t>3/15/2026</a:t>
             </a:fld>
             <a:endParaRPr lang="en-US"/>
           </a:p>
@@ -1504,7 +1529,7 @@
           <a:p>
             <a:fld id="{BFD97FD3-0E3C-4940-AC08-248FE3BAAF7F}" type="datetimeFigureOut">
               <a:rPr lang="en-US" smtClean="0"/>
-              <a:t>2/28/2026</a:t>
+              <a:t>3/15/2026</a:t>
             </a:fld>
             <a:endParaRPr lang="en-US"/>
           </a:p>
@@ -2041,7 +2066,7 @@
           <a:p>
             <a:fld id="{BFD97FD3-0E3C-4940-AC08-248FE3BAAF7F}" type="datetimeFigureOut">
               <a:rPr lang="en-US" smtClean="0"/>
-              <a:t>2/28/2026</a:t>
+              <a:t>3/15/2026</a:t>
             </a:fld>
             <a:endParaRPr lang="en-US"/>
           </a:p>
@@ -2902,7 +2927,7 @@
           <a:p>
             <a:fld id="{BFD97FD3-0E3C-4940-AC08-248FE3BAAF7F}" type="datetimeFigureOut">
               <a:rPr lang="en-US" smtClean="0"/>
-              <a:t>2/28/2026</a:t>
+              <a:t>3/15/2026</a:t>
             </a:fld>
             <a:endParaRPr lang="en-US"/>
           </a:p>
@@ -3072,7 +3097,7 @@
           <a:p>
             <a:fld id="{BFD97FD3-0E3C-4940-AC08-248FE3BAAF7F}" type="datetimeFigureOut">
               <a:rPr lang="en-US" smtClean="0"/>
-              <a:t>2/28/2026</a:t>
+              <a:t>3/15/2026</a:t>
             </a:fld>
             <a:endParaRPr lang="en-US"/>
           </a:p>
@@ -3256,7 +3281,7 @@
           <a:p>
             <a:fld id="{BFD97FD3-0E3C-4940-AC08-248FE3BAAF7F}" type="datetimeFigureOut">
               <a:rPr lang="en-US" smtClean="0"/>
-              <a:t>2/28/2026</a:t>
+              <a:t>3/15/2026</a:t>
             </a:fld>
             <a:endParaRPr lang="en-US"/>
           </a:p>
@@ -3426,7 +3451,7 @@
           <a:p>
             <a:fld id="{BFD97FD3-0E3C-4940-AC08-248FE3BAAF7F}" type="datetimeFigureOut">
               <a:rPr lang="en-US" smtClean="0"/>
-              <a:t>2/28/2026</a:t>
+              <a:t>3/15/2026</a:t>
             </a:fld>
             <a:endParaRPr lang="en-US"/>
           </a:p>
@@ -3670,7 +3695,7 @@
           <a:p>
             <a:fld id="{BFD97FD3-0E3C-4940-AC08-248FE3BAAF7F}" type="datetimeFigureOut">
               <a:rPr lang="en-US" smtClean="0"/>
-              <a:t>2/28/2026</a:t>
+              <a:t>3/15/2026</a:t>
             </a:fld>
             <a:endParaRPr lang="en-US"/>
           </a:p>
@@ -3906,7 +3931,7 @@
           <a:p>
             <a:fld id="{BFD97FD3-0E3C-4940-AC08-248FE3BAAF7F}" type="datetimeFigureOut">
               <a:rPr lang="en-US" smtClean="0"/>
-              <a:t>2/28/2026</a:t>
+              <a:t>3/15/2026</a:t>
             </a:fld>
             <a:endParaRPr lang="en-US"/>
           </a:p>
@@ -4372,7 +4397,7 @@
           <a:p>
             <a:fld id="{BFD97FD3-0E3C-4940-AC08-248FE3BAAF7F}" type="datetimeFigureOut">
               <a:rPr lang="en-US" smtClean="0"/>
-              <a:t>2/28/2026</a:t>
+              <a:t>3/15/2026</a:t>
             </a:fld>
             <a:endParaRPr lang="en-US"/>
           </a:p>
@@ -4490,7 +4515,7 @@
           <a:p>
             <a:fld id="{BFD97FD3-0E3C-4940-AC08-248FE3BAAF7F}" type="datetimeFigureOut">
               <a:rPr lang="en-US" smtClean="0"/>
-              <a:t>2/28/2026</a:t>
+              <a:t>3/15/2026</a:t>
             </a:fld>
             <a:endParaRPr lang="en-US"/>
           </a:p>
@@ -4585,7 +4610,7 @@
           <a:p>
             <a:fld id="{BFD97FD3-0E3C-4940-AC08-248FE3BAAF7F}" type="datetimeFigureOut">
               <a:rPr lang="en-US" smtClean="0"/>
-              <a:t>2/28/2026</a:t>
+              <a:t>3/15/2026</a:t>
             </a:fld>
             <a:endParaRPr lang="en-US"/>
           </a:p>
@@ -4840,7 +4865,7 @@
           <a:p>
             <a:fld id="{BFD97FD3-0E3C-4940-AC08-248FE3BAAF7F}" type="datetimeFigureOut">
               <a:rPr lang="en-US" smtClean="0"/>
-              <a:t>2/28/2026</a:t>
+              <a:t>3/15/2026</a:t>
             </a:fld>
             <a:endParaRPr lang="en-US"/>
           </a:p>
@@ -5139,7 +5164,7 @@
           <a:p>
             <a:fld id="{BFD97FD3-0E3C-4940-AC08-248FE3BAAF7F}" type="datetimeFigureOut">
               <a:rPr lang="en-US" smtClean="0"/>
-              <a:t>2/28/2026</a:t>
+              <a:t>3/15/2026</a:t>
             </a:fld>
             <a:endParaRPr lang="en-US"/>
           </a:p>
@@ -5373,7 +5398,7 @@
           <a:p>
             <a:fld id="{BFD97FD3-0E3C-4940-AC08-248FE3BAAF7F}" type="datetimeFigureOut">
               <a:rPr lang="en-US" smtClean="0"/>
-              <a:t>2/28/2026</a:t>
+              <a:t>3/15/2026</a:t>
             </a:fld>
             <a:endParaRPr lang="en-US"/>
           </a:p>
@@ -8372,7 +8397,7 @@
           <p:cNvPr id="2" name="Title 1">
             <a:extLst>
               <a:ext uri="{FF2B5EF4-FFF2-40B4-BE49-F238E27FC236}">
-                <a16:creationId xmlns:a16="http://schemas.microsoft.com/office/drawing/2014/main" id="{025734B3-3F11-7C03-2D92-0B3DB8D4E2B5}"/>
+                <a16:creationId xmlns:a16="http://schemas.microsoft.com/office/drawing/2014/main" id="{7FDA4861-F8BC-F199-21FB-61F4353A31BC}"/>
               </a:ext>
             </a:extLst>
           </p:cNvPr>
@@ -8385,8 +8410,8 @@
         </p:nvSpPr>
         <p:spPr>
           <a:xfrm>
-            <a:off x="913795" y="0"/>
-            <a:ext cx="10353762" cy="580103"/>
+            <a:off x="251208" y="0"/>
+            <a:ext cx="11776667" cy="696686"/>
           </a:xfrm>
         </p:spPr>
         <p:txBody>
@@ -8401,7 +8426,7 @@
                   <a:srgbClr val="FF0000"/>
                 </a:solidFill>
               </a:rPr>
-              <a:t>Creating new component</a:t>
+              <a:t>Plain Subject</a:t>
             </a:r>
           </a:p>
         </p:txBody>
@@ -8411,7 +8436,7 @@
           <p:cNvPr id="3" name="Content Placeholder 2">
             <a:extLst>
               <a:ext uri="{FF2B5EF4-FFF2-40B4-BE49-F238E27FC236}">
-                <a16:creationId xmlns:a16="http://schemas.microsoft.com/office/drawing/2014/main" id="{963D2559-9DB4-4235-E157-38E45495D097}"/>
+                <a16:creationId xmlns:a16="http://schemas.microsoft.com/office/drawing/2014/main" id="{CA32221E-2F66-AD65-2FC8-F30EF00240DD}"/>
               </a:ext>
             </a:extLst>
           </p:cNvPr>
@@ -8424,126 +8449,22 @@
         </p:nvSpPr>
         <p:spPr>
           <a:xfrm>
-            <a:off x="432618" y="580103"/>
-            <a:ext cx="11375923" cy="6145162"/>
+            <a:off x="251209" y="696686"/>
+            <a:ext cx="11776668" cy="6055805"/>
           </a:xfrm>
         </p:spPr>
         <p:txBody>
           <a:bodyPr/>
           <a:lstStyle/>
           <a:p>
-            <a:r>
-              <a:rPr lang="en-US"/>
-              <a:t>ng g c </a:t>
-            </a:r>
-            <a:r>
-              <a:rPr lang="en-US" err="1"/>
-              <a:t>componentName</a:t>
-            </a:r>
-            <a:r>
-              <a:rPr lang="en-US"/>
-              <a:t> --skip-tests</a:t>
-            </a:r>
-          </a:p>
-          <a:p>
-            <a:r>
-              <a:rPr lang="en-US" b="1">
-                <a:solidFill>
-                  <a:srgbClr val="FF0000"/>
-                </a:solidFill>
-              </a:rPr>
-              <a:t>ng</a:t>
-            </a:r>
-            <a:r>
-              <a:rPr lang="en-US"/>
-              <a:t> g c project-details </a:t>
-            </a:r>
-            <a:r>
-              <a:rPr lang="en-US" b="1">
-                <a:solidFill>
-                  <a:srgbClr val="0070C0"/>
-                </a:solidFill>
-              </a:rPr>
-              <a:t>--skip-tests</a:t>
-            </a:r>
-          </a:p>
-          <a:p>
-            <a:pPr lvl="1"/>
-            <a:r>
-              <a:rPr lang="en-US"/>
-              <a:t>project-details folder will be created and includes</a:t>
-            </a:r>
-          </a:p>
-          <a:p>
-            <a:pPr lvl="2"/>
-            <a:r>
-              <a:rPr lang="en-US" sz="1800" err="1"/>
-              <a:t>ProjectDetails.component.ts</a:t>
-            </a:r>
-            <a:endParaRPr lang="en-US" sz="1800"/>
-          </a:p>
-          <a:p>
-            <a:pPr lvl="2"/>
-            <a:r>
-              <a:rPr lang="en-US" sz="1800"/>
-              <a:t>ProjectDetails.Component.html</a:t>
-            </a:r>
-          </a:p>
-          <a:p>
-            <a:pPr lvl="2"/>
-            <a:r>
-              <a:rPr lang="en-US" sz="1800"/>
-              <a:t>ProjectDetails.Component.css</a:t>
-            </a:r>
-          </a:p>
-          <a:p>
             <a:endParaRPr lang="en-US"/>
           </a:p>
-          <a:p>
-            <a:endParaRPr lang="en-US"/>
-          </a:p>
-          <a:p>
-            <a:endParaRPr lang="en-US"/>
-          </a:p>
-          <a:p>
-            <a:endParaRPr lang="en-US"/>
-          </a:p>
-        </p:txBody>
-      </p:sp>
-      <p:pic>
-        <p:nvPicPr>
-          <p:cNvPr id="5" name="Picture 4">
-            <a:extLst>
-              <a:ext uri="{FF2B5EF4-FFF2-40B4-BE49-F238E27FC236}">
-                <a16:creationId xmlns:a16="http://schemas.microsoft.com/office/drawing/2014/main" id="{54637D5B-8B8B-98DD-59F9-9474B5F23C4A}"/>
-              </a:ext>
-            </a:extLst>
-          </p:cNvPr>
-          <p:cNvPicPr>
-            <a:picLocks noChangeAspect="1"/>
-          </p:cNvPicPr>
-          <p:nvPr/>
-        </p:nvPicPr>
-        <p:blipFill>
-          <a:blip r:embed="rId2"/>
-          <a:stretch>
-            <a:fillRect/>
-          </a:stretch>
-        </p:blipFill>
-        <p:spPr>
-          <a:xfrm>
-            <a:off x="194372" y="3143800"/>
-            <a:ext cx="11729041" cy="1810037"/>
-          </a:xfrm>
-          <a:prstGeom prst="rect">
-            <a:avLst/>
-          </a:prstGeom>
-        </p:spPr>
-      </p:pic>
+        </p:txBody>
+      </p:sp>
     </p:spTree>
     <p:extLst>
       <p:ext uri="{BB962C8B-B14F-4D97-AF65-F5344CB8AC3E}">
-        <p14:creationId xmlns:p14="http://schemas.microsoft.com/office/powerpoint/2010/main" val="2534247288"/>
+        <p14:creationId xmlns:p14="http://schemas.microsoft.com/office/powerpoint/2010/main" val="1363122233"/>
       </p:ext>
     </p:extLst>
   </p:cSld>
@@ -8575,7 +8496,7 @@
           <p:cNvPr id="2" name="Title 1">
             <a:extLst>
               <a:ext uri="{FF2B5EF4-FFF2-40B4-BE49-F238E27FC236}">
-                <a16:creationId xmlns:a16="http://schemas.microsoft.com/office/drawing/2014/main" id="{EFC4C49B-2F1D-97B3-0A85-352A55AC2ECB}"/>
+                <a16:creationId xmlns:a16="http://schemas.microsoft.com/office/drawing/2014/main" id="{12103C6D-5605-0212-1DF2-26BBF1A8A3CA}"/>
               </a:ext>
             </a:extLst>
           </p:cNvPr>
@@ -8588,17 +8509,23 @@
         </p:nvSpPr>
         <p:spPr>
           <a:xfrm>
-            <a:off x="913795" y="0"/>
-            <a:ext cx="10353762" cy="747252"/>
-          </a:xfrm>
-        </p:spPr>
-        <p:txBody>
-          <a:bodyPr/>
-          <a:lstStyle/>
-          <a:p>
-            <a:r>
-              <a:rPr lang="en-US" b="1"/>
-              <a:t>Creating side bar</a:t>
+            <a:off x="913795" y="1"/>
+            <a:ext cx="10353762" cy="520840"/>
+          </a:xfrm>
+        </p:spPr>
+        <p:txBody>
+          <a:bodyPr>
+            <a:normAutofit fontScale="90000"/>
+          </a:bodyPr>
+          <a:lstStyle/>
+          <a:p>
+            <a:r>
+              <a:rPr lang="en-US" b="1">
+                <a:solidFill>
+                  <a:srgbClr val="FF0000"/>
+                </a:solidFill>
+              </a:rPr>
+              <a:t>BehaviorSubject</a:t>
             </a:r>
           </a:p>
         </p:txBody>
@@ -8608,7 +8535,7 @@
           <p:cNvPr id="3" name="Content Placeholder 2">
             <a:extLst>
               <a:ext uri="{FF2B5EF4-FFF2-40B4-BE49-F238E27FC236}">
-                <a16:creationId xmlns:a16="http://schemas.microsoft.com/office/drawing/2014/main" id="{6616EB86-5D99-4E2C-2247-FA4A7724D22A}"/>
+                <a16:creationId xmlns:a16="http://schemas.microsoft.com/office/drawing/2014/main" id="{AFCFE6A4-EB49-E428-D7E3-26728F58B198}"/>
               </a:ext>
             </a:extLst>
           </p:cNvPr>
@@ -8621,33 +8548,156 @@
         </p:nvSpPr>
         <p:spPr>
           <a:xfrm>
-            <a:off x="285134" y="747253"/>
-            <a:ext cx="11464413" cy="5702708"/>
-          </a:xfrm>
-        </p:spPr>
-        <p:txBody>
-          <a:bodyPr/>
-          <a:lstStyle/>
-          <a:p>
-            <a:r>
-              <a:rPr lang="en-US"/>
-              <a:t>ng g c </a:t>
-            </a:r>
-            <a:r>
-              <a:rPr lang="en-US" err="1"/>
-              <a:t>SideBar</a:t>
-            </a:r>
-            <a:r>
-              <a:rPr lang="en-US"/>
-              <a:t> --skip-tests</a:t>
-            </a:r>
-          </a:p>
-        </p:txBody>
-      </p:sp>
+            <a:off x="80386" y="520842"/>
+            <a:ext cx="12111613" cy="6337158"/>
+          </a:xfrm>
+        </p:spPr>
+        <p:txBody>
+          <a:bodyPr>
+            <a:normAutofit/>
+          </a:bodyPr>
+          <a:lstStyle/>
+          <a:p>
+            <a:r>
+              <a:rPr lang="en-US" sz="1800"/>
+              <a:t>manage </a:t>
+            </a:r>
+            <a:r>
+              <a:rPr lang="en-US" sz="1800" b="1"/>
+              <a:t>shared state between components</a:t>
+            </a:r>
+            <a:r>
+              <a:rPr lang="en-US" sz="1800"/>
+              <a:t>, like login status, theme changes, cart updates, etc.</a:t>
+            </a:r>
+          </a:p>
+          <a:p>
+            <a:r>
+              <a:rPr lang="en-US" sz="1800"/>
+              <a:t>A </a:t>
+            </a:r>
+            <a:r>
+              <a:rPr lang="en-US" sz="1800" b="1"/>
+              <a:t>BehaviorSubject</a:t>
+            </a:r>
+            <a:r>
+              <a:rPr lang="en-US" sz="1800"/>
+              <a:t> is a special type of </a:t>
+            </a:r>
+            <a:r>
+              <a:rPr lang="en-US" sz="1800" b="1"/>
+              <a:t>Observable </a:t>
+            </a:r>
+            <a:r>
+              <a:rPr lang="en-US" sz="1800"/>
+              <a:t>that </a:t>
+            </a:r>
+          </a:p>
+          <a:p>
+            <a:pPr lvl="1"/>
+            <a:r>
+              <a:rPr lang="en-US"/>
+              <a:t>stores the latest value</a:t>
+            </a:r>
+            <a:endParaRPr lang="en-US" b="1"/>
+          </a:p>
+          <a:p>
+            <a:pPr lvl="1"/>
+            <a:r>
+              <a:rPr lang="en-US"/>
+              <a:t>Immediately sends the last value to new subscribers</a:t>
+            </a:r>
+            <a:endParaRPr lang="en-US" b="1"/>
+          </a:p>
+          <a:p>
+            <a:r>
+              <a:rPr lang="en-US" sz="1800"/>
+              <a:t>So any component that subscribes will always receive the </a:t>
+            </a:r>
+            <a:r>
+              <a:rPr lang="en-US" sz="1800" b="1"/>
+              <a:t>current state instantly</a:t>
+            </a:r>
+            <a:r>
+              <a:rPr lang="en-US" sz="1800"/>
+              <a:t>.</a:t>
+            </a:r>
+          </a:p>
+          <a:p>
+            <a:r>
+              <a:rPr lang="en-US" sz="1800" b="1"/>
+              <a:t>BehaviorSubject = Observable + Current Value Storage</a:t>
+            </a:r>
+          </a:p>
+          <a:p>
+            <a:endParaRPr lang="en-US" sz="1800"/>
+          </a:p>
+        </p:txBody>
+      </p:sp>
+      <p:pic>
+        <p:nvPicPr>
+          <p:cNvPr id="10" name="Picture 9">
+            <a:extLst>
+              <a:ext uri="{FF2B5EF4-FFF2-40B4-BE49-F238E27FC236}">
+                <a16:creationId xmlns:a16="http://schemas.microsoft.com/office/drawing/2014/main" id="{4D57395D-480D-4A9A-E183-7328C3D96DFA}"/>
+              </a:ext>
+            </a:extLst>
+          </p:cNvPr>
+          <p:cNvPicPr>
+            <a:picLocks noChangeAspect="1"/>
+          </p:cNvPicPr>
+          <p:nvPr/>
+        </p:nvPicPr>
+        <p:blipFill>
+          <a:blip r:embed="rId2"/>
+          <a:stretch>
+            <a:fillRect/>
+          </a:stretch>
+        </p:blipFill>
+        <p:spPr>
+          <a:xfrm>
+            <a:off x="7326121" y="2465477"/>
+            <a:ext cx="4785492" cy="4392523"/>
+          </a:xfrm>
+          <a:prstGeom prst="rect">
+            <a:avLst/>
+          </a:prstGeom>
+        </p:spPr>
+      </p:pic>
+      <p:pic>
+        <p:nvPicPr>
+          <p:cNvPr id="12" name="Picture 11">
+            <a:extLst>
+              <a:ext uri="{FF2B5EF4-FFF2-40B4-BE49-F238E27FC236}">
+                <a16:creationId xmlns:a16="http://schemas.microsoft.com/office/drawing/2014/main" id="{5C3D7E00-8E9E-74B4-53FC-B844DD2C69C9}"/>
+              </a:ext>
+            </a:extLst>
+          </p:cNvPr>
+          <p:cNvPicPr>
+            <a:picLocks noChangeAspect="1"/>
+          </p:cNvPicPr>
+          <p:nvPr/>
+        </p:nvPicPr>
+        <p:blipFill>
+          <a:blip r:embed="rId3"/>
+          <a:stretch>
+            <a:fillRect/>
+          </a:stretch>
+        </p:blipFill>
+        <p:spPr>
+          <a:xfrm>
+            <a:off x="184220" y="3429001"/>
+            <a:ext cx="5091165" cy="2605424"/>
+          </a:xfrm>
+          <a:prstGeom prst="rect">
+            <a:avLst/>
+          </a:prstGeom>
+        </p:spPr>
+      </p:pic>
     </p:spTree>
     <p:extLst>
       <p:ext uri="{BB962C8B-B14F-4D97-AF65-F5344CB8AC3E}">
-        <p14:creationId xmlns:p14="http://schemas.microsoft.com/office/powerpoint/2010/main" val="898701421"/>
+        <p14:creationId xmlns:p14="http://schemas.microsoft.com/office/powerpoint/2010/main" val="2091675003"/>
       </p:ext>
     </p:extLst>
   </p:cSld>
@@ -8679,7 +8729,7 @@
           <p:cNvPr id="2" name="Title 1">
             <a:extLst>
               <a:ext uri="{FF2B5EF4-FFF2-40B4-BE49-F238E27FC236}">
-                <a16:creationId xmlns:a16="http://schemas.microsoft.com/office/drawing/2014/main" id="{8778D13E-4D03-33C1-BF51-610117BB7EB3}"/>
+                <a16:creationId xmlns:a16="http://schemas.microsoft.com/office/drawing/2014/main" id="{CF6DD2ED-C010-3A25-B3D4-7D6BCCC81C6B}"/>
               </a:ext>
             </a:extLst>
           </p:cNvPr>
@@ -8693,7 +8743,7 @@
         <p:spPr>
           <a:xfrm>
             <a:off x="913795" y="0"/>
-            <a:ext cx="10353762" cy="737419"/>
+            <a:ext cx="10353762" cy="777073"/>
           </a:xfrm>
         </p:spPr>
         <p:txBody>
@@ -8703,296 +8753,87 @@
             <a:r>
               <a:rPr lang="en-US" b="1">
                 <a:solidFill>
-                  <a:srgbClr val="0070C0"/>
-                </a:solidFill>
-              </a:rPr>
-              <a:t>Adding bootstrap &amp; Bootstrap icon</a:t>
-            </a:r>
-          </a:p>
-        </p:txBody>
-      </p:sp>
-      <p:sp>
-        <p:nvSpPr>
-          <p:cNvPr id="3" name="Content Placeholder 2">
+                  <a:srgbClr val="FF0000"/>
+                </a:solidFill>
+              </a:rPr>
+              <a:t>Example 1: Login State</a:t>
+            </a:r>
+          </a:p>
+        </p:txBody>
+      </p:sp>
+      <p:pic>
+        <p:nvPicPr>
+          <p:cNvPr id="5" name="Content Placeholder 4">
             <a:extLst>
               <a:ext uri="{FF2B5EF4-FFF2-40B4-BE49-F238E27FC236}">
-                <a16:creationId xmlns:a16="http://schemas.microsoft.com/office/drawing/2014/main" id="{5C9C21FE-7EFF-39B9-60D6-6206D8DBF34A}"/>
+                <a16:creationId xmlns:a16="http://schemas.microsoft.com/office/drawing/2014/main" id="{14884EF8-44F0-8020-3758-D09D633C70A4}"/>
               </a:ext>
             </a:extLst>
           </p:cNvPr>
-          <p:cNvSpPr>
-            <a:spLocks noGrp="1"/>
-          </p:cNvSpPr>
+          <p:cNvPicPr>
+            <a:picLocks noGrp="1" noChangeAspect="1"/>
+          </p:cNvPicPr>
           <p:nvPr>
             <p:ph idx="1"/>
           </p:nvPr>
-        </p:nvSpPr>
-        <p:spPr>
-          <a:xfrm>
-            <a:off x="334296" y="737419"/>
-            <a:ext cx="11472517" cy="5456904"/>
-          </a:xfrm>
-        </p:spPr>
-        <p:txBody>
-          <a:bodyPr>
-            <a:normAutofit/>
-          </a:bodyPr>
-          <a:lstStyle/>
-          <a:p>
-            <a:r>
-              <a:rPr lang="en-US" sz="1800" b="1">
-                <a:solidFill>
-                  <a:srgbClr val="FFFF00"/>
-                </a:solidFill>
-              </a:rPr>
-              <a:t>ng</a:t>
-            </a:r>
-            <a:r>
-              <a:rPr lang="en-US" sz="1800"/>
-              <a:t> </a:t>
-            </a:r>
-            <a:r>
-              <a:rPr lang="en-US" sz="1800" b="1">
-                <a:solidFill>
-                  <a:srgbClr val="00B0F0"/>
-                </a:solidFill>
-              </a:rPr>
-              <a:t>add</a:t>
-            </a:r>
-            <a:r>
-              <a:rPr lang="en-US" sz="1800"/>
-              <a:t> </a:t>
-            </a:r>
-            <a:r>
-              <a:rPr lang="en-US" sz="1800" b="1">
-                <a:solidFill>
-                  <a:srgbClr val="00B050"/>
-                </a:solidFill>
-              </a:rPr>
-              <a:t>@ng-bootstrap/ng-bootstrap</a:t>
-            </a:r>
-            <a:r>
-              <a:rPr lang="en-US" sz="1800"/>
-              <a:t>  //</a:t>
-            </a:r>
-            <a:r>
-              <a:rPr lang="en-US" sz="1800" b="1"/>
-              <a:t>recommended, to use the component that need the JS code</a:t>
-            </a:r>
-          </a:p>
-          <a:p>
-            <a:r>
-              <a:rPr lang="en-US" sz="1800" b="1" err="1">
-                <a:solidFill>
-                  <a:srgbClr val="FFFF00"/>
-                </a:solidFill>
-              </a:rPr>
-              <a:t>npm</a:t>
-            </a:r>
-            <a:r>
-              <a:rPr lang="en-US" sz="1800" b="1"/>
-              <a:t> </a:t>
-            </a:r>
-            <a:r>
-              <a:rPr lang="en-US" sz="1800" b="1" err="1"/>
-              <a:t>i</a:t>
-            </a:r>
-            <a:r>
-              <a:rPr lang="en-US" sz="1800" b="1"/>
-              <a:t> @ng-bootstrap/ng-bootstrap  // like the above</a:t>
-            </a:r>
-          </a:p>
-          <a:p>
-            <a:r>
-              <a:rPr lang="en-US" sz="1800" b="1"/>
-              <a:t>at </a:t>
-            </a:r>
-            <a:r>
-              <a:rPr lang="en-US" sz="1800" b="1" err="1"/>
-              <a:t>angular.json</a:t>
-            </a:r>
-            <a:r>
-              <a:rPr lang="en-US" sz="1800" b="1"/>
-              <a:t> / at architect object / build object / options object</a:t>
-            </a:r>
-          </a:p>
-          <a:p>
-            <a:pPr lvl="1"/>
-            <a:r>
-              <a:rPr lang="en-US" b="1">
-                <a:solidFill>
-                  <a:srgbClr val="00B0F0"/>
-                </a:solidFill>
-              </a:rPr>
-              <a:t>at styles array</a:t>
-            </a:r>
-            <a:r>
-              <a:rPr lang="en-US" b="1"/>
-              <a:t>    -- "</a:t>
-            </a:r>
-            <a:r>
-              <a:rPr lang="en-US" b="1" err="1"/>
-              <a:t>node_modules</a:t>
-            </a:r>
-            <a:r>
-              <a:rPr lang="en-US" b="1"/>
-              <a:t>/bootstrap/</a:t>
-            </a:r>
-            <a:r>
-              <a:rPr lang="en-US" b="1" err="1"/>
-              <a:t>dist</a:t>
-            </a:r>
-            <a:r>
-              <a:rPr lang="en-US" b="1"/>
-              <a:t>/</a:t>
-            </a:r>
-            <a:r>
-              <a:rPr lang="en-US" b="1" err="1"/>
-              <a:t>css</a:t>
-            </a:r>
-            <a:r>
-              <a:rPr lang="en-US" b="1"/>
-              <a:t>/bootstrap.min.css",        // bootstrap CSS file</a:t>
-            </a:r>
-          </a:p>
-          <a:p>
-            <a:pPr lvl="1"/>
-            <a:r>
-              <a:rPr lang="en-US" b="1">
-                <a:solidFill>
-                  <a:srgbClr val="00B0F0"/>
-                </a:solidFill>
-              </a:rPr>
-              <a:t>at scripts array</a:t>
-            </a:r>
-            <a:r>
-              <a:rPr lang="en-US" b="1"/>
-              <a:t>  -- "</a:t>
-            </a:r>
-            <a:r>
-              <a:rPr lang="en-US" b="1" err="1"/>
-              <a:t>node_modules</a:t>
-            </a:r>
-            <a:r>
-              <a:rPr lang="en-US" b="1"/>
-              <a:t>/bootstrap/</a:t>
-            </a:r>
-            <a:r>
-              <a:rPr lang="en-US" b="1" err="1"/>
-              <a:t>dist</a:t>
-            </a:r>
-            <a:r>
-              <a:rPr lang="en-US" b="1"/>
-              <a:t>/</a:t>
-            </a:r>
-            <a:r>
-              <a:rPr lang="en-US" b="1" err="1"/>
-              <a:t>js</a:t>
-            </a:r>
-            <a:r>
-              <a:rPr lang="en-US" b="1"/>
-              <a:t>/bootstrap.bundle.min.js"  // bootstrap JS file</a:t>
-            </a:r>
-          </a:p>
-          <a:p>
-            <a:r>
-              <a:rPr lang="en-US" sz="1800" b="1"/>
-              <a:t>For angular 17 , ng-bootstrap 16</a:t>
-            </a:r>
-            <a:r>
-              <a:rPr lang="en-US" sz="1800"/>
-              <a:t> → Stable</a:t>
-            </a:r>
-          </a:p>
-          <a:p>
-            <a:pPr lvl="1"/>
-            <a:r>
-              <a:rPr lang="en-US" b="1" err="1">
-                <a:solidFill>
-                  <a:srgbClr val="FFFF00"/>
-                </a:solidFill>
-              </a:rPr>
-              <a:t>npm</a:t>
-            </a:r>
-            <a:r>
-              <a:rPr lang="en-US" b="1"/>
-              <a:t> </a:t>
-            </a:r>
-            <a:r>
-              <a:rPr lang="en-US" b="1" err="1"/>
-              <a:t>i</a:t>
-            </a:r>
-            <a:r>
-              <a:rPr lang="en-US" b="1"/>
-              <a:t> @ng-bootstrap/ng-bootstrap</a:t>
-            </a:r>
-          </a:p>
-          <a:p>
-            <a:r>
-              <a:rPr lang="en-US" sz="1800" b="1" err="1">
-                <a:solidFill>
-                  <a:srgbClr val="FFFF00"/>
-                </a:solidFill>
-              </a:rPr>
-              <a:t>npm</a:t>
-            </a:r>
-            <a:r>
-              <a:rPr lang="en-US" sz="1800" b="1"/>
-              <a:t> </a:t>
-            </a:r>
-            <a:r>
-              <a:rPr lang="en-US" sz="1800" b="1" err="1"/>
-              <a:t>i</a:t>
-            </a:r>
-            <a:r>
-              <a:rPr lang="en-US" sz="1800" b="1"/>
-              <a:t> </a:t>
-            </a:r>
-            <a:r>
-              <a:rPr lang="en-US" sz="1800" b="1">
-                <a:solidFill>
-                  <a:srgbClr val="00B050"/>
-                </a:solidFill>
-              </a:rPr>
-              <a:t>bootstrap-icons</a:t>
-            </a:r>
-          </a:p>
-          <a:p>
-            <a:pPr lvl="1"/>
-            <a:r>
-              <a:rPr lang="en-US" b="1">
-                <a:solidFill>
-                  <a:srgbClr val="00B0F0"/>
-                </a:solidFill>
-              </a:rPr>
-              <a:t>at style array</a:t>
-            </a:r>
-            <a:r>
-              <a:rPr lang="en-US" b="1"/>
-              <a:t> "</a:t>
-            </a:r>
-            <a:r>
-              <a:rPr lang="en-US" b="1" err="1"/>
-              <a:t>node_modules</a:t>
-            </a:r>
-            <a:r>
-              <a:rPr lang="en-US" b="1"/>
-              <a:t>/bootstrap-icons/font/bootstrap-icons.min.css"</a:t>
-            </a:r>
-          </a:p>
-          <a:p>
-            <a:pPr lvl="1"/>
-            <a:endParaRPr lang="en-US" sz="1600" b="1"/>
-          </a:p>
-          <a:p>
-            <a:endParaRPr lang="en-US" sz="1800" b="1"/>
-          </a:p>
-        </p:txBody>
-      </p:sp>
+        </p:nvPicPr>
+        <p:blipFill>
+          <a:blip r:embed="rId2"/>
+          <a:stretch>
+            <a:fillRect/>
+          </a:stretch>
+        </p:blipFill>
+        <p:spPr>
+          <a:xfrm>
+            <a:off x="0" y="938212"/>
+            <a:ext cx="5205045" cy="5111759"/>
+          </a:xfrm>
+          <a:prstGeom prst="rect">
+            <a:avLst/>
+          </a:prstGeom>
+          <a:effectLst>
+            <a:outerShdw blurRad="25400" dir="17880000">
+              <a:srgbClr val="000000">
+                <a:alpha val="46000"/>
+              </a:srgbClr>
+            </a:outerShdw>
+          </a:effectLst>
+        </p:spPr>
+      </p:pic>
+      <p:pic>
+        <p:nvPicPr>
+          <p:cNvPr id="7" name="Picture 6">
+            <a:extLst>
+              <a:ext uri="{FF2B5EF4-FFF2-40B4-BE49-F238E27FC236}">
+                <a16:creationId xmlns:a16="http://schemas.microsoft.com/office/drawing/2014/main" id="{A71D5F1D-B4A3-DD0A-447B-EB06D4001BCD}"/>
+              </a:ext>
+            </a:extLst>
+          </p:cNvPr>
+          <p:cNvPicPr>
+            <a:picLocks noChangeAspect="1"/>
+          </p:cNvPicPr>
+          <p:nvPr/>
+        </p:nvPicPr>
+        <p:blipFill>
+          <a:blip r:embed="rId3"/>
+          <a:stretch>
+            <a:fillRect/>
+          </a:stretch>
+        </p:blipFill>
+        <p:spPr>
+          <a:xfrm>
+            <a:off x="5456256" y="938212"/>
+            <a:ext cx="4903595" cy="4006815"/>
+          </a:xfrm>
+          <a:prstGeom prst="rect">
+            <a:avLst/>
+          </a:prstGeom>
+        </p:spPr>
+      </p:pic>
     </p:spTree>
     <p:extLst>
       <p:ext uri="{BB962C8B-B14F-4D97-AF65-F5344CB8AC3E}">
-        <p14:creationId xmlns:p14="http://schemas.microsoft.com/office/powerpoint/2010/main" val="2094939905"/>
+        <p14:creationId xmlns:p14="http://schemas.microsoft.com/office/powerpoint/2010/main" val="1591170624"/>
       </p:ext>
     </p:extLst>
   </p:cSld>
@@ -9024,7 +8865,7 @@
           <p:cNvPr id="2" name="Title 1">
             <a:extLst>
               <a:ext uri="{FF2B5EF4-FFF2-40B4-BE49-F238E27FC236}">
-                <a16:creationId xmlns:a16="http://schemas.microsoft.com/office/drawing/2014/main" id="{7DA78EBE-03FD-D8DE-35CF-1926B0CA385E}"/>
+                <a16:creationId xmlns:a16="http://schemas.microsoft.com/office/drawing/2014/main" id="{33CD8548-84FF-0F62-E996-3F97F301FD9F}"/>
               </a:ext>
             </a:extLst>
           </p:cNvPr>
@@ -9037,8 +8878,8 @@
         </p:nvSpPr>
         <p:spPr>
           <a:xfrm>
-            <a:off x="913795" y="0"/>
-            <a:ext cx="10353762" cy="688258"/>
+            <a:off x="914356" y="0"/>
+            <a:ext cx="10353762" cy="622998"/>
           </a:xfrm>
         </p:spPr>
         <p:txBody>
@@ -9048,176 +8889,53 @@
           <a:lstStyle/>
           <a:p>
             <a:r>
-              <a:rPr lang="en-US" b="1"/>
-              <a:t>Addin CSS file globally</a:t>
-            </a:r>
-          </a:p>
-        </p:txBody>
-      </p:sp>
-      <p:sp>
-        <p:nvSpPr>
-          <p:cNvPr id="3" name="Content Placeholder 2">
+              <a:rPr lang="en-US" b="1">
+                <a:solidFill>
+                  <a:srgbClr val="FF0000"/>
+                </a:solidFill>
+              </a:rPr>
+              <a:t>Example 1: Login State [cont.1]</a:t>
+            </a:r>
+            <a:endParaRPr lang="en-US"/>
+          </a:p>
+        </p:txBody>
+      </p:sp>
+      <p:pic>
+        <p:nvPicPr>
+          <p:cNvPr id="9" name="Content Placeholder 8">
             <a:extLst>
               <a:ext uri="{FF2B5EF4-FFF2-40B4-BE49-F238E27FC236}">
-                <a16:creationId xmlns:a16="http://schemas.microsoft.com/office/drawing/2014/main" id="{0BA55FB4-19F2-A5D7-3E15-C94C5CEB2E1C}"/>
+                <a16:creationId xmlns:a16="http://schemas.microsoft.com/office/drawing/2014/main" id="{1C252A7A-4B94-1CD8-B5A7-FCB6B8A8C584}"/>
               </a:ext>
             </a:extLst>
           </p:cNvPr>
-          <p:cNvSpPr>
-            <a:spLocks noGrp="1"/>
-          </p:cNvSpPr>
+          <p:cNvPicPr>
+            <a:picLocks noGrp="1" noChangeAspect="1"/>
+          </p:cNvPicPr>
           <p:nvPr>
             <p:ph idx="1"/>
           </p:nvPr>
-        </p:nvSpPr>
-        <p:spPr>
-          <a:xfrm>
-            <a:off x="160774" y="688258"/>
-            <a:ext cx="11887200" cy="5938683"/>
-          </a:xfrm>
-        </p:spPr>
-        <p:txBody>
-          <a:bodyPr/>
-          <a:lstStyle/>
-          <a:p>
-            <a:r>
-              <a:rPr lang="en-US"/>
-              <a:t>at </a:t>
-            </a:r>
-            <a:r>
-              <a:rPr lang="en-US" err="1"/>
-              <a:t>src</a:t>
-            </a:r>
-            <a:r>
-              <a:rPr lang="en-US"/>
-              <a:t> folder / </a:t>
-            </a:r>
-            <a:r>
-              <a:rPr lang="en-US" err="1"/>
-              <a:t>css</a:t>
-            </a:r>
-            <a:r>
-              <a:rPr lang="en-US"/>
-              <a:t> folder / css-extensions.css</a:t>
-            </a:r>
-          </a:p>
-          <a:p>
-            <a:r>
-              <a:rPr lang="en-US" b="1"/>
-              <a:t>at </a:t>
-            </a:r>
-            <a:r>
-              <a:rPr lang="en-US" b="1" err="1"/>
-              <a:t>angular.json</a:t>
-            </a:r>
-            <a:r>
-              <a:rPr lang="en-US" b="1"/>
-              <a:t> / at architect object / build object / options object</a:t>
-            </a:r>
-            <a:endParaRPr lang="en-US"/>
-          </a:p>
-          <a:p>
-            <a:pPr lvl="1"/>
-            <a:r>
-              <a:rPr lang="en-US" b="1">
-                <a:solidFill>
-                  <a:srgbClr val="00B0F0"/>
-                </a:solidFill>
-              </a:rPr>
-              <a:t>at styles array</a:t>
-            </a:r>
-            <a:r>
-              <a:rPr lang="en-US" b="1"/>
-              <a:t>    --- </a:t>
-            </a:r>
-            <a:r>
-              <a:rPr lang="en-US">
-                <a:effectLst/>
-              </a:rPr>
-              <a:t>"</a:t>
-            </a:r>
-            <a:r>
-              <a:rPr lang="en-US" err="1">
-                <a:effectLst/>
-              </a:rPr>
-              <a:t>src</a:t>
-            </a:r>
-            <a:r>
-              <a:rPr lang="en-US">
-                <a:effectLst/>
-              </a:rPr>
-              <a:t>/</a:t>
-            </a:r>
-            <a:r>
-              <a:rPr lang="en-US" err="1">
-                <a:effectLst/>
-              </a:rPr>
-              <a:t>css</a:t>
-            </a:r>
-            <a:r>
-              <a:rPr lang="en-US">
-                <a:effectLst/>
-              </a:rPr>
-              <a:t>/css-extension.css"</a:t>
-            </a:r>
-          </a:p>
-          <a:p>
-            <a:r>
-              <a:rPr lang="en-US"/>
-              <a:t>Adding styles via </a:t>
-            </a:r>
-            <a:r>
-              <a:rPr lang="en-US" b="1" err="1">
-                <a:effectLst/>
-              </a:rPr>
-              <a:t>angular.json</a:t>
-            </a:r>
-            <a:r>
-              <a:rPr lang="en-US">
-                <a:effectLst/>
-              </a:rPr>
-              <a:t> is generally faster and more reliable for your application's initial load and overall stability compared to using an external CDN link in index.html</a:t>
-            </a:r>
-          </a:p>
-          <a:p>
-            <a:r>
-              <a:rPr lang="en-US" b="1">
-                <a:effectLst/>
-              </a:rPr>
-              <a:t>Why angular.json is usually faster</a:t>
-            </a:r>
-          </a:p>
-          <a:p>
-            <a:pPr lvl="1"/>
-            <a:r>
-              <a:rPr lang="en-US" b="1">
-                <a:effectLst/>
-              </a:rPr>
-              <a:t>Reduced HTTP Requests</a:t>
-            </a:r>
-            <a:r>
-              <a:rPr lang="en-US">
-                <a:effectLst/>
-              </a:rPr>
-              <a:t>: When you add files to angular.json, the Angular CLI bundles them into a single (or few) minified CSS files. The browser makes one request for your styles instead of multiple separate requests to different servers.</a:t>
-            </a:r>
-          </a:p>
-          <a:p>
-            <a:endParaRPr lang="en-US" b="1">
-              <a:effectLst/>
-            </a:endParaRPr>
-          </a:p>
-          <a:p>
-            <a:endParaRPr lang="en-US" b="1">
-              <a:effectLst/>
-            </a:endParaRPr>
-          </a:p>
-        </p:txBody>
-      </p:sp>
+        </p:nvPicPr>
+        <p:blipFill>
+          <a:blip r:embed="rId2"/>
+          <a:stretch>
+            <a:fillRect/>
+          </a:stretch>
+        </p:blipFill>
+        <p:spPr>
+          <a:xfrm>
+            <a:off x="0" y="622998"/>
+            <a:ext cx="6392698" cy="5644723"/>
+          </a:xfrm>
+          <a:prstGeom prst="rect">
+            <a:avLst/>
+          </a:prstGeom>
+        </p:spPr>
+      </p:pic>
     </p:spTree>
     <p:extLst>
       <p:ext uri="{BB962C8B-B14F-4D97-AF65-F5344CB8AC3E}">
-        <p14:creationId xmlns:p14="http://schemas.microsoft.com/office/powerpoint/2010/main" val="2733366995"/>
+        <p14:creationId xmlns:p14="http://schemas.microsoft.com/office/powerpoint/2010/main" val="3990516734"/>
       </p:ext>
     </p:extLst>
   </p:cSld>
@@ -9249,7 +8967,7 @@
           <p:cNvPr id="2" name="Title 1">
             <a:extLst>
               <a:ext uri="{FF2B5EF4-FFF2-40B4-BE49-F238E27FC236}">
-                <a16:creationId xmlns:a16="http://schemas.microsoft.com/office/drawing/2014/main" id="{A0205F32-0908-AE4A-42DB-A37AFD33EB8E}"/>
+                <a16:creationId xmlns:a16="http://schemas.microsoft.com/office/drawing/2014/main" id="{79FA278E-CBE4-CF30-C56E-8ADB194AFFF4}"/>
               </a:ext>
             </a:extLst>
           </p:cNvPr>
@@ -9262,31 +8980,122 @@
         </p:nvSpPr>
         <p:spPr>
           <a:xfrm>
-            <a:off x="919119" y="2120202"/>
-            <a:ext cx="10353762" cy="1778558"/>
+            <a:off x="913795" y="0"/>
+            <a:ext cx="10353762" cy="572756"/>
           </a:xfrm>
         </p:spPr>
         <p:txBody>
           <a:bodyPr>
-            <a:normAutofit/>
+            <a:normAutofit fontScale="90000"/>
           </a:bodyPr>
           <a:lstStyle/>
           <a:p>
             <a:r>
-              <a:rPr lang="en-US" sz="4800" b="1">
+              <a:rPr lang="en-US" b="1">
                 <a:solidFill>
                   <a:srgbClr val="FF0000"/>
                 </a:solidFill>
               </a:rPr>
-              <a:t>Angular Material </a:t>
-            </a:r>
-          </a:p>
-        </p:txBody>
-      </p:sp>
+              <a:t>BehaviorSubject [cont.]</a:t>
+            </a:r>
+            <a:endParaRPr lang="en-US"/>
+          </a:p>
+        </p:txBody>
+      </p:sp>
+      <p:pic>
+        <p:nvPicPr>
+          <p:cNvPr id="9" name="Picture 8">
+            <a:extLst>
+              <a:ext uri="{FF2B5EF4-FFF2-40B4-BE49-F238E27FC236}">
+                <a16:creationId xmlns:a16="http://schemas.microsoft.com/office/drawing/2014/main" id="{CE6AEAB2-B0E6-0078-12CF-E00DBFF43A92}"/>
+              </a:ext>
+            </a:extLst>
+          </p:cNvPr>
+          <p:cNvPicPr>
+            <a:picLocks noChangeAspect="1"/>
+          </p:cNvPicPr>
+          <p:nvPr/>
+        </p:nvPicPr>
+        <p:blipFill>
+          <a:blip r:embed="rId2"/>
+          <a:stretch>
+            <a:fillRect/>
+          </a:stretch>
+        </p:blipFill>
+        <p:spPr>
+          <a:xfrm>
+            <a:off x="0" y="702338"/>
+            <a:ext cx="4108154" cy="5120785"/>
+          </a:xfrm>
+          <a:prstGeom prst="rect">
+            <a:avLst/>
+          </a:prstGeom>
+        </p:spPr>
+      </p:pic>
+      <p:pic>
+        <p:nvPicPr>
+          <p:cNvPr id="5" name="Picture 4">
+            <a:extLst>
+              <a:ext uri="{FF2B5EF4-FFF2-40B4-BE49-F238E27FC236}">
+                <a16:creationId xmlns:a16="http://schemas.microsoft.com/office/drawing/2014/main" id="{6EEC121D-C332-9F96-074B-1FFA4A1E7D75}"/>
+              </a:ext>
+            </a:extLst>
+          </p:cNvPr>
+          <p:cNvPicPr>
+            <a:picLocks noChangeAspect="1"/>
+          </p:cNvPicPr>
+          <p:nvPr/>
+        </p:nvPicPr>
+        <p:blipFill>
+          <a:blip r:embed="rId3"/>
+          <a:stretch>
+            <a:fillRect/>
+          </a:stretch>
+        </p:blipFill>
+        <p:spPr>
+          <a:xfrm>
+            <a:off x="4108154" y="748132"/>
+            <a:ext cx="4286250" cy="1438275"/>
+          </a:xfrm>
+          <a:prstGeom prst="rect">
+            <a:avLst/>
+          </a:prstGeom>
+        </p:spPr>
+      </p:pic>
+      <p:pic>
+        <p:nvPicPr>
+          <p:cNvPr id="8" name="Picture 7">
+            <a:extLst>
+              <a:ext uri="{FF2B5EF4-FFF2-40B4-BE49-F238E27FC236}">
+                <a16:creationId xmlns:a16="http://schemas.microsoft.com/office/drawing/2014/main" id="{58E3B65E-1F3F-C36C-0ACC-5493204FB8A5}"/>
+              </a:ext>
+            </a:extLst>
+          </p:cNvPr>
+          <p:cNvPicPr>
+            <a:picLocks noChangeAspect="1"/>
+          </p:cNvPicPr>
+          <p:nvPr/>
+        </p:nvPicPr>
+        <p:blipFill>
+          <a:blip r:embed="rId4"/>
+          <a:stretch>
+            <a:fillRect/>
+          </a:stretch>
+        </p:blipFill>
+        <p:spPr>
+          <a:xfrm>
+            <a:off x="4185411" y="2361783"/>
+            <a:ext cx="4871503" cy="3633735"/>
+          </a:xfrm>
+          <a:prstGeom prst="rect">
+            <a:avLst/>
+          </a:prstGeom>
+        </p:spPr>
+      </p:pic>
     </p:spTree>
     <p:extLst>
       <p:ext uri="{BB962C8B-B14F-4D97-AF65-F5344CB8AC3E}">
-        <p14:creationId xmlns:p14="http://schemas.microsoft.com/office/powerpoint/2010/main" val="3626811731"/>
+        <p14:creationId xmlns:p14="http://schemas.microsoft.com/office/powerpoint/2010/main" val="2036375758"/>
       </p:ext>
     </p:extLst>
   </p:cSld>
@@ -9318,7 +9127,7 @@
           <p:cNvPr id="2" name="Title 1">
             <a:extLst>
               <a:ext uri="{FF2B5EF4-FFF2-40B4-BE49-F238E27FC236}">
-                <a16:creationId xmlns:a16="http://schemas.microsoft.com/office/drawing/2014/main" id="{EE40E7BC-D472-1FBC-B850-0F6CE4166AE4}"/>
+                <a16:creationId xmlns:a16="http://schemas.microsoft.com/office/drawing/2014/main" id="{39F07099-2758-6033-8A35-0FE7B4B5653F}"/>
               </a:ext>
             </a:extLst>
           </p:cNvPr>
@@ -9331,115 +9140,71 @@
         </p:nvSpPr>
         <p:spPr>
           <a:xfrm>
-            <a:off x="913795" y="609600"/>
-            <a:ext cx="10353762" cy="827314"/>
-          </a:xfrm>
-        </p:spPr>
-        <p:txBody>
-          <a:bodyPr/>
-          <a:lstStyle/>
-          <a:p>
-            <a:r>
-              <a:rPr lang="en-US"/>
-              <a:t>Installation</a:t>
-            </a:r>
-          </a:p>
-        </p:txBody>
-      </p:sp>
-      <p:sp>
-        <p:nvSpPr>
-          <p:cNvPr id="3" name="Content Placeholder 2">
+            <a:off x="919119" y="0"/>
+            <a:ext cx="10353762" cy="697470"/>
+          </a:xfrm>
+        </p:spPr>
+        <p:txBody>
+          <a:bodyPr>
+            <a:normAutofit/>
+          </a:bodyPr>
+          <a:lstStyle/>
+          <a:p>
+            <a:r>
+              <a:rPr lang="en-US" sz="3600" b="1">
+                <a:solidFill>
+                  <a:srgbClr val="FF0000"/>
+                </a:solidFill>
+              </a:rPr>
+              <a:t>BehaviorSubject [cont.2]</a:t>
+            </a:r>
+            <a:endParaRPr lang="en-US" sz="3600"/>
+          </a:p>
+        </p:txBody>
+      </p:sp>
+      <p:pic>
+        <p:nvPicPr>
+          <p:cNvPr id="5" name="Content Placeholder 4">
             <a:extLst>
               <a:ext uri="{FF2B5EF4-FFF2-40B4-BE49-F238E27FC236}">
-                <a16:creationId xmlns:a16="http://schemas.microsoft.com/office/drawing/2014/main" id="{514126CE-284C-2EF0-0815-366F73A647D1}"/>
+                <a16:creationId xmlns:a16="http://schemas.microsoft.com/office/drawing/2014/main" id="{C965342F-1240-8B02-27B9-A9F4875D5BCD}"/>
               </a:ext>
             </a:extLst>
           </p:cNvPr>
-          <p:cNvSpPr>
-            <a:spLocks noGrp="1"/>
-          </p:cNvSpPr>
+          <p:cNvPicPr>
+            <a:picLocks noGrp="1" noChangeAspect="1"/>
+          </p:cNvPicPr>
           <p:nvPr>
             <p:ph idx="1"/>
           </p:nvPr>
-        </p:nvSpPr>
-        <p:spPr>
-          <a:xfrm>
-            <a:off x="913795" y="1732449"/>
-            <a:ext cx="10353762" cy="4859270"/>
-          </a:xfrm>
-        </p:spPr>
-        <p:txBody>
-          <a:bodyPr>
-            <a:normAutofit/>
-          </a:bodyPr>
-          <a:lstStyle/>
-          <a:p>
-            <a:r>
-              <a:rPr lang="en-US" b="1">
-                <a:solidFill>
-                  <a:srgbClr val="FF0000"/>
-                </a:solidFill>
-              </a:rPr>
-              <a:t>ng add @angular/material</a:t>
-            </a:r>
-          </a:p>
-          <a:p>
-            <a:r>
-              <a:rPr lang="en-US">
-                <a:latin typeface="+mj-lt"/>
-                <a:ea typeface="+mj-ea"/>
-              </a:rPr>
-              <a:t>Choose a prebuilt theme name, or "custom" for a custom theme: Azure/Blue</a:t>
-            </a:r>
-          </a:p>
-          <a:p>
-            <a:r>
-              <a:rPr lang="en-US">
-                <a:latin typeface="+mj-lt"/>
-                <a:ea typeface="+mj-ea"/>
-              </a:rPr>
-              <a:t>At angular.json </a:t>
-            </a:r>
-          </a:p>
-          <a:p>
-            <a:pPr lvl="1"/>
-            <a:r>
-              <a:rPr lang="en-US">
-                <a:latin typeface="+mj-lt"/>
-                <a:ea typeface="+mj-ea"/>
-              </a:rPr>
-              <a:t>At style : </a:t>
-            </a:r>
-            <a:r>
-              <a:rPr lang="en-US">
-                <a:effectLst/>
-              </a:rPr>
-              <a:t>"@angular/material/prebuilt-themes/azure-blue.css"</a:t>
-            </a:r>
-            <a:endParaRPr lang="en-US">
-              <a:latin typeface="+mj-lt"/>
-              <a:ea typeface="+mj-ea"/>
-            </a:endParaRPr>
-          </a:p>
-          <a:p>
-            <a:r>
-              <a:rPr lang="en-US">
-                <a:latin typeface="+mj-lt"/>
-                <a:ea typeface="+mj-ea"/>
-              </a:rPr>
-              <a:t> </a:t>
-            </a:r>
-            <a:endParaRPr lang="en-US" sz="3600">
-              <a:latin typeface="+mj-lt"/>
-              <a:ea typeface="+mj-ea"/>
-            </a:endParaRPr>
-          </a:p>
-        </p:txBody>
-      </p:sp>
+        </p:nvPicPr>
+        <p:blipFill>
+          <a:blip r:embed="rId2"/>
+          <a:stretch>
+            <a:fillRect/>
+          </a:stretch>
+        </p:blipFill>
+        <p:spPr>
+          <a:xfrm>
+            <a:off x="0" y="566842"/>
+            <a:ext cx="6621864" cy="6166805"/>
+          </a:xfrm>
+          <a:prstGeom prst="rect">
+            <a:avLst/>
+          </a:prstGeom>
+          <a:effectLst>
+            <a:outerShdw blurRad="25400" dir="17880000">
+              <a:srgbClr val="000000">
+                <a:alpha val="46000"/>
+              </a:srgbClr>
+            </a:outerShdw>
+          </a:effectLst>
+        </p:spPr>
+      </p:pic>
     </p:spTree>
     <p:extLst>
       <p:ext uri="{BB962C8B-B14F-4D97-AF65-F5344CB8AC3E}">
-        <p14:creationId xmlns:p14="http://schemas.microsoft.com/office/powerpoint/2010/main" val="2834084368"/>
+        <p14:creationId xmlns:p14="http://schemas.microsoft.com/office/powerpoint/2010/main" val="2514026662"/>
       </p:ext>
     </p:extLst>
   </p:cSld>
@@ -9598,7 +9363,7 @@
           <p:cNvPr id="2" name="Title 1">
             <a:extLst>
               <a:ext uri="{FF2B5EF4-FFF2-40B4-BE49-F238E27FC236}">
-                <a16:creationId xmlns:a16="http://schemas.microsoft.com/office/drawing/2014/main" id="{02620882-3A74-F22D-A1A0-0891F4397F2A}"/>
+                <a16:creationId xmlns:a16="http://schemas.microsoft.com/office/drawing/2014/main" id="{B13CFD92-343B-8F2D-B4BE-703234B5E372}"/>
               </a:ext>
             </a:extLst>
           </p:cNvPr>
@@ -9612,112 +9377,39 @@
         <p:spPr>
           <a:xfrm>
             <a:off x="913795" y="0"/>
-            <a:ext cx="10353762" cy="653143"/>
-          </a:xfrm>
-        </p:spPr>
-        <p:txBody>
-          <a:bodyPr>
-            <a:normAutofit fontScale="90000"/>
-          </a:bodyPr>
-          <a:lstStyle/>
-          <a:p>
-            <a:r>
-              <a:rPr lang="en-US"/>
-              <a:t>Create main layout </a:t>
-            </a:r>
-          </a:p>
-        </p:txBody>
-      </p:sp>
-      <p:sp>
-        <p:nvSpPr>
-          <p:cNvPr id="3" name="Content Placeholder 2">
+            <a:ext cx="10353762" cy="817266"/>
+          </a:xfrm>
+        </p:spPr>
+        <p:txBody>
+          <a:bodyPr/>
+          <a:lstStyle/>
+          <a:p>
+            <a:r>
+              <a:rPr lang="en-US" b="1">
+                <a:solidFill>
+                  <a:srgbClr val="FF0000"/>
+                </a:solidFill>
+              </a:rPr>
+              <a:t>Advanced Example (User Object)</a:t>
+            </a:r>
+          </a:p>
+        </p:txBody>
+      </p:sp>
+      <p:pic>
+        <p:nvPicPr>
+          <p:cNvPr id="5" name="Content Placeholder 4">
             <a:extLst>
               <a:ext uri="{FF2B5EF4-FFF2-40B4-BE49-F238E27FC236}">
-                <a16:creationId xmlns:a16="http://schemas.microsoft.com/office/drawing/2014/main" id="{BF57AF94-85B5-5DEF-7C1D-6E5E758EEBC3}"/>
-              </a:ext>
-            </a:extLst>
-          </p:cNvPr>
-          <p:cNvSpPr>
-            <a:spLocks noGrp="1"/>
-          </p:cNvSpPr>
-          <p:nvPr>
-            <p:ph idx="1"/>
-          </p:nvPr>
-        </p:nvSpPr>
-        <p:spPr>
-          <a:xfrm>
-            <a:off x="130628" y="653143"/>
-            <a:ext cx="11585749" cy="6018962"/>
-          </a:xfrm>
-        </p:spPr>
-        <p:txBody>
-          <a:bodyPr/>
-          <a:lstStyle/>
-          <a:p>
-            <a:r>
-              <a:rPr lang="en-US"/>
-              <a:t>This layout has layout </a:t>
-            </a:r>
-            <a:r>
-              <a:rPr lang="en-US" sz="2400" b="1">
-                <a:solidFill>
-                  <a:srgbClr val="FFFF00"/>
-                </a:solidFill>
-              </a:rPr>
-              <a:t>header and sidebar </a:t>
-            </a:r>
-            <a:r>
-              <a:rPr lang="en-US"/>
-              <a:t>(</a:t>
-            </a:r>
-            <a:r>
-              <a:rPr lang="en-US" err="1"/>
-              <a:t>offcanvas</a:t>
-            </a:r>
-            <a:r>
-              <a:rPr lang="en-US"/>
-              <a:t> sidebar)</a:t>
-            </a:r>
-          </a:p>
-          <a:p>
-            <a:r>
-              <a:rPr lang="en-US"/>
-              <a:t>Create </a:t>
-            </a:r>
-            <a:r>
-              <a:rPr lang="en-US" b="1">
-                <a:solidFill>
-                  <a:srgbClr val="FF0000"/>
-                </a:solidFill>
-              </a:rPr>
-              <a:t>main-layout</a:t>
-            </a:r>
-            <a:r>
-              <a:rPr lang="en-US"/>
-              <a:t> components at app/Layouts folder</a:t>
-            </a:r>
-          </a:p>
-          <a:p>
-            <a:endParaRPr lang="en-US"/>
-          </a:p>
-          <a:p>
-            <a:endParaRPr lang="en-US"/>
-          </a:p>
-        </p:txBody>
-      </p:sp>
-      <p:pic>
-        <p:nvPicPr>
-          <p:cNvPr id="5" name="Picture 4">
-            <a:extLst>
-              <a:ext uri="{FF2B5EF4-FFF2-40B4-BE49-F238E27FC236}">
-                <a16:creationId xmlns:a16="http://schemas.microsoft.com/office/drawing/2014/main" id="{08FA0F56-935A-ABBE-E9A7-72E5F50A7678}"/>
+                <a16:creationId xmlns:a16="http://schemas.microsoft.com/office/drawing/2014/main" id="{123F10A0-9D69-567A-4873-BC0C20B47192}"/>
               </a:ext>
             </a:extLst>
           </p:cNvPr>
           <p:cNvPicPr>
-            <a:picLocks noChangeAspect="1"/>
+            <a:picLocks noGrp="1" noChangeAspect="1"/>
           </p:cNvPicPr>
-          <p:nvPr/>
+          <p:nvPr>
+            <p:ph idx="1"/>
+          </p:nvPr>
         </p:nvPicPr>
         <p:blipFill>
           <a:blip r:embed="rId2"/>
@@ -9727,48 +9419,25 @@
         </p:blipFill>
         <p:spPr>
           <a:xfrm>
-            <a:off x="130628" y="1578743"/>
-            <a:ext cx="4305300" cy="2124075"/>
+            <a:off x="211015" y="927169"/>
+            <a:ext cx="5879661" cy="5789512"/>
           </a:xfrm>
           <a:prstGeom prst="rect">
             <a:avLst/>
           </a:prstGeom>
-        </p:spPr>
-      </p:pic>
-      <p:pic>
-        <p:nvPicPr>
-          <p:cNvPr id="7" name="Picture 6">
-            <a:extLst>
-              <a:ext uri="{FF2B5EF4-FFF2-40B4-BE49-F238E27FC236}">
-                <a16:creationId xmlns:a16="http://schemas.microsoft.com/office/drawing/2014/main" id="{6E9936B2-A3C4-42E4-7F25-02C4852D76E8}"/>
-              </a:ext>
-            </a:extLst>
-          </p:cNvPr>
-          <p:cNvPicPr>
-            <a:picLocks noChangeAspect="1"/>
-          </p:cNvPicPr>
-          <p:nvPr/>
-        </p:nvPicPr>
-        <p:blipFill>
-          <a:blip r:embed="rId3"/>
-          <a:stretch>
-            <a:fillRect/>
-          </a:stretch>
-        </p:blipFill>
-        <p:spPr>
-          <a:xfrm>
-            <a:off x="67724" y="3818111"/>
-            <a:ext cx="11993648" cy="2386746"/>
-          </a:xfrm>
-          <a:prstGeom prst="rect">
-            <a:avLst/>
-          </a:prstGeom>
+          <a:effectLst>
+            <a:outerShdw blurRad="25400" dir="17880000">
+              <a:srgbClr val="000000">
+                <a:alpha val="46000"/>
+              </a:srgbClr>
+            </a:outerShdw>
+          </a:effectLst>
         </p:spPr>
       </p:pic>
     </p:spTree>
     <p:extLst>
       <p:ext uri="{BB962C8B-B14F-4D97-AF65-F5344CB8AC3E}">
-        <p14:creationId xmlns:p14="http://schemas.microsoft.com/office/powerpoint/2010/main" val="1153374815"/>
+        <p14:creationId xmlns:p14="http://schemas.microsoft.com/office/powerpoint/2010/main" val="1275441010"/>
       </p:ext>
     </p:extLst>
   </p:cSld>
@@ -9800,7 +9469,7 @@
           <p:cNvPr id="2" name="Title 1">
             <a:extLst>
               <a:ext uri="{FF2B5EF4-FFF2-40B4-BE49-F238E27FC236}">
-                <a16:creationId xmlns:a16="http://schemas.microsoft.com/office/drawing/2014/main" id="{E28C1D31-DB66-B772-1221-31330DBD652E}"/>
+                <a16:creationId xmlns:a16="http://schemas.microsoft.com/office/drawing/2014/main" id="{025734B3-3F11-7C03-2D92-0B3DB8D4E2B5}"/>
               </a:ext>
             </a:extLst>
           </p:cNvPr>
@@ -9813,19 +9482,23 @@
         </p:nvSpPr>
         <p:spPr>
           <a:xfrm>
-            <a:off x="913795" y="42681"/>
-            <a:ext cx="10353762" cy="620510"/>
+            <a:off x="913795" y="0"/>
+            <a:ext cx="10353762" cy="580103"/>
           </a:xfrm>
         </p:spPr>
         <p:txBody>
           <a:bodyPr>
-            <a:normAutofit/>
+            <a:normAutofit fontScale="90000"/>
           </a:bodyPr>
           <a:lstStyle/>
           <a:p>
             <a:r>
-              <a:rPr lang="en-US" sz="3200" b="1"/>
-              <a:t>Create main layout  (cont.)</a:t>
+              <a:rPr lang="en-US" b="1">
+                <a:solidFill>
+                  <a:srgbClr val="FF0000"/>
+                </a:solidFill>
+              </a:rPr>
+              <a:t>Creating new component</a:t>
             </a:r>
           </a:p>
         </p:txBody>
@@ -9835,7 +9508,7 @@
           <p:cNvPr id="3" name="Content Placeholder 2">
             <a:extLst>
               <a:ext uri="{FF2B5EF4-FFF2-40B4-BE49-F238E27FC236}">
-                <a16:creationId xmlns:a16="http://schemas.microsoft.com/office/drawing/2014/main" id="{AFA2F1B2-E592-5489-A07A-D30131FE95DA}"/>
+                <a16:creationId xmlns:a16="http://schemas.microsoft.com/office/drawing/2014/main" id="{963D2559-9DB4-4235-E157-38E45495D097}"/>
               </a:ext>
             </a:extLst>
           </p:cNvPr>
@@ -9846,24 +9519,79 @@
             <p:ph idx="1"/>
           </p:nvPr>
         </p:nvSpPr>
-        <p:spPr/>
+        <p:spPr>
+          <a:xfrm>
+            <a:off x="432618" y="580103"/>
+            <a:ext cx="11375923" cy="6145162"/>
+          </a:xfrm>
+        </p:spPr>
         <p:txBody>
           <a:bodyPr/>
           <a:lstStyle/>
           <a:p>
-            <a:endParaRPr lang="en-US"/>
-          </a:p>
-          <a:p>
-            <a:endParaRPr lang="en-US"/>
-          </a:p>
-          <a:p>
-            <a:endParaRPr lang="en-US"/>
-          </a:p>
-          <a:p>
-            <a:endParaRPr lang="en-US"/>
-          </a:p>
-          <a:p>
-            <a:endParaRPr lang="en-US"/>
+            <a:r>
+              <a:rPr lang="en-US"/>
+              <a:t>ng g c </a:t>
+            </a:r>
+            <a:r>
+              <a:rPr lang="en-US" err="1"/>
+              <a:t>componentName</a:t>
+            </a:r>
+            <a:r>
+              <a:rPr lang="en-US"/>
+              <a:t> --skip-tests</a:t>
+            </a:r>
+          </a:p>
+          <a:p>
+            <a:r>
+              <a:rPr lang="en-US" b="1">
+                <a:solidFill>
+                  <a:srgbClr val="FF0000"/>
+                </a:solidFill>
+              </a:rPr>
+              <a:t>ng</a:t>
+            </a:r>
+            <a:r>
+              <a:rPr lang="en-US"/>
+              <a:t> g c project-details </a:t>
+            </a:r>
+            <a:r>
+              <a:rPr lang="en-US" b="1">
+                <a:solidFill>
+                  <a:srgbClr val="0070C0"/>
+                </a:solidFill>
+              </a:rPr>
+              <a:t>--skip-tests</a:t>
+            </a:r>
+          </a:p>
+          <a:p>
+            <a:pPr lvl="1"/>
+            <a:r>
+              <a:rPr lang="en-US"/>
+              <a:t>project-details folder will be created and includes</a:t>
+            </a:r>
+          </a:p>
+          <a:p>
+            <a:pPr lvl="2"/>
+            <a:r>
+              <a:rPr lang="en-US" sz="1800" err="1"/>
+              <a:t>ProjectDetails.component.ts</a:t>
+            </a:r>
+            <a:endParaRPr lang="en-US" sz="1800"/>
+          </a:p>
+          <a:p>
+            <a:pPr lvl="2"/>
+            <a:r>
+              <a:rPr lang="en-US" sz="1800"/>
+              <a:t>ProjectDetails.Component.html</a:t>
+            </a:r>
+          </a:p>
+          <a:p>
+            <a:pPr lvl="2"/>
+            <a:r>
+              <a:rPr lang="en-US" sz="1800"/>
+              <a:t>ProjectDetails.Component.css</a:t>
+            </a:r>
           </a:p>
           <a:p>
             <a:endParaRPr lang="en-US"/>
@@ -9884,7 +9612,7 @@
           <p:cNvPr id="5" name="Picture 4">
             <a:extLst>
               <a:ext uri="{FF2B5EF4-FFF2-40B4-BE49-F238E27FC236}">
-                <a16:creationId xmlns:a16="http://schemas.microsoft.com/office/drawing/2014/main" id="{21CF604B-F529-23DE-6DDA-1442997D1CE6}"/>
+                <a16:creationId xmlns:a16="http://schemas.microsoft.com/office/drawing/2014/main" id="{54637D5B-8B8B-98DD-59F9-9474B5F23C4A}"/>
               </a:ext>
             </a:extLst>
           </p:cNvPr>
@@ -9901,8 +9629,8 @@
         </p:blipFill>
         <p:spPr>
           <a:xfrm>
-            <a:off x="401934" y="803868"/>
-            <a:ext cx="11154129" cy="3808325"/>
+            <a:off x="194372" y="3143800"/>
+            <a:ext cx="11729041" cy="1810037"/>
           </a:xfrm>
           <a:prstGeom prst="rect">
             <a:avLst/>
@@ -9912,7 +9640,7 @@
     </p:spTree>
     <p:extLst>
       <p:ext uri="{BB962C8B-B14F-4D97-AF65-F5344CB8AC3E}">
-        <p14:creationId xmlns:p14="http://schemas.microsoft.com/office/powerpoint/2010/main" val="584833622"/>
+        <p14:creationId xmlns:p14="http://schemas.microsoft.com/office/powerpoint/2010/main" val="2534247288"/>
       </p:ext>
     </p:extLst>
   </p:cSld>
@@ -9944,7 +9672,7 @@
           <p:cNvPr id="2" name="Title 1">
             <a:extLst>
               <a:ext uri="{FF2B5EF4-FFF2-40B4-BE49-F238E27FC236}">
-                <a16:creationId xmlns:a16="http://schemas.microsoft.com/office/drawing/2014/main" id="{FC437ED4-E69D-F586-0742-5D562697F98A}"/>
+                <a16:creationId xmlns:a16="http://schemas.microsoft.com/office/drawing/2014/main" id="{EFC4C49B-2F1D-97B3-0A85-352A55AC2ECB}"/>
               </a:ext>
             </a:extLst>
           </p:cNvPr>
@@ -9957,23 +9685,58 @@
         </p:nvSpPr>
         <p:spPr>
           <a:xfrm>
-            <a:off x="919119" y="2231922"/>
-            <a:ext cx="10353762" cy="1837659"/>
-          </a:xfrm>
-        </p:spPr>
-        <p:txBody>
-          <a:bodyPr>
-            <a:normAutofit/>
-          </a:bodyPr>
-          <a:lstStyle/>
-          <a:p>
-            <a:r>
-              <a:rPr lang="en-US" sz="6000" b="1">
-                <a:solidFill>
-                  <a:srgbClr val="FF0000"/>
-                </a:solidFill>
-              </a:rPr>
-              <a:t>Type Script</a:t>
+            <a:off x="913795" y="0"/>
+            <a:ext cx="10353762" cy="747252"/>
+          </a:xfrm>
+        </p:spPr>
+        <p:txBody>
+          <a:bodyPr/>
+          <a:lstStyle/>
+          <a:p>
+            <a:r>
+              <a:rPr lang="en-US" b="1"/>
+              <a:t>Creating side bar</a:t>
+            </a:r>
+          </a:p>
+        </p:txBody>
+      </p:sp>
+      <p:sp>
+        <p:nvSpPr>
+          <p:cNvPr id="3" name="Content Placeholder 2">
+            <a:extLst>
+              <a:ext uri="{FF2B5EF4-FFF2-40B4-BE49-F238E27FC236}">
+                <a16:creationId xmlns:a16="http://schemas.microsoft.com/office/drawing/2014/main" id="{6616EB86-5D99-4E2C-2247-FA4A7724D22A}"/>
+              </a:ext>
+            </a:extLst>
+          </p:cNvPr>
+          <p:cNvSpPr>
+            <a:spLocks noGrp="1"/>
+          </p:cNvSpPr>
+          <p:nvPr>
+            <p:ph idx="1"/>
+          </p:nvPr>
+        </p:nvSpPr>
+        <p:spPr>
+          <a:xfrm>
+            <a:off x="285134" y="747253"/>
+            <a:ext cx="11464413" cy="5702708"/>
+          </a:xfrm>
+        </p:spPr>
+        <p:txBody>
+          <a:bodyPr/>
+          <a:lstStyle/>
+          <a:p>
+            <a:r>
+              <a:rPr lang="en-US"/>
+              <a:t>ng g c </a:t>
+            </a:r>
+            <a:r>
+              <a:rPr lang="en-US" err="1"/>
+              <a:t>SideBar</a:t>
+            </a:r>
+            <a:r>
+              <a:rPr lang="en-US"/>
+              <a:t> --skip-tests</a:t>
             </a:r>
           </a:p>
         </p:txBody>
@@ -9981,7 +9744,7 @@
     </p:spTree>
     <p:extLst>
       <p:ext uri="{BB962C8B-B14F-4D97-AF65-F5344CB8AC3E}">
-        <p14:creationId xmlns:p14="http://schemas.microsoft.com/office/powerpoint/2010/main" val="385122793"/>
+        <p14:creationId xmlns:p14="http://schemas.microsoft.com/office/powerpoint/2010/main" val="898701421"/>
       </p:ext>
     </p:extLst>
   </p:cSld>
@@ -10013,7 +9776,7 @@
           <p:cNvPr id="2" name="Title 1">
             <a:extLst>
               <a:ext uri="{FF2B5EF4-FFF2-40B4-BE49-F238E27FC236}">
-                <a16:creationId xmlns:a16="http://schemas.microsoft.com/office/drawing/2014/main" id="{D22BD241-91BC-982E-E8D8-DA059E13C029}"/>
+                <a16:creationId xmlns:a16="http://schemas.microsoft.com/office/drawing/2014/main" id="{8778D13E-4D03-33C1-BF51-610117BB7EB3}"/>
               </a:ext>
             </a:extLst>
           </p:cNvPr>
@@ -10027,18 +9790,20 @@
         <p:spPr>
           <a:xfrm>
             <a:off x="913795" y="0"/>
-            <a:ext cx="10353762" cy="544310"/>
-          </a:xfrm>
-        </p:spPr>
-        <p:txBody>
-          <a:bodyPr>
-            <a:noAutofit/>
-          </a:bodyPr>
-          <a:lstStyle/>
-          <a:p>
-            <a:r>
-              <a:rPr lang="en-US" sz="3200"/>
-              <a:t>Layout [cont.]</a:t>
+            <a:ext cx="10353762" cy="737419"/>
+          </a:xfrm>
+        </p:spPr>
+        <p:txBody>
+          <a:bodyPr/>
+          <a:lstStyle/>
+          <a:p>
+            <a:r>
+              <a:rPr lang="en-US" b="1">
+                <a:solidFill>
+                  <a:srgbClr val="0070C0"/>
+                </a:solidFill>
+              </a:rPr>
+              <a:t>Adding bootstrap &amp; Bootstrap icon</a:t>
             </a:r>
           </a:p>
         </p:txBody>
@@ -10048,7 +9813,7 @@
           <p:cNvPr id="3" name="Content Placeholder 2">
             <a:extLst>
               <a:ext uri="{FF2B5EF4-FFF2-40B4-BE49-F238E27FC236}">
-                <a16:creationId xmlns:a16="http://schemas.microsoft.com/office/drawing/2014/main" id="{F60292FF-FB71-EABA-22C8-49723B52D012}"/>
+                <a16:creationId xmlns:a16="http://schemas.microsoft.com/office/drawing/2014/main" id="{5C9C21FE-7EFF-39B9-60D6-6206D8DBF34A}"/>
               </a:ext>
             </a:extLst>
           </p:cNvPr>
@@ -10061,124 +9826,270 @@
         </p:nvSpPr>
         <p:spPr>
           <a:xfrm>
-            <a:off x="913795" y="544310"/>
-            <a:ext cx="10353762" cy="5246891"/>
-          </a:xfrm>
-        </p:spPr>
-        <p:txBody>
-          <a:bodyPr/>
-          <a:lstStyle/>
-          <a:p>
-            <a:r>
-              <a:rPr lang="en-US"/>
-              <a:t>Create sidebar component at components folder</a:t>
-            </a:r>
-          </a:p>
-          <a:p>
-            <a:endParaRPr lang="en-US"/>
-          </a:p>
-          <a:p>
-            <a:endParaRPr lang="en-US"/>
-          </a:p>
-          <a:p>
-            <a:endParaRPr lang="en-US"/>
-          </a:p>
-        </p:txBody>
-      </p:sp>
-      <p:pic>
-        <p:nvPicPr>
-          <p:cNvPr id="5" name="Picture 4">
-            <a:extLst>
-              <a:ext uri="{FF2B5EF4-FFF2-40B4-BE49-F238E27FC236}">
-                <a16:creationId xmlns:a16="http://schemas.microsoft.com/office/drawing/2014/main" id="{5FEC7977-8DB6-5D26-4E6F-029EB9313555}"/>
-              </a:ext>
-            </a:extLst>
-          </p:cNvPr>
-          <p:cNvPicPr>
-            <a:picLocks noChangeAspect="1"/>
-          </p:cNvPicPr>
-          <p:nvPr/>
-        </p:nvPicPr>
-        <p:blipFill>
-          <a:blip r:embed="rId2"/>
-          <a:stretch>
-            <a:fillRect/>
-          </a:stretch>
-        </p:blipFill>
-        <p:spPr>
-          <a:xfrm>
-            <a:off x="0" y="968827"/>
-            <a:ext cx="7332109" cy="3844334"/>
-          </a:xfrm>
-          <a:prstGeom prst="rect">
-            <a:avLst/>
-          </a:prstGeom>
-        </p:spPr>
-      </p:pic>
-      <p:pic>
-        <p:nvPicPr>
-          <p:cNvPr id="7" name="Picture 6">
-            <a:extLst>
-              <a:ext uri="{FF2B5EF4-FFF2-40B4-BE49-F238E27FC236}">
-                <a16:creationId xmlns:a16="http://schemas.microsoft.com/office/drawing/2014/main" id="{97B2557A-5613-A7A6-6167-C88E6497C3C4}"/>
-              </a:ext>
-            </a:extLst>
-          </p:cNvPr>
-          <p:cNvPicPr>
-            <a:picLocks noChangeAspect="1"/>
-          </p:cNvPicPr>
-          <p:nvPr/>
-        </p:nvPicPr>
-        <p:blipFill>
-          <a:blip r:embed="rId3"/>
-          <a:stretch>
-            <a:fillRect/>
-          </a:stretch>
-        </p:blipFill>
-        <p:spPr>
-          <a:xfrm>
-            <a:off x="7332109" y="798004"/>
-            <a:ext cx="4774377" cy="3752248"/>
-          </a:xfrm>
-          <a:prstGeom prst="rect">
-            <a:avLst/>
-          </a:prstGeom>
-        </p:spPr>
-      </p:pic>
-      <p:pic>
-        <p:nvPicPr>
-          <p:cNvPr id="9" name="Picture 8">
-            <a:extLst>
-              <a:ext uri="{FF2B5EF4-FFF2-40B4-BE49-F238E27FC236}">
-                <a16:creationId xmlns:a16="http://schemas.microsoft.com/office/drawing/2014/main" id="{F5B8091C-F973-69E1-483C-A812643E422E}"/>
-              </a:ext>
-            </a:extLst>
-          </p:cNvPr>
-          <p:cNvPicPr>
-            <a:picLocks noChangeAspect="1"/>
-          </p:cNvPicPr>
-          <p:nvPr/>
-        </p:nvPicPr>
-        <p:blipFill>
-          <a:blip r:embed="rId4"/>
-          <a:stretch>
-            <a:fillRect/>
-          </a:stretch>
-        </p:blipFill>
-        <p:spPr>
-          <a:xfrm>
-            <a:off x="1750245" y="4813093"/>
-            <a:ext cx="4158186" cy="1956215"/>
-          </a:xfrm>
-          <a:prstGeom prst="rect">
-            <a:avLst/>
-          </a:prstGeom>
-        </p:spPr>
-      </p:pic>
+            <a:off x="334296" y="737419"/>
+            <a:ext cx="11472517" cy="5456904"/>
+          </a:xfrm>
+        </p:spPr>
+        <p:txBody>
+          <a:bodyPr>
+            <a:normAutofit/>
+          </a:bodyPr>
+          <a:lstStyle/>
+          <a:p>
+            <a:r>
+              <a:rPr lang="en-US" sz="1800" b="1">
+                <a:solidFill>
+                  <a:srgbClr val="FFFF00"/>
+                </a:solidFill>
+              </a:rPr>
+              <a:t>ng</a:t>
+            </a:r>
+            <a:r>
+              <a:rPr lang="en-US" sz="1800"/>
+              <a:t> </a:t>
+            </a:r>
+            <a:r>
+              <a:rPr lang="en-US" sz="1800" b="1">
+                <a:solidFill>
+                  <a:srgbClr val="00B0F0"/>
+                </a:solidFill>
+              </a:rPr>
+              <a:t>add</a:t>
+            </a:r>
+            <a:r>
+              <a:rPr lang="en-US" sz="1800"/>
+              <a:t> </a:t>
+            </a:r>
+            <a:r>
+              <a:rPr lang="en-US" sz="1800" b="1">
+                <a:solidFill>
+                  <a:srgbClr val="00B050"/>
+                </a:solidFill>
+              </a:rPr>
+              <a:t>@ng-bootstrap/ng-bootstrap</a:t>
+            </a:r>
+            <a:r>
+              <a:rPr lang="en-US" sz="1800"/>
+              <a:t>  //</a:t>
+            </a:r>
+            <a:r>
+              <a:rPr lang="en-US" sz="1800" b="1"/>
+              <a:t>recommended, to use the component that need the JS code</a:t>
+            </a:r>
+          </a:p>
+          <a:p>
+            <a:r>
+              <a:rPr lang="en-US" sz="1800" b="1" err="1">
+                <a:solidFill>
+                  <a:srgbClr val="FFFF00"/>
+                </a:solidFill>
+              </a:rPr>
+              <a:t>npm</a:t>
+            </a:r>
+            <a:r>
+              <a:rPr lang="en-US" sz="1800" b="1"/>
+              <a:t> </a:t>
+            </a:r>
+            <a:r>
+              <a:rPr lang="en-US" sz="1800" b="1" err="1"/>
+              <a:t>i</a:t>
+            </a:r>
+            <a:r>
+              <a:rPr lang="en-US" sz="1800" b="1"/>
+              <a:t> @ng-bootstrap/ng-bootstrap  // like the above</a:t>
+            </a:r>
+          </a:p>
+          <a:p>
+            <a:r>
+              <a:rPr lang="en-US" sz="1800" b="1"/>
+              <a:t>at </a:t>
+            </a:r>
+            <a:r>
+              <a:rPr lang="en-US" sz="1800" b="1" err="1"/>
+              <a:t>angular.json</a:t>
+            </a:r>
+            <a:r>
+              <a:rPr lang="en-US" sz="1800" b="1"/>
+              <a:t> / at architect object / build object / options object</a:t>
+            </a:r>
+          </a:p>
+          <a:p>
+            <a:pPr lvl="1"/>
+            <a:r>
+              <a:rPr lang="en-US" b="1">
+                <a:solidFill>
+                  <a:srgbClr val="00B0F0"/>
+                </a:solidFill>
+              </a:rPr>
+              <a:t>at styles array</a:t>
+            </a:r>
+            <a:r>
+              <a:rPr lang="en-US" b="1"/>
+              <a:t>    -- "</a:t>
+            </a:r>
+            <a:r>
+              <a:rPr lang="en-US" b="1" err="1"/>
+              <a:t>node_modules</a:t>
+            </a:r>
+            <a:r>
+              <a:rPr lang="en-US" b="1"/>
+              <a:t>/bootstrap/</a:t>
+            </a:r>
+            <a:r>
+              <a:rPr lang="en-US" b="1" err="1"/>
+              <a:t>dist</a:t>
+            </a:r>
+            <a:r>
+              <a:rPr lang="en-US" b="1"/>
+              <a:t>/</a:t>
+            </a:r>
+            <a:r>
+              <a:rPr lang="en-US" b="1" err="1"/>
+              <a:t>css</a:t>
+            </a:r>
+            <a:r>
+              <a:rPr lang="en-US" b="1"/>
+              <a:t>/bootstrap.min.css",        // bootstrap CSS file</a:t>
+            </a:r>
+          </a:p>
+          <a:p>
+            <a:pPr lvl="1"/>
+            <a:r>
+              <a:rPr lang="en-US" b="1">
+                <a:solidFill>
+                  <a:srgbClr val="00B0F0"/>
+                </a:solidFill>
+              </a:rPr>
+              <a:t>at scripts array</a:t>
+            </a:r>
+            <a:r>
+              <a:rPr lang="en-US" b="1"/>
+              <a:t>  -- "</a:t>
+            </a:r>
+            <a:r>
+              <a:rPr lang="en-US" b="1" err="1"/>
+              <a:t>node_modules</a:t>
+            </a:r>
+            <a:r>
+              <a:rPr lang="en-US" b="1"/>
+              <a:t>/bootstrap/</a:t>
+            </a:r>
+            <a:r>
+              <a:rPr lang="en-US" b="1" err="1"/>
+              <a:t>dist</a:t>
+            </a:r>
+            <a:r>
+              <a:rPr lang="en-US" b="1"/>
+              <a:t>/</a:t>
+            </a:r>
+            <a:r>
+              <a:rPr lang="en-US" b="1" err="1"/>
+              <a:t>js</a:t>
+            </a:r>
+            <a:r>
+              <a:rPr lang="en-US" b="1"/>
+              <a:t>/bootstrap.bundle.min.js"  // bootstrap JS file</a:t>
+            </a:r>
+          </a:p>
+          <a:p>
+            <a:r>
+              <a:rPr lang="en-US" sz="1800" b="1"/>
+              <a:t>For angular 17 , ng-bootstrap 16</a:t>
+            </a:r>
+            <a:r>
+              <a:rPr lang="en-US" sz="1800"/>
+              <a:t> → Stable</a:t>
+            </a:r>
+          </a:p>
+          <a:p>
+            <a:pPr lvl="1"/>
+            <a:r>
+              <a:rPr lang="en-US" b="1" err="1">
+                <a:solidFill>
+                  <a:srgbClr val="FFFF00"/>
+                </a:solidFill>
+              </a:rPr>
+              <a:t>npm</a:t>
+            </a:r>
+            <a:r>
+              <a:rPr lang="en-US" b="1"/>
+              <a:t> </a:t>
+            </a:r>
+            <a:r>
+              <a:rPr lang="en-US" b="1" err="1"/>
+              <a:t>i</a:t>
+            </a:r>
+            <a:r>
+              <a:rPr lang="en-US" b="1"/>
+              <a:t> @ng-bootstrap/ng-bootstrap</a:t>
+            </a:r>
+          </a:p>
+          <a:p>
+            <a:r>
+              <a:rPr lang="en-US" sz="1800" b="1" err="1">
+                <a:solidFill>
+                  <a:srgbClr val="FFFF00"/>
+                </a:solidFill>
+              </a:rPr>
+              <a:t>npm</a:t>
+            </a:r>
+            <a:r>
+              <a:rPr lang="en-US" sz="1800" b="1"/>
+              <a:t> </a:t>
+            </a:r>
+            <a:r>
+              <a:rPr lang="en-US" sz="1800" b="1" err="1"/>
+              <a:t>i</a:t>
+            </a:r>
+            <a:r>
+              <a:rPr lang="en-US" sz="1800" b="1"/>
+              <a:t> </a:t>
+            </a:r>
+            <a:r>
+              <a:rPr lang="en-US" sz="1800" b="1">
+                <a:solidFill>
+                  <a:srgbClr val="00B050"/>
+                </a:solidFill>
+              </a:rPr>
+              <a:t>bootstrap-icons</a:t>
+            </a:r>
+          </a:p>
+          <a:p>
+            <a:pPr lvl="1"/>
+            <a:r>
+              <a:rPr lang="en-US" b="1">
+                <a:solidFill>
+                  <a:srgbClr val="00B0F0"/>
+                </a:solidFill>
+              </a:rPr>
+              <a:t>at style array</a:t>
+            </a:r>
+            <a:r>
+              <a:rPr lang="en-US" b="1"/>
+              <a:t> "</a:t>
+            </a:r>
+            <a:r>
+              <a:rPr lang="en-US" b="1" err="1"/>
+              <a:t>node_modules</a:t>
+            </a:r>
+            <a:r>
+              <a:rPr lang="en-US" b="1"/>
+              <a:t>/bootstrap-icons/font/bootstrap-icons.min.css"</a:t>
+            </a:r>
+          </a:p>
+          <a:p>
+            <a:pPr lvl="1"/>
+            <a:endParaRPr lang="en-US" sz="1600" b="1"/>
+          </a:p>
+          <a:p>
+            <a:endParaRPr lang="en-US" sz="1800" b="1"/>
+          </a:p>
+        </p:txBody>
+      </p:sp>
     </p:spTree>
     <p:extLst>
       <p:ext uri="{BB962C8B-B14F-4D97-AF65-F5344CB8AC3E}">
-        <p14:creationId xmlns:p14="http://schemas.microsoft.com/office/powerpoint/2010/main" val="3498281297"/>
+        <p14:creationId xmlns:p14="http://schemas.microsoft.com/office/powerpoint/2010/main" val="2094939905"/>
       </p:ext>
     </p:extLst>
   </p:cSld>
@@ -10210,7 +10121,7 @@
           <p:cNvPr id="2" name="Title 1">
             <a:extLst>
               <a:ext uri="{FF2B5EF4-FFF2-40B4-BE49-F238E27FC236}">
-                <a16:creationId xmlns:a16="http://schemas.microsoft.com/office/drawing/2014/main" id="{3F7DC102-74D5-6A5A-C16F-A6633D668E11}"/>
+                <a16:creationId xmlns:a16="http://schemas.microsoft.com/office/drawing/2014/main" id="{7DA78EBE-03FD-D8DE-35CF-1926B0CA385E}"/>
               </a:ext>
             </a:extLst>
           </p:cNvPr>
@@ -10224,7 +10135,7 @@
         <p:spPr>
           <a:xfrm>
             <a:off x="913795" y="0"/>
-            <a:ext cx="10353762" cy="668594"/>
+            <a:ext cx="10353762" cy="688258"/>
           </a:xfrm>
         </p:spPr>
         <p:txBody>
@@ -10235,17 +10146,17 @@
           <a:p>
             <a:r>
               <a:rPr lang="en-US" b="1"/>
-              <a:t>Enum</a:t>
-            </a:r>
-          </a:p>
-        </p:txBody>
-      </p:sp>
-      <p:sp>
-        <p:nvSpPr>
-          <p:cNvPr id="9" name="Content Placeholder 8">
+              <a:t>Addin CSS file globally</a:t>
+            </a:r>
+          </a:p>
+        </p:txBody>
+      </p:sp>
+      <p:sp>
+        <p:nvSpPr>
+          <p:cNvPr id="3" name="Content Placeholder 2">
             <a:extLst>
               <a:ext uri="{FF2B5EF4-FFF2-40B4-BE49-F238E27FC236}">
-                <a16:creationId xmlns:a16="http://schemas.microsoft.com/office/drawing/2014/main" id="{4C153522-2A32-E7A7-CA2E-3619FCE51951}"/>
+                <a16:creationId xmlns:a16="http://schemas.microsoft.com/office/drawing/2014/main" id="{0BA55FB4-19F2-A5D7-3E15-C94C5CEB2E1C}"/>
               </a:ext>
             </a:extLst>
           </p:cNvPr>
@@ -10258,43 +10169,296 @@
         </p:nvSpPr>
         <p:spPr>
           <a:xfrm>
-            <a:off x="287093" y="3437700"/>
-            <a:ext cx="11314972" cy="1153969"/>
+            <a:off x="160774" y="688258"/>
+            <a:ext cx="11887200" cy="5938683"/>
+          </a:xfrm>
+        </p:spPr>
+        <p:txBody>
+          <a:bodyPr/>
+          <a:lstStyle/>
+          <a:p>
+            <a:r>
+              <a:rPr lang="en-US"/>
+              <a:t>at </a:t>
+            </a:r>
+            <a:r>
+              <a:rPr lang="en-US" err="1"/>
+              <a:t>src</a:t>
+            </a:r>
+            <a:r>
+              <a:rPr lang="en-US"/>
+              <a:t> folder / </a:t>
+            </a:r>
+            <a:r>
+              <a:rPr lang="en-US" err="1"/>
+              <a:t>css</a:t>
+            </a:r>
+            <a:r>
+              <a:rPr lang="en-US"/>
+              <a:t> folder / css-extensions.css</a:t>
+            </a:r>
+          </a:p>
+          <a:p>
+            <a:r>
+              <a:rPr lang="en-US" b="1"/>
+              <a:t>at </a:t>
+            </a:r>
+            <a:r>
+              <a:rPr lang="en-US" b="1" err="1"/>
+              <a:t>angular.json</a:t>
+            </a:r>
+            <a:r>
+              <a:rPr lang="en-US" b="1"/>
+              <a:t> / at architect object / build object / options object</a:t>
+            </a:r>
+            <a:endParaRPr lang="en-US"/>
+          </a:p>
+          <a:p>
+            <a:pPr lvl="1"/>
+            <a:r>
+              <a:rPr lang="en-US" b="1">
+                <a:solidFill>
+                  <a:srgbClr val="00B0F0"/>
+                </a:solidFill>
+              </a:rPr>
+              <a:t>at styles array</a:t>
+            </a:r>
+            <a:r>
+              <a:rPr lang="en-US" b="1"/>
+              <a:t>    --- </a:t>
+            </a:r>
+            <a:r>
+              <a:rPr lang="en-US">
+                <a:effectLst/>
+              </a:rPr>
+              <a:t>"</a:t>
+            </a:r>
+            <a:r>
+              <a:rPr lang="en-US" err="1">
+                <a:effectLst/>
+              </a:rPr>
+              <a:t>src</a:t>
+            </a:r>
+            <a:r>
+              <a:rPr lang="en-US">
+                <a:effectLst/>
+              </a:rPr>
+              <a:t>/</a:t>
+            </a:r>
+            <a:r>
+              <a:rPr lang="en-US" err="1">
+                <a:effectLst/>
+              </a:rPr>
+              <a:t>css</a:t>
+            </a:r>
+            <a:r>
+              <a:rPr lang="en-US">
+                <a:effectLst/>
+              </a:rPr>
+              <a:t>/css-extension.css"</a:t>
+            </a:r>
+          </a:p>
+          <a:p>
+            <a:r>
+              <a:rPr lang="en-US"/>
+              <a:t>Adding styles via </a:t>
+            </a:r>
+            <a:r>
+              <a:rPr lang="en-US" b="1" err="1">
+                <a:effectLst/>
+              </a:rPr>
+              <a:t>angular.json</a:t>
+            </a:r>
+            <a:r>
+              <a:rPr lang="en-US">
+                <a:effectLst/>
+              </a:rPr>
+              <a:t> is generally faster and more reliable for your application's initial load and overall stability compared to using an external CDN link in index.html</a:t>
+            </a:r>
+          </a:p>
+          <a:p>
+            <a:r>
+              <a:rPr lang="en-US" b="1">
+                <a:effectLst/>
+              </a:rPr>
+              <a:t>Why angular.json is usually faster</a:t>
+            </a:r>
+          </a:p>
+          <a:p>
+            <a:pPr lvl="1"/>
+            <a:r>
+              <a:rPr lang="en-US" b="1">
+                <a:effectLst/>
+              </a:rPr>
+              <a:t>Reduced HTTP Requests</a:t>
+            </a:r>
+            <a:r>
+              <a:rPr lang="en-US">
+                <a:effectLst/>
+              </a:rPr>
+              <a:t>: When you add files to angular.json, the Angular CLI bundles them into a single (or few) minified CSS files. The browser makes one request for your styles instead of multiple separate requests to different servers.</a:t>
+            </a:r>
+          </a:p>
+          <a:p>
+            <a:endParaRPr lang="en-US" b="1">
+              <a:effectLst/>
+            </a:endParaRPr>
+          </a:p>
+          <a:p>
+            <a:endParaRPr lang="en-US" b="1">
+              <a:effectLst/>
+            </a:endParaRPr>
+          </a:p>
+        </p:txBody>
+      </p:sp>
+    </p:spTree>
+    <p:extLst>
+      <p:ext uri="{BB962C8B-B14F-4D97-AF65-F5344CB8AC3E}">
+        <p14:creationId xmlns:p14="http://schemas.microsoft.com/office/powerpoint/2010/main" val="2733366995"/>
+      </p:ext>
+    </p:extLst>
+  </p:cSld>
+  <p:clrMapOvr>
+    <a:masterClrMapping/>
+  </p:clrMapOvr>
+</p:sld>
+</file>
+
+<file path=ppt/slides/slide35.xml><?xml version="1.0" encoding="utf-8"?>
+<p:sld xmlns:a="http://schemas.openxmlformats.org/drawingml/2006/main" xmlns:r="http://schemas.openxmlformats.org/officeDocument/2006/relationships" xmlns:p="http://schemas.openxmlformats.org/presentationml/2006/main">
+  <p:cSld>
+    <p:spTree>
+      <p:nvGrpSpPr>
+        <p:cNvPr id="1" name=""/>
+        <p:cNvGrpSpPr/>
+        <p:nvPr/>
+      </p:nvGrpSpPr>
+      <p:grpSpPr>
+        <a:xfrm>
+          <a:off x="0" y="0"/>
+          <a:ext cx="0" cy="0"/>
+          <a:chOff x="0" y="0"/>
+          <a:chExt cx="0" cy="0"/>
+        </a:xfrm>
+      </p:grpSpPr>
+      <p:sp>
+        <p:nvSpPr>
+          <p:cNvPr id="2" name="Title 1">
+            <a:extLst>
+              <a:ext uri="{FF2B5EF4-FFF2-40B4-BE49-F238E27FC236}">
+                <a16:creationId xmlns:a16="http://schemas.microsoft.com/office/drawing/2014/main" id="{02620882-3A74-F22D-A1A0-0891F4397F2A}"/>
+              </a:ext>
+            </a:extLst>
+          </p:cNvPr>
+          <p:cNvSpPr>
+            <a:spLocks noGrp="1"/>
+          </p:cNvSpPr>
+          <p:nvPr>
+            <p:ph type="title"/>
+          </p:nvPr>
+        </p:nvSpPr>
+        <p:spPr>
+          <a:xfrm>
+            <a:off x="913795" y="0"/>
+            <a:ext cx="10353762" cy="653143"/>
           </a:xfrm>
         </p:spPr>
         <p:txBody>
           <a:bodyPr>
-            <a:normAutofit lnSpcReduction="10000"/>
+            <a:normAutofit fontScale="90000"/>
           </a:bodyPr>
           <a:lstStyle/>
           <a:p>
             <a:r>
               <a:rPr lang="en-US"/>
-              <a:t>note : Enums in TypeScript are technically objects where :</a:t>
-            </a:r>
-          </a:p>
-          <a:p>
-            <a:pPr lvl="1"/>
-            <a:r>
-              <a:rPr lang="en-US"/>
-              <a:t>Keys are strings.</a:t>
-            </a:r>
-          </a:p>
-          <a:p>
-            <a:pPr lvl="1"/>
-            <a:r>
-              <a:rPr lang="en-US"/>
-              <a:t>Values are numbers (if it's a numeric Enum) or strings (if it's a string Enum).</a:t>
-            </a:r>
+              <a:t>Create main layout </a:t>
+            </a:r>
+          </a:p>
+        </p:txBody>
+      </p:sp>
+      <p:sp>
+        <p:nvSpPr>
+          <p:cNvPr id="3" name="Content Placeholder 2">
+            <a:extLst>
+              <a:ext uri="{FF2B5EF4-FFF2-40B4-BE49-F238E27FC236}">
+                <a16:creationId xmlns:a16="http://schemas.microsoft.com/office/drawing/2014/main" id="{BF57AF94-85B5-5DEF-7C1D-6E5E758EEBC3}"/>
+              </a:ext>
+            </a:extLst>
+          </p:cNvPr>
+          <p:cNvSpPr>
+            <a:spLocks noGrp="1"/>
+          </p:cNvSpPr>
+          <p:nvPr>
+            <p:ph idx="1"/>
+          </p:nvPr>
+        </p:nvSpPr>
+        <p:spPr>
+          <a:xfrm>
+            <a:off x="130628" y="653143"/>
+            <a:ext cx="11585749" cy="6018962"/>
+          </a:xfrm>
+        </p:spPr>
+        <p:txBody>
+          <a:bodyPr/>
+          <a:lstStyle/>
+          <a:p>
+            <a:r>
+              <a:rPr lang="en-US"/>
+              <a:t>This layout has layout </a:t>
+            </a:r>
+            <a:r>
+              <a:rPr lang="en-US" sz="2400" b="1">
+                <a:solidFill>
+                  <a:srgbClr val="FFFF00"/>
+                </a:solidFill>
+              </a:rPr>
+              <a:t>header and sidebar </a:t>
+            </a:r>
+            <a:r>
+              <a:rPr lang="en-US"/>
+              <a:t>(</a:t>
+            </a:r>
+            <a:r>
+              <a:rPr lang="en-US" err="1"/>
+              <a:t>offcanvas</a:t>
+            </a:r>
+            <a:r>
+              <a:rPr lang="en-US"/>
+              <a:t> sidebar)</a:t>
+            </a:r>
+          </a:p>
+          <a:p>
+            <a:r>
+              <a:rPr lang="en-US"/>
+              <a:t>Create </a:t>
+            </a:r>
+            <a:r>
+              <a:rPr lang="en-US" b="1">
+                <a:solidFill>
+                  <a:srgbClr val="FF0000"/>
+                </a:solidFill>
+              </a:rPr>
+              <a:t>main-layout</a:t>
+            </a:r>
+            <a:r>
+              <a:rPr lang="en-US"/>
+              <a:t> components at app/Layouts folder</a:t>
+            </a:r>
+          </a:p>
+          <a:p>
+            <a:endParaRPr lang="en-US"/>
+          </a:p>
+          <a:p>
+            <a:endParaRPr lang="en-US"/>
           </a:p>
         </p:txBody>
       </p:sp>
       <p:pic>
         <p:nvPicPr>
-          <p:cNvPr id="10" name="Content Placeholder 4">
+          <p:cNvPr id="5" name="Picture 4">
             <a:extLst>
               <a:ext uri="{FF2B5EF4-FFF2-40B4-BE49-F238E27FC236}">
-                <a16:creationId xmlns:a16="http://schemas.microsoft.com/office/drawing/2014/main" id="{468FE5B5-EF94-C9D7-A34B-FF927FCCAD9C}"/>
+                <a16:creationId xmlns:a16="http://schemas.microsoft.com/office/drawing/2014/main" id="{08FA0F56-935A-ABBE-E9A7-72E5F50A7678}"/>
               </a:ext>
             </a:extLst>
           </p:cNvPr>
@@ -10311,27 +10475,20 @@
         </p:blipFill>
         <p:spPr>
           <a:xfrm>
-            <a:off x="287093" y="334297"/>
-            <a:ext cx="3141593" cy="1565000"/>
+            <a:off x="130628" y="1578743"/>
+            <a:ext cx="4305300" cy="2124075"/>
           </a:xfrm>
           <a:prstGeom prst="rect">
             <a:avLst/>
           </a:prstGeom>
-          <a:effectLst>
-            <a:outerShdw blurRad="25400" dir="17880000">
-              <a:srgbClr val="000000">
-                <a:alpha val="46000"/>
-              </a:srgbClr>
-            </a:outerShdw>
-          </a:effectLst>
         </p:spPr>
       </p:pic>
       <p:pic>
         <p:nvPicPr>
-          <p:cNvPr id="11" name="Picture 10">
+          <p:cNvPr id="7" name="Picture 6">
             <a:extLst>
               <a:ext uri="{FF2B5EF4-FFF2-40B4-BE49-F238E27FC236}">
-                <a16:creationId xmlns:a16="http://schemas.microsoft.com/office/drawing/2014/main" id="{353EC381-3C7D-477D-7149-FEB84B36FF97}"/>
+                <a16:creationId xmlns:a16="http://schemas.microsoft.com/office/drawing/2014/main" id="{6E9936B2-A3C4-42E4-7F25-02C4852D76E8}"/>
               </a:ext>
             </a:extLst>
           </p:cNvPr>
@@ -10348,20 +10505,134 @@
         </p:blipFill>
         <p:spPr>
           <a:xfrm>
-            <a:off x="287093" y="2126682"/>
-            <a:ext cx="11019572" cy="1267447"/>
+            <a:off x="67724" y="3818111"/>
+            <a:ext cx="11993648" cy="2386746"/>
           </a:xfrm>
           <a:prstGeom prst="rect">
             <a:avLst/>
           </a:prstGeom>
         </p:spPr>
       </p:pic>
+    </p:spTree>
+    <p:extLst>
+      <p:ext uri="{BB962C8B-B14F-4D97-AF65-F5344CB8AC3E}">
+        <p14:creationId xmlns:p14="http://schemas.microsoft.com/office/powerpoint/2010/main" val="1153374815"/>
+      </p:ext>
+    </p:extLst>
+  </p:cSld>
+  <p:clrMapOvr>
+    <a:masterClrMapping/>
+  </p:clrMapOvr>
+</p:sld>
+</file>
+
+<file path=ppt/slides/slide36.xml><?xml version="1.0" encoding="utf-8"?>
+<p:sld xmlns:a="http://schemas.openxmlformats.org/drawingml/2006/main" xmlns:r="http://schemas.openxmlformats.org/officeDocument/2006/relationships" xmlns:p="http://schemas.openxmlformats.org/presentationml/2006/main">
+  <p:cSld>
+    <p:spTree>
+      <p:nvGrpSpPr>
+        <p:cNvPr id="1" name=""/>
+        <p:cNvGrpSpPr/>
+        <p:nvPr/>
+      </p:nvGrpSpPr>
+      <p:grpSpPr>
+        <a:xfrm>
+          <a:off x="0" y="0"/>
+          <a:ext cx="0" cy="0"/>
+          <a:chOff x="0" y="0"/>
+          <a:chExt cx="0" cy="0"/>
+        </a:xfrm>
+      </p:grpSpPr>
+      <p:sp>
+        <p:nvSpPr>
+          <p:cNvPr id="2" name="Title 1">
+            <a:extLst>
+              <a:ext uri="{FF2B5EF4-FFF2-40B4-BE49-F238E27FC236}">
+                <a16:creationId xmlns:a16="http://schemas.microsoft.com/office/drawing/2014/main" id="{E28C1D31-DB66-B772-1221-31330DBD652E}"/>
+              </a:ext>
+            </a:extLst>
+          </p:cNvPr>
+          <p:cNvSpPr>
+            <a:spLocks noGrp="1"/>
+          </p:cNvSpPr>
+          <p:nvPr>
+            <p:ph type="title"/>
+          </p:nvPr>
+        </p:nvSpPr>
+        <p:spPr>
+          <a:xfrm>
+            <a:off x="913795" y="42681"/>
+            <a:ext cx="10353762" cy="620510"/>
+          </a:xfrm>
+        </p:spPr>
+        <p:txBody>
+          <a:bodyPr>
+            <a:normAutofit/>
+          </a:bodyPr>
+          <a:lstStyle/>
+          <a:p>
+            <a:r>
+              <a:rPr lang="en-US" sz="3200" b="1"/>
+              <a:t>Create main layout  (cont.)</a:t>
+            </a:r>
+          </a:p>
+        </p:txBody>
+      </p:sp>
+      <p:sp>
+        <p:nvSpPr>
+          <p:cNvPr id="3" name="Content Placeholder 2">
+            <a:extLst>
+              <a:ext uri="{FF2B5EF4-FFF2-40B4-BE49-F238E27FC236}">
+                <a16:creationId xmlns:a16="http://schemas.microsoft.com/office/drawing/2014/main" id="{AFA2F1B2-E592-5489-A07A-D30131FE95DA}"/>
+              </a:ext>
+            </a:extLst>
+          </p:cNvPr>
+          <p:cNvSpPr>
+            <a:spLocks noGrp="1"/>
+          </p:cNvSpPr>
+          <p:nvPr>
+            <p:ph idx="1"/>
+          </p:nvPr>
+        </p:nvSpPr>
+        <p:spPr/>
+        <p:txBody>
+          <a:bodyPr/>
+          <a:lstStyle/>
+          <a:p>
+            <a:endParaRPr lang="en-US"/>
+          </a:p>
+          <a:p>
+            <a:endParaRPr lang="en-US"/>
+          </a:p>
+          <a:p>
+            <a:endParaRPr lang="en-US"/>
+          </a:p>
+          <a:p>
+            <a:endParaRPr lang="en-US"/>
+          </a:p>
+          <a:p>
+            <a:endParaRPr lang="en-US"/>
+          </a:p>
+          <a:p>
+            <a:endParaRPr lang="en-US"/>
+          </a:p>
+          <a:p>
+            <a:endParaRPr lang="en-US"/>
+          </a:p>
+          <a:p>
+            <a:endParaRPr lang="en-US"/>
+          </a:p>
+          <a:p>
+            <a:endParaRPr lang="en-US"/>
+          </a:p>
+        </p:txBody>
+      </p:sp>
       <p:pic>
         <p:nvPicPr>
-          <p:cNvPr id="15" name="Picture 14">
+          <p:cNvPr id="5" name="Picture 4">
             <a:extLst>
               <a:ext uri="{FF2B5EF4-FFF2-40B4-BE49-F238E27FC236}">
-                <a16:creationId xmlns:a16="http://schemas.microsoft.com/office/drawing/2014/main" id="{4633A0A3-A288-DD0A-5D7F-1B49AE151352}"/>
+                <a16:creationId xmlns:a16="http://schemas.microsoft.com/office/drawing/2014/main" id="{21CF604B-F529-23DE-6DDA-1442997D1CE6}"/>
               </a:ext>
             </a:extLst>
           </p:cNvPr>
@@ -10371,15 +10642,15 @@
           <p:nvPr/>
         </p:nvPicPr>
         <p:blipFill>
-          <a:blip r:embed="rId4"/>
+          <a:blip r:embed="rId2"/>
           <a:stretch>
             <a:fillRect/>
           </a:stretch>
         </p:blipFill>
         <p:spPr>
           <a:xfrm>
-            <a:off x="287094" y="4700192"/>
-            <a:ext cx="10430068" cy="2002942"/>
+            <a:off x="401934" y="803868"/>
+            <a:ext cx="11154129" cy="3808325"/>
           </a:xfrm>
           <a:prstGeom prst="rect">
             <a:avLst/>
@@ -10389,7 +10660,724 @@
     </p:spTree>
     <p:extLst>
       <p:ext uri="{BB962C8B-B14F-4D97-AF65-F5344CB8AC3E}">
-        <p14:creationId xmlns:p14="http://schemas.microsoft.com/office/powerpoint/2010/main" val="3592595754"/>
+        <p14:creationId xmlns:p14="http://schemas.microsoft.com/office/powerpoint/2010/main" val="584833622"/>
+      </p:ext>
+    </p:extLst>
+  </p:cSld>
+  <p:clrMapOvr>
+    <a:masterClrMapping/>
+  </p:clrMapOvr>
+</p:sld>
+</file>
+
+<file path=ppt/slides/slide37.xml><?xml version="1.0" encoding="utf-8"?>
+<p:sld xmlns:a="http://schemas.openxmlformats.org/drawingml/2006/main" xmlns:r="http://schemas.openxmlformats.org/officeDocument/2006/relationships" xmlns:p="http://schemas.openxmlformats.org/presentationml/2006/main">
+  <p:cSld>
+    <p:spTree>
+      <p:nvGrpSpPr>
+        <p:cNvPr id="1" name=""/>
+        <p:cNvGrpSpPr/>
+        <p:nvPr/>
+      </p:nvGrpSpPr>
+      <p:grpSpPr>
+        <a:xfrm>
+          <a:off x="0" y="0"/>
+          <a:ext cx="0" cy="0"/>
+          <a:chOff x="0" y="0"/>
+          <a:chExt cx="0" cy="0"/>
+        </a:xfrm>
+      </p:grpSpPr>
+      <p:sp>
+        <p:nvSpPr>
+          <p:cNvPr id="2" name="Title 1">
+            <a:extLst>
+              <a:ext uri="{FF2B5EF4-FFF2-40B4-BE49-F238E27FC236}">
+                <a16:creationId xmlns:a16="http://schemas.microsoft.com/office/drawing/2014/main" id="{33094648-D685-4D5B-BE6E-492D5F1AE9D2}"/>
+              </a:ext>
+            </a:extLst>
+          </p:cNvPr>
+          <p:cNvSpPr>
+            <a:spLocks noGrp="1"/>
+          </p:cNvSpPr>
+          <p:nvPr>
+            <p:ph type="title"/>
+          </p:nvPr>
+        </p:nvSpPr>
+        <p:spPr>
+          <a:xfrm>
+            <a:off x="913795" y="0"/>
+            <a:ext cx="10353762" cy="736879"/>
+          </a:xfrm>
+        </p:spPr>
+        <p:txBody>
+          <a:bodyPr/>
+          <a:lstStyle/>
+          <a:p>
+            <a:r>
+              <a:rPr lang="en-US" b="1">
+                <a:solidFill>
+                  <a:srgbClr val="FF0000"/>
+                </a:solidFill>
+              </a:rPr>
+              <a:t>@Injectable</a:t>
+            </a:r>
+          </a:p>
+        </p:txBody>
+      </p:sp>
+      <p:sp>
+        <p:nvSpPr>
+          <p:cNvPr id="3" name="Content Placeholder 2">
+            <a:extLst>
+              <a:ext uri="{FF2B5EF4-FFF2-40B4-BE49-F238E27FC236}">
+                <a16:creationId xmlns:a16="http://schemas.microsoft.com/office/drawing/2014/main" id="{45404C01-3F5F-961A-EEE2-E76DA66C0EE1}"/>
+              </a:ext>
+            </a:extLst>
+          </p:cNvPr>
+          <p:cNvSpPr>
+            <a:spLocks noGrp="1"/>
+          </p:cNvSpPr>
+          <p:nvPr>
+            <p:ph idx="1"/>
+          </p:nvPr>
+        </p:nvSpPr>
+        <p:spPr>
+          <a:xfrm>
+            <a:off x="126125" y="736879"/>
+            <a:ext cx="11971282" cy="5995517"/>
+          </a:xfrm>
+        </p:spPr>
+        <p:txBody>
+          <a:bodyPr/>
+          <a:lstStyle/>
+          <a:p>
+            <a:pPr marL="36900" indent="0">
+              <a:buNone/>
+            </a:pPr>
+            <a:r>
+              <a:rPr lang="en-US" b="1">
+                <a:solidFill>
+                  <a:srgbClr val="00B0F0"/>
+                </a:solidFill>
+              </a:rPr>
+              <a:t>@Injectable</a:t>
+            </a:r>
+            <a:r>
+              <a:rPr lang="en-US" b="1">
+                <a:solidFill>
+                  <a:srgbClr val="FFFF00"/>
+                </a:solidFill>
+              </a:rPr>
+              <a:t> </a:t>
+            </a:r>
+            <a:r>
+              <a:rPr lang="en-US" b="1">
+                <a:solidFill>
+                  <a:srgbClr val="FF0000"/>
+                </a:solidFill>
+              </a:rPr>
+              <a:t>({</a:t>
+            </a:r>
+          </a:p>
+          <a:p>
+            <a:pPr marL="36900" indent="0">
+              <a:buNone/>
+            </a:pPr>
+            <a:r>
+              <a:rPr lang="en-US"/>
+              <a:t>	providedIn: 'root'</a:t>
+            </a:r>
+            <a:endParaRPr lang="en-US" b="1">
+              <a:solidFill>
+                <a:srgbClr val="FF0000"/>
+              </a:solidFill>
+            </a:endParaRPr>
+          </a:p>
+          <a:p>
+            <a:pPr marL="36900" indent="0">
+              <a:buNone/>
+            </a:pPr>
+            <a:r>
+              <a:rPr lang="en-US" b="1">
+                <a:solidFill>
+                  <a:srgbClr val="FF0000"/>
+                </a:solidFill>
+              </a:rPr>
+              <a:t>})</a:t>
+            </a:r>
+          </a:p>
+          <a:p>
+            <a:r>
+              <a:rPr lang="en-US" b="1"/>
+              <a:t>register a service in Angular’s </a:t>
+            </a:r>
+            <a:r>
+              <a:rPr lang="en-US" b="1">
+                <a:solidFill>
+                  <a:srgbClr val="FFFF00"/>
+                </a:solidFill>
+              </a:rPr>
+              <a:t>Dependency Injection system</a:t>
+            </a:r>
+            <a:r>
+              <a:rPr lang="en-US" b="1"/>
+              <a:t> so it can be automatically created and injected anywhere in the application.</a:t>
+            </a:r>
+          </a:p>
+          <a:p>
+            <a:r>
+              <a:rPr lang="en-US"/>
+              <a:t>Angular knows this class </a:t>
+            </a:r>
+            <a:r>
+              <a:rPr lang="en-US" b="1"/>
+              <a:t>can be injected into components or other services</a:t>
+            </a:r>
+            <a:r>
+              <a:rPr lang="en-US"/>
+              <a:t>.</a:t>
+            </a:r>
+          </a:p>
+          <a:p>
+            <a:r>
+              <a:rPr lang="en-US"/>
+              <a:t>Create </a:t>
+            </a:r>
+            <a:r>
+              <a:rPr lang="en-US" b="1"/>
+              <a:t>one single instance of the service for the whole application</a:t>
+            </a:r>
+            <a:r>
+              <a:rPr lang="en-US"/>
+              <a:t>. </a:t>
+            </a:r>
+            <a:r>
+              <a:rPr lang="en-US" b="1"/>
+              <a:t>[ Singleton Service ]</a:t>
+            </a:r>
+          </a:p>
+          <a:p>
+            <a:endParaRPr lang="en-US" b="1"/>
+          </a:p>
+        </p:txBody>
+      </p:sp>
+    </p:spTree>
+    <p:extLst>
+      <p:ext uri="{BB962C8B-B14F-4D97-AF65-F5344CB8AC3E}">
+        <p14:creationId xmlns:p14="http://schemas.microsoft.com/office/powerpoint/2010/main" val="3991652767"/>
+      </p:ext>
+    </p:extLst>
+  </p:cSld>
+  <p:clrMapOvr>
+    <a:masterClrMapping/>
+  </p:clrMapOvr>
+</p:sld>
+</file>
+
+<file path=ppt/slides/slide38.xml><?xml version="1.0" encoding="utf-8"?>
+<p:sld xmlns:a="http://schemas.openxmlformats.org/drawingml/2006/main" xmlns:r="http://schemas.openxmlformats.org/officeDocument/2006/relationships" xmlns:p="http://schemas.openxmlformats.org/presentationml/2006/main">
+  <p:cSld>
+    <p:spTree>
+      <p:nvGrpSpPr>
+        <p:cNvPr id="1" name=""/>
+        <p:cNvGrpSpPr/>
+        <p:nvPr/>
+      </p:nvGrpSpPr>
+      <p:grpSpPr>
+        <a:xfrm>
+          <a:off x="0" y="0"/>
+          <a:ext cx="0" cy="0"/>
+          <a:chOff x="0" y="0"/>
+          <a:chExt cx="0" cy="0"/>
+        </a:xfrm>
+      </p:grpSpPr>
+      <p:sp>
+        <p:nvSpPr>
+          <p:cNvPr id="2" name="Title 1">
+            <a:extLst>
+              <a:ext uri="{FF2B5EF4-FFF2-40B4-BE49-F238E27FC236}">
+                <a16:creationId xmlns:a16="http://schemas.microsoft.com/office/drawing/2014/main" id="{A69569E3-5080-4C73-6A3F-42BC1A4FEC4B}"/>
+              </a:ext>
+            </a:extLst>
+          </p:cNvPr>
+          <p:cNvSpPr>
+            <a:spLocks noGrp="1"/>
+          </p:cNvSpPr>
+          <p:nvPr>
+            <p:ph type="title"/>
+          </p:nvPr>
+        </p:nvSpPr>
+        <p:spPr>
+          <a:xfrm>
+            <a:off x="913795" y="0"/>
+            <a:ext cx="10353762" cy="714703"/>
+          </a:xfrm>
+        </p:spPr>
+        <p:txBody>
+          <a:bodyPr/>
+          <a:lstStyle/>
+          <a:p>
+            <a:r>
+              <a:rPr lang="en-US" b="1">
+                <a:solidFill>
+                  <a:srgbClr val="FF0000"/>
+                </a:solidFill>
+              </a:rPr>
+              <a:t>PIPES with Observable</a:t>
+            </a:r>
+          </a:p>
+        </p:txBody>
+      </p:sp>
+      <p:sp>
+        <p:nvSpPr>
+          <p:cNvPr id="3" name="Content Placeholder 2">
+            <a:extLst>
+              <a:ext uri="{FF2B5EF4-FFF2-40B4-BE49-F238E27FC236}">
+                <a16:creationId xmlns:a16="http://schemas.microsoft.com/office/drawing/2014/main" id="{9F6DC09F-B99C-A835-218C-3FFC5845A4C4}"/>
+              </a:ext>
+            </a:extLst>
+          </p:cNvPr>
+          <p:cNvSpPr>
+            <a:spLocks noGrp="1"/>
+          </p:cNvSpPr>
+          <p:nvPr>
+            <p:ph idx="1"/>
+          </p:nvPr>
+        </p:nvSpPr>
+        <p:spPr>
+          <a:xfrm>
+            <a:off x="105103" y="714704"/>
+            <a:ext cx="11950264" cy="6011918"/>
+          </a:xfrm>
+        </p:spPr>
+        <p:txBody>
+          <a:bodyPr>
+            <a:normAutofit/>
+          </a:bodyPr>
+          <a:lstStyle/>
+          <a:p>
+            <a:r>
+              <a:rPr lang="en-US" b="1"/>
+              <a:t>It allows you to transform, filter, or manipulate the data emitted by an observable before it reaches its final subscribing</a:t>
+            </a:r>
+          </a:p>
+          <a:p>
+            <a:r>
+              <a:rPr lang="en-US" b="1">
+                <a:solidFill>
+                  <a:schemeClr val="accent1">
+                    <a:lumMod val="40000"/>
+                    <a:lumOff val="60000"/>
+                  </a:schemeClr>
+                </a:solidFill>
+              </a:rPr>
+              <a:t>Returns a New Observable</a:t>
+            </a:r>
+            <a:r>
+              <a:rPr lang="en-US" b="1"/>
+              <a:t>: When you use the pipe method, it doesn't modify the original observable. Instead, it returns a new observable that applies the defined transformations.</a:t>
+            </a:r>
+          </a:p>
+          <a:p>
+            <a:pPr marL="36900" indent="0">
+              <a:buNone/>
+            </a:pPr>
+            <a:r>
+              <a:rPr lang="en-US" b="1"/>
+              <a:t>const </a:t>
+            </a:r>
+            <a:r>
+              <a:rPr lang="en-US" b="1">
+                <a:solidFill>
+                  <a:srgbClr val="00B0F0"/>
+                </a:solidFill>
+              </a:rPr>
+              <a:t>obs</a:t>
+            </a:r>
+            <a:r>
+              <a:rPr lang="en-US" b="1"/>
+              <a:t> = new </a:t>
+            </a:r>
+            <a:r>
+              <a:rPr lang="en-US" b="1">
+                <a:solidFill>
+                  <a:srgbClr val="00B0F0"/>
+                </a:solidFill>
+              </a:rPr>
+              <a:t>Observable</a:t>
+            </a:r>
+            <a:r>
+              <a:rPr lang="en-US" b="1"/>
+              <a:t>((</a:t>
+            </a:r>
+            <a:r>
+              <a:rPr lang="en-US" b="1">
+                <a:solidFill>
+                  <a:srgbClr val="FFFF00"/>
+                </a:solidFill>
+              </a:rPr>
+              <a:t>subscriber</a:t>
+            </a:r>
+            <a:r>
+              <a:rPr lang="en-US" b="1"/>
+              <a:t>) =&gt; {</a:t>
+            </a:r>
+          </a:p>
+          <a:p>
+            <a:pPr marL="36900" indent="0">
+              <a:buNone/>
+            </a:pPr>
+            <a:r>
+              <a:rPr lang="en-US" b="1"/>
+              <a:t>	</a:t>
+            </a:r>
+            <a:r>
+              <a:rPr lang="en-US" b="1">
+                <a:solidFill>
+                  <a:srgbClr val="FFFF00"/>
+                </a:solidFill>
+              </a:rPr>
+              <a:t>subscriber</a:t>
+            </a:r>
+            <a:r>
+              <a:rPr lang="en-US" b="1"/>
+              <a:t>.next(1);	</a:t>
+            </a:r>
+            <a:r>
+              <a:rPr lang="en-US" b="1">
+                <a:solidFill>
+                  <a:srgbClr val="FFFF00"/>
+                </a:solidFill>
+              </a:rPr>
+              <a:t>subscriber</a:t>
+            </a:r>
+            <a:r>
+              <a:rPr lang="en-US" b="1"/>
+              <a:t>.next(2);</a:t>
+            </a:r>
+          </a:p>
+          <a:p>
+            <a:pPr marL="36900" indent="0">
+              <a:buNone/>
+            </a:pPr>
+            <a:r>
+              <a:rPr lang="en-US" b="1"/>
+              <a:t>	</a:t>
+            </a:r>
+            <a:r>
+              <a:rPr lang="en-US" b="1">
+                <a:solidFill>
+                  <a:srgbClr val="FFFF00"/>
+                </a:solidFill>
+              </a:rPr>
+              <a:t>subscriber</a:t>
+            </a:r>
+            <a:r>
+              <a:rPr lang="en-US" b="1"/>
+              <a:t>.next(3);	</a:t>
+            </a:r>
+            <a:r>
+              <a:rPr lang="en-US" b="1">
+                <a:solidFill>
+                  <a:srgbClr val="FFFF00"/>
+                </a:solidFill>
+              </a:rPr>
+              <a:t>subscriber</a:t>
+            </a:r>
+            <a:r>
+              <a:rPr lang="en-US" b="1"/>
+              <a:t>.next(4);	</a:t>
+            </a:r>
+            <a:r>
+              <a:rPr lang="en-US" b="1">
+                <a:solidFill>
+                  <a:srgbClr val="FFFF00"/>
+                </a:solidFill>
+              </a:rPr>
+              <a:t>subscriber</a:t>
+            </a:r>
+            <a:r>
+              <a:rPr lang="en-US" b="1"/>
+              <a:t>.next(5);  </a:t>
+            </a:r>
+          </a:p>
+          <a:p>
+            <a:pPr marL="36900" indent="0">
+              <a:buNone/>
+            </a:pPr>
+            <a:r>
+              <a:rPr lang="en-US" b="1"/>
+              <a:t>	</a:t>
+            </a:r>
+            <a:r>
+              <a:rPr lang="en-US" b="1">
+                <a:solidFill>
+                  <a:srgbClr val="FFFF00"/>
+                </a:solidFill>
+              </a:rPr>
+              <a:t>subscriber</a:t>
+            </a:r>
+            <a:r>
+              <a:rPr lang="en-US" b="1"/>
+              <a:t>.complete();  // Signals that no more values will be emitted</a:t>
+            </a:r>
+          </a:p>
+          <a:p>
+            <a:pPr marL="36900" indent="0">
+              <a:buNone/>
+            </a:pPr>
+            <a:r>
+              <a:rPr lang="en-US" b="1"/>
+              <a:t>}).</a:t>
+            </a:r>
+            <a:r>
+              <a:rPr lang="en-US" b="1">
+                <a:solidFill>
+                  <a:schemeClr val="accent1">
+                    <a:lumMod val="40000"/>
+                    <a:lumOff val="60000"/>
+                  </a:schemeClr>
+                </a:solidFill>
+              </a:rPr>
+              <a:t>pipe</a:t>
+            </a:r>
+            <a:r>
+              <a:rPr lang="en-US" b="1"/>
+              <a:t>(</a:t>
+            </a:r>
+          </a:p>
+          <a:p>
+            <a:pPr marL="36900" indent="0">
+              <a:buNone/>
+            </a:pPr>
+            <a:r>
+              <a:rPr lang="en-US" sz="1800" b="1"/>
+              <a:t>	</a:t>
+            </a:r>
+            <a:r>
+              <a:rPr lang="en-US" b="1">
+                <a:solidFill>
+                  <a:srgbClr val="00B050"/>
+                </a:solidFill>
+              </a:rPr>
+              <a:t>filter</a:t>
+            </a:r>
+            <a:r>
+              <a:rPr lang="en-US" sz="1800" b="1"/>
+              <a:t>((data) =&gt; data &gt; 2),                // Filters out values less than or equal to 2</a:t>
+            </a:r>
+          </a:p>
+          <a:p>
+            <a:pPr marL="36900" indent="0">
+              <a:buNone/>
+            </a:pPr>
+            <a:r>
+              <a:rPr lang="en-US" sz="1800" b="1"/>
+              <a:t>  	</a:t>
+            </a:r>
+            <a:r>
+              <a:rPr lang="en-US" b="1">
+                <a:solidFill>
+                  <a:srgbClr val="00B050"/>
+                </a:solidFill>
+              </a:rPr>
+              <a:t>map</a:t>
+            </a:r>
+            <a:r>
+              <a:rPr lang="en-US" sz="1800" b="1"/>
+              <a:t>((val) =&gt; val * 2)                      // Transforms remaining values by multiplying by 2</a:t>
+            </a:r>
+            <a:endParaRPr lang="en-US" b="1"/>
+          </a:p>
+          <a:p>
+            <a:pPr marL="36900" indent="0">
+              <a:buNone/>
+            </a:pPr>
+            <a:r>
+              <a:rPr lang="en-US" b="1"/>
+              <a:t>);</a:t>
+            </a:r>
+          </a:p>
+        </p:txBody>
+      </p:sp>
+    </p:spTree>
+    <p:extLst>
+      <p:ext uri="{BB962C8B-B14F-4D97-AF65-F5344CB8AC3E}">
+        <p14:creationId xmlns:p14="http://schemas.microsoft.com/office/powerpoint/2010/main" val="71279616"/>
+      </p:ext>
+    </p:extLst>
+  </p:cSld>
+  <p:clrMapOvr>
+    <a:masterClrMapping/>
+  </p:clrMapOvr>
+</p:sld>
+</file>
+
+<file path=ppt/slides/slide39.xml><?xml version="1.0" encoding="utf-8"?>
+<p:sld xmlns:a="http://schemas.openxmlformats.org/drawingml/2006/main" xmlns:r="http://schemas.openxmlformats.org/officeDocument/2006/relationships" xmlns:p="http://schemas.openxmlformats.org/presentationml/2006/main">
+  <p:cSld>
+    <p:spTree>
+      <p:nvGrpSpPr>
+        <p:cNvPr id="1" name=""/>
+        <p:cNvGrpSpPr/>
+        <p:nvPr/>
+      </p:nvGrpSpPr>
+      <p:grpSpPr>
+        <a:xfrm>
+          <a:off x="0" y="0"/>
+          <a:ext cx="0" cy="0"/>
+          <a:chOff x="0" y="0"/>
+          <a:chExt cx="0" cy="0"/>
+        </a:xfrm>
+      </p:grpSpPr>
+      <p:sp>
+        <p:nvSpPr>
+          <p:cNvPr id="2" name="Title 1">
+            <a:extLst>
+              <a:ext uri="{FF2B5EF4-FFF2-40B4-BE49-F238E27FC236}">
+                <a16:creationId xmlns:a16="http://schemas.microsoft.com/office/drawing/2014/main" id="{E4DE9052-1BE6-21DA-99AF-0D72C69A3017}"/>
+              </a:ext>
+            </a:extLst>
+          </p:cNvPr>
+          <p:cNvSpPr>
+            <a:spLocks noGrp="1"/>
+          </p:cNvSpPr>
+          <p:nvPr>
+            <p:ph type="title"/>
+          </p:nvPr>
+        </p:nvSpPr>
+        <p:spPr>
+          <a:xfrm>
+            <a:off x="913795" y="0"/>
+            <a:ext cx="10353762" cy="546538"/>
+          </a:xfrm>
+        </p:spPr>
+        <p:txBody>
+          <a:bodyPr>
+            <a:normAutofit fontScale="90000"/>
+          </a:bodyPr>
+          <a:lstStyle/>
+          <a:p>
+            <a:r>
+              <a:rPr lang="en-US" sz="3200" b="1">
+                <a:solidFill>
+                  <a:srgbClr val="FF0000"/>
+                </a:solidFill>
+              </a:rPr>
+              <a:t>PIPES with Observable [cont.1]</a:t>
+            </a:r>
+            <a:endParaRPr lang="en-US" sz="3200"/>
+          </a:p>
+        </p:txBody>
+      </p:sp>
+      <p:sp>
+        <p:nvSpPr>
+          <p:cNvPr id="9" name="Content Placeholder 8">
+            <a:extLst>
+              <a:ext uri="{FF2B5EF4-FFF2-40B4-BE49-F238E27FC236}">
+                <a16:creationId xmlns:a16="http://schemas.microsoft.com/office/drawing/2014/main" id="{255740B2-8968-545D-C20E-7CE57927A9B1}"/>
+              </a:ext>
+            </a:extLst>
+          </p:cNvPr>
+          <p:cNvSpPr>
+            <a:spLocks noGrp="1"/>
+          </p:cNvSpPr>
+          <p:nvPr>
+            <p:ph idx="1"/>
+          </p:nvPr>
+        </p:nvSpPr>
+        <p:spPr>
+          <a:xfrm>
+            <a:off x="126124" y="546539"/>
+            <a:ext cx="11141433" cy="5244662"/>
+          </a:xfrm>
+        </p:spPr>
+        <p:txBody>
+          <a:bodyPr/>
+          <a:lstStyle/>
+          <a:p>
+            <a:r>
+              <a:rPr lang="en-US"/>
+              <a:t>Pipes could handle errors before the subscriber receives it.</a:t>
+            </a:r>
+          </a:p>
+          <a:p>
+            <a:r>
+              <a:rPr lang="en-US"/>
+              <a:t>pipe() allows you to attach operators to the Observable</a:t>
+            </a:r>
+          </a:p>
+          <a:p>
+            <a:r>
+              <a:rPr lang="en-US"/>
+              <a:t>catchError(Helper.HandleError&lt;OperationResult&gt;('Add’))</a:t>
+            </a:r>
+          </a:p>
+          <a:p>
+            <a:pPr fontAlgn="base"/>
+            <a:r>
+              <a:rPr lang="en-US"/>
+              <a:t>This means if request fails : </a:t>
+            </a:r>
+            <a:r>
+              <a:rPr lang="en-US" altLang="en-US"/>
+              <a:t>network error,  server error (500), bad request (400)</a:t>
+            </a:r>
+          </a:p>
+          <a:p>
+            <a:pPr lvl="1" fontAlgn="base"/>
+            <a:r>
+              <a:rPr lang="en-US"/>
+              <a:t>catchError intercepts the error then calls Helper.HandleError()</a:t>
+            </a:r>
+            <a:endParaRPr lang="en-US" altLang="en-US"/>
+          </a:p>
+          <a:p>
+            <a:pPr fontAlgn="base"/>
+            <a:endParaRPr lang="en-US" altLang="en-US"/>
+          </a:p>
+        </p:txBody>
+      </p:sp>
+      <p:pic>
+        <p:nvPicPr>
+          <p:cNvPr id="10" name="Content Placeholder 6">
+            <a:extLst>
+              <a:ext uri="{FF2B5EF4-FFF2-40B4-BE49-F238E27FC236}">
+                <a16:creationId xmlns:a16="http://schemas.microsoft.com/office/drawing/2014/main" id="{6841B35B-520B-F046-8FE3-8FBFEE89BB43}"/>
+              </a:ext>
+            </a:extLst>
+          </p:cNvPr>
+          <p:cNvPicPr>
+            <a:picLocks noChangeAspect="1"/>
+          </p:cNvPicPr>
+          <p:nvPr/>
+        </p:nvPicPr>
+        <p:blipFill>
+          <a:blip r:embed="rId2"/>
+          <a:stretch>
+            <a:fillRect/>
+          </a:stretch>
+        </p:blipFill>
+        <p:spPr>
+          <a:xfrm>
+            <a:off x="566954" y="3429000"/>
+            <a:ext cx="9249708" cy="2162504"/>
+          </a:xfrm>
+          <a:prstGeom prst="rect">
+            <a:avLst/>
+          </a:prstGeom>
+          <a:effectLst>
+            <a:outerShdw blurRad="25400" dir="17880000">
+              <a:srgbClr val="000000">
+                <a:alpha val="46000"/>
+              </a:srgbClr>
+            </a:outerShdw>
+          </a:effectLst>
+        </p:spPr>
+      </p:pic>
+    </p:spTree>
+    <p:extLst>
+      <p:ext uri="{BB962C8B-B14F-4D97-AF65-F5344CB8AC3E}">
+        <p14:creationId xmlns:p14="http://schemas.microsoft.com/office/powerpoint/2010/main" val="329178887"/>
       </p:ext>
     </p:extLst>
   </p:cSld>
@@ -10521,6 +11509,1841 @@
 </p:sld>
 </file>
 
+<file path=ppt/slides/slide40.xml><?xml version="1.0" encoding="utf-8"?>
+<p:sld xmlns:a="http://schemas.openxmlformats.org/drawingml/2006/main" xmlns:r="http://schemas.openxmlformats.org/officeDocument/2006/relationships" xmlns:p="http://schemas.openxmlformats.org/presentationml/2006/main">
+  <p:cSld>
+    <p:spTree>
+      <p:nvGrpSpPr>
+        <p:cNvPr id="1" name=""/>
+        <p:cNvGrpSpPr/>
+        <p:nvPr/>
+      </p:nvGrpSpPr>
+      <p:grpSpPr>
+        <a:xfrm>
+          <a:off x="0" y="0"/>
+          <a:ext cx="0" cy="0"/>
+          <a:chOff x="0" y="0"/>
+          <a:chExt cx="0" cy="0"/>
+        </a:xfrm>
+      </p:grpSpPr>
+      <p:sp>
+        <p:nvSpPr>
+          <p:cNvPr id="2" name="Title 1">
+            <a:extLst>
+              <a:ext uri="{FF2B5EF4-FFF2-40B4-BE49-F238E27FC236}">
+                <a16:creationId xmlns:a16="http://schemas.microsoft.com/office/drawing/2014/main" id="{99B09D80-AAED-7B44-CFD1-51147BE33ECA}"/>
+              </a:ext>
+            </a:extLst>
+          </p:cNvPr>
+          <p:cNvSpPr>
+            <a:spLocks noGrp="1"/>
+          </p:cNvSpPr>
+          <p:nvPr>
+            <p:ph type="title"/>
+          </p:nvPr>
+        </p:nvSpPr>
+        <p:spPr>
+          <a:xfrm>
+            <a:off x="913795" y="0"/>
+            <a:ext cx="10353762" cy="525517"/>
+          </a:xfrm>
+        </p:spPr>
+        <p:txBody>
+          <a:bodyPr>
+            <a:normAutofit fontScale="90000"/>
+          </a:bodyPr>
+          <a:lstStyle/>
+          <a:p>
+            <a:r>
+              <a:rPr lang="en-US" b="1">
+                <a:solidFill>
+                  <a:srgbClr val="FF0000"/>
+                </a:solidFill>
+              </a:rPr>
+              <a:t>Pipeable Operators</a:t>
+            </a:r>
+          </a:p>
+        </p:txBody>
+      </p:sp>
+      <p:sp>
+        <p:nvSpPr>
+          <p:cNvPr id="3" name="Content Placeholder 2">
+            <a:extLst>
+              <a:ext uri="{FF2B5EF4-FFF2-40B4-BE49-F238E27FC236}">
+                <a16:creationId xmlns:a16="http://schemas.microsoft.com/office/drawing/2014/main" id="{D6A79AC3-B4A6-D8CB-0C9B-64B3717FD955}"/>
+              </a:ext>
+            </a:extLst>
+          </p:cNvPr>
+          <p:cNvSpPr>
+            <a:spLocks noGrp="1"/>
+          </p:cNvSpPr>
+          <p:nvPr>
+            <p:ph idx="1"/>
+          </p:nvPr>
+        </p:nvSpPr>
+        <p:spPr>
+          <a:xfrm>
+            <a:off x="126124" y="525517"/>
+            <a:ext cx="11866179" cy="6190593"/>
+          </a:xfrm>
+        </p:spPr>
+        <p:txBody>
+          <a:bodyPr/>
+          <a:lstStyle/>
+          <a:p>
+            <a:r>
+              <a:rPr lang="en-US"/>
+              <a:t>inside pipe() you place </a:t>
+            </a:r>
+            <a:r>
+              <a:rPr lang="en-US" b="1"/>
+              <a:t>operators</a:t>
+            </a:r>
+            <a:r>
+              <a:rPr lang="en-US"/>
+              <a:t>, and they are commonly called </a:t>
+            </a:r>
+            <a:r>
+              <a:rPr lang="en-US" b="1"/>
+              <a:t>RxJS operators</a:t>
+            </a:r>
+            <a:r>
+              <a:rPr lang="en-US"/>
+              <a:t> (or </a:t>
+            </a:r>
+            <a:r>
+              <a:rPr lang="en-US" b="1"/>
+              <a:t>pipeable operators</a:t>
+            </a:r>
+            <a:r>
+              <a:rPr lang="en-US"/>
+              <a:t>).</a:t>
+            </a:r>
+          </a:p>
+          <a:p>
+            <a:r>
+              <a:rPr lang="en-US"/>
+              <a:t>map()</a:t>
+            </a:r>
+          </a:p>
+          <a:p>
+            <a:r>
+              <a:rPr lang="en-US"/>
+              <a:t>filter()</a:t>
+            </a:r>
+          </a:p>
+          <a:p>
+            <a:r>
+              <a:rPr lang="en-US"/>
+              <a:t>catchError()</a:t>
+            </a:r>
+          </a:p>
+          <a:p>
+            <a:endParaRPr lang="en-US"/>
+          </a:p>
+          <a:p>
+            <a:endParaRPr lang="en-US"/>
+          </a:p>
+        </p:txBody>
+      </p:sp>
+    </p:spTree>
+    <p:extLst>
+      <p:ext uri="{BB962C8B-B14F-4D97-AF65-F5344CB8AC3E}">
+        <p14:creationId xmlns:p14="http://schemas.microsoft.com/office/powerpoint/2010/main" val="2026373877"/>
+      </p:ext>
+    </p:extLst>
+  </p:cSld>
+  <p:clrMapOvr>
+    <a:masterClrMapping/>
+  </p:clrMapOvr>
+</p:sld>
+</file>
+
+<file path=ppt/slides/slide41.xml><?xml version="1.0" encoding="utf-8"?>
+<p:sld xmlns:a="http://schemas.openxmlformats.org/drawingml/2006/main" xmlns:r="http://schemas.openxmlformats.org/officeDocument/2006/relationships" xmlns:p="http://schemas.openxmlformats.org/presentationml/2006/main">
+  <p:cSld>
+    <p:spTree>
+      <p:nvGrpSpPr>
+        <p:cNvPr id="1" name=""/>
+        <p:cNvGrpSpPr/>
+        <p:nvPr/>
+      </p:nvGrpSpPr>
+      <p:grpSpPr>
+        <a:xfrm>
+          <a:off x="0" y="0"/>
+          <a:ext cx="0" cy="0"/>
+          <a:chOff x="0" y="0"/>
+          <a:chExt cx="0" cy="0"/>
+        </a:xfrm>
+      </p:grpSpPr>
+      <p:sp>
+        <p:nvSpPr>
+          <p:cNvPr id="2" name="Title 1">
+            <a:extLst>
+              <a:ext uri="{FF2B5EF4-FFF2-40B4-BE49-F238E27FC236}">
+                <a16:creationId xmlns:a16="http://schemas.microsoft.com/office/drawing/2014/main" id="{0B1181D6-47A1-3B08-2AD2-9B8CF62484A9}"/>
+              </a:ext>
+            </a:extLst>
+          </p:cNvPr>
+          <p:cNvSpPr>
+            <a:spLocks noGrp="1"/>
+          </p:cNvSpPr>
+          <p:nvPr>
+            <p:ph type="title"/>
+          </p:nvPr>
+        </p:nvSpPr>
+        <p:spPr>
+          <a:xfrm>
+            <a:off x="913795" y="0"/>
+            <a:ext cx="10353762" cy="561975"/>
+          </a:xfrm>
+        </p:spPr>
+        <p:txBody>
+          <a:bodyPr>
+            <a:normAutofit fontScale="90000"/>
+          </a:bodyPr>
+          <a:lstStyle/>
+          <a:p>
+            <a:r>
+              <a:rPr lang="en-US"/>
+              <a:t>Pipeable Operators </a:t>
+            </a:r>
+            <a:r>
+              <a:rPr lang="en-US" b="1">
+                <a:solidFill>
+                  <a:srgbClr val="FFFF00"/>
+                </a:solidFill>
+              </a:rPr>
+              <a:t>map</a:t>
+            </a:r>
+            <a:endParaRPr lang="en-US"/>
+          </a:p>
+        </p:txBody>
+      </p:sp>
+      <p:sp>
+        <p:nvSpPr>
+          <p:cNvPr id="3" name="Content Placeholder 2">
+            <a:extLst>
+              <a:ext uri="{FF2B5EF4-FFF2-40B4-BE49-F238E27FC236}">
+                <a16:creationId xmlns:a16="http://schemas.microsoft.com/office/drawing/2014/main" id="{CFED3A0F-52E1-319A-0737-0CE9334223BC}"/>
+              </a:ext>
+            </a:extLst>
+          </p:cNvPr>
+          <p:cNvSpPr>
+            <a:spLocks noGrp="1"/>
+          </p:cNvSpPr>
+          <p:nvPr>
+            <p:ph idx="1"/>
+          </p:nvPr>
+        </p:nvSpPr>
+        <p:spPr>
+          <a:xfrm>
+            <a:off x="388883" y="672662"/>
+            <a:ext cx="11592910" cy="5980385"/>
+          </a:xfrm>
+        </p:spPr>
+        <p:txBody>
+          <a:bodyPr/>
+          <a:lstStyle/>
+          <a:p>
+            <a:r>
+              <a:rPr lang="en-US"/>
+              <a:t>S</a:t>
+            </a:r>
+          </a:p>
+          <a:p>
+            <a:endParaRPr lang="en-US"/>
+          </a:p>
+        </p:txBody>
+      </p:sp>
+      <p:pic>
+        <p:nvPicPr>
+          <p:cNvPr id="5" name="Picture 4">
+            <a:extLst>
+              <a:ext uri="{FF2B5EF4-FFF2-40B4-BE49-F238E27FC236}">
+                <a16:creationId xmlns:a16="http://schemas.microsoft.com/office/drawing/2014/main" id="{E570EB42-6149-7B10-93BA-DF60AA0C5FE0}"/>
+              </a:ext>
+            </a:extLst>
+          </p:cNvPr>
+          <p:cNvPicPr>
+            <a:picLocks noChangeAspect="1"/>
+          </p:cNvPicPr>
+          <p:nvPr/>
+        </p:nvPicPr>
+        <p:blipFill>
+          <a:blip r:embed="rId2"/>
+          <a:stretch>
+            <a:fillRect/>
+          </a:stretch>
+        </p:blipFill>
+        <p:spPr>
+          <a:xfrm>
+            <a:off x="2172192" y="761835"/>
+            <a:ext cx="7847615" cy="5713980"/>
+          </a:xfrm>
+          <a:prstGeom prst="rect">
+            <a:avLst/>
+          </a:prstGeom>
+        </p:spPr>
+      </p:pic>
+    </p:spTree>
+    <p:extLst>
+      <p:ext uri="{BB962C8B-B14F-4D97-AF65-F5344CB8AC3E}">
+        <p14:creationId xmlns:p14="http://schemas.microsoft.com/office/powerpoint/2010/main" val="844717461"/>
+      </p:ext>
+    </p:extLst>
+  </p:cSld>
+  <p:clrMapOvr>
+    <a:masterClrMapping/>
+  </p:clrMapOvr>
+</p:sld>
+</file>
+
+<file path=ppt/slides/slide42.xml><?xml version="1.0" encoding="utf-8"?>
+<p:sld xmlns:a="http://schemas.openxmlformats.org/drawingml/2006/main" xmlns:r="http://schemas.openxmlformats.org/officeDocument/2006/relationships" xmlns:p="http://schemas.openxmlformats.org/presentationml/2006/main">
+  <p:cSld>
+    <p:spTree>
+      <p:nvGrpSpPr>
+        <p:cNvPr id="1" name="">
+          <a:extLst>
+            <a:ext uri="{FF2B5EF4-FFF2-40B4-BE49-F238E27FC236}">
+              <a16:creationId xmlns:a16="http://schemas.microsoft.com/office/drawing/2014/main" id="{E756239A-5F43-0C3A-C42F-B9AC0A9D90E5}"/>
+            </a:ext>
+          </a:extLst>
+        </p:cNvPr>
+        <p:cNvGrpSpPr/>
+        <p:nvPr/>
+      </p:nvGrpSpPr>
+      <p:grpSpPr>
+        <a:xfrm>
+          <a:off x="0" y="0"/>
+          <a:ext cx="0" cy="0"/>
+          <a:chOff x="0" y="0"/>
+          <a:chExt cx="0" cy="0"/>
+        </a:xfrm>
+      </p:grpSpPr>
+      <p:sp>
+        <p:nvSpPr>
+          <p:cNvPr id="2" name="Title 1">
+            <a:extLst>
+              <a:ext uri="{FF2B5EF4-FFF2-40B4-BE49-F238E27FC236}">
+                <a16:creationId xmlns:a16="http://schemas.microsoft.com/office/drawing/2014/main" id="{6F23BCE1-D83E-59B8-9A45-532170AE4DD3}"/>
+              </a:ext>
+            </a:extLst>
+          </p:cNvPr>
+          <p:cNvSpPr>
+            <a:spLocks noGrp="1"/>
+          </p:cNvSpPr>
+          <p:nvPr>
+            <p:ph type="title"/>
+          </p:nvPr>
+        </p:nvSpPr>
+        <p:spPr>
+          <a:xfrm>
+            <a:off x="913795" y="0"/>
+            <a:ext cx="10353762" cy="561975"/>
+          </a:xfrm>
+        </p:spPr>
+        <p:txBody>
+          <a:bodyPr>
+            <a:normAutofit fontScale="90000"/>
+          </a:bodyPr>
+          <a:lstStyle/>
+          <a:p>
+            <a:r>
+              <a:rPr lang="en-US"/>
+              <a:t>Pipeable Operators </a:t>
+            </a:r>
+            <a:r>
+              <a:rPr lang="en-US" b="1">
+                <a:solidFill>
+                  <a:srgbClr val="FFFF00"/>
+                </a:solidFill>
+              </a:rPr>
+              <a:t>filter</a:t>
+            </a:r>
+            <a:endParaRPr lang="en-US"/>
+          </a:p>
+        </p:txBody>
+      </p:sp>
+      <p:sp>
+        <p:nvSpPr>
+          <p:cNvPr id="3" name="Content Placeholder 2">
+            <a:extLst>
+              <a:ext uri="{FF2B5EF4-FFF2-40B4-BE49-F238E27FC236}">
+                <a16:creationId xmlns:a16="http://schemas.microsoft.com/office/drawing/2014/main" id="{18C297C2-41A8-E139-A03B-31743F95EF9A}"/>
+              </a:ext>
+            </a:extLst>
+          </p:cNvPr>
+          <p:cNvSpPr>
+            <a:spLocks noGrp="1"/>
+          </p:cNvSpPr>
+          <p:nvPr>
+            <p:ph idx="1"/>
+          </p:nvPr>
+        </p:nvSpPr>
+        <p:spPr>
+          <a:xfrm>
+            <a:off x="388883" y="672662"/>
+            <a:ext cx="11592910" cy="5980385"/>
+          </a:xfrm>
+        </p:spPr>
+        <p:txBody>
+          <a:bodyPr/>
+          <a:lstStyle/>
+          <a:p>
+            <a:r>
+              <a:rPr lang="en-US"/>
+              <a:t>S</a:t>
+            </a:r>
+          </a:p>
+          <a:p>
+            <a:endParaRPr lang="en-US"/>
+          </a:p>
+        </p:txBody>
+      </p:sp>
+      <p:pic>
+        <p:nvPicPr>
+          <p:cNvPr id="6" name="Picture 5">
+            <a:extLst>
+              <a:ext uri="{FF2B5EF4-FFF2-40B4-BE49-F238E27FC236}">
+                <a16:creationId xmlns:a16="http://schemas.microsoft.com/office/drawing/2014/main" id="{3FEDC41F-89BF-838A-4451-86D92A43775F}"/>
+              </a:ext>
+            </a:extLst>
+          </p:cNvPr>
+          <p:cNvPicPr>
+            <a:picLocks noChangeAspect="1"/>
+          </p:cNvPicPr>
+          <p:nvPr/>
+        </p:nvPicPr>
+        <p:blipFill>
+          <a:blip r:embed="rId2"/>
+          <a:stretch>
+            <a:fillRect/>
+          </a:stretch>
+        </p:blipFill>
+        <p:spPr>
+          <a:xfrm>
+            <a:off x="2314575" y="785812"/>
+            <a:ext cx="7562850" cy="5286375"/>
+          </a:xfrm>
+          <a:prstGeom prst="rect">
+            <a:avLst/>
+          </a:prstGeom>
+        </p:spPr>
+      </p:pic>
+    </p:spTree>
+    <p:extLst>
+      <p:ext uri="{BB962C8B-B14F-4D97-AF65-F5344CB8AC3E}">
+        <p14:creationId xmlns:p14="http://schemas.microsoft.com/office/powerpoint/2010/main" val="1681801590"/>
+      </p:ext>
+    </p:extLst>
+  </p:cSld>
+  <p:clrMapOvr>
+    <a:masterClrMapping/>
+  </p:clrMapOvr>
+</p:sld>
+</file>
+
+<file path=ppt/slides/slide43.xml><?xml version="1.0" encoding="utf-8"?>
+<p:sld xmlns:a="http://schemas.openxmlformats.org/drawingml/2006/main" xmlns:r="http://schemas.openxmlformats.org/officeDocument/2006/relationships" xmlns:p="http://schemas.openxmlformats.org/presentationml/2006/main">
+  <p:cSld>
+    <p:spTree>
+      <p:nvGrpSpPr>
+        <p:cNvPr id="1" name=""/>
+        <p:cNvGrpSpPr/>
+        <p:nvPr/>
+      </p:nvGrpSpPr>
+      <p:grpSpPr>
+        <a:xfrm>
+          <a:off x="0" y="0"/>
+          <a:ext cx="0" cy="0"/>
+          <a:chOff x="0" y="0"/>
+          <a:chExt cx="0" cy="0"/>
+        </a:xfrm>
+      </p:grpSpPr>
+      <p:sp>
+        <p:nvSpPr>
+          <p:cNvPr id="2" name="Title 1">
+            <a:extLst>
+              <a:ext uri="{FF2B5EF4-FFF2-40B4-BE49-F238E27FC236}">
+                <a16:creationId xmlns:a16="http://schemas.microsoft.com/office/drawing/2014/main" id="{B98C9D85-BA3B-6719-5092-8214F434F007}"/>
+              </a:ext>
+            </a:extLst>
+          </p:cNvPr>
+          <p:cNvSpPr>
+            <a:spLocks noGrp="1"/>
+          </p:cNvSpPr>
+          <p:nvPr>
+            <p:ph type="title"/>
+          </p:nvPr>
+        </p:nvSpPr>
+        <p:spPr>
+          <a:xfrm>
+            <a:off x="913795" y="0"/>
+            <a:ext cx="10353762" cy="641131"/>
+          </a:xfrm>
+        </p:spPr>
+        <p:txBody>
+          <a:bodyPr>
+            <a:normAutofit fontScale="90000"/>
+          </a:bodyPr>
+          <a:lstStyle/>
+          <a:p>
+            <a:r>
+              <a:rPr lang="en-US"/>
+              <a:t>Pipeable Operators </a:t>
+            </a:r>
+            <a:r>
+              <a:rPr lang="en-US" b="1">
+                <a:solidFill>
+                  <a:srgbClr val="FFFF00"/>
+                </a:solidFill>
+              </a:rPr>
+              <a:t>CatchError signature</a:t>
+            </a:r>
+            <a:endParaRPr lang="en-US"/>
+          </a:p>
+        </p:txBody>
+      </p:sp>
+      <p:sp>
+        <p:nvSpPr>
+          <p:cNvPr id="3" name="Content Placeholder 2">
+            <a:extLst>
+              <a:ext uri="{FF2B5EF4-FFF2-40B4-BE49-F238E27FC236}">
+                <a16:creationId xmlns:a16="http://schemas.microsoft.com/office/drawing/2014/main" id="{06BFBE29-7945-CD2A-04BC-31FC921DDBEF}"/>
+              </a:ext>
+            </a:extLst>
+          </p:cNvPr>
+          <p:cNvSpPr>
+            <a:spLocks noGrp="1"/>
+          </p:cNvSpPr>
+          <p:nvPr>
+            <p:ph idx="1"/>
+          </p:nvPr>
+        </p:nvSpPr>
+        <p:spPr>
+          <a:xfrm>
+            <a:off x="0" y="641130"/>
+            <a:ext cx="12192000" cy="6216869"/>
+          </a:xfrm>
+        </p:spPr>
+        <p:txBody>
+          <a:bodyPr/>
+          <a:lstStyle/>
+          <a:p>
+            <a:endParaRPr lang="en-US"/>
+          </a:p>
+          <a:p>
+            <a:endParaRPr lang="en-US"/>
+          </a:p>
+          <a:p>
+            <a:endParaRPr lang="en-US"/>
+          </a:p>
+          <a:p>
+            <a:endParaRPr lang="en-US"/>
+          </a:p>
+          <a:p>
+            <a:endParaRPr lang="en-US"/>
+          </a:p>
+          <a:p>
+            <a:r>
+              <a:rPr lang="en-US"/>
+              <a:t>catchError&lt;OperationResult, Observable&lt;OperationResult&gt;&gt;</a:t>
+            </a:r>
+          </a:p>
+          <a:p>
+            <a:pPr lvl="1"/>
+            <a:r>
+              <a:rPr lang="en-US"/>
+              <a:t>OperationResult : Type emitted before error</a:t>
+            </a:r>
+          </a:p>
+          <a:p>
+            <a:pPr lvl="1"/>
+            <a:r>
+              <a:rPr lang="en-US"/>
+              <a:t>Observable&lt;OperationResult&gt; : Type emitted before error</a:t>
+            </a:r>
+          </a:p>
+          <a:p>
+            <a:r>
+              <a:rPr lang="en-US"/>
+              <a:t>OperatorFunction&lt;OperationResult, OperationResult&gt;</a:t>
+            </a:r>
+          </a:p>
+          <a:p>
+            <a:pPr lvl="1"/>
+            <a:r>
+              <a:rPr lang="en-US" sz="2000"/>
+              <a:t>receives an Observable emitting OperationResult</a:t>
+            </a:r>
+          </a:p>
+          <a:p>
+            <a:pPr lvl="1"/>
+            <a:r>
+              <a:rPr lang="en-US" sz="2000"/>
+              <a:t>returns another Observable emitting OperationResult</a:t>
+            </a:r>
+          </a:p>
+          <a:p>
+            <a:endParaRPr lang="en-US"/>
+          </a:p>
+        </p:txBody>
+      </p:sp>
+      <p:pic>
+        <p:nvPicPr>
+          <p:cNvPr id="5" name="Picture 4">
+            <a:extLst>
+              <a:ext uri="{FF2B5EF4-FFF2-40B4-BE49-F238E27FC236}">
+                <a16:creationId xmlns:a16="http://schemas.microsoft.com/office/drawing/2014/main" id="{BA2A1F74-1586-AEC8-7DFD-3CD9489C0FE8}"/>
+              </a:ext>
+            </a:extLst>
+          </p:cNvPr>
+          <p:cNvPicPr>
+            <a:picLocks noChangeAspect="1"/>
+          </p:cNvPicPr>
+          <p:nvPr/>
+        </p:nvPicPr>
+        <p:blipFill>
+          <a:blip r:embed="rId2"/>
+          <a:stretch>
+            <a:fillRect/>
+          </a:stretch>
+        </p:blipFill>
+        <p:spPr>
+          <a:xfrm>
+            <a:off x="0" y="641129"/>
+            <a:ext cx="8305800" cy="2200275"/>
+          </a:xfrm>
+          <a:prstGeom prst="rect">
+            <a:avLst/>
+          </a:prstGeom>
+        </p:spPr>
+      </p:pic>
+    </p:spTree>
+    <p:extLst>
+      <p:ext uri="{BB962C8B-B14F-4D97-AF65-F5344CB8AC3E}">
+        <p14:creationId xmlns:p14="http://schemas.microsoft.com/office/powerpoint/2010/main" val="1963641975"/>
+      </p:ext>
+    </p:extLst>
+  </p:cSld>
+  <p:clrMapOvr>
+    <a:masterClrMapping/>
+  </p:clrMapOvr>
+</p:sld>
+</file>
+
+<file path=ppt/slides/slide44.xml><?xml version="1.0" encoding="utf-8"?>
+<p:sld xmlns:a="http://schemas.openxmlformats.org/drawingml/2006/main" xmlns:r="http://schemas.openxmlformats.org/officeDocument/2006/relationships" xmlns:p="http://schemas.openxmlformats.org/presentationml/2006/main">
+  <p:cSld>
+    <p:spTree>
+      <p:nvGrpSpPr>
+        <p:cNvPr id="1" name=""/>
+        <p:cNvGrpSpPr/>
+        <p:nvPr/>
+      </p:nvGrpSpPr>
+      <p:grpSpPr>
+        <a:xfrm>
+          <a:off x="0" y="0"/>
+          <a:ext cx="0" cy="0"/>
+          <a:chOff x="0" y="0"/>
+          <a:chExt cx="0" cy="0"/>
+        </a:xfrm>
+      </p:grpSpPr>
+      <p:sp>
+        <p:nvSpPr>
+          <p:cNvPr id="2" name="Title 1">
+            <a:extLst>
+              <a:ext uri="{FF2B5EF4-FFF2-40B4-BE49-F238E27FC236}">
+                <a16:creationId xmlns:a16="http://schemas.microsoft.com/office/drawing/2014/main" id="{A2B58C64-DA73-C56E-A73F-A4834DA57040}"/>
+              </a:ext>
+            </a:extLst>
+          </p:cNvPr>
+          <p:cNvSpPr>
+            <a:spLocks noGrp="1"/>
+          </p:cNvSpPr>
+          <p:nvPr>
+            <p:ph type="title"/>
+          </p:nvPr>
+        </p:nvSpPr>
+        <p:spPr>
+          <a:xfrm>
+            <a:off x="913795" y="0"/>
+            <a:ext cx="10353762" cy="767255"/>
+          </a:xfrm>
+        </p:spPr>
+        <p:txBody>
+          <a:bodyPr/>
+          <a:lstStyle/>
+          <a:p>
+            <a:r>
+              <a:rPr lang="en-US"/>
+              <a:t>Pipeable Operators </a:t>
+            </a:r>
+            <a:r>
+              <a:rPr lang="en-US" b="1">
+                <a:solidFill>
+                  <a:srgbClr val="FFFF00"/>
+                </a:solidFill>
+              </a:rPr>
+              <a:t>CatchError</a:t>
+            </a:r>
+          </a:p>
+        </p:txBody>
+      </p:sp>
+      <p:sp>
+        <p:nvSpPr>
+          <p:cNvPr id="3" name="Content Placeholder 2">
+            <a:extLst>
+              <a:ext uri="{FF2B5EF4-FFF2-40B4-BE49-F238E27FC236}">
+                <a16:creationId xmlns:a16="http://schemas.microsoft.com/office/drawing/2014/main" id="{3450E3A6-679E-5089-0654-870D7BCDDF16}"/>
+              </a:ext>
+            </a:extLst>
+          </p:cNvPr>
+          <p:cNvSpPr>
+            <a:spLocks noGrp="1"/>
+          </p:cNvSpPr>
+          <p:nvPr>
+            <p:ph idx="1"/>
+          </p:nvPr>
+        </p:nvSpPr>
+        <p:spPr>
+          <a:xfrm>
+            <a:off x="157654" y="756745"/>
+            <a:ext cx="12034345" cy="5843752"/>
+          </a:xfrm>
+        </p:spPr>
+        <p:txBody>
+          <a:bodyPr/>
+          <a:lstStyle/>
+          <a:p>
+            <a:r>
+              <a:rPr lang="en-US"/>
+              <a:t>catchError is an </a:t>
+            </a:r>
+            <a:r>
+              <a:rPr lang="en-US" b="1">
+                <a:solidFill>
+                  <a:srgbClr val="FFFF00"/>
+                </a:solidFill>
+              </a:rPr>
+              <a:t>RxJS operator</a:t>
+            </a:r>
+            <a:r>
+              <a:rPr lang="en-US"/>
+              <a:t> used inside pipe() to </a:t>
+            </a:r>
+            <a:r>
+              <a:rPr lang="en-US" b="1"/>
+              <a:t>intercept errors from an Observable</a:t>
+            </a:r>
+            <a:r>
+              <a:rPr lang="en-US"/>
+              <a:t> and replace them </a:t>
+            </a:r>
+            <a:r>
+              <a:rPr lang="en-US" b="1"/>
+              <a:t>with </a:t>
+            </a:r>
+            <a:r>
+              <a:rPr lang="en-US" b="1">
+                <a:solidFill>
+                  <a:srgbClr val="FFC000"/>
+                </a:solidFill>
+              </a:rPr>
+              <a:t>another Observable</a:t>
+            </a:r>
+            <a:r>
+              <a:rPr lang="en-US"/>
+              <a:t>.</a:t>
+            </a:r>
+          </a:p>
+          <a:p>
+            <a:endParaRPr lang="en-US"/>
+          </a:p>
+          <a:p>
+            <a:endParaRPr lang="en-US"/>
+          </a:p>
+          <a:p>
+            <a:endParaRPr lang="en-US"/>
+          </a:p>
+        </p:txBody>
+      </p:sp>
+      <p:pic>
+        <p:nvPicPr>
+          <p:cNvPr id="5" name="Picture 4">
+            <a:extLst>
+              <a:ext uri="{FF2B5EF4-FFF2-40B4-BE49-F238E27FC236}">
+                <a16:creationId xmlns:a16="http://schemas.microsoft.com/office/drawing/2014/main" id="{6D21F4D9-39EF-8EE6-67E0-A8D38D466F64}"/>
+              </a:ext>
+            </a:extLst>
+          </p:cNvPr>
+          <p:cNvPicPr>
+            <a:picLocks noChangeAspect="1"/>
+          </p:cNvPicPr>
+          <p:nvPr/>
+        </p:nvPicPr>
+        <p:blipFill>
+          <a:blip r:embed="rId2"/>
+          <a:stretch>
+            <a:fillRect/>
+          </a:stretch>
+        </p:blipFill>
+        <p:spPr>
+          <a:xfrm>
+            <a:off x="4149287" y="1164512"/>
+            <a:ext cx="4752975" cy="1838325"/>
+          </a:xfrm>
+          <a:prstGeom prst="rect">
+            <a:avLst/>
+          </a:prstGeom>
+        </p:spPr>
+      </p:pic>
+    </p:spTree>
+    <p:extLst>
+      <p:ext uri="{BB962C8B-B14F-4D97-AF65-F5344CB8AC3E}">
+        <p14:creationId xmlns:p14="http://schemas.microsoft.com/office/powerpoint/2010/main" val="1495173995"/>
+      </p:ext>
+    </p:extLst>
+  </p:cSld>
+  <p:clrMapOvr>
+    <a:masterClrMapping/>
+  </p:clrMapOvr>
+</p:sld>
+</file>
+
+<file path=ppt/slides/slide45.xml><?xml version="1.0" encoding="utf-8"?>
+<p:sld xmlns:a="http://schemas.openxmlformats.org/drawingml/2006/main" xmlns:r="http://schemas.openxmlformats.org/officeDocument/2006/relationships" xmlns:p="http://schemas.openxmlformats.org/presentationml/2006/main">
+  <p:cSld>
+    <p:spTree>
+      <p:nvGrpSpPr>
+        <p:cNvPr id="1" name=""/>
+        <p:cNvGrpSpPr/>
+        <p:nvPr/>
+      </p:nvGrpSpPr>
+      <p:grpSpPr>
+        <a:xfrm>
+          <a:off x="0" y="0"/>
+          <a:ext cx="0" cy="0"/>
+          <a:chOff x="0" y="0"/>
+          <a:chExt cx="0" cy="0"/>
+        </a:xfrm>
+      </p:grpSpPr>
+      <p:sp>
+        <p:nvSpPr>
+          <p:cNvPr id="2" name="Title 1">
+            <a:extLst>
+              <a:ext uri="{FF2B5EF4-FFF2-40B4-BE49-F238E27FC236}">
+                <a16:creationId xmlns:a16="http://schemas.microsoft.com/office/drawing/2014/main" id="{868B7719-2ADD-F546-8678-83CB988B6C91}"/>
+              </a:ext>
+            </a:extLst>
+          </p:cNvPr>
+          <p:cNvSpPr>
+            <a:spLocks noGrp="1"/>
+          </p:cNvSpPr>
+          <p:nvPr>
+            <p:ph type="title"/>
+          </p:nvPr>
+        </p:nvSpPr>
+        <p:spPr>
+          <a:xfrm>
+            <a:off x="919119" y="2458549"/>
+            <a:ext cx="10353762" cy="1118663"/>
+          </a:xfrm>
+        </p:spPr>
+        <p:txBody>
+          <a:bodyPr>
+            <a:normAutofit/>
+          </a:bodyPr>
+          <a:lstStyle/>
+          <a:p>
+            <a:r>
+              <a:rPr lang="en-US" sz="6000" b="1">
+                <a:solidFill>
+                  <a:srgbClr val="FF0000"/>
+                </a:solidFill>
+              </a:rPr>
+              <a:t>Forms</a:t>
+            </a:r>
+          </a:p>
+        </p:txBody>
+      </p:sp>
+    </p:spTree>
+    <p:extLst>
+      <p:ext uri="{BB962C8B-B14F-4D97-AF65-F5344CB8AC3E}">
+        <p14:creationId xmlns:p14="http://schemas.microsoft.com/office/powerpoint/2010/main" val="3988666239"/>
+      </p:ext>
+    </p:extLst>
+  </p:cSld>
+  <p:clrMapOvr>
+    <a:masterClrMapping/>
+  </p:clrMapOvr>
+</p:sld>
+</file>
+
+<file path=ppt/slides/slide46.xml><?xml version="1.0" encoding="utf-8"?>
+<p:sld xmlns:a="http://schemas.openxmlformats.org/drawingml/2006/main" xmlns:r="http://schemas.openxmlformats.org/officeDocument/2006/relationships" xmlns:p="http://schemas.openxmlformats.org/presentationml/2006/main">
+  <p:cSld>
+    <p:spTree>
+      <p:nvGrpSpPr>
+        <p:cNvPr id="1" name=""/>
+        <p:cNvGrpSpPr/>
+        <p:nvPr/>
+      </p:nvGrpSpPr>
+      <p:grpSpPr>
+        <a:xfrm>
+          <a:off x="0" y="0"/>
+          <a:ext cx="0" cy="0"/>
+          <a:chOff x="0" y="0"/>
+          <a:chExt cx="0" cy="0"/>
+        </a:xfrm>
+      </p:grpSpPr>
+      <p:sp>
+        <p:nvSpPr>
+          <p:cNvPr id="2" name="Title 1">
+            <a:extLst>
+              <a:ext uri="{FF2B5EF4-FFF2-40B4-BE49-F238E27FC236}">
+                <a16:creationId xmlns:a16="http://schemas.microsoft.com/office/drawing/2014/main" id="{26934E81-35BE-40C1-EDF7-01A34930D165}"/>
+              </a:ext>
+            </a:extLst>
+          </p:cNvPr>
+          <p:cNvSpPr>
+            <a:spLocks noGrp="1"/>
+          </p:cNvSpPr>
+          <p:nvPr>
+            <p:ph type="title"/>
+          </p:nvPr>
+        </p:nvSpPr>
+        <p:spPr>
+          <a:xfrm>
+            <a:off x="301450" y="0"/>
+            <a:ext cx="11525459" cy="643095"/>
+          </a:xfrm>
+        </p:spPr>
+        <p:txBody>
+          <a:bodyPr>
+            <a:normAutofit/>
+          </a:bodyPr>
+          <a:lstStyle/>
+          <a:p>
+            <a:r>
+              <a:rPr lang="en-US" sz="3600" b="1">
+                <a:solidFill>
+                  <a:srgbClr val="FF0000"/>
+                </a:solidFill>
+              </a:rPr>
+              <a:t>Template Driven Forms</a:t>
+            </a:r>
+          </a:p>
+        </p:txBody>
+      </p:sp>
+      <p:sp>
+        <p:nvSpPr>
+          <p:cNvPr id="3" name="Content Placeholder 2">
+            <a:extLst>
+              <a:ext uri="{FF2B5EF4-FFF2-40B4-BE49-F238E27FC236}">
+                <a16:creationId xmlns:a16="http://schemas.microsoft.com/office/drawing/2014/main" id="{5EFC0645-62BC-3BAE-0D48-E6258473952B}"/>
+              </a:ext>
+            </a:extLst>
+          </p:cNvPr>
+          <p:cNvSpPr>
+            <a:spLocks noGrp="1"/>
+          </p:cNvSpPr>
+          <p:nvPr>
+            <p:ph idx="1"/>
+          </p:nvPr>
+        </p:nvSpPr>
+        <p:spPr>
+          <a:xfrm>
+            <a:off x="301450" y="643095"/>
+            <a:ext cx="11525459" cy="6079252"/>
+          </a:xfrm>
+        </p:spPr>
+        <p:txBody>
+          <a:bodyPr/>
+          <a:lstStyle/>
+          <a:p>
+            <a:r>
+              <a:rPr lang="en-US"/>
+              <a:t>Import </a:t>
+            </a:r>
+            <a:r>
+              <a:rPr lang="en-US" b="1">
+                <a:solidFill>
+                  <a:srgbClr val="00B0F0"/>
+                </a:solidFill>
+              </a:rPr>
+              <a:t>FormsModule</a:t>
+            </a:r>
+            <a:r>
+              <a:rPr lang="en-US"/>
+              <a:t> inside the component </a:t>
+            </a:r>
+          </a:p>
+        </p:txBody>
+      </p:sp>
+      <p:pic>
+        <p:nvPicPr>
+          <p:cNvPr id="5" name="Picture 4">
+            <a:extLst>
+              <a:ext uri="{FF2B5EF4-FFF2-40B4-BE49-F238E27FC236}">
+                <a16:creationId xmlns:a16="http://schemas.microsoft.com/office/drawing/2014/main" id="{33204B2A-0E74-96F1-7E17-310E3F507FD2}"/>
+              </a:ext>
+            </a:extLst>
+          </p:cNvPr>
+          <p:cNvPicPr>
+            <a:picLocks noChangeAspect="1"/>
+          </p:cNvPicPr>
+          <p:nvPr/>
+        </p:nvPicPr>
+        <p:blipFill>
+          <a:blip r:embed="rId2"/>
+          <a:stretch>
+            <a:fillRect/>
+          </a:stretch>
+        </p:blipFill>
+        <p:spPr>
+          <a:xfrm>
+            <a:off x="301449" y="1106364"/>
+            <a:ext cx="5017177" cy="1455965"/>
+          </a:xfrm>
+          <a:prstGeom prst="rect">
+            <a:avLst/>
+          </a:prstGeom>
+        </p:spPr>
+      </p:pic>
+    </p:spTree>
+    <p:extLst>
+      <p:ext uri="{BB962C8B-B14F-4D97-AF65-F5344CB8AC3E}">
+        <p14:creationId xmlns:p14="http://schemas.microsoft.com/office/powerpoint/2010/main" val="531497455"/>
+      </p:ext>
+    </p:extLst>
+  </p:cSld>
+  <p:clrMapOvr>
+    <a:masterClrMapping/>
+  </p:clrMapOvr>
+</p:sld>
+</file>
+
+<file path=ppt/slides/slide47.xml><?xml version="1.0" encoding="utf-8"?>
+<p:sld xmlns:a="http://schemas.openxmlformats.org/drawingml/2006/main" xmlns:r="http://schemas.openxmlformats.org/officeDocument/2006/relationships" xmlns:p="http://schemas.openxmlformats.org/presentationml/2006/main">
+  <p:cSld>
+    <p:spTree>
+      <p:nvGrpSpPr>
+        <p:cNvPr id="1" name=""/>
+        <p:cNvGrpSpPr/>
+        <p:nvPr/>
+      </p:nvGrpSpPr>
+      <p:grpSpPr>
+        <a:xfrm>
+          <a:off x="0" y="0"/>
+          <a:ext cx="0" cy="0"/>
+          <a:chOff x="0" y="0"/>
+          <a:chExt cx="0" cy="0"/>
+        </a:xfrm>
+      </p:grpSpPr>
+      <p:sp>
+        <p:nvSpPr>
+          <p:cNvPr id="2" name="Title 1">
+            <a:extLst>
+              <a:ext uri="{FF2B5EF4-FFF2-40B4-BE49-F238E27FC236}">
+                <a16:creationId xmlns:a16="http://schemas.microsoft.com/office/drawing/2014/main" id="{C2590C42-D9D3-2A67-C852-BA64016916E8}"/>
+              </a:ext>
+            </a:extLst>
+          </p:cNvPr>
+          <p:cNvSpPr>
+            <a:spLocks noGrp="1"/>
+          </p:cNvSpPr>
+          <p:nvPr>
+            <p:ph type="title"/>
+          </p:nvPr>
+        </p:nvSpPr>
+        <p:spPr>
+          <a:xfrm>
+            <a:off x="913795" y="0"/>
+            <a:ext cx="10353762" cy="596202"/>
+          </a:xfrm>
+        </p:spPr>
+        <p:txBody>
+          <a:bodyPr>
+            <a:normAutofit fontScale="90000"/>
+          </a:bodyPr>
+          <a:lstStyle/>
+          <a:p>
+            <a:r>
+              <a:rPr lang="en-US" sz="3600" b="1">
+                <a:solidFill>
+                  <a:srgbClr val="FF0000"/>
+                </a:solidFill>
+              </a:rPr>
+              <a:t>ReactiveFormsModule (model driven forms)</a:t>
+            </a:r>
+          </a:p>
+        </p:txBody>
+      </p:sp>
+      <p:sp>
+        <p:nvSpPr>
+          <p:cNvPr id="3" name="Content Placeholder 2">
+            <a:extLst>
+              <a:ext uri="{FF2B5EF4-FFF2-40B4-BE49-F238E27FC236}">
+                <a16:creationId xmlns:a16="http://schemas.microsoft.com/office/drawing/2014/main" id="{2B51E7E9-69C9-6754-D51B-6B97DF0B014B}"/>
+              </a:ext>
+            </a:extLst>
+          </p:cNvPr>
+          <p:cNvSpPr>
+            <a:spLocks noGrp="1"/>
+          </p:cNvSpPr>
+          <p:nvPr>
+            <p:ph idx="1"/>
+          </p:nvPr>
+        </p:nvSpPr>
+        <p:spPr>
+          <a:xfrm>
+            <a:off x="211015" y="596202"/>
+            <a:ext cx="11716378" cy="6045757"/>
+          </a:xfrm>
+        </p:spPr>
+        <p:txBody>
+          <a:bodyPr/>
+          <a:lstStyle/>
+          <a:p>
+            <a:endParaRPr lang="en-US"/>
+          </a:p>
+          <a:p>
+            <a:endParaRPr lang="en-US"/>
+          </a:p>
+          <a:p>
+            <a:endParaRPr lang="en-US"/>
+          </a:p>
+          <a:p>
+            <a:endParaRPr lang="en-US"/>
+          </a:p>
+          <a:p>
+            <a:r>
+              <a:rPr lang="en-US" sz="1800" b="1">
+                <a:solidFill>
+                  <a:srgbClr val="FFC000"/>
+                </a:solidFill>
+                <a:effectLst/>
+              </a:rPr>
+              <a:t>this</a:t>
+            </a:r>
+            <a:r>
+              <a:rPr lang="en-US" sz="1800">
+                <a:effectLst/>
+              </a:rPr>
+              <a:t>.</a:t>
+            </a:r>
+            <a:r>
+              <a:rPr lang="en-US" sz="1800" b="1">
+                <a:solidFill>
+                  <a:srgbClr val="00B0F0"/>
+                </a:solidFill>
+                <a:effectLst/>
+              </a:rPr>
+              <a:t>ColorOptionForm</a:t>
+            </a:r>
+            <a:r>
+              <a:rPr lang="en-US" sz="1800">
+                <a:effectLst/>
+              </a:rPr>
+              <a:t>.</a:t>
+            </a:r>
+            <a:r>
+              <a:rPr lang="en-US" sz="1800" b="1">
+                <a:solidFill>
+                  <a:srgbClr val="00B050"/>
+                </a:solidFill>
+                <a:effectLst/>
+              </a:rPr>
+              <a:t>value</a:t>
+            </a:r>
+            <a:r>
+              <a:rPr lang="en-US" sz="1800">
+                <a:solidFill>
+                  <a:srgbClr val="00B050"/>
+                </a:solidFill>
+                <a:effectLst/>
+              </a:rPr>
+              <a:t> // </a:t>
+            </a:r>
+            <a:r>
+              <a:rPr lang="en-US" sz="1800" b="1">
+                <a:solidFill>
+                  <a:schemeClr val="tx1"/>
+                </a:solidFill>
+                <a:effectLst/>
+              </a:rPr>
+              <a:t>{ColorName: '', ColorHexCode: ''}</a:t>
+            </a:r>
+          </a:p>
+          <a:p>
+            <a:r>
+              <a:rPr lang="en-US" sz="1800" b="1">
+                <a:solidFill>
+                  <a:srgbClr val="FFC000"/>
+                </a:solidFill>
+                <a:effectLst/>
+              </a:rPr>
+              <a:t>this</a:t>
+            </a:r>
+            <a:r>
+              <a:rPr lang="en-US" sz="1800"/>
+              <a:t>.</a:t>
+            </a:r>
+            <a:r>
+              <a:rPr lang="en-US" sz="1800" b="1">
+                <a:solidFill>
+                  <a:srgbClr val="00B0F0"/>
+                </a:solidFill>
+                <a:effectLst/>
+              </a:rPr>
+              <a:t>productForm</a:t>
+            </a:r>
+            <a:r>
+              <a:rPr lang="en-US" sz="1800" b="1"/>
+              <a:t>.</a:t>
+            </a:r>
+            <a:r>
+              <a:rPr lang="en-US" sz="1800" b="1">
+                <a:solidFill>
+                  <a:srgbClr val="FFFF00"/>
+                </a:solidFill>
+              </a:rPr>
+              <a:t>controls</a:t>
+            </a:r>
+            <a:r>
+              <a:rPr lang="en-US" sz="1800" b="1"/>
+              <a:t>.</a:t>
+            </a:r>
+            <a:r>
+              <a:rPr lang="en-US" sz="1800" b="1">
+                <a:solidFill>
+                  <a:srgbClr val="00B050"/>
+                </a:solidFill>
+              </a:rPr>
+              <a:t>price</a:t>
+            </a:r>
+            <a:r>
+              <a:rPr lang="en-US" sz="1800" b="1"/>
+              <a:t>.</a:t>
+            </a:r>
+            <a:r>
+              <a:rPr lang="en-US" sz="1800" b="1">
+                <a:solidFill>
+                  <a:srgbClr val="FFC000"/>
+                </a:solidFill>
+              </a:rPr>
+              <a:t>ColorName </a:t>
+            </a:r>
+            <a:r>
+              <a:rPr lang="en-US" sz="1800" b="1">
+                <a:solidFill>
+                  <a:schemeClr val="tx1"/>
+                </a:solidFill>
+              </a:rPr>
+              <a:t>// value is a read-only</a:t>
+            </a:r>
+            <a:endParaRPr lang="en-US" sz="1800" b="1">
+              <a:solidFill>
+                <a:schemeClr val="tx1"/>
+              </a:solidFill>
+              <a:effectLst/>
+            </a:endParaRPr>
+          </a:p>
+          <a:p>
+            <a:r>
+              <a:rPr lang="en-US" sz="1800" b="1">
+                <a:solidFill>
+                  <a:schemeClr val="tx1"/>
+                </a:solidFill>
+              </a:rPr>
+              <a:t>this.</a:t>
+            </a:r>
+            <a:r>
+              <a:rPr lang="en-US" sz="1800" b="1">
+                <a:solidFill>
+                  <a:srgbClr val="00B0F0"/>
+                </a:solidFill>
+              </a:rPr>
+              <a:t>productForm</a:t>
+            </a:r>
+            <a:r>
+              <a:rPr lang="en-US" sz="1800" b="1">
+                <a:solidFill>
+                  <a:schemeClr val="tx1"/>
+                </a:solidFill>
+              </a:rPr>
+              <a:t>.controls.price.hasError('required')</a:t>
+            </a:r>
+          </a:p>
+          <a:p>
+            <a:endParaRPr lang="en-US" b="1">
+              <a:solidFill>
+                <a:schemeClr val="tx1"/>
+              </a:solidFill>
+            </a:endParaRPr>
+          </a:p>
+        </p:txBody>
+      </p:sp>
+      <p:sp>
+        <p:nvSpPr>
+          <p:cNvPr id="4" name="Rectangle 3">
+            <a:extLst>
+              <a:ext uri="{FF2B5EF4-FFF2-40B4-BE49-F238E27FC236}">
+                <a16:creationId xmlns:a16="http://schemas.microsoft.com/office/drawing/2014/main" id="{F2486A2C-AA3F-0343-A02E-C71C5DF7805C}"/>
+              </a:ext>
+            </a:extLst>
+          </p:cNvPr>
+          <p:cNvSpPr/>
+          <p:nvPr/>
+        </p:nvSpPr>
+        <p:spPr>
+          <a:xfrm>
+            <a:off x="344993" y="656490"/>
+            <a:ext cx="4839956" cy="1583452"/>
+          </a:xfrm>
+          <a:prstGeom prst="rect">
+            <a:avLst/>
+          </a:prstGeom>
+        </p:spPr>
+        <p:style>
+          <a:lnRef idx="2">
+            <a:schemeClr val="dk1">
+              <a:shade val="15000"/>
+            </a:schemeClr>
+          </a:lnRef>
+          <a:fillRef idx="1">
+            <a:schemeClr val="dk1"/>
+          </a:fillRef>
+          <a:effectRef idx="0">
+            <a:schemeClr val="dk1"/>
+          </a:effectRef>
+          <a:fontRef idx="minor">
+            <a:schemeClr val="lt1"/>
+          </a:fontRef>
+        </p:style>
+        <p:txBody>
+          <a:bodyPr rtlCol="0" anchor="ctr"/>
+          <a:lstStyle/>
+          <a:p>
+            <a:r>
+              <a:rPr lang="en-US" b="1">
+                <a:solidFill>
+                  <a:srgbClr val="00B0F0"/>
+                </a:solidFill>
+              </a:rPr>
+              <a:t>ColorOptionForm</a:t>
+            </a:r>
+            <a:r>
+              <a:rPr lang="en-US"/>
+              <a:t> = new </a:t>
+            </a:r>
+            <a:r>
+              <a:rPr lang="en-US" b="1">
+                <a:solidFill>
+                  <a:srgbClr val="00B050"/>
+                </a:solidFill>
+              </a:rPr>
+              <a:t>FormGroup</a:t>
+            </a:r>
+            <a:r>
+              <a:rPr lang="en-US"/>
+              <a:t>({</a:t>
+            </a:r>
+          </a:p>
+          <a:p>
+            <a:r>
+              <a:rPr lang="en-US"/>
+              <a:t>    </a:t>
+            </a:r>
+            <a:r>
+              <a:rPr lang="en-US" b="1">
+                <a:solidFill>
+                  <a:srgbClr val="FFFF00"/>
+                </a:solidFill>
+              </a:rPr>
+              <a:t>ColorName</a:t>
+            </a:r>
+            <a:r>
+              <a:rPr lang="en-US"/>
+              <a:t>: </a:t>
+            </a:r>
+            <a:r>
+              <a:rPr lang="en-US" b="1">
+                <a:solidFill>
+                  <a:srgbClr val="7030A0"/>
+                </a:solidFill>
+              </a:rPr>
+              <a:t>new</a:t>
+            </a:r>
+            <a:r>
+              <a:rPr lang="en-US"/>
+              <a:t> </a:t>
+            </a:r>
+            <a:r>
+              <a:rPr lang="en-US" b="1">
+                <a:solidFill>
+                  <a:srgbClr val="00B050"/>
+                </a:solidFill>
+              </a:rPr>
+              <a:t>FormControl</a:t>
+            </a:r>
+            <a:r>
+              <a:rPr lang="en-US"/>
+              <a:t>(''),</a:t>
+            </a:r>
+          </a:p>
+          <a:p>
+            <a:r>
+              <a:rPr lang="en-US"/>
+              <a:t>    </a:t>
+            </a:r>
+            <a:r>
+              <a:rPr lang="en-US" b="1">
+                <a:solidFill>
+                  <a:srgbClr val="FFFF00"/>
+                </a:solidFill>
+              </a:rPr>
+              <a:t>ColorHexCode</a:t>
+            </a:r>
+            <a:r>
+              <a:rPr lang="en-US"/>
+              <a:t>: </a:t>
+            </a:r>
+            <a:r>
+              <a:rPr lang="en-US" b="1">
+                <a:solidFill>
+                  <a:srgbClr val="7030A0"/>
+                </a:solidFill>
+              </a:rPr>
+              <a:t>new</a:t>
+            </a:r>
+            <a:r>
+              <a:rPr lang="en-US"/>
+              <a:t> </a:t>
+            </a:r>
+            <a:r>
+              <a:rPr lang="en-US" b="1">
+                <a:solidFill>
+                  <a:srgbClr val="00B050"/>
+                </a:solidFill>
+              </a:rPr>
+              <a:t>FormControl</a:t>
+            </a:r>
+            <a:r>
+              <a:rPr lang="en-US"/>
+              <a:t>(''),</a:t>
+            </a:r>
+          </a:p>
+          <a:p>
+            <a:r>
+              <a:rPr lang="en-US"/>
+              <a:t>  })</a:t>
+            </a:r>
+          </a:p>
+        </p:txBody>
+      </p:sp>
+    </p:spTree>
+    <p:extLst>
+      <p:ext uri="{BB962C8B-B14F-4D97-AF65-F5344CB8AC3E}">
+        <p14:creationId xmlns:p14="http://schemas.microsoft.com/office/powerpoint/2010/main" val="3359443030"/>
+      </p:ext>
+    </p:extLst>
+  </p:cSld>
+  <p:clrMapOvr>
+    <a:masterClrMapping/>
+  </p:clrMapOvr>
+</p:sld>
+</file>
+
+<file path=ppt/slides/slide48.xml><?xml version="1.0" encoding="utf-8"?>
+<p:sld xmlns:a="http://schemas.openxmlformats.org/drawingml/2006/main" xmlns:r="http://schemas.openxmlformats.org/officeDocument/2006/relationships" xmlns:p="http://schemas.openxmlformats.org/presentationml/2006/main">
+  <p:cSld>
+    <p:spTree>
+      <p:nvGrpSpPr>
+        <p:cNvPr id="1" name=""/>
+        <p:cNvGrpSpPr/>
+        <p:nvPr/>
+      </p:nvGrpSpPr>
+      <p:grpSpPr>
+        <a:xfrm>
+          <a:off x="0" y="0"/>
+          <a:ext cx="0" cy="0"/>
+          <a:chOff x="0" y="0"/>
+          <a:chExt cx="0" cy="0"/>
+        </a:xfrm>
+      </p:grpSpPr>
+      <p:sp>
+        <p:nvSpPr>
+          <p:cNvPr id="2" name="Title 1">
+            <a:extLst>
+              <a:ext uri="{FF2B5EF4-FFF2-40B4-BE49-F238E27FC236}">
+                <a16:creationId xmlns:a16="http://schemas.microsoft.com/office/drawing/2014/main" id="{40ED5A59-A856-90A1-8FED-919F4D83370A}"/>
+              </a:ext>
+            </a:extLst>
+          </p:cNvPr>
+          <p:cNvSpPr>
+            <a:spLocks noGrp="1"/>
+          </p:cNvSpPr>
+          <p:nvPr>
+            <p:ph type="title"/>
+          </p:nvPr>
+        </p:nvSpPr>
+        <p:spPr>
+          <a:xfrm>
+            <a:off x="913795" y="0"/>
+            <a:ext cx="10353762" cy="602902"/>
+          </a:xfrm>
+        </p:spPr>
+        <p:txBody>
+          <a:bodyPr>
+            <a:normAutofit fontScale="90000"/>
+          </a:bodyPr>
+          <a:lstStyle/>
+          <a:p>
+            <a:r>
+              <a:rPr lang="en-US" b="1">
+                <a:solidFill>
+                  <a:srgbClr val="FF0000"/>
+                </a:solidFill>
+              </a:rPr>
+              <a:t>Sweat Alert</a:t>
+            </a:r>
+            <a:r>
+              <a:rPr lang="en-US"/>
+              <a:t> </a:t>
+            </a:r>
+          </a:p>
+        </p:txBody>
+      </p:sp>
+      <p:sp>
+        <p:nvSpPr>
+          <p:cNvPr id="3" name="Content Placeholder 2">
+            <a:extLst>
+              <a:ext uri="{FF2B5EF4-FFF2-40B4-BE49-F238E27FC236}">
+                <a16:creationId xmlns:a16="http://schemas.microsoft.com/office/drawing/2014/main" id="{08E460CD-D3F5-1544-D00C-8EF814FC82C0}"/>
+              </a:ext>
+            </a:extLst>
+          </p:cNvPr>
+          <p:cNvSpPr>
+            <a:spLocks noGrp="1"/>
+          </p:cNvSpPr>
+          <p:nvPr>
+            <p:ph idx="1"/>
+          </p:nvPr>
+        </p:nvSpPr>
+        <p:spPr>
+          <a:xfrm>
+            <a:off x="120580" y="602903"/>
+            <a:ext cx="11877152" cy="6049106"/>
+          </a:xfrm>
+        </p:spPr>
+        <p:txBody>
+          <a:bodyPr/>
+          <a:lstStyle/>
+          <a:p>
+            <a:r>
+              <a:rPr lang="en-US" b="1">
+                <a:solidFill>
+                  <a:srgbClr val="FFFF00"/>
+                </a:solidFill>
+              </a:rPr>
+              <a:t>npm</a:t>
+            </a:r>
+            <a:r>
+              <a:rPr lang="en-US"/>
+              <a:t> </a:t>
+            </a:r>
+            <a:r>
+              <a:rPr lang="en-US" b="1">
+                <a:solidFill>
+                  <a:srgbClr val="FF0000"/>
+                </a:solidFill>
+              </a:rPr>
+              <a:t>install</a:t>
+            </a:r>
+            <a:r>
+              <a:rPr lang="en-US"/>
+              <a:t> </a:t>
+            </a:r>
+            <a:r>
+              <a:rPr lang="en-US" b="1"/>
+              <a:t>sweetalert2</a:t>
+            </a:r>
+          </a:p>
+          <a:p>
+            <a:r>
+              <a:rPr lang="en-US">
+                <a:effectLst/>
+              </a:rPr>
+              <a:t>Swal.fire(options) // it returns promise --- </a:t>
+            </a:r>
+            <a:r>
+              <a:rPr lang="en-US" b="1">
+                <a:solidFill>
+                  <a:srgbClr val="FFFF00"/>
+                </a:solidFill>
+                <a:effectLst/>
+              </a:rPr>
+              <a:t>Promise</a:t>
+            </a:r>
+            <a:r>
+              <a:rPr lang="en-US">
+                <a:effectLst/>
+              </a:rPr>
+              <a:t>&lt;</a:t>
+            </a:r>
+            <a:r>
+              <a:rPr lang="en-US" b="1">
+                <a:solidFill>
+                  <a:srgbClr val="FF0000"/>
+                </a:solidFill>
+                <a:effectLst/>
+              </a:rPr>
+              <a:t>SweetAlertResult</a:t>
+            </a:r>
+            <a:r>
+              <a:rPr lang="en-US">
+                <a:effectLst/>
+              </a:rPr>
+              <a:t>&lt;any&gt;&gt;</a:t>
+            </a:r>
+          </a:p>
+          <a:p>
+            <a:pPr lvl="1"/>
+            <a:r>
+              <a:rPr lang="en-US" b="1">
+                <a:solidFill>
+                  <a:srgbClr val="FF0000"/>
+                </a:solidFill>
+                <a:effectLst/>
+              </a:rPr>
+              <a:t>SweetAlertResult.</a:t>
+            </a:r>
+            <a:r>
+              <a:rPr lang="en-US">
+                <a:effectLst/>
+              </a:rPr>
+              <a:t>isConfirmed</a:t>
+            </a:r>
+          </a:p>
+          <a:p>
+            <a:pPr lvl="1"/>
+            <a:r>
+              <a:rPr lang="en-US" b="1">
+                <a:solidFill>
+                  <a:srgbClr val="FF0000"/>
+                </a:solidFill>
+                <a:effectLst/>
+              </a:rPr>
+              <a:t>SweetAlertResult.</a:t>
+            </a:r>
+            <a:r>
+              <a:rPr lang="en-US">
+                <a:effectLst/>
+              </a:rPr>
+              <a:t>isDenied</a:t>
+            </a:r>
+          </a:p>
+          <a:p>
+            <a:pPr lvl="1"/>
+            <a:r>
+              <a:rPr lang="en-US" b="1">
+                <a:solidFill>
+                  <a:srgbClr val="FF0000"/>
+                </a:solidFill>
+                <a:effectLst/>
+              </a:rPr>
+              <a:t>SweetAlertResult.</a:t>
+            </a:r>
+            <a:r>
+              <a:rPr lang="en-US">
+                <a:effectLst/>
+              </a:rPr>
+              <a:t>isDismissed</a:t>
+            </a:r>
+          </a:p>
+          <a:p>
+            <a:endParaRPr lang="en-US">
+              <a:effectLst/>
+            </a:endParaRPr>
+          </a:p>
+          <a:p>
+            <a:endParaRPr lang="en-US"/>
+          </a:p>
+          <a:p>
+            <a:r>
+              <a:rPr lang="en-US"/>
+              <a:t>s</a:t>
+            </a:r>
+          </a:p>
+        </p:txBody>
+      </p:sp>
+    </p:spTree>
+    <p:extLst>
+      <p:ext uri="{BB962C8B-B14F-4D97-AF65-F5344CB8AC3E}">
+        <p14:creationId xmlns:p14="http://schemas.microsoft.com/office/powerpoint/2010/main" val="2549882693"/>
+      </p:ext>
+    </p:extLst>
+  </p:cSld>
+  <p:clrMapOvr>
+    <a:masterClrMapping/>
+  </p:clrMapOvr>
+</p:sld>
+</file>
+
+<file path=ppt/slides/slide49.xml><?xml version="1.0" encoding="utf-8"?>
+<p:sld xmlns:a="http://schemas.openxmlformats.org/drawingml/2006/main" xmlns:r="http://schemas.openxmlformats.org/officeDocument/2006/relationships" xmlns:p="http://schemas.openxmlformats.org/presentationml/2006/main">
+  <p:cSld>
+    <p:spTree>
+      <p:nvGrpSpPr>
+        <p:cNvPr id="1" name=""/>
+        <p:cNvGrpSpPr/>
+        <p:nvPr/>
+      </p:nvGrpSpPr>
+      <p:grpSpPr>
+        <a:xfrm>
+          <a:off x="0" y="0"/>
+          <a:ext cx="0" cy="0"/>
+          <a:chOff x="0" y="0"/>
+          <a:chExt cx="0" cy="0"/>
+        </a:xfrm>
+      </p:grpSpPr>
+      <p:sp>
+        <p:nvSpPr>
+          <p:cNvPr id="2" name="Title 1">
+            <a:extLst>
+              <a:ext uri="{FF2B5EF4-FFF2-40B4-BE49-F238E27FC236}">
+                <a16:creationId xmlns:a16="http://schemas.microsoft.com/office/drawing/2014/main" id="{38B4BE66-9208-201E-099B-E6D3C4F69DA2}"/>
+              </a:ext>
+            </a:extLst>
+          </p:cNvPr>
+          <p:cNvSpPr>
+            <a:spLocks noGrp="1"/>
+          </p:cNvSpPr>
+          <p:nvPr>
+            <p:ph type="title"/>
+          </p:nvPr>
+        </p:nvSpPr>
+        <p:spPr>
+          <a:xfrm>
+            <a:off x="913795" y="0"/>
+            <a:ext cx="10353762" cy="633046"/>
+          </a:xfrm>
+        </p:spPr>
+        <p:txBody>
+          <a:bodyPr>
+            <a:normAutofit fontScale="90000"/>
+          </a:bodyPr>
+          <a:lstStyle/>
+          <a:p>
+            <a:r>
+              <a:rPr lang="en-US"/>
+              <a:t>HTTP Client </a:t>
+            </a:r>
+          </a:p>
+        </p:txBody>
+      </p:sp>
+      <p:sp>
+        <p:nvSpPr>
+          <p:cNvPr id="3" name="Content Placeholder 2">
+            <a:extLst>
+              <a:ext uri="{FF2B5EF4-FFF2-40B4-BE49-F238E27FC236}">
+                <a16:creationId xmlns:a16="http://schemas.microsoft.com/office/drawing/2014/main" id="{F6095313-3881-361A-D401-D5FB46E15E95}"/>
+              </a:ext>
+            </a:extLst>
+          </p:cNvPr>
+          <p:cNvSpPr>
+            <a:spLocks noGrp="1"/>
+          </p:cNvSpPr>
+          <p:nvPr>
+            <p:ph idx="1"/>
+          </p:nvPr>
+        </p:nvSpPr>
+        <p:spPr>
+          <a:xfrm>
+            <a:off x="291402" y="633046"/>
+            <a:ext cx="11445073" cy="5817995"/>
+          </a:xfrm>
+        </p:spPr>
+        <p:txBody>
+          <a:bodyPr/>
+          <a:lstStyle/>
+          <a:p>
+            <a:r>
+              <a:rPr lang="en-US"/>
+              <a:t>You need to make httpClient Injectable [make provider for httpClient]</a:t>
+            </a:r>
+          </a:p>
+          <a:p>
+            <a:r>
+              <a:rPr lang="en-US"/>
+              <a:t>configure angular httpClient Service to be available for injection</a:t>
+            </a:r>
+          </a:p>
+          <a:p>
+            <a:pPr lvl="1"/>
+            <a:r>
+              <a:rPr lang="en-US"/>
+              <a:t>At </a:t>
+            </a:r>
+            <a:r>
+              <a:rPr lang="en-US" b="1">
+                <a:solidFill>
+                  <a:srgbClr val="00B0F0"/>
+                </a:solidFill>
+              </a:rPr>
+              <a:t>app.config.ts</a:t>
+            </a:r>
+            <a:r>
+              <a:rPr lang="en-US"/>
+              <a:t> : </a:t>
+            </a:r>
+            <a:r>
+              <a:rPr lang="en-US" b="1"/>
+              <a:t>at provider array add</a:t>
+            </a:r>
+            <a:r>
+              <a:rPr lang="en-US"/>
+              <a:t> ---- </a:t>
+            </a:r>
+            <a:r>
+              <a:rPr lang="en-US" b="1">
+                <a:solidFill>
+                  <a:srgbClr val="FFFF00"/>
+                </a:solidFill>
+              </a:rPr>
+              <a:t>provideHttpClient(withFetch())</a:t>
+            </a:r>
+            <a:r>
+              <a:rPr lang="en-US"/>
+              <a:t> </a:t>
+            </a:r>
+          </a:p>
+          <a:p>
+            <a:pPr lvl="1"/>
+            <a:endParaRPr lang="en-US"/>
+          </a:p>
+          <a:p>
+            <a:endParaRPr lang="en-US"/>
+          </a:p>
+        </p:txBody>
+      </p:sp>
+    </p:spTree>
+    <p:extLst>
+      <p:ext uri="{BB962C8B-B14F-4D97-AF65-F5344CB8AC3E}">
+        <p14:creationId xmlns:p14="http://schemas.microsoft.com/office/powerpoint/2010/main" val="28750175"/>
+      </p:ext>
+    </p:extLst>
+  </p:cSld>
+  <p:clrMapOvr>
+    <a:masterClrMapping/>
+  </p:clrMapOvr>
+</p:sld>
+</file>
+
 <file path=ppt/slides/slide5.xml><?xml version="1.0" encoding="utf-8"?>
 <p:sld xmlns:a="http://schemas.openxmlformats.org/drawingml/2006/main" xmlns:r="http://schemas.openxmlformats.org/officeDocument/2006/relationships" xmlns:p="http://schemas.openxmlformats.org/presentationml/2006/main">
   <p:cSld>
@@ -10743,6 +13566,2263 @@
     <p:extLst>
       <p:ext uri="{BB962C8B-B14F-4D97-AF65-F5344CB8AC3E}">
         <p14:creationId xmlns:p14="http://schemas.microsoft.com/office/powerpoint/2010/main" val="4018109868"/>
+      </p:ext>
+    </p:extLst>
+  </p:cSld>
+  <p:clrMapOvr>
+    <a:masterClrMapping/>
+  </p:clrMapOvr>
+</p:sld>
+</file>
+
+<file path=ppt/slides/slide50.xml><?xml version="1.0" encoding="utf-8"?>
+<p:sld xmlns:a="http://schemas.openxmlformats.org/drawingml/2006/main" xmlns:r="http://schemas.openxmlformats.org/officeDocument/2006/relationships" xmlns:p="http://schemas.openxmlformats.org/presentationml/2006/main">
+  <p:cSld>
+    <p:spTree>
+      <p:nvGrpSpPr>
+        <p:cNvPr id="1" name=""/>
+        <p:cNvGrpSpPr/>
+        <p:nvPr/>
+      </p:nvGrpSpPr>
+      <p:grpSpPr>
+        <a:xfrm>
+          <a:off x="0" y="0"/>
+          <a:ext cx="0" cy="0"/>
+          <a:chOff x="0" y="0"/>
+          <a:chExt cx="0" cy="0"/>
+        </a:xfrm>
+      </p:grpSpPr>
+      <p:sp>
+        <p:nvSpPr>
+          <p:cNvPr id="2" name="Title 1">
+            <a:extLst>
+              <a:ext uri="{FF2B5EF4-FFF2-40B4-BE49-F238E27FC236}">
+                <a16:creationId xmlns:a16="http://schemas.microsoft.com/office/drawing/2014/main" id="{40247D1C-3D2B-71F1-EB50-DC0BB38BD1EA}"/>
+              </a:ext>
+            </a:extLst>
+          </p:cNvPr>
+          <p:cNvSpPr>
+            <a:spLocks noGrp="1"/>
+          </p:cNvSpPr>
+          <p:nvPr>
+            <p:ph type="title"/>
+          </p:nvPr>
+        </p:nvSpPr>
+        <p:spPr>
+          <a:xfrm>
+            <a:off x="913795" y="0"/>
+            <a:ext cx="10353762" cy="566057"/>
+          </a:xfrm>
+        </p:spPr>
+        <p:txBody>
+          <a:bodyPr>
+            <a:normAutofit fontScale="90000"/>
+          </a:bodyPr>
+          <a:lstStyle/>
+          <a:p>
+            <a:r>
+              <a:rPr lang="en-US" b="1">
+                <a:solidFill>
+                  <a:srgbClr val="FF0000"/>
+                </a:solidFill>
+              </a:rPr>
+              <a:t>New Types </a:t>
+            </a:r>
+          </a:p>
+        </p:txBody>
+      </p:sp>
+      <p:sp>
+        <p:nvSpPr>
+          <p:cNvPr id="3" name="Content Placeholder 2">
+            <a:extLst>
+              <a:ext uri="{FF2B5EF4-FFF2-40B4-BE49-F238E27FC236}">
+                <a16:creationId xmlns:a16="http://schemas.microsoft.com/office/drawing/2014/main" id="{C97632D9-4FCE-E448-1365-D16A50CCAF8A}"/>
+              </a:ext>
+            </a:extLst>
+          </p:cNvPr>
+          <p:cNvSpPr>
+            <a:spLocks noGrp="1"/>
+          </p:cNvSpPr>
+          <p:nvPr>
+            <p:ph idx="1"/>
+          </p:nvPr>
+        </p:nvSpPr>
+        <p:spPr>
+          <a:xfrm>
+            <a:off x="170822" y="566056"/>
+            <a:ext cx="11796765" cy="6291943"/>
+          </a:xfrm>
+        </p:spPr>
+        <p:txBody>
+          <a:bodyPr/>
+          <a:lstStyle/>
+          <a:p>
+            <a:r>
+              <a:rPr lang="en-US" b="1">
+                <a:solidFill>
+                  <a:srgbClr val="00B0F0"/>
+                </a:solidFill>
+              </a:rPr>
+              <a:t>HTMLInputElement</a:t>
+            </a:r>
+          </a:p>
+          <a:p>
+            <a:pPr lvl="1"/>
+            <a:r>
+              <a:rPr lang="en-US"/>
+              <a:t>let target = e.target as HTMLInputElement</a:t>
+            </a:r>
+          </a:p>
+          <a:p>
+            <a:r>
+              <a:rPr lang="en-US" b="1">
+                <a:solidFill>
+                  <a:srgbClr val="00B0F0"/>
+                </a:solidFill>
+              </a:rPr>
+              <a:t>KeyboardEvent</a:t>
+            </a:r>
+          </a:p>
+          <a:p>
+            <a:pPr lvl="1"/>
+            <a:r>
+              <a:rPr lang="en-US"/>
+              <a:t>If(</a:t>
+            </a:r>
+            <a:r>
+              <a:rPr lang="en-US">
+                <a:solidFill>
+                  <a:srgbClr val="FFC000"/>
+                </a:solidFill>
+                <a:effectLst/>
+              </a:rPr>
+              <a:t>event</a:t>
+            </a:r>
+            <a:r>
+              <a:rPr lang="en-US">
+                <a:effectLst/>
+              </a:rPr>
+              <a:t>.key=== "</a:t>
+            </a:r>
+            <a:r>
+              <a:rPr lang="en-US">
+                <a:solidFill>
+                  <a:schemeClr val="accent1">
+                    <a:lumMod val="40000"/>
+                    <a:lumOff val="60000"/>
+                  </a:schemeClr>
+                </a:solidFill>
+                <a:effectLst/>
+              </a:rPr>
+              <a:t>Enter</a:t>
+            </a:r>
+            <a:r>
+              <a:rPr lang="en-US">
+                <a:effectLst/>
+              </a:rPr>
+              <a:t>"</a:t>
+            </a:r>
+            <a:r>
+              <a:rPr lang="en-US"/>
+              <a:t>) {}</a:t>
+            </a:r>
+          </a:p>
+          <a:p>
+            <a:r>
+              <a:rPr lang="en-US" b="1">
+                <a:solidFill>
+                  <a:srgbClr val="00B0F0"/>
+                </a:solidFill>
+              </a:rPr>
+              <a:t>TemplateRef&lt;T&gt;</a:t>
+            </a:r>
+          </a:p>
+          <a:p>
+            <a:pPr lvl="1"/>
+            <a:r>
+              <a:rPr lang="en-US"/>
+              <a:t>This is the official Angular type for any </a:t>
+            </a:r>
+            <a:r>
+              <a:rPr lang="en-US" b="1">
+                <a:solidFill>
+                  <a:srgbClr val="00B0F0"/>
+                </a:solidFill>
+              </a:rPr>
+              <a:t>&lt;ng-template&gt;</a:t>
+            </a:r>
+            <a:r>
+              <a:rPr lang="en-US"/>
+              <a:t> reference</a:t>
+            </a:r>
+          </a:p>
+          <a:p>
+            <a:r>
+              <a:rPr lang="en-US" b="1">
+                <a:solidFill>
+                  <a:srgbClr val="00B0F0"/>
+                </a:solidFill>
+              </a:rPr>
+              <a:t>ElementRef&lt;T&gt;</a:t>
+            </a:r>
+          </a:p>
+          <a:p>
+            <a:pPr lvl="1"/>
+            <a:r>
+              <a:rPr lang="en-US"/>
+              <a:t>is a class that gives you </a:t>
+            </a:r>
+            <a:r>
+              <a:rPr lang="en-US" b="1"/>
+              <a:t>direct access to a DOM element</a:t>
+            </a:r>
+            <a:r>
+              <a:rPr lang="en-US"/>
+              <a:t> inside your component</a:t>
+            </a:r>
+            <a:endParaRPr lang="en-US">
+              <a:effectLst/>
+            </a:endParaRPr>
+          </a:p>
+          <a:p>
+            <a:pPr lvl="1"/>
+            <a:r>
+              <a:rPr lang="en-US"/>
+              <a:t>usually used together with </a:t>
+            </a:r>
+            <a:r>
+              <a:rPr lang="en-US" b="1"/>
+              <a:t>@ViewChild</a:t>
+            </a:r>
+            <a:r>
+              <a:rPr lang="en-US"/>
+              <a:t>.</a:t>
+            </a:r>
+            <a:endParaRPr lang="en-US">
+              <a:effectLst/>
+            </a:endParaRPr>
+          </a:p>
+          <a:p>
+            <a:pPr lvl="1"/>
+            <a:r>
+              <a:rPr lang="en-US">
+                <a:effectLst/>
+              </a:rPr>
+              <a:t>Ex: </a:t>
+            </a:r>
+            <a:r>
+              <a:rPr lang="en-US" b="1">
+                <a:solidFill>
+                  <a:schemeClr val="tx1"/>
+                </a:solidFill>
+                <a:effectLst/>
+              </a:rPr>
+              <a:t>@</a:t>
+            </a:r>
+            <a:r>
+              <a:rPr lang="en-US" b="1">
+                <a:solidFill>
+                  <a:srgbClr val="FF0000"/>
+                </a:solidFill>
+                <a:effectLst/>
+              </a:rPr>
+              <a:t>ViewChild</a:t>
+            </a:r>
+            <a:r>
+              <a:rPr lang="en-US">
+                <a:effectLst/>
+              </a:rPr>
+              <a:t>('</a:t>
+            </a:r>
+            <a:r>
+              <a:rPr lang="en-US">
+                <a:solidFill>
+                  <a:srgbClr val="FFC000"/>
+                </a:solidFill>
+                <a:effectLst/>
+              </a:rPr>
+              <a:t>ColorHexCodeInput</a:t>
+            </a:r>
+            <a:r>
+              <a:rPr lang="en-US">
+                <a:effectLst/>
+              </a:rPr>
+              <a:t>') colorHexCodeInput!: </a:t>
+            </a:r>
+            <a:r>
+              <a:rPr lang="en-US" b="1">
+                <a:solidFill>
+                  <a:srgbClr val="00B0F0"/>
+                </a:solidFill>
+                <a:effectLst/>
+              </a:rPr>
+              <a:t>ElementRef</a:t>
+            </a:r>
+            <a:r>
+              <a:rPr lang="en-US">
+                <a:solidFill>
+                  <a:srgbClr val="0070C0"/>
+                </a:solidFill>
+                <a:effectLst/>
+              </a:rPr>
+              <a:t>&lt;</a:t>
+            </a:r>
+            <a:r>
+              <a:rPr lang="en-US" b="1">
+                <a:solidFill>
+                  <a:srgbClr val="00B0F0"/>
+                </a:solidFill>
+                <a:effectLst/>
+              </a:rPr>
+              <a:t>HTMLInputElement</a:t>
+            </a:r>
+            <a:r>
+              <a:rPr lang="en-US">
+                <a:solidFill>
+                  <a:srgbClr val="7030A0"/>
+                </a:solidFill>
+                <a:effectLst/>
+              </a:rPr>
+              <a:t>&gt;</a:t>
+            </a:r>
+            <a:r>
+              <a:rPr lang="en-US">
+                <a:effectLst/>
+              </a:rPr>
+              <a:t>;</a:t>
+            </a:r>
+          </a:p>
+          <a:p>
+            <a:r>
+              <a:rPr lang="en-US" b="1">
+                <a:solidFill>
+                  <a:srgbClr val="00B0F0"/>
+                </a:solidFill>
+                <a:effectLst/>
+              </a:rPr>
+              <a:t>NgbModalRef</a:t>
+            </a:r>
+          </a:p>
+          <a:p>
+            <a:pPr lvl="1"/>
+            <a:r>
+              <a:rPr lang="en-US">
+                <a:effectLst/>
+              </a:rPr>
+              <a:t>Modal </a:t>
+            </a:r>
+          </a:p>
+          <a:p>
+            <a:r>
+              <a:rPr lang="en-US" b="1">
+                <a:solidFill>
+                  <a:srgbClr val="00B0F0"/>
+                </a:solidFill>
+                <a:effectLst/>
+              </a:rPr>
+              <a:t>NgbActiveModal</a:t>
+            </a:r>
+          </a:p>
+          <a:p>
+            <a:r>
+              <a:rPr lang="en-US" b="1">
+                <a:solidFill>
+                  <a:srgbClr val="00B0F0"/>
+                </a:solidFill>
+                <a:effectLst/>
+              </a:rPr>
+              <a:t>NgbModal</a:t>
+            </a:r>
+          </a:p>
+        </p:txBody>
+      </p:sp>
+    </p:spTree>
+    <p:extLst>
+      <p:ext uri="{BB962C8B-B14F-4D97-AF65-F5344CB8AC3E}">
+        <p14:creationId xmlns:p14="http://schemas.microsoft.com/office/powerpoint/2010/main" val="949246702"/>
+      </p:ext>
+    </p:extLst>
+  </p:cSld>
+  <p:clrMapOvr>
+    <a:masterClrMapping/>
+  </p:clrMapOvr>
+</p:sld>
+</file>
+
+<file path=ppt/slides/slide51.xml><?xml version="1.0" encoding="utf-8"?>
+<p:sld xmlns:a="http://schemas.openxmlformats.org/drawingml/2006/main" xmlns:r="http://schemas.openxmlformats.org/officeDocument/2006/relationships" xmlns:p="http://schemas.openxmlformats.org/presentationml/2006/main">
+  <p:cSld>
+    <p:spTree>
+      <p:nvGrpSpPr>
+        <p:cNvPr id="1" name=""/>
+        <p:cNvGrpSpPr/>
+        <p:nvPr/>
+      </p:nvGrpSpPr>
+      <p:grpSpPr>
+        <a:xfrm>
+          <a:off x="0" y="0"/>
+          <a:ext cx="0" cy="0"/>
+          <a:chOff x="0" y="0"/>
+          <a:chExt cx="0" cy="0"/>
+        </a:xfrm>
+      </p:grpSpPr>
+      <p:sp>
+        <p:nvSpPr>
+          <p:cNvPr id="2" name="Title 1">
+            <a:extLst>
+              <a:ext uri="{FF2B5EF4-FFF2-40B4-BE49-F238E27FC236}">
+                <a16:creationId xmlns:a16="http://schemas.microsoft.com/office/drawing/2014/main" id="{61FAE7D7-0329-20B4-C625-E9F949BC116F}"/>
+              </a:ext>
+            </a:extLst>
+          </p:cNvPr>
+          <p:cNvSpPr>
+            <a:spLocks noGrp="1"/>
+          </p:cNvSpPr>
+          <p:nvPr>
+            <p:ph type="title"/>
+          </p:nvPr>
+        </p:nvSpPr>
+        <p:spPr>
+          <a:xfrm>
+            <a:off x="984133" y="0"/>
+            <a:ext cx="10353762" cy="643095"/>
+          </a:xfrm>
+        </p:spPr>
+        <p:txBody>
+          <a:bodyPr>
+            <a:normAutofit fontScale="90000"/>
+          </a:bodyPr>
+          <a:lstStyle/>
+          <a:p>
+            <a:r>
+              <a:rPr lang="en-US" b="1">
+                <a:solidFill>
+                  <a:srgbClr val="00B0F0"/>
+                </a:solidFill>
+              </a:rPr>
+              <a:t>New Variables</a:t>
+            </a:r>
+          </a:p>
+        </p:txBody>
+      </p:sp>
+      <p:sp>
+        <p:nvSpPr>
+          <p:cNvPr id="3" name="Content Placeholder 2">
+            <a:extLst>
+              <a:ext uri="{FF2B5EF4-FFF2-40B4-BE49-F238E27FC236}">
+                <a16:creationId xmlns:a16="http://schemas.microsoft.com/office/drawing/2014/main" id="{1D23B0FF-CD57-B24C-8D75-8E1123CFE1A2}"/>
+              </a:ext>
+            </a:extLst>
+          </p:cNvPr>
+          <p:cNvSpPr>
+            <a:spLocks noGrp="1"/>
+          </p:cNvSpPr>
+          <p:nvPr>
+            <p:ph idx="1"/>
+          </p:nvPr>
+        </p:nvSpPr>
+        <p:spPr>
+          <a:xfrm>
+            <a:off x="160774" y="643095"/>
+            <a:ext cx="11106783" cy="5988817"/>
+          </a:xfrm>
+        </p:spPr>
+        <p:txBody>
+          <a:bodyPr/>
+          <a:lstStyle/>
+          <a:p>
+            <a:r>
+              <a:rPr lang="en-US" sz="2400" b="1">
+                <a:solidFill>
+                  <a:srgbClr val="00B0F0"/>
+                </a:solidFill>
+              </a:rPr>
+              <a:t>$event</a:t>
+            </a:r>
+            <a:r>
+              <a:rPr lang="en-US"/>
+              <a:t>: </a:t>
+            </a:r>
+          </a:p>
+          <a:p>
+            <a:pPr lvl="1"/>
+            <a:r>
+              <a:rPr lang="en-US"/>
+              <a:t>a </a:t>
+            </a:r>
+            <a:r>
+              <a:rPr lang="en-US" b="1"/>
+              <a:t>special Angular template variable</a:t>
+            </a:r>
+            <a:r>
+              <a:rPr lang="en-US"/>
+              <a:t> that represents the emitted event object.</a:t>
+            </a:r>
+          </a:p>
+          <a:p>
+            <a:pPr lvl="1"/>
+            <a:r>
+              <a:rPr lang="en-US"/>
+              <a:t>$ is  a mendatory</a:t>
+            </a:r>
+          </a:p>
+          <a:p>
+            <a:r>
+              <a:rPr lang="en-US" b="1">
+                <a:solidFill>
+                  <a:srgbClr val="00B0F0"/>
+                </a:solidFill>
+              </a:rPr>
+              <a:t>#inputCount</a:t>
+            </a:r>
+            <a:r>
+              <a:rPr lang="en-US"/>
+              <a:t>: </a:t>
+            </a:r>
+          </a:p>
+          <a:p>
+            <a:pPr lvl="1"/>
+            <a:r>
+              <a:rPr lang="en-US"/>
+              <a:t>template variable</a:t>
+            </a:r>
+          </a:p>
+          <a:p>
+            <a:pPr lvl="1"/>
+            <a:r>
+              <a:rPr lang="en-US"/>
+              <a:t>we call it without #</a:t>
+            </a:r>
+          </a:p>
+          <a:p>
+            <a:endParaRPr lang="en-US"/>
+          </a:p>
+        </p:txBody>
+      </p:sp>
+    </p:spTree>
+    <p:extLst>
+      <p:ext uri="{BB962C8B-B14F-4D97-AF65-F5344CB8AC3E}">
+        <p14:creationId xmlns:p14="http://schemas.microsoft.com/office/powerpoint/2010/main" val="2574759449"/>
+      </p:ext>
+    </p:extLst>
+  </p:cSld>
+  <p:clrMapOvr>
+    <a:masterClrMapping/>
+  </p:clrMapOvr>
+</p:sld>
+</file>
+
+<file path=ppt/slides/slide52.xml><?xml version="1.0" encoding="utf-8"?>
+<p:sld xmlns:a="http://schemas.openxmlformats.org/drawingml/2006/main" xmlns:r="http://schemas.openxmlformats.org/officeDocument/2006/relationships" xmlns:p="http://schemas.openxmlformats.org/presentationml/2006/main">
+  <p:cSld>
+    <p:spTree>
+      <p:nvGrpSpPr>
+        <p:cNvPr id="1" name=""/>
+        <p:cNvGrpSpPr/>
+        <p:nvPr/>
+      </p:nvGrpSpPr>
+      <p:grpSpPr>
+        <a:xfrm>
+          <a:off x="0" y="0"/>
+          <a:ext cx="0" cy="0"/>
+          <a:chOff x="0" y="0"/>
+          <a:chExt cx="0" cy="0"/>
+        </a:xfrm>
+      </p:grpSpPr>
+      <p:sp>
+        <p:nvSpPr>
+          <p:cNvPr id="2" name="Title 1">
+            <a:extLst>
+              <a:ext uri="{FF2B5EF4-FFF2-40B4-BE49-F238E27FC236}">
+                <a16:creationId xmlns:a16="http://schemas.microsoft.com/office/drawing/2014/main" id="{75098596-4391-88B0-AD29-4D64D57D3194}"/>
+              </a:ext>
+            </a:extLst>
+          </p:cNvPr>
+          <p:cNvSpPr>
+            <a:spLocks noGrp="1"/>
+          </p:cNvSpPr>
+          <p:nvPr>
+            <p:ph type="title"/>
+          </p:nvPr>
+        </p:nvSpPr>
+        <p:spPr>
+          <a:xfrm>
+            <a:off x="913795" y="0"/>
+            <a:ext cx="10353762" cy="633046"/>
+          </a:xfrm>
+        </p:spPr>
+        <p:txBody>
+          <a:bodyPr>
+            <a:normAutofit fontScale="90000"/>
+          </a:bodyPr>
+          <a:lstStyle/>
+          <a:p>
+            <a:r>
+              <a:rPr lang="en-US"/>
+              <a:t>Modal</a:t>
+            </a:r>
+          </a:p>
+        </p:txBody>
+      </p:sp>
+      <p:sp>
+        <p:nvSpPr>
+          <p:cNvPr id="3" name="Content Placeholder 2">
+            <a:extLst>
+              <a:ext uri="{FF2B5EF4-FFF2-40B4-BE49-F238E27FC236}">
+                <a16:creationId xmlns:a16="http://schemas.microsoft.com/office/drawing/2014/main" id="{5EA1C6CC-2375-1E48-862C-B483B36EB60C}"/>
+              </a:ext>
+            </a:extLst>
+          </p:cNvPr>
+          <p:cNvSpPr>
+            <a:spLocks noGrp="1"/>
+          </p:cNvSpPr>
+          <p:nvPr>
+            <p:ph idx="1"/>
+          </p:nvPr>
+        </p:nvSpPr>
+        <p:spPr>
+          <a:xfrm>
+            <a:off x="913795" y="633047"/>
+            <a:ext cx="10353762" cy="5158154"/>
+          </a:xfrm>
+        </p:spPr>
+        <p:txBody>
+          <a:bodyPr/>
+          <a:lstStyle/>
+          <a:p>
+            <a:r>
+              <a:rPr lang="en-US">
+                <a:effectLst/>
+              </a:rPr>
+              <a:t>  import { </a:t>
+            </a:r>
+            <a:r>
+              <a:rPr lang="en-US">
+                <a:solidFill>
+                  <a:srgbClr val="00B0F0"/>
+                </a:solidFill>
+                <a:effectLst/>
+              </a:rPr>
+              <a:t>NgbModal</a:t>
+            </a:r>
+            <a:r>
+              <a:rPr lang="en-US">
+                <a:effectLst/>
+              </a:rPr>
+              <a:t>, </a:t>
+            </a:r>
+            <a:r>
+              <a:rPr lang="en-US" b="1">
+                <a:solidFill>
+                  <a:srgbClr val="00B0F0"/>
+                </a:solidFill>
+                <a:effectLst/>
+              </a:rPr>
+              <a:t>NgbModalRef</a:t>
+            </a:r>
+            <a:r>
+              <a:rPr lang="en-US">
+                <a:effectLst/>
+              </a:rPr>
+              <a:t> } from '@ng-bootstrap/ng-bootstrap';</a:t>
+            </a:r>
+          </a:p>
+          <a:p>
+            <a:endParaRPr lang="en-US"/>
+          </a:p>
+        </p:txBody>
+      </p:sp>
+    </p:spTree>
+    <p:extLst>
+      <p:ext uri="{BB962C8B-B14F-4D97-AF65-F5344CB8AC3E}">
+        <p14:creationId xmlns:p14="http://schemas.microsoft.com/office/powerpoint/2010/main" val="1927891169"/>
+      </p:ext>
+    </p:extLst>
+  </p:cSld>
+  <p:clrMapOvr>
+    <a:masterClrMapping/>
+  </p:clrMapOvr>
+</p:sld>
+</file>
+
+<file path=ppt/slides/slide53.xml><?xml version="1.0" encoding="utf-8"?>
+<p:sld xmlns:a="http://schemas.openxmlformats.org/drawingml/2006/main" xmlns:r="http://schemas.openxmlformats.org/officeDocument/2006/relationships" xmlns:p="http://schemas.openxmlformats.org/presentationml/2006/main">
+  <p:cSld>
+    <p:spTree>
+      <p:nvGrpSpPr>
+        <p:cNvPr id="1" name=""/>
+        <p:cNvGrpSpPr/>
+        <p:nvPr/>
+      </p:nvGrpSpPr>
+      <p:grpSpPr>
+        <a:xfrm>
+          <a:off x="0" y="0"/>
+          <a:ext cx="0" cy="0"/>
+          <a:chOff x="0" y="0"/>
+          <a:chExt cx="0" cy="0"/>
+        </a:xfrm>
+      </p:grpSpPr>
+      <p:sp>
+        <p:nvSpPr>
+          <p:cNvPr id="2" name="Title 1">
+            <a:extLst>
+              <a:ext uri="{FF2B5EF4-FFF2-40B4-BE49-F238E27FC236}">
+                <a16:creationId xmlns:a16="http://schemas.microsoft.com/office/drawing/2014/main" id="{A0205F32-0908-AE4A-42DB-A37AFD33EB8E}"/>
+              </a:ext>
+            </a:extLst>
+          </p:cNvPr>
+          <p:cNvSpPr>
+            <a:spLocks noGrp="1"/>
+          </p:cNvSpPr>
+          <p:nvPr>
+            <p:ph type="title"/>
+          </p:nvPr>
+        </p:nvSpPr>
+        <p:spPr>
+          <a:xfrm>
+            <a:off x="919119" y="2120202"/>
+            <a:ext cx="10353762" cy="1778558"/>
+          </a:xfrm>
+        </p:spPr>
+        <p:txBody>
+          <a:bodyPr>
+            <a:normAutofit/>
+          </a:bodyPr>
+          <a:lstStyle/>
+          <a:p>
+            <a:r>
+              <a:rPr lang="en-US" sz="4800" b="1">
+                <a:solidFill>
+                  <a:srgbClr val="FF0000"/>
+                </a:solidFill>
+              </a:rPr>
+              <a:t>Angular Material </a:t>
+            </a:r>
+          </a:p>
+        </p:txBody>
+      </p:sp>
+    </p:spTree>
+    <p:extLst>
+      <p:ext uri="{BB962C8B-B14F-4D97-AF65-F5344CB8AC3E}">
+        <p14:creationId xmlns:p14="http://schemas.microsoft.com/office/powerpoint/2010/main" val="3626811731"/>
+      </p:ext>
+    </p:extLst>
+  </p:cSld>
+  <p:clrMapOvr>
+    <a:masterClrMapping/>
+  </p:clrMapOvr>
+</p:sld>
+</file>
+
+<file path=ppt/slides/slide54.xml><?xml version="1.0" encoding="utf-8"?>
+<p:sld xmlns:a="http://schemas.openxmlformats.org/drawingml/2006/main" xmlns:r="http://schemas.openxmlformats.org/officeDocument/2006/relationships" xmlns:p="http://schemas.openxmlformats.org/presentationml/2006/main">
+  <p:cSld>
+    <p:spTree>
+      <p:nvGrpSpPr>
+        <p:cNvPr id="1" name=""/>
+        <p:cNvGrpSpPr/>
+        <p:nvPr/>
+      </p:nvGrpSpPr>
+      <p:grpSpPr>
+        <a:xfrm>
+          <a:off x="0" y="0"/>
+          <a:ext cx="0" cy="0"/>
+          <a:chOff x="0" y="0"/>
+          <a:chExt cx="0" cy="0"/>
+        </a:xfrm>
+      </p:grpSpPr>
+      <p:sp>
+        <p:nvSpPr>
+          <p:cNvPr id="2" name="Title 1">
+            <a:extLst>
+              <a:ext uri="{FF2B5EF4-FFF2-40B4-BE49-F238E27FC236}">
+                <a16:creationId xmlns:a16="http://schemas.microsoft.com/office/drawing/2014/main" id="{EE40E7BC-D472-1FBC-B850-0F6CE4166AE4}"/>
+              </a:ext>
+            </a:extLst>
+          </p:cNvPr>
+          <p:cNvSpPr>
+            <a:spLocks noGrp="1"/>
+          </p:cNvSpPr>
+          <p:nvPr>
+            <p:ph type="title"/>
+          </p:nvPr>
+        </p:nvSpPr>
+        <p:spPr>
+          <a:xfrm>
+            <a:off x="913795" y="609600"/>
+            <a:ext cx="10353762" cy="827314"/>
+          </a:xfrm>
+        </p:spPr>
+        <p:txBody>
+          <a:bodyPr/>
+          <a:lstStyle/>
+          <a:p>
+            <a:r>
+              <a:rPr lang="en-US"/>
+              <a:t>Installation</a:t>
+            </a:r>
+          </a:p>
+        </p:txBody>
+      </p:sp>
+      <p:sp>
+        <p:nvSpPr>
+          <p:cNvPr id="3" name="Content Placeholder 2">
+            <a:extLst>
+              <a:ext uri="{FF2B5EF4-FFF2-40B4-BE49-F238E27FC236}">
+                <a16:creationId xmlns:a16="http://schemas.microsoft.com/office/drawing/2014/main" id="{514126CE-284C-2EF0-0815-366F73A647D1}"/>
+              </a:ext>
+            </a:extLst>
+          </p:cNvPr>
+          <p:cNvSpPr>
+            <a:spLocks noGrp="1"/>
+          </p:cNvSpPr>
+          <p:nvPr>
+            <p:ph idx="1"/>
+          </p:nvPr>
+        </p:nvSpPr>
+        <p:spPr>
+          <a:xfrm>
+            <a:off x="913795" y="1732449"/>
+            <a:ext cx="10353762" cy="4859270"/>
+          </a:xfrm>
+        </p:spPr>
+        <p:txBody>
+          <a:bodyPr>
+            <a:normAutofit/>
+          </a:bodyPr>
+          <a:lstStyle/>
+          <a:p>
+            <a:r>
+              <a:rPr lang="en-US" b="1">
+                <a:solidFill>
+                  <a:srgbClr val="FF0000"/>
+                </a:solidFill>
+              </a:rPr>
+              <a:t>ng add @angular/material</a:t>
+            </a:r>
+          </a:p>
+          <a:p>
+            <a:r>
+              <a:rPr lang="en-US">
+                <a:latin typeface="+mj-lt"/>
+                <a:ea typeface="+mj-ea"/>
+              </a:rPr>
+              <a:t>Choose a prebuilt theme name, or "custom" for a custom theme: Azure/Blue</a:t>
+            </a:r>
+          </a:p>
+          <a:p>
+            <a:r>
+              <a:rPr lang="en-US">
+                <a:latin typeface="+mj-lt"/>
+                <a:ea typeface="+mj-ea"/>
+              </a:rPr>
+              <a:t>At angular.json </a:t>
+            </a:r>
+          </a:p>
+          <a:p>
+            <a:pPr lvl="1"/>
+            <a:r>
+              <a:rPr lang="en-US">
+                <a:latin typeface="+mj-lt"/>
+                <a:ea typeface="+mj-ea"/>
+              </a:rPr>
+              <a:t>At style : </a:t>
+            </a:r>
+            <a:r>
+              <a:rPr lang="en-US">
+                <a:effectLst/>
+              </a:rPr>
+              <a:t>"@angular/material/prebuilt-themes/azure-blue.css"</a:t>
+            </a:r>
+            <a:endParaRPr lang="en-US">
+              <a:latin typeface="+mj-lt"/>
+              <a:ea typeface="+mj-ea"/>
+            </a:endParaRPr>
+          </a:p>
+          <a:p>
+            <a:r>
+              <a:rPr lang="en-US">
+                <a:latin typeface="+mj-lt"/>
+                <a:ea typeface="+mj-ea"/>
+              </a:rPr>
+              <a:t> </a:t>
+            </a:r>
+            <a:endParaRPr lang="en-US" sz="3600">
+              <a:latin typeface="+mj-lt"/>
+              <a:ea typeface="+mj-ea"/>
+            </a:endParaRPr>
+          </a:p>
+        </p:txBody>
+      </p:sp>
+    </p:spTree>
+    <p:extLst>
+      <p:ext uri="{BB962C8B-B14F-4D97-AF65-F5344CB8AC3E}">
+        <p14:creationId xmlns:p14="http://schemas.microsoft.com/office/powerpoint/2010/main" val="2834084368"/>
+      </p:ext>
+    </p:extLst>
+  </p:cSld>
+  <p:clrMapOvr>
+    <a:masterClrMapping/>
+  </p:clrMapOvr>
+</p:sld>
+</file>
+
+<file path=ppt/slides/slide55.xml><?xml version="1.0" encoding="utf-8"?>
+<p:sld xmlns:a="http://schemas.openxmlformats.org/drawingml/2006/main" xmlns:r="http://schemas.openxmlformats.org/officeDocument/2006/relationships" xmlns:p="http://schemas.openxmlformats.org/presentationml/2006/main">
+  <p:cSld>
+    <p:spTree>
+      <p:nvGrpSpPr>
+        <p:cNvPr id="1" name=""/>
+        <p:cNvGrpSpPr/>
+        <p:nvPr/>
+      </p:nvGrpSpPr>
+      <p:grpSpPr>
+        <a:xfrm>
+          <a:off x="0" y="0"/>
+          <a:ext cx="0" cy="0"/>
+          <a:chOff x="0" y="0"/>
+          <a:chExt cx="0" cy="0"/>
+        </a:xfrm>
+      </p:grpSpPr>
+      <p:sp>
+        <p:nvSpPr>
+          <p:cNvPr id="2" name="Title 1">
+            <a:extLst>
+              <a:ext uri="{FF2B5EF4-FFF2-40B4-BE49-F238E27FC236}">
+                <a16:creationId xmlns:a16="http://schemas.microsoft.com/office/drawing/2014/main" id="{6CA6A21D-6DF8-A5B7-D472-3D5757185AE2}"/>
+              </a:ext>
+            </a:extLst>
+          </p:cNvPr>
+          <p:cNvSpPr>
+            <a:spLocks noGrp="1"/>
+          </p:cNvSpPr>
+          <p:nvPr>
+            <p:ph type="title"/>
+          </p:nvPr>
+        </p:nvSpPr>
+        <p:spPr>
+          <a:xfrm>
+            <a:off x="211014" y="1"/>
+            <a:ext cx="11056543" cy="462224"/>
+          </a:xfrm>
+        </p:spPr>
+        <p:txBody>
+          <a:bodyPr>
+            <a:normAutofit fontScale="90000"/>
+          </a:bodyPr>
+          <a:lstStyle/>
+          <a:p>
+            <a:r>
+              <a:rPr lang="en-US" b="1">
+                <a:solidFill>
+                  <a:srgbClr val="FF0000"/>
+                </a:solidFill>
+                <a:effectLst/>
+              </a:rPr>
+              <a:t>mat-paginator</a:t>
+            </a:r>
+            <a:endParaRPr lang="en-US" b="1">
+              <a:solidFill>
+                <a:srgbClr val="FF0000"/>
+              </a:solidFill>
+            </a:endParaRPr>
+          </a:p>
+        </p:txBody>
+      </p:sp>
+      <p:sp>
+        <p:nvSpPr>
+          <p:cNvPr id="3" name="Content Placeholder 2">
+            <a:extLst>
+              <a:ext uri="{FF2B5EF4-FFF2-40B4-BE49-F238E27FC236}">
+                <a16:creationId xmlns:a16="http://schemas.microsoft.com/office/drawing/2014/main" id="{85EE85BD-0B8A-0C35-5AF5-C02BB1A536F2}"/>
+              </a:ext>
+            </a:extLst>
+          </p:cNvPr>
+          <p:cNvSpPr>
+            <a:spLocks noGrp="1"/>
+          </p:cNvSpPr>
+          <p:nvPr>
+            <p:ph idx="1"/>
+          </p:nvPr>
+        </p:nvSpPr>
+        <p:spPr>
+          <a:xfrm>
+            <a:off x="211014" y="462226"/>
+            <a:ext cx="11796765" cy="6395774"/>
+          </a:xfrm>
+        </p:spPr>
+        <p:txBody>
+          <a:bodyPr>
+            <a:normAutofit fontScale="92500" lnSpcReduction="20000"/>
+          </a:bodyPr>
+          <a:lstStyle/>
+          <a:p>
+            <a:r>
+              <a:rPr lang="en-US">
+                <a:effectLst/>
+              </a:rPr>
+              <a:t>  imports: [MatPaginatorModule],</a:t>
+            </a:r>
+          </a:p>
+          <a:p>
+            <a:endParaRPr lang="en-US">
+              <a:effectLst/>
+            </a:endParaRPr>
+          </a:p>
+          <a:p>
+            <a:endParaRPr lang="en-US">
+              <a:effectLst/>
+            </a:endParaRPr>
+          </a:p>
+          <a:p>
+            <a:endParaRPr lang="en-US">
+              <a:effectLst/>
+            </a:endParaRPr>
+          </a:p>
+          <a:p>
+            <a:endParaRPr lang="en-US">
+              <a:effectLst/>
+            </a:endParaRPr>
+          </a:p>
+          <a:p>
+            <a:pPr marL="36900" indent="0">
+              <a:buNone/>
+            </a:pPr>
+            <a:endParaRPr lang="en-US">
+              <a:effectLst/>
+            </a:endParaRPr>
+          </a:p>
+          <a:p>
+            <a:endParaRPr lang="en-US">
+              <a:effectLst/>
+            </a:endParaRPr>
+          </a:p>
+          <a:p>
+            <a:endParaRPr lang="en-US">
+              <a:effectLst/>
+            </a:endParaRPr>
+          </a:p>
+          <a:p>
+            <a:r>
+              <a:rPr lang="en-US">
+                <a:effectLst/>
+              </a:rPr>
+              <a:t>(page) </a:t>
+            </a:r>
+          </a:p>
+          <a:p>
+            <a:pPr lvl="1"/>
+            <a:r>
+              <a:rPr lang="en-US" b="1">
+                <a:solidFill>
+                  <a:srgbClr val="00B0F0"/>
+                </a:solidFill>
+                <a:effectLst/>
+              </a:rPr>
+              <a:t>declare</a:t>
+            </a:r>
+            <a:r>
+              <a:rPr lang="en-US">
+                <a:effectLst/>
+              </a:rPr>
+              <a:t> (event) MatPaginator.page: </a:t>
+            </a:r>
+            <a:r>
+              <a:rPr lang="en-US">
+                <a:solidFill>
+                  <a:srgbClr val="00B0F0"/>
+                </a:solidFill>
+                <a:effectLst/>
+              </a:rPr>
+              <a:t>EventEmitter</a:t>
+            </a:r>
+            <a:r>
+              <a:rPr lang="en-US">
+                <a:effectLst/>
+              </a:rPr>
+              <a:t>&lt;</a:t>
+            </a:r>
+            <a:r>
+              <a:rPr lang="en-US" b="1">
+                <a:solidFill>
+                  <a:srgbClr val="FFFF00"/>
+                </a:solidFill>
+                <a:effectLst/>
+              </a:rPr>
+              <a:t>PageEvent</a:t>
+            </a:r>
+            <a:r>
+              <a:rPr lang="en-US">
+                <a:effectLst/>
+              </a:rPr>
+              <a:t>&gt;</a:t>
+            </a:r>
+          </a:p>
+          <a:p>
+            <a:pPr lvl="1"/>
+            <a:r>
+              <a:rPr lang="en-US">
+                <a:effectLst/>
+              </a:rPr>
+              <a:t>It wait a method that has </a:t>
+            </a:r>
+            <a:r>
+              <a:rPr lang="en-US" b="1">
+                <a:solidFill>
+                  <a:srgbClr val="00B0F0"/>
+                </a:solidFill>
+                <a:effectLst/>
+              </a:rPr>
+              <a:t>PageEvent</a:t>
+            </a:r>
+            <a:r>
+              <a:rPr lang="en-US">
+                <a:effectLst/>
+              </a:rPr>
+              <a:t> as parameter</a:t>
+            </a:r>
+          </a:p>
+          <a:p>
+            <a:pPr lvl="1"/>
+            <a:r>
+              <a:rPr lang="en-US">
+                <a:effectLst/>
+              </a:rPr>
+              <a:t>Event emitted when the paginator changes the </a:t>
+            </a:r>
+            <a:r>
+              <a:rPr lang="en-US" b="1">
+                <a:solidFill>
+                  <a:srgbClr val="00B0F0"/>
+                </a:solidFill>
+                <a:effectLst/>
+              </a:rPr>
+              <a:t>page size</a:t>
+            </a:r>
+            <a:r>
+              <a:rPr lang="en-US">
+                <a:effectLst/>
+              </a:rPr>
+              <a:t> or </a:t>
+            </a:r>
+            <a:r>
+              <a:rPr lang="en-US">
+                <a:solidFill>
+                  <a:srgbClr val="00B0F0"/>
+                </a:solidFill>
+                <a:effectLst/>
+              </a:rPr>
+              <a:t>page index</a:t>
+            </a:r>
+            <a:r>
+              <a:rPr lang="en-US">
+                <a:effectLst/>
+              </a:rPr>
+              <a:t>.</a:t>
+            </a:r>
+          </a:p>
+          <a:p>
+            <a:r>
+              <a:rPr lang="en-US" b="1"/>
+              <a:t>What PageEvent contains</a:t>
+            </a:r>
+          </a:p>
+          <a:p>
+            <a:pPr lvl="1"/>
+            <a:r>
+              <a:rPr lang="en-US" b="1">
+                <a:solidFill>
+                  <a:srgbClr val="FF0000"/>
+                </a:solidFill>
+              </a:rPr>
+              <a:t>pageIndex</a:t>
+            </a:r>
+            <a:r>
+              <a:rPr lang="en-US"/>
+              <a:t>: number;</a:t>
+            </a:r>
+          </a:p>
+          <a:p>
+            <a:pPr lvl="1"/>
+            <a:r>
+              <a:rPr lang="en-US"/>
+              <a:t>previousPageIndex?: number;</a:t>
+            </a:r>
+          </a:p>
+          <a:p>
+            <a:pPr lvl="1"/>
+            <a:r>
+              <a:rPr lang="en-US"/>
+              <a:t>pageSize: number;</a:t>
+            </a:r>
+          </a:p>
+          <a:p>
+            <a:pPr lvl="1"/>
+            <a:r>
+              <a:rPr lang="en-US"/>
+              <a:t>length: number;</a:t>
+            </a:r>
+            <a:br>
+              <a:rPr lang="en-US">
+                <a:effectLst/>
+              </a:rPr>
+            </a:br>
+            <a:endParaRPr lang="en-US"/>
+          </a:p>
+        </p:txBody>
+      </p:sp>
+      <p:sp>
+        <p:nvSpPr>
+          <p:cNvPr id="4" name="Rectangle 3">
+            <a:extLst>
+              <a:ext uri="{FF2B5EF4-FFF2-40B4-BE49-F238E27FC236}">
+                <a16:creationId xmlns:a16="http://schemas.microsoft.com/office/drawing/2014/main" id="{C20D9F5A-5887-5391-D285-66BAF23707C6}"/>
+              </a:ext>
+            </a:extLst>
+          </p:cNvPr>
+          <p:cNvSpPr/>
+          <p:nvPr/>
+        </p:nvSpPr>
+        <p:spPr>
+          <a:xfrm>
+            <a:off x="211014" y="861644"/>
+            <a:ext cx="5687368" cy="2567356"/>
+          </a:xfrm>
+          <a:prstGeom prst="rect">
+            <a:avLst/>
+          </a:prstGeom>
+          <a:solidFill>
+            <a:schemeClr val="tx2">
+              <a:lumMod val="10000"/>
+            </a:schemeClr>
+          </a:solidFill>
+        </p:spPr>
+        <p:style>
+          <a:lnRef idx="2">
+            <a:schemeClr val="accent1">
+              <a:shade val="15000"/>
+            </a:schemeClr>
+          </a:lnRef>
+          <a:fillRef idx="1">
+            <a:schemeClr val="accent1"/>
+          </a:fillRef>
+          <a:effectRef idx="0">
+            <a:schemeClr val="accent1"/>
+          </a:effectRef>
+          <a:fontRef idx="minor">
+            <a:schemeClr val="lt1"/>
+          </a:fontRef>
+        </p:style>
+        <p:txBody>
+          <a:bodyPr rtlCol="0" anchor="ctr"/>
+          <a:lstStyle/>
+          <a:p>
+            <a:r>
+              <a:rPr lang="en-US">
+                <a:solidFill>
+                  <a:srgbClr val="FFC000"/>
+                </a:solidFill>
+              </a:rPr>
+              <a:t>&lt;</a:t>
+            </a:r>
+            <a:r>
+              <a:rPr lang="en-US" b="1">
+                <a:solidFill>
+                  <a:srgbClr val="FFC000"/>
+                </a:solidFill>
+              </a:rPr>
+              <a:t>mat-paginator</a:t>
+            </a:r>
+          </a:p>
+          <a:p>
+            <a:r>
+              <a:rPr lang="en-US"/>
+              <a:t>            </a:t>
+            </a:r>
+            <a:r>
+              <a:rPr lang="en-US">
+                <a:solidFill>
+                  <a:srgbClr val="00B0F0"/>
+                </a:solidFill>
+              </a:rPr>
+              <a:t>[pageSizeOptions]</a:t>
+            </a:r>
+            <a:r>
+              <a:rPr lang="en-US"/>
+              <a:t>="[4,8,10,15]"</a:t>
+            </a:r>
+          </a:p>
+          <a:p>
+            <a:r>
+              <a:rPr lang="en-US">
+                <a:solidFill>
+                  <a:srgbClr val="00B0F0"/>
+                </a:solidFill>
+              </a:rPr>
+              <a:t>            [length]</a:t>
+            </a:r>
+            <a:r>
+              <a:rPr lang="en-US"/>
+              <a:t>="PaginationResult?.totalCount"</a:t>
+            </a:r>
+          </a:p>
+          <a:p>
+            <a:r>
+              <a:rPr lang="en-US"/>
+              <a:t>            </a:t>
+            </a:r>
+            <a:r>
+              <a:rPr lang="en-US">
+                <a:solidFill>
+                  <a:srgbClr val="00B0F0"/>
+                </a:solidFill>
+              </a:rPr>
+              <a:t>[pageSize]</a:t>
+            </a:r>
+            <a:r>
+              <a:rPr lang="en-US"/>
+              <a:t>="PaginationResult?.pageSize"</a:t>
+            </a:r>
+          </a:p>
+          <a:p>
+            <a:r>
+              <a:rPr lang="en-US"/>
+              <a:t>            </a:t>
+            </a:r>
+            <a:r>
+              <a:rPr lang="en-US">
+                <a:solidFill>
+                  <a:srgbClr val="00B0F0"/>
+                </a:solidFill>
+              </a:rPr>
+              <a:t>[pageIndex]</a:t>
+            </a:r>
+            <a:r>
+              <a:rPr lang="en-US"/>
+              <a:t>="PaginationResult?.currentPage! -1"</a:t>
+            </a:r>
+          </a:p>
+          <a:p>
+            <a:r>
+              <a:rPr lang="en-US"/>
+              <a:t>	    </a:t>
+            </a:r>
+            <a:r>
+              <a:rPr lang="en-US">
+                <a:solidFill>
+                  <a:srgbClr val="00B0F0"/>
+                </a:solidFill>
+              </a:rPr>
+              <a:t>[showFirstLastButtons]</a:t>
+            </a:r>
+            <a:r>
+              <a:rPr lang="en-US"/>
+              <a:t>="true"</a:t>
+            </a:r>
+          </a:p>
+          <a:p>
+            <a:r>
+              <a:rPr lang="en-US"/>
+              <a:t>            </a:t>
+            </a:r>
+            <a:r>
+              <a:rPr lang="en-US" b="1">
+                <a:solidFill>
+                  <a:srgbClr val="00B0F0"/>
+                </a:solidFill>
+              </a:rPr>
+              <a:t>(page)</a:t>
+            </a:r>
+            <a:r>
+              <a:rPr lang="en-US"/>
+              <a:t>="onPageChange</a:t>
+            </a:r>
+            <a:r>
+              <a:rPr lang="en-US" b="1">
+                <a:solidFill>
+                  <a:srgbClr val="FFFF00"/>
+                </a:solidFill>
+              </a:rPr>
+              <a:t>($event</a:t>
+            </a:r>
+            <a:r>
+              <a:rPr lang="en-US"/>
+              <a:t>)"&gt;</a:t>
+            </a:r>
+          </a:p>
+          <a:p>
+            <a:r>
+              <a:rPr lang="en-US"/>
+              <a:t> </a:t>
+            </a:r>
+            <a:r>
+              <a:rPr lang="en-US" b="1">
+                <a:solidFill>
+                  <a:srgbClr val="FFC000"/>
+                </a:solidFill>
+              </a:rPr>
+              <a:t>&lt;/mat-paginator&gt;</a:t>
+            </a:r>
+          </a:p>
+          <a:p>
+            <a:pPr algn="ctr"/>
+            <a:endParaRPr lang="en-US"/>
+          </a:p>
+        </p:txBody>
+      </p:sp>
+      <p:sp>
+        <p:nvSpPr>
+          <p:cNvPr id="5" name="Rectangle 4">
+            <a:extLst>
+              <a:ext uri="{FF2B5EF4-FFF2-40B4-BE49-F238E27FC236}">
+                <a16:creationId xmlns:a16="http://schemas.microsoft.com/office/drawing/2014/main" id="{43860A90-BE1A-F628-1F3F-C993BDBFAF6E}"/>
+              </a:ext>
+            </a:extLst>
+          </p:cNvPr>
+          <p:cNvSpPr/>
+          <p:nvPr/>
+        </p:nvSpPr>
+        <p:spPr>
+          <a:xfrm>
+            <a:off x="6162991" y="974690"/>
+            <a:ext cx="6029009" cy="2567356"/>
+          </a:xfrm>
+          <a:prstGeom prst="rect">
+            <a:avLst/>
+          </a:prstGeom>
+          <a:solidFill>
+            <a:schemeClr val="tx2">
+              <a:lumMod val="10000"/>
+            </a:schemeClr>
+          </a:solidFill>
+        </p:spPr>
+        <p:style>
+          <a:lnRef idx="2">
+            <a:schemeClr val="accent1">
+              <a:shade val="15000"/>
+            </a:schemeClr>
+          </a:lnRef>
+          <a:fillRef idx="1">
+            <a:schemeClr val="accent1"/>
+          </a:fillRef>
+          <a:effectRef idx="0">
+            <a:schemeClr val="accent1"/>
+          </a:effectRef>
+          <a:fontRef idx="minor">
+            <a:schemeClr val="lt1"/>
+          </a:fontRef>
+        </p:style>
+        <p:txBody>
+          <a:bodyPr rtlCol="0" anchor="ctr"/>
+          <a:lstStyle/>
+          <a:p>
+            <a:r>
+              <a:rPr lang="en-US" b="1">
+                <a:solidFill>
+                  <a:srgbClr val="00B0F0"/>
+                </a:solidFill>
+              </a:rPr>
+              <a:t>onPageChange</a:t>
+            </a:r>
+            <a:r>
+              <a:rPr lang="en-US"/>
+              <a:t>(</a:t>
+            </a:r>
+            <a:r>
+              <a:rPr lang="en-US">
+                <a:solidFill>
+                  <a:srgbClr val="92D050"/>
+                </a:solidFill>
+              </a:rPr>
+              <a:t>pageEvent</a:t>
+            </a:r>
+            <a:r>
+              <a:rPr lang="en-US"/>
+              <a:t>: </a:t>
+            </a:r>
+            <a:r>
+              <a:rPr lang="en-US">
+                <a:solidFill>
+                  <a:srgbClr val="00B050"/>
+                </a:solidFill>
+              </a:rPr>
+              <a:t>PageEvent</a:t>
+            </a:r>
+            <a:r>
+              <a:rPr lang="en-US"/>
+              <a:t>) {</a:t>
+            </a:r>
+          </a:p>
+          <a:p>
+            <a:r>
+              <a:rPr lang="en-US"/>
+              <a:t>    </a:t>
+            </a:r>
+            <a:r>
+              <a:rPr lang="en-US">
+                <a:solidFill>
+                  <a:srgbClr val="00B0F0"/>
+                </a:solidFill>
+              </a:rPr>
+              <a:t>this</a:t>
+            </a:r>
+            <a:r>
+              <a:rPr lang="en-US"/>
+              <a:t>.PageParam.PageNumber = pageEvent.pageIndex+1;</a:t>
+            </a:r>
+          </a:p>
+          <a:p>
+            <a:r>
+              <a:rPr lang="en-US"/>
+              <a:t>    </a:t>
+            </a:r>
+            <a:r>
+              <a:rPr lang="en-US">
+                <a:solidFill>
+                  <a:srgbClr val="00B0F0"/>
+                </a:solidFill>
+              </a:rPr>
+              <a:t>this</a:t>
+            </a:r>
+            <a:r>
+              <a:rPr lang="en-US"/>
+              <a:t>.PageParam.PageSize = pageEvent.pageSize;</a:t>
+            </a:r>
+          </a:p>
+          <a:p>
+            <a:r>
+              <a:rPr lang="en-US"/>
+              <a:t>    </a:t>
+            </a:r>
+            <a:r>
+              <a:rPr lang="en-US">
+                <a:solidFill>
+                  <a:srgbClr val="00B0F0"/>
+                </a:solidFill>
+              </a:rPr>
+              <a:t>this</a:t>
+            </a:r>
+            <a:r>
+              <a:rPr lang="en-US"/>
+              <a:t>.</a:t>
+            </a:r>
+            <a:r>
+              <a:rPr lang="en-US" b="1">
+                <a:solidFill>
+                  <a:srgbClr val="FFC000"/>
+                </a:solidFill>
+              </a:rPr>
+              <a:t>GetPagedList</a:t>
+            </a:r>
+            <a:r>
+              <a:rPr lang="en-US"/>
+              <a:t>();</a:t>
+            </a:r>
+          </a:p>
+          <a:p>
+            <a:r>
+              <a:rPr lang="en-US"/>
+              <a:t>  }</a:t>
+            </a:r>
+          </a:p>
+        </p:txBody>
+      </p:sp>
+    </p:spTree>
+    <p:extLst>
+      <p:ext uri="{BB962C8B-B14F-4D97-AF65-F5344CB8AC3E}">
+        <p14:creationId xmlns:p14="http://schemas.microsoft.com/office/powerpoint/2010/main" val="3721040554"/>
+      </p:ext>
+    </p:extLst>
+  </p:cSld>
+  <p:clrMapOvr>
+    <a:masterClrMapping/>
+  </p:clrMapOvr>
+</p:sld>
+</file>
+
+<file path=ppt/slides/slide56.xml><?xml version="1.0" encoding="utf-8"?>
+<p:sld xmlns:a="http://schemas.openxmlformats.org/drawingml/2006/main" xmlns:r="http://schemas.openxmlformats.org/officeDocument/2006/relationships" xmlns:p="http://schemas.openxmlformats.org/presentationml/2006/main">
+  <p:cSld>
+    <p:spTree>
+      <p:nvGrpSpPr>
+        <p:cNvPr id="1" name=""/>
+        <p:cNvGrpSpPr/>
+        <p:nvPr/>
+      </p:nvGrpSpPr>
+      <p:grpSpPr>
+        <a:xfrm>
+          <a:off x="0" y="0"/>
+          <a:ext cx="0" cy="0"/>
+          <a:chOff x="0" y="0"/>
+          <a:chExt cx="0" cy="0"/>
+        </a:xfrm>
+      </p:grpSpPr>
+      <p:sp>
+        <p:nvSpPr>
+          <p:cNvPr id="2" name="Title 1">
+            <a:extLst>
+              <a:ext uri="{FF2B5EF4-FFF2-40B4-BE49-F238E27FC236}">
+                <a16:creationId xmlns:a16="http://schemas.microsoft.com/office/drawing/2014/main" id="{FC437ED4-E69D-F586-0742-5D562697F98A}"/>
+              </a:ext>
+            </a:extLst>
+          </p:cNvPr>
+          <p:cNvSpPr>
+            <a:spLocks noGrp="1"/>
+          </p:cNvSpPr>
+          <p:nvPr>
+            <p:ph type="title"/>
+          </p:nvPr>
+        </p:nvSpPr>
+        <p:spPr>
+          <a:xfrm>
+            <a:off x="919119" y="2231922"/>
+            <a:ext cx="10353762" cy="1837659"/>
+          </a:xfrm>
+        </p:spPr>
+        <p:txBody>
+          <a:bodyPr>
+            <a:normAutofit/>
+          </a:bodyPr>
+          <a:lstStyle/>
+          <a:p>
+            <a:r>
+              <a:rPr lang="en-US" sz="6000" b="1">
+                <a:solidFill>
+                  <a:srgbClr val="FF0000"/>
+                </a:solidFill>
+              </a:rPr>
+              <a:t>Type Script</a:t>
+            </a:r>
+          </a:p>
+        </p:txBody>
+      </p:sp>
+    </p:spTree>
+    <p:extLst>
+      <p:ext uri="{BB962C8B-B14F-4D97-AF65-F5344CB8AC3E}">
+        <p14:creationId xmlns:p14="http://schemas.microsoft.com/office/powerpoint/2010/main" val="385122793"/>
+      </p:ext>
+    </p:extLst>
+  </p:cSld>
+  <p:clrMapOvr>
+    <a:masterClrMapping/>
+  </p:clrMapOvr>
+</p:sld>
+</file>
+
+<file path=ppt/slides/slide57.xml><?xml version="1.0" encoding="utf-8"?>
+<p:sld xmlns:a="http://schemas.openxmlformats.org/drawingml/2006/main" xmlns:r="http://schemas.openxmlformats.org/officeDocument/2006/relationships" xmlns:p="http://schemas.openxmlformats.org/presentationml/2006/main">
+  <p:cSld>
+    <p:spTree>
+      <p:nvGrpSpPr>
+        <p:cNvPr id="1" name=""/>
+        <p:cNvGrpSpPr/>
+        <p:nvPr/>
+      </p:nvGrpSpPr>
+      <p:grpSpPr>
+        <a:xfrm>
+          <a:off x="0" y="0"/>
+          <a:ext cx="0" cy="0"/>
+          <a:chOff x="0" y="0"/>
+          <a:chExt cx="0" cy="0"/>
+        </a:xfrm>
+      </p:grpSpPr>
+      <p:sp>
+        <p:nvSpPr>
+          <p:cNvPr id="2" name="Title 1">
+            <a:extLst>
+              <a:ext uri="{FF2B5EF4-FFF2-40B4-BE49-F238E27FC236}">
+                <a16:creationId xmlns:a16="http://schemas.microsoft.com/office/drawing/2014/main" id="{5553D029-E978-AEE8-ED75-7E72EB0D8BF2}"/>
+              </a:ext>
+            </a:extLst>
+          </p:cNvPr>
+          <p:cNvSpPr>
+            <a:spLocks noGrp="1"/>
+          </p:cNvSpPr>
+          <p:nvPr>
+            <p:ph type="title"/>
+          </p:nvPr>
+        </p:nvSpPr>
+        <p:spPr>
+          <a:xfrm>
+            <a:off x="913795" y="0"/>
+            <a:ext cx="10353762" cy="763675"/>
+          </a:xfrm>
+        </p:spPr>
+        <p:txBody>
+          <a:bodyPr/>
+          <a:lstStyle/>
+          <a:p>
+            <a:r>
+              <a:rPr lang="en-US" b="1">
+                <a:solidFill>
+                  <a:srgbClr val="FF0000"/>
+                </a:solidFill>
+              </a:rPr>
+              <a:t>Optional chaining</a:t>
+            </a:r>
+            <a:r>
+              <a:rPr lang="en-US"/>
+              <a:t> [ ?.]</a:t>
+            </a:r>
+          </a:p>
+        </p:txBody>
+      </p:sp>
+      <p:sp>
+        <p:nvSpPr>
+          <p:cNvPr id="3" name="Content Placeholder 2">
+            <a:extLst>
+              <a:ext uri="{FF2B5EF4-FFF2-40B4-BE49-F238E27FC236}">
+                <a16:creationId xmlns:a16="http://schemas.microsoft.com/office/drawing/2014/main" id="{B5492802-FC35-F4E0-D620-E17D28D3B8F6}"/>
+              </a:ext>
+            </a:extLst>
+          </p:cNvPr>
+          <p:cNvSpPr>
+            <a:spLocks noGrp="1"/>
+          </p:cNvSpPr>
+          <p:nvPr>
+            <p:ph idx="1"/>
+          </p:nvPr>
+        </p:nvSpPr>
+        <p:spPr>
+          <a:xfrm>
+            <a:off x="391886" y="763675"/>
+            <a:ext cx="11535507" cy="5767754"/>
+          </a:xfrm>
+        </p:spPr>
+        <p:txBody>
+          <a:bodyPr/>
+          <a:lstStyle/>
+          <a:p>
+            <a:r>
+              <a:rPr lang="en-US"/>
+              <a:t>It is only allowed when reading values not writing </a:t>
+            </a:r>
+          </a:p>
+          <a:p>
+            <a:r>
+              <a:rPr lang="en-US"/>
+              <a:t>this.PageParam?.PageNumber = 55; // XXX cause it can not be used when assigning values</a:t>
+            </a:r>
+          </a:p>
+          <a:p>
+            <a:r>
+              <a:rPr lang="en-US"/>
+              <a:t>The three correct usages </a:t>
+            </a:r>
+          </a:p>
+          <a:p>
+            <a:endParaRPr lang="en-US"/>
+          </a:p>
+          <a:p>
+            <a:endParaRPr lang="en-US"/>
+          </a:p>
+          <a:p>
+            <a:endParaRPr lang="en-US"/>
+          </a:p>
+        </p:txBody>
+      </p:sp>
+      <p:pic>
+        <p:nvPicPr>
+          <p:cNvPr id="5" name="Picture 4">
+            <a:extLst>
+              <a:ext uri="{FF2B5EF4-FFF2-40B4-BE49-F238E27FC236}">
+                <a16:creationId xmlns:a16="http://schemas.microsoft.com/office/drawing/2014/main" id="{D8FEDDBD-1B9A-9654-8F21-4758DF5DE618}"/>
+              </a:ext>
+            </a:extLst>
+          </p:cNvPr>
+          <p:cNvPicPr>
+            <a:picLocks noChangeAspect="1"/>
+          </p:cNvPicPr>
+          <p:nvPr/>
+        </p:nvPicPr>
+        <p:blipFill>
+          <a:blip r:embed="rId2"/>
+          <a:stretch>
+            <a:fillRect/>
+          </a:stretch>
+        </p:blipFill>
+        <p:spPr>
+          <a:xfrm>
+            <a:off x="0" y="2187505"/>
+            <a:ext cx="4152900" cy="2724150"/>
+          </a:xfrm>
+          <a:prstGeom prst="rect">
+            <a:avLst/>
+          </a:prstGeom>
+        </p:spPr>
+      </p:pic>
+      <p:pic>
+        <p:nvPicPr>
+          <p:cNvPr id="7" name="Picture 6">
+            <a:extLst>
+              <a:ext uri="{FF2B5EF4-FFF2-40B4-BE49-F238E27FC236}">
+                <a16:creationId xmlns:a16="http://schemas.microsoft.com/office/drawing/2014/main" id="{DD74F759-61FA-94A2-10A8-DDDC6B11E716}"/>
+              </a:ext>
+            </a:extLst>
+          </p:cNvPr>
+          <p:cNvPicPr>
+            <a:picLocks noChangeAspect="1"/>
+          </p:cNvPicPr>
+          <p:nvPr/>
+        </p:nvPicPr>
+        <p:blipFill>
+          <a:blip r:embed="rId3"/>
+          <a:stretch>
+            <a:fillRect/>
+          </a:stretch>
+        </p:blipFill>
+        <p:spPr>
+          <a:xfrm>
+            <a:off x="4251764" y="2254180"/>
+            <a:ext cx="3048000" cy="2590800"/>
+          </a:xfrm>
+          <a:prstGeom prst="rect">
+            <a:avLst/>
+          </a:prstGeom>
+        </p:spPr>
+      </p:pic>
+      <p:pic>
+        <p:nvPicPr>
+          <p:cNvPr id="9" name="Picture 8">
+            <a:extLst>
+              <a:ext uri="{FF2B5EF4-FFF2-40B4-BE49-F238E27FC236}">
+                <a16:creationId xmlns:a16="http://schemas.microsoft.com/office/drawing/2014/main" id="{1B1FFB5B-E965-FCF6-3DF7-A4F9BCAE83FE}"/>
+              </a:ext>
+            </a:extLst>
+          </p:cNvPr>
+          <p:cNvPicPr>
+            <a:picLocks noChangeAspect="1"/>
+          </p:cNvPicPr>
+          <p:nvPr/>
+        </p:nvPicPr>
+        <p:blipFill>
+          <a:blip r:embed="rId4"/>
+          <a:stretch>
+            <a:fillRect/>
+          </a:stretch>
+        </p:blipFill>
+        <p:spPr>
+          <a:xfrm>
+            <a:off x="7398629" y="2275480"/>
+            <a:ext cx="4582690" cy="2307039"/>
+          </a:xfrm>
+          <a:prstGeom prst="rect">
+            <a:avLst/>
+          </a:prstGeom>
+        </p:spPr>
+      </p:pic>
+    </p:spTree>
+    <p:extLst>
+      <p:ext uri="{BB962C8B-B14F-4D97-AF65-F5344CB8AC3E}">
+        <p14:creationId xmlns:p14="http://schemas.microsoft.com/office/powerpoint/2010/main" val="448047436"/>
+      </p:ext>
+    </p:extLst>
+  </p:cSld>
+  <p:clrMapOvr>
+    <a:masterClrMapping/>
+  </p:clrMapOvr>
+</p:sld>
+</file>
+
+<file path=ppt/slides/slide58.xml><?xml version="1.0" encoding="utf-8"?>
+<p:sld xmlns:a="http://schemas.openxmlformats.org/drawingml/2006/main" xmlns:r="http://schemas.openxmlformats.org/officeDocument/2006/relationships" xmlns:p="http://schemas.openxmlformats.org/presentationml/2006/main">
+  <p:cSld>
+    <p:spTree>
+      <p:nvGrpSpPr>
+        <p:cNvPr id="1" name=""/>
+        <p:cNvGrpSpPr/>
+        <p:nvPr/>
+      </p:nvGrpSpPr>
+      <p:grpSpPr>
+        <a:xfrm>
+          <a:off x="0" y="0"/>
+          <a:ext cx="0" cy="0"/>
+          <a:chOff x="0" y="0"/>
+          <a:chExt cx="0" cy="0"/>
+        </a:xfrm>
+      </p:grpSpPr>
+      <p:sp>
+        <p:nvSpPr>
+          <p:cNvPr id="2" name="Title 1">
+            <a:extLst>
+              <a:ext uri="{FF2B5EF4-FFF2-40B4-BE49-F238E27FC236}">
+                <a16:creationId xmlns:a16="http://schemas.microsoft.com/office/drawing/2014/main" id="{D22BD241-91BC-982E-E8D8-DA059E13C029}"/>
+              </a:ext>
+            </a:extLst>
+          </p:cNvPr>
+          <p:cNvSpPr>
+            <a:spLocks noGrp="1"/>
+          </p:cNvSpPr>
+          <p:nvPr>
+            <p:ph type="title"/>
+          </p:nvPr>
+        </p:nvSpPr>
+        <p:spPr>
+          <a:xfrm>
+            <a:off x="913795" y="0"/>
+            <a:ext cx="10353762" cy="544310"/>
+          </a:xfrm>
+        </p:spPr>
+        <p:txBody>
+          <a:bodyPr>
+            <a:noAutofit/>
+          </a:bodyPr>
+          <a:lstStyle/>
+          <a:p>
+            <a:r>
+              <a:rPr lang="en-US" sz="3200"/>
+              <a:t>Layout [cont.]</a:t>
+            </a:r>
+          </a:p>
+        </p:txBody>
+      </p:sp>
+      <p:sp>
+        <p:nvSpPr>
+          <p:cNvPr id="3" name="Content Placeholder 2">
+            <a:extLst>
+              <a:ext uri="{FF2B5EF4-FFF2-40B4-BE49-F238E27FC236}">
+                <a16:creationId xmlns:a16="http://schemas.microsoft.com/office/drawing/2014/main" id="{F60292FF-FB71-EABA-22C8-49723B52D012}"/>
+              </a:ext>
+            </a:extLst>
+          </p:cNvPr>
+          <p:cNvSpPr>
+            <a:spLocks noGrp="1"/>
+          </p:cNvSpPr>
+          <p:nvPr>
+            <p:ph idx="1"/>
+          </p:nvPr>
+        </p:nvSpPr>
+        <p:spPr>
+          <a:xfrm>
+            <a:off x="913795" y="544310"/>
+            <a:ext cx="10353762" cy="5246891"/>
+          </a:xfrm>
+        </p:spPr>
+        <p:txBody>
+          <a:bodyPr/>
+          <a:lstStyle/>
+          <a:p>
+            <a:r>
+              <a:rPr lang="en-US"/>
+              <a:t>Create sidebar component at components folder</a:t>
+            </a:r>
+          </a:p>
+          <a:p>
+            <a:endParaRPr lang="en-US"/>
+          </a:p>
+          <a:p>
+            <a:endParaRPr lang="en-US"/>
+          </a:p>
+          <a:p>
+            <a:endParaRPr lang="en-US"/>
+          </a:p>
+        </p:txBody>
+      </p:sp>
+      <p:pic>
+        <p:nvPicPr>
+          <p:cNvPr id="5" name="Picture 4">
+            <a:extLst>
+              <a:ext uri="{FF2B5EF4-FFF2-40B4-BE49-F238E27FC236}">
+                <a16:creationId xmlns:a16="http://schemas.microsoft.com/office/drawing/2014/main" id="{5FEC7977-8DB6-5D26-4E6F-029EB9313555}"/>
+              </a:ext>
+            </a:extLst>
+          </p:cNvPr>
+          <p:cNvPicPr>
+            <a:picLocks noChangeAspect="1"/>
+          </p:cNvPicPr>
+          <p:nvPr/>
+        </p:nvPicPr>
+        <p:blipFill>
+          <a:blip r:embed="rId2"/>
+          <a:stretch>
+            <a:fillRect/>
+          </a:stretch>
+        </p:blipFill>
+        <p:spPr>
+          <a:xfrm>
+            <a:off x="0" y="968827"/>
+            <a:ext cx="7332109" cy="3844334"/>
+          </a:xfrm>
+          <a:prstGeom prst="rect">
+            <a:avLst/>
+          </a:prstGeom>
+        </p:spPr>
+      </p:pic>
+      <p:pic>
+        <p:nvPicPr>
+          <p:cNvPr id="7" name="Picture 6">
+            <a:extLst>
+              <a:ext uri="{FF2B5EF4-FFF2-40B4-BE49-F238E27FC236}">
+                <a16:creationId xmlns:a16="http://schemas.microsoft.com/office/drawing/2014/main" id="{97B2557A-5613-A7A6-6167-C88E6497C3C4}"/>
+              </a:ext>
+            </a:extLst>
+          </p:cNvPr>
+          <p:cNvPicPr>
+            <a:picLocks noChangeAspect="1"/>
+          </p:cNvPicPr>
+          <p:nvPr/>
+        </p:nvPicPr>
+        <p:blipFill>
+          <a:blip r:embed="rId3"/>
+          <a:stretch>
+            <a:fillRect/>
+          </a:stretch>
+        </p:blipFill>
+        <p:spPr>
+          <a:xfrm>
+            <a:off x="7332109" y="798004"/>
+            <a:ext cx="4774377" cy="3752248"/>
+          </a:xfrm>
+          <a:prstGeom prst="rect">
+            <a:avLst/>
+          </a:prstGeom>
+        </p:spPr>
+      </p:pic>
+      <p:pic>
+        <p:nvPicPr>
+          <p:cNvPr id="9" name="Picture 8">
+            <a:extLst>
+              <a:ext uri="{FF2B5EF4-FFF2-40B4-BE49-F238E27FC236}">
+                <a16:creationId xmlns:a16="http://schemas.microsoft.com/office/drawing/2014/main" id="{F5B8091C-F973-69E1-483C-A812643E422E}"/>
+              </a:ext>
+            </a:extLst>
+          </p:cNvPr>
+          <p:cNvPicPr>
+            <a:picLocks noChangeAspect="1"/>
+          </p:cNvPicPr>
+          <p:nvPr/>
+        </p:nvPicPr>
+        <p:blipFill>
+          <a:blip r:embed="rId4"/>
+          <a:stretch>
+            <a:fillRect/>
+          </a:stretch>
+        </p:blipFill>
+        <p:spPr>
+          <a:xfrm>
+            <a:off x="1750245" y="4813093"/>
+            <a:ext cx="4158186" cy="1956215"/>
+          </a:xfrm>
+          <a:prstGeom prst="rect">
+            <a:avLst/>
+          </a:prstGeom>
+        </p:spPr>
+      </p:pic>
+    </p:spTree>
+    <p:extLst>
+      <p:ext uri="{BB962C8B-B14F-4D97-AF65-F5344CB8AC3E}">
+        <p14:creationId xmlns:p14="http://schemas.microsoft.com/office/powerpoint/2010/main" val="3498281297"/>
+      </p:ext>
+    </p:extLst>
+  </p:cSld>
+  <p:clrMapOvr>
+    <a:masterClrMapping/>
+  </p:clrMapOvr>
+</p:sld>
+</file>
+
+<file path=ppt/slides/slide59.xml><?xml version="1.0" encoding="utf-8"?>
+<p:sld xmlns:a="http://schemas.openxmlformats.org/drawingml/2006/main" xmlns:r="http://schemas.openxmlformats.org/officeDocument/2006/relationships" xmlns:p="http://schemas.openxmlformats.org/presentationml/2006/main">
+  <p:cSld>
+    <p:spTree>
+      <p:nvGrpSpPr>
+        <p:cNvPr id="1" name=""/>
+        <p:cNvGrpSpPr/>
+        <p:nvPr/>
+      </p:nvGrpSpPr>
+      <p:grpSpPr>
+        <a:xfrm>
+          <a:off x="0" y="0"/>
+          <a:ext cx="0" cy="0"/>
+          <a:chOff x="0" y="0"/>
+          <a:chExt cx="0" cy="0"/>
+        </a:xfrm>
+      </p:grpSpPr>
+      <p:sp>
+        <p:nvSpPr>
+          <p:cNvPr id="2" name="Title 1">
+            <a:extLst>
+              <a:ext uri="{FF2B5EF4-FFF2-40B4-BE49-F238E27FC236}">
+                <a16:creationId xmlns:a16="http://schemas.microsoft.com/office/drawing/2014/main" id="{3F7DC102-74D5-6A5A-C16F-A6633D668E11}"/>
+              </a:ext>
+            </a:extLst>
+          </p:cNvPr>
+          <p:cNvSpPr>
+            <a:spLocks noGrp="1"/>
+          </p:cNvSpPr>
+          <p:nvPr>
+            <p:ph type="title"/>
+          </p:nvPr>
+        </p:nvSpPr>
+        <p:spPr>
+          <a:xfrm>
+            <a:off x="913795" y="0"/>
+            <a:ext cx="10353762" cy="668594"/>
+          </a:xfrm>
+        </p:spPr>
+        <p:txBody>
+          <a:bodyPr>
+            <a:normAutofit fontScale="90000"/>
+          </a:bodyPr>
+          <a:lstStyle/>
+          <a:p>
+            <a:r>
+              <a:rPr lang="en-US" b="1"/>
+              <a:t>Enum</a:t>
+            </a:r>
+          </a:p>
+        </p:txBody>
+      </p:sp>
+      <p:sp>
+        <p:nvSpPr>
+          <p:cNvPr id="9" name="Content Placeholder 8">
+            <a:extLst>
+              <a:ext uri="{FF2B5EF4-FFF2-40B4-BE49-F238E27FC236}">
+                <a16:creationId xmlns:a16="http://schemas.microsoft.com/office/drawing/2014/main" id="{4C153522-2A32-E7A7-CA2E-3619FCE51951}"/>
+              </a:ext>
+            </a:extLst>
+          </p:cNvPr>
+          <p:cNvSpPr>
+            <a:spLocks noGrp="1"/>
+          </p:cNvSpPr>
+          <p:nvPr>
+            <p:ph idx="1"/>
+          </p:nvPr>
+        </p:nvSpPr>
+        <p:spPr>
+          <a:xfrm>
+            <a:off x="287093" y="3437700"/>
+            <a:ext cx="11314972" cy="1153969"/>
+          </a:xfrm>
+        </p:spPr>
+        <p:txBody>
+          <a:bodyPr>
+            <a:normAutofit lnSpcReduction="10000"/>
+          </a:bodyPr>
+          <a:lstStyle/>
+          <a:p>
+            <a:r>
+              <a:rPr lang="en-US"/>
+              <a:t>note : Enums in TypeScript are technically objects where :</a:t>
+            </a:r>
+          </a:p>
+          <a:p>
+            <a:pPr lvl="1"/>
+            <a:r>
+              <a:rPr lang="en-US"/>
+              <a:t>Keys are strings.</a:t>
+            </a:r>
+          </a:p>
+          <a:p>
+            <a:pPr lvl="1"/>
+            <a:r>
+              <a:rPr lang="en-US"/>
+              <a:t>Values are numbers (if it's a numeric Enum) or strings (if it's a string Enum).</a:t>
+            </a:r>
+          </a:p>
+        </p:txBody>
+      </p:sp>
+      <p:pic>
+        <p:nvPicPr>
+          <p:cNvPr id="10" name="Content Placeholder 4">
+            <a:extLst>
+              <a:ext uri="{FF2B5EF4-FFF2-40B4-BE49-F238E27FC236}">
+                <a16:creationId xmlns:a16="http://schemas.microsoft.com/office/drawing/2014/main" id="{468FE5B5-EF94-C9D7-A34B-FF927FCCAD9C}"/>
+              </a:ext>
+            </a:extLst>
+          </p:cNvPr>
+          <p:cNvPicPr>
+            <a:picLocks noChangeAspect="1"/>
+          </p:cNvPicPr>
+          <p:nvPr/>
+        </p:nvPicPr>
+        <p:blipFill>
+          <a:blip r:embed="rId2"/>
+          <a:stretch>
+            <a:fillRect/>
+          </a:stretch>
+        </p:blipFill>
+        <p:spPr>
+          <a:xfrm>
+            <a:off x="287093" y="334297"/>
+            <a:ext cx="3141593" cy="1565000"/>
+          </a:xfrm>
+          <a:prstGeom prst="rect">
+            <a:avLst/>
+          </a:prstGeom>
+          <a:effectLst>
+            <a:outerShdw blurRad="25400" dir="17880000">
+              <a:srgbClr val="000000">
+                <a:alpha val="46000"/>
+              </a:srgbClr>
+            </a:outerShdw>
+          </a:effectLst>
+        </p:spPr>
+      </p:pic>
+      <p:pic>
+        <p:nvPicPr>
+          <p:cNvPr id="11" name="Picture 10">
+            <a:extLst>
+              <a:ext uri="{FF2B5EF4-FFF2-40B4-BE49-F238E27FC236}">
+                <a16:creationId xmlns:a16="http://schemas.microsoft.com/office/drawing/2014/main" id="{353EC381-3C7D-477D-7149-FEB84B36FF97}"/>
+              </a:ext>
+            </a:extLst>
+          </p:cNvPr>
+          <p:cNvPicPr>
+            <a:picLocks noChangeAspect="1"/>
+          </p:cNvPicPr>
+          <p:nvPr/>
+        </p:nvPicPr>
+        <p:blipFill>
+          <a:blip r:embed="rId3"/>
+          <a:stretch>
+            <a:fillRect/>
+          </a:stretch>
+        </p:blipFill>
+        <p:spPr>
+          <a:xfrm>
+            <a:off x="287093" y="2126682"/>
+            <a:ext cx="11019572" cy="1267447"/>
+          </a:xfrm>
+          <a:prstGeom prst="rect">
+            <a:avLst/>
+          </a:prstGeom>
+        </p:spPr>
+      </p:pic>
+      <p:pic>
+        <p:nvPicPr>
+          <p:cNvPr id="15" name="Picture 14">
+            <a:extLst>
+              <a:ext uri="{FF2B5EF4-FFF2-40B4-BE49-F238E27FC236}">
+                <a16:creationId xmlns:a16="http://schemas.microsoft.com/office/drawing/2014/main" id="{4633A0A3-A288-DD0A-5D7F-1B49AE151352}"/>
+              </a:ext>
+            </a:extLst>
+          </p:cNvPr>
+          <p:cNvPicPr>
+            <a:picLocks noChangeAspect="1"/>
+          </p:cNvPicPr>
+          <p:nvPr/>
+        </p:nvPicPr>
+        <p:blipFill>
+          <a:blip r:embed="rId4"/>
+          <a:stretch>
+            <a:fillRect/>
+          </a:stretch>
+        </p:blipFill>
+        <p:spPr>
+          <a:xfrm>
+            <a:off x="287094" y="4700192"/>
+            <a:ext cx="10430068" cy="2002942"/>
+          </a:xfrm>
+          <a:prstGeom prst="rect">
+            <a:avLst/>
+          </a:prstGeom>
+        </p:spPr>
+      </p:pic>
+    </p:spTree>
+    <p:extLst>
+      <p:ext uri="{BB962C8B-B14F-4D97-AF65-F5344CB8AC3E}">
+        <p14:creationId xmlns:p14="http://schemas.microsoft.com/office/powerpoint/2010/main" val="3592595754"/>
       </p:ext>
     </p:extLst>
   </p:cSld>

--- a/Angular & type script/Angular.pptx
+++ b/Angular & type script/Angular.pptx
@@ -370,7 +370,7 @@
           <a:p>
             <a:fld id="{BFD97FD3-0E3C-4940-AC08-248FE3BAAF7F}" type="datetimeFigureOut">
               <a:rPr lang="en-US" smtClean="0"/>
-              <a:t>4/16/2026</a:t>
+              <a:t>5/12/2026</a:t>
             </a:fld>
             <a:endParaRPr lang="en-US"/>
           </a:p>
@@ -667,7 +667,7 @@
           <a:p>
             <a:fld id="{BFD97FD3-0E3C-4940-AC08-248FE3BAAF7F}" type="datetimeFigureOut">
               <a:rPr lang="en-US" smtClean="0"/>
-              <a:t>4/16/2026</a:t>
+              <a:t>5/12/2026</a:t>
             </a:fld>
             <a:endParaRPr lang="en-US"/>
           </a:p>
@@ -859,7 +859,7 @@
           <a:p>
             <a:fld id="{BFD97FD3-0E3C-4940-AC08-248FE3BAAF7F}" type="datetimeFigureOut">
               <a:rPr lang="en-US" smtClean="0"/>
-              <a:t>4/16/2026</a:t>
+              <a:t>5/12/2026</a:t>
             </a:fld>
             <a:endParaRPr lang="en-US"/>
           </a:p>
@@ -1120,7 +1120,7 @@
           <a:p>
             <a:fld id="{BFD97FD3-0E3C-4940-AC08-248FE3BAAF7F}" type="datetimeFigureOut">
               <a:rPr lang="en-US" smtClean="0"/>
-              <a:t>4/16/2026</a:t>
+              <a:t>5/12/2026</a:t>
             </a:fld>
             <a:endParaRPr lang="en-US"/>
           </a:p>
@@ -1544,7 +1544,7 @@
           <a:p>
             <a:fld id="{BFD97FD3-0E3C-4940-AC08-248FE3BAAF7F}" type="datetimeFigureOut">
               <a:rPr lang="en-US" smtClean="0"/>
-              <a:t>4/16/2026</a:t>
+              <a:t>5/12/2026</a:t>
             </a:fld>
             <a:endParaRPr lang="en-US"/>
           </a:p>
@@ -2081,7 +2081,7 @@
           <a:p>
             <a:fld id="{BFD97FD3-0E3C-4940-AC08-248FE3BAAF7F}" type="datetimeFigureOut">
               <a:rPr lang="en-US" smtClean="0"/>
-              <a:t>4/16/2026</a:t>
+              <a:t>5/12/2026</a:t>
             </a:fld>
             <a:endParaRPr lang="en-US"/>
           </a:p>
@@ -2942,7 +2942,7 @@
           <a:p>
             <a:fld id="{BFD97FD3-0E3C-4940-AC08-248FE3BAAF7F}" type="datetimeFigureOut">
               <a:rPr lang="en-US" smtClean="0"/>
-              <a:t>4/16/2026</a:t>
+              <a:t>5/12/2026</a:t>
             </a:fld>
             <a:endParaRPr lang="en-US"/>
           </a:p>
@@ -3112,7 +3112,7 @@
           <a:p>
             <a:fld id="{BFD97FD3-0E3C-4940-AC08-248FE3BAAF7F}" type="datetimeFigureOut">
               <a:rPr lang="en-US" smtClean="0"/>
-              <a:t>4/16/2026</a:t>
+              <a:t>5/12/2026</a:t>
             </a:fld>
             <a:endParaRPr lang="en-US"/>
           </a:p>
@@ -3296,7 +3296,7 @@
           <a:p>
             <a:fld id="{BFD97FD3-0E3C-4940-AC08-248FE3BAAF7F}" type="datetimeFigureOut">
               <a:rPr lang="en-US" smtClean="0"/>
-              <a:t>4/16/2026</a:t>
+              <a:t>5/12/2026</a:t>
             </a:fld>
             <a:endParaRPr lang="en-US"/>
           </a:p>
@@ -3466,7 +3466,7 @@
           <a:p>
             <a:fld id="{BFD97FD3-0E3C-4940-AC08-248FE3BAAF7F}" type="datetimeFigureOut">
               <a:rPr lang="en-US" smtClean="0"/>
-              <a:t>4/16/2026</a:t>
+              <a:t>5/12/2026</a:t>
             </a:fld>
             <a:endParaRPr lang="en-US"/>
           </a:p>
@@ -3710,7 +3710,7 @@
           <a:p>
             <a:fld id="{BFD97FD3-0E3C-4940-AC08-248FE3BAAF7F}" type="datetimeFigureOut">
               <a:rPr lang="en-US" smtClean="0"/>
-              <a:t>4/16/2026</a:t>
+              <a:t>5/12/2026</a:t>
             </a:fld>
             <a:endParaRPr lang="en-US"/>
           </a:p>
@@ -3946,7 +3946,7 @@
           <a:p>
             <a:fld id="{BFD97FD3-0E3C-4940-AC08-248FE3BAAF7F}" type="datetimeFigureOut">
               <a:rPr lang="en-US" smtClean="0"/>
-              <a:t>4/16/2026</a:t>
+              <a:t>5/12/2026</a:t>
             </a:fld>
             <a:endParaRPr lang="en-US"/>
           </a:p>
@@ -4412,7 +4412,7 @@
           <a:p>
             <a:fld id="{BFD97FD3-0E3C-4940-AC08-248FE3BAAF7F}" type="datetimeFigureOut">
               <a:rPr lang="en-US" smtClean="0"/>
-              <a:t>4/16/2026</a:t>
+              <a:t>5/12/2026</a:t>
             </a:fld>
             <a:endParaRPr lang="en-US"/>
           </a:p>
@@ -4530,7 +4530,7 @@
           <a:p>
             <a:fld id="{BFD97FD3-0E3C-4940-AC08-248FE3BAAF7F}" type="datetimeFigureOut">
               <a:rPr lang="en-US" smtClean="0"/>
-              <a:t>4/16/2026</a:t>
+              <a:t>5/12/2026</a:t>
             </a:fld>
             <a:endParaRPr lang="en-US"/>
           </a:p>
@@ -4625,7 +4625,7 @@
           <a:p>
             <a:fld id="{BFD97FD3-0E3C-4940-AC08-248FE3BAAF7F}" type="datetimeFigureOut">
               <a:rPr lang="en-US" smtClean="0"/>
-              <a:t>4/16/2026</a:t>
+              <a:t>5/12/2026</a:t>
             </a:fld>
             <a:endParaRPr lang="en-US"/>
           </a:p>
@@ -4880,7 +4880,7 @@
           <a:p>
             <a:fld id="{BFD97FD3-0E3C-4940-AC08-248FE3BAAF7F}" type="datetimeFigureOut">
               <a:rPr lang="en-US" smtClean="0"/>
-              <a:t>4/16/2026</a:t>
+              <a:t>5/12/2026</a:t>
             </a:fld>
             <a:endParaRPr lang="en-US"/>
           </a:p>
@@ -5179,7 +5179,7 @@
           <a:p>
             <a:fld id="{BFD97FD3-0E3C-4940-AC08-248FE3BAAF7F}" type="datetimeFigureOut">
               <a:rPr lang="en-US" smtClean="0"/>
-              <a:t>4/16/2026</a:t>
+              <a:t>5/12/2026</a:t>
             </a:fld>
             <a:endParaRPr lang="en-US"/>
           </a:p>
@@ -5413,7 +5413,7 @@
           <a:p>
             <a:fld id="{BFD97FD3-0E3C-4940-AC08-248FE3BAAF7F}" type="datetimeFigureOut">
               <a:rPr lang="en-US" smtClean="0"/>
-              <a:t>4/16/2026</a:t>
+              <a:t>5/12/2026</a:t>
             </a:fld>
             <a:endParaRPr lang="en-US"/>
           </a:p>
@@ -9122,8 +9122,8 @@
         </p:nvSpPr>
         <p:spPr>
           <a:xfrm>
-            <a:off x="334296" y="737419"/>
-            <a:ext cx="11472517" cy="5456904"/>
+            <a:off x="157019" y="737418"/>
+            <a:ext cx="11859490" cy="6042073"/>
           </a:xfrm>
         </p:spPr>
         <p:txBody>
@@ -9378,7 +9378,35 @@
             <a:endParaRPr lang="en-US" sz="1600" b="1"/>
           </a:p>
           <a:p>
-            <a:endParaRPr lang="en-US" sz="1800" b="1"/>
+            <a:r>
+              <a:rPr lang="en-US" sz="1800" b="1"/>
+              <a:t>Versions</a:t>
+            </a:r>
+          </a:p>
+          <a:p>
+            <a:pPr lvl="1"/>
+            <a:r>
+              <a:rPr lang="en-US"/>
+              <a:t>npm install @ng-bootstrap/ng-bootstrap@15  // with angular 16</a:t>
+            </a:r>
+          </a:p>
+          <a:p>
+            <a:pPr lvl="1"/>
+            <a:r>
+              <a:rPr lang="en-US"/>
+              <a:t>npm install @ng-bootstrap/ng-bootstrap@16  // with angular 17</a:t>
+            </a:r>
+          </a:p>
+          <a:p>
+            <a:pPr lvl="1"/>
+            <a:r>
+              <a:rPr lang="en-US"/>
+              <a:t>npm install @ng-bootstrap/ng-bootstrap@17  // with angular 18</a:t>
+            </a:r>
+          </a:p>
+          <a:p>
+            <a:pPr lvl="1"/>
+            <a:endParaRPr lang="en-US" sz="1600" b="1"/>
           </a:p>
         </p:txBody>
       </p:sp>

--- a/Angular & type script/Angular.pptx
+++ b/Angular & type script/Angular.pptx
@@ -370,7 +370,7 @@
           <a:p>
             <a:fld id="{BFD97FD3-0E3C-4940-AC08-248FE3BAAF7F}" type="datetimeFigureOut">
               <a:rPr lang="en-US" smtClean="0"/>
-              <a:t>5/12/2026</a:t>
+              <a:t>5/17/2026</a:t>
             </a:fld>
             <a:endParaRPr lang="en-US"/>
           </a:p>
@@ -667,7 +667,7 @@
           <a:p>
             <a:fld id="{BFD97FD3-0E3C-4940-AC08-248FE3BAAF7F}" type="datetimeFigureOut">
               <a:rPr lang="en-US" smtClean="0"/>
-              <a:t>5/12/2026</a:t>
+              <a:t>5/17/2026</a:t>
             </a:fld>
             <a:endParaRPr lang="en-US"/>
           </a:p>
@@ -859,7 +859,7 @@
           <a:p>
             <a:fld id="{BFD97FD3-0E3C-4940-AC08-248FE3BAAF7F}" type="datetimeFigureOut">
               <a:rPr lang="en-US" smtClean="0"/>
-              <a:t>5/12/2026</a:t>
+              <a:t>5/17/2026</a:t>
             </a:fld>
             <a:endParaRPr lang="en-US"/>
           </a:p>
@@ -1120,7 +1120,7 @@
           <a:p>
             <a:fld id="{BFD97FD3-0E3C-4940-AC08-248FE3BAAF7F}" type="datetimeFigureOut">
               <a:rPr lang="en-US" smtClean="0"/>
-              <a:t>5/12/2026</a:t>
+              <a:t>5/17/2026</a:t>
             </a:fld>
             <a:endParaRPr lang="en-US"/>
           </a:p>
@@ -1544,7 +1544,7 @@
           <a:p>
             <a:fld id="{BFD97FD3-0E3C-4940-AC08-248FE3BAAF7F}" type="datetimeFigureOut">
               <a:rPr lang="en-US" smtClean="0"/>
-              <a:t>5/12/2026</a:t>
+              <a:t>5/17/2026</a:t>
             </a:fld>
             <a:endParaRPr lang="en-US"/>
           </a:p>
@@ -2081,7 +2081,7 @@
           <a:p>
             <a:fld id="{BFD97FD3-0E3C-4940-AC08-248FE3BAAF7F}" type="datetimeFigureOut">
               <a:rPr lang="en-US" smtClean="0"/>
-              <a:t>5/12/2026</a:t>
+              <a:t>5/17/2026</a:t>
             </a:fld>
             <a:endParaRPr lang="en-US"/>
           </a:p>
@@ -2942,7 +2942,7 @@
           <a:p>
             <a:fld id="{BFD97FD3-0E3C-4940-AC08-248FE3BAAF7F}" type="datetimeFigureOut">
               <a:rPr lang="en-US" smtClean="0"/>
-              <a:t>5/12/2026</a:t>
+              <a:t>5/17/2026</a:t>
             </a:fld>
             <a:endParaRPr lang="en-US"/>
           </a:p>
@@ -3112,7 +3112,7 @@
           <a:p>
             <a:fld id="{BFD97FD3-0E3C-4940-AC08-248FE3BAAF7F}" type="datetimeFigureOut">
               <a:rPr lang="en-US" smtClean="0"/>
-              <a:t>5/12/2026</a:t>
+              <a:t>5/17/2026</a:t>
             </a:fld>
             <a:endParaRPr lang="en-US"/>
           </a:p>
@@ -3296,7 +3296,7 @@
           <a:p>
             <a:fld id="{BFD97FD3-0E3C-4940-AC08-248FE3BAAF7F}" type="datetimeFigureOut">
               <a:rPr lang="en-US" smtClean="0"/>
-              <a:t>5/12/2026</a:t>
+              <a:t>5/17/2026</a:t>
             </a:fld>
             <a:endParaRPr lang="en-US"/>
           </a:p>
@@ -3466,7 +3466,7 @@
           <a:p>
             <a:fld id="{BFD97FD3-0E3C-4940-AC08-248FE3BAAF7F}" type="datetimeFigureOut">
               <a:rPr lang="en-US" smtClean="0"/>
-              <a:t>5/12/2026</a:t>
+              <a:t>5/17/2026</a:t>
             </a:fld>
             <a:endParaRPr lang="en-US"/>
           </a:p>
@@ -3710,7 +3710,7 @@
           <a:p>
             <a:fld id="{BFD97FD3-0E3C-4940-AC08-248FE3BAAF7F}" type="datetimeFigureOut">
               <a:rPr lang="en-US" smtClean="0"/>
-              <a:t>5/12/2026</a:t>
+              <a:t>5/17/2026</a:t>
             </a:fld>
             <a:endParaRPr lang="en-US"/>
           </a:p>
@@ -3946,7 +3946,7 @@
           <a:p>
             <a:fld id="{BFD97FD3-0E3C-4940-AC08-248FE3BAAF7F}" type="datetimeFigureOut">
               <a:rPr lang="en-US" smtClean="0"/>
-              <a:t>5/12/2026</a:t>
+              <a:t>5/17/2026</a:t>
             </a:fld>
             <a:endParaRPr lang="en-US"/>
           </a:p>
@@ -4412,7 +4412,7 @@
           <a:p>
             <a:fld id="{BFD97FD3-0E3C-4940-AC08-248FE3BAAF7F}" type="datetimeFigureOut">
               <a:rPr lang="en-US" smtClean="0"/>
-              <a:t>5/12/2026</a:t>
+              <a:t>5/17/2026</a:t>
             </a:fld>
             <a:endParaRPr lang="en-US"/>
           </a:p>
@@ -4530,7 +4530,7 @@
           <a:p>
             <a:fld id="{BFD97FD3-0E3C-4940-AC08-248FE3BAAF7F}" type="datetimeFigureOut">
               <a:rPr lang="en-US" smtClean="0"/>
-              <a:t>5/12/2026</a:t>
+              <a:t>5/17/2026</a:t>
             </a:fld>
             <a:endParaRPr lang="en-US"/>
           </a:p>
@@ -4625,7 +4625,7 @@
           <a:p>
             <a:fld id="{BFD97FD3-0E3C-4940-AC08-248FE3BAAF7F}" type="datetimeFigureOut">
               <a:rPr lang="en-US" smtClean="0"/>
-              <a:t>5/12/2026</a:t>
+              <a:t>5/17/2026</a:t>
             </a:fld>
             <a:endParaRPr lang="en-US"/>
           </a:p>
@@ -4880,7 +4880,7 @@
           <a:p>
             <a:fld id="{BFD97FD3-0E3C-4940-AC08-248FE3BAAF7F}" type="datetimeFigureOut">
               <a:rPr lang="en-US" smtClean="0"/>
-              <a:t>5/12/2026</a:t>
+              <a:t>5/17/2026</a:t>
             </a:fld>
             <a:endParaRPr lang="en-US"/>
           </a:p>
@@ -5179,7 +5179,7 @@
           <a:p>
             <a:fld id="{BFD97FD3-0E3C-4940-AC08-248FE3BAAF7F}" type="datetimeFigureOut">
               <a:rPr lang="en-US" smtClean="0"/>
-              <a:t>5/12/2026</a:t>
+              <a:t>5/17/2026</a:t>
             </a:fld>
             <a:endParaRPr lang="en-US"/>
           </a:p>
@@ -5413,7 +5413,7 @@
           <a:p>
             <a:fld id="{BFD97FD3-0E3C-4940-AC08-248FE3BAAF7F}" type="datetimeFigureOut">
               <a:rPr lang="en-US" smtClean="0"/>
-              <a:t>5/12/2026</a:t>
+              <a:t>5/17/2026</a:t>
             </a:fld>
             <a:endParaRPr lang="en-US"/>
           </a:p>
@@ -9372,9 +9372,6 @@
               <a:rPr lang="en-US" b="1"/>
               <a:t>/bootstrap-icons/font/bootstrap-icons.min.css"</a:t>
             </a:r>
-          </a:p>
-          <a:p>
-            <a:pPr lvl="1"/>
             <a:endParaRPr lang="en-US" sz="1600" b="1"/>
           </a:p>
           <a:p>
@@ -9405,8 +9402,10 @@
             </a:r>
           </a:p>
           <a:p>
-            <a:pPr lvl="1"/>
-            <a:endParaRPr lang="en-US" sz="1600" b="1"/>
+            <a:r>
+              <a:rPr lang="en-US" sz="1800" b="1"/>
+              <a:t>Note to be fine: always install version of bootstrap = angular version - 1</a:t>
+            </a:r>
           </a:p>
         </p:txBody>
       </p:sp>

--- a/Angular & type script/Angular.pptx
+++ b/Angular & type script/Angular.pptx
@@ -393,7 +393,7 @@
           <a:p>
             <a:fld id="{BFD97FD3-0E3C-4940-AC08-248FE3BAAF7F}" type="datetimeFigureOut">
               <a:rPr lang="en-US" smtClean="0"/>
-              <a:t>5/21/2026</a:t>
+              <a:t>6/2/2026</a:t>
             </a:fld>
             <a:endParaRPr lang="en-US"/>
           </a:p>
@@ -690,7 +690,7 @@
           <a:p>
             <a:fld id="{BFD97FD3-0E3C-4940-AC08-248FE3BAAF7F}" type="datetimeFigureOut">
               <a:rPr lang="en-US" smtClean="0"/>
-              <a:t>5/21/2026</a:t>
+              <a:t>6/2/2026</a:t>
             </a:fld>
             <a:endParaRPr lang="en-US"/>
           </a:p>
@@ -882,7 +882,7 @@
           <a:p>
             <a:fld id="{BFD97FD3-0E3C-4940-AC08-248FE3BAAF7F}" type="datetimeFigureOut">
               <a:rPr lang="en-US" smtClean="0"/>
-              <a:t>5/21/2026</a:t>
+              <a:t>6/2/2026</a:t>
             </a:fld>
             <a:endParaRPr lang="en-US"/>
           </a:p>
@@ -1143,7 +1143,7 @@
           <a:p>
             <a:fld id="{BFD97FD3-0E3C-4940-AC08-248FE3BAAF7F}" type="datetimeFigureOut">
               <a:rPr lang="en-US" smtClean="0"/>
-              <a:t>5/21/2026</a:t>
+              <a:t>6/2/2026</a:t>
             </a:fld>
             <a:endParaRPr lang="en-US"/>
           </a:p>
@@ -1567,7 +1567,7 @@
           <a:p>
             <a:fld id="{BFD97FD3-0E3C-4940-AC08-248FE3BAAF7F}" type="datetimeFigureOut">
               <a:rPr lang="en-US" smtClean="0"/>
-              <a:t>5/21/2026</a:t>
+              <a:t>6/2/2026</a:t>
             </a:fld>
             <a:endParaRPr lang="en-US"/>
           </a:p>
@@ -2104,7 +2104,7 @@
           <a:p>
             <a:fld id="{BFD97FD3-0E3C-4940-AC08-248FE3BAAF7F}" type="datetimeFigureOut">
               <a:rPr lang="en-US" smtClean="0"/>
-              <a:t>5/21/2026</a:t>
+              <a:t>6/2/2026</a:t>
             </a:fld>
             <a:endParaRPr lang="en-US"/>
           </a:p>
@@ -2965,7 +2965,7 @@
           <a:p>
             <a:fld id="{BFD97FD3-0E3C-4940-AC08-248FE3BAAF7F}" type="datetimeFigureOut">
               <a:rPr lang="en-US" smtClean="0"/>
-              <a:t>5/21/2026</a:t>
+              <a:t>6/2/2026</a:t>
             </a:fld>
             <a:endParaRPr lang="en-US"/>
           </a:p>
@@ -3135,7 +3135,7 @@
           <a:p>
             <a:fld id="{BFD97FD3-0E3C-4940-AC08-248FE3BAAF7F}" type="datetimeFigureOut">
               <a:rPr lang="en-US" smtClean="0"/>
-              <a:t>5/21/2026</a:t>
+              <a:t>6/2/2026</a:t>
             </a:fld>
             <a:endParaRPr lang="en-US"/>
           </a:p>
@@ -3319,7 +3319,7 @@
           <a:p>
             <a:fld id="{BFD97FD3-0E3C-4940-AC08-248FE3BAAF7F}" type="datetimeFigureOut">
               <a:rPr lang="en-US" smtClean="0"/>
-              <a:t>5/21/2026</a:t>
+              <a:t>6/2/2026</a:t>
             </a:fld>
             <a:endParaRPr lang="en-US"/>
           </a:p>
@@ -3489,7 +3489,7 @@
           <a:p>
             <a:fld id="{BFD97FD3-0E3C-4940-AC08-248FE3BAAF7F}" type="datetimeFigureOut">
               <a:rPr lang="en-US" smtClean="0"/>
-              <a:t>5/21/2026</a:t>
+              <a:t>6/2/2026</a:t>
             </a:fld>
             <a:endParaRPr lang="en-US"/>
           </a:p>
@@ -3733,7 +3733,7 @@
           <a:p>
             <a:fld id="{BFD97FD3-0E3C-4940-AC08-248FE3BAAF7F}" type="datetimeFigureOut">
               <a:rPr lang="en-US" smtClean="0"/>
-              <a:t>5/21/2026</a:t>
+              <a:t>6/2/2026</a:t>
             </a:fld>
             <a:endParaRPr lang="en-US"/>
           </a:p>
@@ -3969,7 +3969,7 @@
           <a:p>
             <a:fld id="{BFD97FD3-0E3C-4940-AC08-248FE3BAAF7F}" type="datetimeFigureOut">
               <a:rPr lang="en-US" smtClean="0"/>
-              <a:t>5/21/2026</a:t>
+              <a:t>6/2/2026</a:t>
             </a:fld>
             <a:endParaRPr lang="en-US"/>
           </a:p>
@@ -4435,7 +4435,7 @@
           <a:p>
             <a:fld id="{BFD97FD3-0E3C-4940-AC08-248FE3BAAF7F}" type="datetimeFigureOut">
               <a:rPr lang="en-US" smtClean="0"/>
-              <a:t>5/21/2026</a:t>
+              <a:t>6/2/2026</a:t>
             </a:fld>
             <a:endParaRPr lang="en-US"/>
           </a:p>
@@ -4553,7 +4553,7 @@
           <a:p>
             <a:fld id="{BFD97FD3-0E3C-4940-AC08-248FE3BAAF7F}" type="datetimeFigureOut">
               <a:rPr lang="en-US" smtClean="0"/>
-              <a:t>5/21/2026</a:t>
+              <a:t>6/2/2026</a:t>
             </a:fld>
             <a:endParaRPr lang="en-US"/>
           </a:p>
@@ -4648,7 +4648,7 @@
           <a:p>
             <a:fld id="{BFD97FD3-0E3C-4940-AC08-248FE3BAAF7F}" type="datetimeFigureOut">
               <a:rPr lang="en-US" smtClean="0"/>
-              <a:t>5/21/2026</a:t>
+              <a:t>6/2/2026</a:t>
             </a:fld>
             <a:endParaRPr lang="en-US"/>
           </a:p>
@@ -4903,7 +4903,7 @@
           <a:p>
             <a:fld id="{BFD97FD3-0E3C-4940-AC08-248FE3BAAF7F}" type="datetimeFigureOut">
               <a:rPr lang="en-US" smtClean="0"/>
-              <a:t>5/21/2026</a:t>
+              <a:t>6/2/2026</a:t>
             </a:fld>
             <a:endParaRPr lang="en-US"/>
           </a:p>
@@ -5202,7 +5202,7 @@
           <a:p>
             <a:fld id="{BFD97FD3-0E3C-4940-AC08-248FE3BAAF7F}" type="datetimeFigureOut">
               <a:rPr lang="en-US" smtClean="0"/>
-              <a:t>5/21/2026</a:t>
+              <a:t>6/2/2026</a:t>
             </a:fld>
             <a:endParaRPr lang="en-US"/>
           </a:p>
@@ -5436,7 +5436,7 @@
           <a:p>
             <a:fld id="{BFD97FD3-0E3C-4940-AC08-248FE3BAAF7F}" type="datetimeFigureOut">
               <a:rPr lang="en-US" smtClean="0"/>
-              <a:t>5/21/2026</a:t>
+              <a:t>6/2/2026</a:t>
             </a:fld>
             <a:endParaRPr lang="en-US"/>
           </a:p>
@@ -9738,8 +9738,8 @@
         </p:nvSpPr>
         <p:spPr>
           <a:xfrm>
-            <a:off x="157019" y="737418"/>
-            <a:ext cx="11859490" cy="6042073"/>
+            <a:off x="176069" y="804093"/>
+            <a:ext cx="11859490" cy="5882457"/>
           </a:xfrm>
         </p:spPr>
         <p:txBody>
@@ -9813,6 +9813,13 @@
           </a:p>
           <a:p>
             <a:r>
+              <a:rPr lang="en-US"/>
+              <a:t>npm install @ng-bootstrap/ng-bootstrap --force</a:t>
+            </a:r>
+            <a:endParaRPr lang="en-US" sz="1800" b="1"/>
+          </a:p>
+          <a:p>
+            <a:r>
               <a:rPr lang="en-US" sz="1800" b="1"/>
               <a:t>at </a:t>
             </a:r>
@@ -9988,37 +9995,6 @@
               <a:rPr lang="en-US" b="1"/>
               <a:t>/bootstrap-icons/font/bootstrap-icons.min.css"</a:t>
             </a:r>
-            <a:endParaRPr lang="en-US" sz="1600" b="1"/>
-          </a:p>
-          <a:p>
-            <a:r>
-              <a:rPr lang="en-US" sz="1800" b="1"/>
-              <a:t>Versions</a:t>
-            </a:r>
-          </a:p>
-          <a:p>
-            <a:pPr lvl="1"/>
-            <a:r>
-              <a:rPr lang="en-US" b="1"/>
-              <a:t>npm install @ng-bootstrap/ng-bootstrap@15	// with angular 16</a:t>
-            </a:r>
-          </a:p>
-          <a:p>
-            <a:pPr lvl="1"/>
-            <a:r>
-              <a:rPr lang="en-US" b="1"/>
-              <a:t>npm install @ng-bootstrap/ng-bootstrap@16  	// with angular 17</a:t>
-            </a:r>
-          </a:p>
-          <a:p>
-            <a:pPr lvl="1"/>
-            <a:r>
-              <a:rPr lang="en-US" b="1"/>
-              <a:t>npm install @ng-bootstrap/ng-bootstrap@17 	// with angular 18</a:t>
-            </a:r>
-          </a:p>
-          <a:p>
-            <a:pPr lvl="1"/>
             <a:endParaRPr lang="en-US" sz="1600" b="1"/>
           </a:p>
         </p:txBody>

--- a/Angular & type script/Angular.pptx
+++ b/Angular & type script/Angular.pptx
@@ -5,7 +5,7 @@
     <p:sldMasterId id="2147483660" r:id="rId1"/>
   </p:sldMasterIdLst>
   <p:notesMasterIdLst>
-    <p:notesMasterId r:id="rId120"/>
+    <p:notesMasterId r:id="rId126"/>
   </p:notesMasterIdLst>
   <p:sldIdLst>
     <p:sldId id="256" r:id="rId2"/>
@@ -75,57 +75,63 @@
     <p:sldId id="351" r:id="rId66"/>
     <p:sldId id="350" r:id="rId67"/>
     <p:sldId id="311" r:id="rId68"/>
-    <p:sldId id="325" r:id="rId69"/>
-    <p:sldId id="314" r:id="rId70"/>
-    <p:sldId id="328" r:id="rId71"/>
-    <p:sldId id="342" r:id="rId72"/>
-    <p:sldId id="346" r:id="rId73"/>
-    <p:sldId id="353" r:id="rId74"/>
-    <p:sldId id="354" r:id="rId75"/>
-    <p:sldId id="355" r:id="rId76"/>
-    <p:sldId id="356" r:id="rId77"/>
-    <p:sldId id="369" r:id="rId78"/>
-    <p:sldId id="372" r:id="rId79"/>
-    <p:sldId id="330" r:id="rId80"/>
-    <p:sldId id="326" r:id="rId81"/>
-    <p:sldId id="333" r:id="rId82"/>
-    <p:sldId id="334" r:id="rId83"/>
-    <p:sldId id="327" r:id="rId84"/>
-    <p:sldId id="344" r:id="rId85"/>
-    <p:sldId id="313" r:id="rId86"/>
-    <p:sldId id="345" r:id="rId87"/>
-    <p:sldId id="347" r:id="rId88"/>
-    <p:sldId id="349" r:id="rId89"/>
-    <p:sldId id="352" r:id="rId90"/>
-    <p:sldId id="348" r:id="rId91"/>
-    <p:sldId id="316" r:id="rId92"/>
-    <p:sldId id="335" r:id="rId93"/>
-    <p:sldId id="289" r:id="rId94"/>
-    <p:sldId id="290" r:id="rId95"/>
-    <p:sldId id="312" r:id="rId96"/>
-    <p:sldId id="357" r:id="rId97"/>
-    <p:sldId id="341" r:id="rId98"/>
-    <p:sldId id="322" r:id="rId99"/>
-    <p:sldId id="280" r:id="rId100"/>
-    <p:sldId id="358" r:id="rId101"/>
-    <p:sldId id="360" r:id="rId102"/>
-    <p:sldId id="373" r:id="rId103"/>
-    <p:sldId id="374" r:id="rId104"/>
-    <p:sldId id="375" r:id="rId105"/>
-    <p:sldId id="382" r:id="rId106"/>
-    <p:sldId id="359" r:id="rId107"/>
-    <p:sldId id="376" r:id="rId108"/>
-    <p:sldId id="379" r:id="rId109"/>
-    <p:sldId id="380" r:id="rId110"/>
-    <p:sldId id="381" r:id="rId111"/>
-    <p:sldId id="378" r:id="rId112"/>
-    <p:sldId id="269" r:id="rId113"/>
-    <p:sldId id="309" r:id="rId114"/>
-    <p:sldId id="324" r:id="rId115"/>
-    <p:sldId id="317" r:id="rId116"/>
-    <p:sldId id="331" r:id="rId117"/>
-    <p:sldId id="336" r:id="rId118"/>
-    <p:sldId id="268" r:id="rId119"/>
+    <p:sldId id="396" r:id="rId69"/>
+    <p:sldId id="398" r:id="rId70"/>
+    <p:sldId id="397" r:id="rId71"/>
+    <p:sldId id="314" r:id="rId72"/>
+    <p:sldId id="328" r:id="rId73"/>
+    <p:sldId id="342" r:id="rId74"/>
+    <p:sldId id="346" r:id="rId75"/>
+    <p:sldId id="353" r:id="rId76"/>
+    <p:sldId id="354" r:id="rId77"/>
+    <p:sldId id="355" r:id="rId78"/>
+    <p:sldId id="356" r:id="rId79"/>
+    <p:sldId id="369" r:id="rId80"/>
+    <p:sldId id="372" r:id="rId81"/>
+    <p:sldId id="330" r:id="rId82"/>
+    <p:sldId id="326" r:id="rId83"/>
+    <p:sldId id="333" r:id="rId84"/>
+    <p:sldId id="334" r:id="rId85"/>
+    <p:sldId id="327" r:id="rId86"/>
+    <p:sldId id="344" r:id="rId87"/>
+    <p:sldId id="313" r:id="rId88"/>
+    <p:sldId id="345" r:id="rId89"/>
+    <p:sldId id="347" r:id="rId90"/>
+    <p:sldId id="349" r:id="rId91"/>
+    <p:sldId id="352" r:id="rId92"/>
+    <p:sldId id="348" r:id="rId93"/>
+    <p:sldId id="316" r:id="rId94"/>
+    <p:sldId id="335" r:id="rId95"/>
+    <p:sldId id="289" r:id="rId96"/>
+    <p:sldId id="290" r:id="rId97"/>
+    <p:sldId id="312" r:id="rId98"/>
+    <p:sldId id="357" r:id="rId99"/>
+    <p:sldId id="399" r:id="rId100"/>
+    <p:sldId id="341" r:id="rId101"/>
+    <p:sldId id="322" r:id="rId102"/>
+    <p:sldId id="280" r:id="rId103"/>
+    <p:sldId id="358" r:id="rId104"/>
+    <p:sldId id="360" r:id="rId105"/>
+    <p:sldId id="373" r:id="rId106"/>
+    <p:sldId id="374" r:id="rId107"/>
+    <p:sldId id="375" r:id="rId108"/>
+    <p:sldId id="382" r:id="rId109"/>
+    <p:sldId id="359" r:id="rId110"/>
+    <p:sldId id="376" r:id="rId111"/>
+    <p:sldId id="379" r:id="rId112"/>
+    <p:sldId id="380" r:id="rId113"/>
+    <p:sldId id="381" r:id="rId114"/>
+    <p:sldId id="392" r:id="rId115"/>
+    <p:sldId id="394" r:id="rId116"/>
+    <p:sldId id="393" r:id="rId117"/>
+    <p:sldId id="378" r:id="rId118"/>
+    <p:sldId id="269" r:id="rId119"/>
+    <p:sldId id="309" r:id="rId120"/>
+    <p:sldId id="324" r:id="rId121"/>
+    <p:sldId id="317" r:id="rId122"/>
+    <p:sldId id="331" r:id="rId123"/>
+    <p:sldId id="336" r:id="rId124"/>
+    <p:sldId id="268" r:id="rId125"/>
   </p:sldIdLst>
   <p:sldSz cx="12192000" cy="6858000"/>
   <p:notesSz cx="6858000" cy="9144000"/>
@@ -296,7 +302,9 @@
             <p14:sldId id="351"/>
             <p14:sldId id="350"/>
             <p14:sldId id="311"/>
-            <p14:sldId id="325"/>
+            <p14:sldId id="396"/>
+            <p14:sldId id="398"/>
+            <p14:sldId id="397"/>
             <p14:sldId id="314"/>
             <p14:sldId id="328"/>
             <p14:sldId id="342"/>
@@ -325,6 +333,7 @@
             <p14:sldId id="290"/>
             <p14:sldId id="312"/>
             <p14:sldId id="357"/>
+            <p14:sldId id="399"/>
             <p14:sldId id="341"/>
             <p14:sldId id="322"/>
             <p14:sldId id="280"/>
@@ -339,6 +348,9 @@
             <p14:sldId id="379"/>
             <p14:sldId id="380"/>
             <p14:sldId id="381"/>
+            <p14:sldId id="392"/>
+            <p14:sldId id="394"/>
+            <p14:sldId id="393"/>
             <p14:sldId id="378"/>
             <p14:sldId id="269"/>
             <p14:sldId id="309"/>
@@ -440,7 +452,7 @@
           <a:p>
             <a:fld id="{6E57F856-C08C-4D83-8D37-28A6206D94A8}" type="datetimeFigureOut">
               <a:rPr lang="en-US" smtClean="0"/>
-              <a:t>6/3/2026</a:t>
+              <a:t>6/10/2026</a:t>
             </a:fld>
             <a:endParaRPr lang="en-US"/>
           </a:p>
@@ -976,7 +988,7 @@
           <a:p>
             <a:fld id="{BFD97FD3-0E3C-4940-AC08-248FE3BAAF7F}" type="datetimeFigureOut">
               <a:rPr lang="en-US" smtClean="0"/>
-              <a:t>6/3/2026</a:t>
+              <a:t>6/10/2026</a:t>
             </a:fld>
             <a:endParaRPr lang="en-US"/>
           </a:p>
@@ -1273,7 +1285,7 @@
           <a:p>
             <a:fld id="{BFD97FD3-0E3C-4940-AC08-248FE3BAAF7F}" type="datetimeFigureOut">
               <a:rPr lang="en-US" smtClean="0"/>
-              <a:t>6/3/2026</a:t>
+              <a:t>6/10/2026</a:t>
             </a:fld>
             <a:endParaRPr lang="en-US"/>
           </a:p>
@@ -1465,7 +1477,7 @@
           <a:p>
             <a:fld id="{BFD97FD3-0E3C-4940-AC08-248FE3BAAF7F}" type="datetimeFigureOut">
               <a:rPr lang="en-US" smtClean="0"/>
-              <a:t>6/3/2026</a:t>
+              <a:t>6/10/2026</a:t>
             </a:fld>
             <a:endParaRPr lang="en-US"/>
           </a:p>
@@ -1726,7 +1738,7 @@
           <a:p>
             <a:fld id="{BFD97FD3-0E3C-4940-AC08-248FE3BAAF7F}" type="datetimeFigureOut">
               <a:rPr lang="en-US" smtClean="0"/>
-              <a:t>6/3/2026</a:t>
+              <a:t>6/10/2026</a:t>
             </a:fld>
             <a:endParaRPr lang="en-US"/>
           </a:p>
@@ -2150,7 +2162,7 @@
           <a:p>
             <a:fld id="{BFD97FD3-0E3C-4940-AC08-248FE3BAAF7F}" type="datetimeFigureOut">
               <a:rPr lang="en-US" smtClean="0"/>
-              <a:t>6/3/2026</a:t>
+              <a:t>6/10/2026</a:t>
             </a:fld>
             <a:endParaRPr lang="en-US"/>
           </a:p>
@@ -2687,7 +2699,7 @@
           <a:p>
             <a:fld id="{BFD97FD3-0E3C-4940-AC08-248FE3BAAF7F}" type="datetimeFigureOut">
               <a:rPr lang="en-US" smtClean="0"/>
-              <a:t>6/3/2026</a:t>
+              <a:t>6/10/2026</a:t>
             </a:fld>
             <a:endParaRPr lang="en-US"/>
           </a:p>
@@ -3548,7 +3560,7 @@
           <a:p>
             <a:fld id="{BFD97FD3-0E3C-4940-AC08-248FE3BAAF7F}" type="datetimeFigureOut">
               <a:rPr lang="en-US" smtClean="0"/>
-              <a:t>6/3/2026</a:t>
+              <a:t>6/10/2026</a:t>
             </a:fld>
             <a:endParaRPr lang="en-US"/>
           </a:p>
@@ -3718,7 +3730,7 @@
           <a:p>
             <a:fld id="{BFD97FD3-0E3C-4940-AC08-248FE3BAAF7F}" type="datetimeFigureOut">
               <a:rPr lang="en-US" smtClean="0"/>
-              <a:t>6/3/2026</a:t>
+              <a:t>6/10/2026</a:t>
             </a:fld>
             <a:endParaRPr lang="en-US"/>
           </a:p>
@@ -3902,7 +3914,7 @@
           <a:p>
             <a:fld id="{BFD97FD3-0E3C-4940-AC08-248FE3BAAF7F}" type="datetimeFigureOut">
               <a:rPr lang="en-US" smtClean="0"/>
-              <a:t>6/3/2026</a:t>
+              <a:t>6/10/2026</a:t>
             </a:fld>
             <a:endParaRPr lang="en-US"/>
           </a:p>
@@ -4072,7 +4084,7 @@
           <a:p>
             <a:fld id="{BFD97FD3-0E3C-4940-AC08-248FE3BAAF7F}" type="datetimeFigureOut">
               <a:rPr lang="en-US" smtClean="0"/>
-              <a:t>6/3/2026</a:t>
+              <a:t>6/10/2026</a:t>
             </a:fld>
             <a:endParaRPr lang="en-US"/>
           </a:p>
@@ -4316,7 +4328,7 @@
           <a:p>
             <a:fld id="{BFD97FD3-0E3C-4940-AC08-248FE3BAAF7F}" type="datetimeFigureOut">
               <a:rPr lang="en-US" smtClean="0"/>
-              <a:t>6/3/2026</a:t>
+              <a:t>6/10/2026</a:t>
             </a:fld>
             <a:endParaRPr lang="en-US"/>
           </a:p>
@@ -4552,7 +4564,7 @@
           <a:p>
             <a:fld id="{BFD97FD3-0E3C-4940-AC08-248FE3BAAF7F}" type="datetimeFigureOut">
               <a:rPr lang="en-US" smtClean="0"/>
-              <a:t>6/3/2026</a:t>
+              <a:t>6/10/2026</a:t>
             </a:fld>
             <a:endParaRPr lang="en-US"/>
           </a:p>
@@ -5018,7 +5030,7 @@
           <a:p>
             <a:fld id="{BFD97FD3-0E3C-4940-AC08-248FE3BAAF7F}" type="datetimeFigureOut">
               <a:rPr lang="en-US" smtClean="0"/>
-              <a:t>6/3/2026</a:t>
+              <a:t>6/10/2026</a:t>
             </a:fld>
             <a:endParaRPr lang="en-US"/>
           </a:p>
@@ -5136,7 +5148,7 @@
           <a:p>
             <a:fld id="{BFD97FD3-0E3C-4940-AC08-248FE3BAAF7F}" type="datetimeFigureOut">
               <a:rPr lang="en-US" smtClean="0"/>
-              <a:t>6/3/2026</a:t>
+              <a:t>6/10/2026</a:t>
             </a:fld>
             <a:endParaRPr lang="en-US"/>
           </a:p>
@@ -5231,7 +5243,7 @@
           <a:p>
             <a:fld id="{BFD97FD3-0E3C-4940-AC08-248FE3BAAF7F}" type="datetimeFigureOut">
               <a:rPr lang="en-US" smtClean="0"/>
-              <a:t>6/3/2026</a:t>
+              <a:t>6/10/2026</a:t>
             </a:fld>
             <a:endParaRPr lang="en-US"/>
           </a:p>
@@ -5486,7 +5498,7 @@
           <a:p>
             <a:fld id="{BFD97FD3-0E3C-4940-AC08-248FE3BAAF7F}" type="datetimeFigureOut">
               <a:rPr lang="en-US" smtClean="0"/>
-              <a:t>6/3/2026</a:t>
+              <a:t>6/10/2026</a:t>
             </a:fld>
             <a:endParaRPr lang="en-US"/>
           </a:p>
@@ -5785,7 +5797,7 @@
           <a:p>
             <a:fld id="{BFD97FD3-0E3C-4940-AC08-248FE3BAAF7F}" type="datetimeFigureOut">
               <a:rPr lang="en-US" smtClean="0"/>
-              <a:t>6/3/2026</a:t>
+              <a:t>6/10/2026</a:t>
             </a:fld>
             <a:endParaRPr lang="en-US"/>
           </a:p>
@@ -6019,7 +6031,7 @@
           <a:p>
             <a:fld id="{BFD97FD3-0E3C-4940-AC08-248FE3BAAF7F}" type="datetimeFigureOut">
               <a:rPr lang="en-US" smtClean="0"/>
-              <a:t>6/3/2026</a:t>
+              <a:t>6/10/2026</a:t>
             </a:fld>
             <a:endParaRPr lang="en-US"/>
           </a:p>
@@ -7017,6 +7029,361 @@
   <p:cSld>
     <p:spTree>
       <p:nvGrpSpPr>
+        <p:cNvPr id="1" name="">
+          <a:extLst>
+            <a:ext uri="{FF2B5EF4-FFF2-40B4-BE49-F238E27FC236}">
+              <a16:creationId xmlns:a16="http://schemas.microsoft.com/office/drawing/2014/main" id="{97BBE282-2490-D937-4CD4-B4E428EC268B}"/>
+            </a:ext>
+          </a:extLst>
+        </p:cNvPr>
+        <p:cNvGrpSpPr/>
+        <p:nvPr/>
+      </p:nvGrpSpPr>
+      <p:grpSpPr>
+        <a:xfrm>
+          <a:off x="0" y="0"/>
+          <a:ext cx="0" cy="0"/>
+          <a:chOff x="0" y="0"/>
+          <a:chExt cx="0" cy="0"/>
+        </a:xfrm>
+      </p:grpSpPr>
+      <p:sp>
+        <p:nvSpPr>
+          <p:cNvPr id="2" name="Title 1">
+            <a:extLst>
+              <a:ext uri="{FF2B5EF4-FFF2-40B4-BE49-F238E27FC236}">
+                <a16:creationId xmlns:a16="http://schemas.microsoft.com/office/drawing/2014/main" id="{B08F3CA2-43EE-9985-92D9-90B610EA773D}"/>
+              </a:ext>
+            </a:extLst>
+          </p:cNvPr>
+          <p:cNvSpPr>
+            <a:spLocks noGrp="1"/>
+          </p:cNvSpPr>
+          <p:nvPr>
+            <p:ph type="title"/>
+          </p:nvPr>
+        </p:nvSpPr>
+        <p:spPr>
+          <a:xfrm>
+            <a:off x="919119" y="2120202"/>
+            <a:ext cx="10353762" cy="1778558"/>
+          </a:xfrm>
+        </p:spPr>
+        <p:txBody>
+          <a:bodyPr>
+            <a:normAutofit/>
+          </a:bodyPr>
+          <a:lstStyle/>
+          <a:p>
+            <a:r>
+              <a:rPr lang="en-US" sz="4800" b="1">
+                <a:solidFill>
+                  <a:srgbClr val="FF0000"/>
+                </a:solidFill>
+              </a:rPr>
+              <a:t>End Angular Material </a:t>
+            </a:r>
+          </a:p>
+        </p:txBody>
+      </p:sp>
+    </p:spTree>
+    <p:extLst>
+      <p:ext uri="{BB962C8B-B14F-4D97-AF65-F5344CB8AC3E}">
+        <p14:creationId xmlns:p14="http://schemas.microsoft.com/office/powerpoint/2010/main" val="1724169713"/>
+      </p:ext>
+    </p:extLst>
+  </p:cSld>
+  <p:clrMapOvr>
+    <a:masterClrMapping/>
+  </p:clrMapOvr>
+</p:sld>
+</file>
+
+<file path=ppt/slides/slide101.xml><?xml version="1.0" encoding="utf-8"?>
+<p:sld xmlns:a="http://schemas.openxmlformats.org/drawingml/2006/main" xmlns:r="http://schemas.openxmlformats.org/officeDocument/2006/relationships" xmlns:p="http://schemas.openxmlformats.org/presentationml/2006/main">
+  <p:cSld>
+    <p:spTree>
+      <p:nvGrpSpPr>
+        <p:cNvPr id="1" name=""/>
+        <p:cNvGrpSpPr/>
+        <p:nvPr/>
+      </p:nvGrpSpPr>
+      <p:grpSpPr>
+        <a:xfrm>
+          <a:off x="0" y="0"/>
+          <a:ext cx="0" cy="0"/>
+          <a:chOff x="0" y="0"/>
+          <a:chExt cx="0" cy="0"/>
+        </a:xfrm>
+      </p:grpSpPr>
+      <p:sp>
+        <p:nvSpPr>
+          <p:cNvPr id="2" name="Title 1">
+            <a:extLst>
+              <a:ext uri="{FF2B5EF4-FFF2-40B4-BE49-F238E27FC236}">
+                <a16:creationId xmlns:a16="http://schemas.microsoft.com/office/drawing/2014/main" id="{C18561F7-D13B-CC09-3AE9-BB94EDF5C52C}"/>
+              </a:ext>
+            </a:extLst>
+          </p:cNvPr>
+          <p:cNvSpPr>
+            <a:spLocks noGrp="1"/>
+          </p:cNvSpPr>
+          <p:nvPr>
+            <p:ph type="title"/>
+          </p:nvPr>
+        </p:nvSpPr>
+        <p:spPr/>
+        <p:txBody>
+          <a:bodyPr/>
+          <a:lstStyle/>
+          <a:p>
+            <a:r>
+              <a:rPr lang="en-US"/>
+              <a:t>Febric.js</a:t>
+            </a:r>
+          </a:p>
+        </p:txBody>
+      </p:sp>
+      <p:sp>
+        <p:nvSpPr>
+          <p:cNvPr id="3" name="Content Placeholder 2">
+            <a:extLst>
+              <a:ext uri="{FF2B5EF4-FFF2-40B4-BE49-F238E27FC236}">
+                <a16:creationId xmlns:a16="http://schemas.microsoft.com/office/drawing/2014/main" id="{90A35B0F-6B77-0DCD-5499-5A4FDADA6392}"/>
+              </a:ext>
+            </a:extLst>
+          </p:cNvPr>
+          <p:cNvSpPr>
+            <a:spLocks noGrp="1"/>
+          </p:cNvSpPr>
+          <p:nvPr>
+            <p:ph idx="1"/>
+          </p:nvPr>
+        </p:nvSpPr>
+        <p:spPr/>
+        <p:txBody>
+          <a:bodyPr/>
+          <a:lstStyle/>
+          <a:p>
+            <a:endParaRPr lang="en-US"/>
+          </a:p>
+        </p:txBody>
+      </p:sp>
+    </p:spTree>
+    <p:extLst>
+      <p:ext uri="{BB962C8B-B14F-4D97-AF65-F5344CB8AC3E}">
+        <p14:creationId xmlns:p14="http://schemas.microsoft.com/office/powerpoint/2010/main" val="2232214203"/>
+      </p:ext>
+    </p:extLst>
+  </p:cSld>
+  <p:clrMapOvr>
+    <a:masterClrMapping/>
+  </p:clrMapOvr>
+</p:sld>
+</file>
+
+<file path=ppt/slides/slide102.xml><?xml version="1.0" encoding="utf-8"?>
+<p:sld xmlns:a="http://schemas.openxmlformats.org/drawingml/2006/main" xmlns:r="http://schemas.openxmlformats.org/officeDocument/2006/relationships" xmlns:p="http://schemas.openxmlformats.org/presentationml/2006/main">
+  <p:cSld>
+    <p:spTree>
+      <p:nvGrpSpPr>
+        <p:cNvPr id="1" name=""/>
+        <p:cNvGrpSpPr/>
+        <p:nvPr/>
+      </p:nvGrpSpPr>
+      <p:grpSpPr>
+        <a:xfrm>
+          <a:off x="0" y="0"/>
+          <a:ext cx="0" cy="0"/>
+          <a:chOff x="0" y="0"/>
+          <a:chExt cx="0" cy="0"/>
+        </a:xfrm>
+      </p:grpSpPr>
+      <p:sp>
+        <p:nvSpPr>
+          <p:cNvPr id="2" name="Title 1">
+            <a:extLst>
+              <a:ext uri="{FF2B5EF4-FFF2-40B4-BE49-F238E27FC236}">
+                <a16:creationId xmlns:a16="http://schemas.microsoft.com/office/drawing/2014/main" id="{D22BD241-91BC-982E-E8D8-DA059E13C029}"/>
+              </a:ext>
+            </a:extLst>
+          </p:cNvPr>
+          <p:cNvSpPr>
+            <a:spLocks noGrp="1"/>
+          </p:cNvSpPr>
+          <p:nvPr>
+            <p:ph type="title"/>
+          </p:nvPr>
+        </p:nvSpPr>
+        <p:spPr>
+          <a:xfrm>
+            <a:off x="913795" y="0"/>
+            <a:ext cx="10353762" cy="544310"/>
+          </a:xfrm>
+        </p:spPr>
+        <p:txBody>
+          <a:bodyPr>
+            <a:noAutofit/>
+          </a:bodyPr>
+          <a:lstStyle/>
+          <a:p>
+            <a:r>
+              <a:rPr lang="en-US" sz="3200"/>
+              <a:t>Layout [cont.]</a:t>
+            </a:r>
+          </a:p>
+        </p:txBody>
+      </p:sp>
+      <p:sp>
+        <p:nvSpPr>
+          <p:cNvPr id="3" name="Content Placeholder 2">
+            <a:extLst>
+              <a:ext uri="{FF2B5EF4-FFF2-40B4-BE49-F238E27FC236}">
+                <a16:creationId xmlns:a16="http://schemas.microsoft.com/office/drawing/2014/main" id="{F60292FF-FB71-EABA-22C8-49723B52D012}"/>
+              </a:ext>
+            </a:extLst>
+          </p:cNvPr>
+          <p:cNvSpPr>
+            <a:spLocks noGrp="1"/>
+          </p:cNvSpPr>
+          <p:nvPr>
+            <p:ph idx="1"/>
+          </p:nvPr>
+        </p:nvSpPr>
+        <p:spPr>
+          <a:xfrm>
+            <a:off x="913795" y="544310"/>
+            <a:ext cx="10353762" cy="5246891"/>
+          </a:xfrm>
+        </p:spPr>
+        <p:txBody>
+          <a:bodyPr/>
+          <a:lstStyle/>
+          <a:p>
+            <a:r>
+              <a:rPr lang="en-US"/>
+              <a:t>Create sidebar component at components folder</a:t>
+            </a:r>
+          </a:p>
+          <a:p>
+            <a:endParaRPr lang="en-US"/>
+          </a:p>
+          <a:p>
+            <a:endParaRPr lang="en-US"/>
+          </a:p>
+          <a:p>
+            <a:endParaRPr lang="en-US"/>
+          </a:p>
+        </p:txBody>
+      </p:sp>
+      <p:pic>
+        <p:nvPicPr>
+          <p:cNvPr id="5" name="Picture 4">
+            <a:extLst>
+              <a:ext uri="{FF2B5EF4-FFF2-40B4-BE49-F238E27FC236}">
+                <a16:creationId xmlns:a16="http://schemas.microsoft.com/office/drawing/2014/main" id="{5FEC7977-8DB6-5D26-4E6F-029EB9313555}"/>
+              </a:ext>
+            </a:extLst>
+          </p:cNvPr>
+          <p:cNvPicPr>
+            <a:picLocks noChangeAspect="1"/>
+          </p:cNvPicPr>
+          <p:nvPr/>
+        </p:nvPicPr>
+        <p:blipFill>
+          <a:blip r:embed="rId2"/>
+          <a:stretch>
+            <a:fillRect/>
+          </a:stretch>
+        </p:blipFill>
+        <p:spPr>
+          <a:xfrm>
+            <a:off x="0" y="968827"/>
+            <a:ext cx="7332109" cy="3844334"/>
+          </a:xfrm>
+          <a:prstGeom prst="rect">
+            <a:avLst/>
+          </a:prstGeom>
+        </p:spPr>
+      </p:pic>
+      <p:pic>
+        <p:nvPicPr>
+          <p:cNvPr id="7" name="Picture 6">
+            <a:extLst>
+              <a:ext uri="{FF2B5EF4-FFF2-40B4-BE49-F238E27FC236}">
+                <a16:creationId xmlns:a16="http://schemas.microsoft.com/office/drawing/2014/main" id="{97B2557A-5613-A7A6-6167-C88E6497C3C4}"/>
+              </a:ext>
+            </a:extLst>
+          </p:cNvPr>
+          <p:cNvPicPr>
+            <a:picLocks noChangeAspect="1"/>
+          </p:cNvPicPr>
+          <p:nvPr/>
+        </p:nvPicPr>
+        <p:blipFill>
+          <a:blip r:embed="rId3"/>
+          <a:stretch>
+            <a:fillRect/>
+          </a:stretch>
+        </p:blipFill>
+        <p:spPr>
+          <a:xfrm>
+            <a:off x="7332109" y="798004"/>
+            <a:ext cx="4774377" cy="3752248"/>
+          </a:xfrm>
+          <a:prstGeom prst="rect">
+            <a:avLst/>
+          </a:prstGeom>
+        </p:spPr>
+      </p:pic>
+      <p:pic>
+        <p:nvPicPr>
+          <p:cNvPr id="9" name="Picture 8">
+            <a:extLst>
+              <a:ext uri="{FF2B5EF4-FFF2-40B4-BE49-F238E27FC236}">
+                <a16:creationId xmlns:a16="http://schemas.microsoft.com/office/drawing/2014/main" id="{F5B8091C-F973-69E1-483C-A812643E422E}"/>
+              </a:ext>
+            </a:extLst>
+          </p:cNvPr>
+          <p:cNvPicPr>
+            <a:picLocks noChangeAspect="1"/>
+          </p:cNvPicPr>
+          <p:nvPr/>
+        </p:nvPicPr>
+        <p:blipFill>
+          <a:blip r:embed="rId4"/>
+          <a:stretch>
+            <a:fillRect/>
+          </a:stretch>
+        </p:blipFill>
+        <p:spPr>
+          <a:xfrm>
+            <a:off x="1750245" y="4813093"/>
+            <a:ext cx="4158186" cy="1956215"/>
+          </a:xfrm>
+          <a:prstGeom prst="rect">
+            <a:avLst/>
+          </a:prstGeom>
+        </p:spPr>
+      </p:pic>
+    </p:spTree>
+    <p:extLst>
+      <p:ext uri="{BB962C8B-B14F-4D97-AF65-F5344CB8AC3E}">
+        <p14:creationId xmlns:p14="http://schemas.microsoft.com/office/powerpoint/2010/main" val="3498281297"/>
+      </p:ext>
+    </p:extLst>
+  </p:cSld>
+  <p:clrMapOvr>
+    <a:masterClrMapping/>
+  </p:clrMapOvr>
+</p:sld>
+</file>
+
+<file path=ppt/slides/slide103.xml><?xml version="1.0" encoding="utf-8"?>
+<p:sld xmlns:a="http://schemas.openxmlformats.org/drawingml/2006/main" xmlns:r="http://schemas.openxmlformats.org/officeDocument/2006/relationships" xmlns:p="http://schemas.openxmlformats.org/presentationml/2006/main">
+  <p:cSld>
+    <p:spTree>
+      <p:nvGrpSpPr>
         <p:cNvPr id="1" name=""/>
         <p:cNvGrpSpPr/>
         <p:nvPr/>
@@ -7081,7 +7448,7 @@
 </p:sld>
 </file>
 
-<file path=ppt/slides/slide101.xml><?xml version="1.0" encoding="utf-8"?>
+<file path=ppt/slides/slide104.xml><?xml version="1.0" encoding="utf-8"?>
 <p:sld xmlns:a="http://schemas.openxmlformats.org/drawingml/2006/main" xmlns:r="http://schemas.openxmlformats.org/officeDocument/2006/relationships" xmlns:p="http://schemas.openxmlformats.org/presentationml/2006/main">
   <p:cSld>
     <p:spTree>
@@ -7343,7 +7710,7 @@
 </p:sld>
 </file>
 
-<file path=ppt/slides/slide102.xml><?xml version="1.0" encoding="utf-8"?>
+<file path=ppt/slides/slide105.xml><?xml version="1.0" encoding="utf-8"?>
 <p:sld xmlns:a="http://schemas.openxmlformats.org/drawingml/2006/main" xmlns:r="http://schemas.openxmlformats.org/officeDocument/2006/relationships" xmlns:p="http://schemas.openxmlformats.org/presentationml/2006/main">
   <p:cSld>
     <p:spTree>
@@ -7510,7 +7877,7 @@
 </p:sld>
 </file>
 
-<file path=ppt/slides/slide103.xml><?xml version="1.0" encoding="utf-8"?>
+<file path=ppt/slides/slide106.xml><?xml version="1.0" encoding="utf-8"?>
 <p:sld xmlns:a="http://schemas.openxmlformats.org/drawingml/2006/main" xmlns:r="http://schemas.openxmlformats.org/officeDocument/2006/relationships" xmlns:p="http://schemas.openxmlformats.org/presentationml/2006/main">
   <p:cSld>
     <p:spTree>
@@ -7682,7 +8049,7 @@
 </p:sld>
 </file>
 
-<file path=ppt/slides/slide104.xml><?xml version="1.0" encoding="utf-8"?>
+<file path=ppt/slides/slide107.xml><?xml version="1.0" encoding="utf-8"?>
 <p:sld xmlns:a="http://schemas.openxmlformats.org/drawingml/2006/main" xmlns:r="http://schemas.openxmlformats.org/officeDocument/2006/relationships" xmlns:p="http://schemas.openxmlformats.org/presentationml/2006/main">
   <p:cSld>
     <p:spTree>
@@ -7849,7 +8216,7 @@
 </p:sld>
 </file>
 
-<file path=ppt/slides/slide105.xml><?xml version="1.0" encoding="utf-8"?>
+<file path=ppt/slides/slide108.xml><?xml version="1.0" encoding="utf-8"?>
 <p:sld xmlns:a="http://schemas.openxmlformats.org/drawingml/2006/main" xmlns:r="http://schemas.openxmlformats.org/officeDocument/2006/relationships" xmlns:p="http://schemas.openxmlformats.org/presentationml/2006/main">
   <p:cSld>
     <p:spTree>
@@ -8007,7 +8374,7 @@
 </p:sld>
 </file>
 
-<file path=ppt/slides/slide106.xml><?xml version="1.0" encoding="utf-8"?>
+<file path=ppt/slides/slide109.xml><?xml version="1.0" encoding="utf-8"?>
 <p:sld xmlns:a="http://schemas.openxmlformats.org/drawingml/2006/main" xmlns:r="http://schemas.openxmlformats.org/officeDocument/2006/relationships" xmlns:p="http://schemas.openxmlformats.org/presentationml/2006/main">
   <p:cSld>
     <p:spTree>
@@ -8073,578 +8440,6 @@
     <p:extLst>
       <p:ext uri="{BB962C8B-B14F-4D97-AF65-F5344CB8AC3E}">
         <p14:creationId xmlns:p14="http://schemas.microsoft.com/office/powerpoint/2010/main" val="867720948"/>
-      </p:ext>
-    </p:extLst>
-  </p:cSld>
-  <p:clrMapOvr>
-    <a:masterClrMapping/>
-  </p:clrMapOvr>
-</p:sld>
-</file>
-
-<file path=ppt/slides/slide107.xml><?xml version="1.0" encoding="utf-8"?>
-<p:sld xmlns:a="http://schemas.openxmlformats.org/drawingml/2006/main" xmlns:r="http://schemas.openxmlformats.org/officeDocument/2006/relationships" xmlns:p="http://schemas.openxmlformats.org/presentationml/2006/main">
-  <p:cSld>
-    <p:spTree>
-      <p:nvGrpSpPr>
-        <p:cNvPr id="1" name=""/>
-        <p:cNvGrpSpPr/>
-        <p:nvPr/>
-      </p:nvGrpSpPr>
-      <p:grpSpPr>
-        <a:xfrm>
-          <a:off x="0" y="0"/>
-          <a:ext cx="0" cy="0"/>
-          <a:chOff x="0" y="0"/>
-          <a:chExt cx="0" cy="0"/>
-        </a:xfrm>
-      </p:grpSpPr>
-      <p:sp>
-        <p:nvSpPr>
-          <p:cNvPr id="2" name="Title 1">
-            <a:extLst>
-              <a:ext uri="{FF2B5EF4-FFF2-40B4-BE49-F238E27FC236}">
-                <a16:creationId xmlns:a16="http://schemas.microsoft.com/office/drawing/2014/main" id="{6CF800BA-09F5-CC31-4890-0431F94074E9}"/>
-              </a:ext>
-            </a:extLst>
-          </p:cNvPr>
-          <p:cNvSpPr>
-            <a:spLocks noGrp="1"/>
-          </p:cNvSpPr>
-          <p:nvPr>
-            <p:ph type="title"/>
-          </p:nvPr>
-        </p:nvSpPr>
-        <p:spPr>
-          <a:xfrm>
-            <a:off x="919119" y="369277"/>
-            <a:ext cx="10353762" cy="6119446"/>
-          </a:xfrm>
-        </p:spPr>
-        <p:txBody>
-          <a:bodyPr>
-            <a:normAutofit/>
-          </a:bodyPr>
-          <a:lstStyle/>
-          <a:p>
-            <a:r>
-              <a:rPr lang="en-US" sz="6000" b="1">
-                <a:solidFill>
-                  <a:srgbClr val="FF0000"/>
-                </a:solidFill>
-              </a:rPr>
-              <a:t>Start interceptors</a:t>
-            </a:r>
-          </a:p>
-        </p:txBody>
-      </p:sp>
-    </p:spTree>
-    <p:extLst>
-      <p:ext uri="{BB962C8B-B14F-4D97-AF65-F5344CB8AC3E}">
-        <p14:creationId xmlns:p14="http://schemas.microsoft.com/office/powerpoint/2010/main" val="782010588"/>
-      </p:ext>
-    </p:extLst>
-  </p:cSld>
-  <p:clrMapOvr>
-    <a:masterClrMapping/>
-  </p:clrMapOvr>
-</p:sld>
-</file>
-
-<file path=ppt/slides/slide108.xml><?xml version="1.0" encoding="utf-8"?>
-<p:sld xmlns:a="http://schemas.openxmlformats.org/drawingml/2006/main" xmlns:r="http://schemas.openxmlformats.org/officeDocument/2006/relationships" xmlns:p="http://schemas.openxmlformats.org/presentationml/2006/main">
-  <p:cSld>
-    <p:spTree>
-      <p:nvGrpSpPr>
-        <p:cNvPr id="1" name=""/>
-        <p:cNvGrpSpPr/>
-        <p:nvPr/>
-      </p:nvGrpSpPr>
-      <p:grpSpPr>
-        <a:xfrm>
-          <a:off x="0" y="0"/>
-          <a:ext cx="0" cy="0"/>
-          <a:chOff x="0" y="0"/>
-          <a:chExt cx="0" cy="0"/>
-        </a:xfrm>
-      </p:grpSpPr>
-      <p:sp>
-        <p:nvSpPr>
-          <p:cNvPr id="2" name="Title 1">
-            <a:extLst>
-              <a:ext uri="{FF2B5EF4-FFF2-40B4-BE49-F238E27FC236}">
-                <a16:creationId xmlns:a16="http://schemas.microsoft.com/office/drawing/2014/main" id="{FF8CBBCD-3318-4190-7632-572F67C373C8}"/>
-              </a:ext>
-            </a:extLst>
-          </p:cNvPr>
-          <p:cNvSpPr>
-            <a:spLocks noGrp="1"/>
-          </p:cNvSpPr>
-          <p:nvPr>
-            <p:ph type="title"/>
-          </p:nvPr>
-        </p:nvSpPr>
-        <p:spPr>
-          <a:xfrm>
-            <a:off x="913795" y="0"/>
-            <a:ext cx="10353762" cy="648207"/>
-          </a:xfrm>
-        </p:spPr>
-        <p:txBody>
-          <a:bodyPr>
-            <a:normAutofit fontScale="90000"/>
-          </a:bodyPr>
-          <a:lstStyle/>
-          <a:p>
-            <a:r>
-              <a:rPr lang="en-US"/>
-              <a:t>Creating interceptor</a:t>
-            </a:r>
-          </a:p>
-        </p:txBody>
-      </p:sp>
-      <p:sp>
-        <p:nvSpPr>
-          <p:cNvPr id="3" name="Content Placeholder 2">
-            <a:extLst>
-              <a:ext uri="{FF2B5EF4-FFF2-40B4-BE49-F238E27FC236}">
-                <a16:creationId xmlns:a16="http://schemas.microsoft.com/office/drawing/2014/main" id="{E17B4862-CCB4-40A1-9075-223076C4D735}"/>
-              </a:ext>
-            </a:extLst>
-          </p:cNvPr>
-          <p:cNvSpPr>
-            <a:spLocks noGrp="1"/>
-          </p:cNvSpPr>
-          <p:nvPr>
-            <p:ph idx="1"/>
-          </p:nvPr>
-        </p:nvSpPr>
-        <p:spPr>
-          <a:xfrm>
-            <a:off x="8289890" y="763675"/>
-            <a:ext cx="3989196" cy="6094325"/>
-          </a:xfrm>
-        </p:spPr>
-        <p:txBody>
-          <a:bodyPr/>
-          <a:lstStyle/>
-          <a:p>
-            <a:r>
-              <a:rPr lang="en-US"/>
-              <a:t>For example we are going to implement interceptor that handle </a:t>
-            </a:r>
-            <a:r>
-              <a:rPr lang="en-US">
-                <a:effectLst/>
-              </a:rPr>
-              <a:t>HttpErrorResponse</a:t>
-            </a:r>
-          </a:p>
-          <a:p>
-            <a:endParaRPr lang="en-US"/>
-          </a:p>
-        </p:txBody>
-      </p:sp>
-      <p:pic>
-        <p:nvPicPr>
-          <p:cNvPr id="5" name="Picture 4">
-            <a:extLst>
-              <a:ext uri="{FF2B5EF4-FFF2-40B4-BE49-F238E27FC236}">
-                <a16:creationId xmlns:a16="http://schemas.microsoft.com/office/drawing/2014/main" id="{DF06E01F-E87D-064C-964F-EE89F2301A5D}"/>
-              </a:ext>
-            </a:extLst>
-          </p:cNvPr>
-          <p:cNvPicPr>
-            <a:picLocks noChangeAspect="1"/>
-          </p:cNvPicPr>
-          <p:nvPr/>
-        </p:nvPicPr>
-        <p:blipFill>
-          <a:blip r:embed="rId2"/>
-          <a:stretch>
-            <a:fillRect/>
-          </a:stretch>
-        </p:blipFill>
-        <p:spPr>
-          <a:xfrm>
-            <a:off x="0" y="648208"/>
-            <a:ext cx="8149213" cy="6209791"/>
-          </a:xfrm>
-          <a:prstGeom prst="rect">
-            <a:avLst/>
-          </a:prstGeom>
-        </p:spPr>
-      </p:pic>
-    </p:spTree>
-    <p:extLst>
-      <p:ext uri="{BB962C8B-B14F-4D97-AF65-F5344CB8AC3E}">
-        <p14:creationId xmlns:p14="http://schemas.microsoft.com/office/powerpoint/2010/main" val="3608272779"/>
-      </p:ext>
-    </p:extLst>
-  </p:cSld>
-  <p:clrMapOvr>
-    <a:masterClrMapping/>
-  </p:clrMapOvr>
-</p:sld>
-</file>
-
-<file path=ppt/slides/slide109.xml><?xml version="1.0" encoding="utf-8"?>
-<p:sld xmlns:a="http://schemas.openxmlformats.org/drawingml/2006/main" xmlns:r="http://schemas.openxmlformats.org/officeDocument/2006/relationships" xmlns:p="http://schemas.openxmlformats.org/presentationml/2006/main">
-  <p:cSld>
-    <p:spTree>
-      <p:nvGrpSpPr>
-        <p:cNvPr id="1" name=""/>
-        <p:cNvGrpSpPr/>
-        <p:nvPr/>
-      </p:nvGrpSpPr>
-      <p:grpSpPr>
-        <a:xfrm>
-          <a:off x="0" y="0"/>
-          <a:ext cx="0" cy="0"/>
-          <a:chOff x="0" y="0"/>
-          <a:chExt cx="0" cy="0"/>
-        </a:xfrm>
-      </p:grpSpPr>
-      <p:sp>
-        <p:nvSpPr>
-          <p:cNvPr id="2" name="Title 1">
-            <a:extLst>
-              <a:ext uri="{FF2B5EF4-FFF2-40B4-BE49-F238E27FC236}">
-                <a16:creationId xmlns:a16="http://schemas.microsoft.com/office/drawing/2014/main" id="{CBC7A2D8-AEDE-CFCB-A4A7-B03E052ED8BA}"/>
-              </a:ext>
-            </a:extLst>
-          </p:cNvPr>
-          <p:cNvSpPr>
-            <a:spLocks noGrp="1"/>
-          </p:cNvSpPr>
-          <p:nvPr>
-            <p:ph type="title"/>
-          </p:nvPr>
-        </p:nvSpPr>
-        <p:spPr>
-          <a:xfrm>
-            <a:off x="913795" y="0"/>
-            <a:ext cx="10353762" cy="693336"/>
-          </a:xfrm>
-        </p:spPr>
-        <p:txBody>
-          <a:bodyPr>
-            <a:normAutofit fontScale="90000"/>
-          </a:bodyPr>
-          <a:lstStyle/>
-          <a:p>
-            <a:r>
-              <a:rPr lang="en-US"/>
-              <a:t>Register the interceptor</a:t>
-            </a:r>
-          </a:p>
-        </p:txBody>
-      </p:sp>
-      <p:sp>
-        <p:nvSpPr>
-          <p:cNvPr id="3" name="Content Placeholder 2">
-            <a:extLst>
-              <a:ext uri="{FF2B5EF4-FFF2-40B4-BE49-F238E27FC236}">
-                <a16:creationId xmlns:a16="http://schemas.microsoft.com/office/drawing/2014/main" id="{B77BA7A1-809F-19E0-8CA5-0D70065F38C0}"/>
-              </a:ext>
-            </a:extLst>
-          </p:cNvPr>
-          <p:cNvSpPr>
-            <a:spLocks noGrp="1"/>
-          </p:cNvSpPr>
-          <p:nvPr>
-            <p:ph idx="1"/>
-          </p:nvPr>
-        </p:nvSpPr>
-        <p:spPr>
-          <a:xfrm>
-            <a:off x="190918" y="693336"/>
-            <a:ext cx="11927393" cy="5878285"/>
-          </a:xfrm>
-        </p:spPr>
-        <p:txBody>
-          <a:bodyPr/>
-          <a:lstStyle/>
-          <a:p>
-            <a:r>
-              <a:rPr lang="en-US">
-                <a:effectLst/>
-              </a:rPr>
-              <a:t>{ </a:t>
-            </a:r>
-            <a:r>
-              <a:rPr lang="en-US" b="1">
-                <a:solidFill>
-                  <a:srgbClr val="92D050"/>
-                </a:solidFill>
-                <a:effectLst/>
-              </a:rPr>
-              <a:t>provide</a:t>
-            </a:r>
-            <a:r>
-              <a:rPr lang="en-US">
-                <a:effectLst/>
-              </a:rPr>
-              <a:t>: HTTP_INTERCEPTORS, </a:t>
-            </a:r>
-            <a:r>
-              <a:rPr lang="en-US" b="1">
-                <a:solidFill>
-                  <a:srgbClr val="92D050"/>
-                </a:solidFill>
-                <a:effectLst/>
-              </a:rPr>
-              <a:t>useClass</a:t>
-            </a:r>
-            <a:r>
-              <a:rPr lang="en-US">
-                <a:effectLst/>
-              </a:rPr>
-              <a:t>: HttpErrorInterceptor, </a:t>
-            </a:r>
-            <a:r>
-              <a:rPr lang="en-US" b="1">
-                <a:solidFill>
-                  <a:srgbClr val="92D050"/>
-                </a:solidFill>
-                <a:effectLst/>
-              </a:rPr>
-              <a:t>multi</a:t>
-            </a:r>
-            <a:r>
-              <a:rPr lang="en-US">
-                <a:effectLst/>
-              </a:rPr>
-              <a:t>: true },</a:t>
-            </a:r>
-          </a:p>
-          <a:p>
-            <a:r>
-              <a:rPr lang="en-US" b="1">
-                <a:solidFill>
-                  <a:srgbClr val="92D050"/>
-                </a:solidFill>
-                <a:effectLst/>
-              </a:rPr>
-              <a:t>provide</a:t>
-            </a:r>
-            <a:r>
-              <a:rPr lang="en-US">
-                <a:effectLst/>
-              </a:rPr>
-              <a:t>: HTTP_INTERCEPTORS</a:t>
-            </a:r>
-          </a:p>
-          <a:p>
-            <a:pPr lvl="1"/>
-            <a:r>
-              <a:rPr lang="en-US">
-                <a:effectLst/>
-              </a:rPr>
-              <a:t>It means I register this to participate in HTTP interceptor pipeline</a:t>
-            </a:r>
-          </a:p>
-          <a:p>
-            <a:pPr lvl="1"/>
-            <a:r>
-              <a:rPr lang="en-US">
-                <a:effectLst/>
-              </a:rPr>
-              <a:t>Angular later looks for everything registered under HTTP_INTERCEPTORS and builds the interceptor chain</a:t>
-            </a:r>
-          </a:p>
-          <a:p>
-            <a:r>
-              <a:rPr lang="en-US" b="1">
-                <a:solidFill>
-                  <a:srgbClr val="92D050"/>
-                </a:solidFill>
-                <a:effectLst/>
-              </a:rPr>
-              <a:t>useClass</a:t>
-            </a:r>
-            <a:r>
-              <a:rPr lang="en-US"/>
-              <a:t>: </a:t>
-            </a:r>
-            <a:r>
-              <a:rPr lang="en-US">
-                <a:effectLst/>
-              </a:rPr>
-              <a:t>HttpErrorInterceptor</a:t>
-            </a:r>
-          </a:p>
-          <a:p>
-            <a:pPr lvl="1"/>
-            <a:r>
-              <a:rPr lang="en-US">
-                <a:effectLst/>
-              </a:rPr>
-              <a:t>The class itself</a:t>
-            </a:r>
-          </a:p>
-          <a:p>
-            <a:r>
-              <a:rPr lang="en-US" b="1">
-                <a:solidFill>
-                  <a:srgbClr val="92D050"/>
-                </a:solidFill>
-                <a:effectLst/>
-              </a:rPr>
-              <a:t>multi</a:t>
-            </a:r>
-            <a:r>
-              <a:rPr lang="en-US">
-                <a:effectLst/>
-              </a:rPr>
-              <a:t>: true</a:t>
-            </a:r>
-          </a:p>
-          <a:p>
-            <a:pPr lvl="1"/>
-            <a:r>
-              <a:rPr lang="en-US" b="1"/>
-              <a:t>Withtout multi: true, angular would expect only one value for HTTP_INTERCEPTOR and every new registration will overwrite the previous one</a:t>
-            </a:r>
-          </a:p>
-          <a:p>
-            <a:pPr lvl="1"/>
-            <a:r>
-              <a:rPr lang="en-US" sz="1400" b="1">
-                <a:effectLst/>
-              </a:rPr>
-              <a:t>{ </a:t>
-            </a:r>
-            <a:r>
-              <a:rPr lang="en-US" sz="1400" b="1">
-                <a:solidFill>
-                  <a:srgbClr val="92D050"/>
-                </a:solidFill>
-                <a:effectLst/>
-              </a:rPr>
-              <a:t>provide</a:t>
-            </a:r>
-            <a:r>
-              <a:rPr lang="en-US" sz="1400" b="1">
-                <a:effectLst/>
-              </a:rPr>
-              <a:t>: HTTP_INTERCEPTORS, </a:t>
-            </a:r>
-            <a:r>
-              <a:rPr lang="en-US" sz="1400" b="1">
-                <a:solidFill>
-                  <a:srgbClr val="92D050"/>
-                </a:solidFill>
-                <a:effectLst/>
-              </a:rPr>
-              <a:t>useClass</a:t>
-            </a:r>
-            <a:r>
-              <a:rPr lang="en-US" sz="1400" b="1">
-                <a:effectLst/>
-              </a:rPr>
-              <a:t>: HttpErrorInterceptor}, { </a:t>
-            </a:r>
-            <a:r>
-              <a:rPr lang="en-US" sz="1400" b="1">
-                <a:solidFill>
-                  <a:srgbClr val="92D050"/>
-                </a:solidFill>
-                <a:effectLst/>
-              </a:rPr>
-              <a:t>provide</a:t>
-            </a:r>
-            <a:r>
-              <a:rPr lang="en-US" sz="1400" b="1">
-                <a:effectLst/>
-              </a:rPr>
-              <a:t>: HTTP_INTERCEPTORS, </a:t>
-            </a:r>
-            <a:r>
-              <a:rPr lang="en-US" sz="1400" b="1">
-                <a:solidFill>
-                  <a:srgbClr val="92D050"/>
-                </a:solidFill>
-                <a:effectLst/>
-              </a:rPr>
-              <a:t>useClass</a:t>
-            </a:r>
-            <a:r>
-              <a:rPr lang="en-US" sz="1400" b="1">
-                <a:effectLst/>
-              </a:rPr>
-              <a:t>: AuthInterceptor},</a:t>
-            </a:r>
-          </a:p>
-          <a:p>
-            <a:pPr lvl="1"/>
-            <a:r>
-              <a:rPr lang="en-US" sz="1600" b="1">
-                <a:effectLst/>
-              </a:rPr>
-              <a:t>INTERCEPTORS = AuthInterceptor // cause it is the last one</a:t>
-            </a:r>
-            <a:endParaRPr lang="en-US" sz="1600" b="1"/>
-          </a:p>
-          <a:p>
-            <a:pPr lvl="1"/>
-            <a:r>
-              <a:rPr lang="en-US"/>
-              <a:t>With multi: true, </a:t>
-            </a:r>
-            <a:r>
-              <a:rPr lang="en-US" sz="1600" b="1">
-                <a:solidFill>
-                  <a:srgbClr val="FFFF00"/>
-                </a:solidFill>
-                <a:effectLst/>
-              </a:rPr>
-              <a:t>HTTP_INTERCEPTORS </a:t>
-            </a:r>
-            <a:r>
-              <a:rPr lang="en-US" sz="1600" b="1">
-                <a:effectLst/>
-              </a:rPr>
-              <a:t>= [</a:t>
-            </a:r>
-            <a:r>
-              <a:rPr lang="en-US" sz="1600" b="1">
-                <a:solidFill>
-                  <a:srgbClr val="00B0F0"/>
-                </a:solidFill>
-                <a:effectLst/>
-              </a:rPr>
-              <a:t>AuthInterceptor</a:t>
-            </a:r>
-            <a:r>
-              <a:rPr lang="en-US" sz="1600" b="1">
-                <a:effectLst/>
-              </a:rPr>
-              <a:t>, </a:t>
-            </a:r>
-            <a:r>
-              <a:rPr lang="en-US" b="1">
-                <a:solidFill>
-                  <a:srgbClr val="00B0F0"/>
-                </a:solidFill>
-                <a:effectLst/>
-              </a:rPr>
-              <a:t>HttpErrorInterceptor</a:t>
-            </a:r>
-            <a:r>
-              <a:rPr lang="en-US" b="1">
-                <a:effectLst/>
-              </a:rPr>
-              <a:t> ] </a:t>
-            </a:r>
-            <a:endParaRPr lang="en-US"/>
-          </a:p>
-        </p:txBody>
-      </p:sp>
-    </p:spTree>
-    <p:extLst>
-      <p:ext uri="{BB962C8B-B14F-4D97-AF65-F5344CB8AC3E}">
-        <p14:creationId xmlns:p14="http://schemas.microsoft.com/office/powerpoint/2010/main" val="4093490335"/>
       </p:ext>
     </p:extLst>
   </p:cSld>
@@ -8832,6 +8627,578 @@
           <p:cNvPr id="2" name="Title 1">
             <a:extLst>
               <a:ext uri="{FF2B5EF4-FFF2-40B4-BE49-F238E27FC236}">
+                <a16:creationId xmlns:a16="http://schemas.microsoft.com/office/drawing/2014/main" id="{6CF800BA-09F5-CC31-4890-0431F94074E9}"/>
+              </a:ext>
+            </a:extLst>
+          </p:cNvPr>
+          <p:cNvSpPr>
+            <a:spLocks noGrp="1"/>
+          </p:cNvSpPr>
+          <p:nvPr>
+            <p:ph type="title"/>
+          </p:nvPr>
+        </p:nvSpPr>
+        <p:spPr>
+          <a:xfrm>
+            <a:off x="919119" y="369277"/>
+            <a:ext cx="10353762" cy="6119446"/>
+          </a:xfrm>
+        </p:spPr>
+        <p:txBody>
+          <a:bodyPr>
+            <a:normAutofit/>
+          </a:bodyPr>
+          <a:lstStyle/>
+          <a:p>
+            <a:r>
+              <a:rPr lang="en-US" sz="6000" b="1">
+                <a:solidFill>
+                  <a:srgbClr val="FF0000"/>
+                </a:solidFill>
+              </a:rPr>
+              <a:t>Start interceptors</a:t>
+            </a:r>
+          </a:p>
+        </p:txBody>
+      </p:sp>
+    </p:spTree>
+    <p:extLst>
+      <p:ext uri="{BB962C8B-B14F-4D97-AF65-F5344CB8AC3E}">
+        <p14:creationId xmlns:p14="http://schemas.microsoft.com/office/powerpoint/2010/main" val="782010588"/>
+      </p:ext>
+    </p:extLst>
+  </p:cSld>
+  <p:clrMapOvr>
+    <a:masterClrMapping/>
+  </p:clrMapOvr>
+</p:sld>
+</file>
+
+<file path=ppt/slides/slide111.xml><?xml version="1.0" encoding="utf-8"?>
+<p:sld xmlns:a="http://schemas.openxmlformats.org/drawingml/2006/main" xmlns:r="http://schemas.openxmlformats.org/officeDocument/2006/relationships" xmlns:p="http://schemas.openxmlformats.org/presentationml/2006/main">
+  <p:cSld>
+    <p:spTree>
+      <p:nvGrpSpPr>
+        <p:cNvPr id="1" name=""/>
+        <p:cNvGrpSpPr/>
+        <p:nvPr/>
+      </p:nvGrpSpPr>
+      <p:grpSpPr>
+        <a:xfrm>
+          <a:off x="0" y="0"/>
+          <a:ext cx="0" cy="0"/>
+          <a:chOff x="0" y="0"/>
+          <a:chExt cx="0" cy="0"/>
+        </a:xfrm>
+      </p:grpSpPr>
+      <p:sp>
+        <p:nvSpPr>
+          <p:cNvPr id="2" name="Title 1">
+            <a:extLst>
+              <a:ext uri="{FF2B5EF4-FFF2-40B4-BE49-F238E27FC236}">
+                <a16:creationId xmlns:a16="http://schemas.microsoft.com/office/drawing/2014/main" id="{FF8CBBCD-3318-4190-7632-572F67C373C8}"/>
+              </a:ext>
+            </a:extLst>
+          </p:cNvPr>
+          <p:cNvSpPr>
+            <a:spLocks noGrp="1"/>
+          </p:cNvSpPr>
+          <p:nvPr>
+            <p:ph type="title"/>
+          </p:nvPr>
+        </p:nvSpPr>
+        <p:spPr>
+          <a:xfrm>
+            <a:off x="913795" y="0"/>
+            <a:ext cx="10353762" cy="648207"/>
+          </a:xfrm>
+        </p:spPr>
+        <p:txBody>
+          <a:bodyPr>
+            <a:normAutofit fontScale="90000"/>
+          </a:bodyPr>
+          <a:lstStyle/>
+          <a:p>
+            <a:r>
+              <a:rPr lang="en-US"/>
+              <a:t>Creating interceptor</a:t>
+            </a:r>
+          </a:p>
+        </p:txBody>
+      </p:sp>
+      <p:sp>
+        <p:nvSpPr>
+          <p:cNvPr id="3" name="Content Placeholder 2">
+            <a:extLst>
+              <a:ext uri="{FF2B5EF4-FFF2-40B4-BE49-F238E27FC236}">
+                <a16:creationId xmlns:a16="http://schemas.microsoft.com/office/drawing/2014/main" id="{E17B4862-CCB4-40A1-9075-223076C4D735}"/>
+              </a:ext>
+            </a:extLst>
+          </p:cNvPr>
+          <p:cNvSpPr>
+            <a:spLocks noGrp="1"/>
+          </p:cNvSpPr>
+          <p:nvPr>
+            <p:ph idx="1"/>
+          </p:nvPr>
+        </p:nvSpPr>
+        <p:spPr>
+          <a:xfrm>
+            <a:off x="8289890" y="763675"/>
+            <a:ext cx="3989196" cy="6094325"/>
+          </a:xfrm>
+        </p:spPr>
+        <p:txBody>
+          <a:bodyPr/>
+          <a:lstStyle/>
+          <a:p>
+            <a:r>
+              <a:rPr lang="en-US"/>
+              <a:t>For example we are going to implement interceptor that handle </a:t>
+            </a:r>
+            <a:r>
+              <a:rPr lang="en-US">
+                <a:effectLst/>
+              </a:rPr>
+              <a:t>HttpErrorResponse</a:t>
+            </a:r>
+          </a:p>
+          <a:p>
+            <a:endParaRPr lang="en-US"/>
+          </a:p>
+        </p:txBody>
+      </p:sp>
+      <p:pic>
+        <p:nvPicPr>
+          <p:cNvPr id="5" name="Picture 4">
+            <a:extLst>
+              <a:ext uri="{FF2B5EF4-FFF2-40B4-BE49-F238E27FC236}">
+                <a16:creationId xmlns:a16="http://schemas.microsoft.com/office/drawing/2014/main" id="{DF06E01F-E87D-064C-964F-EE89F2301A5D}"/>
+              </a:ext>
+            </a:extLst>
+          </p:cNvPr>
+          <p:cNvPicPr>
+            <a:picLocks noChangeAspect="1"/>
+          </p:cNvPicPr>
+          <p:nvPr/>
+        </p:nvPicPr>
+        <p:blipFill>
+          <a:blip r:embed="rId2"/>
+          <a:stretch>
+            <a:fillRect/>
+          </a:stretch>
+        </p:blipFill>
+        <p:spPr>
+          <a:xfrm>
+            <a:off x="0" y="648208"/>
+            <a:ext cx="8149213" cy="6209791"/>
+          </a:xfrm>
+          <a:prstGeom prst="rect">
+            <a:avLst/>
+          </a:prstGeom>
+        </p:spPr>
+      </p:pic>
+    </p:spTree>
+    <p:extLst>
+      <p:ext uri="{BB962C8B-B14F-4D97-AF65-F5344CB8AC3E}">
+        <p14:creationId xmlns:p14="http://schemas.microsoft.com/office/powerpoint/2010/main" val="3608272779"/>
+      </p:ext>
+    </p:extLst>
+  </p:cSld>
+  <p:clrMapOvr>
+    <a:masterClrMapping/>
+  </p:clrMapOvr>
+</p:sld>
+</file>
+
+<file path=ppt/slides/slide112.xml><?xml version="1.0" encoding="utf-8"?>
+<p:sld xmlns:a="http://schemas.openxmlformats.org/drawingml/2006/main" xmlns:r="http://schemas.openxmlformats.org/officeDocument/2006/relationships" xmlns:p="http://schemas.openxmlformats.org/presentationml/2006/main">
+  <p:cSld>
+    <p:spTree>
+      <p:nvGrpSpPr>
+        <p:cNvPr id="1" name=""/>
+        <p:cNvGrpSpPr/>
+        <p:nvPr/>
+      </p:nvGrpSpPr>
+      <p:grpSpPr>
+        <a:xfrm>
+          <a:off x="0" y="0"/>
+          <a:ext cx="0" cy="0"/>
+          <a:chOff x="0" y="0"/>
+          <a:chExt cx="0" cy="0"/>
+        </a:xfrm>
+      </p:grpSpPr>
+      <p:sp>
+        <p:nvSpPr>
+          <p:cNvPr id="2" name="Title 1">
+            <a:extLst>
+              <a:ext uri="{FF2B5EF4-FFF2-40B4-BE49-F238E27FC236}">
+                <a16:creationId xmlns:a16="http://schemas.microsoft.com/office/drawing/2014/main" id="{CBC7A2D8-AEDE-CFCB-A4A7-B03E052ED8BA}"/>
+              </a:ext>
+            </a:extLst>
+          </p:cNvPr>
+          <p:cNvSpPr>
+            <a:spLocks noGrp="1"/>
+          </p:cNvSpPr>
+          <p:nvPr>
+            <p:ph type="title"/>
+          </p:nvPr>
+        </p:nvSpPr>
+        <p:spPr>
+          <a:xfrm>
+            <a:off x="913795" y="0"/>
+            <a:ext cx="10353762" cy="693336"/>
+          </a:xfrm>
+        </p:spPr>
+        <p:txBody>
+          <a:bodyPr>
+            <a:normAutofit fontScale="90000"/>
+          </a:bodyPr>
+          <a:lstStyle/>
+          <a:p>
+            <a:r>
+              <a:rPr lang="en-US"/>
+              <a:t>Register the interceptor</a:t>
+            </a:r>
+          </a:p>
+        </p:txBody>
+      </p:sp>
+      <p:sp>
+        <p:nvSpPr>
+          <p:cNvPr id="3" name="Content Placeholder 2">
+            <a:extLst>
+              <a:ext uri="{FF2B5EF4-FFF2-40B4-BE49-F238E27FC236}">
+                <a16:creationId xmlns:a16="http://schemas.microsoft.com/office/drawing/2014/main" id="{B77BA7A1-809F-19E0-8CA5-0D70065F38C0}"/>
+              </a:ext>
+            </a:extLst>
+          </p:cNvPr>
+          <p:cNvSpPr>
+            <a:spLocks noGrp="1"/>
+          </p:cNvSpPr>
+          <p:nvPr>
+            <p:ph idx="1"/>
+          </p:nvPr>
+        </p:nvSpPr>
+        <p:spPr>
+          <a:xfrm>
+            <a:off x="190918" y="693336"/>
+            <a:ext cx="11927393" cy="5878285"/>
+          </a:xfrm>
+        </p:spPr>
+        <p:txBody>
+          <a:bodyPr/>
+          <a:lstStyle/>
+          <a:p>
+            <a:r>
+              <a:rPr lang="en-US">
+                <a:effectLst/>
+              </a:rPr>
+              <a:t>{ </a:t>
+            </a:r>
+            <a:r>
+              <a:rPr lang="en-US" b="1">
+                <a:solidFill>
+                  <a:srgbClr val="92D050"/>
+                </a:solidFill>
+                <a:effectLst/>
+              </a:rPr>
+              <a:t>provide</a:t>
+            </a:r>
+            <a:r>
+              <a:rPr lang="en-US">
+                <a:effectLst/>
+              </a:rPr>
+              <a:t>: HTTP_INTERCEPTORS, </a:t>
+            </a:r>
+            <a:r>
+              <a:rPr lang="en-US" b="1">
+                <a:solidFill>
+                  <a:srgbClr val="92D050"/>
+                </a:solidFill>
+                <a:effectLst/>
+              </a:rPr>
+              <a:t>useClass</a:t>
+            </a:r>
+            <a:r>
+              <a:rPr lang="en-US">
+                <a:effectLst/>
+              </a:rPr>
+              <a:t>: HttpErrorInterceptor, </a:t>
+            </a:r>
+            <a:r>
+              <a:rPr lang="en-US" b="1">
+                <a:solidFill>
+                  <a:srgbClr val="92D050"/>
+                </a:solidFill>
+                <a:effectLst/>
+              </a:rPr>
+              <a:t>multi</a:t>
+            </a:r>
+            <a:r>
+              <a:rPr lang="en-US">
+                <a:effectLst/>
+              </a:rPr>
+              <a:t>: true },</a:t>
+            </a:r>
+          </a:p>
+          <a:p>
+            <a:r>
+              <a:rPr lang="en-US" b="1">
+                <a:solidFill>
+                  <a:srgbClr val="92D050"/>
+                </a:solidFill>
+                <a:effectLst/>
+              </a:rPr>
+              <a:t>provide</a:t>
+            </a:r>
+            <a:r>
+              <a:rPr lang="en-US">
+                <a:effectLst/>
+              </a:rPr>
+              <a:t>: HTTP_INTERCEPTORS</a:t>
+            </a:r>
+          </a:p>
+          <a:p>
+            <a:pPr lvl="1"/>
+            <a:r>
+              <a:rPr lang="en-US">
+                <a:effectLst/>
+              </a:rPr>
+              <a:t>It means I register this to participate in HTTP interceptor pipeline</a:t>
+            </a:r>
+          </a:p>
+          <a:p>
+            <a:pPr lvl="1"/>
+            <a:r>
+              <a:rPr lang="en-US">
+                <a:effectLst/>
+              </a:rPr>
+              <a:t>Angular later looks for everything registered under HTTP_INTERCEPTORS and builds the interceptor chain</a:t>
+            </a:r>
+          </a:p>
+          <a:p>
+            <a:r>
+              <a:rPr lang="en-US" b="1">
+                <a:solidFill>
+                  <a:srgbClr val="92D050"/>
+                </a:solidFill>
+                <a:effectLst/>
+              </a:rPr>
+              <a:t>useClass</a:t>
+            </a:r>
+            <a:r>
+              <a:rPr lang="en-US"/>
+              <a:t>: </a:t>
+            </a:r>
+            <a:r>
+              <a:rPr lang="en-US">
+                <a:effectLst/>
+              </a:rPr>
+              <a:t>HttpErrorInterceptor</a:t>
+            </a:r>
+          </a:p>
+          <a:p>
+            <a:pPr lvl="1"/>
+            <a:r>
+              <a:rPr lang="en-US">
+                <a:effectLst/>
+              </a:rPr>
+              <a:t>The class itself</a:t>
+            </a:r>
+          </a:p>
+          <a:p>
+            <a:r>
+              <a:rPr lang="en-US" b="1">
+                <a:solidFill>
+                  <a:srgbClr val="92D050"/>
+                </a:solidFill>
+                <a:effectLst/>
+              </a:rPr>
+              <a:t>multi</a:t>
+            </a:r>
+            <a:r>
+              <a:rPr lang="en-US">
+                <a:effectLst/>
+              </a:rPr>
+              <a:t>: true</a:t>
+            </a:r>
+          </a:p>
+          <a:p>
+            <a:pPr lvl="1"/>
+            <a:r>
+              <a:rPr lang="en-US" b="1"/>
+              <a:t>Withtout multi: true, angular would expect only one value for HTTP_INTERCEPTOR and every new registration will overwrite the previous one</a:t>
+            </a:r>
+          </a:p>
+          <a:p>
+            <a:pPr lvl="1"/>
+            <a:r>
+              <a:rPr lang="en-US" sz="1400" b="1">
+                <a:effectLst/>
+              </a:rPr>
+              <a:t>{ </a:t>
+            </a:r>
+            <a:r>
+              <a:rPr lang="en-US" sz="1400" b="1">
+                <a:solidFill>
+                  <a:srgbClr val="92D050"/>
+                </a:solidFill>
+                <a:effectLst/>
+              </a:rPr>
+              <a:t>provide</a:t>
+            </a:r>
+            <a:r>
+              <a:rPr lang="en-US" sz="1400" b="1">
+                <a:effectLst/>
+              </a:rPr>
+              <a:t>: HTTP_INTERCEPTORS, </a:t>
+            </a:r>
+            <a:r>
+              <a:rPr lang="en-US" sz="1400" b="1">
+                <a:solidFill>
+                  <a:srgbClr val="92D050"/>
+                </a:solidFill>
+                <a:effectLst/>
+              </a:rPr>
+              <a:t>useClass</a:t>
+            </a:r>
+            <a:r>
+              <a:rPr lang="en-US" sz="1400" b="1">
+                <a:effectLst/>
+              </a:rPr>
+              <a:t>: HttpErrorInterceptor}, { </a:t>
+            </a:r>
+            <a:r>
+              <a:rPr lang="en-US" sz="1400" b="1">
+                <a:solidFill>
+                  <a:srgbClr val="92D050"/>
+                </a:solidFill>
+                <a:effectLst/>
+              </a:rPr>
+              <a:t>provide</a:t>
+            </a:r>
+            <a:r>
+              <a:rPr lang="en-US" sz="1400" b="1">
+                <a:effectLst/>
+              </a:rPr>
+              <a:t>: HTTP_INTERCEPTORS, </a:t>
+            </a:r>
+            <a:r>
+              <a:rPr lang="en-US" sz="1400" b="1">
+                <a:solidFill>
+                  <a:srgbClr val="92D050"/>
+                </a:solidFill>
+                <a:effectLst/>
+              </a:rPr>
+              <a:t>useClass</a:t>
+            </a:r>
+            <a:r>
+              <a:rPr lang="en-US" sz="1400" b="1">
+                <a:effectLst/>
+              </a:rPr>
+              <a:t>: AuthInterceptor},</a:t>
+            </a:r>
+          </a:p>
+          <a:p>
+            <a:pPr lvl="1"/>
+            <a:r>
+              <a:rPr lang="en-US" sz="1600" b="1">
+                <a:effectLst/>
+              </a:rPr>
+              <a:t>INTERCEPTORS = AuthInterceptor // cause it is the last one</a:t>
+            </a:r>
+            <a:endParaRPr lang="en-US" sz="1600" b="1"/>
+          </a:p>
+          <a:p>
+            <a:pPr lvl="1"/>
+            <a:r>
+              <a:rPr lang="en-US"/>
+              <a:t>With multi: true, </a:t>
+            </a:r>
+            <a:r>
+              <a:rPr lang="en-US" sz="1600" b="1">
+                <a:solidFill>
+                  <a:srgbClr val="FFFF00"/>
+                </a:solidFill>
+                <a:effectLst/>
+              </a:rPr>
+              <a:t>HTTP_INTERCEPTORS </a:t>
+            </a:r>
+            <a:r>
+              <a:rPr lang="en-US" sz="1600" b="1">
+                <a:effectLst/>
+              </a:rPr>
+              <a:t>= [</a:t>
+            </a:r>
+            <a:r>
+              <a:rPr lang="en-US" sz="1600" b="1">
+                <a:solidFill>
+                  <a:srgbClr val="00B0F0"/>
+                </a:solidFill>
+                <a:effectLst/>
+              </a:rPr>
+              <a:t>AuthInterceptor</a:t>
+            </a:r>
+            <a:r>
+              <a:rPr lang="en-US" sz="1600" b="1">
+                <a:effectLst/>
+              </a:rPr>
+              <a:t>, </a:t>
+            </a:r>
+            <a:r>
+              <a:rPr lang="en-US" b="1">
+                <a:solidFill>
+                  <a:srgbClr val="00B0F0"/>
+                </a:solidFill>
+                <a:effectLst/>
+              </a:rPr>
+              <a:t>HttpErrorInterceptor</a:t>
+            </a:r>
+            <a:r>
+              <a:rPr lang="en-US" b="1">
+                <a:effectLst/>
+              </a:rPr>
+              <a:t> ] </a:t>
+            </a:r>
+            <a:endParaRPr lang="en-US"/>
+          </a:p>
+        </p:txBody>
+      </p:sp>
+    </p:spTree>
+    <p:extLst>
+      <p:ext uri="{BB962C8B-B14F-4D97-AF65-F5344CB8AC3E}">
+        <p14:creationId xmlns:p14="http://schemas.microsoft.com/office/powerpoint/2010/main" val="4093490335"/>
+      </p:ext>
+    </p:extLst>
+  </p:cSld>
+  <p:clrMapOvr>
+    <a:masterClrMapping/>
+  </p:clrMapOvr>
+</p:sld>
+</file>
+
+<file path=ppt/slides/slide113.xml><?xml version="1.0" encoding="utf-8"?>
+<p:sld xmlns:a="http://schemas.openxmlformats.org/drawingml/2006/main" xmlns:r="http://schemas.openxmlformats.org/officeDocument/2006/relationships" xmlns:p="http://schemas.openxmlformats.org/presentationml/2006/main">
+  <p:cSld>
+    <p:spTree>
+      <p:nvGrpSpPr>
+        <p:cNvPr id="1" name=""/>
+        <p:cNvGrpSpPr/>
+        <p:nvPr/>
+      </p:nvGrpSpPr>
+      <p:grpSpPr>
+        <a:xfrm>
+          <a:off x="0" y="0"/>
+          <a:ext cx="0" cy="0"/>
+          <a:chOff x="0" y="0"/>
+          <a:chExt cx="0" cy="0"/>
+        </a:xfrm>
+      </p:grpSpPr>
+      <p:sp>
+        <p:nvSpPr>
+          <p:cNvPr id="2" name="Title 1">
+            <a:extLst>
+              <a:ext uri="{FF2B5EF4-FFF2-40B4-BE49-F238E27FC236}">
                 <a16:creationId xmlns:a16="http://schemas.microsoft.com/office/drawing/2014/main" id="{1AB89BD1-13B1-E2FD-B3E8-31B230F97707}"/>
               </a:ext>
             </a:extLst>
@@ -8972,7 +9339,347 @@
 </p:sld>
 </file>
 
-<file path=ppt/slides/slide111.xml><?xml version="1.0" encoding="utf-8"?>
+<file path=ppt/slides/slide114.xml><?xml version="1.0" encoding="utf-8"?>
+<p:sld xmlns:a="http://schemas.openxmlformats.org/drawingml/2006/main" xmlns:r="http://schemas.openxmlformats.org/officeDocument/2006/relationships" xmlns:p="http://schemas.openxmlformats.org/presentationml/2006/main">
+  <p:cSld>
+    <p:spTree>
+      <p:nvGrpSpPr>
+        <p:cNvPr id="1" name=""/>
+        <p:cNvGrpSpPr/>
+        <p:nvPr/>
+      </p:nvGrpSpPr>
+      <p:grpSpPr>
+        <a:xfrm>
+          <a:off x="0" y="0"/>
+          <a:ext cx="0" cy="0"/>
+          <a:chOff x="0" y="0"/>
+          <a:chExt cx="0" cy="0"/>
+        </a:xfrm>
+      </p:grpSpPr>
+      <p:sp>
+        <p:nvSpPr>
+          <p:cNvPr id="2" name="Title 1">
+            <a:extLst>
+              <a:ext uri="{FF2B5EF4-FFF2-40B4-BE49-F238E27FC236}">
+                <a16:creationId xmlns:a16="http://schemas.microsoft.com/office/drawing/2014/main" id="{45E1BF1E-FA0A-2C71-C2E4-141E87F597B7}"/>
+              </a:ext>
+            </a:extLst>
+          </p:cNvPr>
+          <p:cNvSpPr>
+            <a:spLocks noGrp="1"/>
+          </p:cNvSpPr>
+          <p:nvPr>
+            <p:ph type="title"/>
+          </p:nvPr>
+        </p:nvSpPr>
+        <p:spPr>
+          <a:xfrm>
+            <a:off x="913795" y="609600"/>
+            <a:ext cx="10353762" cy="5911780"/>
+          </a:xfrm>
+        </p:spPr>
+        <p:txBody>
+          <a:bodyPr>
+            <a:normAutofit/>
+          </a:bodyPr>
+          <a:lstStyle/>
+          <a:p>
+            <a:r>
+              <a:rPr lang="en-US" sz="4800" b="1">
+                <a:solidFill>
+                  <a:srgbClr val="FF0000"/>
+                </a:solidFill>
+              </a:rPr>
+              <a:t>Start Pipes</a:t>
+            </a:r>
+          </a:p>
+        </p:txBody>
+      </p:sp>
+    </p:spTree>
+    <p:extLst>
+      <p:ext uri="{BB962C8B-B14F-4D97-AF65-F5344CB8AC3E}">
+        <p14:creationId xmlns:p14="http://schemas.microsoft.com/office/powerpoint/2010/main" val="1456316557"/>
+      </p:ext>
+    </p:extLst>
+  </p:cSld>
+  <p:clrMapOvr>
+    <a:masterClrMapping/>
+  </p:clrMapOvr>
+</p:sld>
+</file>
+
+<file path=ppt/slides/slide115.xml><?xml version="1.0" encoding="utf-8"?>
+<p:sld xmlns:a="http://schemas.openxmlformats.org/drawingml/2006/main" xmlns:r="http://schemas.openxmlformats.org/officeDocument/2006/relationships" xmlns:p="http://schemas.openxmlformats.org/presentationml/2006/main">
+  <p:cSld>
+    <p:spTree>
+      <p:nvGrpSpPr>
+        <p:cNvPr id="1" name=""/>
+        <p:cNvGrpSpPr/>
+        <p:nvPr/>
+      </p:nvGrpSpPr>
+      <p:grpSpPr>
+        <a:xfrm>
+          <a:off x="0" y="0"/>
+          <a:ext cx="0" cy="0"/>
+          <a:chOff x="0" y="0"/>
+          <a:chExt cx="0" cy="0"/>
+        </a:xfrm>
+      </p:grpSpPr>
+      <p:sp>
+        <p:nvSpPr>
+          <p:cNvPr id="2" name="Title 1">
+            <a:extLst>
+              <a:ext uri="{FF2B5EF4-FFF2-40B4-BE49-F238E27FC236}">
+                <a16:creationId xmlns:a16="http://schemas.microsoft.com/office/drawing/2014/main" id="{37597944-3FB1-C1BB-018F-FF580C7CD522}"/>
+              </a:ext>
+            </a:extLst>
+          </p:cNvPr>
+          <p:cNvSpPr>
+            <a:spLocks noGrp="1"/>
+          </p:cNvSpPr>
+          <p:nvPr>
+            <p:ph type="title"/>
+          </p:nvPr>
+        </p:nvSpPr>
+        <p:spPr>
+          <a:xfrm>
+            <a:off x="913795" y="0"/>
+            <a:ext cx="10353762" cy="970450"/>
+          </a:xfrm>
+        </p:spPr>
+        <p:txBody>
+          <a:bodyPr/>
+          <a:lstStyle/>
+          <a:p>
+            <a:r>
+              <a:rPr lang="en-US"/>
+              <a:t>pipes</a:t>
+            </a:r>
+          </a:p>
+        </p:txBody>
+      </p:sp>
+      <p:sp>
+        <p:nvSpPr>
+          <p:cNvPr id="3" name="Content Placeholder 2">
+            <a:extLst>
+              <a:ext uri="{FF2B5EF4-FFF2-40B4-BE49-F238E27FC236}">
+                <a16:creationId xmlns:a16="http://schemas.microsoft.com/office/drawing/2014/main" id="{2A8C0826-2045-F9BD-6023-17AFCF370EF6}"/>
+              </a:ext>
+            </a:extLst>
+          </p:cNvPr>
+          <p:cNvSpPr>
+            <a:spLocks noGrp="1"/>
+          </p:cNvSpPr>
+          <p:nvPr>
+            <p:ph idx="1"/>
+          </p:nvPr>
+        </p:nvSpPr>
+        <p:spPr>
+          <a:xfrm>
+            <a:off x="592853" y="970450"/>
+            <a:ext cx="10674704" cy="5761946"/>
+          </a:xfrm>
+        </p:spPr>
+        <p:txBody>
+          <a:bodyPr/>
+          <a:lstStyle/>
+          <a:p>
+            <a:r>
+              <a:rPr lang="en-US"/>
+              <a:t>applied on </a:t>
+            </a:r>
+            <a:r>
+              <a:rPr lang="en-US" b="1">
+                <a:solidFill>
+                  <a:srgbClr val="FF0000"/>
+                </a:solidFill>
+              </a:rPr>
+              <a:t>value</a:t>
+            </a:r>
+            <a:r>
+              <a:rPr lang="en-US"/>
+              <a:t> while directive applied on </a:t>
+            </a:r>
+            <a:r>
+              <a:rPr lang="en-US" b="1">
+                <a:solidFill>
+                  <a:srgbClr val="FF0000"/>
+                </a:solidFill>
+              </a:rPr>
+              <a:t>elements</a:t>
+            </a:r>
+          </a:p>
+          <a:p>
+            <a:r>
+              <a:rPr lang="en-US"/>
+              <a:t>used to display (transform) value in a desired format</a:t>
+            </a:r>
+          </a:p>
+          <a:p>
+            <a:endParaRPr lang="en-US"/>
+          </a:p>
+          <a:p>
+            <a:r>
+              <a:rPr lang="en-US" b="1">
+                <a:solidFill>
+                  <a:srgbClr val="FF0000"/>
+                </a:solidFill>
+              </a:rPr>
+              <a:t>async</a:t>
+            </a:r>
+            <a:r>
+              <a:rPr lang="en-US"/>
+              <a:t> : subscribe to an Observable or Promise and display its latest value.</a:t>
+            </a:r>
+          </a:p>
+          <a:p>
+            <a:r>
+              <a:rPr lang="en-US"/>
+              <a:t>uppercase</a:t>
+            </a:r>
+          </a:p>
+          <a:p>
+            <a:r>
+              <a:rPr lang="en-US"/>
+              <a:t>lowercase</a:t>
+            </a:r>
+          </a:p>
+          <a:p>
+            <a:r>
+              <a:rPr lang="en-US"/>
+              <a:t>titlecase: [ pascal case ]</a:t>
+            </a:r>
+          </a:p>
+          <a:p>
+            <a:r>
+              <a:rPr lang="en-US"/>
+              <a:t>date</a:t>
+            </a:r>
+          </a:p>
+          <a:p>
+            <a:pPr lvl="1"/>
+            <a:r>
+              <a:rPr lang="en-US"/>
+              <a:t>{{ today | date }} // Jun 12, 2026</a:t>
+            </a:r>
+          </a:p>
+          <a:p>
+            <a:pPr lvl="1"/>
+            <a:r>
+              <a:rPr lang="en-US"/>
+              <a:t>{{ today | date:'dd/MM/yyyy’ }} // 12/06/2026</a:t>
+            </a:r>
+          </a:p>
+          <a:p>
+            <a:r>
+              <a:rPr lang="en-US"/>
+              <a:t>json</a:t>
+            </a:r>
+          </a:p>
+          <a:p>
+            <a:endParaRPr lang="en-US"/>
+          </a:p>
+          <a:p>
+            <a:pPr lvl="1"/>
+            <a:endParaRPr lang="en-US"/>
+          </a:p>
+          <a:p>
+            <a:endParaRPr lang="en-US"/>
+          </a:p>
+          <a:p>
+            <a:endParaRPr lang="en-US"/>
+          </a:p>
+        </p:txBody>
+      </p:sp>
+    </p:spTree>
+    <p:extLst>
+      <p:ext uri="{BB962C8B-B14F-4D97-AF65-F5344CB8AC3E}">
+        <p14:creationId xmlns:p14="http://schemas.microsoft.com/office/powerpoint/2010/main" val="2660303979"/>
+      </p:ext>
+    </p:extLst>
+  </p:cSld>
+  <p:clrMapOvr>
+    <a:masterClrMapping/>
+  </p:clrMapOvr>
+</p:sld>
+</file>
+
+<file path=ppt/slides/slide116.xml><?xml version="1.0" encoding="utf-8"?>
+<p:sld xmlns:a="http://schemas.openxmlformats.org/drawingml/2006/main" xmlns:r="http://schemas.openxmlformats.org/officeDocument/2006/relationships" xmlns:p="http://schemas.openxmlformats.org/presentationml/2006/main">
+  <p:cSld>
+    <p:spTree>
+      <p:nvGrpSpPr>
+        <p:cNvPr id="1" name="">
+          <a:extLst>
+            <a:ext uri="{FF2B5EF4-FFF2-40B4-BE49-F238E27FC236}">
+              <a16:creationId xmlns:a16="http://schemas.microsoft.com/office/drawing/2014/main" id="{50B8072E-1875-9970-D7A2-E0658BDA1690}"/>
+            </a:ext>
+          </a:extLst>
+        </p:cNvPr>
+        <p:cNvGrpSpPr/>
+        <p:nvPr/>
+      </p:nvGrpSpPr>
+      <p:grpSpPr>
+        <a:xfrm>
+          <a:off x="0" y="0"/>
+          <a:ext cx="0" cy="0"/>
+          <a:chOff x="0" y="0"/>
+          <a:chExt cx="0" cy="0"/>
+        </a:xfrm>
+      </p:grpSpPr>
+      <p:sp>
+        <p:nvSpPr>
+          <p:cNvPr id="2" name="Title 1">
+            <a:extLst>
+              <a:ext uri="{FF2B5EF4-FFF2-40B4-BE49-F238E27FC236}">
+                <a16:creationId xmlns:a16="http://schemas.microsoft.com/office/drawing/2014/main" id="{764E6684-90B7-F69D-FB0E-AFD6E9AE9016}"/>
+              </a:ext>
+            </a:extLst>
+          </p:cNvPr>
+          <p:cNvSpPr>
+            <a:spLocks noGrp="1"/>
+          </p:cNvSpPr>
+          <p:nvPr>
+            <p:ph type="title"/>
+          </p:nvPr>
+        </p:nvSpPr>
+        <p:spPr>
+          <a:xfrm>
+            <a:off x="913795" y="609600"/>
+            <a:ext cx="10353762" cy="5911780"/>
+          </a:xfrm>
+        </p:spPr>
+        <p:txBody>
+          <a:bodyPr>
+            <a:normAutofit/>
+          </a:bodyPr>
+          <a:lstStyle/>
+          <a:p>
+            <a:r>
+              <a:rPr lang="en-US" sz="4800" b="1">
+                <a:solidFill>
+                  <a:srgbClr val="FF0000"/>
+                </a:solidFill>
+              </a:rPr>
+              <a:t>End Pipes</a:t>
+            </a:r>
+          </a:p>
+        </p:txBody>
+      </p:sp>
+    </p:spTree>
+    <p:extLst>
+      <p:ext uri="{BB962C8B-B14F-4D97-AF65-F5344CB8AC3E}">
+        <p14:creationId xmlns:p14="http://schemas.microsoft.com/office/powerpoint/2010/main" val="4387557"/>
+      </p:ext>
+    </p:extLst>
+  </p:cSld>
+  <p:clrMapOvr>
+    <a:masterClrMapping/>
+  </p:clrMapOvr>
+</p:sld>
+</file>
+
+<file path=ppt/slides/slide117.xml><?xml version="1.0" encoding="utf-8"?>
 <p:sld xmlns:a="http://schemas.openxmlformats.org/drawingml/2006/main" xmlns:r="http://schemas.openxmlformats.org/officeDocument/2006/relationships" xmlns:p="http://schemas.openxmlformats.org/presentationml/2006/main">
   <p:cSld>
     <p:spTree>
@@ -9047,7 +9754,7 @@
 </p:sld>
 </file>
 
-<file path=ppt/slides/slide112.xml><?xml version="1.0" encoding="utf-8"?>
+<file path=ppt/slides/slide118.xml><?xml version="1.0" encoding="utf-8"?>
 <p:sld xmlns:a="http://schemas.openxmlformats.org/drawingml/2006/main" xmlns:r="http://schemas.openxmlformats.org/officeDocument/2006/relationships" xmlns:p="http://schemas.openxmlformats.org/presentationml/2006/main">
   <p:cSld>
     <p:spTree>
@@ -9116,7 +9823,7 @@
 </p:sld>
 </file>
 
-<file path=ppt/slides/slide113.xml><?xml version="1.0" encoding="utf-8"?>
+<file path=ppt/slides/slide119.xml><?xml version="1.0" encoding="utf-8"?>
 <p:sld xmlns:a="http://schemas.openxmlformats.org/drawingml/2006/main" xmlns:r="http://schemas.openxmlformats.org/officeDocument/2006/relationships" xmlns:p="http://schemas.openxmlformats.org/presentationml/2006/main">
   <p:cSld>
     <p:spTree>
@@ -9331,7 +10038,76 @@
 </p:sld>
 </file>
 
-<file path=ppt/slides/slide114.xml><?xml version="1.0" encoding="utf-8"?>
+<file path=ppt/slides/slide12.xml><?xml version="1.0" encoding="utf-8"?>
+<p:sld xmlns:a="http://schemas.openxmlformats.org/drawingml/2006/main" xmlns:r="http://schemas.openxmlformats.org/officeDocument/2006/relationships" xmlns:p="http://schemas.openxmlformats.org/presentationml/2006/main">
+  <p:cSld>
+    <p:spTree>
+      <p:nvGrpSpPr>
+        <p:cNvPr id="1" name=""/>
+        <p:cNvGrpSpPr/>
+        <p:nvPr/>
+      </p:nvGrpSpPr>
+      <p:grpSpPr>
+        <a:xfrm>
+          <a:off x="0" y="0"/>
+          <a:ext cx="0" cy="0"/>
+          <a:chOff x="0" y="0"/>
+          <a:chExt cx="0" cy="0"/>
+        </a:xfrm>
+      </p:grpSpPr>
+      <p:sp>
+        <p:nvSpPr>
+          <p:cNvPr id="2" name="Title 1">
+            <a:extLst>
+              <a:ext uri="{FF2B5EF4-FFF2-40B4-BE49-F238E27FC236}">
+                <a16:creationId xmlns:a16="http://schemas.microsoft.com/office/drawing/2014/main" id="{9B028761-724C-C01B-B135-895E216EC927}"/>
+              </a:ext>
+            </a:extLst>
+          </p:cNvPr>
+          <p:cNvSpPr>
+            <a:spLocks noGrp="1"/>
+          </p:cNvSpPr>
+          <p:nvPr>
+            <p:ph type="title"/>
+          </p:nvPr>
+        </p:nvSpPr>
+        <p:spPr>
+          <a:xfrm>
+            <a:off x="919119" y="1105320"/>
+            <a:ext cx="10353762" cy="3717890"/>
+          </a:xfrm>
+        </p:spPr>
+        <p:txBody>
+          <a:bodyPr>
+            <a:normAutofit/>
+          </a:bodyPr>
+          <a:lstStyle/>
+          <a:p>
+            <a:r>
+              <a:rPr lang="en-US" sz="7200" b="1">
+                <a:solidFill>
+                  <a:srgbClr val="FF0000"/>
+                </a:solidFill>
+              </a:rPr>
+              <a:t>Start Binding</a:t>
+            </a:r>
+          </a:p>
+        </p:txBody>
+      </p:sp>
+    </p:spTree>
+    <p:extLst>
+      <p:ext uri="{BB962C8B-B14F-4D97-AF65-F5344CB8AC3E}">
+        <p14:creationId xmlns:p14="http://schemas.microsoft.com/office/powerpoint/2010/main" val="2266186383"/>
+      </p:ext>
+    </p:extLst>
+  </p:cSld>
+  <p:clrMapOvr>
+    <a:masterClrMapping/>
+  </p:clrMapOvr>
+</p:sld>
+</file>
+
+<file path=ppt/slides/slide120.xml><?xml version="1.0" encoding="utf-8"?>
 <p:sld xmlns:a="http://schemas.openxmlformats.org/drawingml/2006/main" xmlns:r="http://schemas.openxmlformats.org/officeDocument/2006/relationships" xmlns:p="http://schemas.openxmlformats.org/presentationml/2006/main">
   <p:cSld>
     <p:spTree>
@@ -9553,7 +10329,7 @@
 </p:sld>
 </file>
 
-<file path=ppt/slides/slide115.xml><?xml version="1.0" encoding="utf-8"?>
+<file path=ppt/slides/slide121.xml><?xml version="1.0" encoding="utf-8"?>
 <p:sld xmlns:a="http://schemas.openxmlformats.org/drawingml/2006/main" xmlns:r="http://schemas.openxmlformats.org/officeDocument/2006/relationships" xmlns:p="http://schemas.openxmlformats.org/presentationml/2006/main">
   <p:cSld>
     <p:spTree>
@@ -10051,7 +10827,7 @@
 </p:sld>
 </file>
 
-<file path=ppt/slides/slide116.xml><?xml version="1.0" encoding="utf-8"?>
+<file path=ppt/slides/slide122.xml><?xml version="1.0" encoding="utf-8"?>
 <p:sld xmlns:a="http://schemas.openxmlformats.org/drawingml/2006/main" xmlns:r="http://schemas.openxmlformats.org/officeDocument/2006/relationships" xmlns:p="http://schemas.openxmlformats.org/presentationml/2006/main">
   <p:cSld>
     <p:spTree>
@@ -10313,7 +11089,7 @@
 </p:sld>
 </file>
 
-<file path=ppt/slides/slide117.xml><?xml version="1.0" encoding="utf-8"?>
+<file path=ppt/slides/slide123.xml><?xml version="1.0" encoding="utf-8"?>
 <p:sld xmlns:a="http://schemas.openxmlformats.org/drawingml/2006/main" xmlns:r="http://schemas.openxmlformats.org/officeDocument/2006/relationships" xmlns:p="http://schemas.openxmlformats.org/presentationml/2006/main">
   <p:cSld>
     <p:spTree>
@@ -10451,7 +11227,7 @@
 </p:sld>
 </file>
 
-<file path=ppt/slides/slide118.xml><?xml version="1.0" encoding="utf-8"?>
+<file path=ppt/slides/slide124.xml><?xml version="1.0" encoding="utf-8"?>
 <p:sld xmlns:a="http://schemas.openxmlformats.org/drawingml/2006/main" xmlns:r="http://schemas.openxmlformats.org/officeDocument/2006/relationships" xmlns:p="http://schemas.openxmlformats.org/presentationml/2006/main">
   <p:cSld>
     <p:spTree>
@@ -10653,75 +11429,6 @@
     <p:extLst>
       <p:ext uri="{BB962C8B-B14F-4D97-AF65-F5344CB8AC3E}">
         <p14:creationId xmlns:p14="http://schemas.microsoft.com/office/powerpoint/2010/main" val="3592595754"/>
-      </p:ext>
-    </p:extLst>
-  </p:cSld>
-  <p:clrMapOvr>
-    <a:masterClrMapping/>
-  </p:clrMapOvr>
-</p:sld>
-</file>
-
-<file path=ppt/slides/slide12.xml><?xml version="1.0" encoding="utf-8"?>
-<p:sld xmlns:a="http://schemas.openxmlformats.org/drawingml/2006/main" xmlns:r="http://schemas.openxmlformats.org/officeDocument/2006/relationships" xmlns:p="http://schemas.openxmlformats.org/presentationml/2006/main">
-  <p:cSld>
-    <p:spTree>
-      <p:nvGrpSpPr>
-        <p:cNvPr id="1" name=""/>
-        <p:cNvGrpSpPr/>
-        <p:nvPr/>
-      </p:nvGrpSpPr>
-      <p:grpSpPr>
-        <a:xfrm>
-          <a:off x="0" y="0"/>
-          <a:ext cx="0" cy="0"/>
-          <a:chOff x="0" y="0"/>
-          <a:chExt cx="0" cy="0"/>
-        </a:xfrm>
-      </p:grpSpPr>
-      <p:sp>
-        <p:nvSpPr>
-          <p:cNvPr id="2" name="Title 1">
-            <a:extLst>
-              <a:ext uri="{FF2B5EF4-FFF2-40B4-BE49-F238E27FC236}">
-                <a16:creationId xmlns:a16="http://schemas.microsoft.com/office/drawing/2014/main" id="{9B028761-724C-C01B-B135-895E216EC927}"/>
-              </a:ext>
-            </a:extLst>
-          </p:cNvPr>
-          <p:cNvSpPr>
-            <a:spLocks noGrp="1"/>
-          </p:cNvSpPr>
-          <p:nvPr>
-            <p:ph type="title"/>
-          </p:nvPr>
-        </p:nvSpPr>
-        <p:spPr>
-          <a:xfrm>
-            <a:off x="919119" y="1105320"/>
-            <a:ext cx="10353762" cy="3717890"/>
-          </a:xfrm>
-        </p:spPr>
-        <p:txBody>
-          <a:bodyPr>
-            <a:normAutofit/>
-          </a:bodyPr>
-          <a:lstStyle/>
-          <a:p>
-            <a:r>
-              <a:rPr lang="en-US" sz="7200" b="1">
-                <a:solidFill>
-                  <a:srgbClr val="FF0000"/>
-                </a:solidFill>
-              </a:rPr>
-              <a:t>Start Binding</a:t>
-            </a:r>
-          </a:p>
-        </p:txBody>
-      </p:sp>
-    </p:spTree>
-    <p:extLst>
-      <p:ext uri="{BB962C8B-B14F-4D97-AF65-F5344CB8AC3E}">
-        <p14:creationId xmlns:p14="http://schemas.microsoft.com/office/powerpoint/2010/main" val="2266186383"/>
       </p:ext>
     </p:extLst>
   </p:cSld>
@@ -22118,7 +22825,7 @@
                   <a:srgbClr val="FF0000"/>
                 </a:solidFill>
               </a:rPr>
-              <a:t>End Sidebar with layout</a:t>
+              <a:t>End Sidebar with layout 1</a:t>
             </a:r>
           </a:p>
         </p:txBody>
@@ -25766,23 +26473,19 @@
         </p:nvSpPr>
         <p:spPr>
           <a:xfrm>
-            <a:off x="0" y="592853"/>
-            <a:ext cx="12192000" cy="6139543"/>
+            <a:off x="90435" y="592853"/>
+            <a:ext cx="12101565" cy="6265147"/>
           </a:xfrm>
         </p:spPr>
         <p:txBody>
           <a:bodyPr>
-            <a:normAutofit/>
+            <a:normAutofit lnSpcReduction="10000"/>
           </a:bodyPr>
           <a:lstStyle/>
           <a:p>
             <a:r>
               <a:rPr lang="en-US" b="1"/>
-              <a:t>FormGroup </a:t>
-            </a:r>
-            <a:r>
-              <a:rPr lang="en-US"/>
-              <a:t>Properties</a:t>
+              <a:t>FormGroup Properties</a:t>
             </a:r>
           </a:p>
           <a:p>
@@ -25796,26 +26499,21 @@
               <a:t>value</a:t>
             </a:r>
             <a:r>
-              <a:rPr lang="en-US"/>
+              <a:rPr lang="en-US" b="1"/>
               <a:t> : { username: 'Ahmed' , password: '123456' }</a:t>
             </a:r>
           </a:p>
           <a:p>
             <a:pPr lvl="1"/>
             <a:r>
-              <a:rPr lang="en-US"/>
-              <a:t>getRawValue():  Includes </a:t>
-            </a:r>
-            <a:r>
               <a:rPr lang="en-US" b="1"/>
-              <a:t>disabled controls</a:t>
-            </a:r>
-            <a:endParaRPr lang="en-US"/>
+              <a:t>getRawValue():  Includes disabled controls</a:t>
+            </a:r>
           </a:p>
           <a:p>
             <a:pPr lvl="1"/>
             <a:r>
-              <a:rPr lang="en-US">
+              <a:rPr lang="en-US" b="1">
                 <a:effectLst/>
               </a:rPr>
               <a:t>controls['ColorHexCode']   // </a:t>
@@ -25824,7 +26522,7 @@
           <a:p>
             <a:pPr lvl="1"/>
             <a:r>
-              <a:rPr lang="en-US">
+              <a:rPr lang="en-US" b="1">
                 <a:effectLst/>
               </a:rPr>
               <a:t>get('ColorHexCode')		// </a:t>
@@ -25833,73 +26531,61 @@
           <a:p>
             <a:pPr lvl="1"/>
             <a:r>
-              <a:rPr lang="en-US"/>
+              <a:rPr lang="en-US" b="1"/>
               <a:t>valid: bool, </a:t>
             </a:r>
             <a:r>
-              <a:rPr lang="en-US">
+              <a:rPr lang="en-US" b="1">
                 <a:effectLst/>
               </a:rPr>
               <a:t>A control is valid when its status is VALID</a:t>
             </a:r>
-            <a:endParaRPr lang="en-US"/>
+            <a:endParaRPr lang="en-US" b="1"/>
           </a:p>
           <a:p>
             <a:pPr lvl="1"/>
             <a:r>
-              <a:rPr lang="en-US"/>
+              <a:rPr lang="en-US" b="1"/>
               <a:t>invalid</a:t>
             </a:r>
           </a:p>
           <a:p>
             <a:pPr lvl="1"/>
             <a:r>
-              <a:rPr lang="en-US"/>
-              <a:t>errors // Errors applied to the </a:t>
-            </a:r>
-            <a:r>
               <a:rPr lang="en-US" b="1"/>
-              <a:t>group itself</a:t>
-            </a:r>
-            <a:r>
-              <a:rPr lang="en-US"/>
-              <a:t> (not children)</a:t>
+              <a:t>errors // Errors applied to the group itself (not children)</a:t>
             </a:r>
           </a:p>
           <a:p>
             <a:pPr lvl="1"/>
             <a:r>
-              <a:rPr lang="en-US"/>
+              <a:rPr lang="en-US" b="1"/>
               <a:t>status </a:t>
             </a:r>
           </a:p>
           <a:p>
             <a:pPr lvl="1"/>
             <a:r>
-              <a:rPr lang="en-US"/>
+              <a:rPr lang="en-US" b="1"/>
               <a:t>form.setValue({ username: 'Ahmed’, password: '123’ }); // Must include ALL controls</a:t>
             </a:r>
           </a:p>
           <a:p>
             <a:pPr lvl="1"/>
             <a:r>
-              <a:rPr lang="en-US"/>
-              <a:t>form.patchValue({  username: 'Ahmed’ }); // lets you update </a:t>
-            </a:r>
-            <a:r>
               <a:rPr lang="en-US" b="1"/>
-              <a:t>only the fields you provide, </a:t>
+              <a:t>form.patchValue({  username: 'Ahmed’ }); // lets you update only the fields you provide, </a:t>
             </a:r>
             <a:r>
               <a:rPr lang="en-US" sz="1600" b="1"/>
               <a:t>always triggers validation</a:t>
             </a:r>
-            <a:endParaRPr lang="en-US"/>
+            <a:endParaRPr lang="en-US" b="1"/>
           </a:p>
           <a:p>
             <a:pPr lvl="1"/>
             <a:r>
-              <a:rPr lang="en-US"/>
+              <a:rPr lang="en-US" b="1"/>
               <a:t>form.</a:t>
             </a:r>
             <a:r>
@@ -25911,14 +26597,14 @@
               <a:t>markAllAsTouched</a:t>
             </a:r>
             <a:r>
-              <a:rPr lang="en-US"/>
+              <a:rPr lang="en-US" b="1"/>
               <a:t>(); // The form control has been blurred (focused and then left).</a:t>
             </a:r>
           </a:p>
           <a:p>
             <a:pPr lvl="1"/>
             <a:r>
-              <a:rPr lang="en-US"/>
+              <a:rPr lang="en-US" b="1"/>
               <a:t>form.</a:t>
             </a:r>
             <a:r>
@@ -25930,14 +26616,14 @@
               <a:t>markAsDirty</a:t>
             </a:r>
             <a:r>
-              <a:rPr lang="en-US"/>
+              <a:rPr lang="en-US" b="1"/>
               <a:t>();   // The value has changed from the initial value.</a:t>
             </a:r>
           </a:p>
           <a:p>
             <a:pPr lvl="1"/>
             <a:r>
-              <a:rPr lang="en-US"/>
+              <a:rPr lang="en-US" b="1"/>
               <a:t>form.</a:t>
             </a:r>
             <a:r>
@@ -25949,14 +26635,14 @@
               <a:t>markAsPristine</a:t>
             </a:r>
             <a:r>
-              <a:rPr lang="en-US"/>
+              <a:rPr lang="en-US" b="1"/>
               <a:t>();  // The value has not changed from the initial value.</a:t>
             </a:r>
           </a:p>
           <a:p>
             <a:pPr lvl="1"/>
             <a:r>
-              <a:rPr lang="en-US"/>
+              <a:rPr lang="en-US" b="1"/>
               <a:t>form.</a:t>
             </a:r>
             <a:r>
@@ -25968,7 +26654,7 @@
               <a:t>markAsUntouched</a:t>
             </a:r>
             <a:r>
-              <a:rPr lang="en-US"/>
+              <a:rPr lang="en-US" b="1"/>
               <a:t>();</a:t>
             </a:r>
           </a:p>
@@ -26692,53 +27378,23 @@
         <p:spPr>
           <a:xfrm>
             <a:off x="913795" y="0"/>
-            <a:ext cx="10353762" cy="695325"/>
+            <a:ext cx="10353762" cy="6390752"/>
           </a:xfrm>
         </p:spPr>
         <p:txBody>
           <a:bodyPr>
-            <a:normAutofit fontScale="90000"/>
+            <a:normAutofit/>
           </a:bodyPr>
           <a:lstStyle/>
           <a:p>
             <a:r>
-              <a:rPr lang="en-US" b="1">
+              <a:rPr lang="en-US" sz="4800" b="1">
                 <a:solidFill>
                   <a:srgbClr val="FF0000"/>
                 </a:solidFill>
               </a:rPr>
               <a:t>Start Sweat Alert</a:t>
             </a:r>
-          </a:p>
-        </p:txBody>
-      </p:sp>
-      <p:sp>
-        <p:nvSpPr>
-          <p:cNvPr id="3" name="Content Placeholder 2">
-            <a:extLst>
-              <a:ext uri="{FF2B5EF4-FFF2-40B4-BE49-F238E27FC236}">
-                <a16:creationId xmlns:a16="http://schemas.microsoft.com/office/drawing/2014/main" id="{8977E92C-3C88-05B1-405C-56CC9651CFC0}"/>
-              </a:ext>
-            </a:extLst>
-          </p:cNvPr>
-          <p:cNvSpPr>
-            <a:spLocks noGrp="1"/>
-          </p:cNvSpPr>
-          <p:nvPr>
-            <p:ph idx="1"/>
-          </p:nvPr>
-        </p:nvSpPr>
-        <p:spPr>
-          <a:xfrm>
-            <a:off x="913795" y="695325"/>
-            <a:ext cx="10353762" cy="5991225"/>
-          </a:xfrm>
-        </p:spPr>
-        <p:txBody>
-          <a:bodyPr/>
-          <a:lstStyle/>
-          <a:p>
-            <a:endParaRPr lang="en-US"/>
           </a:p>
         </p:txBody>
       </p:sp>
@@ -26977,7 +27633,13 @@
   <p:cSld>
     <p:spTree>
       <p:nvGrpSpPr>
-        <p:cNvPr id="1" name=""/>
+        <p:cNvPr id="1" name="">
+          <a:extLst>
+            <a:ext uri="{FF2B5EF4-FFF2-40B4-BE49-F238E27FC236}">
+              <a16:creationId xmlns:a16="http://schemas.microsoft.com/office/drawing/2014/main" id="{47973614-4A5D-57A3-2066-B233B8F6C92B}"/>
+            </a:ext>
+          </a:extLst>
+        </p:cNvPr>
         <p:cNvGrpSpPr/>
         <p:nvPr/>
       </p:nvGrpSpPr>
@@ -26994,7 +27656,7 @@
           <p:cNvPr id="2" name="Title 1">
             <a:extLst>
               <a:ext uri="{FF2B5EF4-FFF2-40B4-BE49-F238E27FC236}">
-                <a16:creationId xmlns:a16="http://schemas.microsoft.com/office/drawing/2014/main" id="{603EB160-5530-65CA-AC3A-EEED12B3B2B0}"/>
+                <a16:creationId xmlns:a16="http://schemas.microsoft.com/office/drawing/2014/main" id="{BD3FD689-324F-7A20-90B5-59151A21E987}"/>
               </a:ext>
             </a:extLst>
           </p:cNvPr>
@@ -27023,7 +27685,7 @@
                   <a:srgbClr val="FF0000"/>
                 </a:solidFill>
               </a:rPr>
-              <a:t>Start Angular DT</a:t>
+              <a:t>Start Validation</a:t>
             </a:r>
           </a:p>
         </p:txBody>
@@ -27031,7 +27693,7 @@
     </p:spTree>
     <p:extLst>
       <p:ext uri="{BB962C8B-B14F-4D97-AF65-F5344CB8AC3E}">
-        <p14:creationId xmlns:p14="http://schemas.microsoft.com/office/powerpoint/2010/main" val="1405869217"/>
+        <p14:creationId xmlns:p14="http://schemas.microsoft.com/office/powerpoint/2010/main" val="92037173"/>
       </p:ext>
     </p:extLst>
   </p:cSld>
@@ -27063,7 +27725,7 @@
           <p:cNvPr id="2" name="Title 1">
             <a:extLst>
               <a:ext uri="{FF2B5EF4-FFF2-40B4-BE49-F238E27FC236}">
-                <a16:creationId xmlns:a16="http://schemas.microsoft.com/office/drawing/2014/main" id="{40247D1C-3D2B-71F1-EB50-DC0BB38BD1EA}"/>
+                <a16:creationId xmlns:a16="http://schemas.microsoft.com/office/drawing/2014/main" id="{03515632-BAA9-D22C-D580-BDA47538FC3F}"/>
               </a:ext>
             </a:extLst>
           </p:cNvPr>
@@ -27077,46 +27739,7 @@
         <p:spPr>
           <a:xfrm>
             <a:off x="913795" y="0"/>
-            <a:ext cx="10353762" cy="566057"/>
-          </a:xfrm>
-        </p:spPr>
-        <p:txBody>
-          <a:bodyPr>
-            <a:normAutofit fontScale="90000"/>
-          </a:bodyPr>
-          <a:lstStyle/>
-          <a:p>
-            <a:r>
-              <a:rPr lang="en-US" b="1">
-                <a:solidFill>
-                  <a:srgbClr val="FF0000"/>
-                </a:solidFill>
-              </a:rPr>
-              <a:t>New Types </a:t>
-            </a:r>
-          </a:p>
-        </p:txBody>
-      </p:sp>
-      <p:sp>
-        <p:nvSpPr>
-          <p:cNvPr id="3" name="Content Placeholder 2">
-            <a:extLst>
-              <a:ext uri="{FF2B5EF4-FFF2-40B4-BE49-F238E27FC236}">
-                <a16:creationId xmlns:a16="http://schemas.microsoft.com/office/drawing/2014/main" id="{C97632D9-4FCE-E448-1365-D16A50CCAF8A}"/>
-              </a:ext>
-            </a:extLst>
-          </p:cNvPr>
-          <p:cNvSpPr>
-            <a:spLocks noGrp="1"/>
-          </p:cNvSpPr>
-          <p:nvPr>
-            <p:ph idx="1"/>
-          </p:nvPr>
-        </p:nvSpPr>
-        <p:spPr>
-          <a:xfrm>
-            <a:off x="170822" y="566056"/>
-            <a:ext cx="11796765" cy="6291943"/>
+            <a:ext cx="10353762" cy="970450"/>
           </a:xfrm>
         </p:spPr>
         <p:txBody>
@@ -27124,294 +27747,1425 @@
           <a:lstStyle/>
           <a:p>
             <a:r>
-              <a:rPr lang="en-US" b="1">
-                <a:solidFill>
-                  <a:srgbClr val="00B0F0"/>
-                </a:solidFill>
-              </a:rPr>
-              <a:t>HTMLInputElement</a:t>
-            </a:r>
-          </a:p>
-          <a:p>
-            <a:pPr lvl="1"/>
-            <a:r>
-              <a:rPr lang="en-US"/>
-              <a:t>let target = e.target as HTMLInputElement</a:t>
-            </a:r>
-          </a:p>
-          <a:p>
-            <a:r>
-              <a:rPr lang="en-US" b="1">
-                <a:solidFill>
-                  <a:srgbClr val="00B0F0"/>
-                </a:solidFill>
-              </a:rPr>
-              <a:t>KeyboardEvent</a:t>
-            </a:r>
-          </a:p>
-          <a:p>
-            <a:pPr lvl="1"/>
-            <a:r>
-              <a:rPr lang="en-US"/>
-              <a:t>If(</a:t>
-            </a:r>
-            <a:r>
-              <a:rPr lang="en-US">
-                <a:solidFill>
-                  <a:srgbClr val="FFC000"/>
-                </a:solidFill>
-                <a:effectLst/>
-              </a:rPr>
-              <a:t>event</a:t>
-            </a:r>
-            <a:r>
-              <a:rPr lang="en-US">
-                <a:effectLst/>
-              </a:rPr>
-              <a:t>.key=== "</a:t>
-            </a:r>
-            <a:r>
-              <a:rPr lang="en-US">
-                <a:solidFill>
-                  <a:schemeClr val="accent1">
-                    <a:lumMod val="40000"/>
-                    <a:lumOff val="60000"/>
-                  </a:schemeClr>
-                </a:solidFill>
-                <a:effectLst/>
-              </a:rPr>
-              <a:t>Enter</a:t>
-            </a:r>
-            <a:r>
-              <a:rPr lang="en-US">
-                <a:effectLst/>
-              </a:rPr>
-              <a:t>"</a:t>
-            </a:r>
-            <a:r>
-              <a:rPr lang="en-US"/>
-              <a:t>) {}</a:t>
-            </a:r>
-          </a:p>
-          <a:p>
-            <a:r>
-              <a:rPr lang="en-US" b="1">
-                <a:solidFill>
-                  <a:srgbClr val="00B0F0"/>
-                </a:solidFill>
-              </a:rPr>
-              <a:t>TemplateRef&lt;T&gt;</a:t>
-            </a:r>
-          </a:p>
-          <a:p>
-            <a:pPr lvl="1"/>
-            <a:r>
-              <a:rPr lang="en-US"/>
-              <a:t>This is the official Angular type for any </a:t>
-            </a:r>
-            <a:r>
-              <a:rPr lang="en-US" b="1">
-                <a:solidFill>
-                  <a:srgbClr val="00B0F0"/>
-                </a:solidFill>
-              </a:rPr>
-              <a:t>&lt;ng-template&gt;</a:t>
-            </a:r>
-            <a:r>
-              <a:rPr lang="en-US"/>
-              <a:t> reference</a:t>
-            </a:r>
-          </a:p>
-          <a:p>
-            <a:r>
-              <a:rPr lang="en-US" b="1">
-                <a:solidFill>
-                  <a:srgbClr val="00B0F0"/>
-                </a:solidFill>
-              </a:rPr>
-              <a:t>ElementRef&lt;T&gt;</a:t>
-            </a:r>
-          </a:p>
-          <a:p>
-            <a:pPr lvl="1"/>
-            <a:r>
-              <a:rPr lang="en-US"/>
-              <a:t>is a class that gives you </a:t>
-            </a:r>
-            <a:r>
-              <a:rPr lang="en-US" b="1"/>
-              <a:t>direct access to a DOM element</a:t>
-            </a:r>
-            <a:r>
-              <a:rPr lang="en-US"/>
-              <a:t> inside your component</a:t>
-            </a:r>
-            <a:endParaRPr lang="en-US">
+              <a:rPr lang="en-US"/>
+              <a:t>Is Name Unique validation</a:t>
+            </a:r>
+          </a:p>
+        </p:txBody>
+      </p:sp>
+      <p:sp>
+        <p:nvSpPr>
+          <p:cNvPr id="5" name="TextBox 4">
+            <a:extLst>
+              <a:ext uri="{FF2B5EF4-FFF2-40B4-BE49-F238E27FC236}">
+                <a16:creationId xmlns:a16="http://schemas.microsoft.com/office/drawing/2014/main" id="{1FED26F9-0E7E-A9E9-BC92-BB0D42C46120}"/>
+              </a:ext>
+            </a:extLst>
+          </p:cNvPr>
+          <p:cNvSpPr txBox="1"/>
+          <p:nvPr/>
+        </p:nvSpPr>
+        <p:spPr>
+          <a:xfrm>
+            <a:off x="160774" y="849519"/>
+            <a:ext cx="11927393" cy="4524315"/>
+          </a:xfrm>
+          <a:prstGeom prst="rect">
+            <a:avLst/>
+          </a:prstGeom>
+          <a:noFill/>
+        </p:spPr>
+        <p:txBody>
+          <a:bodyPr wrap="square">
+            <a:spAutoFit/>
+          </a:bodyPr>
+          <a:lstStyle/>
+          <a:p>
+            <a:pPr>
+              <a:buNone/>
+            </a:pPr>
+            <a:r>
+              <a:rPr lang="en-US" sz="1600" b="0">
+                <a:solidFill>
+                  <a:srgbClr val="BBBEBF"/>
+                </a:solidFill>
+                <a:effectLst/>
+                <a:latin typeface="Consolas" panose="020B0609020204030204" pitchFamily="49" charset="0"/>
+              </a:rPr>
+              <a:t>  </a:t>
+            </a:r>
+            <a:r>
+              <a:rPr lang="en-US" sz="1600" b="0">
+                <a:solidFill>
+                  <a:srgbClr val="D2A8FF"/>
+                </a:solidFill>
+                <a:effectLst/>
+                <a:latin typeface="Consolas" panose="020B0609020204030204" pitchFamily="49" charset="0"/>
+              </a:rPr>
+              <a:t>IsNameUniqueValidator</a:t>
+            </a:r>
+            <a:r>
+              <a:rPr lang="en-US" sz="1600" b="0">
+                <a:solidFill>
+                  <a:srgbClr val="BBBEBF"/>
+                </a:solidFill>
+                <a:effectLst/>
+                <a:latin typeface="Consolas" panose="020B0609020204030204" pitchFamily="49" charset="0"/>
+              </a:rPr>
+              <a:t>()</a:t>
+            </a:r>
+            <a:r>
+              <a:rPr lang="en-US" sz="1600" b="0">
+                <a:solidFill>
+                  <a:srgbClr val="D4D4D4"/>
+                </a:solidFill>
+                <a:effectLst/>
+                <a:latin typeface="Consolas" panose="020B0609020204030204" pitchFamily="49" charset="0"/>
+              </a:rPr>
+              <a:t>:</a:t>
+            </a:r>
+            <a:r>
+              <a:rPr lang="en-US" sz="1600" b="0">
+                <a:solidFill>
+                  <a:srgbClr val="BBBEBF"/>
+                </a:solidFill>
+                <a:effectLst/>
+                <a:latin typeface="Consolas" panose="020B0609020204030204" pitchFamily="49" charset="0"/>
+              </a:rPr>
+              <a:t> </a:t>
+            </a:r>
+            <a:r>
+              <a:rPr lang="en-US" sz="1600" b="0">
+                <a:solidFill>
+                  <a:srgbClr val="4EC9B0"/>
+                </a:solidFill>
+                <a:effectLst/>
+                <a:latin typeface="Consolas" panose="020B0609020204030204" pitchFamily="49" charset="0"/>
+              </a:rPr>
+              <a:t>AsyncValidatorFn</a:t>
+            </a:r>
+            <a:r>
+              <a:rPr lang="en-US" sz="1600" b="0">
+                <a:solidFill>
+                  <a:srgbClr val="BBBEBF"/>
+                </a:solidFill>
+                <a:effectLst/>
+                <a:latin typeface="Consolas" panose="020B0609020204030204" pitchFamily="49" charset="0"/>
+              </a:rPr>
+              <a:t> </a:t>
+            </a:r>
+            <a:r>
+              <a:rPr lang="en-US" sz="1600" b="0">
+                <a:solidFill>
+                  <a:srgbClr val="C9D1D9"/>
+                </a:solidFill>
+                <a:effectLst/>
+                <a:latin typeface="Consolas" panose="020B0609020204030204" pitchFamily="49" charset="0"/>
+              </a:rPr>
+              <a:t>{</a:t>
+            </a:r>
+            <a:br>
+              <a:rPr lang="en-US" sz="1600" b="0">
+                <a:solidFill>
+                  <a:srgbClr val="BBBEBF"/>
+                </a:solidFill>
+                <a:effectLst/>
+                <a:latin typeface="Consolas" panose="020B0609020204030204" pitchFamily="49" charset="0"/>
+              </a:rPr>
+            </a:br>
+            <a:endParaRPr lang="en-US" sz="1600" b="0">
+              <a:solidFill>
+                <a:srgbClr val="BBBEBF"/>
+              </a:solidFill>
               <a:effectLst/>
+              <a:latin typeface="Consolas" panose="020B0609020204030204" pitchFamily="49" charset="0"/>
             </a:endParaRPr>
           </a:p>
           <a:p>
-            <a:pPr lvl="1"/>
-            <a:r>
-              <a:rPr lang="en-US"/>
-              <a:t>usually used together with </a:t>
-            </a:r>
-            <a:r>
-              <a:rPr lang="en-US" b="1"/>
-              <a:t>@ViewChild</a:t>
-            </a:r>
-            <a:r>
-              <a:rPr lang="en-US"/>
+            <a:pPr>
+              <a:buNone/>
+            </a:pPr>
+            <a:r>
+              <a:rPr lang="en-US" sz="1600" b="0">
+                <a:solidFill>
+                  <a:srgbClr val="C9D1D9"/>
+                </a:solidFill>
+                <a:effectLst/>
+                <a:latin typeface="Consolas" panose="020B0609020204030204" pitchFamily="49" charset="0"/>
+              </a:rPr>
+              <a:t>    </a:t>
+            </a:r>
+            <a:r>
+              <a:rPr lang="en-US" sz="1600" b="0">
+                <a:solidFill>
+                  <a:srgbClr val="C586C0"/>
+                </a:solidFill>
+                <a:effectLst/>
+                <a:latin typeface="Consolas" panose="020B0609020204030204" pitchFamily="49" charset="0"/>
+              </a:rPr>
+              <a:t>return</a:t>
+            </a:r>
+            <a:r>
+              <a:rPr lang="en-US" sz="1600" b="0">
+                <a:solidFill>
+                  <a:srgbClr val="C9D1D9"/>
+                </a:solidFill>
+                <a:effectLst/>
+                <a:latin typeface="Consolas" panose="020B0609020204030204" pitchFamily="49" charset="0"/>
+              </a:rPr>
+              <a:t> (</a:t>
+            </a:r>
+            <a:r>
+              <a:rPr lang="en-US" sz="1600" b="0">
+                <a:solidFill>
+                  <a:srgbClr val="FFA657"/>
+                </a:solidFill>
+                <a:effectLst/>
+                <a:latin typeface="Consolas" panose="020B0609020204030204" pitchFamily="49" charset="0"/>
+              </a:rPr>
+              <a:t>control</a:t>
+            </a:r>
+            <a:r>
+              <a:rPr lang="en-US" sz="1600" b="0">
+                <a:solidFill>
+                  <a:srgbClr val="D4D4D4"/>
+                </a:solidFill>
+                <a:effectLst/>
+                <a:latin typeface="Consolas" panose="020B0609020204030204" pitchFamily="49" charset="0"/>
+              </a:rPr>
+              <a:t>:</a:t>
+            </a:r>
+            <a:r>
+              <a:rPr lang="en-US" sz="1600" b="0">
+                <a:solidFill>
+                  <a:srgbClr val="C9D1D9"/>
+                </a:solidFill>
+                <a:effectLst/>
+                <a:latin typeface="Consolas" panose="020B0609020204030204" pitchFamily="49" charset="0"/>
+              </a:rPr>
+              <a:t> </a:t>
+            </a:r>
+            <a:r>
+              <a:rPr lang="en-US" sz="1600" b="0">
+                <a:solidFill>
+                  <a:srgbClr val="4EC9B0"/>
+                </a:solidFill>
+                <a:effectLst/>
+                <a:latin typeface="Consolas" panose="020B0609020204030204" pitchFamily="49" charset="0"/>
+              </a:rPr>
+              <a:t>AbstractControl</a:t>
+            </a:r>
+            <a:r>
+              <a:rPr lang="en-US" sz="1600" b="0">
+                <a:solidFill>
+                  <a:srgbClr val="C9D1D9"/>
+                </a:solidFill>
+                <a:effectLst/>
+                <a:latin typeface="Consolas" panose="020B0609020204030204" pitchFamily="49" charset="0"/>
+              </a:rPr>
+              <a:t>)</a:t>
+            </a:r>
+            <a:r>
+              <a:rPr lang="en-US" sz="1600" b="0">
+                <a:solidFill>
+                  <a:srgbClr val="D4D4D4"/>
+                </a:solidFill>
+                <a:effectLst/>
+                <a:latin typeface="Consolas" panose="020B0609020204030204" pitchFamily="49" charset="0"/>
+              </a:rPr>
+              <a:t>:</a:t>
+            </a:r>
+            <a:r>
+              <a:rPr lang="en-US" sz="1600" b="0">
+                <a:solidFill>
+                  <a:srgbClr val="C9D1D9"/>
+                </a:solidFill>
+                <a:effectLst/>
+                <a:latin typeface="Consolas" panose="020B0609020204030204" pitchFamily="49" charset="0"/>
+              </a:rPr>
+              <a:t> </a:t>
+            </a:r>
+            <a:r>
+              <a:rPr lang="en-US" sz="1600" b="0">
+                <a:solidFill>
+                  <a:srgbClr val="4EC9B0"/>
+                </a:solidFill>
+                <a:effectLst/>
+                <a:latin typeface="Consolas" panose="020B0609020204030204" pitchFamily="49" charset="0"/>
+              </a:rPr>
+              <a:t>Observable</a:t>
+            </a:r>
+            <a:r>
+              <a:rPr lang="en-US" sz="1600" b="0">
+                <a:solidFill>
+                  <a:srgbClr val="C9D1D9"/>
+                </a:solidFill>
+                <a:effectLst/>
+                <a:latin typeface="Consolas" panose="020B0609020204030204" pitchFamily="49" charset="0"/>
+              </a:rPr>
+              <a:t>&lt;</a:t>
+            </a:r>
+            <a:r>
+              <a:rPr lang="en-US" sz="1600" b="0">
+                <a:solidFill>
+                  <a:srgbClr val="4EC9B0"/>
+                </a:solidFill>
+                <a:effectLst/>
+                <a:latin typeface="Consolas" panose="020B0609020204030204" pitchFamily="49" charset="0"/>
+              </a:rPr>
+              <a:t>ValidationErrors</a:t>
+            </a:r>
+            <a:r>
+              <a:rPr lang="en-US" sz="1600" b="0">
+                <a:solidFill>
+                  <a:srgbClr val="C9D1D9"/>
+                </a:solidFill>
+                <a:effectLst/>
+                <a:latin typeface="Consolas" panose="020B0609020204030204" pitchFamily="49" charset="0"/>
+              </a:rPr>
+              <a:t> </a:t>
+            </a:r>
+            <a:r>
+              <a:rPr lang="en-US" sz="1600" b="0">
+                <a:solidFill>
+                  <a:srgbClr val="D4D4D4"/>
+                </a:solidFill>
+                <a:effectLst/>
+                <a:latin typeface="Consolas" panose="020B0609020204030204" pitchFamily="49" charset="0"/>
+              </a:rPr>
+              <a:t>|</a:t>
+            </a:r>
+            <a:r>
+              <a:rPr lang="en-US" sz="1600" b="0">
+                <a:solidFill>
+                  <a:srgbClr val="C9D1D9"/>
+                </a:solidFill>
+                <a:effectLst/>
+                <a:latin typeface="Consolas" panose="020B0609020204030204" pitchFamily="49" charset="0"/>
+              </a:rPr>
+              <a:t> </a:t>
+            </a:r>
+            <a:r>
+              <a:rPr lang="en-US" sz="1600" b="0">
+                <a:solidFill>
+                  <a:srgbClr val="4EC9B0"/>
+                </a:solidFill>
+                <a:effectLst/>
+                <a:latin typeface="Consolas" panose="020B0609020204030204" pitchFamily="49" charset="0"/>
+              </a:rPr>
+              <a:t>null</a:t>
+            </a:r>
+            <a:r>
+              <a:rPr lang="en-US" sz="1600" b="0">
+                <a:solidFill>
+                  <a:srgbClr val="C9D1D9"/>
+                </a:solidFill>
+                <a:effectLst/>
+                <a:latin typeface="Consolas" panose="020B0609020204030204" pitchFamily="49" charset="0"/>
+              </a:rPr>
+              <a:t>&gt; </a:t>
+            </a:r>
+            <a:r>
+              <a:rPr lang="en-US" sz="1600" b="0">
+                <a:solidFill>
+                  <a:srgbClr val="FF7B72"/>
+                </a:solidFill>
+                <a:effectLst/>
+                <a:latin typeface="Consolas" panose="020B0609020204030204" pitchFamily="49" charset="0"/>
+              </a:rPr>
+              <a:t>=&gt;</a:t>
+            </a:r>
+            <a:r>
+              <a:rPr lang="en-US" sz="1600" b="0">
+                <a:solidFill>
+                  <a:srgbClr val="C9D1D9"/>
+                </a:solidFill>
+                <a:effectLst/>
+                <a:latin typeface="Consolas" panose="020B0609020204030204" pitchFamily="49" charset="0"/>
+              </a:rPr>
+              <a:t> {</a:t>
+            </a:r>
+            <a:endParaRPr lang="en-US" sz="1600" b="0">
+              <a:solidFill>
+                <a:srgbClr val="BBBEBF"/>
+              </a:solidFill>
+              <a:effectLst/>
+              <a:latin typeface="Consolas" panose="020B0609020204030204" pitchFamily="49" charset="0"/>
+            </a:endParaRPr>
+          </a:p>
+          <a:p>
+            <a:pPr>
+              <a:buNone/>
+            </a:pPr>
+            <a:endParaRPr lang="en-US" sz="1600" b="0">
+              <a:solidFill>
+                <a:srgbClr val="BBBEBF"/>
+              </a:solidFill>
+              <a:effectLst/>
+              <a:latin typeface="Consolas" panose="020B0609020204030204" pitchFamily="49" charset="0"/>
+            </a:endParaRPr>
+          </a:p>
+          <a:p>
+            <a:pPr>
+              <a:buNone/>
+            </a:pPr>
+            <a:r>
+              <a:rPr lang="en-US" sz="1600" b="0">
+                <a:solidFill>
+                  <a:srgbClr val="C9D1D9"/>
+                </a:solidFill>
+                <a:effectLst/>
+                <a:latin typeface="Consolas" panose="020B0609020204030204" pitchFamily="49" charset="0"/>
+              </a:rPr>
+              <a:t>      </a:t>
+            </a:r>
+            <a:r>
+              <a:rPr lang="en-US" sz="1600" b="0">
+                <a:solidFill>
+                  <a:srgbClr val="C586C0"/>
+                </a:solidFill>
+                <a:effectLst/>
+                <a:latin typeface="Consolas" panose="020B0609020204030204" pitchFamily="49" charset="0"/>
+              </a:rPr>
+              <a:t>if</a:t>
+            </a:r>
+            <a:r>
+              <a:rPr lang="en-US" sz="1600" b="0">
+                <a:solidFill>
+                  <a:srgbClr val="C9D1D9"/>
+                </a:solidFill>
+                <a:effectLst/>
+                <a:latin typeface="Consolas" panose="020B0609020204030204" pitchFamily="49" charset="0"/>
+              </a:rPr>
+              <a:t> (</a:t>
+            </a:r>
+            <a:r>
+              <a:rPr lang="en-US" sz="1600" b="0">
+                <a:solidFill>
+                  <a:srgbClr val="D4D4D4"/>
+                </a:solidFill>
+                <a:effectLst/>
+                <a:latin typeface="Consolas" panose="020B0609020204030204" pitchFamily="49" charset="0"/>
+              </a:rPr>
+              <a:t>!</a:t>
+            </a:r>
+            <a:r>
+              <a:rPr lang="en-US" sz="1600" b="0">
+                <a:solidFill>
+                  <a:srgbClr val="FFA657"/>
+                </a:solidFill>
+                <a:effectLst/>
+                <a:latin typeface="Consolas" panose="020B0609020204030204" pitchFamily="49" charset="0"/>
+              </a:rPr>
+              <a:t>control</a:t>
+            </a:r>
+            <a:r>
+              <a:rPr lang="en-US" sz="1600" b="0">
+                <a:solidFill>
+                  <a:srgbClr val="C9D1D9"/>
+                </a:solidFill>
+                <a:effectLst/>
+                <a:latin typeface="Consolas" panose="020B0609020204030204" pitchFamily="49" charset="0"/>
+              </a:rPr>
               <a:t>.</a:t>
             </a:r>
-            <a:endParaRPr lang="en-US">
+            <a:r>
+              <a:rPr lang="en-US" sz="1600" b="0">
+                <a:solidFill>
+                  <a:srgbClr val="79C0FF"/>
+                </a:solidFill>
+                <a:effectLst/>
+                <a:latin typeface="Consolas" panose="020B0609020204030204" pitchFamily="49" charset="0"/>
+              </a:rPr>
+              <a:t>value</a:t>
+            </a:r>
+            <a:r>
+              <a:rPr lang="en-US" sz="1600" b="0">
+                <a:solidFill>
+                  <a:srgbClr val="C9D1D9"/>
+                </a:solidFill>
+                <a:effectLst/>
+                <a:latin typeface="Consolas" panose="020B0609020204030204" pitchFamily="49" charset="0"/>
+              </a:rPr>
+              <a:t>) </a:t>
+            </a:r>
+            <a:endParaRPr lang="en-US" sz="1600" b="0">
+              <a:solidFill>
+                <a:srgbClr val="BBBEBF"/>
+              </a:solidFill>
               <a:effectLst/>
+              <a:latin typeface="Consolas" panose="020B0609020204030204" pitchFamily="49" charset="0"/>
             </a:endParaRPr>
           </a:p>
           <a:p>
-            <a:pPr lvl="1"/>
-            <a:r>
-              <a:rPr lang="en-US">
-                <a:effectLst/>
-              </a:rPr>
-              <a:t>Ex: </a:t>
-            </a:r>
-            <a:r>
-              <a:rPr lang="en-US" b="1">
-                <a:solidFill>
-                  <a:schemeClr val="tx1"/>
-                </a:solidFill>
-                <a:effectLst/>
-              </a:rPr>
-              <a:t>@</a:t>
-            </a:r>
-            <a:r>
-              <a:rPr lang="en-US" b="1">
-                <a:solidFill>
-                  <a:srgbClr val="FF0000"/>
-                </a:solidFill>
-                <a:effectLst/>
-              </a:rPr>
-              <a:t>ViewChild</a:t>
-            </a:r>
-            <a:r>
-              <a:rPr lang="en-US">
-                <a:effectLst/>
+            <a:pPr>
+              <a:buNone/>
+            </a:pPr>
+            <a:r>
+              <a:rPr lang="en-US" sz="1600" b="0">
+                <a:solidFill>
+                  <a:srgbClr val="C9D1D9"/>
+                </a:solidFill>
+                <a:effectLst/>
+                <a:latin typeface="Consolas" panose="020B0609020204030204" pitchFamily="49" charset="0"/>
+              </a:rPr>
+              <a:t>        </a:t>
+            </a:r>
+            <a:r>
+              <a:rPr lang="en-US" sz="1600" b="0">
+                <a:solidFill>
+                  <a:srgbClr val="C586C0"/>
+                </a:solidFill>
+                <a:effectLst/>
+                <a:latin typeface="Consolas" panose="020B0609020204030204" pitchFamily="49" charset="0"/>
+              </a:rPr>
+              <a:t>return</a:t>
+            </a:r>
+            <a:r>
+              <a:rPr lang="en-US" sz="1600" b="0">
+                <a:solidFill>
+                  <a:srgbClr val="C9D1D9"/>
+                </a:solidFill>
+                <a:effectLst/>
+                <a:latin typeface="Consolas" panose="020B0609020204030204" pitchFamily="49" charset="0"/>
+              </a:rPr>
+              <a:t> </a:t>
+            </a:r>
+            <a:r>
+              <a:rPr lang="en-US" sz="1600" b="0">
+                <a:solidFill>
+                  <a:srgbClr val="D2A8FF"/>
+                </a:solidFill>
+                <a:effectLst/>
+                <a:latin typeface="Consolas" panose="020B0609020204030204" pitchFamily="49" charset="0"/>
+              </a:rPr>
+              <a:t>of</a:t>
+            </a:r>
+            <a:r>
+              <a:rPr lang="en-US" sz="1600" b="0">
+                <a:solidFill>
+                  <a:srgbClr val="C9D1D9"/>
+                </a:solidFill>
+                <a:effectLst/>
+                <a:latin typeface="Consolas" panose="020B0609020204030204" pitchFamily="49" charset="0"/>
               </a:rPr>
               <a:t>(</a:t>
             </a:r>
             <a:r>
-              <a:rPr lang="en-US" b="1">
-                <a:effectLst/>
-              </a:rPr>
-              <a:t>'</a:t>
-            </a:r>
-            <a:r>
-              <a:rPr lang="en-US" b="1">
-                <a:solidFill>
-                  <a:srgbClr val="FFC000"/>
-                </a:solidFill>
-                <a:effectLst/>
-              </a:rPr>
-              <a:t>ColorHexCodeInput</a:t>
-            </a:r>
-            <a:r>
-              <a:rPr lang="en-US">
-                <a:effectLst/>
-              </a:rPr>
-              <a:t>') colorHexCodeInput!: </a:t>
-            </a:r>
-            <a:r>
-              <a:rPr lang="en-US" b="1">
-                <a:solidFill>
-                  <a:srgbClr val="00B0F0"/>
-                </a:solidFill>
-                <a:effectLst/>
-              </a:rPr>
-              <a:t>ElementRef</a:t>
-            </a:r>
-            <a:r>
-              <a:rPr lang="en-US">
-                <a:solidFill>
-                  <a:srgbClr val="0070C0"/>
-                </a:solidFill>
-                <a:effectLst/>
-              </a:rPr>
-              <a:t>&lt;</a:t>
-            </a:r>
-            <a:r>
-              <a:rPr lang="en-US" b="1">
-                <a:solidFill>
-                  <a:srgbClr val="00B0F0"/>
-                </a:solidFill>
-                <a:effectLst/>
-              </a:rPr>
-              <a:t>HTMLInputElement</a:t>
-            </a:r>
-            <a:r>
-              <a:rPr lang="en-US">
-                <a:solidFill>
-                  <a:srgbClr val="7030A0"/>
-                </a:solidFill>
-                <a:effectLst/>
-              </a:rPr>
-              <a:t>&gt;</a:t>
-            </a:r>
-            <a:r>
-              <a:rPr lang="en-US">
-                <a:effectLst/>
-              </a:rPr>
-              <a:t>;</a:t>
-            </a:r>
-          </a:p>
-          <a:p>
-            <a:r>
-              <a:rPr lang="en-US" b="1">
-                <a:solidFill>
-                  <a:srgbClr val="00B0F0"/>
-                </a:solidFill>
-                <a:effectLst/>
-              </a:rPr>
-              <a:t>NgbModalRef</a:t>
-            </a:r>
-          </a:p>
-          <a:p>
-            <a:pPr lvl="1"/>
-            <a:r>
-              <a:rPr lang="en-US">
-                <a:effectLst/>
-              </a:rPr>
-              <a:t>Modal </a:t>
-            </a:r>
-          </a:p>
-          <a:p>
-            <a:r>
-              <a:rPr lang="en-US" b="1">
-                <a:solidFill>
-                  <a:srgbClr val="00B0F0"/>
-                </a:solidFill>
-                <a:effectLst/>
-              </a:rPr>
-              <a:t>NgbActiveModal</a:t>
-            </a:r>
-          </a:p>
-          <a:p>
-            <a:r>
-              <a:rPr lang="en-US" b="1">
-                <a:solidFill>
-                  <a:srgbClr val="00B0F0"/>
-                </a:solidFill>
-                <a:effectLst/>
-              </a:rPr>
-              <a:t>NgbModal</a:t>
-            </a:r>
+              <a:rPr lang="en-US" sz="1600" b="0">
+                <a:solidFill>
+                  <a:srgbClr val="569CD6"/>
+                </a:solidFill>
+                <a:effectLst/>
+                <a:latin typeface="Consolas" panose="020B0609020204030204" pitchFamily="49" charset="0"/>
+              </a:rPr>
+              <a:t>null</a:t>
+            </a:r>
+            <a:r>
+              <a:rPr lang="en-US" sz="1600" b="0">
+                <a:solidFill>
+                  <a:srgbClr val="C9D1D9"/>
+                </a:solidFill>
+                <a:effectLst/>
+                <a:latin typeface="Consolas" panose="020B0609020204030204" pitchFamily="49" charset="0"/>
+              </a:rPr>
+              <a:t>);</a:t>
+            </a:r>
+            <a:br>
+              <a:rPr lang="en-US" sz="1600" b="0">
+                <a:solidFill>
+                  <a:srgbClr val="BBBEBF"/>
+                </a:solidFill>
+                <a:effectLst/>
+                <a:latin typeface="Consolas" panose="020B0609020204030204" pitchFamily="49" charset="0"/>
+              </a:rPr>
+            </a:br>
+            <a:endParaRPr lang="en-US" sz="1600" b="0">
+              <a:solidFill>
+                <a:srgbClr val="BBBEBF"/>
+              </a:solidFill>
+              <a:effectLst/>
+              <a:latin typeface="Consolas" panose="020B0609020204030204" pitchFamily="49" charset="0"/>
+            </a:endParaRPr>
+          </a:p>
+          <a:p>
+            <a:pPr>
+              <a:buNone/>
+            </a:pPr>
+            <a:r>
+              <a:rPr lang="en-US" sz="1600" b="0">
+                <a:solidFill>
+                  <a:srgbClr val="C9D1D9"/>
+                </a:solidFill>
+                <a:effectLst/>
+                <a:latin typeface="Consolas" panose="020B0609020204030204" pitchFamily="49" charset="0"/>
+              </a:rPr>
+              <a:t>      </a:t>
+            </a:r>
+            <a:r>
+              <a:rPr lang="en-US" sz="1600" b="0">
+                <a:solidFill>
+                  <a:srgbClr val="C586C0"/>
+                </a:solidFill>
+                <a:effectLst/>
+                <a:latin typeface="Consolas" panose="020B0609020204030204" pitchFamily="49" charset="0"/>
+              </a:rPr>
+              <a:t>if</a:t>
+            </a:r>
+            <a:r>
+              <a:rPr lang="en-US" sz="1600" b="0">
+                <a:solidFill>
+                  <a:srgbClr val="C9D1D9"/>
+                </a:solidFill>
+                <a:effectLst/>
+                <a:latin typeface="Consolas" panose="020B0609020204030204" pitchFamily="49" charset="0"/>
+              </a:rPr>
+              <a:t> ( </a:t>
+            </a:r>
+            <a:r>
+              <a:rPr lang="en-US" sz="1600" b="0">
+                <a:solidFill>
+                  <a:srgbClr val="79C0FF"/>
+                </a:solidFill>
+                <a:effectLst/>
+                <a:latin typeface="Consolas" panose="020B0609020204030204" pitchFamily="49" charset="0"/>
+              </a:rPr>
+              <a:t>this</a:t>
+            </a:r>
+            <a:r>
+              <a:rPr lang="en-US" sz="1600" b="0">
+                <a:solidFill>
+                  <a:srgbClr val="C9D1D9"/>
+                </a:solidFill>
+                <a:effectLst/>
+                <a:latin typeface="Consolas" panose="020B0609020204030204" pitchFamily="49" charset="0"/>
+              </a:rPr>
+              <a:t>.IsEditMode </a:t>
+            </a:r>
+            <a:r>
+              <a:rPr lang="en-US" sz="1600" b="0">
+                <a:solidFill>
+                  <a:srgbClr val="D4D4D4"/>
+                </a:solidFill>
+                <a:effectLst/>
+                <a:latin typeface="Consolas" panose="020B0609020204030204" pitchFamily="49" charset="0"/>
+              </a:rPr>
+              <a:t>&amp;&amp;</a:t>
+            </a:r>
+            <a:r>
+              <a:rPr lang="en-US" sz="1600" b="0">
+                <a:solidFill>
+                  <a:srgbClr val="C9D1D9"/>
+                </a:solidFill>
+                <a:effectLst/>
+                <a:latin typeface="Consolas" panose="020B0609020204030204" pitchFamily="49" charset="0"/>
+              </a:rPr>
+              <a:t> </a:t>
+            </a:r>
+            <a:r>
+              <a:rPr lang="en-US" sz="1600" b="0">
+                <a:solidFill>
+                  <a:srgbClr val="79C0FF"/>
+                </a:solidFill>
+                <a:effectLst/>
+                <a:latin typeface="Consolas" panose="020B0609020204030204" pitchFamily="49" charset="0"/>
+              </a:rPr>
+              <a:t>this</a:t>
+            </a:r>
+            <a:r>
+              <a:rPr lang="en-US" sz="1600" b="0">
+                <a:solidFill>
+                  <a:srgbClr val="C9D1D9"/>
+                </a:solidFill>
+                <a:effectLst/>
+                <a:latin typeface="Consolas" panose="020B0609020204030204" pitchFamily="49" charset="0"/>
+              </a:rPr>
+              <a:t>.SelectedCategory </a:t>
+            </a:r>
+            <a:r>
+              <a:rPr lang="en-US" sz="1600" b="0">
+                <a:solidFill>
+                  <a:srgbClr val="D4D4D4"/>
+                </a:solidFill>
+                <a:effectLst/>
+                <a:latin typeface="Consolas" panose="020B0609020204030204" pitchFamily="49" charset="0"/>
+              </a:rPr>
+              <a:t>&amp;&amp;</a:t>
+            </a:r>
+            <a:r>
+              <a:rPr lang="en-US" sz="1600" b="0">
+                <a:solidFill>
+                  <a:srgbClr val="C9D1D9"/>
+                </a:solidFill>
+                <a:effectLst/>
+                <a:latin typeface="Consolas" panose="020B0609020204030204" pitchFamily="49" charset="0"/>
+              </a:rPr>
+              <a:t> </a:t>
+            </a:r>
+            <a:r>
+              <a:rPr lang="en-US" sz="1600" b="0">
+                <a:solidFill>
+                  <a:srgbClr val="FFA657"/>
+                </a:solidFill>
+                <a:effectLst/>
+                <a:latin typeface="Consolas" panose="020B0609020204030204" pitchFamily="49" charset="0"/>
+              </a:rPr>
+              <a:t>control</a:t>
+            </a:r>
+            <a:r>
+              <a:rPr lang="en-US" sz="1600" b="0">
+                <a:solidFill>
+                  <a:srgbClr val="C9D1D9"/>
+                </a:solidFill>
+                <a:effectLst/>
+                <a:latin typeface="Consolas" panose="020B0609020204030204" pitchFamily="49" charset="0"/>
+              </a:rPr>
+              <a:t>.</a:t>
+            </a:r>
+            <a:r>
+              <a:rPr lang="en-US" sz="1600" b="0">
+                <a:solidFill>
+                  <a:srgbClr val="79C0FF"/>
+                </a:solidFill>
+                <a:effectLst/>
+                <a:latin typeface="Consolas" panose="020B0609020204030204" pitchFamily="49" charset="0"/>
+              </a:rPr>
+              <a:t>value</a:t>
+            </a:r>
+            <a:r>
+              <a:rPr lang="en-US" sz="1600" b="0">
+                <a:solidFill>
+                  <a:srgbClr val="C9D1D9"/>
+                </a:solidFill>
+                <a:effectLst/>
+                <a:latin typeface="Consolas" panose="020B0609020204030204" pitchFamily="49" charset="0"/>
+              </a:rPr>
+              <a:t> </a:t>
+            </a:r>
+            <a:r>
+              <a:rPr lang="en-US" sz="1600" b="0">
+                <a:solidFill>
+                  <a:srgbClr val="D4D4D4"/>
+                </a:solidFill>
+                <a:effectLst/>
+                <a:latin typeface="Consolas" panose="020B0609020204030204" pitchFamily="49" charset="0"/>
+              </a:rPr>
+              <a:t>===</a:t>
+            </a:r>
+            <a:r>
+              <a:rPr lang="en-US" sz="1600" b="0">
+                <a:solidFill>
+                  <a:srgbClr val="C9D1D9"/>
+                </a:solidFill>
+                <a:effectLst/>
+                <a:latin typeface="Consolas" panose="020B0609020204030204" pitchFamily="49" charset="0"/>
+              </a:rPr>
+              <a:t> </a:t>
+            </a:r>
+            <a:r>
+              <a:rPr lang="en-US" sz="1600" b="0">
+                <a:solidFill>
+                  <a:srgbClr val="79C0FF"/>
+                </a:solidFill>
+                <a:effectLst/>
+                <a:latin typeface="Consolas" panose="020B0609020204030204" pitchFamily="49" charset="0"/>
+              </a:rPr>
+              <a:t>this</a:t>
+            </a:r>
+            <a:r>
+              <a:rPr lang="en-US" sz="1600" b="0">
+                <a:solidFill>
+                  <a:srgbClr val="C9D1D9"/>
+                </a:solidFill>
+                <a:effectLst/>
+                <a:latin typeface="Consolas" panose="020B0609020204030204" pitchFamily="49" charset="0"/>
+              </a:rPr>
+              <a:t>.SelectedCategory.name) {</a:t>
+            </a:r>
+            <a:endParaRPr lang="en-US" sz="1600" b="0">
+              <a:solidFill>
+                <a:srgbClr val="BBBEBF"/>
+              </a:solidFill>
+              <a:effectLst/>
+              <a:latin typeface="Consolas" panose="020B0609020204030204" pitchFamily="49" charset="0"/>
+            </a:endParaRPr>
+          </a:p>
+          <a:p>
+            <a:pPr>
+              <a:buNone/>
+            </a:pPr>
+            <a:r>
+              <a:rPr lang="en-US" sz="1600" b="0">
+                <a:solidFill>
+                  <a:srgbClr val="C9D1D9"/>
+                </a:solidFill>
+                <a:effectLst/>
+                <a:latin typeface="Consolas" panose="020B0609020204030204" pitchFamily="49" charset="0"/>
+              </a:rPr>
+              <a:t>        </a:t>
+            </a:r>
+            <a:r>
+              <a:rPr lang="en-US" sz="1600" b="0">
+                <a:solidFill>
+                  <a:srgbClr val="C586C0"/>
+                </a:solidFill>
+                <a:effectLst/>
+                <a:latin typeface="Consolas" panose="020B0609020204030204" pitchFamily="49" charset="0"/>
+              </a:rPr>
+              <a:t>return</a:t>
+            </a:r>
+            <a:r>
+              <a:rPr lang="en-US" sz="1600" b="0">
+                <a:solidFill>
+                  <a:srgbClr val="C9D1D9"/>
+                </a:solidFill>
+                <a:effectLst/>
+                <a:latin typeface="Consolas" panose="020B0609020204030204" pitchFamily="49" charset="0"/>
+              </a:rPr>
+              <a:t> </a:t>
+            </a:r>
+            <a:r>
+              <a:rPr lang="en-US" sz="1600" b="0">
+                <a:solidFill>
+                  <a:srgbClr val="D2A8FF"/>
+                </a:solidFill>
+                <a:effectLst/>
+                <a:latin typeface="Consolas" panose="020B0609020204030204" pitchFamily="49" charset="0"/>
+              </a:rPr>
+              <a:t>of</a:t>
+            </a:r>
+            <a:r>
+              <a:rPr lang="en-US" sz="1600" b="0">
+                <a:solidFill>
+                  <a:srgbClr val="C9D1D9"/>
+                </a:solidFill>
+                <a:effectLst/>
+                <a:latin typeface="Consolas" panose="020B0609020204030204" pitchFamily="49" charset="0"/>
+              </a:rPr>
+              <a:t>(</a:t>
+            </a:r>
+            <a:r>
+              <a:rPr lang="en-US" sz="1600" b="0">
+                <a:solidFill>
+                  <a:srgbClr val="569CD6"/>
+                </a:solidFill>
+                <a:effectLst/>
+                <a:latin typeface="Consolas" panose="020B0609020204030204" pitchFamily="49" charset="0"/>
+              </a:rPr>
+              <a:t>null</a:t>
+            </a:r>
+            <a:r>
+              <a:rPr lang="en-US" sz="1600" b="0">
+                <a:solidFill>
+                  <a:srgbClr val="C9D1D9"/>
+                </a:solidFill>
+                <a:effectLst/>
+                <a:latin typeface="Consolas" panose="020B0609020204030204" pitchFamily="49" charset="0"/>
+              </a:rPr>
+              <a:t>);</a:t>
+            </a:r>
+            <a:endParaRPr lang="en-US" sz="1600" b="0">
+              <a:solidFill>
+                <a:srgbClr val="BBBEBF"/>
+              </a:solidFill>
+              <a:effectLst/>
+              <a:latin typeface="Consolas" panose="020B0609020204030204" pitchFamily="49" charset="0"/>
+            </a:endParaRPr>
+          </a:p>
+          <a:p>
+            <a:pPr>
+              <a:buNone/>
+            </a:pPr>
+            <a:r>
+              <a:rPr lang="en-US" sz="1600" b="0">
+                <a:solidFill>
+                  <a:srgbClr val="C9D1D9"/>
+                </a:solidFill>
+                <a:effectLst/>
+                <a:latin typeface="Consolas" panose="020B0609020204030204" pitchFamily="49" charset="0"/>
+              </a:rPr>
+              <a:t>      }</a:t>
+            </a:r>
+            <a:endParaRPr lang="en-US" sz="1600" b="0">
+              <a:solidFill>
+                <a:srgbClr val="BBBEBF"/>
+              </a:solidFill>
+              <a:effectLst/>
+              <a:latin typeface="Consolas" panose="020B0609020204030204" pitchFamily="49" charset="0"/>
+            </a:endParaRPr>
+          </a:p>
+          <a:p>
+            <a:pPr>
+              <a:buNone/>
+            </a:pPr>
+            <a:endParaRPr lang="en-US" sz="1600" b="0">
+              <a:solidFill>
+                <a:srgbClr val="BBBEBF"/>
+              </a:solidFill>
+              <a:effectLst/>
+              <a:latin typeface="Consolas" panose="020B0609020204030204" pitchFamily="49" charset="0"/>
+            </a:endParaRPr>
+          </a:p>
+          <a:p>
+            <a:pPr>
+              <a:buNone/>
+            </a:pPr>
+            <a:r>
+              <a:rPr lang="en-US" sz="1600" b="0">
+                <a:solidFill>
+                  <a:srgbClr val="C9D1D9"/>
+                </a:solidFill>
+                <a:effectLst/>
+                <a:latin typeface="Consolas" panose="020B0609020204030204" pitchFamily="49" charset="0"/>
+              </a:rPr>
+              <a:t>      </a:t>
+            </a:r>
+            <a:r>
+              <a:rPr lang="en-US" sz="1600" b="0">
+                <a:solidFill>
+                  <a:srgbClr val="C586C0"/>
+                </a:solidFill>
+                <a:effectLst/>
+                <a:latin typeface="Consolas" panose="020B0609020204030204" pitchFamily="49" charset="0"/>
+              </a:rPr>
+              <a:t>return</a:t>
+            </a:r>
+            <a:r>
+              <a:rPr lang="en-US" sz="1600" b="0">
+                <a:solidFill>
+                  <a:srgbClr val="C9D1D9"/>
+                </a:solidFill>
+                <a:effectLst/>
+                <a:latin typeface="Consolas" panose="020B0609020204030204" pitchFamily="49" charset="0"/>
+              </a:rPr>
+              <a:t> </a:t>
+            </a:r>
+            <a:r>
+              <a:rPr lang="en-US" sz="1600" b="0">
+                <a:solidFill>
+                  <a:srgbClr val="79C0FF"/>
+                </a:solidFill>
+                <a:effectLst/>
+                <a:latin typeface="Consolas" panose="020B0609020204030204" pitchFamily="49" charset="0"/>
+              </a:rPr>
+              <a:t>this</a:t>
+            </a:r>
+            <a:r>
+              <a:rPr lang="en-US" sz="1600" b="0">
+                <a:solidFill>
+                  <a:srgbClr val="C9D1D9"/>
+                </a:solidFill>
+                <a:effectLst/>
+                <a:latin typeface="Consolas" panose="020B0609020204030204" pitchFamily="49" charset="0"/>
+              </a:rPr>
+              <a:t>.categoryService.</a:t>
+            </a:r>
+            <a:r>
+              <a:rPr lang="en-US" sz="1600" b="0">
+                <a:solidFill>
+                  <a:srgbClr val="D2A8FF"/>
+                </a:solidFill>
+                <a:effectLst/>
+                <a:latin typeface="Consolas" panose="020B0609020204030204" pitchFamily="49" charset="0"/>
+              </a:rPr>
+              <a:t>IsNameUnique</a:t>
+            </a:r>
+            <a:r>
+              <a:rPr lang="en-US" sz="1600" b="0">
+                <a:solidFill>
+                  <a:srgbClr val="C9D1D9"/>
+                </a:solidFill>
+                <a:effectLst/>
+                <a:latin typeface="Consolas" panose="020B0609020204030204" pitchFamily="49" charset="0"/>
+              </a:rPr>
+              <a:t>(</a:t>
+            </a:r>
+            <a:r>
+              <a:rPr lang="en-US" sz="1600" b="0">
+                <a:solidFill>
+                  <a:srgbClr val="FFA657"/>
+                </a:solidFill>
+                <a:effectLst/>
+                <a:latin typeface="Consolas" panose="020B0609020204030204" pitchFamily="49" charset="0"/>
+              </a:rPr>
+              <a:t>control</a:t>
+            </a:r>
+            <a:r>
+              <a:rPr lang="en-US" sz="1600" b="0">
+                <a:solidFill>
+                  <a:srgbClr val="C9D1D9"/>
+                </a:solidFill>
+                <a:effectLst/>
+                <a:latin typeface="Consolas" panose="020B0609020204030204" pitchFamily="49" charset="0"/>
+              </a:rPr>
+              <a:t>.</a:t>
+            </a:r>
+            <a:r>
+              <a:rPr lang="en-US" sz="1600" b="0">
+                <a:solidFill>
+                  <a:srgbClr val="79C0FF"/>
+                </a:solidFill>
+                <a:effectLst/>
+                <a:latin typeface="Consolas" panose="020B0609020204030204" pitchFamily="49" charset="0"/>
+              </a:rPr>
+              <a:t>value</a:t>
+            </a:r>
+            <a:r>
+              <a:rPr lang="en-US" sz="1600" b="0">
+                <a:solidFill>
+                  <a:srgbClr val="C9D1D9"/>
+                </a:solidFill>
+                <a:effectLst/>
+                <a:latin typeface="Consolas" panose="020B0609020204030204" pitchFamily="49" charset="0"/>
+              </a:rPr>
+              <a:t>, </a:t>
+            </a:r>
+            <a:r>
+              <a:rPr lang="en-US" sz="1600" b="0">
+                <a:solidFill>
+                  <a:srgbClr val="79C0FF"/>
+                </a:solidFill>
+                <a:effectLst/>
+                <a:latin typeface="Consolas" panose="020B0609020204030204" pitchFamily="49" charset="0"/>
+              </a:rPr>
+              <a:t>this</a:t>
+            </a:r>
+            <a:r>
+              <a:rPr lang="en-US" sz="1600" b="0">
+                <a:solidFill>
+                  <a:srgbClr val="C9D1D9"/>
+                </a:solidFill>
+                <a:effectLst/>
+                <a:latin typeface="Consolas" panose="020B0609020204030204" pitchFamily="49" charset="0"/>
+              </a:rPr>
+              <a:t>.SelectedCategory?.id)</a:t>
+            </a:r>
+            <a:endParaRPr lang="en-US" sz="1600" b="0">
+              <a:solidFill>
+                <a:srgbClr val="BBBEBF"/>
+              </a:solidFill>
+              <a:effectLst/>
+              <a:latin typeface="Consolas" panose="020B0609020204030204" pitchFamily="49" charset="0"/>
+            </a:endParaRPr>
+          </a:p>
+          <a:p>
+            <a:pPr>
+              <a:buNone/>
+            </a:pPr>
+            <a:r>
+              <a:rPr lang="en-US" sz="1600" b="0">
+                <a:solidFill>
+                  <a:srgbClr val="C9D1D9"/>
+                </a:solidFill>
+                <a:effectLst/>
+                <a:latin typeface="Consolas" panose="020B0609020204030204" pitchFamily="49" charset="0"/>
+              </a:rPr>
+              <a:t>        .</a:t>
+            </a:r>
+            <a:r>
+              <a:rPr lang="en-US" sz="1600" b="0">
+                <a:solidFill>
+                  <a:srgbClr val="D2A8FF"/>
+                </a:solidFill>
+                <a:effectLst/>
+                <a:latin typeface="Consolas" panose="020B0609020204030204" pitchFamily="49" charset="0"/>
+              </a:rPr>
+              <a:t>pipe</a:t>
+            </a:r>
+            <a:r>
+              <a:rPr lang="en-US" sz="1600" b="0">
+                <a:solidFill>
+                  <a:srgbClr val="C9D1D9"/>
+                </a:solidFill>
+                <a:effectLst/>
+                <a:latin typeface="Consolas" panose="020B0609020204030204" pitchFamily="49" charset="0"/>
+              </a:rPr>
+              <a:t>(</a:t>
+            </a:r>
+            <a:endParaRPr lang="en-US" sz="1600" b="0">
+              <a:solidFill>
+                <a:srgbClr val="BBBEBF"/>
+              </a:solidFill>
+              <a:effectLst/>
+              <a:latin typeface="Consolas" panose="020B0609020204030204" pitchFamily="49" charset="0"/>
+            </a:endParaRPr>
+          </a:p>
+          <a:p>
+            <a:pPr>
+              <a:buNone/>
+            </a:pPr>
+            <a:r>
+              <a:rPr lang="en-US" sz="1600" b="0">
+                <a:solidFill>
+                  <a:srgbClr val="C9D1D9"/>
+                </a:solidFill>
+                <a:effectLst/>
+                <a:latin typeface="Consolas" panose="020B0609020204030204" pitchFamily="49" charset="0"/>
+              </a:rPr>
+              <a:t>          </a:t>
+            </a:r>
+            <a:r>
+              <a:rPr lang="en-US" sz="1600" b="0">
+                <a:solidFill>
+                  <a:srgbClr val="D2A8FF"/>
+                </a:solidFill>
+                <a:effectLst/>
+                <a:latin typeface="Consolas" panose="020B0609020204030204" pitchFamily="49" charset="0"/>
+              </a:rPr>
+              <a:t>map</a:t>
+            </a:r>
+            <a:r>
+              <a:rPr lang="en-US" sz="1600" b="0">
+                <a:solidFill>
+                  <a:srgbClr val="C9D1D9"/>
+                </a:solidFill>
+                <a:effectLst/>
+                <a:latin typeface="Consolas" panose="020B0609020204030204" pitchFamily="49" charset="0"/>
+              </a:rPr>
+              <a:t>(</a:t>
+            </a:r>
+            <a:r>
+              <a:rPr lang="en-US" sz="1600" b="0">
+                <a:solidFill>
+                  <a:srgbClr val="FFA657"/>
+                </a:solidFill>
+                <a:effectLst/>
+                <a:latin typeface="Consolas" panose="020B0609020204030204" pitchFamily="49" charset="0"/>
+              </a:rPr>
+              <a:t>result</a:t>
+            </a:r>
+            <a:r>
+              <a:rPr lang="en-US" sz="1600" b="0">
+                <a:solidFill>
+                  <a:srgbClr val="C9D1D9"/>
+                </a:solidFill>
+                <a:effectLst/>
+                <a:latin typeface="Consolas" panose="020B0609020204030204" pitchFamily="49" charset="0"/>
+              </a:rPr>
+              <a:t> </a:t>
+            </a:r>
+            <a:r>
+              <a:rPr lang="en-US" sz="1600" b="0">
+                <a:solidFill>
+                  <a:srgbClr val="FF7B72"/>
+                </a:solidFill>
+                <a:effectLst/>
+                <a:latin typeface="Consolas" panose="020B0609020204030204" pitchFamily="49" charset="0"/>
+              </a:rPr>
+              <a:t>=&gt;</a:t>
+            </a:r>
+            <a:r>
+              <a:rPr lang="en-US" sz="1600" b="0">
+                <a:solidFill>
+                  <a:srgbClr val="C9D1D9"/>
+                </a:solidFill>
+                <a:effectLst/>
+                <a:latin typeface="Consolas" panose="020B0609020204030204" pitchFamily="49" charset="0"/>
+              </a:rPr>
+              <a:t> (</a:t>
+            </a:r>
+            <a:r>
+              <a:rPr lang="en-US" sz="1600" b="0">
+                <a:solidFill>
+                  <a:srgbClr val="FFA657"/>
+                </a:solidFill>
+                <a:effectLst/>
+                <a:latin typeface="Consolas" panose="020B0609020204030204" pitchFamily="49" charset="0"/>
+              </a:rPr>
+              <a:t>result</a:t>
+            </a:r>
+            <a:r>
+              <a:rPr lang="en-US" sz="1600" b="0">
+                <a:solidFill>
+                  <a:srgbClr val="C9D1D9"/>
+                </a:solidFill>
+                <a:effectLst/>
+                <a:latin typeface="Consolas" panose="020B0609020204030204" pitchFamily="49" charset="0"/>
+              </a:rPr>
+              <a:t>.data </a:t>
+            </a:r>
+            <a:r>
+              <a:rPr lang="en-US" sz="1600" b="0">
+                <a:solidFill>
+                  <a:srgbClr val="D4D4D4"/>
+                </a:solidFill>
+                <a:effectLst/>
+                <a:latin typeface="Consolas" panose="020B0609020204030204" pitchFamily="49" charset="0"/>
+              </a:rPr>
+              <a:t>?</a:t>
+            </a:r>
+            <a:r>
+              <a:rPr lang="en-US" sz="1600" b="0">
+                <a:solidFill>
+                  <a:srgbClr val="C9D1D9"/>
+                </a:solidFill>
+                <a:effectLst/>
+                <a:latin typeface="Consolas" panose="020B0609020204030204" pitchFamily="49" charset="0"/>
+              </a:rPr>
+              <a:t> </a:t>
+            </a:r>
+            <a:r>
+              <a:rPr lang="en-US" sz="1600" b="0">
+                <a:solidFill>
+                  <a:srgbClr val="569CD6"/>
+                </a:solidFill>
+                <a:effectLst/>
+                <a:latin typeface="Consolas" panose="020B0609020204030204" pitchFamily="49" charset="0"/>
+              </a:rPr>
+              <a:t>null</a:t>
+            </a:r>
+            <a:r>
+              <a:rPr lang="en-US" sz="1600" b="0">
+                <a:solidFill>
+                  <a:srgbClr val="C9D1D9"/>
+                </a:solidFill>
+                <a:effectLst/>
+                <a:latin typeface="Consolas" panose="020B0609020204030204" pitchFamily="49" charset="0"/>
+              </a:rPr>
+              <a:t> </a:t>
+            </a:r>
+            <a:r>
+              <a:rPr lang="en-US" sz="1600" b="0">
+                <a:solidFill>
+                  <a:srgbClr val="D4D4D4"/>
+                </a:solidFill>
+                <a:effectLst/>
+                <a:latin typeface="Consolas" panose="020B0609020204030204" pitchFamily="49" charset="0"/>
+              </a:rPr>
+              <a:t>:</a:t>
+            </a:r>
+            <a:r>
+              <a:rPr lang="en-US" sz="1600" b="0">
+                <a:solidFill>
+                  <a:srgbClr val="C9D1D9"/>
+                </a:solidFill>
+                <a:effectLst/>
+                <a:latin typeface="Consolas" panose="020B0609020204030204" pitchFamily="49" charset="0"/>
+              </a:rPr>
+              <a:t> { nameIsNotUnique</a:t>
+            </a:r>
+            <a:r>
+              <a:rPr lang="en-US" sz="1600" b="0">
+                <a:solidFill>
+                  <a:srgbClr val="9CDCFE"/>
+                </a:solidFill>
+                <a:effectLst/>
+                <a:latin typeface="Consolas" panose="020B0609020204030204" pitchFamily="49" charset="0"/>
+              </a:rPr>
+              <a:t>:</a:t>
+            </a:r>
+            <a:r>
+              <a:rPr lang="en-US" sz="1600" b="0">
+                <a:solidFill>
+                  <a:srgbClr val="C9D1D9"/>
+                </a:solidFill>
+                <a:effectLst/>
+                <a:latin typeface="Consolas" panose="020B0609020204030204" pitchFamily="49" charset="0"/>
+              </a:rPr>
+              <a:t> </a:t>
+            </a:r>
+            <a:r>
+              <a:rPr lang="en-US" sz="1600" b="0">
+                <a:solidFill>
+                  <a:srgbClr val="569CD6"/>
+                </a:solidFill>
+                <a:effectLst/>
+                <a:latin typeface="Consolas" panose="020B0609020204030204" pitchFamily="49" charset="0"/>
+              </a:rPr>
+              <a:t>true</a:t>
+            </a:r>
+            <a:r>
+              <a:rPr lang="en-US" sz="1600" b="0">
+                <a:solidFill>
+                  <a:srgbClr val="C9D1D9"/>
+                </a:solidFill>
+                <a:effectLst/>
+                <a:latin typeface="Consolas" panose="020B0609020204030204" pitchFamily="49" charset="0"/>
+              </a:rPr>
+              <a:t> })),</a:t>
+            </a:r>
+            <a:endParaRPr lang="en-US" sz="1600" b="0">
+              <a:solidFill>
+                <a:srgbClr val="BBBEBF"/>
+              </a:solidFill>
+              <a:effectLst/>
+              <a:latin typeface="Consolas" panose="020B0609020204030204" pitchFamily="49" charset="0"/>
+            </a:endParaRPr>
+          </a:p>
+          <a:p>
+            <a:pPr>
+              <a:buNone/>
+            </a:pPr>
+            <a:r>
+              <a:rPr lang="en-US" sz="1600" b="0">
+                <a:solidFill>
+                  <a:srgbClr val="C9D1D9"/>
+                </a:solidFill>
+                <a:effectLst/>
+                <a:latin typeface="Consolas" panose="020B0609020204030204" pitchFamily="49" charset="0"/>
+              </a:rPr>
+              <a:t>          </a:t>
+            </a:r>
+            <a:r>
+              <a:rPr lang="en-US" sz="1600" b="0">
+                <a:solidFill>
+                  <a:srgbClr val="D2A8FF"/>
+                </a:solidFill>
+                <a:effectLst/>
+                <a:latin typeface="Consolas" panose="020B0609020204030204" pitchFamily="49" charset="0"/>
+              </a:rPr>
+              <a:t>catchError</a:t>
+            </a:r>
+            <a:r>
+              <a:rPr lang="en-US" sz="1600" b="0">
+                <a:solidFill>
+                  <a:srgbClr val="C9D1D9"/>
+                </a:solidFill>
+                <a:effectLst/>
+                <a:latin typeface="Consolas" panose="020B0609020204030204" pitchFamily="49" charset="0"/>
+              </a:rPr>
+              <a:t>(() </a:t>
+            </a:r>
+            <a:r>
+              <a:rPr lang="en-US" sz="1600" b="0">
+                <a:solidFill>
+                  <a:srgbClr val="FF7B72"/>
+                </a:solidFill>
+                <a:effectLst/>
+                <a:latin typeface="Consolas" panose="020B0609020204030204" pitchFamily="49" charset="0"/>
+              </a:rPr>
+              <a:t>=&gt;</a:t>
+            </a:r>
+            <a:r>
+              <a:rPr lang="en-US" sz="1600" b="0">
+                <a:solidFill>
+                  <a:srgbClr val="C9D1D9"/>
+                </a:solidFill>
+                <a:effectLst/>
+                <a:latin typeface="Consolas" panose="020B0609020204030204" pitchFamily="49" charset="0"/>
+              </a:rPr>
+              <a:t> </a:t>
+            </a:r>
+            <a:r>
+              <a:rPr lang="en-US" sz="1600" b="0">
+                <a:solidFill>
+                  <a:srgbClr val="D2A8FF"/>
+                </a:solidFill>
+                <a:effectLst/>
+                <a:latin typeface="Consolas" panose="020B0609020204030204" pitchFamily="49" charset="0"/>
+              </a:rPr>
+              <a:t>of</a:t>
+            </a:r>
+            <a:r>
+              <a:rPr lang="en-US" sz="1600" b="0">
+                <a:solidFill>
+                  <a:srgbClr val="C9D1D9"/>
+                </a:solidFill>
+                <a:effectLst/>
+                <a:latin typeface="Consolas" panose="020B0609020204030204" pitchFamily="49" charset="0"/>
+              </a:rPr>
+              <a:t>(</a:t>
+            </a:r>
+            <a:r>
+              <a:rPr lang="en-US" sz="1600" b="0">
+                <a:solidFill>
+                  <a:srgbClr val="569CD6"/>
+                </a:solidFill>
+                <a:effectLst/>
+                <a:latin typeface="Consolas" panose="020B0609020204030204" pitchFamily="49" charset="0"/>
+              </a:rPr>
+              <a:t>null</a:t>
+            </a:r>
+            <a:r>
+              <a:rPr lang="en-US" sz="1600" b="0">
+                <a:solidFill>
+                  <a:srgbClr val="C9D1D9"/>
+                </a:solidFill>
+                <a:effectLst/>
+                <a:latin typeface="Consolas" panose="020B0609020204030204" pitchFamily="49" charset="0"/>
+              </a:rPr>
+              <a:t>))</a:t>
+            </a:r>
+            <a:endParaRPr lang="en-US" sz="1600" b="0">
+              <a:solidFill>
+                <a:srgbClr val="BBBEBF"/>
+              </a:solidFill>
+              <a:effectLst/>
+              <a:latin typeface="Consolas" panose="020B0609020204030204" pitchFamily="49" charset="0"/>
+            </a:endParaRPr>
+          </a:p>
+          <a:p>
+            <a:pPr>
+              <a:buNone/>
+            </a:pPr>
+            <a:r>
+              <a:rPr lang="en-US" sz="1600" b="0">
+                <a:solidFill>
+                  <a:srgbClr val="C9D1D9"/>
+                </a:solidFill>
+                <a:effectLst/>
+                <a:latin typeface="Consolas" panose="020B0609020204030204" pitchFamily="49" charset="0"/>
+              </a:rPr>
+              <a:t>        );</a:t>
+            </a:r>
+            <a:endParaRPr lang="en-US" sz="1600" b="0">
+              <a:solidFill>
+                <a:srgbClr val="BBBEBF"/>
+              </a:solidFill>
+              <a:effectLst/>
+              <a:latin typeface="Consolas" panose="020B0609020204030204" pitchFamily="49" charset="0"/>
+            </a:endParaRPr>
+          </a:p>
+          <a:p>
+            <a:pPr>
+              <a:buNone/>
+            </a:pPr>
+            <a:r>
+              <a:rPr lang="en-US" sz="1600" b="0">
+                <a:solidFill>
+                  <a:srgbClr val="C9D1D9"/>
+                </a:solidFill>
+                <a:effectLst/>
+                <a:latin typeface="Consolas" panose="020B0609020204030204" pitchFamily="49" charset="0"/>
+              </a:rPr>
+              <a:t>    };</a:t>
+            </a:r>
+            <a:endParaRPr lang="en-US" sz="1600" b="0">
+              <a:solidFill>
+                <a:srgbClr val="BBBEBF"/>
+              </a:solidFill>
+              <a:effectLst/>
+              <a:latin typeface="Consolas" panose="020B0609020204030204" pitchFamily="49" charset="0"/>
+            </a:endParaRPr>
+          </a:p>
+          <a:p>
+            <a:pPr>
+              <a:buNone/>
+            </a:pPr>
+            <a:r>
+              <a:rPr lang="en-US" sz="1600" b="0">
+                <a:solidFill>
+                  <a:srgbClr val="C9D1D9"/>
+                </a:solidFill>
+                <a:effectLst/>
+                <a:latin typeface="Consolas" panose="020B0609020204030204" pitchFamily="49" charset="0"/>
+              </a:rPr>
+              <a:t>  }</a:t>
+            </a:r>
+            <a:endParaRPr lang="en-US" sz="1600" b="0">
+              <a:solidFill>
+                <a:srgbClr val="BBBEBF"/>
+              </a:solidFill>
+              <a:effectLst/>
+              <a:latin typeface="Consolas" panose="020B0609020204030204" pitchFamily="49" charset="0"/>
+            </a:endParaRPr>
           </a:p>
         </p:txBody>
       </p:sp>
     </p:spTree>
     <p:extLst>
       <p:ext uri="{BB962C8B-B14F-4D97-AF65-F5344CB8AC3E}">
-        <p14:creationId xmlns:p14="http://schemas.microsoft.com/office/powerpoint/2010/main" val="949246702"/>
+        <p14:creationId xmlns:p14="http://schemas.microsoft.com/office/powerpoint/2010/main" val="4152091696"/>
       </p:ext>
     </p:extLst>
   </p:cSld>
@@ -27590,6 +29344,461 @@
   <p:cSld>
     <p:spTree>
       <p:nvGrpSpPr>
+        <p:cNvPr id="1" name="">
+          <a:extLst>
+            <a:ext uri="{FF2B5EF4-FFF2-40B4-BE49-F238E27FC236}">
+              <a16:creationId xmlns:a16="http://schemas.microsoft.com/office/drawing/2014/main" id="{36FA36C6-02CF-8AA3-982A-D81C39277E47}"/>
+            </a:ext>
+          </a:extLst>
+        </p:cNvPr>
+        <p:cNvGrpSpPr/>
+        <p:nvPr/>
+      </p:nvGrpSpPr>
+      <p:grpSpPr>
+        <a:xfrm>
+          <a:off x="0" y="0"/>
+          <a:ext cx="0" cy="0"/>
+          <a:chOff x="0" y="0"/>
+          <a:chExt cx="0" cy="0"/>
+        </a:xfrm>
+      </p:grpSpPr>
+      <p:sp>
+        <p:nvSpPr>
+          <p:cNvPr id="2" name="Title 1">
+            <a:extLst>
+              <a:ext uri="{FF2B5EF4-FFF2-40B4-BE49-F238E27FC236}">
+                <a16:creationId xmlns:a16="http://schemas.microsoft.com/office/drawing/2014/main" id="{77380128-2B4A-5795-A0C4-1088037BBD69}"/>
+              </a:ext>
+            </a:extLst>
+          </p:cNvPr>
+          <p:cNvSpPr>
+            <a:spLocks noGrp="1"/>
+          </p:cNvSpPr>
+          <p:nvPr>
+            <p:ph type="title"/>
+          </p:nvPr>
+        </p:nvSpPr>
+        <p:spPr>
+          <a:xfrm>
+            <a:off x="341644" y="609599"/>
+            <a:ext cx="11465169" cy="5298831"/>
+          </a:xfrm>
+        </p:spPr>
+        <p:txBody>
+          <a:bodyPr>
+            <a:normAutofit/>
+          </a:bodyPr>
+          <a:lstStyle/>
+          <a:p>
+            <a:r>
+              <a:rPr lang="en-US" sz="6000" b="1">
+                <a:solidFill>
+                  <a:srgbClr val="FF0000"/>
+                </a:solidFill>
+              </a:rPr>
+              <a:t>End Validation</a:t>
+            </a:r>
+          </a:p>
+        </p:txBody>
+      </p:sp>
+    </p:spTree>
+    <p:extLst>
+      <p:ext uri="{BB962C8B-B14F-4D97-AF65-F5344CB8AC3E}">
+        <p14:creationId xmlns:p14="http://schemas.microsoft.com/office/powerpoint/2010/main" val="3837535713"/>
+      </p:ext>
+    </p:extLst>
+  </p:cSld>
+  <p:clrMapOvr>
+    <a:masterClrMapping/>
+  </p:clrMapOvr>
+</p:sld>
+</file>
+
+<file path=ppt/slides/slide71.xml><?xml version="1.0" encoding="utf-8"?>
+<p:sld xmlns:a="http://schemas.openxmlformats.org/drawingml/2006/main" xmlns:r="http://schemas.openxmlformats.org/officeDocument/2006/relationships" xmlns:p="http://schemas.openxmlformats.org/presentationml/2006/main">
+  <p:cSld>
+    <p:spTree>
+      <p:nvGrpSpPr>
+        <p:cNvPr id="1" name=""/>
+        <p:cNvGrpSpPr/>
+        <p:nvPr/>
+      </p:nvGrpSpPr>
+      <p:grpSpPr>
+        <a:xfrm>
+          <a:off x="0" y="0"/>
+          <a:ext cx="0" cy="0"/>
+          <a:chOff x="0" y="0"/>
+          <a:chExt cx="0" cy="0"/>
+        </a:xfrm>
+      </p:grpSpPr>
+      <p:sp>
+        <p:nvSpPr>
+          <p:cNvPr id="2" name="Title 1">
+            <a:extLst>
+              <a:ext uri="{FF2B5EF4-FFF2-40B4-BE49-F238E27FC236}">
+                <a16:creationId xmlns:a16="http://schemas.microsoft.com/office/drawing/2014/main" id="{40247D1C-3D2B-71F1-EB50-DC0BB38BD1EA}"/>
+              </a:ext>
+            </a:extLst>
+          </p:cNvPr>
+          <p:cNvSpPr>
+            <a:spLocks noGrp="1"/>
+          </p:cNvSpPr>
+          <p:nvPr>
+            <p:ph type="title"/>
+          </p:nvPr>
+        </p:nvSpPr>
+        <p:spPr>
+          <a:xfrm>
+            <a:off x="913795" y="0"/>
+            <a:ext cx="10353762" cy="566057"/>
+          </a:xfrm>
+        </p:spPr>
+        <p:txBody>
+          <a:bodyPr>
+            <a:normAutofit fontScale="90000"/>
+          </a:bodyPr>
+          <a:lstStyle/>
+          <a:p>
+            <a:r>
+              <a:rPr lang="en-US" b="1">
+                <a:solidFill>
+                  <a:srgbClr val="FF0000"/>
+                </a:solidFill>
+              </a:rPr>
+              <a:t>New Types </a:t>
+            </a:r>
+          </a:p>
+        </p:txBody>
+      </p:sp>
+      <p:sp>
+        <p:nvSpPr>
+          <p:cNvPr id="3" name="Content Placeholder 2">
+            <a:extLst>
+              <a:ext uri="{FF2B5EF4-FFF2-40B4-BE49-F238E27FC236}">
+                <a16:creationId xmlns:a16="http://schemas.microsoft.com/office/drawing/2014/main" id="{C97632D9-4FCE-E448-1365-D16A50CCAF8A}"/>
+              </a:ext>
+            </a:extLst>
+          </p:cNvPr>
+          <p:cNvSpPr>
+            <a:spLocks noGrp="1"/>
+          </p:cNvSpPr>
+          <p:nvPr>
+            <p:ph idx="1"/>
+          </p:nvPr>
+        </p:nvSpPr>
+        <p:spPr>
+          <a:xfrm>
+            <a:off x="170822" y="566056"/>
+            <a:ext cx="11796765" cy="6291943"/>
+          </a:xfrm>
+        </p:spPr>
+        <p:txBody>
+          <a:bodyPr/>
+          <a:lstStyle/>
+          <a:p>
+            <a:r>
+              <a:rPr lang="en-US" b="1">
+                <a:solidFill>
+                  <a:srgbClr val="00B0F0"/>
+                </a:solidFill>
+              </a:rPr>
+              <a:t>HTMLInputElement</a:t>
+            </a:r>
+          </a:p>
+          <a:p>
+            <a:pPr lvl="1"/>
+            <a:r>
+              <a:rPr lang="en-US"/>
+              <a:t>let target = e.target as HTMLInputElement</a:t>
+            </a:r>
+          </a:p>
+          <a:p>
+            <a:r>
+              <a:rPr lang="en-US" b="1">
+                <a:solidFill>
+                  <a:srgbClr val="00B0F0"/>
+                </a:solidFill>
+              </a:rPr>
+              <a:t>KeyboardEvent</a:t>
+            </a:r>
+          </a:p>
+          <a:p>
+            <a:pPr lvl="1"/>
+            <a:r>
+              <a:rPr lang="en-US"/>
+              <a:t>If(</a:t>
+            </a:r>
+            <a:r>
+              <a:rPr lang="en-US">
+                <a:solidFill>
+                  <a:srgbClr val="FFC000"/>
+                </a:solidFill>
+                <a:effectLst/>
+              </a:rPr>
+              <a:t>event</a:t>
+            </a:r>
+            <a:r>
+              <a:rPr lang="en-US">
+                <a:effectLst/>
+              </a:rPr>
+              <a:t>.key=== "</a:t>
+            </a:r>
+            <a:r>
+              <a:rPr lang="en-US">
+                <a:solidFill>
+                  <a:schemeClr val="accent1">
+                    <a:lumMod val="40000"/>
+                    <a:lumOff val="60000"/>
+                  </a:schemeClr>
+                </a:solidFill>
+                <a:effectLst/>
+              </a:rPr>
+              <a:t>Enter</a:t>
+            </a:r>
+            <a:r>
+              <a:rPr lang="en-US">
+                <a:effectLst/>
+              </a:rPr>
+              <a:t>"</a:t>
+            </a:r>
+            <a:r>
+              <a:rPr lang="en-US"/>
+              <a:t>) {}</a:t>
+            </a:r>
+          </a:p>
+          <a:p>
+            <a:r>
+              <a:rPr lang="en-US" b="1">
+                <a:solidFill>
+                  <a:srgbClr val="00B0F0"/>
+                </a:solidFill>
+              </a:rPr>
+              <a:t>TemplateRef&lt;T&gt;</a:t>
+            </a:r>
+          </a:p>
+          <a:p>
+            <a:pPr lvl="1"/>
+            <a:r>
+              <a:rPr lang="en-US"/>
+              <a:t>This is the official Angular type for any </a:t>
+            </a:r>
+            <a:r>
+              <a:rPr lang="en-US" b="1">
+                <a:solidFill>
+                  <a:srgbClr val="00B0F0"/>
+                </a:solidFill>
+              </a:rPr>
+              <a:t>&lt;ng-template&gt;</a:t>
+            </a:r>
+            <a:r>
+              <a:rPr lang="en-US"/>
+              <a:t> reference</a:t>
+            </a:r>
+          </a:p>
+          <a:p>
+            <a:r>
+              <a:rPr lang="en-US" b="1">
+                <a:solidFill>
+                  <a:srgbClr val="00B0F0"/>
+                </a:solidFill>
+              </a:rPr>
+              <a:t>ElementRef&lt;T&gt;</a:t>
+            </a:r>
+          </a:p>
+          <a:p>
+            <a:pPr lvl="1"/>
+            <a:r>
+              <a:rPr lang="en-US"/>
+              <a:t>is a class that gives you </a:t>
+            </a:r>
+            <a:r>
+              <a:rPr lang="en-US" b="1"/>
+              <a:t>direct access to a DOM element</a:t>
+            </a:r>
+            <a:r>
+              <a:rPr lang="en-US"/>
+              <a:t> inside your component</a:t>
+            </a:r>
+            <a:endParaRPr lang="en-US">
+              <a:effectLst/>
+            </a:endParaRPr>
+          </a:p>
+          <a:p>
+            <a:pPr lvl="1"/>
+            <a:r>
+              <a:rPr lang="en-US"/>
+              <a:t>usually used together with </a:t>
+            </a:r>
+            <a:r>
+              <a:rPr lang="en-US" b="1"/>
+              <a:t>@ViewChild</a:t>
+            </a:r>
+            <a:r>
+              <a:rPr lang="en-US"/>
+              <a:t>.</a:t>
+            </a:r>
+            <a:endParaRPr lang="en-US">
+              <a:effectLst/>
+            </a:endParaRPr>
+          </a:p>
+          <a:p>
+            <a:pPr lvl="1"/>
+            <a:r>
+              <a:rPr lang="en-US">
+                <a:effectLst/>
+              </a:rPr>
+              <a:t>Ex: </a:t>
+            </a:r>
+            <a:r>
+              <a:rPr lang="en-US" b="1">
+                <a:solidFill>
+                  <a:schemeClr val="tx1"/>
+                </a:solidFill>
+                <a:effectLst/>
+              </a:rPr>
+              <a:t>@</a:t>
+            </a:r>
+            <a:r>
+              <a:rPr lang="en-US" b="1">
+                <a:solidFill>
+                  <a:srgbClr val="FF0000"/>
+                </a:solidFill>
+                <a:effectLst/>
+              </a:rPr>
+              <a:t>ViewChild</a:t>
+            </a:r>
+            <a:r>
+              <a:rPr lang="en-US">
+                <a:effectLst/>
+              </a:rPr>
+              <a:t>(</a:t>
+            </a:r>
+            <a:r>
+              <a:rPr lang="en-US" b="1">
+                <a:effectLst/>
+              </a:rPr>
+              <a:t>'</a:t>
+            </a:r>
+            <a:r>
+              <a:rPr lang="en-US" b="1">
+                <a:solidFill>
+                  <a:srgbClr val="FFC000"/>
+                </a:solidFill>
+                <a:effectLst/>
+              </a:rPr>
+              <a:t>ColorHexCodeInput</a:t>
+            </a:r>
+            <a:r>
+              <a:rPr lang="en-US">
+                <a:effectLst/>
+              </a:rPr>
+              <a:t>') colorHexCodeInput!: </a:t>
+            </a:r>
+            <a:r>
+              <a:rPr lang="en-US" b="1">
+                <a:solidFill>
+                  <a:srgbClr val="00B0F0"/>
+                </a:solidFill>
+                <a:effectLst/>
+              </a:rPr>
+              <a:t>ElementRef</a:t>
+            </a:r>
+            <a:r>
+              <a:rPr lang="en-US">
+                <a:solidFill>
+                  <a:srgbClr val="0070C0"/>
+                </a:solidFill>
+                <a:effectLst/>
+              </a:rPr>
+              <a:t>&lt;</a:t>
+            </a:r>
+            <a:r>
+              <a:rPr lang="en-US" b="1">
+                <a:solidFill>
+                  <a:srgbClr val="00B0F0"/>
+                </a:solidFill>
+                <a:effectLst/>
+              </a:rPr>
+              <a:t>HTMLInputElement</a:t>
+            </a:r>
+            <a:r>
+              <a:rPr lang="en-US">
+                <a:solidFill>
+                  <a:srgbClr val="7030A0"/>
+                </a:solidFill>
+                <a:effectLst/>
+              </a:rPr>
+              <a:t>&gt;</a:t>
+            </a:r>
+            <a:r>
+              <a:rPr lang="en-US">
+                <a:effectLst/>
+              </a:rPr>
+              <a:t>;</a:t>
+            </a:r>
+          </a:p>
+          <a:p>
+            <a:r>
+              <a:rPr lang="en-US" b="1">
+                <a:solidFill>
+                  <a:srgbClr val="00B0F0"/>
+                </a:solidFill>
+                <a:effectLst/>
+              </a:rPr>
+              <a:t>NgbModalRef</a:t>
+            </a:r>
+          </a:p>
+          <a:p>
+            <a:pPr lvl="1"/>
+            <a:r>
+              <a:rPr lang="en-US">
+                <a:effectLst/>
+              </a:rPr>
+              <a:t>Modal </a:t>
+            </a:r>
+          </a:p>
+          <a:p>
+            <a:r>
+              <a:rPr lang="en-US" b="1">
+                <a:solidFill>
+                  <a:srgbClr val="00B0F0"/>
+                </a:solidFill>
+                <a:effectLst/>
+              </a:rPr>
+              <a:t>NgbActiveModal</a:t>
+            </a:r>
+          </a:p>
+          <a:p>
+            <a:r>
+              <a:rPr lang="en-US" b="1">
+                <a:solidFill>
+                  <a:srgbClr val="00B0F0"/>
+                </a:solidFill>
+                <a:effectLst/>
+              </a:rPr>
+              <a:t>NgbModal</a:t>
+            </a:r>
+          </a:p>
+        </p:txBody>
+      </p:sp>
+    </p:spTree>
+    <p:extLst>
+      <p:ext uri="{BB962C8B-B14F-4D97-AF65-F5344CB8AC3E}">
+        <p14:creationId xmlns:p14="http://schemas.microsoft.com/office/powerpoint/2010/main" val="949246702"/>
+      </p:ext>
+    </p:extLst>
+  </p:cSld>
+  <p:clrMapOvr>
+    <a:masterClrMapping/>
+  </p:clrMapOvr>
+</p:sld>
+</file>
+
+<file path=ppt/slides/slide72.xml><?xml version="1.0" encoding="utf-8"?>
+<p:sld xmlns:a="http://schemas.openxmlformats.org/drawingml/2006/main" xmlns:r="http://schemas.openxmlformats.org/officeDocument/2006/relationships" xmlns:p="http://schemas.openxmlformats.org/presentationml/2006/main">
+  <p:cSld>
+    <p:spTree>
+      <p:nvGrpSpPr>
         <p:cNvPr id="1" name=""/>
         <p:cNvGrpSpPr/>
         <p:nvPr/>
@@ -28002,7 +30211,7 @@
 </p:sld>
 </file>
 
-<file path=ppt/slides/slide71.xml><?xml version="1.0" encoding="utf-8"?>
+<file path=ppt/slides/slide73.xml><?xml version="1.0" encoding="utf-8"?>
 <p:sld xmlns:a="http://schemas.openxmlformats.org/drawingml/2006/main" xmlns:r="http://schemas.openxmlformats.org/officeDocument/2006/relationships" xmlns:p="http://schemas.openxmlformats.org/presentationml/2006/main">
   <p:cSld>
     <p:spTree>
@@ -28224,7 +30433,7 @@
 </p:sld>
 </file>
 
-<file path=ppt/slides/slide72.xml><?xml version="1.0" encoding="utf-8"?>
+<file path=ppt/slides/slide74.xml><?xml version="1.0" encoding="utf-8"?>
 <p:sld xmlns:a="http://schemas.openxmlformats.org/drawingml/2006/main" xmlns:r="http://schemas.openxmlformats.org/officeDocument/2006/relationships" xmlns:p="http://schemas.openxmlformats.org/presentationml/2006/main">
   <p:cSld>
     <p:spTree>
@@ -28500,7 +30709,7 @@
 </p:sld>
 </file>
 
-<file path=ppt/slides/slide73.xml><?xml version="1.0" encoding="utf-8"?>
+<file path=ppt/slides/slide75.xml><?xml version="1.0" encoding="utf-8"?>
 <p:sld xmlns:a="http://schemas.openxmlformats.org/drawingml/2006/main" xmlns:r="http://schemas.openxmlformats.org/officeDocument/2006/relationships" xmlns:p="http://schemas.openxmlformats.org/presentationml/2006/main">
   <p:cSld>
     <p:spTree>
@@ -28755,7 +30964,7 @@
 </p:sld>
 </file>
 
-<file path=ppt/slides/slide74.xml><?xml version="1.0" encoding="utf-8"?>
+<file path=ppt/slides/slide76.xml><?xml version="1.0" encoding="utf-8"?>
 <p:sld xmlns:a="http://schemas.openxmlformats.org/drawingml/2006/main" xmlns:r="http://schemas.openxmlformats.org/officeDocument/2006/relationships" xmlns:p="http://schemas.openxmlformats.org/presentationml/2006/main">
   <p:cSld>
     <p:spTree>
@@ -29083,7 +31292,7 @@
 </p:sld>
 </file>
 
-<file path=ppt/slides/slide75.xml><?xml version="1.0" encoding="utf-8"?>
+<file path=ppt/slides/slide77.xml><?xml version="1.0" encoding="utf-8"?>
 <p:sld xmlns:a="http://schemas.openxmlformats.org/drawingml/2006/main" xmlns:r="http://schemas.openxmlformats.org/officeDocument/2006/relationships" xmlns:p="http://schemas.openxmlformats.org/presentationml/2006/main">
   <p:cSld>
     <p:spTree>
@@ -29451,7 +31660,7 @@
 </p:sld>
 </file>
 
-<file path=ppt/slides/slide76.xml><?xml version="1.0" encoding="utf-8"?>
+<file path=ppt/slides/slide78.xml><?xml version="1.0" encoding="utf-8"?>
 <p:sld xmlns:a="http://schemas.openxmlformats.org/drawingml/2006/main" xmlns:r="http://schemas.openxmlformats.org/officeDocument/2006/relationships" xmlns:p="http://schemas.openxmlformats.org/presentationml/2006/main">
   <p:cSld>
     <p:spTree>
@@ -29665,7 +31874,7 @@
 </p:sld>
 </file>
 
-<file path=ppt/slides/slide77.xml><?xml version="1.0" encoding="utf-8"?>
+<file path=ppt/slides/slide79.xml><?xml version="1.0" encoding="utf-8"?>
 <p:sld xmlns:a="http://schemas.openxmlformats.org/drawingml/2006/main" xmlns:r="http://schemas.openxmlformats.org/officeDocument/2006/relationships" xmlns:p="http://schemas.openxmlformats.org/presentationml/2006/main">
   <p:cSld>
     <p:spTree>
@@ -29793,355 +32002,6 @@
     <p:extLst>
       <p:ext uri="{BB962C8B-B14F-4D97-AF65-F5344CB8AC3E}">
         <p14:creationId xmlns:p14="http://schemas.microsoft.com/office/powerpoint/2010/main" val="4133204656"/>
-      </p:ext>
-    </p:extLst>
-  </p:cSld>
-  <p:clrMapOvr>
-    <a:masterClrMapping/>
-  </p:clrMapOvr>
-</p:sld>
-</file>
-
-<file path=ppt/slides/slide78.xml><?xml version="1.0" encoding="utf-8"?>
-<p:sld xmlns:a="http://schemas.openxmlformats.org/drawingml/2006/main" xmlns:r="http://schemas.openxmlformats.org/officeDocument/2006/relationships" xmlns:p="http://schemas.openxmlformats.org/presentationml/2006/main">
-  <p:cSld>
-    <p:spTree>
-      <p:nvGrpSpPr>
-        <p:cNvPr id="1" name="">
-          <a:extLst>
-            <a:ext uri="{FF2B5EF4-FFF2-40B4-BE49-F238E27FC236}">
-              <a16:creationId xmlns:a16="http://schemas.microsoft.com/office/drawing/2014/main" id="{5C99F826-99F3-E16F-3175-E8761712C6D3}"/>
-            </a:ext>
-          </a:extLst>
-        </p:cNvPr>
-        <p:cNvGrpSpPr/>
-        <p:nvPr/>
-      </p:nvGrpSpPr>
-      <p:grpSpPr>
-        <a:xfrm>
-          <a:off x="0" y="0"/>
-          <a:ext cx="0" cy="0"/>
-          <a:chOff x="0" y="0"/>
-          <a:chExt cx="0" cy="0"/>
-        </a:xfrm>
-      </p:grpSpPr>
-      <p:sp>
-        <p:nvSpPr>
-          <p:cNvPr id="2" name="Title 1">
-            <a:extLst>
-              <a:ext uri="{FF2B5EF4-FFF2-40B4-BE49-F238E27FC236}">
-                <a16:creationId xmlns:a16="http://schemas.microsoft.com/office/drawing/2014/main" id="{A0BDE2AC-220C-CDAC-98EA-694781CE7680}"/>
-              </a:ext>
-            </a:extLst>
-          </p:cNvPr>
-          <p:cNvSpPr>
-            <a:spLocks noGrp="1"/>
-          </p:cNvSpPr>
-          <p:nvPr>
-            <p:ph type="title"/>
-          </p:nvPr>
-        </p:nvSpPr>
-        <p:spPr>
-          <a:xfrm>
-            <a:off x="913795" y="96350"/>
-            <a:ext cx="10353762" cy="627131"/>
-          </a:xfrm>
-        </p:spPr>
-        <p:txBody>
-          <a:bodyPr>
-            <a:normAutofit fontScale="90000"/>
-          </a:bodyPr>
-          <a:lstStyle/>
-          <a:p>
-            <a:r>
-              <a:rPr lang="en-US"/>
-              <a:t>HttpErrorResponse</a:t>
-            </a:r>
-          </a:p>
-        </p:txBody>
-      </p:sp>
-      <p:sp>
-        <p:nvSpPr>
-          <p:cNvPr id="3" name="Content Placeholder 2">
-            <a:extLst>
-              <a:ext uri="{FF2B5EF4-FFF2-40B4-BE49-F238E27FC236}">
-                <a16:creationId xmlns:a16="http://schemas.microsoft.com/office/drawing/2014/main" id="{7FBEF8F5-DF2D-7BFF-3958-CDA0AC17BD12}"/>
-              </a:ext>
-            </a:extLst>
-          </p:cNvPr>
-          <p:cNvSpPr>
-            <a:spLocks noGrp="1"/>
-          </p:cNvSpPr>
-          <p:nvPr>
-            <p:ph idx="1"/>
-          </p:nvPr>
-        </p:nvSpPr>
-        <p:spPr>
-          <a:xfrm>
-            <a:off x="200966" y="723481"/>
-            <a:ext cx="11786717" cy="6038169"/>
-          </a:xfrm>
-        </p:spPr>
-        <p:txBody>
-          <a:bodyPr/>
-          <a:lstStyle/>
-          <a:p>
-            <a:r>
-              <a:rPr lang="en-US"/>
-              <a:t>class for representing </a:t>
-            </a:r>
-            <a:r>
-              <a:rPr lang="en-US" b="1"/>
-              <a:t>failed HTTP requests</a:t>
-            </a:r>
-            <a:r>
-              <a:rPr lang="en-US"/>
-              <a:t> made through HttpClient</a:t>
-            </a:r>
-          </a:p>
-          <a:p>
-            <a:r>
-              <a:rPr lang="en-US"/>
-              <a:t>Whenever an HTTP request fails, Angular does </a:t>
-            </a:r>
-            <a:r>
-              <a:rPr lang="en-US" b="1"/>
-              <a:t>not</a:t>
-            </a:r>
-            <a:r>
-              <a:rPr lang="en-US"/>
-              <a:t> return a normal HttpResponse&lt;T&gt;. Instead, it emits an HttpErrorResponse</a:t>
-            </a:r>
-          </a:p>
-          <a:p>
-            <a:r>
-              <a:rPr lang="en-US"/>
-              <a:t>Example with subscribe</a:t>
-            </a:r>
-            <a:r>
-              <a:rPr lang="en-US">
-                <a:sym typeface="Wingdings" panose="05000000000000000000" pitchFamily="2" charset="2"/>
-              </a:rPr>
-              <a:t> error: (error: </a:t>
-            </a:r>
-            <a:r>
-              <a:rPr lang="en-US">
-                <a:solidFill>
-                  <a:srgbClr val="FFFF00"/>
-                </a:solidFill>
-              </a:rPr>
-              <a:t>HttpErrorResponse</a:t>
-            </a:r>
-            <a:r>
-              <a:rPr lang="en-US">
-                <a:sym typeface="Wingdings" panose="05000000000000000000" pitchFamily="2" charset="2"/>
-              </a:rPr>
-              <a:t>)=&gt;{}</a:t>
-            </a:r>
-          </a:p>
-          <a:p>
-            <a:r>
-              <a:rPr lang="en-US" b="1">
-                <a:solidFill>
-                  <a:srgbClr val="FFFF00"/>
-                </a:solidFill>
-              </a:rPr>
-              <a:t>HttpErrorResponse properties</a:t>
-            </a:r>
-          </a:p>
-          <a:p>
-            <a:pPr lvl="1"/>
-            <a:r>
-              <a:rPr lang="en-US"/>
-              <a:t>status: </a:t>
-            </a:r>
-            <a:r>
-              <a:rPr lang="en-US">
-                <a:effectLst/>
-              </a:rPr>
-              <a:t>HttpStatusCode (enum)</a:t>
-            </a:r>
-          </a:p>
-          <a:p>
-            <a:pPr lvl="1"/>
-            <a:r>
-              <a:rPr lang="en-US"/>
-              <a:t>statusText</a:t>
-            </a:r>
-          </a:p>
-          <a:p>
-            <a:pPr lvl="1"/>
-            <a:r>
-              <a:rPr lang="en-US"/>
-              <a:t>url</a:t>
-            </a:r>
-          </a:p>
-          <a:p>
-            <a:pPr lvl="1"/>
-            <a:r>
-              <a:rPr lang="en-US"/>
-              <a:t>error: Contains the actual error returned by the backend.</a:t>
-            </a:r>
-          </a:p>
-          <a:p>
-            <a:pPr lvl="1"/>
-            <a:r>
-              <a:rPr lang="en-US"/>
-              <a:t>ok: boolean</a:t>
-            </a:r>
-          </a:p>
-          <a:p>
-            <a:pPr lvl="1"/>
-            <a:endParaRPr lang="en-US"/>
-          </a:p>
-          <a:p>
-            <a:pPr lvl="1"/>
-            <a:endParaRPr lang="en-US" b="1">
-              <a:solidFill>
-                <a:srgbClr val="FFFF00"/>
-              </a:solidFill>
-            </a:endParaRPr>
-          </a:p>
-          <a:p>
-            <a:pPr lvl="1"/>
-            <a:endParaRPr lang="en-US" b="1"/>
-          </a:p>
-        </p:txBody>
-      </p:sp>
-    </p:spTree>
-    <p:extLst>
-      <p:ext uri="{BB962C8B-B14F-4D97-AF65-F5344CB8AC3E}">
-        <p14:creationId xmlns:p14="http://schemas.microsoft.com/office/powerpoint/2010/main" val="742283751"/>
-      </p:ext>
-    </p:extLst>
-  </p:cSld>
-  <p:clrMapOvr>
-    <a:masterClrMapping/>
-  </p:clrMapOvr>
-</p:sld>
-</file>
-
-<file path=ppt/slides/slide79.xml><?xml version="1.0" encoding="utf-8"?>
-<p:sld xmlns:a="http://schemas.openxmlformats.org/drawingml/2006/main" xmlns:r="http://schemas.openxmlformats.org/officeDocument/2006/relationships" xmlns:p="http://schemas.openxmlformats.org/presentationml/2006/main">
-  <p:cSld>
-    <p:spTree>
-      <p:nvGrpSpPr>
-        <p:cNvPr id="1" name=""/>
-        <p:cNvGrpSpPr/>
-        <p:nvPr/>
-      </p:nvGrpSpPr>
-      <p:grpSpPr>
-        <a:xfrm>
-          <a:off x="0" y="0"/>
-          <a:ext cx="0" cy="0"/>
-          <a:chOff x="0" y="0"/>
-          <a:chExt cx="0" cy="0"/>
-        </a:xfrm>
-      </p:grpSpPr>
-      <p:sp>
-        <p:nvSpPr>
-          <p:cNvPr id="2" name="Title 1">
-            <a:extLst>
-              <a:ext uri="{FF2B5EF4-FFF2-40B4-BE49-F238E27FC236}">
-                <a16:creationId xmlns:a16="http://schemas.microsoft.com/office/drawing/2014/main" id="{6E1B6515-6A24-FD8A-2605-BDE018FD4050}"/>
-              </a:ext>
-            </a:extLst>
-          </p:cNvPr>
-          <p:cNvSpPr>
-            <a:spLocks noGrp="1"/>
-          </p:cNvSpPr>
-          <p:nvPr>
-            <p:ph type="title"/>
-          </p:nvPr>
-        </p:nvSpPr>
-        <p:spPr>
-          <a:xfrm>
-            <a:off x="919119" y="0"/>
-            <a:ext cx="10353762" cy="612949"/>
-          </a:xfrm>
-        </p:spPr>
-        <p:txBody>
-          <a:bodyPr>
-            <a:normAutofit fontScale="90000"/>
-          </a:bodyPr>
-          <a:lstStyle/>
-          <a:p>
-            <a:r>
-              <a:rPr lang="en-US" b="1">
-                <a:solidFill>
-                  <a:srgbClr val="FF0000"/>
-                </a:solidFill>
-              </a:rPr>
-              <a:t>ng-container</a:t>
-            </a:r>
-          </a:p>
-        </p:txBody>
-      </p:sp>
-      <p:sp>
-        <p:nvSpPr>
-          <p:cNvPr id="3" name="Content Placeholder 2">
-            <a:extLst>
-              <a:ext uri="{FF2B5EF4-FFF2-40B4-BE49-F238E27FC236}">
-                <a16:creationId xmlns:a16="http://schemas.microsoft.com/office/drawing/2014/main" id="{98BCC1C4-4EA0-D7F6-B0E1-6158BFC9ED4D}"/>
-              </a:ext>
-            </a:extLst>
-          </p:cNvPr>
-          <p:cNvSpPr>
-            <a:spLocks noGrp="1"/>
-          </p:cNvSpPr>
-          <p:nvPr>
-            <p:ph idx="1"/>
-          </p:nvPr>
-        </p:nvSpPr>
-        <p:spPr>
-          <a:xfrm>
-            <a:off x="190918" y="612949"/>
-            <a:ext cx="11816861" cy="6018963"/>
-          </a:xfrm>
-        </p:spPr>
-        <p:txBody>
-          <a:bodyPr/>
-          <a:lstStyle/>
-          <a:p>
-            <a:r>
-              <a:rPr lang="en-US" b="1">
-                <a:solidFill>
-                  <a:srgbClr val="FFFF00"/>
-                </a:solidFill>
-              </a:rPr>
-              <a:t>ng-container</a:t>
-            </a:r>
-          </a:p>
-          <a:p>
-            <a:pPr lvl="1"/>
-            <a:r>
-              <a:rPr lang="en-US" b="1"/>
-              <a:t>group elements and apply structural directives ( like *ngIf, *ngFor, *ngSwitchCase )</a:t>
-            </a:r>
-          </a:p>
-          <a:p>
-            <a:pPr lvl="1"/>
-            <a:r>
-              <a:rPr lang="en-US" b="1"/>
-              <a:t>DOM Impact: It is a logical grouping that is not rendered as a separate element in the browser's DOM</a:t>
-            </a:r>
-          </a:p>
-          <a:p>
-            <a:pPr lvl="1"/>
-            <a:r>
-              <a:rPr lang="en-US" b="1"/>
-              <a:t>Use Case : avoid unnecessary wrapping elements that might affect styling.</a:t>
-            </a:r>
-          </a:p>
-          <a:p>
-            <a:endParaRPr lang="en-US" b="1"/>
-          </a:p>
-        </p:txBody>
-      </p:sp>
-    </p:spTree>
-    <p:extLst>
-      <p:ext uri="{BB962C8B-B14F-4D97-AF65-F5344CB8AC3E}">
-        <p14:creationId xmlns:p14="http://schemas.microsoft.com/office/powerpoint/2010/main" val="1696757168"/>
       </p:ext>
     </p:extLst>
   </p:cSld>
@@ -30288,6 +32148,355 @@
   <p:cSld>
     <p:spTree>
       <p:nvGrpSpPr>
+        <p:cNvPr id="1" name="">
+          <a:extLst>
+            <a:ext uri="{FF2B5EF4-FFF2-40B4-BE49-F238E27FC236}">
+              <a16:creationId xmlns:a16="http://schemas.microsoft.com/office/drawing/2014/main" id="{5C99F826-99F3-E16F-3175-E8761712C6D3}"/>
+            </a:ext>
+          </a:extLst>
+        </p:cNvPr>
+        <p:cNvGrpSpPr/>
+        <p:nvPr/>
+      </p:nvGrpSpPr>
+      <p:grpSpPr>
+        <a:xfrm>
+          <a:off x="0" y="0"/>
+          <a:ext cx="0" cy="0"/>
+          <a:chOff x="0" y="0"/>
+          <a:chExt cx="0" cy="0"/>
+        </a:xfrm>
+      </p:grpSpPr>
+      <p:sp>
+        <p:nvSpPr>
+          <p:cNvPr id="2" name="Title 1">
+            <a:extLst>
+              <a:ext uri="{FF2B5EF4-FFF2-40B4-BE49-F238E27FC236}">
+                <a16:creationId xmlns:a16="http://schemas.microsoft.com/office/drawing/2014/main" id="{A0BDE2AC-220C-CDAC-98EA-694781CE7680}"/>
+              </a:ext>
+            </a:extLst>
+          </p:cNvPr>
+          <p:cNvSpPr>
+            <a:spLocks noGrp="1"/>
+          </p:cNvSpPr>
+          <p:nvPr>
+            <p:ph type="title"/>
+          </p:nvPr>
+        </p:nvSpPr>
+        <p:spPr>
+          <a:xfrm>
+            <a:off x="913795" y="96350"/>
+            <a:ext cx="10353762" cy="627131"/>
+          </a:xfrm>
+        </p:spPr>
+        <p:txBody>
+          <a:bodyPr>
+            <a:normAutofit fontScale="90000"/>
+          </a:bodyPr>
+          <a:lstStyle/>
+          <a:p>
+            <a:r>
+              <a:rPr lang="en-US"/>
+              <a:t>HttpErrorResponse</a:t>
+            </a:r>
+          </a:p>
+        </p:txBody>
+      </p:sp>
+      <p:sp>
+        <p:nvSpPr>
+          <p:cNvPr id="3" name="Content Placeholder 2">
+            <a:extLst>
+              <a:ext uri="{FF2B5EF4-FFF2-40B4-BE49-F238E27FC236}">
+                <a16:creationId xmlns:a16="http://schemas.microsoft.com/office/drawing/2014/main" id="{7FBEF8F5-DF2D-7BFF-3958-CDA0AC17BD12}"/>
+              </a:ext>
+            </a:extLst>
+          </p:cNvPr>
+          <p:cNvSpPr>
+            <a:spLocks noGrp="1"/>
+          </p:cNvSpPr>
+          <p:nvPr>
+            <p:ph idx="1"/>
+          </p:nvPr>
+        </p:nvSpPr>
+        <p:spPr>
+          <a:xfrm>
+            <a:off x="200966" y="723481"/>
+            <a:ext cx="11786717" cy="6038169"/>
+          </a:xfrm>
+        </p:spPr>
+        <p:txBody>
+          <a:bodyPr/>
+          <a:lstStyle/>
+          <a:p>
+            <a:r>
+              <a:rPr lang="en-US"/>
+              <a:t>class for representing </a:t>
+            </a:r>
+            <a:r>
+              <a:rPr lang="en-US" b="1"/>
+              <a:t>failed HTTP requests</a:t>
+            </a:r>
+            <a:r>
+              <a:rPr lang="en-US"/>
+              <a:t> made through HttpClient</a:t>
+            </a:r>
+          </a:p>
+          <a:p>
+            <a:r>
+              <a:rPr lang="en-US"/>
+              <a:t>Whenever an HTTP request fails, Angular does </a:t>
+            </a:r>
+            <a:r>
+              <a:rPr lang="en-US" b="1"/>
+              <a:t>not</a:t>
+            </a:r>
+            <a:r>
+              <a:rPr lang="en-US"/>
+              <a:t> return a normal HttpResponse&lt;T&gt;. Instead, it emits an HttpErrorResponse</a:t>
+            </a:r>
+          </a:p>
+          <a:p>
+            <a:r>
+              <a:rPr lang="en-US"/>
+              <a:t>Example with subscribe</a:t>
+            </a:r>
+            <a:r>
+              <a:rPr lang="en-US">
+                <a:sym typeface="Wingdings" panose="05000000000000000000" pitchFamily="2" charset="2"/>
+              </a:rPr>
+              <a:t> error: (error: </a:t>
+            </a:r>
+            <a:r>
+              <a:rPr lang="en-US">
+                <a:solidFill>
+                  <a:srgbClr val="FFFF00"/>
+                </a:solidFill>
+              </a:rPr>
+              <a:t>HttpErrorResponse</a:t>
+            </a:r>
+            <a:r>
+              <a:rPr lang="en-US">
+                <a:sym typeface="Wingdings" panose="05000000000000000000" pitchFamily="2" charset="2"/>
+              </a:rPr>
+              <a:t>)=&gt;{}</a:t>
+            </a:r>
+          </a:p>
+          <a:p>
+            <a:r>
+              <a:rPr lang="en-US" b="1">
+                <a:solidFill>
+                  <a:srgbClr val="FFFF00"/>
+                </a:solidFill>
+              </a:rPr>
+              <a:t>HttpErrorResponse properties</a:t>
+            </a:r>
+          </a:p>
+          <a:p>
+            <a:pPr lvl="1"/>
+            <a:r>
+              <a:rPr lang="en-US"/>
+              <a:t>status: </a:t>
+            </a:r>
+            <a:r>
+              <a:rPr lang="en-US">
+                <a:effectLst/>
+              </a:rPr>
+              <a:t>HttpStatusCode (enum)</a:t>
+            </a:r>
+          </a:p>
+          <a:p>
+            <a:pPr lvl="1"/>
+            <a:r>
+              <a:rPr lang="en-US"/>
+              <a:t>statusText</a:t>
+            </a:r>
+          </a:p>
+          <a:p>
+            <a:pPr lvl="1"/>
+            <a:r>
+              <a:rPr lang="en-US"/>
+              <a:t>url</a:t>
+            </a:r>
+          </a:p>
+          <a:p>
+            <a:pPr lvl="1"/>
+            <a:r>
+              <a:rPr lang="en-US"/>
+              <a:t>error: Contains the actual error returned by the backend.</a:t>
+            </a:r>
+          </a:p>
+          <a:p>
+            <a:pPr lvl="1"/>
+            <a:r>
+              <a:rPr lang="en-US"/>
+              <a:t>ok: boolean</a:t>
+            </a:r>
+          </a:p>
+          <a:p>
+            <a:pPr lvl="1"/>
+            <a:endParaRPr lang="en-US"/>
+          </a:p>
+          <a:p>
+            <a:pPr lvl="1"/>
+            <a:endParaRPr lang="en-US" b="1">
+              <a:solidFill>
+                <a:srgbClr val="FFFF00"/>
+              </a:solidFill>
+            </a:endParaRPr>
+          </a:p>
+          <a:p>
+            <a:pPr lvl="1"/>
+            <a:endParaRPr lang="en-US" b="1"/>
+          </a:p>
+        </p:txBody>
+      </p:sp>
+    </p:spTree>
+    <p:extLst>
+      <p:ext uri="{BB962C8B-B14F-4D97-AF65-F5344CB8AC3E}">
+        <p14:creationId xmlns:p14="http://schemas.microsoft.com/office/powerpoint/2010/main" val="742283751"/>
+      </p:ext>
+    </p:extLst>
+  </p:cSld>
+  <p:clrMapOvr>
+    <a:masterClrMapping/>
+  </p:clrMapOvr>
+</p:sld>
+</file>
+
+<file path=ppt/slides/slide81.xml><?xml version="1.0" encoding="utf-8"?>
+<p:sld xmlns:a="http://schemas.openxmlformats.org/drawingml/2006/main" xmlns:r="http://schemas.openxmlformats.org/officeDocument/2006/relationships" xmlns:p="http://schemas.openxmlformats.org/presentationml/2006/main">
+  <p:cSld>
+    <p:spTree>
+      <p:nvGrpSpPr>
+        <p:cNvPr id="1" name=""/>
+        <p:cNvGrpSpPr/>
+        <p:nvPr/>
+      </p:nvGrpSpPr>
+      <p:grpSpPr>
+        <a:xfrm>
+          <a:off x="0" y="0"/>
+          <a:ext cx="0" cy="0"/>
+          <a:chOff x="0" y="0"/>
+          <a:chExt cx="0" cy="0"/>
+        </a:xfrm>
+      </p:grpSpPr>
+      <p:sp>
+        <p:nvSpPr>
+          <p:cNvPr id="2" name="Title 1">
+            <a:extLst>
+              <a:ext uri="{FF2B5EF4-FFF2-40B4-BE49-F238E27FC236}">
+                <a16:creationId xmlns:a16="http://schemas.microsoft.com/office/drawing/2014/main" id="{6E1B6515-6A24-FD8A-2605-BDE018FD4050}"/>
+              </a:ext>
+            </a:extLst>
+          </p:cNvPr>
+          <p:cNvSpPr>
+            <a:spLocks noGrp="1"/>
+          </p:cNvSpPr>
+          <p:nvPr>
+            <p:ph type="title"/>
+          </p:nvPr>
+        </p:nvSpPr>
+        <p:spPr>
+          <a:xfrm>
+            <a:off x="919119" y="0"/>
+            <a:ext cx="10353762" cy="612949"/>
+          </a:xfrm>
+        </p:spPr>
+        <p:txBody>
+          <a:bodyPr>
+            <a:normAutofit fontScale="90000"/>
+          </a:bodyPr>
+          <a:lstStyle/>
+          <a:p>
+            <a:r>
+              <a:rPr lang="en-US" b="1">
+                <a:solidFill>
+                  <a:srgbClr val="FF0000"/>
+                </a:solidFill>
+              </a:rPr>
+              <a:t>ng-container</a:t>
+            </a:r>
+          </a:p>
+        </p:txBody>
+      </p:sp>
+      <p:sp>
+        <p:nvSpPr>
+          <p:cNvPr id="3" name="Content Placeholder 2">
+            <a:extLst>
+              <a:ext uri="{FF2B5EF4-FFF2-40B4-BE49-F238E27FC236}">
+                <a16:creationId xmlns:a16="http://schemas.microsoft.com/office/drawing/2014/main" id="{98BCC1C4-4EA0-D7F6-B0E1-6158BFC9ED4D}"/>
+              </a:ext>
+            </a:extLst>
+          </p:cNvPr>
+          <p:cNvSpPr>
+            <a:spLocks noGrp="1"/>
+          </p:cNvSpPr>
+          <p:nvPr>
+            <p:ph idx="1"/>
+          </p:nvPr>
+        </p:nvSpPr>
+        <p:spPr>
+          <a:xfrm>
+            <a:off x="190918" y="612949"/>
+            <a:ext cx="11816861" cy="6018963"/>
+          </a:xfrm>
+        </p:spPr>
+        <p:txBody>
+          <a:bodyPr/>
+          <a:lstStyle/>
+          <a:p>
+            <a:r>
+              <a:rPr lang="en-US" b="1">
+                <a:solidFill>
+                  <a:srgbClr val="FFFF00"/>
+                </a:solidFill>
+              </a:rPr>
+              <a:t>ng-container</a:t>
+            </a:r>
+          </a:p>
+          <a:p>
+            <a:pPr lvl="1"/>
+            <a:r>
+              <a:rPr lang="en-US" b="1"/>
+              <a:t>group elements and apply structural directives ( like *ngIf, *ngFor, *ngSwitchCase )</a:t>
+            </a:r>
+          </a:p>
+          <a:p>
+            <a:pPr lvl="1"/>
+            <a:r>
+              <a:rPr lang="en-US" b="1"/>
+              <a:t>DOM Impact: It is a logical grouping that is not rendered as a separate element in the browser's DOM</a:t>
+            </a:r>
+          </a:p>
+          <a:p>
+            <a:pPr lvl="1"/>
+            <a:r>
+              <a:rPr lang="en-US" b="1"/>
+              <a:t>Use Case : avoid unnecessary wrapping elements that might affect styling.</a:t>
+            </a:r>
+          </a:p>
+          <a:p>
+            <a:endParaRPr lang="en-US" b="1"/>
+          </a:p>
+        </p:txBody>
+      </p:sp>
+    </p:spTree>
+    <p:extLst>
+      <p:ext uri="{BB962C8B-B14F-4D97-AF65-F5344CB8AC3E}">
+        <p14:creationId xmlns:p14="http://schemas.microsoft.com/office/powerpoint/2010/main" val="1696757168"/>
+      </p:ext>
+    </p:extLst>
+  </p:cSld>
+  <p:clrMapOvr>
+    <a:masterClrMapping/>
+  </p:clrMapOvr>
+</p:sld>
+</file>
+
+<file path=ppt/slides/slide82.xml><?xml version="1.0" encoding="utf-8"?>
+<p:sld xmlns:a="http://schemas.openxmlformats.org/drawingml/2006/main" xmlns:r="http://schemas.openxmlformats.org/officeDocument/2006/relationships" xmlns:p="http://schemas.openxmlformats.org/presentationml/2006/main">
+  <p:cSld>
+    <p:spTree>
+      <p:nvGrpSpPr>
         <p:cNvPr id="1" name=""/>
         <p:cNvGrpSpPr/>
         <p:nvPr/>
@@ -30572,7 +32781,7 @@
 </p:sld>
 </file>
 
-<file path=ppt/slides/slide81.xml><?xml version="1.0" encoding="utf-8"?>
+<file path=ppt/slides/slide83.xml><?xml version="1.0" encoding="utf-8"?>
 <p:sld xmlns:a="http://schemas.openxmlformats.org/drawingml/2006/main" xmlns:r="http://schemas.openxmlformats.org/officeDocument/2006/relationships" xmlns:p="http://schemas.openxmlformats.org/presentationml/2006/main">
   <p:cSld>
     <p:spTree>
@@ -30733,7 +32942,7 @@
 </p:sld>
 </file>
 
-<file path=ppt/slides/slide82.xml><?xml version="1.0" encoding="utf-8"?>
+<file path=ppt/slides/slide84.xml><?xml version="1.0" encoding="utf-8"?>
 <p:sld xmlns:a="http://schemas.openxmlformats.org/drawingml/2006/main" xmlns:r="http://schemas.openxmlformats.org/officeDocument/2006/relationships" xmlns:p="http://schemas.openxmlformats.org/presentationml/2006/main">
   <p:cSld>
     <p:spTree>
@@ -30899,7 +33108,7 @@
 </p:sld>
 </file>
 
-<file path=ppt/slides/slide83.xml><?xml version="1.0" encoding="utf-8"?>
+<file path=ppt/slides/slide85.xml><?xml version="1.0" encoding="utf-8"?>
 <p:sld xmlns:a="http://schemas.openxmlformats.org/drawingml/2006/main" xmlns:r="http://schemas.openxmlformats.org/officeDocument/2006/relationships" xmlns:p="http://schemas.openxmlformats.org/presentationml/2006/main">
   <p:cSld>
     <p:spTree>
@@ -30974,7 +33183,7 @@
 </p:sld>
 </file>
 
-<file path=ppt/slides/slide84.xml><?xml version="1.0" encoding="utf-8"?>
+<file path=ppt/slides/slide86.xml><?xml version="1.0" encoding="utf-8"?>
 <p:sld xmlns:a="http://schemas.openxmlformats.org/drawingml/2006/main" xmlns:r="http://schemas.openxmlformats.org/officeDocument/2006/relationships" xmlns:p="http://schemas.openxmlformats.org/presentationml/2006/main">
   <p:cSld>
     <p:spTree>
@@ -31049,7 +33258,7 @@
 </p:sld>
 </file>
 
-<file path=ppt/slides/slide85.xml><?xml version="1.0" encoding="utf-8"?>
+<file path=ppt/slides/slide87.xml><?xml version="1.0" encoding="utf-8"?>
 <p:sld xmlns:a="http://schemas.openxmlformats.org/drawingml/2006/main" xmlns:r="http://schemas.openxmlformats.org/officeDocument/2006/relationships" xmlns:p="http://schemas.openxmlformats.org/presentationml/2006/main">
   <p:cSld>
     <p:spTree>
@@ -31224,7 +33433,7 @@
 </p:sld>
 </file>
 
-<file path=ppt/slides/slide86.xml><?xml version="1.0" encoding="utf-8"?>
+<file path=ppt/slides/slide88.xml><?xml version="1.0" encoding="utf-8"?>
 <p:sld xmlns:a="http://schemas.openxmlformats.org/drawingml/2006/main" xmlns:r="http://schemas.openxmlformats.org/officeDocument/2006/relationships" xmlns:p="http://schemas.openxmlformats.org/presentationml/2006/main">
   <p:cSld>
     <p:spTree>
@@ -31299,7 +33508,7 @@
 </p:sld>
 </file>
 
-<file path=ppt/slides/slide87.xml><?xml version="1.0" encoding="utf-8"?>
+<file path=ppt/slides/slide89.xml><?xml version="1.0" encoding="utf-8"?>
 <p:sld xmlns:a="http://schemas.openxmlformats.org/drawingml/2006/main" xmlns:r="http://schemas.openxmlformats.org/officeDocument/2006/relationships" xmlns:p="http://schemas.openxmlformats.org/presentationml/2006/main">
   <p:cSld>
     <p:spTree>
@@ -31359,598 +33568,6 @@
     <p:extLst>
       <p:ext uri="{BB962C8B-B14F-4D97-AF65-F5344CB8AC3E}">
         <p14:creationId xmlns:p14="http://schemas.microsoft.com/office/powerpoint/2010/main" val="930891690"/>
-      </p:ext>
-    </p:extLst>
-  </p:cSld>
-  <p:clrMapOvr>
-    <a:masterClrMapping/>
-  </p:clrMapOvr>
-</p:sld>
-</file>
-
-<file path=ppt/slides/slide88.xml><?xml version="1.0" encoding="utf-8"?>
-<p:sld xmlns:a="http://schemas.openxmlformats.org/drawingml/2006/main" xmlns:r="http://schemas.openxmlformats.org/officeDocument/2006/relationships" xmlns:p="http://schemas.openxmlformats.org/presentationml/2006/main">
-  <p:cSld>
-    <p:spTree>
-      <p:nvGrpSpPr>
-        <p:cNvPr id="1" name=""/>
-        <p:cNvGrpSpPr/>
-        <p:nvPr/>
-      </p:nvGrpSpPr>
-      <p:grpSpPr>
-        <a:xfrm>
-          <a:off x="0" y="0"/>
-          <a:ext cx="0" cy="0"/>
-          <a:chOff x="0" y="0"/>
-          <a:chExt cx="0" cy="0"/>
-        </a:xfrm>
-      </p:grpSpPr>
-      <p:sp>
-        <p:nvSpPr>
-          <p:cNvPr id="2" name="Title 1">
-            <a:extLst>
-              <a:ext uri="{FF2B5EF4-FFF2-40B4-BE49-F238E27FC236}">
-                <a16:creationId xmlns:a16="http://schemas.microsoft.com/office/drawing/2014/main" id="{DBEDFD20-716D-7F23-5AA9-05C0CE569A0F}"/>
-              </a:ext>
-            </a:extLst>
-          </p:cNvPr>
-          <p:cNvSpPr>
-            <a:spLocks noGrp="1"/>
-          </p:cNvSpPr>
-          <p:nvPr>
-            <p:ph type="title"/>
-          </p:nvPr>
-        </p:nvSpPr>
-        <p:spPr>
-          <a:xfrm>
-            <a:off x="846061" y="0"/>
-            <a:ext cx="10353762" cy="618067"/>
-          </a:xfrm>
-        </p:spPr>
-        <p:txBody>
-          <a:bodyPr>
-            <a:normAutofit fontScale="90000"/>
-          </a:bodyPr>
-          <a:lstStyle/>
-          <a:p>
-            <a:r>
-              <a:rPr lang="en-US"/>
-              <a:t>Download code</a:t>
-            </a:r>
-          </a:p>
-        </p:txBody>
-      </p:sp>
-      <p:sp>
-        <p:nvSpPr>
-          <p:cNvPr id="3" name="Content Placeholder 2">
-            <a:extLst>
-              <a:ext uri="{FF2B5EF4-FFF2-40B4-BE49-F238E27FC236}">
-                <a16:creationId xmlns:a16="http://schemas.microsoft.com/office/drawing/2014/main" id="{43C0EA7C-9279-2FBF-1913-3A8FBF4A1BC3}"/>
-              </a:ext>
-            </a:extLst>
-          </p:cNvPr>
-          <p:cNvSpPr>
-            <a:spLocks noGrp="1"/>
-          </p:cNvSpPr>
-          <p:nvPr>
-            <p:ph idx="1"/>
-          </p:nvPr>
-        </p:nvSpPr>
-        <p:spPr>
-          <a:xfrm>
-            <a:off x="423333" y="685800"/>
-            <a:ext cx="10844224" cy="6172200"/>
-          </a:xfrm>
-        </p:spPr>
-        <p:txBody>
-          <a:bodyPr>
-            <a:normAutofit/>
-          </a:bodyPr>
-          <a:lstStyle/>
-          <a:p>
-            <a:r>
-              <a:rPr lang="en-US"/>
-              <a:t>At Service</a:t>
-            </a:r>
-          </a:p>
-          <a:p>
-            <a:pPr lvl="1"/>
-            <a:r>
-              <a:rPr lang="en-US" b="1">
-                <a:solidFill>
-                  <a:srgbClr val="00B0F0"/>
-                </a:solidFill>
-              </a:rPr>
-              <a:t>httpClient</a:t>
-            </a:r>
-            <a:r>
-              <a:rPr lang="en-US" b="1"/>
-              <a:t>.post(URL,  payload, { response: blob });</a:t>
-            </a:r>
-          </a:p>
-          <a:p>
-            <a:r>
-              <a:rPr lang="en-US" b="1"/>
-              <a:t>At ts code</a:t>
-            </a:r>
-          </a:p>
-          <a:p>
-            <a:pPr lvl="1"/>
-            <a:r>
-              <a:rPr lang="en-US" b="1"/>
-              <a:t>request  = this.service.download(payload).</a:t>
-            </a:r>
-            <a:r>
-              <a:rPr lang="en-US" b="1">
-                <a:effectLst/>
-              </a:rPr>
-              <a:t>subscribe({</a:t>
-            </a:r>
-          </a:p>
-          <a:p>
-            <a:pPr marL="810000" lvl="2" indent="0">
-              <a:buNone/>
-            </a:pPr>
-            <a:r>
-              <a:rPr lang="en-US" b="1">
-                <a:effectLst/>
-              </a:rPr>
-              <a:t>next: (response: Blob)=&gt;{</a:t>
-            </a:r>
-          </a:p>
-          <a:p>
-            <a:pPr marL="810000" lvl="2" indent="0">
-              <a:buNone/>
-            </a:pPr>
-            <a:r>
-              <a:rPr lang="en-US" b="1">
-                <a:effectLst/>
-              </a:rPr>
-              <a:t>	</a:t>
-            </a:r>
-            <a:r>
-              <a:rPr lang="en-US">
-                <a:effectLst/>
-              </a:rPr>
-              <a:t>const downloadURL = window.URL.</a:t>
-            </a:r>
-            <a:r>
-              <a:rPr lang="en-US" b="1">
-                <a:solidFill>
-                  <a:srgbClr val="FFFF00"/>
-                </a:solidFill>
-                <a:effectLst/>
-              </a:rPr>
-              <a:t>createObjectURL</a:t>
-            </a:r>
-            <a:r>
-              <a:rPr lang="en-US">
-                <a:effectLst/>
-              </a:rPr>
-              <a:t>(response);</a:t>
-            </a:r>
-          </a:p>
-          <a:p>
-            <a:pPr marL="810000" lvl="2" indent="0">
-              <a:buNone/>
-            </a:pPr>
-            <a:r>
-              <a:rPr lang="en-US">
-                <a:effectLst/>
-              </a:rPr>
-              <a:t>	const link = document.</a:t>
-            </a:r>
-            <a:r>
-              <a:rPr lang="en-US" b="1">
-                <a:solidFill>
-                  <a:srgbClr val="FFFF00"/>
-                </a:solidFill>
-                <a:effectLst/>
-              </a:rPr>
-              <a:t>createElement</a:t>
-            </a:r>
-            <a:r>
-              <a:rPr lang="en-US">
-                <a:effectLst/>
-              </a:rPr>
-              <a:t>('a’);   link.href = downloadURL;</a:t>
-            </a:r>
-          </a:p>
-          <a:p>
-            <a:pPr marL="810000" lvl="2" indent="0">
-              <a:buNone/>
-            </a:pPr>
-            <a:r>
-              <a:rPr lang="en-US">
-                <a:effectLst/>
-              </a:rPr>
-              <a:t> 	link.download = 'SanctionAML_Report.xlsx’;</a:t>
-            </a:r>
-          </a:p>
-          <a:p>
-            <a:pPr marL="810000" lvl="2" indent="0">
-              <a:buNone/>
-            </a:pPr>
-            <a:r>
-              <a:rPr lang="en-US">
-                <a:effectLst/>
-              </a:rPr>
-              <a:t>	document.body.</a:t>
-            </a:r>
-            <a:r>
-              <a:rPr lang="en-US" b="1">
-                <a:solidFill>
-                  <a:srgbClr val="FFFF00"/>
-                </a:solidFill>
-                <a:effectLst/>
-              </a:rPr>
-              <a:t>appendChild</a:t>
-            </a:r>
-            <a:r>
-              <a:rPr lang="en-US">
-                <a:effectLst/>
-              </a:rPr>
-              <a:t>(link);  link.click();</a:t>
-            </a:r>
-          </a:p>
-          <a:p>
-            <a:pPr marL="810000" lvl="2" indent="0">
-              <a:buNone/>
-            </a:pPr>
-            <a:r>
-              <a:rPr lang="en-US">
-                <a:effectLst/>
-              </a:rPr>
-              <a:t>	document.body.</a:t>
-            </a:r>
-            <a:r>
-              <a:rPr lang="en-US" b="1">
-                <a:solidFill>
-                  <a:srgbClr val="FFFF00"/>
-                </a:solidFill>
-                <a:effectLst/>
-              </a:rPr>
-              <a:t>removeChild</a:t>
-            </a:r>
-            <a:r>
-              <a:rPr lang="en-US">
-                <a:effectLst/>
-              </a:rPr>
-              <a:t>(link);</a:t>
-            </a:r>
-          </a:p>
-          <a:p>
-            <a:pPr marL="810000" lvl="2" indent="0">
-              <a:buNone/>
-            </a:pPr>
-            <a:r>
-              <a:rPr lang="en-US">
-                <a:effectLst/>
-              </a:rPr>
-              <a:t>	window.URL.</a:t>
-            </a:r>
-            <a:r>
-              <a:rPr lang="en-US" b="1">
-                <a:solidFill>
-                  <a:srgbClr val="FFFF00"/>
-                </a:solidFill>
-                <a:effectLst/>
-              </a:rPr>
-              <a:t>revokeObjectURL</a:t>
-            </a:r>
-            <a:r>
-              <a:rPr lang="en-US">
-                <a:effectLst/>
-              </a:rPr>
-              <a:t>(downloadURL);</a:t>
-            </a:r>
-          </a:p>
-          <a:p>
-            <a:pPr marL="810000" lvl="2" indent="0">
-              <a:buNone/>
-            </a:pPr>
-            <a:r>
-              <a:rPr lang="en-US" b="1">
-                <a:effectLst/>
-              </a:rPr>
-              <a:t>	</a:t>
-            </a:r>
-            <a:r>
-              <a:rPr lang="en-US"/>
-              <a:t>Swal.close();    // close the current opening sweat alert</a:t>
-            </a:r>
-            <a:endParaRPr lang="en-US" b="1">
-              <a:effectLst/>
-            </a:endParaRPr>
-          </a:p>
-          <a:p>
-            <a:pPr marL="810000" lvl="2" indent="0">
-              <a:buNone/>
-            </a:pPr>
-            <a:r>
-              <a:rPr lang="en-US" b="1">
-                <a:effectLst/>
-              </a:rPr>
-              <a:t>}</a:t>
-            </a:r>
-          </a:p>
-          <a:p>
-            <a:pPr marL="450000" lvl="1" indent="0">
-              <a:buNone/>
-            </a:pPr>
-            <a:r>
-              <a:rPr lang="en-US" b="1">
-                <a:effectLst/>
-              </a:rPr>
-              <a:t>	 });</a:t>
-            </a:r>
-          </a:p>
-          <a:p>
-            <a:r>
-              <a:rPr lang="en-US" sz="1600" b="1">
-                <a:effectLst/>
-              </a:rPr>
-              <a:t>To cancel the operation (download) : </a:t>
-            </a:r>
-            <a:r>
-              <a:rPr lang="en-US" b="1">
-                <a:solidFill>
-                  <a:srgbClr val="FFFF00"/>
-                </a:solidFill>
-                <a:effectLst/>
-              </a:rPr>
-              <a:t>request</a:t>
-            </a:r>
-            <a:r>
-              <a:rPr lang="en-US">
-                <a:effectLst/>
-              </a:rPr>
-              <a:t>.</a:t>
-            </a:r>
-            <a:r>
-              <a:rPr lang="en-US" b="1">
-                <a:solidFill>
-                  <a:srgbClr val="00B0F0"/>
-                </a:solidFill>
-                <a:effectLst/>
-              </a:rPr>
-              <a:t>unsubscribe</a:t>
-            </a:r>
-            <a:r>
-              <a:rPr lang="en-US">
-                <a:effectLst/>
-              </a:rPr>
-              <a:t>();</a:t>
-            </a:r>
-          </a:p>
-        </p:txBody>
-      </p:sp>
-    </p:spTree>
-    <p:extLst>
-      <p:ext uri="{BB962C8B-B14F-4D97-AF65-F5344CB8AC3E}">
-        <p14:creationId xmlns:p14="http://schemas.microsoft.com/office/powerpoint/2010/main" val="1837649939"/>
-      </p:ext>
-    </p:extLst>
-  </p:cSld>
-  <p:clrMapOvr>
-    <a:masterClrMapping/>
-  </p:clrMapOvr>
-</p:sld>
-</file>
-
-<file path=ppt/slides/slide89.xml><?xml version="1.0" encoding="utf-8"?>
-<p:sld xmlns:a="http://schemas.openxmlformats.org/drawingml/2006/main" xmlns:r="http://schemas.openxmlformats.org/officeDocument/2006/relationships" xmlns:p="http://schemas.openxmlformats.org/presentationml/2006/main">
-  <p:cSld>
-    <p:spTree>
-      <p:nvGrpSpPr>
-        <p:cNvPr id="1" name=""/>
-        <p:cNvGrpSpPr/>
-        <p:nvPr/>
-      </p:nvGrpSpPr>
-      <p:grpSpPr>
-        <a:xfrm>
-          <a:off x="0" y="0"/>
-          <a:ext cx="0" cy="0"/>
-          <a:chOff x="0" y="0"/>
-          <a:chExt cx="0" cy="0"/>
-        </a:xfrm>
-      </p:grpSpPr>
-      <p:sp>
-        <p:nvSpPr>
-          <p:cNvPr id="2" name="Title 1">
-            <a:extLst>
-              <a:ext uri="{FF2B5EF4-FFF2-40B4-BE49-F238E27FC236}">
-                <a16:creationId xmlns:a16="http://schemas.microsoft.com/office/drawing/2014/main" id="{433B8971-4F44-64C9-F90F-D0555500349D}"/>
-              </a:ext>
-            </a:extLst>
-          </p:cNvPr>
-          <p:cNvSpPr>
-            <a:spLocks noGrp="1"/>
-          </p:cNvSpPr>
-          <p:nvPr>
-            <p:ph type="title"/>
-          </p:nvPr>
-        </p:nvSpPr>
-        <p:spPr>
-          <a:xfrm>
-            <a:off x="913795" y="0"/>
-            <a:ext cx="10353762" cy="476250"/>
-          </a:xfrm>
-        </p:spPr>
-        <p:txBody>
-          <a:bodyPr>
-            <a:normAutofit fontScale="90000"/>
-          </a:bodyPr>
-          <a:lstStyle/>
-          <a:p>
-            <a:r>
-              <a:rPr lang="en-US" b="1"/>
-              <a:t>Uploading</a:t>
-            </a:r>
-            <a:r>
-              <a:rPr lang="en-US"/>
-              <a:t> </a:t>
-            </a:r>
-          </a:p>
-        </p:txBody>
-      </p:sp>
-      <p:sp>
-        <p:nvSpPr>
-          <p:cNvPr id="3" name="Content Placeholder 2">
-            <a:extLst>
-              <a:ext uri="{FF2B5EF4-FFF2-40B4-BE49-F238E27FC236}">
-                <a16:creationId xmlns:a16="http://schemas.microsoft.com/office/drawing/2014/main" id="{7BE786D0-6974-AED6-FB0C-6F9234604CA5}"/>
-              </a:ext>
-            </a:extLst>
-          </p:cNvPr>
-          <p:cNvSpPr>
-            <a:spLocks noGrp="1"/>
-          </p:cNvSpPr>
-          <p:nvPr>
-            <p:ph idx="1"/>
-          </p:nvPr>
-        </p:nvSpPr>
-        <p:spPr>
-          <a:xfrm>
-            <a:off x="304800" y="571499"/>
-            <a:ext cx="11601450" cy="6067425"/>
-          </a:xfrm>
-        </p:spPr>
-        <p:txBody>
-          <a:bodyPr/>
-          <a:lstStyle/>
-          <a:p>
-            <a:r>
-              <a:rPr lang="en-US" b="1"/>
-              <a:t>At service</a:t>
-            </a:r>
-          </a:p>
-          <a:p>
-            <a:pPr lvl="1"/>
-            <a:r>
-              <a:rPr lang="en-US">
-                <a:effectLst/>
-              </a:rPr>
-              <a:t> const </a:t>
-            </a:r>
-            <a:r>
-              <a:rPr lang="en-US" b="1">
-                <a:solidFill>
-                  <a:srgbClr val="00B0F0"/>
-                </a:solidFill>
-                <a:effectLst/>
-              </a:rPr>
-              <a:t>formData</a:t>
-            </a:r>
-            <a:r>
-              <a:rPr lang="en-US">
-                <a:effectLst/>
-              </a:rPr>
-              <a:t> = new </a:t>
-            </a:r>
-            <a:r>
-              <a:rPr lang="en-US" b="1">
-                <a:solidFill>
-                  <a:srgbClr val="FFFF00"/>
-                </a:solidFill>
-                <a:effectLst/>
-              </a:rPr>
-              <a:t>FormData()</a:t>
-            </a:r>
-            <a:r>
-              <a:rPr lang="en-US">
-                <a:effectLst/>
-              </a:rPr>
-              <a:t>;</a:t>
-            </a:r>
-          </a:p>
-          <a:p>
-            <a:pPr lvl="1"/>
-            <a:r>
-              <a:rPr lang="en-US">
-                <a:effectLst/>
-              </a:rPr>
-              <a:t>formData.</a:t>
-            </a:r>
-            <a:r>
-              <a:rPr lang="en-US" b="1">
-                <a:solidFill>
-                  <a:srgbClr val="FFFF00"/>
-                </a:solidFill>
-                <a:effectLst/>
-              </a:rPr>
-              <a:t>append</a:t>
-            </a:r>
-            <a:r>
-              <a:rPr lang="en-US">
-                <a:effectLst/>
-              </a:rPr>
-              <a:t>("Image", </a:t>
-            </a:r>
-            <a:r>
-              <a:rPr lang="en-US" b="1">
-                <a:solidFill>
-                  <a:srgbClr val="FFFF00"/>
-                </a:solidFill>
-                <a:effectLst/>
-              </a:rPr>
-              <a:t>productDTO</a:t>
-            </a:r>
-            <a:r>
-              <a:rPr lang="en-US">
-                <a:effectLst/>
-              </a:rPr>
-              <a:t>.Image as </a:t>
-            </a:r>
-            <a:r>
-              <a:rPr lang="en-US" b="1">
-                <a:solidFill>
-                  <a:srgbClr val="92D050"/>
-                </a:solidFill>
-                <a:effectLst/>
-              </a:rPr>
-              <a:t>File</a:t>
-            </a:r>
-            <a:r>
-              <a:rPr lang="en-US">
-                <a:effectLst/>
-              </a:rPr>
-              <a:t>);</a:t>
-            </a:r>
-          </a:p>
-          <a:p>
-            <a:endParaRPr lang="en-US" b="1"/>
-          </a:p>
-          <a:p>
-            <a:endParaRPr lang="en-US" b="1"/>
-          </a:p>
-          <a:p>
-            <a:endParaRPr lang="en-US" b="1"/>
-          </a:p>
-          <a:p>
-            <a:endParaRPr lang="en-US" b="1"/>
-          </a:p>
-          <a:p>
-            <a:endParaRPr lang="en-US" b="1"/>
-          </a:p>
-          <a:p>
-            <a:endParaRPr lang="en-US"/>
-          </a:p>
-          <a:p>
-            <a:endParaRPr lang="en-US"/>
-          </a:p>
-          <a:p>
-            <a:endParaRPr lang="en-US"/>
-          </a:p>
-          <a:p>
-            <a:endParaRPr lang="en-US"/>
-          </a:p>
-        </p:txBody>
-      </p:sp>
-    </p:spTree>
-    <p:extLst>
-      <p:ext uri="{BB962C8B-B14F-4D97-AF65-F5344CB8AC3E}">
-        <p14:creationId xmlns:p14="http://schemas.microsoft.com/office/powerpoint/2010/main" val="866458153"/>
       </p:ext>
     </p:extLst>
   </p:cSld>
@@ -32171,6 +33788,647 @@
   <p:cSld>
     <p:spTree>
       <p:nvGrpSpPr>
+        <p:cNvPr id="1" name=""/>
+        <p:cNvGrpSpPr/>
+        <p:nvPr/>
+      </p:nvGrpSpPr>
+      <p:grpSpPr>
+        <a:xfrm>
+          <a:off x="0" y="0"/>
+          <a:ext cx="0" cy="0"/>
+          <a:chOff x="0" y="0"/>
+          <a:chExt cx="0" cy="0"/>
+        </a:xfrm>
+      </p:grpSpPr>
+      <p:sp>
+        <p:nvSpPr>
+          <p:cNvPr id="2" name="Title 1">
+            <a:extLst>
+              <a:ext uri="{FF2B5EF4-FFF2-40B4-BE49-F238E27FC236}">
+                <a16:creationId xmlns:a16="http://schemas.microsoft.com/office/drawing/2014/main" id="{DBEDFD20-716D-7F23-5AA9-05C0CE569A0F}"/>
+              </a:ext>
+            </a:extLst>
+          </p:cNvPr>
+          <p:cNvSpPr>
+            <a:spLocks noGrp="1"/>
+          </p:cNvSpPr>
+          <p:nvPr>
+            <p:ph type="title"/>
+          </p:nvPr>
+        </p:nvSpPr>
+        <p:spPr>
+          <a:xfrm>
+            <a:off x="846061" y="0"/>
+            <a:ext cx="10353762" cy="618067"/>
+          </a:xfrm>
+        </p:spPr>
+        <p:txBody>
+          <a:bodyPr>
+            <a:normAutofit fontScale="90000"/>
+          </a:bodyPr>
+          <a:lstStyle/>
+          <a:p>
+            <a:r>
+              <a:rPr lang="en-US"/>
+              <a:t>Download code</a:t>
+            </a:r>
+          </a:p>
+        </p:txBody>
+      </p:sp>
+      <p:sp>
+        <p:nvSpPr>
+          <p:cNvPr id="3" name="Content Placeholder 2">
+            <a:extLst>
+              <a:ext uri="{FF2B5EF4-FFF2-40B4-BE49-F238E27FC236}">
+                <a16:creationId xmlns:a16="http://schemas.microsoft.com/office/drawing/2014/main" id="{43C0EA7C-9279-2FBF-1913-3A8FBF4A1BC3}"/>
+              </a:ext>
+            </a:extLst>
+          </p:cNvPr>
+          <p:cNvSpPr>
+            <a:spLocks noGrp="1"/>
+          </p:cNvSpPr>
+          <p:nvPr>
+            <p:ph idx="1"/>
+          </p:nvPr>
+        </p:nvSpPr>
+        <p:spPr>
+          <a:xfrm>
+            <a:off x="423333" y="685800"/>
+            <a:ext cx="10844224" cy="6172200"/>
+          </a:xfrm>
+        </p:spPr>
+        <p:txBody>
+          <a:bodyPr>
+            <a:normAutofit/>
+          </a:bodyPr>
+          <a:lstStyle/>
+          <a:p>
+            <a:r>
+              <a:rPr lang="en-US"/>
+              <a:t>At Service</a:t>
+            </a:r>
+          </a:p>
+          <a:p>
+            <a:pPr lvl="1"/>
+            <a:r>
+              <a:rPr lang="en-US" b="1">
+                <a:solidFill>
+                  <a:srgbClr val="00B0F0"/>
+                </a:solidFill>
+              </a:rPr>
+              <a:t>httpClient</a:t>
+            </a:r>
+            <a:r>
+              <a:rPr lang="en-US" b="1"/>
+              <a:t>.post(URL,  payload, { response: blob });</a:t>
+            </a:r>
+          </a:p>
+          <a:p>
+            <a:r>
+              <a:rPr lang="en-US" b="1"/>
+              <a:t>At ts code</a:t>
+            </a:r>
+          </a:p>
+          <a:p>
+            <a:pPr lvl="1"/>
+            <a:r>
+              <a:rPr lang="en-US" b="1"/>
+              <a:t>request  = this.service.download(payload).</a:t>
+            </a:r>
+            <a:r>
+              <a:rPr lang="en-US" b="1">
+                <a:effectLst/>
+              </a:rPr>
+              <a:t>subscribe({</a:t>
+            </a:r>
+          </a:p>
+          <a:p>
+            <a:pPr marL="810000" lvl="2" indent="0">
+              <a:buNone/>
+            </a:pPr>
+            <a:r>
+              <a:rPr lang="en-US" b="1">
+                <a:effectLst/>
+              </a:rPr>
+              <a:t>next: (response: Blob)=&gt;{</a:t>
+            </a:r>
+          </a:p>
+          <a:p>
+            <a:pPr marL="810000" lvl="2" indent="0">
+              <a:buNone/>
+            </a:pPr>
+            <a:r>
+              <a:rPr lang="en-US" b="1">
+                <a:effectLst/>
+              </a:rPr>
+              <a:t>	</a:t>
+            </a:r>
+            <a:r>
+              <a:rPr lang="en-US">
+                <a:effectLst/>
+              </a:rPr>
+              <a:t>const downloadURL = window.URL.</a:t>
+            </a:r>
+            <a:r>
+              <a:rPr lang="en-US" b="1">
+                <a:solidFill>
+                  <a:srgbClr val="FFFF00"/>
+                </a:solidFill>
+                <a:effectLst/>
+              </a:rPr>
+              <a:t>createObjectURL</a:t>
+            </a:r>
+            <a:r>
+              <a:rPr lang="en-US">
+                <a:effectLst/>
+              </a:rPr>
+              <a:t>(response);</a:t>
+            </a:r>
+          </a:p>
+          <a:p>
+            <a:pPr marL="810000" lvl="2" indent="0">
+              <a:buNone/>
+            </a:pPr>
+            <a:r>
+              <a:rPr lang="en-US">
+                <a:effectLst/>
+              </a:rPr>
+              <a:t>	const link = document.</a:t>
+            </a:r>
+            <a:r>
+              <a:rPr lang="en-US" b="1">
+                <a:solidFill>
+                  <a:srgbClr val="FFFF00"/>
+                </a:solidFill>
+                <a:effectLst/>
+              </a:rPr>
+              <a:t>createElement</a:t>
+            </a:r>
+            <a:r>
+              <a:rPr lang="en-US">
+                <a:effectLst/>
+              </a:rPr>
+              <a:t>('a’);   link.href = downloadURL;</a:t>
+            </a:r>
+          </a:p>
+          <a:p>
+            <a:pPr marL="810000" lvl="2" indent="0">
+              <a:buNone/>
+            </a:pPr>
+            <a:r>
+              <a:rPr lang="en-US">
+                <a:effectLst/>
+              </a:rPr>
+              <a:t> 	link.download = 'SanctionAML_Report.xlsx’;</a:t>
+            </a:r>
+          </a:p>
+          <a:p>
+            <a:pPr marL="810000" lvl="2" indent="0">
+              <a:buNone/>
+            </a:pPr>
+            <a:r>
+              <a:rPr lang="en-US">
+                <a:effectLst/>
+              </a:rPr>
+              <a:t>	document.body.</a:t>
+            </a:r>
+            <a:r>
+              <a:rPr lang="en-US" b="1">
+                <a:solidFill>
+                  <a:srgbClr val="FFFF00"/>
+                </a:solidFill>
+                <a:effectLst/>
+              </a:rPr>
+              <a:t>appendChild</a:t>
+            </a:r>
+            <a:r>
+              <a:rPr lang="en-US">
+                <a:effectLst/>
+              </a:rPr>
+              <a:t>(link);  link.click();</a:t>
+            </a:r>
+          </a:p>
+          <a:p>
+            <a:pPr marL="810000" lvl="2" indent="0">
+              <a:buNone/>
+            </a:pPr>
+            <a:r>
+              <a:rPr lang="en-US">
+                <a:effectLst/>
+              </a:rPr>
+              <a:t>	document.body.</a:t>
+            </a:r>
+            <a:r>
+              <a:rPr lang="en-US" b="1">
+                <a:solidFill>
+                  <a:srgbClr val="FFFF00"/>
+                </a:solidFill>
+                <a:effectLst/>
+              </a:rPr>
+              <a:t>removeChild</a:t>
+            </a:r>
+            <a:r>
+              <a:rPr lang="en-US">
+                <a:effectLst/>
+              </a:rPr>
+              <a:t>(link);</a:t>
+            </a:r>
+          </a:p>
+          <a:p>
+            <a:pPr marL="810000" lvl="2" indent="0">
+              <a:buNone/>
+            </a:pPr>
+            <a:r>
+              <a:rPr lang="en-US">
+                <a:effectLst/>
+              </a:rPr>
+              <a:t>	window.URL.</a:t>
+            </a:r>
+            <a:r>
+              <a:rPr lang="en-US" b="1">
+                <a:solidFill>
+                  <a:srgbClr val="FFFF00"/>
+                </a:solidFill>
+                <a:effectLst/>
+              </a:rPr>
+              <a:t>revokeObjectURL</a:t>
+            </a:r>
+            <a:r>
+              <a:rPr lang="en-US">
+                <a:effectLst/>
+              </a:rPr>
+              <a:t>(downloadURL);</a:t>
+            </a:r>
+          </a:p>
+          <a:p>
+            <a:pPr marL="810000" lvl="2" indent="0">
+              <a:buNone/>
+            </a:pPr>
+            <a:r>
+              <a:rPr lang="en-US" b="1">
+                <a:effectLst/>
+              </a:rPr>
+              <a:t>	</a:t>
+            </a:r>
+            <a:r>
+              <a:rPr lang="en-US"/>
+              <a:t>Swal.close();    // close the current opening sweat alert</a:t>
+            </a:r>
+            <a:endParaRPr lang="en-US" b="1">
+              <a:effectLst/>
+            </a:endParaRPr>
+          </a:p>
+          <a:p>
+            <a:pPr marL="810000" lvl="2" indent="0">
+              <a:buNone/>
+            </a:pPr>
+            <a:r>
+              <a:rPr lang="en-US" b="1">
+                <a:effectLst/>
+              </a:rPr>
+              <a:t>}</a:t>
+            </a:r>
+          </a:p>
+          <a:p>
+            <a:pPr marL="450000" lvl="1" indent="0">
+              <a:buNone/>
+            </a:pPr>
+            <a:r>
+              <a:rPr lang="en-US" b="1">
+                <a:effectLst/>
+              </a:rPr>
+              <a:t>	 });</a:t>
+            </a:r>
+          </a:p>
+          <a:p>
+            <a:r>
+              <a:rPr lang="en-US" sz="1600" b="1">
+                <a:effectLst/>
+              </a:rPr>
+              <a:t>To cancel the operation (download) : </a:t>
+            </a:r>
+            <a:r>
+              <a:rPr lang="en-US" b="1">
+                <a:solidFill>
+                  <a:srgbClr val="FFFF00"/>
+                </a:solidFill>
+                <a:effectLst/>
+              </a:rPr>
+              <a:t>request</a:t>
+            </a:r>
+            <a:r>
+              <a:rPr lang="en-US">
+                <a:effectLst/>
+              </a:rPr>
+              <a:t>.</a:t>
+            </a:r>
+            <a:r>
+              <a:rPr lang="en-US" b="1">
+                <a:solidFill>
+                  <a:srgbClr val="00B0F0"/>
+                </a:solidFill>
+                <a:effectLst/>
+              </a:rPr>
+              <a:t>unsubscribe</a:t>
+            </a:r>
+            <a:r>
+              <a:rPr lang="en-US">
+                <a:effectLst/>
+              </a:rPr>
+              <a:t>();</a:t>
+            </a:r>
+          </a:p>
+        </p:txBody>
+      </p:sp>
+    </p:spTree>
+    <p:extLst>
+      <p:ext uri="{BB962C8B-B14F-4D97-AF65-F5344CB8AC3E}">
+        <p14:creationId xmlns:p14="http://schemas.microsoft.com/office/powerpoint/2010/main" val="1837649939"/>
+      </p:ext>
+    </p:extLst>
+  </p:cSld>
+  <p:clrMapOvr>
+    <a:masterClrMapping/>
+  </p:clrMapOvr>
+</p:sld>
+</file>
+
+<file path=ppt/slides/slide91.xml><?xml version="1.0" encoding="utf-8"?>
+<p:sld xmlns:a="http://schemas.openxmlformats.org/drawingml/2006/main" xmlns:r="http://schemas.openxmlformats.org/officeDocument/2006/relationships" xmlns:p="http://schemas.openxmlformats.org/presentationml/2006/main">
+  <p:cSld>
+    <p:spTree>
+      <p:nvGrpSpPr>
+        <p:cNvPr id="1" name=""/>
+        <p:cNvGrpSpPr/>
+        <p:nvPr/>
+      </p:nvGrpSpPr>
+      <p:grpSpPr>
+        <a:xfrm>
+          <a:off x="0" y="0"/>
+          <a:ext cx="0" cy="0"/>
+          <a:chOff x="0" y="0"/>
+          <a:chExt cx="0" cy="0"/>
+        </a:xfrm>
+      </p:grpSpPr>
+      <p:sp>
+        <p:nvSpPr>
+          <p:cNvPr id="2" name="Title 1">
+            <a:extLst>
+              <a:ext uri="{FF2B5EF4-FFF2-40B4-BE49-F238E27FC236}">
+                <a16:creationId xmlns:a16="http://schemas.microsoft.com/office/drawing/2014/main" id="{433B8971-4F44-64C9-F90F-D0555500349D}"/>
+              </a:ext>
+            </a:extLst>
+          </p:cNvPr>
+          <p:cNvSpPr>
+            <a:spLocks noGrp="1"/>
+          </p:cNvSpPr>
+          <p:nvPr>
+            <p:ph type="title"/>
+          </p:nvPr>
+        </p:nvSpPr>
+        <p:spPr>
+          <a:xfrm>
+            <a:off x="913795" y="0"/>
+            <a:ext cx="10353762" cy="476250"/>
+          </a:xfrm>
+        </p:spPr>
+        <p:txBody>
+          <a:bodyPr>
+            <a:normAutofit fontScale="90000"/>
+          </a:bodyPr>
+          <a:lstStyle/>
+          <a:p>
+            <a:r>
+              <a:rPr lang="en-US" b="1"/>
+              <a:t>Uploading</a:t>
+            </a:r>
+            <a:r>
+              <a:rPr lang="en-US"/>
+              <a:t> </a:t>
+            </a:r>
+          </a:p>
+        </p:txBody>
+      </p:sp>
+      <p:sp>
+        <p:nvSpPr>
+          <p:cNvPr id="3" name="Content Placeholder 2">
+            <a:extLst>
+              <a:ext uri="{FF2B5EF4-FFF2-40B4-BE49-F238E27FC236}">
+                <a16:creationId xmlns:a16="http://schemas.microsoft.com/office/drawing/2014/main" id="{7BE786D0-6974-AED6-FB0C-6F9234604CA5}"/>
+              </a:ext>
+            </a:extLst>
+          </p:cNvPr>
+          <p:cNvSpPr>
+            <a:spLocks noGrp="1"/>
+          </p:cNvSpPr>
+          <p:nvPr>
+            <p:ph idx="1"/>
+          </p:nvPr>
+        </p:nvSpPr>
+        <p:spPr>
+          <a:xfrm>
+            <a:off x="304800" y="571499"/>
+            <a:ext cx="11601450" cy="6067425"/>
+          </a:xfrm>
+        </p:spPr>
+        <p:txBody>
+          <a:bodyPr/>
+          <a:lstStyle/>
+          <a:p>
+            <a:r>
+              <a:rPr lang="en-US" b="1"/>
+              <a:t>At service</a:t>
+            </a:r>
+          </a:p>
+          <a:p>
+            <a:pPr lvl="1"/>
+            <a:r>
+              <a:rPr lang="en-US">
+                <a:effectLst/>
+              </a:rPr>
+              <a:t> const </a:t>
+            </a:r>
+            <a:r>
+              <a:rPr lang="en-US" b="1">
+                <a:solidFill>
+                  <a:srgbClr val="00B0F0"/>
+                </a:solidFill>
+                <a:effectLst/>
+              </a:rPr>
+              <a:t>formData</a:t>
+            </a:r>
+            <a:r>
+              <a:rPr lang="en-US">
+                <a:effectLst/>
+              </a:rPr>
+              <a:t> = new </a:t>
+            </a:r>
+            <a:r>
+              <a:rPr lang="en-US" b="1">
+                <a:solidFill>
+                  <a:srgbClr val="FFFF00"/>
+                </a:solidFill>
+                <a:effectLst/>
+              </a:rPr>
+              <a:t>FormData()</a:t>
+            </a:r>
+            <a:r>
+              <a:rPr lang="en-US">
+                <a:effectLst/>
+              </a:rPr>
+              <a:t>;</a:t>
+            </a:r>
+          </a:p>
+          <a:p>
+            <a:pPr lvl="1"/>
+            <a:r>
+              <a:rPr lang="en-US">
+                <a:effectLst/>
+              </a:rPr>
+              <a:t>formData.</a:t>
+            </a:r>
+            <a:r>
+              <a:rPr lang="en-US" b="1">
+                <a:solidFill>
+                  <a:srgbClr val="FFFF00"/>
+                </a:solidFill>
+                <a:effectLst/>
+              </a:rPr>
+              <a:t>append</a:t>
+            </a:r>
+            <a:r>
+              <a:rPr lang="en-US">
+                <a:effectLst/>
+              </a:rPr>
+              <a:t>("Image", </a:t>
+            </a:r>
+            <a:r>
+              <a:rPr lang="en-US" b="1">
+                <a:solidFill>
+                  <a:srgbClr val="FFFF00"/>
+                </a:solidFill>
+                <a:effectLst/>
+              </a:rPr>
+              <a:t>productDTO</a:t>
+            </a:r>
+            <a:r>
+              <a:rPr lang="en-US">
+                <a:effectLst/>
+              </a:rPr>
+              <a:t>.Image as </a:t>
+            </a:r>
+            <a:r>
+              <a:rPr lang="en-US" b="1">
+                <a:solidFill>
+                  <a:srgbClr val="92D050"/>
+                </a:solidFill>
+                <a:effectLst/>
+              </a:rPr>
+              <a:t>File</a:t>
+            </a:r>
+            <a:r>
+              <a:rPr lang="en-US">
+                <a:effectLst/>
+              </a:rPr>
+              <a:t>);</a:t>
+            </a:r>
+          </a:p>
+          <a:p>
+            <a:pPr lvl="1"/>
+            <a:r>
+              <a:rPr lang="en-US" b="1"/>
+              <a:t>At edit</a:t>
+            </a:r>
+          </a:p>
+          <a:p>
+            <a:pPr marL="810000" lvl="2" indent="0">
+              <a:buNone/>
+            </a:pPr>
+            <a:r>
+              <a:rPr lang="en-US" sz="1800" b="1">
+                <a:effectLst/>
+              </a:rPr>
+              <a:t>if(categoryDTO.Image instanceof </a:t>
+            </a:r>
+            <a:r>
+              <a:rPr lang="en-US" sz="1800" b="1">
+                <a:solidFill>
+                  <a:srgbClr val="00B0F0"/>
+                </a:solidFill>
+                <a:effectLst/>
+              </a:rPr>
+              <a:t>File</a:t>
+            </a:r>
+            <a:r>
+              <a:rPr lang="en-US" sz="1800" b="1">
+                <a:effectLst/>
+              </a:rPr>
+              <a:t>) { formData.append("image", categoryDTO.Image as File) }</a:t>
+            </a:r>
+          </a:p>
+          <a:p>
+            <a:pPr lvl="2"/>
+            <a:r>
+              <a:rPr lang="en-US" b="1">
+                <a:effectLst/>
+              </a:rPr>
+              <a:t>categoryDTO.Image // </a:t>
+            </a:r>
+            <a:r>
+              <a:rPr lang="en-US">
+                <a:effectLst/>
+              </a:rPr>
+              <a:t>Image: File | null</a:t>
+            </a:r>
+          </a:p>
+          <a:p>
+            <a:pPr lvl="2"/>
+            <a:endParaRPr lang="en-US" b="1"/>
+          </a:p>
+          <a:p>
+            <a:endParaRPr lang="en-US" b="1"/>
+          </a:p>
+          <a:p>
+            <a:endParaRPr lang="en-US" b="1"/>
+          </a:p>
+          <a:p>
+            <a:endParaRPr lang="en-US" b="1"/>
+          </a:p>
+          <a:p>
+            <a:endParaRPr lang="en-US" b="1"/>
+          </a:p>
+          <a:p>
+            <a:endParaRPr lang="en-US"/>
+          </a:p>
+          <a:p>
+            <a:endParaRPr lang="en-US"/>
+          </a:p>
+          <a:p>
+            <a:endParaRPr lang="en-US"/>
+          </a:p>
+          <a:p>
+            <a:endParaRPr lang="en-US"/>
+          </a:p>
+        </p:txBody>
+      </p:sp>
+    </p:spTree>
+    <p:extLst>
+      <p:ext uri="{BB962C8B-B14F-4D97-AF65-F5344CB8AC3E}">
+        <p14:creationId xmlns:p14="http://schemas.microsoft.com/office/powerpoint/2010/main" val="866458153"/>
+      </p:ext>
+    </p:extLst>
+  </p:cSld>
+  <p:clrMapOvr>
+    <a:masterClrMapping/>
+  </p:clrMapOvr>
+</p:sld>
+</file>
+
+<file path=ppt/slides/slide92.xml><?xml version="1.0" encoding="utf-8"?>
+<p:sld xmlns:a="http://schemas.openxmlformats.org/drawingml/2006/main" xmlns:r="http://schemas.openxmlformats.org/officeDocument/2006/relationships" xmlns:p="http://schemas.openxmlformats.org/presentationml/2006/main">
+  <p:cSld>
+    <p:spTree>
+      <p:nvGrpSpPr>
         <p:cNvPr id="1" name="">
           <a:extLst>
             <a:ext uri="{FF2B5EF4-FFF2-40B4-BE49-F238E27FC236}">
@@ -32241,7 +34499,7 @@
 </p:sld>
 </file>
 
-<file path=ppt/slides/slide91.xml><?xml version="1.0" encoding="utf-8"?>
+<file path=ppt/slides/slide93.xml><?xml version="1.0" encoding="utf-8"?>
 <p:sld xmlns:a="http://schemas.openxmlformats.org/drawingml/2006/main" xmlns:r="http://schemas.openxmlformats.org/officeDocument/2006/relationships" xmlns:p="http://schemas.openxmlformats.org/presentationml/2006/main">
   <p:cSld>
     <p:spTree>
@@ -32497,7 +34755,7 @@
 </p:sld>
 </file>
 
-<file path=ppt/slides/slide92.xml><?xml version="1.0" encoding="utf-8"?>
+<file path=ppt/slides/slide94.xml><?xml version="1.0" encoding="utf-8"?>
 <p:sld xmlns:a="http://schemas.openxmlformats.org/drawingml/2006/main" xmlns:r="http://schemas.openxmlformats.org/officeDocument/2006/relationships" xmlns:p="http://schemas.openxmlformats.org/presentationml/2006/main">
   <p:cSld>
     <p:spTree>
@@ -32733,7 +34991,7 @@
 </p:sld>
 </file>
 
-<file path=ppt/slides/slide93.xml><?xml version="1.0" encoding="utf-8"?>
+<file path=ppt/slides/slide95.xml><?xml version="1.0" encoding="utf-8"?>
 <p:sld xmlns:a="http://schemas.openxmlformats.org/drawingml/2006/main" xmlns:r="http://schemas.openxmlformats.org/officeDocument/2006/relationships" xmlns:p="http://schemas.openxmlformats.org/presentationml/2006/main">
   <p:cSld>
     <p:spTree>
@@ -32802,7 +35060,7 @@
 </p:sld>
 </file>
 
-<file path=ppt/slides/slide94.xml><?xml version="1.0" encoding="utf-8"?>
+<file path=ppt/slides/slide96.xml><?xml version="1.0" encoding="utf-8"?>
 <p:sld xmlns:a="http://schemas.openxmlformats.org/drawingml/2006/main" xmlns:r="http://schemas.openxmlformats.org/officeDocument/2006/relationships" xmlns:p="http://schemas.openxmlformats.org/presentationml/2006/main">
   <p:cSld>
     <p:spTree>
@@ -32955,7 +35213,7 @@
 </p:sld>
 </file>
 
-<file path=ppt/slides/slide95.xml><?xml version="1.0" encoding="utf-8"?>
+<file path=ppt/slides/slide97.xml><?xml version="1.0" encoding="utf-8"?>
 <p:sld xmlns:a="http://schemas.openxmlformats.org/drawingml/2006/main" xmlns:r="http://schemas.openxmlformats.org/officeDocument/2006/relationships" xmlns:p="http://schemas.openxmlformats.org/presentationml/2006/main">
   <p:cSld>
     <p:spTree>
@@ -33660,7 +35918,7 @@
 </p:sld>
 </file>
 
-<file path=ppt/slides/slide96.xml><?xml version="1.0" encoding="utf-8"?>
+<file path=ppt/slides/slide98.xml><?xml version="1.0" encoding="utf-8"?>
 <p:sld xmlns:a="http://schemas.openxmlformats.org/drawingml/2006/main" xmlns:r="http://schemas.openxmlformats.org/officeDocument/2006/relationships" xmlns:p="http://schemas.openxmlformats.org/presentationml/2006/main">
   <p:cSld>
     <p:spTree>
@@ -33820,164 +36078,6 @@
 </p:sld>
 </file>
 
-<file path=ppt/slides/slide97.xml><?xml version="1.0" encoding="utf-8"?>
-<p:sld xmlns:a="http://schemas.openxmlformats.org/drawingml/2006/main" xmlns:r="http://schemas.openxmlformats.org/officeDocument/2006/relationships" xmlns:p="http://schemas.openxmlformats.org/presentationml/2006/main">
-  <p:cSld>
-    <p:spTree>
-      <p:nvGrpSpPr>
-        <p:cNvPr id="1" name="">
-          <a:extLst>
-            <a:ext uri="{FF2B5EF4-FFF2-40B4-BE49-F238E27FC236}">
-              <a16:creationId xmlns:a16="http://schemas.microsoft.com/office/drawing/2014/main" id="{97BBE282-2490-D937-4CD4-B4E428EC268B}"/>
-            </a:ext>
-          </a:extLst>
-        </p:cNvPr>
-        <p:cNvGrpSpPr/>
-        <p:nvPr/>
-      </p:nvGrpSpPr>
-      <p:grpSpPr>
-        <a:xfrm>
-          <a:off x="0" y="0"/>
-          <a:ext cx="0" cy="0"/>
-          <a:chOff x="0" y="0"/>
-          <a:chExt cx="0" cy="0"/>
-        </a:xfrm>
-      </p:grpSpPr>
-      <p:sp>
-        <p:nvSpPr>
-          <p:cNvPr id="2" name="Title 1">
-            <a:extLst>
-              <a:ext uri="{FF2B5EF4-FFF2-40B4-BE49-F238E27FC236}">
-                <a16:creationId xmlns:a16="http://schemas.microsoft.com/office/drawing/2014/main" id="{B08F3CA2-43EE-9985-92D9-90B610EA773D}"/>
-              </a:ext>
-            </a:extLst>
-          </p:cNvPr>
-          <p:cNvSpPr>
-            <a:spLocks noGrp="1"/>
-          </p:cNvSpPr>
-          <p:nvPr>
-            <p:ph type="title"/>
-          </p:nvPr>
-        </p:nvSpPr>
-        <p:spPr>
-          <a:xfrm>
-            <a:off x="919119" y="2120202"/>
-            <a:ext cx="10353762" cy="1778558"/>
-          </a:xfrm>
-        </p:spPr>
-        <p:txBody>
-          <a:bodyPr>
-            <a:normAutofit/>
-          </a:bodyPr>
-          <a:lstStyle/>
-          <a:p>
-            <a:r>
-              <a:rPr lang="en-US" sz="4800" b="1">
-                <a:solidFill>
-                  <a:srgbClr val="FF0000"/>
-                </a:solidFill>
-              </a:rPr>
-              <a:t>End Angular Material </a:t>
-            </a:r>
-          </a:p>
-        </p:txBody>
-      </p:sp>
-    </p:spTree>
-    <p:extLst>
-      <p:ext uri="{BB962C8B-B14F-4D97-AF65-F5344CB8AC3E}">
-        <p14:creationId xmlns:p14="http://schemas.microsoft.com/office/powerpoint/2010/main" val="1724169713"/>
-      </p:ext>
-    </p:extLst>
-  </p:cSld>
-  <p:clrMapOvr>
-    <a:masterClrMapping/>
-  </p:clrMapOvr>
-</p:sld>
-</file>
-
-<file path=ppt/slides/slide98.xml><?xml version="1.0" encoding="utf-8"?>
-<p:sld xmlns:a="http://schemas.openxmlformats.org/drawingml/2006/main" xmlns:r="http://schemas.openxmlformats.org/officeDocument/2006/relationships" xmlns:p="http://schemas.openxmlformats.org/presentationml/2006/main">
-  <p:cSld>
-    <p:spTree>
-      <p:nvGrpSpPr>
-        <p:cNvPr id="1" name=""/>
-        <p:cNvGrpSpPr/>
-        <p:nvPr/>
-      </p:nvGrpSpPr>
-      <p:grpSpPr>
-        <a:xfrm>
-          <a:off x="0" y="0"/>
-          <a:ext cx="0" cy="0"/>
-          <a:chOff x="0" y="0"/>
-          <a:chExt cx="0" cy="0"/>
-        </a:xfrm>
-      </p:grpSpPr>
-      <p:sp>
-        <p:nvSpPr>
-          <p:cNvPr id="2" name="Title 1">
-            <a:extLst>
-              <a:ext uri="{FF2B5EF4-FFF2-40B4-BE49-F238E27FC236}">
-                <a16:creationId xmlns:a16="http://schemas.microsoft.com/office/drawing/2014/main" id="{C18561F7-D13B-CC09-3AE9-BB94EDF5C52C}"/>
-              </a:ext>
-            </a:extLst>
-          </p:cNvPr>
-          <p:cNvSpPr>
-            <a:spLocks noGrp="1"/>
-          </p:cNvSpPr>
-          <p:nvPr>
-            <p:ph type="title"/>
-          </p:nvPr>
-        </p:nvSpPr>
-        <p:spPr/>
-        <p:txBody>
-          <a:bodyPr/>
-          <a:lstStyle/>
-          <a:p>
-            <a:r>
-              <a:rPr lang="en-US"/>
-              <a:t>Febric.js</a:t>
-            </a:r>
-          </a:p>
-        </p:txBody>
-      </p:sp>
-      <p:sp>
-        <p:nvSpPr>
-          <p:cNvPr id="3" name="Content Placeholder 2">
-            <a:extLst>
-              <a:ext uri="{FF2B5EF4-FFF2-40B4-BE49-F238E27FC236}">
-                <a16:creationId xmlns:a16="http://schemas.microsoft.com/office/drawing/2014/main" id="{90A35B0F-6B77-0DCD-5499-5A4FDADA6392}"/>
-              </a:ext>
-            </a:extLst>
-          </p:cNvPr>
-          <p:cNvSpPr>
-            <a:spLocks noGrp="1"/>
-          </p:cNvSpPr>
-          <p:nvPr>
-            <p:ph idx="1"/>
-          </p:nvPr>
-        </p:nvSpPr>
-        <p:spPr/>
-        <p:txBody>
-          <a:bodyPr/>
-          <a:lstStyle/>
-          <a:p>
-            <a:endParaRPr lang="en-US"/>
-          </a:p>
-        </p:txBody>
-      </p:sp>
-    </p:spTree>
-    <p:extLst>
-      <p:ext uri="{BB962C8B-B14F-4D97-AF65-F5344CB8AC3E}">
-        <p14:creationId xmlns:p14="http://schemas.microsoft.com/office/powerpoint/2010/main" val="2232214203"/>
-      </p:ext>
-    </p:extLst>
-  </p:cSld>
-  <p:clrMapOvr>
-    <a:masterClrMapping/>
-  </p:clrMapOvr>
-</p:sld>
-</file>
-
 <file path=ppt/slides/slide99.xml><?xml version="1.0" encoding="utf-8"?>
 <p:sld xmlns:a="http://schemas.openxmlformats.org/drawingml/2006/main" xmlns:r="http://schemas.openxmlformats.org/officeDocument/2006/relationships" xmlns:p="http://schemas.openxmlformats.org/presentationml/2006/main">
   <p:cSld>
@@ -34000,7 +36100,7 @@
           <p:cNvPr id="2" name="Title 1">
             <a:extLst>
               <a:ext uri="{FF2B5EF4-FFF2-40B4-BE49-F238E27FC236}">
-                <a16:creationId xmlns:a16="http://schemas.microsoft.com/office/drawing/2014/main" id="{D22BD241-91BC-982E-E8D8-DA059E13C029}"/>
+                <a16:creationId xmlns:a16="http://schemas.microsoft.com/office/drawing/2014/main" id="{00CFA434-D969-4DB6-BF4E-B2D7460E5B18}"/>
               </a:ext>
             </a:extLst>
           </p:cNvPr>
@@ -34014,19 +36114,22 @@
         <p:spPr>
           <a:xfrm>
             <a:off x="913795" y="0"/>
-            <a:ext cx="10353762" cy="544310"/>
+            <a:ext cx="10353762" cy="970450"/>
           </a:xfrm>
         </p:spPr>
         <p:txBody>
           <a:bodyPr>
-            <a:noAutofit/>
+            <a:normAutofit/>
           </a:bodyPr>
           <a:lstStyle/>
           <a:p>
             <a:r>
-              <a:rPr lang="en-US" sz="3200"/>
-              <a:t>Layout [cont.]</a:t>
-            </a:r>
+              <a:rPr lang="en-US">
+                <a:effectLst/>
+              </a:rPr>
+              <a:t>mat-autocomplete</a:t>
+            </a:r>
+            <a:endParaRPr lang="en-US"/>
           </a:p>
         </p:txBody>
       </p:sp>
@@ -34035,7 +36138,7 @@
           <p:cNvPr id="3" name="Content Placeholder 2">
             <a:extLst>
               <a:ext uri="{FF2B5EF4-FFF2-40B4-BE49-F238E27FC236}">
-                <a16:creationId xmlns:a16="http://schemas.microsoft.com/office/drawing/2014/main" id="{F60292FF-FB71-EABA-22C8-49723B52D012}"/>
+                <a16:creationId xmlns:a16="http://schemas.microsoft.com/office/drawing/2014/main" id="{6904C1E7-F5C0-DC7D-5482-55AE04A450EA}"/>
               </a:ext>
             </a:extLst>
           </p:cNvPr>
@@ -34046,126 +36149,19 @@
             <p:ph idx="1"/>
           </p:nvPr>
         </p:nvSpPr>
-        <p:spPr>
-          <a:xfrm>
-            <a:off x="913795" y="544310"/>
-            <a:ext cx="10353762" cy="5246891"/>
-          </a:xfrm>
-        </p:spPr>
+        <p:spPr/>
         <p:txBody>
           <a:bodyPr/>
           <a:lstStyle/>
           <a:p>
-            <a:r>
-              <a:rPr lang="en-US"/>
-              <a:t>Create sidebar component at components folder</a:t>
-            </a:r>
-          </a:p>
-          <a:p>
-            <a:endParaRPr lang="en-US"/>
-          </a:p>
-          <a:p>
-            <a:endParaRPr lang="en-US"/>
-          </a:p>
-          <a:p>
             <a:endParaRPr lang="en-US"/>
           </a:p>
         </p:txBody>
       </p:sp>
-      <p:pic>
-        <p:nvPicPr>
-          <p:cNvPr id="5" name="Picture 4">
-            <a:extLst>
-              <a:ext uri="{FF2B5EF4-FFF2-40B4-BE49-F238E27FC236}">
-                <a16:creationId xmlns:a16="http://schemas.microsoft.com/office/drawing/2014/main" id="{5FEC7977-8DB6-5D26-4E6F-029EB9313555}"/>
-              </a:ext>
-            </a:extLst>
-          </p:cNvPr>
-          <p:cNvPicPr>
-            <a:picLocks noChangeAspect="1"/>
-          </p:cNvPicPr>
-          <p:nvPr/>
-        </p:nvPicPr>
-        <p:blipFill>
-          <a:blip r:embed="rId2"/>
-          <a:stretch>
-            <a:fillRect/>
-          </a:stretch>
-        </p:blipFill>
-        <p:spPr>
-          <a:xfrm>
-            <a:off x="0" y="968827"/>
-            <a:ext cx="7332109" cy="3844334"/>
-          </a:xfrm>
-          <a:prstGeom prst="rect">
-            <a:avLst/>
-          </a:prstGeom>
-        </p:spPr>
-      </p:pic>
-      <p:pic>
-        <p:nvPicPr>
-          <p:cNvPr id="7" name="Picture 6">
-            <a:extLst>
-              <a:ext uri="{FF2B5EF4-FFF2-40B4-BE49-F238E27FC236}">
-                <a16:creationId xmlns:a16="http://schemas.microsoft.com/office/drawing/2014/main" id="{97B2557A-5613-A7A6-6167-C88E6497C3C4}"/>
-              </a:ext>
-            </a:extLst>
-          </p:cNvPr>
-          <p:cNvPicPr>
-            <a:picLocks noChangeAspect="1"/>
-          </p:cNvPicPr>
-          <p:nvPr/>
-        </p:nvPicPr>
-        <p:blipFill>
-          <a:blip r:embed="rId3"/>
-          <a:stretch>
-            <a:fillRect/>
-          </a:stretch>
-        </p:blipFill>
-        <p:spPr>
-          <a:xfrm>
-            <a:off x="7332109" y="798004"/>
-            <a:ext cx="4774377" cy="3752248"/>
-          </a:xfrm>
-          <a:prstGeom prst="rect">
-            <a:avLst/>
-          </a:prstGeom>
-        </p:spPr>
-      </p:pic>
-      <p:pic>
-        <p:nvPicPr>
-          <p:cNvPr id="9" name="Picture 8">
-            <a:extLst>
-              <a:ext uri="{FF2B5EF4-FFF2-40B4-BE49-F238E27FC236}">
-                <a16:creationId xmlns:a16="http://schemas.microsoft.com/office/drawing/2014/main" id="{F5B8091C-F973-69E1-483C-A812643E422E}"/>
-              </a:ext>
-            </a:extLst>
-          </p:cNvPr>
-          <p:cNvPicPr>
-            <a:picLocks noChangeAspect="1"/>
-          </p:cNvPicPr>
-          <p:nvPr/>
-        </p:nvPicPr>
-        <p:blipFill>
-          <a:blip r:embed="rId4"/>
-          <a:stretch>
-            <a:fillRect/>
-          </a:stretch>
-        </p:blipFill>
-        <p:spPr>
-          <a:xfrm>
-            <a:off x="1750245" y="4813093"/>
-            <a:ext cx="4158186" cy="1956215"/>
-          </a:xfrm>
-          <a:prstGeom prst="rect">
-            <a:avLst/>
-          </a:prstGeom>
-        </p:spPr>
-      </p:pic>
     </p:spTree>
     <p:extLst>
       <p:ext uri="{BB962C8B-B14F-4D97-AF65-F5344CB8AC3E}">
-        <p14:creationId xmlns:p14="http://schemas.microsoft.com/office/powerpoint/2010/main" val="3498281297"/>
+        <p14:creationId xmlns:p14="http://schemas.microsoft.com/office/powerpoint/2010/main" val="3425754776"/>
       </p:ext>
     </p:extLst>
   </p:cSld>

--- a/Angular & type script/Angular.pptx
+++ b/Angular & type script/Angular.pptx
@@ -440,7 +440,7 @@
           <a:p>
             <a:fld id="{6E57F856-C08C-4D83-8D37-28A6206D94A8}" type="datetimeFigureOut">
               <a:rPr lang="en-US" smtClean="0"/>
-              <a:t>6/3/2026</a:t>
+              <a:t>6/10/2026</a:t>
             </a:fld>
             <a:endParaRPr lang="en-US"/>
           </a:p>
@@ -976,7 +976,7 @@
           <a:p>
             <a:fld id="{BFD97FD3-0E3C-4940-AC08-248FE3BAAF7F}" type="datetimeFigureOut">
               <a:rPr lang="en-US" smtClean="0"/>
-              <a:t>6/3/2026</a:t>
+              <a:t>6/10/2026</a:t>
             </a:fld>
             <a:endParaRPr lang="en-US"/>
           </a:p>
@@ -1273,7 +1273,7 @@
           <a:p>
             <a:fld id="{BFD97FD3-0E3C-4940-AC08-248FE3BAAF7F}" type="datetimeFigureOut">
               <a:rPr lang="en-US" smtClean="0"/>
-              <a:t>6/3/2026</a:t>
+              <a:t>6/10/2026</a:t>
             </a:fld>
             <a:endParaRPr lang="en-US"/>
           </a:p>
@@ -1465,7 +1465,7 @@
           <a:p>
             <a:fld id="{BFD97FD3-0E3C-4940-AC08-248FE3BAAF7F}" type="datetimeFigureOut">
               <a:rPr lang="en-US" smtClean="0"/>
-              <a:t>6/3/2026</a:t>
+              <a:t>6/10/2026</a:t>
             </a:fld>
             <a:endParaRPr lang="en-US"/>
           </a:p>
@@ -1726,7 +1726,7 @@
           <a:p>
             <a:fld id="{BFD97FD3-0E3C-4940-AC08-248FE3BAAF7F}" type="datetimeFigureOut">
               <a:rPr lang="en-US" smtClean="0"/>
-              <a:t>6/3/2026</a:t>
+              <a:t>6/10/2026</a:t>
             </a:fld>
             <a:endParaRPr lang="en-US"/>
           </a:p>
@@ -2150,7 +2150,7 @@
           <a:p>
             <a:fld id="{BFD97FD3-0E3C-4940-AC08-248FE3BAAF7F}" type="datetimeFigureOut">
               <a:rPr lang="en-US" smtClean="0"/>
-              <a:t>6/3/2026</a:t>
+              <a:t>6/10/2026</a:t>
             </a:fld>
             <a:endParaRPr lang="en-US"/>
           </a:p>
@@ -2687,7 +2687,7 @@
           <a:p>
             <a:fld id="{BFD97FD3-0E3C-4940-AC08-248FE3BAAF7F}" type="datetimeFigureOut">
               <a:rPr lang="en-US" smtClean="0"/>
-              <a:t>6/3/2026</a:t>
+              <a:t>6/10/2026</a:t>
             </a:fld>
             <a:endParaRPr lang="en-US"/>
           </a:p>
@@ -3548,7 +3548,7 @@
           <a:p>
             <a:fld id="{BFD97FD3-0E3C-4940-AC08-248FE3BAAF7F}" type="datetimeFigureOut">
               <a:rPr lang="en-US" smtClean="0"/>
-              <a:t>6/3/2026</a:t>
+              <a:t>6/10/2026</a:t>
             </a:fld>
             <a:endParaRPr lang="en-US"/>
           </a:p>
@@ -3718,7 +3718,7 @@
           <a:p>
             <a:fld id="{BFD97FD3-0E3C-4940-AC08-248FE3BAAF7F}" type="datetimeFigureOut">
               <a:rPr lang="en-US" smtClean="0"/>
-              <a:t>6/3/2026</a:t>
+              <a:t>6/10/2026</a:t>
             </a:fld>
             <a:endParaRPr lang="en-US"/>
           </a:p>
@@ -3902,7 +3902,7 @@
           <a:p>
             <a:fld id="{BFD97FD3-0E3C-4940-AC08-248FE3BAAF7F}" type="datetimeFigureOut">
               <a:rPr lang="en-US" smtClean="0"/>
-              <a:t>6/3/2026</a:t>
+              <a:t>6/10/2026</a:t>
             </a:fld>
             <a:endParaRPr lang="en-US"/>
           </a:p>
@@ -4072,7 +4072,7 @@
           <a:p>
             <a:fld id="{BFD97FD3-0E3C-4940-AC08-248FE3BAAF7F}" type="datetimeFigureOut">
               <a:rPr lang="en-US" smtClean="0"/>
-              <a:t>6/3/2026</a:t>
+              <a:t>6/10/2026</a:t>
             </a:fld>
             <a:endParaRPr lang="en-US"/>
           </a:p>
@@ -4316,7 +4316,7 @@
           <a:p>
             <a:fld id="{BFD97FD3-0E3C-4940-AC08-248FE3BAAF7F}" type="datetimeFigureOut">
               <a:rPr lang="en-US" smtClean="0"/>
-              <a:t>6/3/2026</a:t>
+              <a:t>6/10/2026</a:t>
             </a:fld>
             <a:endParaRPr lang="en-US"/>
           </a:p>
@@ -4552,7 +4552,7 @@
           <a:p>
             <a:fld id="{BFD97FD3-0E3C-4940-AC08-248FE3BAAF7F}" type="datetimeFigureOut">
               <a:rPr lang="en-US" smtClean="0"/>
-              <a:t>6/3/2026</a:t>
+              <a:t>6/10/2026</a:t>
             </a:fld>
             <a:endParaRPr lang="en-US"/>
           </a:p>
@@ -5018,7 +5018,7 @@
           <a:p>
             <a:fld id="{BFD97FD3-0E3C-4940-AC08-248FE3BAAF7F}" type="datetimeFigureOut">
               <a:rPr lang="en-US" smtClean="0"/>
-              <a:t>6/3/2026</a:t>
+              <a:t>6/10/2026</a:t>
             </a:fld>
             <a:endParaRPr lang="en-US"/>
           </a:p>
@@ -5136,7 +5136,7 @@
           <a:p>
             <a:fld id="{BFD97FD3-0E3C-4940-AC08-248FE3BAAF7F}" type="datetimeFigureOut">
               <a:rPr lang="en-US" smtClean="0"/>
-              <a:t>6/3/2026</a:t>
+              <a:t>6/10/2026</a:t>
             </a:fld>
             <a:endParaRPr lang="en-US"/>
           </a:p>
@@ -5231,7 +5231,7 @@
           <a:p>
             <a:fld id="{BFD97FD3-0E3C-4940-AC08-248FE3BAAF7F}" type="datetimeFigureOut">
               <a:rPr lang="en-US" smtClean="0"/>
-              <a:t>6/3/2026</a:t>
+              <a:t>6/10/2026</a:t>
             </a:fld>
             <a:endParaRPr lang="en-US"/>
           </a:p>
@@ -5486,7 +5486,7 @@
           <a:p>
             <a:fld id="{BFD97FD3-0E3C-4940-AC08-248FE3BAAF7F}" type="datetimeFigureOut">
               <a:rPr lang="en-US" smtClean="0"/>
-              <a:t>6/3/2026</a:t>
+              <a:t>6/10/2026</a:t>
             </a:fld>
             <a:endParaRPr lang="en-US"/>
           </a:p>
@@ -5785,7 +5785,7 @@
           <a:p>
             <a:fld id="{BFD97FD3-0E3C-4940-AC08-248FE3BAAF7F}" type="datetimeFigureOut">
               <a:rPr lang="en-US" smtClean="0"/>
-              <a:t>6/3/2026</a:t>
+              <a:t>6/10/2026</a:t>
             </a:fld>
             <a:endParaRPr lang="en-US"/>
           </a:p>
@@ -6019,7 +6019,7 @@
           <a:p>
             <a:fld id="{BFD97FD3-0E3C-4940-AC08-248FE3BAAF7F}" type="datetimeFigureOut">
               <a:rPr lang="en-US" smtClean="0"/>
-              <a:t>6/3/2026</a:t>
+              <a:t>6/10/2026</a:t>
             </a:fld>
             <a:endParaRPr lang="en-US"/>
           </a:p>
@@ -26522,6 +26522,29 @@
               <a:rPr lang="en-US" b="1"/>
               <a:t>sweetalert2</a:t>
             </a:r>
+          </a:p>
+          <a:p>
+            <a:r>
+              <a:rPr lang="en-US">
+                <a:effectLst/>
+              </a:rPr>
+              <a:t>import Swal, { SweetAlertIcon, SweetAlertOptions } from 'sweetalert2';</a:t>
+            </a:r>
+          </a:p>
+          <a:p>
+            <a:br>
+              <a:rPr lang="en-US">
+                <a:effectLst/>
+              </a:rPr>
+            </a:br>
+            <a:endParaRPr lang="en-US">
+              <a:effectLst/>
+            </a:endParaRPr>
+          </a:p>
+          <a:p>
+            <a:endParaRPr lang="en-US">
+              <a:effectLst/>
+            </a:endParaRPr>
           </a:p>
           <a:p>
             <a:endParaRPr lang="en-US">

--- a/Angular & type script/Angular.pptx
+++ b/Angular & type script/Angular.pptx
@@ -452,7 +452,7 @@
           <a:p>
             <a:fld id="{6E57F856-C08C-4D83-8D37-28A6206D94A8}" type="datetimeFigureOut">
               <a:rPr lang="en-US" smtClean="0"/>
-              <a:t>6/10/2026</a:t>
+              <a:t>7/12/2026</a:t>
             </a:fld>
             <a:endParaRPr lang="en-US"/>
           </a:p>
@@ -988,7 +988,7 @@
           <a:p>
             <a:fld id="{BFD97FD3-0E3C-4940-AC08-248FE3BAAF7F}" type="datetimeFigureOut">
               <a:rPr lang="en-US" smtClean="0"/>
-              <a:t>6/10/2026</a:t>
+              <a:t>7/12/2026</a:t>
             </a:fld>
             <a:endParaRPr lang="en-US"/>
           </a:p>
@@ -1285,7 +1285,7 @@
           <a:p>
             <a:fld id="{BFD97FD3-0E3C-4940-AC08-248FE3BAAF7F}" type="datetimeFigureOut">
               <a:rPr lang="en-US" smtClean="0"/>
-              <a:t>6/10/2026</a:t>
+              <a:t>7/12/2026</a:t>
             </a:fld>
             <a:endParaRPr lang="en-US"/>
           </a:p>
@@ -1477,7 +1477,7 @@
           <a:p>
             <a:fld id="{BFD97FD3-0E3C-4940-AC08-248FE3BAAF7F}" type="datetimeFigureOut">
               <a:rPr lang="en-US" smtClean="0"/>
-              <a:t>6/10/2026</a:t>
+              <a:t>7/12/2026</a:t>
             </a:fld>
             <a:endParaRPr lang="en-US"/>
           </a:p>
@@ -1738,7 +1738,7 @@
           <a:p>
             <a:fld id="{BFD97FD3-0E3C-4940-AC08-248FE3BAAF7F}" type="datetimeFigureOut">
               <a:rPr lang="en-US" smtClean="0"/>
-              <a:t>6/10/2026</a:t>
+              <a:t>7/12/2026</a:t>
             </a:fld>
             <a:endParaRPr lang="en-US"/>
           </a:p>
@@ -2162,7 +2162,7 @@
           <a:p>
             <a:fld id="{BFD97FD3-0E3C-4940-AC08-248FE3BAAF7F}" type="datetimeFigureOut">
               <a:rPr lang="en-US" smtClean="0"/>
-              <a:t>6/10/2026</a:t>
+              <a:t>7/12/2026</a:t>
             </a:fld>
             <a:endParaRPr lang="en-US"/>
           </a:p>
@@ -2699,7 +2699,7 @@
           <a:p>
             <a:fld id="{BFD97FD3-0E3C-4940-AC08-248FE3BAAF7F}" type="datetimeFigureOut">
               <a:rPr lang="en-US" smtClean="0"/>
-              <a:t>6/10/2026</a:t>
+              <a:t>7/12/2026</a:t>
             </a:fld>
             <a:endParaRPr lang="en-US"/>
           </a:p>
@@ -3560,7 +3560,7 @@
           <a:p>
             <a:fld id="{BFD97FD3-0E3C-4940-AC08-248FE3BAAF7F}" type="datetimeFigureOut">
               <a:rPr lang="en-US" smtClean="0"/>
-              <a:t>6/10/2026</a:t>
+              <a:t>7/12/2026</a:t>
             </a:fld>
             <a:endParaRPr lang="en-US"/>
           </a:p>
@@ -3730,7 +3730,7 @@
           <a:p>
             <a:fld id="{BFD97FD3-0E3C-4940-AC08-248FE3BAAF7F}" type="datetimeFigureOut">
               <a:rPr lang="en-US" smtClean="0"/>
-              <a:t>6/10/2026</a:t>
+              <a:t>7/12/2026</a:t>
             </a:fld>
             <a:endParaRPr lang="en-US"/>
           </a:p>
@@ -3914,7 +3914,7 @@
           <a:p>
             <a:fld id="{BFD97FD3-0E3C-4940-AC08-248FE3BAAF7F}" type="datetimeFigureOut">
               <a:rPr lang="en-US" smtClean="0"/>
-              <a:t>6/10/2026</a:t>
+              <a:t>7/12/2026</a:t>
             </a:fld>
             <a:endParaRPr lang="en-US"/>
           </a:p>
@@ -4084,7 +4084,7 @@
           <a:p>
             <a:fld id="{BFD97FD3-0E3C-4940-AC08-248FE3BAAF7F}" type="datetimeFigureOut">
               <a:rPr lang="en-US" smtClean="0"/>
-              <a:t>6/10/2026</a:t>
+              <a:t>7/12/2026</a:t>
             </a:fld>
             <a:endParaRPr lang="en-US"/>
           </a:p>
@@ -4328,7 +4328,7 @@
           <a:p>
             <a:fld id="{BFD97FD3-0E3C-4940-AC08-248FE3BAAF7F}" type="datetimeFigureOut">
               <a:rPr lang="en-US" smtClean="0"/>
-              <a:t>6/10/2026</a:t>
+              <a:t>7/12/2026</a:t>
             </a:fld>
             <a:endParaRPr lang="en-US"/>
           </a:p>
@@ -4564,7 +4564,7 @@
           <a:p>
             <a:fld id="{BFD97FD3-0E3C-4940-AC08-248FE3BAAF7F}" type="datetimeFigureOut">
               <a:rPr lang="en-US" smtClean="0"/>
-              <a:t>6/10/2026</a:t>
+              <a:t>7/12/2026</a:t>
             </a:fld>
             <a:endParaRPr lang="en-US"/>
           </a:p>
@@ -5030,7 +5030,7 @@
           <a:p>
             <a:fld id="{BFD97FD3-0E3C-4940-AC08-248FE3BAAF7F}" type="datetimeFigureOut">
               <a:rPr lang="en-US" smtClean="0"/>
-              <a:t>6/10/2026</a:t>
+              <a:t>7/12/2026</a:t>
             </a:fld>
             <a:endParaRPr lang="en-US"/>
           </a:p>
@@ -5148,7 +5148,7 @@
           <a:p>
             <a:fld id="{BFD97FD3-0E3C-4940-AC08-248FE3BAAF7F}" type="datetimeFigureOut">
               <a:rPr lang="en-US" smtClean="0"/>
-              <a:t>6/10/2026</a:t>
+              <a:t>7/12/2026</a:t>
             </a:fld>
             <a:endParaRPr lang="en-US"/>
           </a:p>
@@ -5243,7 +5243,7 @@
           <a:p>
             <a:fld id="{BFD97FD3-0E3C-4940-AC08-248FE3BAAF7F}" type="datetimeFigureOut">
               <a:rPr lang="en-US" smtClean="0"/>
-              <a:t>6/10/2026</a:t>
+              <a:t>7/12/2026</a:t>
             </a:fld>
             <a:endParaRPr lang="en-US"/>
           </a:p>
@@ -5498,7 +5498,7 @@
           <a:p>
             <a:fld id="{BFD97FD3-0E3C-4940-AC08-248FE3BAAF7F}" type="datetimeFigureOut">
               <a:rPr lang="en-US" smtClean="0"/>
-              <a:t>6/10/2026</a:t>
+              <a:t>7/12/2026</a:t>
             </a:fld>
             <a:endParaRPr lang="en-US"/>
           </a:p>
@@ -5797,7 +5797,7 @@
           <a:p>
             <a:fld id="{BFD97FD3-0E3C-4940-AC08-248FE3BAAF7F}" type="datetimeFigureOut">
               <a:rPr lang="en-US" smtClean="0"/>
-              <a:t>6/10/2026</a:t>
+              <a:t>7/12/2026</a:t>
             </a:fld>
             <a:endParaRPr lang="en-US"/>
           </a:p>
@@ -6031,7 +6031,7 @@
           <a:p>
             <a:fld id="{BFD97FD3-0E3C-4940-AC08-248FE3BAAF7F}" type="datetimeFigureOut">
               <a:rPr lang="en-US" smtClean="0"/>
-              <a:t>6/10/2026</a:t>
+              <a:t>7/12/2026</a:t>
             </a:fld>
             <a:endParaRPr lang="en-US"/>
           </a:p>

--- a/Angular & type script/Angular.pptx
+++ b/Angular & type script/Angular.pptx
@@ -5,7 +5,7 @@
     <p:sldMasterId id="2147483660" r:id="rId1"/>
   </p:sldMasterIdLst>
   <p:notesMasterIdLst>
-    <p:notesMasterId r:id="rId159"/>
+    <p:notesMasterId r:id="rId160"/>
   </p:notesMasterIdLst>
   <p:sldIdLst>
     <p:sldId id="256" r:id="rId2"/>
@@ -128,43 +128,44 @@
     <p:sldId id="313" r:id="rId119"/>
     <p:sldId id="345" r:id="rId120"/>
     <p:sldId id="347" r:id="rId121"/>
-    <p:sldId id="349" r:id="rId122"/>
-    <p:sldId id="352" r:id="rId123"/>
-    <p:sldId id="348" r:id="rId124"/>
-    <p:sldId id="316" r:id="rId125"/>
-    <p:sldId id="335" r:id="rId126"/>
-    <p:sldId id="289" r:id="rId127"/>
-    <p:sldId id="290" r:id="rId128"/>
-    <p:sldId id="312" r:id="rId129"/>
-    <p:sldId id="357" r:id="rId130"/>
-    <p:sldId id="399" r:id="rId131"/>
-    <p:sldId id="341" r:id="rId132"/>
-    <p:sldId id="322" r:id="rId133"/>
-    <p:sldId id="280" r:id="rId134"/>
-    <p:sldId id="358" r:id="rId135"/>
-    <p:sldId id="360" r:id="rId136"/>
-    <p:sldId id="373" r:id="rId137"/>
-    <p:sldId id="374" r:id="rId138"/>
-    <p:sldId id="375" r:id="rId139"/>
-    <p:sldId id="382" r:id="rId140"/>
-    <p:sldId id="359" r:id="rId141"/>
-    <p:sldId id="376" r:id="rId142"/>
-    <p:sldId id="379" r:id="rId143"/>
-    <p:sldId id="380" r:id="rId144"/>
-    <p:sldId id="381" r:id="rId145"/>
-    <p:sldId id="392" r:id="rId146"/>
-    <p:sldId id="394" r:id="rId147"/>
-    <p:sldId id="393" r:id="rId148"/>
-    <p:sldId id="378" r:id="rId149"/>
-    <p:sldId id="269" r:id="rId150"/>
-    <p:sldId id="309" r:id="rId151"/>
-    <p:sldId id="414" r:id="rId152"/>
-    <p:sldId id="324" r:id="rId153"/>
-    <p:sldId id="317" r:id="rId154"/>
-    <p:sldId id="331" r:id="rId155"/>
-    <p:sldId id="336" r:id="rId156"/>
-    <p:sldId id="268" r:id="rId157"/>
-    <p:sldId id="426" r:id="rId158"/>
+    <p:sldId id="434" r:id="rId122"/>
+    <p:sldId id="349" r:id="rId123"/>
+    <p:sldId id="352" r:id="rId124"/>
+    <p:sldId id="348" r:id="rId125"/>
+    <p:sldId id="316" r:id="rId126"/>
+    <p:sldId id="335" r:id="rId127"/>
+    <p:sldId id="289" r:id="rId128"/>
+    <p:sldId id="290" r:id="rId129"/>
+    <p:sldId id="312" r:id="rId130"/>
+    <p:sldId id="357" r:id="rId131"/>
+    <p:sldId id="399" r:id="rId132"/>
+    <p:sldId id="341" r:id="rId133"/>
+    <p:sldId id="322" r:id="rId134"/>
+    <p:sldId id="280" r:id="rId135"/>
+    <p:sldId id="358" r:id="rId136"/>
+    <p:sldId id="360" r:id="rId137"/>
+    <p:sldId id="373" r:id="rId138"/>
+    <p:sldId id="374" r:id="rId139"/>
+    <p:sldId id="375" r:id="rId140"/>
+    <p:sldId id="382" r:id="rId141"/>
+    <p:sldId id="359" r:id="rId142"/>
+    <p:sldId id="376" r:id="rId143"/>
+    <p:sldId id="379" r:id="rId144"/>
+    <p:sldId id="380" r:id="rId145"/>
+    <p:sldId id="381" r:id="rId146"/>
+    <p:sldId id="392" r:id="rId147"/>
+    <p:sldId id="394" r:id="rId148"/>
+    <p:sldId id="393" r:id="rId149"/>
+    <p:sldId id="378" r:id="rId150"/>
+    <p:sldId id="269" r:id="rId151"/>
+    <p:sldId id="309" r:id="rId152"/>
+    <p:sldId id="414" r:id="rId153"/>
+    <p:sldId id="324" r:id="rId154"/>
+    <p:sldId id="317" r:id="rId155"/>
+    <p:sldId id="331" r:id="rId156"/>
+    <p:sldId id="336" r:id="rId157"/>
+    <p:sldId id="268" r:id="rId158"/>
+    <p:sldId id="426" r:id="rId159"/>
   </p:sldIdLst>
   <p:sldSz cx="12192000" cy="6858000"/>
   <p:notesSz cx="6858000" cy="9144000"/>
@@ -388,6 +389,7 @@
             <p14:sldId id="313"/>
             <p14:sldId id="345"/>
             <p14:sldId id="347"/>
+            <p14:sldId id="434"/>
             <p14:sldId id="349"/>
             <p14:sldId id="352"/>
             <p14:sldId id="348"/>
@@ -518,7 +520,7 @@
           <a:p>
             <a:fld id="{6E57F856-C08C-4D83-8D37-28A6206D94A8}" type="datetimeFigureOut">
               <a:rPr lang="en-US" smtClean="0"/>
-              <a:t>7/28/2026</a:t>
+              <a:t>8/14/2026</a:t>
             </a:fld>
             <a:endParaRPr lang="en-US"/>
           </a:p>
@@ -1054,7 +1056,7 @@
           <a:p>
             <a:fld id="{BFD97FD3-0E3C-4940-AC08-248FE3BAAF7F}" type="datetimeFigureOut">
               <a:rPr lang="en-US" smtClean="0"/>
-              <a:t>7/28/2026</a:t>
+              <a:t>8/14/2026</a:t>
             </a:fld>
             <a:endParaRPr lang="en-US"/>
           </a:p>
@@ -1351,7 +1353,7 @@
           <a:p>
             <a:fld id="{BFD97FD3-0E3C-4940-AC08-248FE3BAAF7F}" type="datetimeFigureOut">
               <a:rPr lang="en-US" smtClean="0"/>
-              <a:t>7/28/2026</a:t>
+              <a:t>8/14/2026</a:t>
             </a:fld>
             <a:endParaRPr lang="en-US"/>
           </a:p>
@@ -1543,7 +1545,7 @@
           <a:p>
             <a:fld id="{BFD97FD3-0E3C-4940-AC08-248FE3BAAF7F}" type="datetimeFigureOut">
               <a:rPr lang="en-US" smtClean="0"/>
-              <a:t>7/28/2026</a:t>
+              <a:t>8/14/2026</a:t>
             </a:fld>
             <a:endParaRPr lang="en-US"/>
           </a:p>
@@ -1804,7 +1806,7 @@
           <a:p>
             <a:fld id="{BFD97FD3-0E3C-4940-AC08-248FE3BAAF7F}" type="datetimeFigureOut">
               <a:rPr lang="en-US" smtClean="0"/>
-              <a:t>7/28/2026</a:t>
+              <a:t>8/14/2026</a:t>
             </a:fld>
             <a:endParaRPr lang="en-US"/>
           </a:p>
@@ -2228,7 +2230,7 @@
           <a:p>
             <a:fld id="{BFD97FD3-0E3C-4940-AC08-248FE3BAAF7F}" type="datetimeFigureOut">
               <a:rPr lang="en-US" smtClean="0"/>
-              <a:t>7/28/2026</a:t>
+              <a:t>8/14/2026</a:t>
             </a:fld>
             <a:endParaRPr lang="en-US"/>
           </a:p>
@@ -2765,7 +2767,7 @@
           <a:p>
             <a:fld id="{BFD97FD3-0E3C-4940-AC08-248FE3BAAF7F}" type="datetimeFigureOut">
               <a:rPr lang="en-US" smtClean="0"/>
-              <a:t>7/28/2026</a:t>
+              <a:t>8/14/2026</a:t>
             </a:fld>
             <a:endParaRPr lang="en-US"/>
           </a:p>
@@ -3626,7 +3628,7 @@
           <a:p>
             <a:fld id="{BFD97FD3-0E3C-4940-AC08-248FE3BAAF7F}" type="datetimeFigureOut">
               <a:rPr lang="en-US" smtClean="0"/>
-              <a:t>7/28/2026</a:t>
+              <a:t>8/14/2026</a:t>
             </a:fld>
             <a:endParaRPr lang="en-US"/>
           </a:p>
@@ -3796,7 +3798,7 @@
           <a:p>
             <a:fld id="{BFD97FD3-0E3C-4940-AC08-248FE3BAAF7F}" type="datetimeFigureOut">
               <a:rPr lang="en-US" smtClean="0"/>
-              <a:t>7/28/2026</a:t>
+              <a:t>8/14/2026</a:t>
             </a:fld>
             <a:endParaRPr lang="en-US"/>
           </a:p>
@@ -3980,7 +3982,7 @@
           <a:p>
             <a:fld id="{BFD97FD3-0E3C-4940-AC08-248FE3BAAF7F}" type="datetimeFigureOut">
               <a:rPr lang="en-US" smtClean="0"/>
-              <a:t>7/28/2026</a:t>
+              <a:t>8/14/2026</a:t>
             </a:fld>
             <a:endParaRPr lang="en-US"/>
           </a:p>
@@ -4150,7 +4152,7 @@
           <a:p>
             <a:fld id="{BFD97FD3-0E3C-4940-AC08-248FE3BAAF7F}" type="datetimeFigureOut">
               <a:rPr lang="en-US" smtClean="0"/>
-              <a:t>7/28/2026</a:t>
+              <a:t>8/14/2026</a:t>
             </a:fld>
             <a:endParaRPr lang="en-US"/>
           </a:p>
@@ -4394,7 +4396,7 @@
           <a:p>
             <a:fld id="{BFD97FD3-0E3C-4940-AC08-248FE3BAAF7F}" type="datetimeFigureOut">
               <a:rPr lang="en-US" smtClean="0"/>
-              <a:t>7/28/2026</a:t>
+              <a:t>8/14/2026</a:t>
             </a:fld>
             <a:endParaRPr lang="en-US"/>
           </a:p>
@@ -4630,7 +4632,7 @@
           <a:p>
             <a:fld id="{BFD97FD3-0E3C-4940-AC08-248FE3BAAF7F}" type="datetimeFigureOut">
               <a:rPr lang="en-US" smtClean="0"/>
-              <a:t>7/28/2026</a:t>
+              <a:t>8/14/2026</a:t>
             </a:fld>
             <a:endParaRPr lang="en-US"/>
           </a:p>
@@ -5096,7 +5098,7 @@
           <a:p>
             <a:fld id="{BFD97FD3-0E3C-4940-AC08-248FE3BAAF7F}" type="datetimeFigureOut">
               <a:rPr lang="en-US" smtClean="0"/>
-              <a:t>7/28/2026</a:t>
+              <a:t>8/14/2026</a:t>
             </a:fld>
             <a:endParaRPr lang="en-US"/>
           </a:p>
@@ -5214,7 +5216,7 @@
           <a:p>
             <a:fld id="{BFD97FD3-0E3C-4940-AC08-248FE3BAAF7F}" type="datetimeFigureOut">
               <a:rPr lang="en-US" smtClean="0"/>
-              <a:t>7/28/2026</a:t>
+              <a:t>8/14/2026</a:t>
             </a:fld>
             <a:endParaRPr lang="en-US"/>
           </a:p>
@@ -5309,7 +5311,7 @@
           <a:p>
             <a:fld id="{BFD97FD3-0E3C-4940-AC08-248FE3BAAF7F}" type="datetimeFigureOut">
               <a:rPr lang="en-US" smtClean="0"/>
-              <a:t>7/28/2026</a:t>
+              <a:t>8/14/2026</a:t>
             </a:fld>
             <a:endParaRPr lang="en-US"/>
           </a:p>
@@ -5564,7 +5566,7 @@
           <a:p>
             <a:fld id="{BFD97FD3-0E3C-4940-AC08-248FE3BAAF7F}" type="datetimeFigureOut">
               <a:rPr lang="en-US" smtClean="0"/>
-              <a:t>7/28/2026</a:t>
+              <a:t>8/14/2026</a:t>
             </a:fld>
             <a:endParaRPr lang="en-US"/>
           </a:p>
@@ -5863,7 +5865,7 @@
           <a:p>
             <a:fld id="{BFD97FD3-0E3C-4940-AC08-248FE3BAAF7F}" type="datetimeFigureOut">
               <a:rPr lang="en-US" smtClean="0"/>
-              <a:t>7/28/2026</a:t>
+              <a:t>8/14/2026</a:t>
             </a:fld>
             <a:endParaRPr lang="en-US"/>
           </a:p>
@@ -6097,7 +6099,7 @@
           <a:p>
             <a:fld id="{BFD97FD3-0E3C-4940-AC08-248FE3BAAF7F}" type="datetimeFigureOut">
               <a:rPr lang="en-US" smtClean="0"/>
-              <a:t>7/28/2026</a:t>
+              <a:t>8/14/2026</a:t>
             </a:fld>
             <a:endParaRPr lang="en-US"/>
           </a:p>
@@ -13012,7 +13014,7 @@
                   <a:srgbClr val="FF0000"/>
                 </a:solidFill>
               </a:rPr>
-              <a:t>Start Download &amp; Upload</a:t>
+              <a:t>Start File&amp; Download &amp; Upload</a:t>
             </a:r>
           </a:p>
         </p:txBody>
@@ -13031,6 +13033,257 @@
 </file>
 
 <file path=ppt/slides/slide121.xml><?xml version="1.0" encoding="utf-8"?>
+<p:sld xmlns:a="http://schemas.openxmlformats.org/drawingml/2006/main" xmlns:r="http://schemas.openxmlformats.org/officeDocument/2006/relationships" xmlns:p="http://schemas.openxmlformats.org/presentationml/2006/main">
+  <p:cSld>
+    <p:spTree>
+      <p:nvGrpSpPr>
+        <p:cNvPr id="1" name=""/>
+        <p:cNvGrpSpPr/>
+        <p:nvPr/>
+      </p:nvGrpSpPr>
+      <p:grpSpPr>
+        <a:xfrm>
+          <a:off x="0" y="0"/>
+          <a:ext cx="0" cy="0"/>
+          <a:chOff x="0" y="0"/>
+          <a:chExt cx="0" cy="0"/>
+        </a:xfrm>
+      </p:grpSpPr>
+      <p:sp>
+        <p:nvSpPr>
+          <p:cNvPr id="2" name="Title 1">
+            <a:extLst>
+              <a:ext uri="{FF2B5EF4-FFF2-40B4-BE49-F238E27FC236}">
+                <a16:creationId xmlns:a16="http://schemas.microsoft.com/office/drawing/2014/main" id="{9CC201C1-BB0C-255A-DE00-947A8A23F89F}"/>
+              </a:ext>
+            </a:extLst>
+          </p:cNvPr>
+          <p:cNvSpPr>
+            <a:spLocks noGrp="1"/>
+          </p:cNvSpPr>
+          <p:nvPr>
+            <p:ph type="title"/>
+          </p:nvPr>
+        </p:nvSpPr>
+        <p:spPr>
+          <a:xfrm>
+            <a:off x="913795" y="96350"/>
+            <a:ext cx="10353762" cy="697470"/>
+          </a:xfrm>
+        </p:spPr>
+        <p:txBody>
+          <a:bodyPr>
+            <a:normAutofit fontScale="90000"/>
+          </a:bodyPr>
+          <a:lstStyle/>
+          <a:p>
+            <a:r>
+              <a:rPr lang="en-US" b="1">
+                <a:solidFill>
+                  <a:srgbClr val="FF0000"/>
+                </a:solidFill>
+              </a:rPr>
+              <a:t>window</a:t>
+            </a:r>
+            <a:r>
+              <a:rPr lang="en-US"/>
+              <a:t>.</a:t>
+            </a:r>
+            <a:r>
+              <a:rPr lang="en-US" b="1">
+                <a:solidFill>
+                  <a:srgbClr val="FFFF00"/>
+                </a:solidFill>
+              </a:rPr>
+              <a:t>URL</a:t>
+            </a:r>
+            <a:r>
+              <a:rPr lang="en-US"/>
+              <a:t>.</a:t>
+            </a:r>
+            <a:r>
+              <a:rPr lang="en-US" b="1">
+                <a:solidFill>
+                  <a:srgbClr val="00B0F0"/>
+                </a:solidFill>
+              </a:rPr>
+              <a:t>createObjectURL(File)</a:t>
+            </a:r>
+          </a:p>
+        </p:txBody>
+      </p:sp>
+      <p:sp>
+        <p:nvSpPr>
+          <p:cNvPr id="3" name="Content Placeholder 2">
+            <a:extLst>
+              <a:ext uri="{FF2B5EF4-FFF2-40B4-BE49-F238E27FC236}">
+                <a16:creationId xmlns:a16="http://schemas.microsoft.com/office/drawing/2014/main" id="{A223CA6C-CF82-C591-CCB1-C9D131164497}"/>
+              </a:ext>
+            </a:extLst>
+          </p:cNvPr>
+          <p:cNvSpPr>
+            <a:spLocks noGrp="1"/>
+          </p:cNvSpPr>
+          <p:nvPr>
+            <p:ph idx="1"/>
+          </p:nvPr>
+        </p:nvSpPr>
+        <p:spPr>
+          <a:xfrm>
+            <a:off x="200966" y="793820"/>
+            <a:ext cx="11756571" cy="5727560"/>
+          </a:xfrm>
+        </p:spPr>
+        <p:txBody>
+          <a:bodyPr/>
+          <a:lstStyle/>
+          <a:p>
+            <a:r>
+              <a:rPr lang="en-US"/>
+              <a:t>creates a </a:t>
+            </a:r>
+            <a:r>
+              <a:rPr lang="en-US" b="1"/>
+              <a:t>temporary browser URL that points to a file/blob stored in browser memory</a:t>
+            </a:r>
+            <a:r>
+              <a:rPr lang="en-US"/>
+              <a:t>.</a:t>
+            </a:r>
+          </a:p>
+          <a:p>
+            <a:r>
+              <a:rPr lang="en-US"/>
+              <a:t>It's very commonly used for </a:t>
+            </a:r>
+            <a:r>
+              <a:rPr lang="en-US" b="1"/>
+              <a:t>previewing before uploading</a:t>
+            </a:r>
+            <a:r>
+              <a:rPr lang="en-US"/>
+              <a:t>.</a:t>
+            </a:r>
+          </a:p>
+          <a:p>
+            <a:r>
+              <a:rPr lang="en-US" b="1"/>
+              <a:t>You can use this generated link as the </a:t>
+            </a:r>
+            <a:r>
+              <a:rPr lang="en-US" b="1">
+                <a:effectLst/>
+              </a:rPr>
+              <a:t>src</a:t>
+            </a:r>
+            <a:r>
+              <a:rPr lang="en-US" b="1"/>
+              <a:t> for images, videos, audio, or download links so the browser can display or download the file</a:t>
+            </a:r>
+          </a:p>
+          <a:p>
+            <a:r>
+              <a:rPr lang="en-US"/>
+              <a:t>blob:http://localhost:4200/8a7f2c91-....</a:t>
+            </a:r>
+          </a:p>
+          <a:p>
+            <a:r>
+              <a:rPr lang="en-US"/>
+              <a:t>only creates a temporary URL for the browser.</a:t>
+            </a:r>
+          </a:p>
+          <a:p>
+            <a:r>
+              <a:rPr lang="en-US" sz="1800"/>
+              <a:t>When you're finished with the preview: </a:t>
+            </a:r>
+            <a:r>
+              <a:rPr lang="en-US" sz="1800">
+                <a:effectLst/>
+              </a:rPr>
+              <a:t>URL.revokeObjectURL(item.previewUrl); // to release resources</a:t>
+            </a:r>
+          </a:p>
+          <a:p>
+            <a:endParaRPr lang="en-US"/>
+          </a:p>
+        </p:txBody>
+      </p:sp>
+      <p:pic>
+        <p:nvPicPr>
+          <p:cNvPr id="5" name="Picture 4">
+            <a:extLst>
+              <a:ext uri="{FF2B5EF4-FFF2-40B4-BE49-F238E27FC236}">
+                <a16:creationId xmlns:a16="http://schemas.microsoft.com/office/drawing/2014/main" id="{41F5B3FB-BD5B-684D-A4C2-D4D5E94A4483}"/>
+              </a:ext>
+            </a:extLst>
+          </p:cNvPr>
+          <p:cNvPicPr>
+            <a:picLocks noChangeAspect="1"/>
+          </p:cNvPicPr>
+          <p:nvPr/>
+        </p:nvPicPr>
+        <p:blipFill>
+          <a:blip r:embed="rId2"/>
+          <a:stretch>
+            <a:fillRect/>
+          </a:stretch>
+        </p:blipFill>
+        <p:spPr>
+          <a:xfrm>
+            <a:off x="356714" y="4151540"/>
+            <a:ext cx="5440708" cy="2172223"/>
+          </a:xfrm>
+          <a:prstGeom prst="rect">
+            <a:avLst/>
+          </a:prstGeom>
+        </p:spPr>
+      </p:pic>
+      <p:pic>
+        <p:nvPicPr>
+          <p:cNvPr id="7" name="Picture 6">
+            <a:extLst>
+              <a:ext uri="{FF2B5EF4-FFF2-40B4-BE49-F238E27FC236}">
+                <a16:creationId xmlns:a16="http://schemas.microsoft.com/office/drawing/2014/main" id="{FADBE96C-32A2-1C16-2926-C879C26B18D7}"/>
+              </a:ext>
+            </a:extLst>
+          </p:cNvPr>
+          <p:cNvPicPr>
+            <a:picLocks noChangeAspect="1"/>
+          </p:cNvPicPr>
+          <p:nvPr/>
+        </p:nvPicPr>
+        <p:blipFill>
+          <a:blip r:embed="rId3"/>
+          <a:stretch>
+            <a:fillRect/>
+          </a:stretch>
+        </p:blipFill>
+        <p:spPr>
+          <a:xfrm>
+            <a:off x="5953168" y="4250427"/>
+            <a:ext cx="6147520" cy="1519133"/>
+          </a:xfrm>
+          <a:prstGeom prst="rect">
+            <a:avLst/>
+          </a:prstGeom>
+        </p:spPr>
+      </p:pic>
+    </p:spTree>
+    <p:extLst>
+      <p:ext uri="{BB962C8B-B14F-4D97-AF65-F5344CB8AC3E}">
+        <p14:creationId xmlns:p14="http://schemas.microsoft.com/office/powerpoint/2010/main" val="2456413242"/>
+      </p:ext>
+    </p:extLst>
+  </p:cSld>
+  <p:clrMapOvr>
+    <a:masterClrMapping/>
+  </p:clrMapOvr>
+</p:sld>
+</file>
+
+<file path=ppt/slides/slide122.xml><?xml version="1.0" encoding="utf-8"?>
 <p:sld xmlns:a="http://schemas.openxmlformats.org/drawingml/2006/main" xmlns:r="http://schemas.openxmlformats.org/officeDocument/2006/relationships" xmlns:p="http://schemas.openxmlformats.org/presentationml/2006/main">
   <p:cSld>
     <p:spTree>
@@ -13400,7 +13653,7 @@
 </p:sld>
 </file>
 
-<file path=ppt/slides/slide122.xml><?xml version="1.0" encoding="utf-8"?>
+<file path=ppt/slides/slide123.xml><?xml version="1.0" encoding="utf-8"?>
 <p:sld xmlns:a="http://schemas.openxmlformats.org/drawingml/2006/main" xmlns:r="http://schemas.openxmlformats.org/officeDocument/2006/relationships" xmlns:p="http://schemas.openxmlformats.org/presentationml/2006/main">
   <p:cSld>
     <p:spTree>
@@ -13671,7 +13924,7 @@
 </p:sld>
 </file>
 
-<file path=ppt/slides/slide123.xml><?xml version="1.0" encoding="utf-8"?>
+<file path=ppt/slides/slide124.xml><?xml version="1.0" encoding="utf-8"?>
 <p:sld xmlns:a="http://schemas.openxmlformats.org/drawingml/2006/main" xmlns:r="http://schemas.openxmlformats.org/officeDocument/2006/relationships" xmlns:p="http://schemas.openxmlformats.org/presentationml/2006/main">
   <p:cSld>
     <p:spTree>
@@ -13746,7 +13999,7 @@
 </p:sld>
 </file>
 
-<file path=ppt/slides/slide124.xml><?xml version="1.0" encoding="utf-8"?>
+<file path=ppt/slides/slide125.xml><?xml version="1.0" encoding="utf-8"?>
 <p:sld xmlns:a="http://schemas.openxmlformats.org/drawingml/2006/main" xmlns:r="http://schemas.openxmlformats.org/officeDocument/2006/relationships" xmlns:p="http://schemas.openxmlformats.org/presentationml/2006/main">
   <p:cSld>
     <p:spTree>
@@ -14002,7 +14255,7 @@
 </p:sld>
 </file>
 
-<file path=ppt/slides/slide125.xml><?xml version="1.0" encoding="utf-8"?>
+<file path=ppt/slides/slide126.xml><?xml version="1.0" encoding="utf-8"?>
 <p:sld xmlns:a="http://schemas.openxmlformats.org/drawingml/2006/main" xmlns:r="http://schemas.openxmlformats.org/officeDocument/2006/relationships" xmlns:p="http://schemas.openxmlformats.org/presentationml/2006/main">
   <p:cSld>
     <p:spTree>
@@ -14238,7 +14491,7 @@
 </p:sld>
 </file>
 
-<file path=ppt/slides/slide126.xml><?xml version="1.0" encoding="utf-8"?>
+<file path=ppt/slides/slide127.xml><?xml version="1.0" encoding="utf-8"?>
 <p:sld xmlns:a="http://schemas.openxmlformats.org/drawingml/2006/main" xmlns:r="http://schemas.openxmlformats.org/officeDocument/2006/relationships" xmlns:p="http://schemas.openxmlformats.org/presentationml/2006/main">
   <p:cSld>
     <p:spTree>
@@ -14307,7 +14560,7 @@
 </p:sld>
 </file>
 
-<file path=ppt/slides/slide127.xml><?xml version="1.0" encoding="utf-8"?>
+<file path=ppt/slides/slide128.xml><?xml version="1.0" encoding="utf-8"?>
 <p:sld xmlns:a="http://schemas.openxmlformats.org/drawingml/2006/main" xmlns:r="http://schemas.openxmlformats.org/officeDocument/2006/relationships" xmlns:p="http://schemas.openxmlformats.org/presentationml/2006/main">
   <p:cSld>
     <p:spTree>
@@ -14460,7 +14713,7 @@
 </p:sld>
 </file>
 
-<file path=ppt/slides/slide128.xml><?xml version="1.0" encoding="utf-8"?>
+<file path=ppt/slides/slide129.xml><?xml version="1.0" encoding="utf-8"?>
 <p:sld xmlns:a="http://schemas.openxmlformats.org/drawingml/2006/main" xmlns:r="http://schemas.openxmlformats.org/officeDocument/2006/relationships" xmlns:p="http://schemas.openxmlformats.org/presentationml/2006/main">
   <p:cSld>
     <p:spTree>
@@ -15165,7 +15418,104 @@
 </p:sld>
 </file>
 
-<file path=ppt/slides/slide129.xml><?xml version="1.0" encoding="utf-8"?>
+<file path=ppt/slides/slide13.xml><?xml version="1.0" encoding="utf-8"?>
+<p:sld xmlns:a="http://schemas.openxmlformats.org/drawingml/2006/main" xmlns:r="http://schemas.openxmlformats.org/officeDocument/2006/relationships" xmlns:p="http://schemas.openxmlformats.org/presentationml/2006/main">
+  <p:cSld>
+    <p:spTree>
+      <p:nvGrpSpPr>
+        <p:cNvPr id="1" name=""/>
+        <p:cNvGrpSpPr/>
+        <p:nvPr/>
+      </p:nvGrpSpPr>
+      <p:grpSpPr>
+        <a:xfrm>
+          <a:off x="0" y="0"/>
+          <a:ext cx="0" cy="0"/>
+          <a:chOff x="0" y="0"/>
+          <a:chExt cx="0" cy="0"/>
+        </a:xfrm>
+      </p:grpSpPr>
+      <p:sp>
+        <p:nvSpPr>
+          <p:cNvPr id="2" name="Title 1">
+            <a:extLst>
+              <a:ext uri="{FF2B5EF4-FFF2-40B4-BE49-F238E27FC236}">
+                <a16:creationId xmlns:a16="http://schemas.microsoft.com/office/drawing/2014/main" id="{F26371F9-2F94-B74C-B705-4AA87EC46D66}"/>
+              </a:ext>
+            </a:extLst>
+          </p:cNvPr>
+          <p:cNvSpPr>
+            <a:spLocks noGrp="1"/>
+          </p:cNvSpPr>
+          <p:nvPr>
+            <p:ph type="title"/>
+          </p:nvPr>
+        </p:nvSpPr>
+        <p:spPr/>
+        <p:txBody>
+          <a:bodyPr/>
+          <a:lstStyle/>
+          <a:p>
+            <a:endParaRPr lang="en-US"/>
+          </a:p>
+        </p:txBody>
+      </p:sp>
+      <p:sp>
+        <p:nvSpPr>
+          <p:cNvPr id="3" name="Content Placeholder 2">
+            <a:extLst>
+              <a:ext uri="{FF2B5EF4-FFF2-40B4-BE49-F238E27FC236}">
+                <a16:creationId xmlns:a16="http://schemas.microsoft.com/office/drawing/2014/main" id="{20C49DF7-6C7F-55BD-FFDB-0B904F016F63}"/>
+              </a:ext>
+            </a:extLst>
+          </p:cNvPr>
+          <p:cNvSpPr>
+            <a:spLocks noGrp="1"/>
+          </p:cNvSpPr>
+          <p:nvPr>
+            <p:ph idx="1"/>
+          </p:nvPr>
+        </p:nvSpPr>
+        <p:spPr>
+          <a:xfrm>
+            <a:off x="913795" y="3145134"/>
+            <a:ext cx="10353762" cy="1808703"/>
+          </a:xfrm>
+        </p:spPr>
+        <p:txBody>
+          <a:bodyPr>
+            <a:normAutofit/>
+          </a:bodyPr>
+          <a:lstStyle/>
+          <a:p>
+            <a:pPr marL="36900" indent="0" algn="ctr">
+              <a:buNone/>
+            </a:pPr>
+            <a:r>
+              <a:rPr lang="en-US" sz="6600" b="1">
+                <a:solidFill>
+                  <a:srgbClr val="FF0000"/>
+                </a:solidFill>
+              </a:rPr>
+              <a:t>END Routing</a:t>
+            </a:r>
+          </a:p>
+        </p:txBody>
+      </p:sp>
+    </p:spTree>
+    <p:extLst>
+      <p:ext uri="{BB962C8B-B14F-4D97-AF65-F5344CB8AC3E}">
+        <p14:creationId xmlns:p14="http://schemas.microsoft.com/office/powerpoint/2010/main" val="3932260532"/>
+      </p:ext>
+    </p:extLst>
+  </p:cSld>
+  <p:clrMapOvr>
+    <a:masterClrMapping/>
+  </p:clrMapOvr>
+</p:sld>
+</file>
+
+<file path=ppt/slides/slide130.xml><?xml version="1.0" encoding="utf-8"?>
 <p:sld xmlns:a="http://schemas.openxmlformats.org/drawingml/2006/main" xmlns:r="http://schemas.openxmlformats.org/officeDocument/2006/relationships" xmlns:p="http://schemas.openxmlformats.org/presentationml/2006/main">
   <p:cSld>
     <p:spTree>
@@ -15325,104 +15675,7 @@
 </p:sld>
 </file>
 
-<file path=ppt/slides/slide13.xml><?xml version="1.0" encoding="utf-8"?>
-<p:sld xmlns:a="http://schemas.openxmlformats.org/drawingml/2006/main" xmlns:r="http://schemas.openxmlformats.org/officeDocument/2006/relationships" xmlns:p="http://schemas.openxmlformats.org/presentationml/2006/main">
-  <p:cSld>
-    <p:spTree>
-      <p:nvGrpSpPr>
-        <p:cNvPr id="1" name=""/>
-        <p:cNvGrpSpPr/>
-        <p:nvPr/>
-      </p:nvGrpSpPr>
-      <p:grpSpPr>
-        <a:xfrm>
-          <a:off x="0" y="0"/>
-          <a:ext cx="0" cy="0"/>
-          <a:chOff x="0" y="0"/>
-          <a:chExt cx="0" cy="0"/>
-        </a:xfrm>
-      </p:grpSpPr>
-      <p:sp>
-        <p:nvSpPr>
-          <p:cNvPr id="2" name="Title 1">
-            <a:extLst>
-              <a:ext uri="{FF2B5EF4-FFF2-40B4-BE49-F238E27FC236}">
-                <a16:creationId xmlns:a16="http://schemas.microsoft.com/office/drawing/2014/main" id="{F26371F9-2F94-B74C-B705-4AA87EC46D66}"/>
-              </a:ext>
-            </a:extLst>
-          </p:cNvPr>
-          <p:cNvSpPr>
-            <a:spLocks noGrp="1"/>
-          </p:cNvSpPr>
-          <p:nvPr>
-            <p:ph type="title"/>
-          </p:nvPr>
-        </p:nvSpPr>
-        <p:spPr/>
-        <p:txBody>
-          <a:bodyPr/>
-          <a:lstStyle/>
-          <a:p>
-            <a:endParaRPr lang="en-US"/>
-          </a:p>
-        </p:txBody>
-      </p:sp>
-      <p:sp>
-        <p:nvSpPr>
-          <p:cNvPr id="3" name="Content Placeholder 2">
-            <a:extLst>
-              <a:ext uri="{FF2B5EF4-FFF2-40B4-BE49-F238E27FC236}">
-                <a16:creationId xmlns:a16="http://schemas.microsoft.com/office/drawing/2014/main" id="{20C49DF7-6C7F-55BD-FFDB-0B904F016F63}"/>
-              </a:ext>
-            </a:extLst>
-          </p:cNvPr>
-          <p:cNvSpPr>
-            <a:spLocks noGrp="1"/>
-          </p:cNvSpPr>
-          <p:nvPr>
-            <p:ph idx="1"/>
-          </p:nvPr>
-        </p:nvSpPr>
-        <p:spPr>
-          <a:xfrm>
-            <a:off x="913795" y="3145134"/>
-            <a:ext cx="10353762" cy="1808703"/>
-          </a:xfrm>
-        </p:spPr>
-        <p:txBody>
-          <a:bodyPr>
-            <a:normAutofit/>
-          </a:bodyPr>
-          <a:lstStyle/>
-          <a:p>
-            <a:pPr marL="36900" indent="0" algn="ctr">
-              <a:buNone/>
-            </a:pPr>
-            <a:r>
-              <a:rPr lang="en-US" sz="6600" b="1">
-                <a:solidFill>
-                  <a:srgbClr val="FF0000"/>
-                </a:solidFill>
-              </a:rPr>
-              <a:t>END Routing</a:t>
-            </a:r>
-          </a:p>
-        </p:txBody>
-      </p:sp>
-    </p:spTree>
-    <p:extLst>
-      <p:ext uri="{BB962C8B-B14F-4D97-AF65-F5344CB8AC3E}">
-        <p14:creationId xmlns:p14="http://schemas.microsoft.com/office/powerpoint/2010/main" val="3932260532"/>
-      </p:ext>
-    </p:extLst>
-  </p:cSld>
-  <p:clrMapOvr>
-    <a:masterClrMapping/>
-  </p:clrMapOvr>
-</p:sld>
-</file>
-
-<file path=ppt/slides/slide130.xml><?xml version="1.0" encoding="utf-8"?>
+<file path=ppt/slides/slide131.xml><?xml version="1.0" encoding="utf-8"?>
 <p:sld xmlns:a="http://schemas.openxmlformats.org/drawingml/2006/main" xmlns:r="http://schemas.openxmlformats.org/officeDocument/2006/relationships" xmlns:p="http://schemas.openxmlformats.org/presentationml/2006/main">
   <p:cSld>
     <p:spTree>
@@ -15515,7 +15768,7 @@
 </p:sld>
 </file>
 
-<file path=ppt/slides/slide131.xml><?xml version="1.0" encoding="utf-8"?>
+<file path=ppt/slides/slide132.xml><?xml version="1.0" encoding="utf-8"?>
 <p:sld xmlns:a="http://schemas.openxmlformats.org/drawingml/2006/main" xmlns:r="http://schemas.openxmlformats.org/officeDocument/2006/relationships" xmlns:p="http://schemas.openxmlformats.org/presentationml/2006/main">
   <p:cSld>
     <p:spTree>
@@ -15590,7 +15843,7 @@
 </p:sld>
 </file>
 
-<file path=ppt/slides/slide132.xml><?xml version="1.0" encoding="utf-8"?>
+<file path=ppt/slides/slide133.xml><?xml version="1.0" encoding="utf-8"?>
 <p:sld xmlns:a="http://schemas.openxmlformats.org/drawingml/2006/main" xmlns:r="http://schemas.openxmlformats.org/officeDocument/2006/relationships" xmlns:p="http://schemas.openxmlformats.org/presentationml/2006/main">
   <p:cSld>
     <p:spTree>
@@ -15673,7 +15926,7 @@
 </p:sld>
 </file>
 
-<file path=ppt/slides/slide133.xml><?xml version="1.0" encoding="utf-8"?>
+<file path=ppt/slides/slide134.xml><?xml version="1.0" encoding="utf-8"?>
 <p:sld xmlns:a="http://schemas.openxmlformats.org/drawingml/2006/main" xmlns:r="http://schemas.openxmlformats.org/officeDocument/2006/relationships" xmlns:p="http://schemas.openxmlformats.org/presentationml/2006/main">
   <p:cSld>
     <p:spTree>
@@ -15870,7 +16123,7 @@
 </p:sld>
 </file>
 
-<file path=ppt/slides/slide134.xml><?xml version="1.0" encoding="utf-8"?>
+<file path=ppt/slides/slide135.xml><?xml version="1.0" encoding="utf-8"?>
 <p:sld xmlns:a="http://schemas.openxmlformats.org/drawingml/2006/main" xmlns:r="http://schemas.openxmlformats.org/officeDocument/2006/relationships" xmlns:p="http://schemas.openxmlformats.org/presentationml/2006/main">
   <p:cSld>
     <p:spTree>
@@ -15939,7 +16192,7 @@
 </p:sld>
 </file>
 
-<file path=ppt/slides/slide135.xml><?xml version="1.0" encoding="utf-8"?>
+<file path=ppt/slides/slide136.xml><?xml version="1.0" encoding="utf-8"?>
 <p:sld xmlns:a="http://schemas.openxmlformats.org/drawingml/2006/main" xmlns:r="http://schemas.openxmlformats.org/officeDocument/2006/relationships" xmlns:p="http://schemas.openxmlformats.org/presentationml/2006/main">
   <p:cSld>
     <p:spTree>
@@ -16201,7 +16454,7 @@
 </p:sld>
 </file>
 
-<file path=ppt/slides/slide136.xml><?xml version="1.0" encoding="utf-8"?>
+<file path=ppt/slides/slide137.xml><?xml version="1.0" encoding="utf-8"?>
 <p:sld xmlns:a="http://schemas.openxmlformats.org/drawingml/2006/main" xmlns:r="http://schemas.openxmlformats.org/officeDocument/2006/relationships" xmlns:p="http://schemas.openxmlformats.org/presentationml/2006/main">
   <p:cSld>
     <p:spTree>
@@ -16368,7 +16621,7 @@
 </p:sld>
 </file>
 
-<file path=ppt/slides/slide137.xml><?xml version="1.0" encoding="utf-8"?>
+<file path=ppt/slides/slide138.xml><?xml version="1.0" encoding="utf-8"?>
 <p:sld xmlns:a="http://schemas.openxmlformats.org/drawingml/2006/main" xmlns:r="http://schemas.openxmlformats.org/officeDocument/2006/relationships" xmlns:p="http://schemas.openxmlformats.org/presentationml/2006/main">
   <p:cSld>
     <p:spTree>
@@ -16540,7 +16793,7 @@
 </p:sld>
 </file>
 
-<file path=ppt/slides/slide138.xml><?xml version="1.0" encoding="utf-8"?>
+<file path=ppt/slides/slide139.xml><?xml version="1.0" encoding="utf-8"?>
 <p:sld xmlns:a="http://schemas.openxmlformats.org/drawingml/2006/main" xmlns:r="http://schemas.openxmlformats.org/officeDocument/2006/relationships" xmlns:p="http://schemas.openxmlformats.org/presentationml/2006/main">
   <p:cSld>
     <p:spTree>
@@ -16707,164 +16960,6 @@
 </p:sld>
 </file>
 
-<file path=ppt/slides/slide139.xml><?xml version="1.0" encoding="utf-8"?>
-<p:sld xmlns:a="http://schemas.openxmlformats.org/drawingml/2006/main" xmlns:r="http://schemas.openxmlformats.org/officeDocument/2006/relationships" xmlns:p="http://schemas.openxmlformats.org/presentationml/2006/main">
-  <p:cSld>
-    <p:spTree>
-      <p:nvGrpSpPr>
-        <p:cNvPr id="1" name=""/>
-        <p:cNvGrpSpPr/>
-        <p:nvPr/>
-      </p:nvGrpSpPr>
-      <p:grpSpPr>
-        <a:xfrm>
-          <a:off x="0" y="0"/>
-          <a:ext cx="0" cy="0"/>
-          <a:chOff x="0" y="0"/>
-          <a:chExt cx="0" cy="0"/>
-        </a:xfrm>
-      </p:grpSpPr>
-      <p:sp>
-        <p:nvSpPr>
-          <p:cNvPr id="2" name="Title 1">
-            <a:extLst>
-              <a:ext uri="{FF2B5EF4-FFF2-40B4-BE49-F238E27FC236}">
-                <a16:creationId xmlns:a16="http://schemas.microsoft.com/office/drawing/2014/main" id="{AEE82016-9D4D-97FB-894C-AC6D20B0E26E}"/>
-              </a:ext>
-            </a:extLst>
-          </p:cNvPr>
-          <p:cNvSpPr>
-            <a:spLocks noGrp="1"/>
-          </p:cNvSpPr>
-          <p:nvPr>
-            <p:ph type="title"/>
-          </p:nvPr>
-        </p:nvSpPr>
-        <p:spPr/>
-        <p:txBody>
-          <a:bodyPr/>
-          <a:lstStyle/>
-          <a:p>
-            <a:endParaRPr lang="en-US"/>
-          </a:p>
-        </p:txBody>
-      </p:sp>
-      <p:sp>
-        <p:nvSpPr>
-          <p:cNvPr id="3" name="Content Placeholder 2">
-            <a:extLst>
-              <a:ext uri="{FF2B5EF4-FFF2-40B4-BE49-F238E27FC236}">
-                <a16:creationId xmlns:a16="http://schemas.microsoft.com/office/drawing/2014/main" id="{D28BAC87-2A21-0C78-9BB9-60D4200C9601}"/>
-              </a:ext>
-            </a:extLst>
-          </p:cNvPr>
-          <p:cNvSpPr>
-            <a:spLocks noGrp="1"/>
-          </p:cNvSpPr>
-          <p:nvPr>
-            <p:ph idx="1"/>
-          </p:nvPr>
-        </p:nvSpPr>
-        <p:spPr/>
-        <p:txBody>
-          <a:bodyPr/>
-          <a:lstStyle/>
-          <a:p>
-            <a:r>
-              <a:rPr lang="en-US">
-                <a:effectLst/>
-              </a:rPr>
-              <a:t>if you intend to use key from en.json or ar.json at component</a:t>
-            </a:r>
-            <a:endParaRPr lang="en-US"/>
-          </a:p>
-          <a:p>
-            <a:pPr lvl="1"/>
-            <a:r>
-              <a:rPr lang="en-US" sz="2000"/>
-              <a:t>.html</a:t>
-            </a:r>
-          </a:p>
-          <a:p>
-            <a:pPr lvl="2"/>
-            <a:r>
-              <a:rPr lang="en-US" sz="1800"/>
-              <a:t>you need to import  </a:t>
-            </a:r>
-            <a:r>
-              <a:rPr lang="en-US" sz="1800">
-                <a:effectLst/>
-              </a:rPr>
-              <a:t>TranslatePipe</a:t>
-            </a:r>
-          </a:p>
-          <a:p>
-            <a:pPr lvl="2"/>
-            <a:r>
-              <a:rPr lang="en-US" sz="1800">
-                <a:effectLst/>
-              </a:rPr>
-              <a:t>imports: [</a:t>
-            </a:r>
-            <a:r>
-              <a:rPr lang="en-US" sz="1800" b="1">
-                <a:solidFill>
-                  <a:srgbClr val="FFFF00"/>
-                </a:solidFill>
-                <a:effectLst/>
-              </a:rPr>
-              <a:t>TranslatePipe</a:t>
-            </a:r>
-            <a:r>
-              <a:rPr lang="en-US" sz="1800">
-                <a:effectLst/>
-              </a:rPr>
-              <a:t>],</a:t>
-            </a:r>
-          </a:p>
-          <a:p>
-            <a:pPr lvl="2"/>
-            <a:r>
-              <a:rPr lang="en-US" sz="1800">
-                <a:effectLst/>
-              </a:rPr>
-              <a:t>At html    &lt;label class="ms-2"&gt;{{"nameAr" | translate}}&lt;/label&gt;</a:t>
-            </a:r>
-          </a:p>
-          <a:p>
-            <a:pPr lvl="1"/>
-            <a:r>
-              <a:rPr lang="en-US"/>
-              <a:t>ts</a:t>
-            </a:r>
-          </a:p>
-          <a:p>
-            <a:pPr lvl="2"/>
-            <a:r>
-              <a:rPr lang="en-US" sz="1800">
-                <a:effectLst/>
-              </a:rPr>
-              <a:t>At ts : this.translate.use(lang);</a:t>
-            </a:r>
-          </a:p>
-          <a:p>
-            <a:endParaRPr lang="en-US"/>
-          </a:p>
-        </p:txBody>
-      </p:sp>
-    </p:spTree>
-    <p:extLst>
-      <p:ext uri="{BB962C8B-B14F-4D97-AF65-F5344CB8AC3E}">
-        <p14:creationId xmlns:p14="http://schemas.microsoft.com/office/powerpoint/2010/main" val="271920721"/>
-      </p:ext>
-    </p:extLst>
-  </p:cSld>
-  <p:clrMapOvr>
-    <a:masterClrMapping/>
-  </p:clrMapOvr>
-</p:sld>
-</file>
-
 <file path=ppt/slides/slide14.xml><?xml version="1.0" encoding="utf-8"?>
 <p:sld xmlns:a="http://schemas.openxmlformats.org/drawingml/2006/main" xmlns:r="http://schemas.openxmlformats.org/officeDocument/2006/relationships" xmlns:p="http://schemas.openxmlformats.org/presentationml/2006/main">
   <p:cSld>
@@ -16953,6 +17048,164 @@
 </file>
 
 <file path=ppt/slides/slide140.xml><?xml version="1.0" encoding="utf-8"?>
+<p:sld xmlns:a="http://schemas.openxmlformats.org/drawingml/2006/main" xmlns:r="http://schemas.openxmlformats.org/officeDocument/2006/relationships" xmlns:p="http://schemas.openxmlformats.org/presentationml/2006/main">
+  <p:cSld>
+    <p:spTree>
+      <p:nvGrpSpPr>
+        <p:cNvPr id="1" name=""/>
+        <p:cNvGrpSpPr/>
+        <p:nvPr/>
+      </p:nvGrpSpPr>
+      <p:grpSpPr>
+        <a:xfrm>
+          <a:off x="0" y="0"/>
+          <a:ext cx="0" cy="0"/>
+          <a:chOff x="0" y="0"/>
+          <a:chExt cx="0" cy="0"/>
+        </a:xfrm>
+      </p:grpSpPr>
+      <p:sp>
+        <p:nvSpPr>
+          <p:cNvPr id="2" name="Title 1">
+            <a:extLst>
+              <a:ext uri="{FF2B5EF4-FFF2-40B4-BE49-F238E27FC236}">
+                <a16:creationId xmlns:a16="http://schemas.microsoft.com/office/drawing/2014/main" id="{AEE82016-9D4D-97FB-894C-AC6D20B0E26E}"/>
+              </a:ext>
+            </a:extLst>
+          </p:cNvPr>
+          <p:cNvSpPr>
+            <a:spLocks noGrp="1"/>
+          </p:cNvSpPr>
+          <p:nvPr>
+            <p:ph type="title"/>
+          </p:nvPr>
+        </p:nvSpPr>
+        <p:spPr/>
+        <p:txBody>
+          <a:bodyPr/>
+          <a:lstStyle/>
+          <a:p>
+            <a:endParaRPr lang="en-US"/>
+          </a:p>
+        </p:txBody>
+      </p:sp>
+      <p:sp>
+        <p:nvSpPr>
+          <p:cNvPr id="3" name="Content Placeholder 2">
+            <a:extLst>
+              <a:ext uri="{FF2B5EF4-FFF2-40B4-BE49-F238E27FC236}">
+                <a16:creationId xmlns:a16="http://schemas.microsoft.com/office/drawing/2014/main" id="{D28BAC87-2A21-0C78-9BB9-60D4200C9601}"/>
+              </a:ext>
+            </a:extLst>
+          </p:cNvPr>
+          <p:cNvSpPr>
+            <a:spLocks noGrp="1"/>
+          </p:cNvSpPr>
+          <p:nvPr>
+            <p:ph idx="1"/>
+          </p:nvPr>
+        </p:nvSpPr>
+        <p:spPr/>
+        <p:txBody>
+          <a:bodyPr/>
+          <a:lstStyle/>
+          <a:p>
+            <a:r>
+              <a:rPr lang="en-US">
+                <a:effectLst/>
+              </a:rPr>
+              <a:t>if you intend to use key from en.json or ar.json at component</a:t>
+            </a:r>
+            <a:endParaRPr lang="en-US"/>
+          </a:p>
+          <a:p>
+            <a:pPr lvl="1"/>
+            <a:r>
+              <a:rPr lang="en-US" sz="2000"/>
+              <a:t>.html</a:t>
+            </a:r>
+          </a:p>
+          <a:p>
+            <a:pPr lvl="2"/>
+            <a:r>
+              <a:rPr lang="en-US" sz="1800"/>
+              <a:t>you need to import  </a:t>
+            </a:r>
+            <a:r>
+              <a:rPr lang="en-US" sz="1800">
+                <a:effectLst/>
+              </a:rPr>
+              <a:t>TranslatePipe</a:t>
+            </a:r>
+          </a:p>
+          <a:p>
+            <a:pPr lvl="2"/>
+            <a:r>
+              <a:rPr lang="en-US" sz="1800">
+                <a:effectLst/>
+              </a:rPr>
+              <a:t>imports: [</a:t>
+            </a:r>
+            <a:r>
+              <a:rPr lang="en-US" sz="1800" b="1">
+                <a:solidFill>
+                  <a:srgbClr val="FFFF00"/>
+                </a:solidFill>
+                <a:effectLst/>
+              </a:rPr>
+              <a:t>TranslatePipe</a:t>
+            </a:r>
+            <a:r>
+              <a:rPr lang="en-US" sz="1800">
+                <a:effectLst/>
+              </a:rPr>
+              <a:t>],</a:t>
+            </a:r>
+          </a:p>
+          <a:p>
+            <a:pPr lvl="2"/>
+            <a:r>
+              <a:rPr lang="en-US" sz="1800">
+                <a:effectLst/>
+              </a:rPr>
+              <a:t>At html    &lt;label class="ms-2"&gt;{{"nameAr" | translate}}&lt;/label&gt;</a:t>
+            </a:r>
+          </a:p>
+          <a:p>
+            <a:pPr lvl="1"/>
+            <a:r>
+              <a:rPr lang="en-US"/>
+              <a:t>ts</a:t>
+            </a:r>
+          </a:p>
+          <a:p>
+            <a:pPr lvl="2"/>
+            <a:r>
+              <a:rPr lang="en-US" sz="1800">
+                <a:effectLst/>
+              </a:rPr>
+              <a:t>At ts : this.translate.use(lang);</a:t>
+            </a:r>
+          </a:p>
+          <a:p>
+            <a:endParaRPr lang="en-US"/>
+          </a:p>
+        </p:txBody>
+      </p:sp>
+    </p:spTree>
+    <p:extLst>
+      <p:ext uri="{BB962C8B-B14F-4D97-AF65-F5344CB8AC3E}">
+        <p14:creationId xmlns:p14="http://schemas.microsoft.com/office/powerpoint/2010/main" val="271920721"/>
+      </p:ext>
+    </p:extLst>
+  </p:cSld>
+  <p:clrMapOvr>
+    <a:masterClrMapping/>
+  </p:clrMapOvr>
+</p:sld>
+</file>
+
+<file path=ppt/slides/slide141.xml><?xml version="1.0" encoding="utf-8"?>
 <p:sld xmlns:a="http://schemas.openxmlformats.org/drawingml/2006/main" xmlns:r="http://schemas.openxmlformats.org/officeDocument/2006/relationships" xmlns:p="http://schemas.openxmlformats.org/presentationml/2006/main">
   <p:cSld>
     <p:spTree>
@@ -17027,7 +17280,7 @@
 </p:sld>
 </file>
 
-<file path=ppt/slides/slide141.xml><?xml version="1.0" encoding="utf-8"?>
+<file path=ppt/slides/slide142.xml><?xml version="1.0" encoding="utf-8"?>
 <p:sld xmlns:a="http://schemas.openxmlformats.org/drawingml/2006/main" xmlns:r="http://schemas.openxmlformats.org/officeDocument/2006/relationships" xmlns:p="http://schemas.openxmlformats.org/presentationml/2006/main">
   <p:cSld>
     <p:spTree>
@@ -17096,7 +17349,7 @@
 </p:sld>
 </file>
 
-<file path=ppt/slides/slide142.xml><?xml version="1.0" encoding="utf-8"?>
+<file path=ppt/slides/slide143.xml><?xml version="1.0" encoding="utf-8"?>
 <p:sld xmlns:a="http://schemas.openxmlformats.org/drawingml/2006/main" xmlns:r="http://schemas.openxmlformats.org/officeDocument/2006/relationships" xmlns:p="http://schemas.openxmlformats.org/presentationml/2006/main">
   <p:cSld>
     <p:spTree>
@@ -17233,7 +17486,7 @@
 </p:sld>
 </file>
 
-<file path=ppt/slides/slide143.xml><?xml version="1.0" encoding="utf-8"?>
+<file path=ppt/slides/slide144.xml><?xml version="1.0" encoding="utf-8"?>
 <p:sld xmlns:a="http://schemas.openxmlformats.org/drawingml/2006/main" xmlns:r="http://schemas.openxmlformats.org/officeDocument/2006/relationships" xmlns:p="http://schemas.openxmlformats.org/presentationml/2006/main">
   <p:cSld>
     <p:spTree>
@@ -17599,7 +17852,7 @@
 </p:sld>
 </file>
 
-<file path=ppt/slides/slide144.xml><?xml version="1.0" encoding="utf-8"?>
+<file path=ppt/slides/slide145.xml><?xml version="1.0" encoding="utf-8"?>
 <p:sld xmlns:a="http://schemas.openxmlformats.org/drawingml/2006/main" xmlns:r="http://schemas.openxmlformats.org/officeDocument/2006/relationships" xmlns:p="http://schemas.openxmlformats.org/presentationml/2006/main">
   <p:cSld>
     <p:spTree>
@@ -17761,7 +18014,7 @@
 </p:sld>
 </file>
 
-<file path=ppt/slides/slide145.xml><?xml version="1.0" encoding="utf-8"?>
+<file path=ppt/slides/slide146.xml><?xml version="1.0" encoding="utf-8"?>
 <p:sld xmlns:a="http://schemas.openxmlformats.org/drawingml/2006/main" xmlns:r="http://schemas.openxmlformats.org/officeDocument/2006/relationships" xmlns:p="http://schemas.openxmlformats.org/presentationml/2006/main">
   <p:cSld>
     <p:spTree>
@@ -17830,7 +18083,7 @@
 </p:sld>
 </file>
 
-<file path=ppt/slides/slide146.xml><?xml version="1.0" encoding="utf-8"?>
+<file path=ppt/slides/slide147.xml><?xml version="1.0" encoding="utf-8"?>
 <p:sld xmlns:a="http://schemas.openxmlformats.org/drawingml/2006/main" xmlns:r="http://schemas.openxmlformats.org/officeDocument/2006/relationships" xmlns:p="http://schemas.openxmlformats.org/presentationml/2006/main">
   <p:cSld>
     <p:spTree>
@@ -18026,7 +18279,7 @@
 </p:sld>
 </file>
 
-<file path=ppt/slides/slide147.xml><?xml version="1.0" encoding="utf-8"?>
+<file path=ppt/slides/slide148.xml><?xml version="1.0" encoding="utf-8"?>
 <p:sld xmlns:a="http://schemas.openxmlformats.org/drawingml/2006/main" xmlns:r="http://schemas.openxmlformats.org/officeDocument/2006/relationships" xmlns:p="http://schemas.openxmlformats.org/presentationml/2006/main">
   <p:cSld>
     <p:spTree>
@@ -18101,7 +18354,7 @@
 </p:sld>
 </file>
 
-<file path=ppt/slides/slide148.xml><?xml version="1.0" encoding="utf-8"?>
+<file path=ppt/slides/slide149.xml><?xml version="1.0" encoding="utf-8"?>
 <p:sld xmlns:a="http://schemas.openxmlformats.org/drawingml/2006/main" xmlns:r="http://schemas.openxmlformats.org/officeDocument/2006/relationships" xmlns:p="http://schemas.openxmlformats.org/presentationml/2006/main">
   <p:cSld>
     <p:spTree>
@@ -18167,75 +18420,6 @@
     <p:extLst>
       <p:ext uri="{BB962C8B-B14F-4D97-AF65-F5344CB8AC3E}">
         <p14:creationId xmlns:p14="http://schemas.microsoft.com/office/powerpoint/2010/main" val="4284460061"/>
-      </p:ext>
-    </p:extLst>
-  </p:cSld>
-  <p:clrMapOvr>
-    <a:masterClrMapping/>
-  </p:clrMapOvr>
-</p:sld>
-</file>
-
-<file path=ppt/slides/slide149.xml><?xml version="1.0" encoding="utf-8"?>
-<p:sld xmlns:a="http://schemas.openxmlformats.org/drawingml/2006/main" xmlns:r="http://schemas.openxmlformats.org/officeDocument/2006/relationships" xmlns:p="http://schemas.openxmlformats.org/presentationml/2006/main">
-  <p:cSld>
-    <p:spTree>
-      <p:nvGrpSpPr>
-        <p:cNvPr id="1" name=""/>
-        <p:cNvGrpSpPr/>
-        <p:nvPr/>
-      </p:nvGrpSpPr>
-      <p:grpSpPr>
-        <a:xfrm>
-          <a:off x="0" y="0"/>
-          <a:ext cx="0" cy="0"/>
-          <a:chOff x="0" y="0"/>
-          <a:chExt cx="0" cy="0"/>
-        </a:xfrm>
-      </p:grpSpPr>
-      <p:sp>
-        <p:nvSpPr>
-          <p:cNvPr id="2" name="Title 1">
-            <a:extLst>
-              <a:ext uri="{FF2B5EF4-FFF2-40B4-BE49-F238E27FC236}">
-                <a16:creationId xmlns:a16="http://schemas.microsoft.com/office/drawing/2014/main" id="{FC437ED4-E69D-F586-0742-5D562697F98A}"/>
-              </a:ext>
-            </a:extLst>
-          </p:cNvPr>
-          <p:cNvSpPr>
-            <a:spLocks noGrp="1"/>
-          </p:cNvSpPr>
-          <p:nvPr>
-            <p:ph type="title"/>
-          </p:nvPr>
-        </p:nvSpPr>
-        <p:spPr>
-          <a:xfrm>
-            <a:off x="919119" y="2231922"/>
-            <a:ext cx="10353762" cy="1837659"/>
-          </a:xfrm>
-        </p:spPr>
-        <p:txBody>
-          <a:bodyPr>
-            <a:normAutofit/>
-          </a:bodyPr>
-          <a:lstStyle/>
-          <a:p>
-            <a:r>
-              <a:rPr lang="en-US" sz="6000" b="1">
-                <a:solidFill>
-                  <a:srgbClr val="FF0000"/>
-                </a:solidFill>
-              </a:rPr>
-              <a:t>Type Script</a:t>
-            </a:r>
-          </a:p>
-        </p:txBody>
-      </p:sp>
-    </p:spTree>
-    <p:extLst>
-      <p:ext uri="{BB962C8B-B14F-4D97-AF65-F5344CB8AC3E}">
-        <p14:creationId xmlns:p14="http://schemas.microsoft.com/office/powerpoint/2010/main" val="385122793"/>
       </p:ext>
     </p:extLst>
   </p:cSld>
@@ -18392,6 +18576,75 @@
 </file>
 
 <file path=ppt/slides/slide150.xml><?xml version="1.0" encoding="utf-8"?>
+<p:sld xmlns:a="http://schemas.openxmlformats.org/drawingml/2006/main" xmlns:r="http://schemas.openxmlformats.org/officeDocument/2006/relationships" xmlns:p="http://schemas.openxmlformats.org/presentationml/2006/main">
+  <p:cSld>
+    <p:spTree>
+      <p:nvGrpSpPr>
+        <p:cNvPr id="1" name=""/>
+        <p:cNvGrpSpPr/>
+        <p:nvPr/>
+      </p:nvGrpSpPr>
+      <p:grpSpPr>
+        <a:xfrm>
+          <a:off x="0" y="0"/>
+          <a:ext cx="0" cy="0"/>
+          <a:chOff x="0" y="0"/>
+          <a:chExt cx="0" cy="0"/>
+        </a:xfrm>
+      </p:grpSpPr>
+      <p:sp>
+        <p:nvSpPr>
+          <p:cNvPr id="2" name="Title 1">
+            <a:extLst>
+              <a:ext uri="{FF2B5EF4-FFF2-40B4-BE49-F238E27FC236}">
+                <a16:creationId xmlns:a16="http://schemas.microsoft.com/office/drawing/2014/main" id="{FC437ED4-E69D-F586-0742-5D562697F98A}"/>
+              </a:ext>
+            </a:extLst>
+          </p:cNvPr>
+          <p:cNvSpPr>
+            <a:spLocks noGrp="1"/>
+          </p:cNvSpPr>
+          <p:nvPr>
+            <p:ph type="title"/>
+          </p:nvPr>
+        </p:nvSpPr>
+        <p:spPr>
+          <a:xfrm>
+            <a:off x="919119" y="2231922"/>
+            <a:ext cx="10353762" cy="1837659"/>
+          </a:xfrm>
+        </p:spPr>
+        <p:txBody>
+          <a:bodyPr>
+            <a:normAutofit/>
+          </a:bodyPr>
+          <a:lstStyle/>
+          <a:p>
+            <a:r>
+              <a:rPr lang="en-US" sz="6000" b="1">
+                <a:solidFill>
+                  <a:srgbClr val="FF0000"/>
+                </a:solidFill>
+              </a:rPr>
+              <a:t>Type Script</a:t>
+            </a:r>
+          </a:p>
+        </p:txBody>
+      </p:sp>
+    </p:spTree>
+    <p:extLst>
+      <p:ext uri="{BB962C8B-B14F-4D97-AF65-F5344CB8AC3E}">
+        <p14:creationId xmlns:p14="http://schemas.microsoft.com/office/powerpoint/2010/main" val="385122793"/>
+      </p:ext>
+    </p:extLst>
+  </p:cSld>
+  <p:clrMapOvr>
+    <a:masterClrMapping/>
+  </p:clrMapOvr>
+</p:sld>
+</file>
+
+<file path=ppt/slides/slide151.xml><?xml version="1.0" encoding="utf-8"?>
 <p:sld xmlns:a="http://schemas.openxmlformats.org/drawingml/2006/main" xmlns:r="http://schemas.openxmlformats.org/officeDocument/2006/relationships" xmlns:p="http://schemas.openxmlformats.org/presentationml/2006/main">
   <p:cSld>
     <p:spTree>
@@ -18606,7 +18859,7 @@
 </p:sld>
 </file>
 
-<file path=ppt/slides/slide151.xml><?xml version="1.0" encoding="utf-8"?>
+<file path=ppt/slides/slide152.xml><?xml version="1.0" encoding="utf-8"?>
 <p:sld xmlns:a="http://schemas.openxmlformats.org/drawingml/2006/main" xmlns:r="http://schemas.openxmlformats.org/officeDocument/2006/relationships" xmlns:p="http://schemas.openxmlformats.org/presentationml/2006/main">
   <p:cSld>
     <p:spTree>
@@ -18723,7 +18976,7 @@
 </p:sld>
 </file>
 
-<file path=ppt/slides/slide152.xml><?xml version="1.0" encoding="utf-8"?>
+<file path=ppt/slides/slide153.xml><?xml version="1.0" encoding="utf-8"?>
 <p:sld xmlns:a="http://schemas.openxmlformats.org/drawingml/2006/main" xmlns:r="http://schemas.openxmlformats.org/officeDocument/2006/relationships" xmlns:p="http://schemas.openxmlformats.org/presentationml/2006/main">
   <p:cSld>
     <p:spTree>
@@ -18945,7 +19198,7 @@
 </p:sld>
 </file>
 
-<file path=ppt/slides/slide153.xml><?xml version="1.0" encoding="utf-8"?>
+<file path=ppt/slides/slide154.xml><?xml version="1.0" encoding="utf-8"?>
 <p:sld xmlns:a="http://schemas.openxmlformats.org/drawingml/2006/main" xmlns:r="http://schemas.openxmlformats.org/officeDocument/2006/relationships" xmlns:p="http://schemas.openxmlformats.org/presentationml/2006/main">
   <p:cSld>
     <p:spTree>
@@ -19443,7 +19696,7 @@
 </p:sld>
 </file>
 
-<file path=ppt/slides/slide154.xml><?xml version="1.0" encoding="utf-8"?>
+<file path=ppt/slides/slide155.xml><?xml version="1.0" encoding="utf-8"?>
 <p:sld xmlns:a="http://schemas.openxmlformats.org/drawingml/2006/main" xmlns:r="http://schemas.openxmlformats.org/officeDocument/2006/relationships" xmlns:p="http://schemas.openxmlformats.org/presentationml/2006/main">
   <p:cSld>
     <p:spTree>
@@ -19705,7 +19958,7 @@
 </p:sld>
 </file>
 
-<file path=ppt/slides/slide155.xml><?xml version="1.0" encoding="utf-8"?>
+<file path=ppt/slides/slide156.xml><?xml version="1.0" encoding="utf-8"?>
 <p:sld xmlns:a="http://schemas.openxmlformats.org/drawingml/2006/main" xmlns:r="http://schemas.openxmlformats.org/officeDocument/2006/relationships" xmlns:p="http://schemas.openxmlformats.org/presentationml/2006/main">
   <p:cSld>
     <p:spTree>
@@ -19843,7 +20096,7 @@
 </p:sld>
 </file>
 
-<file path=ppt/slides/slide156.xml><?xml version="1.0" encoding="utf-8"?>
+<file path=ppt/slides/slide157.xml><?xml version="1.0" encoding="utf-8"?>
 <p:sld xmlns:a="http://schemas.openxmlformats.org/drawingml/2006/main" xmlns:r="http://schemas.openxmlformats.org/officeDocument/2006/relationships" xmlns:p="http://schemas.openxmlformats.org/presentationml/2006/main">
   <p:cSld>
     <p:spTree>
@@ -20054,7 +20307,7 @@
 </p:sld>
 </file>
 
-<file path=ppt/slides/slide157.xml><?xml version="1.0" encoding="utf-8"?>
+<file path=ppt/slides/slide158.xml><?xml version="1.0" encoding="utf-8"?>
 <p:sld xmlns:a="http://schemas.openxmlformats.org/drawingml/2006/main" xmlns:r="http://schemas.openxmlformats.org/officeDocument/2006/relationships" xmlns:p="http://schemas.openxmlformats.org/presentationml/2006/main">
   <p:cSld>
     <p:spTree>
@@ -23993,7 +24246,7 @@
           <a:p>
             <a:r>
               <a:rPr lang="en-US" sz="2000"/>
-              <a:t>The subscriber is like listener to valuw</a:t>
+              <a:t>The subscriber is like listener to value</a:t>
             </a:r>
           </a:p>
         </p:txBody>
